--- a/docs/操作ガイド.pptx
+++ b/docs/操作ガイド.pptx
@@ -144,7 +144,7 @@
           <p:cNvPr id="2" name="タイトル 1">
             <a:extLst>
               <a:ext uri="{FF2B5EF4-FFF2-40B4-BE49-F238E27FC236}">
-                <a16:creationId xmlns:a16="http://schemas.microsoft.com/office/drawing/2014/main" id="{AD2A66C3-296A-6173-6D74-AD14AC23F6CF}"/>
+                <a16:creationId xmlns:a16="http://schemas.microsoft.com/office/drawing/2014/main" id="{291BAA6E-65ED-3A67-1B36-9D772F9B4CDA}"/>
               </a:ext>
             </a:extLst>
           </p:cNvPr>
@@ -181,7 +181,7 @@
           <p:cNvPr id="3" name="字幕 2">
             <a:extLst>
               <a:ext uri="{FF2B5EF4-FFF2-40B4-BE49-F238E27FC236}">
-                <a16:creationId xmlns:a16="http://schemas.microsoft.com/office/drawing/2014/main" id="{7E09EDA7-2724-18B5-45F5-B4DB2DD76037}"/>
+                <a16:creationId xmlns:a16="http://schemas.microsoft.com/office/drawing/2014/main" id="{6A6400D4-5F5A-93B2-6C2C-343F6DD09702}"/>
               </a:ext>
             </a:extLst>
           </p:cNvPr>
@@ -251,7 +251,7 @@
           <p:cNvPr id="4" name="日付プレースホルダー 3">
             <a:extLst>
               <a:ext uri="{FF2B5EF4-FFF2-40B4-BE49-F238E27FC236}">
-                <a16:creationId xmlns:a16="http://schemas.microsoft.com/office/drawing/2014/main" id="{3CCBDF6A-C18F-D7A9-EFD8-3DD7D44D6888}"/>
+                <a16:creationId xmlns:a16="http://schemas.microsoft.com/office/drawing/2014/main" id="{217DE81B-F928-43D4-8B14-7C726B2572EA}"/>
               </a:ext>
             </a:extLst>
           </p:cNvPr>
@@ -267,7 +267,7 @@
           <a:bodyPr/>
           <a:lstStyle/>
           <a:p>
-            <a:fld id="{A9E021C6-75A6-451B-B277-8AEC9CE23197}" type="datetimeFigureOut">
+            <a:fld id="{328886D3-06D5-4435-B2EA-390E8383DB1E}" type="datetimeFigureOut">
               <a:rPr kumimoji="1" lang="ja-JP" altLang="en-US" smtClean="0"/>
               <a:t>2026/8/28</a:t>
             </a:fld>
@@ -280,7 +280,7 @@
           <p:cNvPr id="5" name="フッター プレースホルダー 4">
             <a:extLst>
               <a:ext uri="{FF2B5EF4-FFF2-40B4-BE49-F238E27FC236}">
-                <a16:creationId xmlns:a16="http://schemas.microsoft.com/office/drawing/2014/main" id="{36A26750-2DCE-630B-2743-DFD1FB961923}"/>
+                <a16:creationId xmlns:a16="http://schemas.microsoft.com/office/drawing/2014/main" id="{BB5642AD-B283-ADAD-5907-A19E765BFAEE}"/>
               </a:ext>
             </a:extLst>
           </p:cNvPr>
@@ -305,7 +305,7 @@
           <p:cNvPr id="6" name="スライド番号プレースホルダー 5">
             <a:extLst>
               <a:ext uri="{FF2B5EF4-FFF2-40B4-BE49-F238E27FC236}">
-                <a16:creationId xmlns:a16="http://schemas.microsoft.com/office/drawing/2014/main" id="{8A519662-ABAD-E765-330A-B1739F60D63F}"/>
+                <a16:creationId xmlns:a16="http://schemas.microsoft.com/office/drawing/2014/main" id="{E62734F2-8FD0-B85A-C6C5-D124CB63673C}"/>
               </a:ext>
             </a:extLst>
           </p:cNvPr>
@@ -321,7 +321,7 @@
           <a:bodyPr/>
           <a:lstStyle/>
           <a:p>
-            <a:fld id="{E5CD43DB-A420-4458-8812-EB72162C1993}" type="slidenum">
+            <a:fld id="{D4F35719-C832-4345-91C1-3D89956FDE1C}" type="slidenum">
               <a:rPr kumimoji="1" lang="ja-JP" altLang="en-US" smtClean="0"/>
               <a:t>‹#›</a:t>
             </a:fld>
@@ -332,7 +332,7 @@
     </p:spTree>
     <p:extLst>
       <p:ext uri="{BB962C8B-B14F-4D97-AF65-F5344CB8AC3E}">
-        <p14:creationId xmlns:p14="http://schemas.microsoft.com/office/powerpoint/2010/main" val="2788808286"/>
+        <p14:creationId xmlns:p14="http://schemas.microsoft.com/office/powerpoint/2010/main" val="1574885440"/>
       </p:ext>
     </p:extLst>
   </p:cSld>
@@ -364,7 +364,7 @@
           <p:cNvPr id="2" name="タイトル 1">
             <a:extLst>
               <a:ext uri="{FF2B5EF4-FFF2-40B4-BE49-F238E27FC236}">
-                <a16:creationId xmlns:a16="http://schemas.microsoft.com/office/drawing/2014/main" id="{C36A88D1-4830-26CD-1AD3-86B9DAF0D954}"/>
+                <a16:creationId xmlns:a16="http://schemas.microsoft.com/office/drawing/2014/main" id="{2C864C32-6666-5BC3-E680-EC04C97624EA}"/>
               </a:ext>
             </a:extLst>
           </p:cNvPr>
@@ -392,7 +392,7 @@
           <p:cNvPr id="3" name="縦書きテキスト プレースホルダー 2">
             <a:extLst>
               <a:ext uri="{FF2B5EF4-FFF2-40B4-BE49-F238E27FC236}">
-                <a16:creationId xmlns:a16="http://schemas.microsoft.com/office/drawing/2014/main" id="{268D9007-686E-5087-43C5-51C5F77560AF}"/>
+                <a16:creationId xmlns:a16="http://schemas.microsoft.com/office/drawing/2014/main" id="{A6E5E7EA-17C4-EC71-F986-93ADD721C25B}"/>
               </a:ext>
             </a:extLst>
           </p:cNvPr>
@@ -481,7 +481,7 @@
           <p:cNvPr id="4" name="日付プレースホルダー 3">
             <a:extLst>
               <a:ext uri="{FF2B5EF4-FFF2-40B4-BE49-F238E27FC236}">
-                <a16:creationId xmlns:a16="http://schemas.microsoft.com/office/drawing/2014/main" id="{CEDB0D9F-742D-E4C2-0F9B-30018380129C}"/>
+                <a16:creationId xmlns:a16="http://schemas.microsoft.com/office/drawing/2014/main" id="{105EEC4E-6AEC-608A-4BCD-419F22FCFD8A}"/>
               </a:ext>
             </a:extLst>
           </p:cNvPr>
@@ -497,7 +497,7 @@
           <a:bodyPr/>
           <a:lstStyle/>
           <a:p>
-            <a:fld id="{A9E021C6-75A6-451B-B277-8AEC9CE23197}" type="datetimeFigureOut">
+            <a:fld id="{328886D3-06D5-4435-B2EA-390E8383DB1E}" type="datetimeFigureOut">
               <a:rPr kumimoji="1" lang="ja-JP" altLang="en-US" smtClean="0"/>
               <a:t>2026/8/28</a:t>
             </a:fld>
@@ -510,7 +510,7 @@
           <p:cNvPr id="5" name="フッター プレースホルダー 4">
             <a:extLst>
               <a:ext uri="{FF2B5EF4-FFF2-40B4-BE49-F238E27FC236}">
-                <a16:creationId xmlns:a16="http://schemas.microsoft.com/office/drawing/2014/main" id="{0D77C1C4-0E33-333D-0B5F-A8B27236C9D3}"/>
+                <a16:creationId xmlns:a16="http://schemas.microsoft.com/office/drawing/2014/main" id="{5776BE82-D13A-3A67-599F-A00F3FEB2B4E}"/>
               </a:ext>
             </a:extLst>
           </p:cNvPr>
@@ -535,7 +535,7 @@
           <p:cNvPr id="6" name="スライド番号プレースホルダー 5">
             <a:extLst>
               <a:ext uri="{FF2B5EF4-FFF2-40B4-BE49-F238E27FC236}">
-                <a16:creationId xmlns:a16="http://schemas.microsoft.com/office/drawing/2014/main" id="{186B2CFF-40C1-81B6-DCC5-BDE0ABD66036}"/>
+                <a16:creationId xmlns:a16="http://schemas.microsoft.com/office/drawing/2014/main" id="{9C6874B0-06B1-6A00-9D4C-6292FE912CA1}"/>
               </a:ext>
             </a:extLst>
           </p:cNvPr>
@@ -551,7 +551,7 @@
           <a:bodyPr/>
           <a:lstStyle/>
           <a:p>
-            <a:fld id="{E5CD43DB-A420-4458-8812-EB72162C1993}" type="slidenum">
+            <a:fld id="{D4F35719-C832-4345-91C1-3D89956FDE1C}" type="slidenum">
               <a:rPr kumimoji="1" lang="ja-JP" altLang="en-US" smtClean="0"/>
               <a:t>‹#›</a:t>
             </a:fld>
@@ -562,7 +562,7 @@
     </p:spTree>
     <p:extLst>
       <p:ext uri="{BB962C8B-B14F-4D97-AF65-F5344CB8AC3E}">
-        <p14:creationId xmlns:p14="http://schemas.microsoft.com/office/powerpoint/2010/main" val="2985000321"/>
+        <p14:creationId xmlns:p14="http://schemas.microsoft.com/office/powerpoint/2010/main" val="227368854"/>
       </p:ext>
     </p:extLst>
   </p:cSld>
@@ -594,7 +594,7 @@
           <p:cNvPr id="2" name="縦書きタイトル 1">
             <a:extLst>
               <a:ext uri="{FF2B5EF4-FFF2-40B4-BE49-F238E27FC236}">
-                <a16:creationId xmlns:a16="http://schemas.microsoft.com/office/drawing/2014/main" id="{C91EEB29-B122-ED5F-FACF-1BC91EE19514}"/>
+                <a16:creationId xmlns:a16="http://schemas.microsoft.com/office/drawing/2014/main" id="{CBE9D214-C1CE-A86E-3C42-72DAB043367F}"/>
               </a:ext>
             </a:extLst>
           </p:cNvPr>
@@ -627,7 +627,7 @@
           <p:cNvPr id="3" name="縦書きテキスト プレースホルダー 2">
             <a:extLst>
               <a:ext uri="{FF2B5EF4-FFF2-40B4-BE49-F238E27FC236}">
-                <a16:creationId xmlns:a16="http://schemas.microsoft.com/office/drawing/2014/main" id="{02982035-885F-12CD-4588-47AF7A0FE79C}"/>
+                <a16:creationId xmlns:a16="http://schemas.microsoft.com/office/drawing/2014/main" id="{C14BBBC7-589A-1DB8-71F3-9EC3101A1EE1}"/>
               </a:ext>
             </a:extLst>
           </p:cNvPr>
@@ -721,7 +721,7 @@
           <p:cNvPr id="4" name="日付プレースホルダー 3">
             <a:extLst>
               <a:ext uri="{FF2B5EF4-FFF2-40B4-BE49-F238E27FC236}">
-                <a16:creationId xmlns:a16="http://schemas.microsoft.com/office/drawing/2014/main" id="{A171ED57-BBF2-0A1A-3019-5555840E9BAD}"/>
+                <a16:creationId xmlns:a16="http://schemas.microsoft.com/office/drawing/2014/main" id="{6A476F34-8D9D-F1C9-89CD-0C641D356858}"/>
               </a:ext>
             </a:extLst>
           </p:cNvPr>
@@ -737,7 +737,7 @@
           <a:bodyPr/>
           <a:lstStyle/>
           <a:p>
-            <a:fld id="{A9E021C6-75A6-451B-B277-8AEC9CE23197}" type="datetimeFigureOut">
+            <a:fld id="{328886D3-06D5-4435-B2EA-390E8383DB1E}" type="datetimeFigureOut">
               <a:rPr kumimoji="1" lang="ja-JP" altLang="en-US" smtClean="0"/>
               <a:t>2026/8/28</a:t>
             </a:fld>
@@ -750,7 +750,7 @@
           <p:cNvPr id="5" name="フッター プレースホルダー 4">
             <a:extLst>
               <a:ext uri="{FF2B5EF4-FFF2-40B4-BE49-F238E27FC236}">
-                <a16:creationId xmlns:a16="http://schemas.microsoft.com/office/drawing/2014/main" id="{082615A7-B0FD-E97F-04FA-2A3442A54576}"/>
+                <a16:creationId xmlns:a16="http://schemas.microsoft.com/office/drawing/2014/main" id="{1F5697C0-0934-FBDF-02E8-35F4F8AEBF61}"/>
               </a:ext>
             </a:extLst>
           </p:cNvPr>
@@ -775,7 +775,7 @@
           <p:cNvPr id="6" name="スライド番号プレースホルダー 5">
             <a:extLst>
               <a:ext uri="{FF2B5EF4-FFF2-40B4-BE49-F238E27FC236}">
-                <a16:creationId xmlns:a16="http://schemas.microsoft.com/office/drawing/2014/main" id="{CB03B0BE-7F33-FA15-C5B5-7BFB4B0A15D4}"/>
+                <a16:creationId xmlns:a16="http://schemas.microsoft.com/office/drawing/2014/main" id="{3EAC89EE-DB3D-57D5-4901-6956DA02821A}"/>
               </a:ext>
             </a:extLst>
           </p:cNvPr>
@@ -791,7 +791,7 @@
           <a:bodyPr/>
           <a:lstStyle/>
           <a:p>
-            <a:fld id="{E5CD43DB-A420-4458-8812-EB72162C1993}" type="slidenum">
+            <a:fld id="{D4F35719-C832-4345-91C1-3D89956FDE1C}" type="slidenum">
               <a:rPr kumimoji="1" lang="ja-JP" altLang="en-US" smtClean="0"/>
               <a:t>‹#›</a:t>
             </a:fld>
@@ -802,7 +802,7 @@
     </p:spTree>
     <p:extLst>
       <p:ext uri="{BB962C8B-B14F-4D97-AF65-F5344CB8AC3E}">
-        <p14:creationId xmlns:p14="http://schemas.microsoft.com/office/powerpoint/2010/main" val="2047803637"/>
+        <p14:creationId xmlns:p14="http://schemas.microsoft.com/office/powerpoint/2010/main" val="1683315678"/>
       </p:ext>
     </p:extLst>
   </p:cSld>
@@ -834,7 +834,7 @@
           <p:cNvPr id="2" name="タイトル 1">
             <a:extLst>
               <a:ext uri="{FF2B5EF4-FFF2-40B4-BE49-F238E27FC236}">
-                <a16:creationId xmlns:a16="http://schemas.microsoft.com/office/drawing/2014/main" id="{D1E2A80C-6086-92FC-1401-B6E90B2973F5}"/>
+                <a16:creationId xmlns:a16="http://schemas.microsoft.com/office/drawing/2014/main" id="{3F6A1F80-3E58-F8E6-8FCE-EF59C281208E}"/>
               </a:ext>
             </a:extLst>
           </p:cNvPr>
@@ -862,7 +862,7 @@
           <p:cNvPr id="3" name="コンテンツ プレースホルダー 2">
             <a:extLst>
               <a:ext uri="{FF2B5EF4-FFF2-40B4-BE49-F238E27FC236}">
-                <a16:creationId xmlns:a16="http://schemas.microsoft.com/office/drawing/2014/main" id="{AFBA3888-65F2-2758-41A0-9A151203B711}"/>
+                <a16:creationId xmlns:a16="http://schemas.microsoft.com/office/drawing/2014/main" id="{4A828EB7-7F01-9CB8-CCAE-2FB52952BFF0}"/>
               </a:ext>
             </a:extLst>
           </p:cNvPr>
@@ -951,7 +951,7 @@
           <p:cNvPr id="4" name="日付プレースホルダー 3">
             <a:extLst>
               <a:ext uri="{FF2B5EF4-FFF2-40B4-BE49-F238E27FC236}">
-                <a16:creationId xmlns:a16="http://schemas.microsoft.com/office/drawing/2014/main" id="{488BB236-8178-8931-5B63-77DF36A5A988}"/>
+                <a16:creationId xmlns:a16="http://schemas.microsoft.com/office/drawing/2014/main" id="{AFEFEDA0-FC49-99D4-8DC5-39DD57758F90}"/>
               </a:ext>
             </a:extLst>
           </p:cNvPr>
@@ -967,7 +967,7 @@
           <a:bodyPr/>
           <a:lstStyle/>
           <a:p>
-            <a:fld id="{A9E021C6-75A6-451B-B277-8AEC9CE23197}" type="datetimeFigureOut">
+            <a:fld id="{328886D3-06D5-4435-B2EA-390E8383DB1E}" type="datetimeFigureOut">
               <a:rPr kumimoji="1" lang="ja-JP" altLang="en-US" smtClean="0"/>
               <a:t>2026/8/28</a:t>
             </a:fld>
@@ -980,7 +980,7 @@
           <p:cNvPr id="5" name="フッター プレースホルダー 4">
             <a:extLst>
               <a:ext uri="{FF2B5EF4-FFF2-40B4-BE49-F238E27FC236}">
-                <a16:creationId xmlns:a16="http://schemas.microsoft.com/office/drawing/2014/main" id="{2E6AFD32-BA40-EB21-5CB6-A88B0DBF55CC}"/>
+                <a16:creationId xmlns:a16="http://schemas.microsoft.com/office/drawing/2014/main" id="{9BF64DC0-89FC-4F47-2492-5F8E9306B805}"/>
               </a:ext>
             </a:extLst>
           </p:cNvPr>
@@ -1005,7 +1005,7 @@
           <p:cNvPr id="6" name="スライド番号プレースホルダー 5">
             <a:extLst>
               <a:ext uri="{FF2B5EF4-FFF2-40B4-BE49-F238E27FC236}">
-                <a16:creationId xmlns:a16="http://schemas.microsoft.com/office/drawing/2014/main" id="{FDE233D0-DC41-D1BD-D9EB-D39BAB8F561C}"/>
+                <a16:creationId xmlns:a16="http://schemas.microsoft.com/office/drawing/2014/main" id="{27AD5EBF-0E67-3545-7986-28B3F267EC20}"/>
               </a:ext>
             </a:extLst>
           </p:cNvPr>
@@ -1021,7 +1021,7 @@
           <a:bodyPr/>
           <a:lstStyle/>
           <a:p>
-            <a:fld id="{E5CD43DB-A420-4458-8812-EB72162C1993}" type="slidenum">
+            <a:fld id="{D4F35719-C832-4345-91C1-3D89956FDE1C}" type="slidenum">
               <a:rPr kumimoji="1" lang="ja-JP" altLang="en-US" smtClean="0"/>
               <a:t>‹#›</a:t>
             </a:fld>
@@ -1032,7 +1032,7 @@
     </p:spTree>
     <p:extLst>
       <p:ext uri="{BB962C8B-B14F-4D97-AF65-F5344CB8AC3E}">
-        <p14:creationId xmlns:p14="http://schemas.microsoft.com/office/powerpoint/2010/main" val="1549692194"/>
+        <p14:creationId xmlns:p14="http://schemas.microsoft.com/office/powerpoint/2010/main" val="1980561135"/>
       </p:ext>
     </p:extLst>
   </p:cSld>
@@ -1064,7 +1064,7 @@
           <p:cNvPr id="2" name="タイトル 1">
             <a:extLst>
               <a:ext uri="{FF2B5EF4-FFF2-40B4-BE49-F238E27FC236}">
-                <a16:creationId xmlns:a16="http://schemas.microsoft.com/office/drawing/2014/main" id="{35F234B9-DF50-D2D6-0B77-61503B990C91}"/>
+                <a16:creationId xmlns:a16="http://schemas.microsoft.com/office/drawing/2014/main" id="{3C431140-E4E9-4571-BEE8-FF6B118134DB}"/>
               </a:ext>
             </a:extLst>
           </p:cNvPr>
@@ -1101,7 +1101,7 @@
           <p:cNvPr id="3" name="テキスト プレースホルダー 2">
             <a:extLst>
               <a:ext uri="{FF2B5EF4-FFF2-40B4-BE49-F238E27FC236}">
-                <a16:creationId xmlns:a16="http://schemas.microsoft.com/office/drawing/2014/main" id="{173C499D-EF5E-ECBB-3ED8-F2FA188CCD90}"/>
+                <a16:creationId xmlns:a16="http://schemas.microsoft.com/office/drawing/2014/main" id="{3B8E41B4-E74C-F236-C4DD-85462371BEC5}"/>
               </a:ext>
             </a:extLst>
           </p:cNvPr>
@@ -1226,7 +1226,7 @@
           <p:cNvPr id="4" name="日付プレースホルダー 3">
             <a:extLst>
               <a:ext uri="{FF2B5EF4-FFF2-40B4-BE49-F238E27FC236}">
-                <a16:creationId xmlns:a16="http://schemas.microsoft.com/office/drawing/2014/main" id="{D81428FA-332C-57D9-6DCB-731B57D55F49}"/>
+                <a16:creationId xmlns:a16="http://schemas.microsoft.com/office/drawing/2014/main" id="{63F2C2B9-627B-93DA-BFE5-929287C9392D}"/>
               </a:ext>
             </a:extLst>
           </p:cNvPr>
@@ -1242,7 +1242,7 @@
           <a:bodyPr/>
           <a:lstStyle/>
           <a:p>
-            <a:fld id="{A9E021C6-75A6-451B-B277-8AEC9CE23197}" type="datetimeFigureOut">
+            <a:fld id="{328886D3-06D5-4435-B2EA-390E8383DB1E}" type="datetimeFigureOut">
               <a:rPr kumimoji="1" lang="ja-JP" altLang="en-US" smtClean="0"/>
               <a:t>2026/8/28</a:t>
             </a:fld>
@@ -1255,7 +1255,7 @@
           <p:cNvPr id="5" name="フッター プレースホルダー 4">
             <a:extLst>
               <a:ext uri="{FF2B5EF4-FFF2-40B4-BE49-F238E27FC236}">
-                <a16:creationId xmlns:a16="http://schemas.microsoft.com/office/drawing/2014/main" id="{BB24323F-59A3-120A-F80D-F4503F8893AF}"/>
+                <a16:creationId xmlns:a16="http://schemas.microsoft.com/office/drawing/2014/main" id="{EC341254-62F6-BE61-233F-9A40D78D37AA}"/>
               </a:ext>
             </a:extLst>
           </p:cNvPr>
@@ -1280,7 +1280,7 @@
           <p:cNvPr id="6" name="スライド番号プレースホルダー 5">
             <a:extLst>
               <a:ext uri="{FF2B5EF4-FFF2-40B4-BE49-F238E27FC236}">
-                <a16:creationId xmlns:a16="http://schemas.microsoft.com/office/drawing/2014/main" id="{96EDFED2-D6A5-F7A4-9EFA-116AD635B239}"/>
+                <a16:creationId xmlns:a16="http://schemas.microsoft.com/office/drawing/2014/main" id="{5BDB1AF6-06DF-9878-8523-0D179B7F7C63}"/>
               </a:ext>
             </a:extLst>
           </p:cNvPr>
@@ -1296,7 +1296,7 @@
           <a:bodyPr/>
           <a:lstStyle/>
           <a:p>
-            <a:fld id="{E5CD43DB-A420-4458-8812-EB72162C1993}" type="slidenum">
+            <a:fld id="{D4F35719-C832-4345-91C1-3D89956FDE1C}" type="slidenum">
               <a:rPr kumimoji="1" lang="ja-JP" altLang="en-US" smtClean="0"/>
               <a:t>‹#›</a:t>
             </a:fld>
@@ -1307,7 +1307,7 @@
     </p:spTree>
     <p:extLst>
       <p:ext uri="{BB962C8B-B14F-4D97-AF65-F5344CB8AC3E}">
-        <p14:creationId xmlns:p14="http://schemas.microsoft.com/office/powerpoint/2010/main" val="1230916515"/>
+        <p14:creationId xmlns:p14="http://schemas.microsoft.com/office/powerpoint/2010/main" val="3797143713"/>
       </p:ext>
     </p:extLst>
   </p:cSld>
@@ -1339,7 +1339,7 @@
           <p:cNvPr id="2" name="タイトル 1">
             <a:extLst>
               <a:ext uri="{FF2B5EF4-FFF2-40B4-BE49-F238E27FC236}">
-                <a16:creationId xmlns:a16="http://schemas.microsoft.com/office/drawing/2014/main" id="{9BC4324F-04C0-4480-2B0C-CD63225A0FCD}"/>
+                <a16:creationId xmlns:a16="http://schemas.microsoft.com/office/drawing/2014/main" id="{0F498AB4-A277-9BF6-1078-F89416489CA1}"/>
               </a:ext>
             </a:extLst>
           </p:cNvPr>
@@ -1367,7 +1367,7 @@
           <p:cNvPr id="3" name="コンテンツ プレースホルダー 2">
             <a:extLst>
               <a:ext uri="{FF2B5EF4-FFF2-40B4-BE49-F238E27FC236}">
-                <a16:creationId xmlns:a16="http://schemas.microsoft.com/office/drawing/2014/main" id="{66BF2654-390F-3271-AB23-13058D3F46F5}"/>
+                <a16:creationId xmlns:a16="http://schemas.microsoft.com/office/drawing/2014/main" id="{DD89172A-0FAB-4E30-CCDC-9A7476AA6F78}"/>
               </a:ext>
             </a:extLst>
           </p:cNvPr>
@@ -1461,7 +1461,7 @@
           <p:cNvPr id="4" name="コンテンツ プレースホルダー 3">
             <a:extLst>
               <a:ext uri="{FF2B5EF4-FFF2-40B4-BE49-F238E27FC236}">
-                <a16:creationId xmlns:a16="http://schemas.microsoft.com/office/drawing/2014/main" id="{EA2A3E9A-B027-07C8-7E44-53ABB01D0286}"/>
+                <a16:creationId xmlns:a16="http://schemas.microsoft.com/office/drawing/2014/main" id="{46CA823B-9128-BE58-CE61-A3C95C4383B3}"/>
               </a:ext>
             </a:extLst>
           </p:cNvPr>
@@ -1555,7 +1555,7 @@
           <p:cNvPr id="5" name="日付プレースホルダー 4">
             <a:extLst>
               <a:ext uri="{FF2B5EF4-FFF2-40B4-BE49-F238E27FC236}">
-                <a16:creationId xmlns:a16="http://schemas.microsoft.com/office/drawing/2014/main" id="{00D29550-3531-2500-6E34-99EF6EA3CB30}"/>
+                <a16:creationId xmlns:a16="http://schemas.microsoft.com/office/drawing/2014/main" id="{0EF0CE2B-FCEE-8FFF-1F10-F77A69108BDD}"/>
               </a:ext>
             </a:extLst>
           </p:cNvPr>
@@ -1571,7 +1571,7 @@
           <a:bodyPr/>
           <a:lstStyle/>
           <a:p>
-            <a:fld id="{A9E021C6-75A6-451B-B277-8AEC9CE23197}" type="datetimeFigureOut">
+            <a:fld id="{328886D3-06D5-4435-B2EA-390E8383DB1E}" type="datetimeFigureOut">
               <a:rPr kumimoji="1" lang="ja-JP" altLang="en-US" smtClean="0"/>
               <a:t>2026/8/28</a:t>
             </a:fld>
@@ -1584,7 +1584,7 @@
           <p:cNvPr id="6" name="フッター プレースホルダー 5">
             <a:extLst>
               <a:ext uri="{FF2B5EF4-FFF2-40B4-BE49-F238E27FC236}">
-                <a16:creationId xmlns:a16="http://schemas.microsoft.com/office/drawing/2014/main" id="{F8C6E19D-F0A2-1C44-2590-240ADA993895}"/>
+                <a16:creationId xmlns:a16="http://schemas.microsoft.com/office/drawing/2014/main" id="{C477055F-8444-0748-F9D3-09954C01D249}"/>
               </a:ext>
             </a:extLst>
           </p:cNvPr>
@@ -1609,7 +1609,7 @@
           <p:cNvPr id="7" name="スライド番号プレースホルダー 6">
             <a:extLst>
               <a:ext uri="{FF2B5EF4-FFF2-40B4-BE49-F238E27FC236}">
-                <a16:creationId xmlns:a16="http://schemas.microsoft.com/office/drawing/2014/main" id="{11DCA457-C51F-918E-F9E1-D3BD126F82D1}"/>
+                <a16:creationId xmlns:a16="http://schemas.microsoft.com/office/drawing/2014/main" id="{AE6864A8-1EA8-A9D5-C4EE-97D82D4AABEF}"/>
               </a:ext>
             </a:extLst>
           </p:cNvPr>
@@ -1625,7 +1625,7 @@
           <a:bodyPr/>
           <a:lstStyle/>
           <a:p>
-            <a:fld id="{E5CD43DB-A420-4458-8812-EB72162C1993}" type="slidenum">
+            <a:fld id="{D4F35719-C832-4345-91C1-3D89956FDE1C}" type="slidenum">
               <a:rPr kumimoji="1" lang="ja-JP" altLang="en-US" smtClean="0"/>
               <a:t>‹#›</a:t>
             </a:fld>
@@ -1636,7 +1636,7 @@
     </p:spTree>
     <p:extLst>
       <p:ext uri="{BB962C8B-B14F-4D97-AF65-F5344CB8AC3E}">
-        <p14:creationId xmlns:p14="http://schemas.microsoft.com/office/powerpoint/2010/main" val="2350060152"/>
+        <p14:creationId xmlns:p14="http://schemas.microsoft.com/office/powerpoint/2010/main" val="2049307645"/>
       </p:ext>
     </p:extLst>
   </p:cSld>
@@ -1668,7 +1668,7 @@
           <p:cNvPr id="2" name="タイトル 1">
             <a:extLst>
               <a:ext uri="{FF2B5EF4-FFF2-40B4-BE49-F238E27FC236}">
-                <a16:creationId xmlns:a16="http://schemas.microsoft.com/office/drawing/2014/main" id="{72E22726-D39D-61C2-6EEE-A4E360BAB7E6}"/>
+                <a16:creationId xmlns:a16="http://schemas.microsoft.com/office/drawing/2014/main" id="{1E4A2016-C040-F17A-FF02-CDE1859022C4}"/>
               </a:ext>
             </a:extLst>
           </p:cNvPr>
@@ -1701,7 +1701,7 @@
           <p:cNvPr id="3" name="テキスト プレースホルダー 2">
             <a:extLst>
               <a:ext uri="{FF2B5EF4-FFF2-40B4-BE49-F238E27FC236}">
-                <a16:creationId xmlns:a16="http://schemas.microsoft.com/office/drawing/2014/main" id="{87CF51A7-4624-6D1D-5C77-B6F2BFEC34FF}"/>
+                <a16:creationId xmlns:a16="http://schemas.microsoft.com/office/drawing/2014/main" id="{77C7C812-6F58-1FC7-0425-89BDF5289C9C}"/>
               </a:ext>
             </a:extLst>
           </p:cNvPr>
@@ -1772,7 +1772,7 @@
           <p:cNvPr id="4" name="コンテンツ プレースホルダー 3">
             <a:extLst>
               <a:ext uri="{FF2B5EF4-FFF2-40B4-BE49-F238E27FC236}">
-                <a16:creationId xmlns:a16="http://schemas.microsoft.com/office/drawing/2014/main" id="{E40636C5-8F56-307E-BA59-C6372E21AAEB}"/>
+                <a16:creationId xmlns:a16="http://schemas.microsoft.com/office/drawing/2014/main" id="{C9A58550-CABA-D8A0-C776-A7B59B885F5A}"/>
               </a:ext>
             </a:extLst>
           </p:cNvPr>
@@ -1866,7 +1866,7 @@
           <p:cNvPr id="5" name="テキスト プレースホルダー 4">
             <a:extLst>
               <a:ext uri="{FF2B5EF4-FFF2-40B4-BE49-F238E27FC236}">
-                <a16:creationId xmlns:a16="http://schemas.microsoft.com/office/drawing/2014/main" id="{59C28149-FD86-5ACA-CC8A-362FA2830684}"/>
+                <a16:creationId xmlns:a16="http://schemas.microsoft.com/office/drawing/2014/main" id="{1ED8571F-E998-DC3D-2B90-4265CBE6137F}"/>
               </a:ext>
             </a:extLst>
           </p:cNvPr>
@@ -1937,7 +1937,7 @@
           <p:cNvPr id="6" name="コンテンツ プレースホルダー 5">
             <a:extLst>
               <a:ext uri="{FF2B5EF4-FFF2-40B4-BE49-F238E27FC236}">
-                <a16:creationId xmlns:a16="http://schemas.microsoft.com/office/drawing/2014/main" id="{D63845B4-A117-657E-EDA2-9096CA59B50B}"/>
+                <a16:creationId xmlns:a16="http://schemas.microsoft.com/office/drawing/2014/main" id="{D568FF13-D31B-6EF2-F6B1-32AA4B455CE0}"/>
               </a:ext>
             </a:extLst>
           </p:cNvPr>
@@ -2031,7 +2031,7 @@
           <p:cNvPr id="7" name="日付プレースホルダー 6">
             <a:extLst>
               <a:ext uri="{FF2B5EF4-FFF2-40B4-BE49-F238E27FC236}">
-                <a16:creationId xmlns:a16="http://schemas.microsoft.com/office/drawing/2014/main" id="{BF43C340-D7CF-F1F9-9B6B-3CD3E0C1588F}"/>
+                <a16:creationId xmlns:a16="http://schemas.microsoft.com/office/drawing/2014/main" id="{0BDBCA75-B22C-B2A2-FCEB-4C077A57285A}"/>
               </a:ext>
             </a:extLst>
           </p:cNvPr>
@@ -2047,7 +2047,7 @@
           <a:bodyPr/>
           <a:lstStyle/>
           <a:p>
-            <a:fld id="{A9E021C6-75A6-451B-B277-8AEC9CE23197}" type="datetimeFigureOut">
+            <a:fld id="{328886D3-06D5-4435-B2EA-390E8383DB1E}" type="datetimeFigureOut">
               <a:rPr kumimoji="1" lang="ja-JP" altLang="en-US" smtClean="0"/>
               <a:t>2026/8/28</a:t>
             </a:fld>
@@ -2060,7 +2060,7 @@
           <p:cNvPr id="8" name="フッター プレースホルダー 7">
             <a:extLst>
               <a:ext uri="{FF2B5EF4-FFF2-40B4-BE49-F238E27FC236}">
-                <a16:creationId xmlns:a16="http://schemas.microsoft.com/office/drawing/2014/main" id="{4201E7CD-F1EB-A334-23E0-19FB12933785}"/>
+                <a16:creationId xmlns:a16="http://schemas.microsoft.com/office/drawing/2014/main" id="{0927D8E1-6B5A-686B-9FF5-F37A4D132D09}"/>
               </a:ext>
             </a:extLst>
           </p:cNvPr>
@@ -2085,7 +2085,7 @@
           <p:cNvPr id="9" name="スライド番号プレースホルダー 8">
             <a:extLst>
               <a:ext uri="{FF2B5EF4-FFF2-40B4-BE49-F238E27FC236}">
-                <a16:creationId xmlns:a16="http://schemas.microsoft.com/office/drawing/2014/main" id="{C54E98CA-3B5E-95BB-CE30-261FA1951B68}"/>
+                <a16:creationId xmlns:a16="http://schemas.microsoft.com/office/drawing/2014/main" id="{54078101-8383-956C-37F5-8FC57A4DCFE0}"/>
               </a:ext>
             </a:extLst>
           </p:cNvPr>
@@ -2101,7 +2101,7 @@
           <a:bodyPr/>
           <a:lstStyle/>
           <a:p>
-            <a:fld id="{E5CD43DB-A420-4458-8812-EB72162C1993}" type="slidenum">
+            <a:fld id="{D4F35719-C832-4345-91C1-3D89956FDE1C}" type="slidenum">
               <a:rPr kumimoji="1" lang="ja-JP" altLang="en-US" smtClean="0"/>
               <a:t>‹#›</a:t>
             </a:fld>
@@ -2112,7 +2112,7 @@
     </p:spTree>
     <p:extLst>
       <p:ext uri="{BB962C8B-B14F-4D97-AF65-F5344CB8AC3E}">
-        <p14:creationId xmlns:p14="http://schemas.microsoft.com/office/powerpoint/2010/main" val="923080149"/>
+        <p14:creationId xmlns:p14="http://schemas.microsoft.com/office/powerpoint/2010/main" val="1164028198"/>
       </p:ext>
     </p:extLst>
   </p:cSld>
@@ -2144,7 +2144,7 @@
           <p:cNvPr id="2" name="タイトル 1">
             <a:extLst>
               <a:ext uri="{FF2B5EF4-FFF2-40B4-BE49-F238E27FC236}">
-                <a16:creationId xmlns:a16="http://schemas.microsoft.com/office/drawing/2014/main" id="{B1B83A1E-2162-E40D-0D3F-B27715F57211}"/>
+                <a16:creationId xmlns:a16="http://schemas.microsoft.com/office/drawing/2014/main" id="{B77C9CFA-CF86-2CD5-3B1E-FAA8B166BEBF}"/>
               </a:ext>
             </a:extLst>
           </p:cNvPr>
@@ -2172,7 +2172,7 @@
           <p:cNvPr id="3" name="日付プレースホルダー 2">
             <a:extLst>
               <a:ext uri="{FF2B5EF4-FFF2-40B4-BE49-F238E27FC236}">
-                <a16:creationId xmlns:a16="http://schemas.microsoft.com/office/drawing/2014/main" id="{2DC1DB0F-4EE4-CCC2-18DB-EEC689AA923D}"/>
+                <a16:creationId xmlns:a16="http://schemas.microsoft.com/office/drawing/2014/main" id="{D6D2A0C4-2BD0-1DB9-2B2A-683718D49AE2}"/>
               </a:ext>
             </a:extLst>
           </p:cNvPr>
@@ -2188,7 +2188,7 @@
           <a:bodyPr/>
           <a:lstStyle/>
           <a:p>
-            <a:fld id="{A9E021C6-75A6-451B-B277-8AEC9CE23197}" type="datetimeFigureOut">
+            <a:fld id="{328886D3-06D5-4435-B2EA-390E8383DB1E}" type="datetimeFigureOut">
               <a:rPr kumimoji="1" lang="ja-JP" altLang="en-US" smtClean="0"/>
               <a:t>2026/8/28</a:t>
             </a:fld>
@@ -2201,7 +2201,7 @@
           <p:cNvPr id="4" name="フッター プレースホルダー 3">
             <a:extLst>
               <a:ext uri="{FF2B5EF4-FFF2-40B4-BE49-F238E27FC236}">
-                <a16:creationId xmlns:a16="http://schemas.microsoft.com/office/drawing/2014/main" id="{725448FC-21CD-30B9-1DA0-5E02D2F2DF34}"/>
+                <a16:creationId xmlns:a16="http://schemas.microsoft.com/office/drawing/2014/main" id="{98C2CF08-A744-DD20-F20D-E5936D1B8CDA}"/>
               </a:ext>
             </a:extLst>
           </p:cNvPr>
@@ -2226,7 +2226,7 @@
           <p:cNvPr id="5" name="スライド番号プレースホルダー 4">
             <a:extLst>
               <a:ext uri="{FF2B5EF4-FFF2-40B4-BE49-F238E27FC236}">
-                <a16:creationId xmlns:a16="http://schemas.microsoft.com/office/drawing/2014/main" id="{0BBE875D-C2AF-AC83-D63E-4EBCD99643FE}"/>
+                <a16:creationId xmlns:a16="http://schemas.microsoft.com/office/drawing/2014/main" id="{E8721139-1AB4-4CE7-68F5-BC5EDA9CD515}"/>
               </a:ext>
             </a:extLst>
           </p:cNvPr>
@@ -2242,7 +2242,7 @@
           <a:bodyPr/>
           <a:lstStyle/>
           <a:p>
-            <a:fld id="{E5CD43DB-A420-4458-8812-EB72162C1993}" type="slidenum">
+            <a:fld id="{D4F35719-C832-4345-91C1-3D89956FDE1C}" type="slidenum">
               <a:rPr kumimoji="1" lang="ja-JP" altLang="en-US" smtClean="0"/>
               <a:t>‹#›</a:t>
             </a:fld>
@@ -2253,7 +2253,7 @@
     </p:spTree>
     <p:extLst>
       <p:ext uri="{BB962C8B-B14F-4D97-AF65-F5344CB8AC3E}">
-        <p14:creationId xmlns:p14="http://schemas.microsoft.com/office/powerpoint/2010/main" val="2499425923"/>
+        <p14:creationId xmlns:p14="http://schemas.microsoft.com/office/powerpoint/2010/main" val="1092071910"/>
       </p:ext>
     </p:extLst>
   </p:cSld>
@@ -2285,7 +2285,7 @@
           <p:cNvPr id="2" name="日付プレースホルダー 1">
             <a:extLst>
               <a:ext uri="{FF2B5EF4-FFF2-40B4-BE49-F238E27FC236}">
-                <a16:creationId xmlns:a16="http://schemas.microsoft.com/office/drawing/2014/main" id="{D4C75611-A824-4F3F-9C62-9AB1CC4B9AAE}"/>
+                <a16:creationId xmlns:a16="http://schemas.microsoft.com/office/drawing/2014/main" id="{F38D013C-6AE7-EBA3-8B11-79BDE50B81A5}"/>
               </a:ext>
             </a:extLst>
           </p:cNvPr>
@@ -2301,7 +2301,7 @@
           <a:bodyPr/>
           <a:lstStyle/>
           <a:p>
-            <a:fld id="{A9E021C6-75A6-451B-B277-8AEC9CE23197}" type="datetimeFigureOut">
+            <a:fld id="{328886D3-06D5-4435-B2EA-390E8383DB1E}" type="datetimeFigureOut">
               <a:rPr kumimoji="1" lang="ja-JP" altLang="en-US" smtClean="0"/>
               <a:t>2026/8/28</a:t>
             </a:fld>
@@ -2314,7 +2314,7 @@
           <p:cNvPr id="3" name="フッター プレースホルダー 2">
             <a:extLst>
               <a:ext uri="{FF2B5EF4-FFF2-40B4-BE49-F238E27FC236}">
-                <a16:creationId xmlns:a16="http://schemas.microsoft.com/office/drawing/2014/main" id="{6A3C948A-0AE8-BDC7-B7D7-7EAB0E9FA14B}"/>
+                <a16:creationId xmlns:a16="http://schemas.microsoft.com/office/drawing/2014/main" id="{F4DA3AD1-9550-3F8F-B3B5-B20961C1BD64}"/>
               </a:ext>
             </a:extLst>
           </p:cNvPr>
@@ -2339,7 +2339,7 @@
           <p:cNvPr id="4" name="スライド番号プレースホルダー 3">
             <a:extLst>
               <a:ext uri="{FF2B5EF4-FFF2-40B4-BE49-F238E27FC236}">
-                <a16:creationId xmlns:a16="http://schemas.microsoft.com/office/drawing/2014/main" id="{1626BF51-3DDC-3310-E4BF-96F6C7647C6F}"/>
+                <a16:creationId xmlns:a16="http://schemas.microsoft.com/office/drawing/2014/main" id="{DB55A291-50E9-7ECB-AD9A-1646F35D1D1B}"/>
               </a:ext>
             </a:extLst>
           </p:cNvPr>
@@ -2355,7 +2355,7 @@
           <a:bodyPr/>
           <a:lstStyle/>
           <a:p>
-            <a:fld id="{E5CD43DB-A420-4458-8812-EB72162C1993}" type="slidenum">
+            <a:fld id="{D4F35719-C832-4345-91C1-3D89956FDE1C}" type="slidenum">
               <a:rPr kumimoji="1" lang="ja-JP" altLang="en-US" smtClean="0"/>
               <a:t>‹#›</a:t>
             </a:fld>
@@ -2366,7 +2366,7 @@
     </p:spTree>
     <p:extLst>
       <p:ext uri="{BB962C8B-B14F-4D97-AF65-F5344CB8AC3E}">
-        <p14:creationId xmlns:p14="http://schemas.microsoft.com/office/powerpoint/2010/main" val="3543689032"/>
+        <p14:creationId xmlns:p14="http://schemas.microsoft.com/office/powerpoint/2010/main" val="2506805997"/>
       </p:ext>
     </p:extLst>
   </p:cSld>
@@ -2398,7 +2398,7 @@
           <p:cNvPr id="2" name="タイトル 1">
             <a:extLst>
               <a:ext uri="{FF2B5EF4-FFF2-40B4-BE49-F238E27FC236}">
-                <a16:creationId xmlns:a16="http://schemas.microsoft.com/office/drawing/2014/main" id="{8E1CBD79-D65D-8ABB-1E64-2FC8D7A4EDFB}"/>
+                <a16:creationId xmlns:a16="http://schemas.microsoft.com/office/drawing/2014/main" id="{04BE0079-65E3-604C-4058-2FFF6B185B99}"/>
               </a:ext>
             </a:extLst>
           </p:cNvPr>
@@ -2435,7 +2435,7 @@
           <p:cNvPr id="3" name="コンテンツ プレースホルダー 2">
             <a:extLst>
               <a:ext uri="{FF2B5EF4-FFF2-40B4-BE49-F238E27FC236}">
-                <a16:creationId xmlns:a16="http://schemas.microsoft.com/office/drawing/2014/main" id="{5ECC2A2D-9C35-1F42-A65C-7809CAF078D8}"/>
+                <a16:creationId xmlns:a16="http://schemas.microsoft.com/office/drawing/2014/main" id="{9BF7E25D-317F-91B0-3483-2B821FD4E89A}"/>
               </a:ext>
             </a:extLst>
           </p:cNvPr>
@@ -2557,7 +2557,7 @@
           <p:cNvPr id="4" name="テキスト プレースホルダー 3">
             <a:extLst>
               <a:ext uri="{FF2B5EF4-FFF2-40B4-BE49-F238E27FC236}">
-                <a16:creationId xmlns:a16="http://schemas.microsoft.com/office/drawing/2014/main" id="{C667C94E-3434-A903-96AF-6D29E14E3207}"/>
+                <a16:creationId xmlns:a16="http://schemas.microsoft.com/office/drawing/2014/main" id="{93B93E18-6DE6-8573-C73B-87EEA8ECE519}"/>
               </a:ext>
             </a:extLst>
           </p:cNvPr>
@@ -2628,7 +2628,7 @@
           <p:cNvPr id="5" name="日付プレースホルダー 4">
             <a:extLst>
               <a:ext uri="{FF2B5EF4-FFF2-40B4-BE49-F238E27FC236}">
-                <a16:creationId xmlns:a16="http://schemas.microsoft.com/office/drawing/2014/main" id="{BA205672-95AB-8BB9-4F83-5E33789070B5}"/>
+                <a16:creationId xmlns:a16="http://schemas.microsoft.com/office/drawing/2014/main" id="{3A68BF96-CF86-35D6-EBAB-61F85954F619}"/>
               </a:ext>
             </a:extLst>
           </p:cNvPr>
@@ -2644,7 +2644,7 @@
           <a:bodyPr/>
           <a:lstStyle/>
           <a:p>
-            <a:fld id="{A9E021C6-75A6-451B-B277-8AEC9CE23197}" type="datetimeFigureOut">
+            <a:fld id="{328886D3-06D5-4435-B2EA-390E8383DB1E}" type="datetimeFigureOut">
               <a:rPr kumimoji="1" lang="ja-JP" altLang="en-US" smtClean="0"/>
               <a:t>2026/8/28</a:t>
             </a:fld>
@@ -2657,7 +2657,7 @@
           <p:cNvPr id="6" name="フッター プレースホルダー 5">
             <a:extLst>
               <a:ext uri="{FF2B5EF4-FFF2-40B4-BE49-F238E27FC236}">
-                <a16:creationId xmlns:a16="http://schemas.microsoft.com/office/drawing/2014/main" id="{E8C36029-EB7F-6322-3388-85598DC5B20D}"/>
+                <a16:creationId xmlns:a16="http://schemas.microsoft.com/office/drawing/2014/main" id="{521533C4-122D-92DE-34FD-F2B880C1F4CA}"/>
               </a:ext>
             </a:extLst>
           </p:cNvPr>
@@ -2682,7 +2682,7 @@
           <p:cNvPr id="7" name="スライド番号プレースホルダー 6">
             <a:extLst>
               <a:ext uri="{FF2B5EF4-FFF2-40B4-BE49-F238E27FC236}">
-                <a16:creationId xmlns:a16="http://schemas.microsoft.com/office/drawing/2014/main" id="{EA1E06CF-F543-9071-CC49-DDC4B2BA05A9}"/>
+                <a16:creationId xmlns:a16="http://schemas.microsoft.com/office/drawing/2014/main" id="{C485C055-056C-EDE2-51A5-71F13FE898E7}"/>
               </a:ext>
             </a:extLst>
           </p:cNvPr>
@@ -2698,7 +2698,7 @@
           <a:bodyPr/>
           <a:lstStyle/>
           <a:p>
-            <a:fld id="{E5CD43DB-A420-4458-8812-EB72162C1993}" type="slidenum">
+            <a:fld id="{D4F35719-C832-4345-91C1-3D89956FDE1C}" type="slidenum">
               <a:rPr kumimoji="1" lang="ja-JP" altLang="en-US" smtClean="0"/>
               <a:t>‹#›</a:t>
             </a:fld>
@@ -2709,7 +2709,7 @@
     </p:spTree>
     <p:extLst>
       <p:ext uri="{BB962C8B-B14F-4D97-AF65-F5344CB8AC3E}">
-        <p14:creationId xmlns:p14="http://schemas.microsoft.com/office/powerpoint/2010/main" val="925692909"/>
+        <p14:creationId xmlns:p14="http://schemas.microsoft.com/office/powerpoint/2010/main" val="311816391"/>
       </p:ext>
     </p:extLst>
   </p:cSld>
@@ -2741,7 +2741,7 @@
           <p:cNvPr id="2" name="タイトル 1">
             <a:extLst>
               <a:ext uri="{FF2B5EF4-FFF2-40B4-BE49-F238E27FC236}">
-                <a16:creationId xmlns:a16="http://schemas.microsoft.com/office/drawing/2014/main" id="{E25E1BB2-A2F1-B115-8C0C-A4000905878A}"/>
+                <a16:creationId xmlns:a16="http://schemas.microsoft.com/office/drawing/2014/main" id="{84E46629-0782-CADC-4472-1DE05157A7FB}"/>
               </a:ext>
             </a:extLst>
           </p:cNvPr>
@@ -2778,7 +2778,7 @@
           <p:cNvPr id="3" name="図プレースホルダー 2">
             <a:extLst>
               <a:ext uri="{FF2B5EF4-FFF2-40B4-BE49-F238E27FC236}">
-                <a16:creationId xmlns:a16="http://schemas.microsoft.com/office/drawing/2014/main" id="{ED89AC11-D683-D241-79A7-22EE188F03BC}"/>
+                <a16:creationId xmlns:a16="http://schemas.microsoft.com/office/drawing/2014/main" id="{B96BD7CB-F3DC-F127-72D6-ECA466043641}"/>
               </a:ext>
             </a:extLst>
           </p:cNvPr>
@@ -2845,7 +2845,7 @@
           <p:cNvPr id="4" name="テキスト プレースホルダー 3">
             <a:extLst>
               <a:ext uri="{FF2B5EF4-FFF2-40B4-BE49-F238E27FC236}">
-                <a16:creationId xmlns:a16="http://schemas.microsoft.com/office/drawing/2014/main" id="{5D0E905C-AF1D-E65F-8C3D-59686F1EE9D8}"/>
+                <a16:creationId xmlns:a16="http://schemas.microsoft.com/office/drawing/2014/main" id="{D65486D0-3BA5-D5D8-08D3-0442651EFF58}"/>
               </a:ext>
             </a:extLst>
           </p:cNvPr>
@@ -2916,7 +2916,7 @@
           <p:cNvPr id="5" name="日付プレースホルダー 4">
             <a:extLst>
               <a:ext uri="{FF2B5EF4-FFF2-40B4-BE49-F238E27FC236}">
-                <a16:creationId xmlns:a16="http://schemas.microsoft.com/office/drawing/2014/main" id="{CEF80C0D-286C-A88F-D7F3-FDAB7328BA4F}"/>
+                <a16:creationId xmlns:a16="http://schemas.microsoft.com/office/drawing/2014/main" id="{51D4E4F4-E4C1-5790-8F92-C4B4002B95B0}"/>
               </a:ext>
             </a:extLst>
           </p:cNvPr>
@@ -2932,7 +2932,7 @@
           <a:bodyPr/>
           <a:lstStyle/>
           <a:p>
-            <a:fld id="{A9E021C6-75A6-451B-B277-8AEC9CE23197}" type="datetimeFigureOut">
+            <a:fld id="{328886D3-06D5-4435-B2EA-390E8383DB1E}" type="datetimeFigureOut">
               <a:rPr kumimoji="1" lang="ja-JP" altLang="en-US" smtClean="0"/>
               <a:t>2026/8/28</a:t>
             </a:fld>
@@ -2945,7 +2945,7 @@
           <p:cNvPr id="6" name="フッター プレースホルダー 5">
             <a:extLst>
               <a:ext uri="{FF2B5EF4-FFF2-40B4-BE49-F238E27FC236}">
-                <a16:creationId xmlns:a16="http://schemas.microsoft.com/office/drawing/2014/main" id="{8DD9D1B4-8F5C-9723-2986-A2BBEFA42F6F}"/>
+                <a16:creationId xmlns:a16="http://schemas.microsoft.com/office/drawing/2014/main" id="{F84D1FE4-046D-6EFF-8163-3E277949BC10}"/>
               </a:ext>
             </a:extLst>
           </p:cNvPr>
@@ -2970,7 +2970,7 @@
           <p:cNvPr id="7" name="スライド番号プレースホルダー 6">
             <a:extLst>
               <a:ext uri="{FF2B5EF4-FFF2-40B4-BE49-F238E27FC236}">
-                <a16:creationId xmlns:a16="http://schemas.microsoft.com/office/drawing/2014/main" id="{47DAAD9A-E514-4C51-9054-E425DD4DED1A}"/>
+                <a16:creationId xmlns:a16="http://schemas.microsoft.com/office/drawing/2014/main" id="{994F3A9C-F21F-1ABE-0C5A-7705259102F3}"/>
               </a:ext>
             </a:extLst>
           </p:cNvPr>
@@ -2986,7 +2986,7 @@
           <a:bodyPr/>
           <a:lstStyle/>
           <a:p>
-            <a:fld id="{E5CD43DB-A420-4458-8812-EB72162C1993}" type="slidenum">
+            <a:fld id="{D4F35719-C832-4345-91C1-3D89956FDE1C}" type="slidenum">
               <a:rPr kumimoji="1" lang="ja-JP" altLang="en-US" smtClean="0"/>
               <a:t>‹#›</a:t>
             </a:fld>
@@ -2997,7 +2997,7 @@
     </p:spTree>
     <p:extLst>
       <p:ext uri="{BB962C8B-B14F-4D97-AF65-F5344CB8AC3E}">
-        <p14:creationId xmlns:p14="http://schemas.microsoft.com/office/powerpoint/2010/main" val="459127507"/>
+        <p14:creationId xmlns:p14="http://schemas.microsoft.com/office/powerpoint/2010/main" val="1751414440"/>
       </p:ext>
     </p:extLst>
   </p:cSld>
@@ -3034,7 +3034,7 @@
           <p:cNvPr id="2" name="タイトル プレースホルダー 1">
             <a:extLst>
               <a:ext uri="{FF2B5EF4-FFF2-40B4-BE49-F238E27FC236}">
-                <a16:creationId xmlns:a16="http://schemas.microsoft.com/office/drawing/2014/main" id="{7D4B0938-06C6-9AD1-E2C4-B720744A1123}"/>
+                <a16:creationId xmlns:a16="http://schemas.microsoft.com/office/drawing/2014/main" id="{C608B7F3-74AE-E3D8-D281-27056671E2FD}"/>
               </a:ext>
             </a:extLst>
           </p:cNvPr>
@@ -3072,7 +3072,7 @@
           <p:cNvPr id="3" name="テキスト プレースホルダー 2">
             <a:extLst>
               <a:ext uri="{FF2B5EF4-FFF2-40B4-BE49-F238E27FC236}">
-                <a16:creationId xmlns:a16="http://schemas.microsoft.com/office/drawing/2014/main" id="{20932FDA-CEEC-A79E-A0DB-93269453C33A}"/>
+                <a16:creationId xmlns:a16="http://schemas.microsoft.com/office/drawing/2014/main" id="{C6E17F86-99A6-FB26-43DE-56A2EB4FA7EC}"/>
               </a:ext>
             </a:extLst>
           </p:cNvPr>
@@ -3171,7 +3171,7 @@
           <p:cNvPr id="4" name="日付プレースホルダー 3">
             <a:extLst>
               <a:ext uri="{FF2B5EF4-FFF2-40B4-BE49-F238E27FC236}">
-                <a16:creationId xmlns:a16="http://schemas.microsoft.com/office/drawing/2014/main" id="{DB669ABE-9D12-7CE3-291E-E07B7BC93832}"/>
+                <a16:creationId xmlns:a16="http://schemas.microsoft.com/office/drawing/2014/main" id="{29D1532D-A0C4-2434-7D75-63AE79918993}"/>
               </a:ext>
             </a:extLst>
           </p:cNvPr>
@@ -3205,7 +3205,7 @@
             </a:lvl1pPr>
           </a:lstStyle>
           <a:p>
-            <a:fld id="{A9E021C6-75A6-451B-B277-8AEC9CE23197}" type="datetimeFigureOut">
+            <a:fld id="{328886D3-06D5-4435-B2EA-390E8383DB1E}" type="datetimeFigureOut">
               <a:rPr kumimoji="1" lang="ja-JP" altLang="en-US" smtClean="0"/>
               <a:t>2026/8/28</a:t>
             </a:fld>
@@ -3218,7 +3218,7 @@
           <p:cNvPr id="5" name="フッター プレースホルダー 4">
             <a:extLst>
               <a:ext uri="{FF2B5EF4-FFF2-40B4-BE49-F238E27FC236}">
-                <a16:creationId xmlns:a16="http://schemas.microsoft.com/office/drawing/2014/main" id="{FF58CE62-7BA8-1770-5E1C-71B63F115E06}"/>
+                <a16:creationId xmlns:a16="http://schemas.microsoft.com/office/drawing/2014/main" id="{69A51C37-60D6-EE97-A324-0109CAD4259E}"/>
               </a:ext>
             </a:extLst>
           </p:cNvPr>
@@ -3261,7 +3261,7 @@
           <p:cNvPr id="6" name="スライド番号プレースホルダー 5">
             <a:extLst>
               <a:ext uri="{FF2B5EF4-FFF2-40B4-BE49-F238E27FC236}">
-                <a16:creationId xmlns:a16="http://schemas.microsoft.com/office/drawing/2014/main" id="{159AF3ED-FA11-CC41-F937-47D34AF9317F}"/>
+                <a16:creationId xmlns:a16="http://schemas.microsoft.com/office/drawing/2014/main" id="{A944F60D-2002-23C6-9574-B6E0186BC79B}"/>
               </a:ext>
             </a:extLst>
           </p:cNvPr>
@@ -3295,7 +3295,7 @@
             </a:lvl1pPr>
           </a:lstStyle>
           <a:p>
-            <a:fld id="{E5CD43DB-A420-4458-8812-EB72162C1993}" type="slidenum">
+            <a:fld id="{D4F35719-C832-4345-91C1-3D89956FDE1C}" type="slidenum">
               <a:rPr kumimoji="1" lang="ja-JP" altLang="en-US" smtClean="0"/>
               <a:t>‹#›</a:t>
             </a:fld>
@@ -3306,7 +3306,7 @@
     </p:spTree>
     <p:extLst>
       <p:ext uri="{BB962C8B-B14F-4D97-AF65-F5344CB8AC3E}">
-        <p14:creationId xmlns:p14="http://schemas.microsoft.com/office/powerpoint/2010/main" val="943213970"/>
+        <p14:creationId xmlns:p14="http://schemas.microsoft.com/office/powerpoint/2010/main" val="182950435"/>
       </p:ext>
     </p:extLst>
   </p:cSld>
@@ -3629,7 +3629,7 @@
           <p:cNvPr id="2" name="正方形/長方形 1">
             <a:extLst>
               <a:ext uri="{FF2B5EF4-FFF2-40B4-BE49-F238E27FC236}">
-                <a16:creationId xmlns:a16="http://schemas.microsoft.com/office/drawing/2014/main" id="{428F5D89-A142-12B8-961C-6CAC391D8DFC}"/>
+                <a16:creationId xmlns:a16="http://schemas.microsoft.com/office/drawing/2014/main" id="{90F781E6-A24E-BDE4-6A0C-46D532FDC541}"/>
               </a:ext>
             </a:extLst>
           </p:cNvPr>
@@ -3697,7 +3697,7 @@
           <p:cNvPr id="3" name="正方形/長方形 2">
             <a:extLst>
               <a:ext uri="{FF2B5EF4-FFF2-40B4-BE49-F238E27FC236}">
-                <a16:creationId xmlns:a16="http://schemas.microsoft.com/office/drawing/2014/main" id="{5E3E0557-60E2-B986-1C39-5B72E4202251}"/>
+                <a16:creationId xmlns:a16="http://schemas.microsoft.com/office/drawing/2014/main" id="{4C8E3133-ED86-82A9-9731-81692DBBBB7B}"/>
               </a:ext>
             </a:extLst>
           </p:cNvPr>
@@ -3765,7 +3765,7 @@
           <p:cNvPr id="4" name="楕円 3">
             <a:extLst>
               <a:ext uri="{FF2B5EF4-FFF2-40B4-BE49-F238E27FC236}">
-                <a16:creationId xmlns:a16="http://schemas.microsoft.com/office/drawing/2014/main" id="{D09B66E6-1655-2A7D-EC7F-2842B16FAC10}"/>
+                <a16:creationId xmlns:a16="http://schemas.microsoft.com/office/drawing/2014/main" id="{A9441F18-B414-E642-63EF-B1EA5821AE9B}"/>
               </a:ext>
             </a:extLst>
           </p:cNvPr>
@@ -3835,7 +3835,7 @@
           <p:cNvPr id="5" name="楕円 4">
             <a:extLst>
               <a:ext uri="{FF2B5EF4-FFF2-40B4-BE49-F238E27FC236}">
-                <a16:creationId xmlns:a16="http://schemas.microsoft.com/office/drawing/2014/main" id="{CF48CA8E-25A2-31BE-2987-53EEFBC75CA6}"/>
+                <a16:creationId xmlns:a16="http://schemas.microsoft.com/office/drawing/2014/main" id="{B184CB33-782C-594B-686A-1C12C4549D43}"/>
               </a:ext>
             </a:extLst>
           </p:cNvPr>
@@ -3905,7 +3905,7 @@
           <p:cNvPr id="6" name="正方形/長方形 5">
             <a:extLst>
               <a:ext uri="{FF2B5EF4-FFF2-40B4-BE49-F238E27FC236}">
-                <a16:creationId xmlns:a16="http://schemas.microsoft.com/office/drawing/2014/main" id="{6BB67674-B955-F6DA-B8B7-921EADA6BC41}"/>
+                <a16:creationId xmlns:a16="http://schemas.microsoft.com/office/drawing/2014/main" id="{2C929589-4652-C547-61EA-C8681F35F159}"/>
               </a:ext>
             </a:extLst>
           </p:cNvPr>
@@ -3973,7 +3973,7 @@
           <p:cNvPr id="7" name="テキスト ボックス 6">
             <a:extLst>
               <a:ext uri="{FF2B5EF4-FFF2-40B4-BE49-F238E27FC236}">
-                <a16:creationId xmlns:a16="http://schemas.microsoft.com/office/drawing/2014/main" id="{8BBA3BD6-63D2-E6B7-1D56-71D1887B0318}"/>
+                <a16:creationId xmlns:a16="http://schemas.microsoft.com/office/drawing/2014/main" id="{7E7799B8-382C-3863-BE1B-49F9ED5D09D4}"/>
               </a:ext>
             </a:extLst>
           </p:cNvPr>
@@ -4026,7 +4026,7 @@
           <p:cNvPr id="8" name="テキスト ボックス 7">
             <a:extLst>
               <a:ext uri="{FF2B5EF4-FFF2-40B4-BE49-F238E27FC236}">
-                <a16:creationId xmlns:a16="http://schemas.microsoft.com/office/drawing/2014/main" id="{CC39612D-99F8-B1CA-E0C8-135727666A9C}"/>
+                <a16:creationId xmlns:a16="http://schemas.microsoft.com/office/drawing/2014/main" id="{A37335ED-A146-5BE2-6EA6-D34BFC23907C}"/>
               </a:ext>
             </a:extLst>
           </p:cNvPr>
@@ -4072,7 +4072,7 @@
           <p:cNvPr id="9" name="テキスト ボックス 8">
             <a:extLst>
               <a:ext uri="{FF2B5EF4-FFF2-40B4-BE49-F238E27FC236}">
-                <a16:creationId xmlns:a16="http://schemas.microsoft.com/office/drawing/2014/main" id="{218582BA-7774-AEB0-62E0-2F1239F6CE2D}"/>
+                <a16:creationId xmlns:a16="http://schemas.microsoft.com/office/drawing/2014/main" id="{E1538F52-C9D0-41BB-0A60-BC13DBD735B6}"/>
               </a:ext>
             </a:extLst>
           </p:cNvPr>
@@ -4145,7 +4145,7 @@
           <p:cNvPr id="10" name="四角形: 角を丸くする 9">
             <a:extLst>
               <a:ext uri="{FF2B5EF4-FFF2-40B4-BE49-F238E27FC236}">
-                <a16:creationId xmlns:a16="http://schemas.microsoft.com/office/drawing/2014/main" id="{4740653B-6434-93AC-4EC1-DCC175729F9C}"/>
+                <a16:creationId xmlns:a16="http://schemas.microsoft.com/office/drawing/2014/main" id="{96075B0B-97C2-6F1B-25FD-906133521855}"/>
               </a:ext>
             </a:extLst>
           </p:cNvPr>
@@ -4215,7 +4215,7 @@
           <p:cNvPr id="11" name="テキスト ボックス 10">
             <a:extLst>
               <a:ext uri="{FF2B5EF4-FFF2-40B4-BE49-F238E27FC236}">
-                <a16:creationId xmlns:a16="http://schemas.microsoft.com/office/drawing/2014/main" id="{D7DFE74E-9485-BEED-3E3F-A4997E5A6ECE}"/>
+                <a16:creationId xmlns:a16="http://schemas.microsoft.com/office/drawing/2014/main" id="{5361A0F7-C29F-D006-3D5D-34A16D3D03F2}"/>
               </a:ext>
             </a:extLst>
           </p:cNvPr>
@@ -4261,7 +4261,7 @@
           <p:cNvPr id="12" name="四角形: 角を丸くする 11">
             <a:extLst>
               <a:ext uri="{FF2B5EF4-FFF2-40B4-BE49-F238E27FC236}">
-                <a16:creationId xmlns:a16="http://schemas.microsoft.com/office/drawing/2014/main" id="{69D94C6B-088A-6CFA-DAFA-2C364A03AD4D}"/>
+                <a16:creationId xmlns:a16="http://schemas.microsoft.com/office/drawing/2014/main" id="{51939BEE-4039-8AA8-C5AE-38D65AC4975F}"/>
               </a:ext>
             </a:extLst>
           </p:cNvPr>
@@ -4331,7 +4331,7 @@
           <p:cNvPr id="13" name="テキスト ボックス 12">
             <a:extLst>
               <a:ext uri="{FF2B5EF4-FFF2-40B4-BE49-F238E27FC236}">
-                <a16:creationId xmlns:a16="http://schemas.microsoft.com/office/drawing/2014/main" id="{C39339CE-913D-E64F-089F-B1F1724C247A}"/>
+                <a16:creationId xmlns:a16="http://schemas.microsoft.com/office/drawing/2014/main" id="{A73C89B2-2A39-5F0F-A335-F2245250D309}"/>
               </a:ext>
             </a:extLst>
           </p:cNvPr>
@@ -4377,7 +4377,7 @@
           <p:cNvPr id="14" name="正方形/長方形 13">
             <a:extLst>
               <a:ext uri="{FF2B5EF4-FFF2-40B4-BE49-F238E27FC236}">
-                <a16:creationId xmlns:a16="http://schemas.microsoft.com/office/drawing/2014/main" id="{998E5C49-641B-86A8-D771-2A59A48C02C8}"/>
+                <a16:creationId xmlns:a16="http://schemas.microsoft.com/office/drawing/2014/main" id="{364FF7FF-07CC-2EF1-4FF8-DFD5EA458902}"/>
               </a:ext>
             </a:extLst>
           </p:cNvPr>
@@ -4445,7 +4445,7 @@
           <p:cNvPr id="15" name="テキスト ボックス 14">
             <a:extLst>
               <a:ext uri="{FF2B5EF4-FFF2-40B4-BE49-F238E27FC236}">
-                <a16:creationId xmlns:a16="http://schemas.microsoft.com/office/drawing/2014/main" id="{6BB90615-4C80-1DE5-377B-1F5A28D4907E}"/>
+                <a16:creationId xmlns:a16="http://schemas.microsoft.com/office/drawing/2014/main" id="{95E5B1B9-0CA1-C273-40F6-B71B8053588E}"/>
               </a:ext>
             </a:extLst>
           </p:cNvPr>
@@ -4539,7 +4539,7 @@
     </p:spTree>
     <p:extLst>
       <p:ext uri="{BB962C8B-B14F-4D97-AF65-F5344CB8AC3E}">
-        <p14:creationId xmlns:p14="http://schemas.microsoft.com/office/powerpoint/2010/main" val="895985181"/>
+        <p14:creationId xmlns:p14="http://schemas.microsoft.com/office/powerpoint/2010/main" val="1400925983"/>
       </p:ext>
     </p:extLst>
   </p:cSld>
@@ -4571,7 +4571,7 @@
           <p:cNvPr id="2" name="正方形/長方形 1">
             <a:extLst>
               <a:ext uri="{FF2B5EF4-FFF2-40B4-BE49-F238E27FC236}">
-                <a16:creationId xmlns:a16="http://schemas.microsoft.com/office/drawing/2014/main" id="{F2E09215-3269-914F-F9B0-C7839002DF79}"/>
+                <a16:creationId xmlns:a16="http://schemas.microsoft.com/office/drawing/2014/main" id="{C05472B2-2A13-384D-421C-28320655920E}"/>
               </a:ext>
             </a:extLst>
           </p:cNvPr>
@@ -4639,7 +4639,7 @@
           <p:cNvPr id="3" name="正方形/長方形 2">
             <a:extLst>
               <a:ext uri="{FF2B5EF4-FFF2-40B4-BE49-F238E27FC236}">
-                <a16:creationId xmlns:a16="http://schemas.microsoft.com/office/drawing/2014/main" id="{8870DEEF-2C14-CBAE-8CCD-9122B0A2C417}"/>
+                <a16:creationId xmlns:a16="http://schemas.microsoft.com/office/drawing/2014/main" id="{F4094372-16A9-351B-C3F1-9A272BA51C04}"/>
               </a:ext>
             </a:extLst>
           </p:cNvPr>
@@ -4707,7 +4707,7 @@
           <p:cNvPr id="4" name="テキスト ボックス 3">
             <a:extLst>
               <a:ext uri="{FF2B5EF4-FFF2-40B4-BE49-F238E27FC236}">
-                <a16:creationId xmlns:a16="http://schemas.microsoft.com/office/drawing/2014/main" id="{9D4E7B9F-456C-2B27-3038-DC258254438A}"/>
+                <a16:creationId xmlns:a16="http://schemas.microsoft.com/office/drawing/2014/main" id="{00B44CB8-EEC3-197A-4B4B-467414C7FBF0}"/>
               </a:ext>
             </a:extLst>
           </p:cNvPr>
@@ -4760,7 +4760,7 @@
           <p:cNvPr id="5" name="テキスト ボックス 4">
             <a:extLst>
               <a:ext uri="{FF2B5EF4-FFF2-40B4-BE49-F238E27FC236}">
-                <a16:creationId xmlns:a16="http://schemas.microsoft.com/office/drawing/2014/main" id="{647D4972-25D8-C2C5-5704-5A2B6510CD89}"/>
+                <a16:creationId xmlns:a16="http://schemas.microsoft.com/office/drawing/2014/main" id="{0582E637-6E82-428B-17F3-E63AF764B613}"/>
               </a:ext>
             </a:extLst>
           </p:cNvPr>
@@ -4806,7 +4806,7 @@
           <p:cNvPr id="6" name="正方形/長方形 5">
             <a:extLst>
               <a:ext uri="{FF2B5EF4-FFF2-40B4-BE49-F238E27FC236}">
-                <a16:creationId xmlns:a16="http://schemas.microsoft.com/office/drawing/2014/main" id="{A89CD771-6EAC-C1AF-798B-16690E9BECBB}"/>
+                <a16:creationId xmlns:a16="http://schemas.microsoft.com/office/drawing/2014/main" id="{872CF84D-D572-6F45-09A8-296CDB58DA27}"/>
               </a:ext>
             </a:extLst>
           </p:cNvPr>
@@ -4874,7 +4874,7 @@
           <p:cNvPr id="7" name="四角形: 角を丸くする 6">
             <a:extLst>
               <a:ext uri="{FF2B5EF4-FFF2-40B4-BE49-F238E27FC236}">
-                <a16:creationId xmlns:a16="http://schemas.microsoft.com/office/drawing/2014/main" id="{B2B5854D-6B75-D497-E09E-9210D93EBFB8}"/>
+                <a16:creationId xmlns:a16="http://schemas.microsoft.com/office/drawing/2014/main" id="{9014507B-73A5-342A-A5EF-597C89DEDD2D}"/>
               </a:ext>
             </a:extLst>
           </p:cNvPr>
@@ -4944,7 +4944,7 @@
           <p:cNvPr id="8" name="テキスト ボックス 7">
             <a:extLst>
               <a:ext uri="{FF2B5EF4-FFF2-40B4-BE49-F238E27FC236}">
-                <a16:creationId xmlns:a16="http://schemas.microsoft.com/office/drawing/2014/main" id="{2951B831-1F83-302E-7F51-D45140DE9D93}"/>
+                <a16:creationId xmlns:a16="http://schemas.microsoft.com/office/drawing/2014/main" id="{8E2B73C7-440B-51A7-73C9-B93C61751296}"/>
               </a:ext>
             </a:extLst>
           </p:cNvPr>
@@ -4990,7 +4990,7 @@
           <p:cNvPr id="9" name="テキスト ボックス 8">
             <a:extLst>
               <a:ext uri="{FF2B5EF4-FFF2-40B4-BE49-F238E27FC236}">
-                <a16:creationId xmlns:a16="http://schemas.microsoft.com/office/drawing/2014/main" id="{F15DF88C-3101-9563-D48A-8FC5D1885603}"/>
+                <a16:creationId xmlns:a16="http://schemas.microsoft.com/office/drawing/2014/main" id="{531C1BF7-9D7B-43A0-FB65-28D73E717BE5}"/>
               </a:ext>
             </a:extLst>
           </p:cNvPr>
@@ -5036,7 +5036,7 @@
           <p:cNvPr id="10" name="テキスト ボックス 9">
             <a:extLst>
               <a:ext uri="{FF2B5EF4-FFF2-40B4-BE49-F238E27FC236}">
-                <a16:creationId xmlns:a16="http://schemas.microsoft.com/office/drawing/2014/main" id="{4E43CEE2-D12A-97C5-A945-76153C12402A}"/>
+                <a16:creationId xmlns:a16="http://schemas.microsoft.com/office/drawing/2014/main" id="{2F5409FB-6D34-77E6-CA29-D3253813F4B3}"/>
               </a:ext>
             </a:extLst>
           </p:cNvPr>
@@ -5089,7 +5089,7 @@
           <p:cNvPr id="11" name="表 10">
             <a:extLst>
               <a:ext uri="{FF2B5EF4-FFF2-40B4-BE49-F238E27FC236}">
-                <a16:creationId xmlns:a16="http://schemas.microsoft.com/office/drawing/2014/main" id="{1DBCFD8C-0622-60F9-3A08-BEA524D2B8D6}"/>
+                <a16:creationId xmlns:a16="http://schemas.microsoft.com/office/drawing/2014/main" id="{9A1DEEAE-B56E-56D9-2721-27DE8630AFE8}"/>
               </a:ext>
             </a:extLst>
           </p:cNvPr>
@@ -5099,7 +5099,7 @@
           <p:nvPr>
             <p:extLst>
               <p:ext uri="{D42A27DB-BD31-4B8C-83A1-F6EECF244321}">
-                <p14:modId xmlns:p14="http://schemas.microsoft.com/office/powerpoint/2010/main" val="1014101612"/>
+                <p14:modId xmlns:p14="http://schemas.microsoft.com/office/powerpoint/2010/main" val="2397692084"/>
               </p:ext>
             </p:extLst>
           </p:nvPr>
@@ -5118,14 +5118,14 @@
                 <a:gridCol w="3200400">
                   <a:extLst>
                     <a:ext uri="{9D8B030D-6E8A-4147-A177-3AD203B41FA5}">
-                      <a16:colId xmlns:a16="http://schemas.microsoft.com/office/drawing/2014/main" val="1454840137"/>
+                      <a16:colId xmlns:a16="http://schemas.microsoft.com/office/drawing/2014/main" val="2718786712"/>
                     </a:ext>
                   </a:extLst>
                 </a:gridCol>
                 <a:gridCol w="7366000">
                   <a:extLst>
                     <a:ext uri="{9D8B030D-6E8A-4147-A177-3AD203B41FA5}">
-                      <a16:colId xmlns:a16="http://schemas.microsoft.com/office/drawing/2014/main" val="524015500"/>
+                      <a16:colId xmlns:a16="http://schemas.microsoft.com/office/drawing/2014/main" val="1880784165"/>
                     </a:ext>
                   </a:extLst>
                 </a:gridCol>
@@ -5199,7 +5199,7 @@
                 </a:tc>
                 <a:extLst>
                   <a:ext uri="{0D108BD9-81ED-4DB2-BD59-A6C34878D82A}">
-                    <a16:rowId xmlns:a16="http://schemas.microsoft.com/office/drawing/2014/main" val="4096597154"/>
+                    <a16:rowId xmlns:a16="http://schemas.microsoft.com/office/drawing/2014/main" val="665640474"/>
                   </a:ext>
                 </a:extLst>
               </a:tr>
@@ -5302,7 +5302,7 @@
                 </a:tc>
                 <a:extLst>
                   <a:ext uri="{0D108BD9-81ED-4DB2-BD59-A6C34878D82A}">
-                    <a16:rowId xmlns:a16="http://schemas.microsoft.com/office/drawing/2014/main" val="3027393254"/>
+                    <a16:rowId xmlns:a16="http://schemas.microsoft.com/office/drawing/2014/main" val="3839697856"/>
                   </a:ext>
                 </a:extLst>
               </a:tr>
@@ -5425,7 +5425,7 @@
                 </a:tc>
                 <a:extLst>
                   <a:ext uri="{0D108BD9-81ED-4DB2-BD59-A6C34878D82A}">
-                    <a16:rowId xmlns:a16="http://schemas.microsoft.com/office/drawing/2014/main" val="283366474"/>
+                    <a16:rowId xmlns:a16="http://schemas.microsoft.com/office/drawing/2014/main" val="569861867"/>
                   </a:ext>
                 </a:extLst>
               </a:tr>
@@ -5548,7 +5548,7 @@
                 </a:tc>
                 <a:extLst>
                   <a:ext uri="{0D108BD9-81ED-4DB2-BD59-A6C34878D82A}">
-                    <a16:rowId xmlns:a16="http://schemas.microsoft.com/office/drawing/2014/main" val="3486723429"/>
+                    <a16:rowId xmlns:a16="http://schemas.microsoft.com/office/drawing/2014/main" val="3885287991"/>
                   </a:ext>
                 </a:extLst>
               </a:tr>
@@ -5651,7 +5651,7 @@
                 </a:tc>
                 <a:extLst>
                   <a:ext uri="{0D108BD9-81ED-4DB2-BD59-A6C34878D82A}">
-                    <a16:rowId xmlns:a16="http://schemas.microsoft.com/office/drawing/2014/main" val="2251504774"/>
+                    <a16:rowId xmlns:a16="http://schemas.microsoft.com/office/drawing/2014/main" val="1021692164"/>
                   </a:ext>
                 </a:extLst>
               </a:tr>
@@ -5784,7 +5784,7 @@
                 </a:tc>
                 <a:extLst>
                   <a:ext uri="{0D108BD9-81ED-4DB2-BD59-A6C34878D82A}">
-                    <a16:rowId xmlns:a16="http://schemas.microsoft.com/office/drawing/2014/main" val="1058161215"/>
+                    <a16:rowId xmlns:a16="http://schemas.microsoft.com/office/drawing/2014/main" val="1061165572"/>
                   </a:ext>
                 </a:extLst>
               </a:tr>
@@ -5867,7 +5867,7 @@
                 </a:tc>
                 <a:extLst>
                   <a:ext uri="{0D108BD9-81ED-4DB2-BD59-A6C34878D82A}">
-                    <a16:rowId xmlns:a16="http://schemas.microsoft.com/office/drawing/2014/main" val="3979463435"/>
+                    <a16:rowId xmlns:a16="http://schemas.microsoft.com/office/drawing/2014/main" val="2225243456"/>
                   </a:ext>
                 </a:extLst>
               </a:tr>
@@ -5880,7 +5880,7 @@
           <p:cNvPr id="12" name="四角形: 角を丸くする 11">
             <a:extLst>
               <a:ext uri="{FF2B5EF4-FFF2-40B4-BE49-F238E27FC236}">
-                <a16:creationId xmlns:a16="http://schemas.microsoft.com/office/drawing/2014/main" id="{0EA6FE4D-0C71-AFEC-9765-F58BF9EA0757}"/>
+                <a16:creationId xmlns:a16="http://schemas.microsoft.com/office/drawing/2014/main" id="{9B8B0F7F-6C77-37C5-598E-213651E3ADF0}"/>
               </a:ext>
             </a:extLst>
           </p:cNvPr>
@@ -5950,7 +5950,7 @@
           <p:cNvPr id="13" name="正方形/長方形 12">
             <a:extLst>
               <a:ext uri="{FF2B5EF4-FFF2-40B4-BE49-F238E27FC236}">
-                <a16:creationId xmlns:a16="http://schemas.microsoft.com/office/drawing/2014/main" id="{DF6C2CD3-C420-52CC-A644-CEE7B2F8EE7B}"/>
+                <a16:creationId xmlns:a16="http://schemas.microsoft.com/office/drawing/2014/main" id="{4B68600F-7BFF-57E0-01F6-8A38199AFA4C}"/>
               </a:ext>
             </a:extLst>
           </p:cNvPr>
@@ -6018,7 +6018,7 @@
           <p:cNvPr id="14" name="テキスト ボックス 13">
             <a:extLst>
               <a:ext uri="{FF2B5EF4-FFF2-40B4-BE49-F238E27FC236}">
-                <a16:creationId xmlns:a16="http://schemas.microsoft.com/office/drawing/2014/main" id="{2DAD3772-B49A-7C97-ABB5-5CCFBD493D06}"/>
+                <a16:creationId xmlns:a16="http://schemas.microsoft.com/office/drawing/2014/main" id="{50360601-D628-C5A6-BEF4-4B94B5141D9F}"/>
               </a:ext>
             </a:extLst>
           </p:cNvPr>
@@ -6064,7 +6064,7 @@
           <p:cNvPr id="15" name="テキスト ボックス 14">
             <a:extLst>
               <a:ext uri="{FF2B5EF4-FFF2-40B4-BE49-F238E27FC236}">
-                <a16:creationId xmlns:a16="http://schemas.microsoft.com/office/drawing/2014/main" id="{78139046-C5D2-08E5-C0D2-0353FD2B9222}"/>
+                <a16:creationId xmlns:a16="http://schemas.microsoft.com/office/drawing/2014/main" id="{DF3A059D-BFA1-76CB-381D-C6A355C773E5}"/>
               </a:ext>
             </a:extLst>
           </p:cNvPr>
@@ -6238,7 +6238,7 @@
     </p:spTree>
     <p:extLst>
       <p:ext uri="{BB962C8B-B14F-4D97-AF65-F5344CB8AC3E}">
-        <p14:creationId xmlns:p14="http://schemas.microsoft.com/office/powerpoint/2010/main" val="2816573462"/>
+        <p14:creationId xmlns:p14="http://schemas.microsoft.com/office/powerpoint/2010/main" val="2956227623"/>
       </p:ext>
     </p:extLst>
   </p:cSld>
@@ -6270,7 +6270,7 @@
           <p:cNvPr id="2" name="正方形/長方形 1">
             <a:extLst>
               <a:ext uri="{FF2B5EF4-FFF2-40B4-BE49-F238E27FC236}">
-                <a16:creationId xmlns:a16="http://schemas.microsoft.com/office/drawing/2014/main" id="{6697006E-5514-AC0A-A04A-F1CFB74F8339}"/>
+                <a16:creationId xmlns:a16="http://schemas.microsoft.com/office/drawing/2014/main" id="{1F3156FD-9B78-4F62-8DEF-9D2B3082DD9A}"/>
               </a:ext>
             </a:extLst>
           </p:cNvPr>
@@ -6338,7 +6338,7 @@
           <p:cNvPr id="3" name="正方形/長方形 2">
             <a:extLst>
               <a:ext uri="{FF2B5EF4-FFF2-40B4-BE49-F238E27FC236}">
-                <a16:creationId xmlns:a16="http://schemas.microsoft.com/office/drawing/2014/main" id="{35F0C6E7-8901-1C71-8529-2003730C8635}"/>
+                <a16:creationId xmlns:a16="http://schemas.microsoft.com/office/drawing/2014/main" id="{E72F87F0-71A8-3A7D-0BD9-D35C1DB151F2}"/>
               </a:ext>
             </a:extLst>
           </p:cNvPr>
@@ -6406,7 +6406,7 @@
           <p:cNvPr id="4" name="テキスト ボックス 3">
             <a:extLst>
               <a:ext uri="{FF2B5EF4-FFF2-40B4-BE49-F238E27FC236}">
-                <a16:creationId xmlns:a16="http://schemas.microsoft.com/office/drawing/2014/main" id="{7FEE3653-414E-0524-2FEC-B9B11246967E}"/>
+                <a16:creationId xmlns:a16="http://schemas.microsoft.com/office/drawing/2014/main" id="{328D206E-ACFE-514D-BCB6-7034C0295C3F}"/>
               </a:ext>
             </a:extLst>
           </p:cNvPr>
@@ -6459,7 +6459,7 @@
           <p:cNvPr id="5" name="テキスト ボックス 4">
             <a:extLst>
               <a:ext uri="{FF2B5EF4-FFF2-40B4-BE49-F238E27FC236}">
-                <a16:creationId xmlns:a16="http://schemas.microsoft.com/office/drawing/2014/main" id="{49DEB502-0E8A-8ECB-1220-1DCD775E8DAC}"/>
+                <a16:creationId xmlns:a16="http://schemas.microsoft.com/office/drawing/2014/main" id="{1A0C30E8-9673-EE8B-A3E7-FE5F46A94582}"/>
               </a:ext>
             </a:extLst>
           </p:cNvPr>
@@ -6505,7 +6505,7 @@
           <p:cNvPr id="6" name="正方形/長方形 5">
             <a:extLst>
               <a:ext uri="{FF2B5EF4-FFF2-40B4-BE49-F238E27FC236}">
-                <a16:creationId xmlns:a16="http://schemas.microsoft.com/office/drawing/2014/main" id="{01DD8156-E882-213D-F03C-A3551C8B6EDB}"/>
+                <a16:creationId xmlns:a16="http://schemas.microsoft.com/office/drawing/2014/main" id="{0E29094E-B30F-519E-4573-FEAB3F5237B1}"/>
               </a:ext>
             </a:extLst>
           </p:cNvPr>
@@ -6573,7 +6573,7 @@
           <p:cNvPr id="7" name="四角形: 角を丸くする 6">
             <a:extLst>
               <a:ext uri="{FF2B5EF4-FFF2-40B4-BE49-F238E27FC236}">
-                <a16:creationId xmlns:a16="http://schemas.microsoft.com/office/drawing/2014/main" id="{6DD28115-0862-0C77-EA2C-2BC8D7A46792}"/>
+                <a16:creationId xmlns:a16="http://schemas.microsoft.com/office/drawing/2014/main" id="{A1D9DC69-72CF-8589-AE14-9C76A23D78F6}"/>
               </a:ext>
             </a:extLst>
           </p:cNvPr>
@@ -6643,7 +6643,7 @@
           <p:cNvPr id="8" name="テキスト ボックス 7">
             <a:extLst>
               <a:ext uri="{FF2B5EF4-FFF2-40B4-BE49-F238E27FC236}">
-                <a16:creationId xmlns:a16="http://schemas.microsoft.com/office/drawing/2014/main" id="{D2D82E53-98FE-742C-F036-497156E73429}"/>
+                <a16:creationId xmlns:a16="http://schemas.microsoft.com/office/drawing/2014/main" id="{190274D0-D92B-FC0D-7498-47A68C468F50}"/>
               </a:ext>
             </a:extLst>
           </p:cNvPr>
@@ -6689,7 +6689,7 @@
           <p:cNvPr id="9" name="テキスト ボックス 8">
             <a:extLst>
               <a:ext uri="{FF2B5EF4-FFF2-40B4-BE49-F238E27FC236}">
-                <a16:creationId xmlns:a16="http://schemas.microsoft.com/office/drawing/2014/main" id="{A9641C21-6172-8586-E5E6-B73DEE9B58D3}"/>
+                <a16:creationId xmlns:a16="http://schemas.microsoft.com/office/drawing/2014/main" id="{76719FA2-4158-59F9-D8CF-3079C7431584}"/>
               </a:ext>
             </a:extLst>
           </p:cNvPr>
@@ -6735,7 +6735,7 @@
           <p:cNvPr id="10" name="テキスト ボックス 9">
             <a:extLst>
               <a:ext uri="{FF2B5EF4-FFF2-40B4-BE49-F238E27FC236}">
-                <a16:creationId xmlns:a16="http://schemas.microsoft.com/office/drawing/2014/main" id="{AA0E39D4-91B9-F68B-2905-C91374005CB8}"/>
+                <a16:creationId xmlns:a16="http://schemas.microsoft.com/office/drawing/2014/main" id="{0F1E5F7B-F083-AF9F-B52D-0BC893B3C903}"/>
               </a:ext>
             </a:extLst>
           </p:cNvPr>
@@ -6788,7 +6788,7 @@
           <p:cNvPr id="11" name="テキスト ボックス 10">
             <a:extLst>
               <a:ext uri="{FF2B5EF4-FFF2-40B4-BE49-F238E27FC236}">
-                <a16:creationId xmlns:a16="http://schemas.microsoft.com/office/drawing/2014/main" id="{06B51BDB-DCF0-4E5D-65F9-F470A2A4B8F9}"/>
+                <a16:creationId xmlns:a16="http://schemas.microsoft.com/office/drawing/2014/main" id="{ABBE03D3-67FB-6402-3686-63E899570534}"/>
               </a:ext>
             </a:extLst>
           </p:cNvPr>
@@ -6854,7 +6854,7 @@
           <p:cNvPr id="12" name="正方形/長方形 11">
             <a:extLst>
               <a:ext uri="{FF2B5EF4-FFF2-40B4-BE49-F238E27FC236}">
-                <a16:creationId xmlns:a16="http://schemas.microsoft.com/office/drawing/2014/main" id="{FF35B514-975A-23BA-5338-4FA3F451B674}"/>
+                <a16:creationId xmlns:a16="http://schemas.microsoft.com/office/drawing/2014/main" id="{467FAC8F-36FD-DF8D-F073-4973A870F9E8}"/>
               </a:ext>
             </a:extLst>
           </p:cNvPr>
@@ -6922,7 +6922,7 @@
           <p:cNvPr id="13" name="テキスト ボックス 12">
             <a:extLst>
               <a:ext uri="{FF2B5EF4-FFF2-40B4-BE49-F238E27FC236}">
-                <a16:creationId xmlns:a16="http://schemas.microsoft.com/office/drawing/2014/main" id="{E47A2DE2-BB4B-0D5B-3555-BB8B070CEE5F}"/>
+                <a16:creationId xmlns:a16="http://schemas.microsoft.com/office/drawing/2014/main" id="{4AB98908-AB5C-14EB-5594-C26D03C5EDA1}"/>
               </a:ext>
             </a:extLst>
           </p:cNvPr>
@@ -6975,7 +6975,7 @@
           <p:cNvPr id="14" name="楕円 13">
             <a:extLst>
               <a:ext uri="{FF2B5EF4-FFF2-40B4-BE49-F238E27FC236}">
-                <a16:creationId xmlns:a16="http://schemas.microsoft.com/office/drawing/2014/main" id="{12C5BB3E-C867-17BA-3491-5AE0D45B886A}"/>
+                <a16:creationId xmlns:a16="http://schemas.microsoft.com/office/drawing/2014/main" id="{0A2463BB-CCDC-011E-BB37-F536CC5EEEFB}"/>
               </a:ext>
             </a:extLst>
           </p:cNvPr>
@@ -7029,7 +7029,7 @@
           <p:cNvPr id="15" name="四角形: 角を丸くする 14">
             <a:extLst>
               <a:ext uri="{FF2B5EF4-FFF2-40B4-BE49-F238E27FC236}">
-                <a16:creationId xmlns:a16="http://schemas.microsoft.com/office/drawing/2014/main" id="{9181C4D8-35C2-69D5-6ED4-27486883923C}"/>
+                <a16:creationId xmlns:a16="http://schemas.microsoft.com/office/drawing/2014/main" id="{19D9A443-9C3A-BCC4-EB6B-F8A10CC38ACE}"/>
               </a:ext>
             </a:extLst>
           </p:cNvPr>
@@ -7099,7 +7099,7 @@
           <p:cNvPr id="16" name="テキスト ボックス 15">
             <a:extLst>
               <a:ext uri="{FF2B5EF4-FFF2-40B4-BE49-F238E27FC236}">
-                <a16:creationId xmlns:a16="http://schemas.microsoft.com/office/drawing/2014/main" id="{1D5FF260-17C0-E552-5D7C-A1186D9537E2}"/>
+                <a16:creationId xmlns:a16="http://schemas.microsoft.com/office/drawing/2014/main" id="{52557EB5-3158-512D-15D5-0165D1A26172}"/>
               </a:ext>
             </a:extLst>
           </p:cNvPr>
@@ -7145,7 +7145,7 @@
           <p:cNvPr id="17" name="テキスト ボックス 16">
             <a:extLst>
               <a:ext uri="{FF2B5EF4-FFF2-40B4-BE49-F238E27FC236}">
-                <a16:creationId xmlns:a16="http://schemas.microsoft.com/office/drawing/2014/main" id="{E7B31310-FF00-32F0-127B-28379086F513}"/>
+                <a16:creationId xmlns:a16="http://schemas.microsoft.com/office/drawing/2014/main" id="{5DE87210-6166-6548-479E-72C9901C45C1}"/>
               </a:ext>
             </a:extLst>
           </p:cNvPr>
@@ -7191,7 +7191,7 @@
           <p:cNvPr id="18" name="テキスト ボックス 17">
             <a:extLst>
               <a:ext uri="{FF2B5EF4-FFF2-40B4-BE49-F238E27FC236}">
-                <a16:creationId xmlns:a16="http://schemas.microsoft.com/office/drawing/2014/main" id="{70161CBE-D861-678E-1E42-046A60E8CBEF}"/>
+                <a16:creationId xmlns:a16="http://schemas.microsoft.com/office/drawing/2014/main" id="{0085493D-AB3E-03AA-0DE8-BD0795F6DD27}"/>
               </a:ext>
             </a:extLst>
           </p:cNvPr>
@@ -7244,7 +7244,7 @@
           <p:cNvPr id="19" name="楕円 18">
             <a:extLst>
               <a:ext uri="{FF2B5EF4-FFF2-40B4-BE49-F238E27FC236}">
-                <a16:creationId xmlns:a16="http://schemas.microsoft.com/office/drawing/2014/main" id="{3F612623-F682-4E91-F6E0-F52FF54CE1A9}"/>
+                <a16:creationId xmlns:a16="http://schemas.microsoft.com/office/drawing/2014/main" id="{904FE256-5DF0-E62E-C2CE-5C2DAD97EB45}"/>
               </a:ext>
             </a:extLst>
           </p:cNvPr>
@@ -7298,7 +7298,7 @@
           <p:cNvPr id="20" name="四角形: 角を丸くする 19">
             <a:extLst>
               <a:ext uri="{FF2B5EF4-FFF2-40B4-BE49-F238E27FC236}">
-                <a16:creationId xmlns:a16="http://schemas.microsoft.com/office/drawing/2014/main" id="{7261653B-FA27-C432-5343-02FA69680EC0}"/>
+                <a16:creationId xmlns:a16="http://schemas.microsoft.com/office/drawing/2014/main" id="{16A374ED-1859-DFD9-D52C-56FD9C6DF0B1}"/>
               </a:ext>
             </a:extLst>
           </p:cNvPr>
@@ -7368,7 +7368,7 @@
           <p:cNvPr id="21" name="テキスト ボックス 20">
             <a:extLst>
               <a:ext uri="{FF2B5EF4-FFF2-40B4-BE49-F238E27FC236}">
-                <a16:creationId xmlns:a16="http://schemas.microsoft.com/office/drawing/2014/main" id="{FE27E98C-7BA9-D1CA-EA7E-7F359A5C3379}"/>
+                <a16:creationId xmlns:a16="http://schemas.microsoft.com/office/drawing/2014/main" id="{188BDC0E-9EE9-439D-4E31-9A29135727E4}"/>
               </a:ext>
             </a:extLst>
           </p:cNvPr>
@@ -7424,7 +7424,7 @@
           <p:cNvPr id="22" name="テキスト ボックス 21">
             <a:extLst>
               <a:ext uri="{FF2B5EF4-FFF2-40B4-BE49-F238E27FC236}">
-                <a16:creationId xmlns:a16="http://schemas.microsoft.com/office/drawing/2014/main" id="{F7BDEDDD-0BBA-47E2-A458-698A51B2DA46}"/>
+                <a16:creationId xmlns:a16="http://schemas.microsoft.com/office/drawing/2014/main" id="{B0B75784-5135-DC79-7F61-64AD8491220C}"/>
               </a:ext>
             </a:extLst>
           </p:cNvPr>
@@ -7470,7 +7470,7 @@
           <p:cNvPr id="23" name="テキスト ボックス 22">
             <a:extLst>
               <a:ext uri="{FF2B5EF4-FFF2-40B4-BE49-F238E27FC236}">
-                <a16:creationId xmlns:a16="http://schemas.microsoft.com/office/drawing/2014/main" id="{766DFC14-FB34-C4CF-627C-EE3A39960255}"/>
+                <a16:creationId xmlns:a16="http://schemas.microsoft.com/office/drawing/2014/main" id="{8C0F53BD-C25D-D966-CE1C-7E26863C2B00}"/>
               </a:ext>
             </a:extLst>
           </p:cNvPr>
@@ -7516,7 +7516,7 @@
           <p:cNvPr id="24" name="楕円 23">
             <a:extLst>
               <a:ext uri="{FF2B5EF4-FFF2-40B4-BE49-F238E27FC236}">
-                <a16:creationId xmlns:a16="http://schemas.microsoft.com/office/drawing/2014/main" id="{3B8C02A3-DABB-D177-FC03-BA415561C243}"/>
+                <a16:creationId xmlns:a16="http://schemas.microsoft.com/office/drawing/2014/main" id="{F70E73EA-0C5D-9ACE-F0AE-F94E597A62D9}"/>
               </a:ext>
             </a:extLst>
           </p:cNvPr>
@@ -7570,7 +7570,7 @@
           <p:cNvPr id="25" name="四角形: 角を丸くする 24">
             <a:extLst>
               <a:ext uri="{FF2B5EF4-FFF2-40B4-BE49-F238E27FC236}">
-                <a16:creationId xmlns:a16="http://schemas.microsoft.com/office/drawing/2014/main" id="{05467BEF-6286-1520-A95C-AD74FEBAFA4C}"/>
+                <a16:creationId xmlns:a16="http://schemas.microsoft.com/office/drawing/2014/main" id="{708712DD-60B2-F295-3273-C7AA6FE306FA}"/>
               </a:ext>
             </a:extLst>
           </p:cNvPr>
@@ -7640,7 +7640,7 @@
           <p:cNvPr id="26" name="テキスト ボックス 25">
             <a:extLst>
               <a:ext uri="{FF2B5EF4-FFF2-40B4-BE49-F238E27FC236}">
-                <a16:creationId xmlns:a16="http://schemas.microsoft.com/office/drawing/2014/main" id="{563EA26C-7F68-2385-D65D-7145F97B2E81}"/>
+                <a16:creationId xmlns:a16="http://schemas.microsoft.com/office/drawing/2014/main" id="{F60B62F2-7427-1DAD-95E6-D527AF5ECB50}"/>
               </a:ext>
             </a:extLst>
           </p:cNvPr>
@@ -7696,7 +7696,7 @@
           <p:cNvPr id="27" name="テキスト ボックス 26">
             <a:extLst>
               <a:ext uri="{FF2B5EF4-FFF2-40B4-BE49-F238E27FC236}">
-                <a16:creationId xmlns:a16="http://schemas.microsoft.com/office/drawing/2014/main" id="{0F490BB5-ABC0-7E6A-39AD-75A4B5B16205}"/>
+                <a16:creationId xmlns:a16="http://schemas.microsoft.com/office/drawing/2014/main" id="{404BAFC1-B87E-2EEC-7E89-7D8BC3D3494C}"/>
               </a:ext>
             </a:extLst>
           </p:cNvPr>
@@ -7742,7 +7742,7 @@
           <p:cNvPr id="28" name="テキスト ボックス 27">
             <a:extLst>
               <a:ext uri="{FF2B5EF4-FFF2-40B4-BE49-F238E27FC236}">
-                <a16:creationId xmlns:a16="http://schemas.microsoft.com/office/drawing/2014/main" id="{916FDA96-89EA-D55F-E748-B4BEB73E1A53}"/>
+                <a16:creationId xmlns:a16="http://schemas.microsoft.com/office/drawing/2014/main" id="{8001E686-6BBA-CA1F-5736-A59F2714730C}"/>
               </a:ext>
             </a:extLst>
           </p:cNvPr>
@@ -7788,7 +7788,7 @@
           <p:cNvPr id="29" name="楕円 28">
             <a:extLst>
               <a:ext uri="{FF2B5EF4-FFF2-40B4-BE49-F238E27FC236}">
-                <a16:creationId xmlns:a16="http://schemas.microsoft.com/office/drawing/2014/main" id="{9336103B-2FE0-40AC-A7BF-30EA72286620}"/>
+                <a16:creationId xmlns:a16="http://schemas.microsoft.com/office/drawing/2014/main" id="{BF774897-C1A2-4D57-8AF9-CC386AA9D5C6}"/>
               </a:ext>
             </a:extLst>
           </p:cNvPr>
@@ -7842,7 +7842,7 @@
           <p:cNvPr id="30" name="四角形: 角を丸くする 29">
             <a:extLst>
               <a:ext uri="{FF2B5EF4-FFF2-40B4-BE49-F238E27FC236}">
-                <a16:creationId xmlns:a16="http://schemas.microsoft.com/office/drawing/2014/main" id="{8A05BBDD-D26A-CF6A-C8BC-DEA5C4FE6C07}"/>
+                <a16:creationId xmlns:a16="http://schemas.microsoft.com/office/drawing/2014/main" id="{435B1F77-3BC2-FDCF-1339-61969F4761CB}"/>
               </a:ext>
             </a:extLst>
           </p:cNvPr>
@@ -7912,7 +7912,7 @@
           <p:cNvPr id="31" name="テキスト ボックス 30">
             <a:extLst>
               <a:ext uri="{FF2B5EF4-FFF2-40B4-BE49-F238E27FC236}">
-                <a16:creationId xmlns:a16="http://schemas.microsoft.com/office/drawing/2014/main" id="{C936804B-94E3-1603-AE0A-3F1CEEE6CD5D}"/>
+                <a16:creationId xmlns:a16="http://schemas.microsoft.com/office/drawing/2014/main" id="{875B2FA6-9564-BDA7-1651-65E3C12060D9}"/>
               </a:ext>
             </a:extLst>
           </p:cNvPr>
@@ -7958,7 +7958,7 @@
           <p:cNvPr id="32" name="テキスト ボックス 31">
             <a:extLst>
               <a:ext uri="{FF2B5EF4-FFF2-40B4-BE49-F238E27FC236}">
-                <a16:creationId xmlns:a16="http://schemas.microsoft.com/office/drawing/2014/main" id="{200CB14B-628E-F088-4269-6676D9A875A0}"/>
+                <a16:creationId xmlns:a16="http://schemas.microsoft.com/office/drawing/2014/main" id="{E99B82DA-07D6-FF6F-1D5B-3F8A73229D79}"/>
               </a:ext>
             </a:extLst>
           </p:cNvPr>
@@ -8034,7 +8034,7 @@
           <p:cNvPr id="33" name="四角形: 角を丸くする 32">
             <a:extLst>
               <a:ext uri="{FF2B5EF4-FFF2-40B4-BE49-F238E27FC236}">
-                <a16:creationId xmlns:a16="http://schemas.microsoft.com/office/drawing/2014/main" id="{B13FC372-D361-802C-FB6A-25CD4F31AA63}"/>
+                <a16:creationId xmlns:a16="http://schemas.microsoft.com/office/drawing/2014/main" id="{38A1D61A-0DE2-4317-A16E-1F14294889B0}"/>
               </a:ext>
             </a:extLst>
           </p:cNvPr>
@@ -8104,7 +8104,7 @@
           <p:cNvPr id="34" name="正方形/長方形 33">
             <a:extLst>
               <a:ext uri="{FF2B5EF4-FFF2-40B4-BE49-F238E27FC236}">
-                <a16:creationId xmlns:a16="http://schemas.microsoft.com/office/drawing/2014/main" id="{217B792D-7CD8-DDCB-D4A6-B218CAB64ABD}"/>
+                <a16:creationId xmlns:a16="http://schemas.microsoft.com/office/drawing/2014/main" id="{FBA4262D-3898-3B76-AD7C-1C8056BAE4F4}"/>
               </a:ext>
             </a:extLst>
           </p:cNvPr>
@@ -8172,7 +8172,7 @@
           <p:cNvPr id="35" name="テキスト ボックス 34">
             <a:extLst>
               <a:ext uri="{FF2B5EF4-FFF2-40B4-BE49-F238E27FC236}">
-                <a16:creationId xmlns:a16="http://schemas.microsoft.com/office/drawing/2014/main" id="{C84CF8C5-AFCC-CC2A-2AFA-BDC469888957}"/>
+                <a16:creationId xmlns:a16="http://schemas.microsoft.com/office/drawing/2014/main" id="{E15326CE-3763-C372-5C5D-0B045F70677D}"/>
               </a:ext>
             </a:extLst>
           </p:cNvPr>
@@ -8218,7 +8218,7 @@
           <p:cNvPr id="36" name="テキスト ボックス 35">
             <a:extLst>
               <a:ext uri="{FF2B5EF4-FFF2-40B4-BE49-F238E27FC236}">
-                <a16:creationId xmlns:a16="http://schemas.microsoft.com/office/drawing/2014/main" id="{500AB84B-8302-ED63-CF44-8F2E5B551328}"/>
+                <a16:creationId xmlns:a16="http://schemas.microsoft.com/office/drawing/2014/main" id="{AA4BF632-D770-3200-FAEE-905DC54AEDAF}"/>
               </a:ext>
             </a:extLst>
           </p:cNvPr>
@@ -8322,7 +8322,7 @@
     </p:spTree>
     <p:extLst>
       <p:ext uri="{BB962C8B-B14F-4D97-AF65-F5344CB8AC3E}">
-        <p14:creationId xmlns:p14="http://schemas.microsoft.com/office/powerpoint/2010/main" val="3530345362"/>
+        <p14:creationId xmlns:p14="http://schemas.microsoft.com/office/powerpoint/2010/main" val="4183796586"/>
       </p:ext>
     </p:extLst>
   </p:cSld>
@@ -8354,7 +8354,7 @@
           <p:cNvPr id="2" name="正方形/長方形 1">
             <a:extLst>
               <a:ext uri="{FF2B5EF4-FFF2-40B4-BE49-F238E27FC236}">
-                <a16:creationId xmlns:a16="http://schemas.microsoft.com/office/drawing/2014/main" id="{4EE35C30-3A79-5E54-5BA7-F31D0031A105}"/>
+                <a16:creationId xmlns:a16="http://schemas.microsoft.com/office/drawing/2014/main" id="{3A778954-0155-D5E4-DF33-17A7BFF3AB1D}"/>
               </a:ext>
             </a:extLst>
           </p:cNvPr>
@@ -8422,7 +8422,7 @@
           <p:cNvPr id="3" name="正方形/長方形 2">
             <a:extLst>
               <a:ext uri="{FF2B5EF4-FFF2-40B4-BE49-F238E27FC236}">
-                <a16:creationId xmlns:a16="http://schemas.microsoft.com/office/drawing/2014/main" id="{53275A4F-8909-EDDB-9151-A70A39ADD85D}"/>
+                <a16:creationId xmlns:a16="http://schemas.microsoft.com/office/drawing/2014/main" id="{44EB2006-FC7B-A162-4146-58CD6A65178B}"/>
               </a:ext>
             </a:extLst>
           </p:cNvPr>
@@ -8490,7 +8490,7 @@
           <p:cNvPr id="4" name="テキスト ボックス 3">
             <a:extLst>
               <a:ext uri="{FF2B5EF4-FFF2-40B4-BE49-F238E27FC236}">
-                <a16:creationId xmlns:a16="http://schemas.microsoft.com/office/drawing/2014/main" id="{2123056D-EC58-820C-7C82-E59CC69A367A}"/>
+                <a16:creationId xmlns:a16="http://schemas.microsoft.com/office/drawing/2014/main" id="{6D23E420-7B4E-5AFB-EE97-A528B25C5086}"/>
               </a:ext>
             </a:extLst>
           </p:cNvPr>
@@ -8543,7 +8543,7 @@
           <p:cNvPr id="5" name="テキスト ボックス 4">
             <a:extLst>
               <a:ext uri="{FF2B5EF4-FFF2-40B4-BE49-F238E27FC236}">
-                <a16:creationId xmlns:a16="http://schemas.microsoft.com/office/drawing/2014/main" id="{8D7A2BC8-A6AA-48B3-3E7B-A80DBF28886D}"/>
+                <a16:creationId xmlns:a16="http://schemas.microsoft.com/office/drawing/2014/main" id="{AC43EBA4-DF01-6F05-4C71-04A1822D7D48}"/>
               </a:ext>
             </a:extLst>
           </p:cNvPr>
@@ -8589,7 +8589,7 @@
           <p:cNvPr id="6" name="正方形/長方形 5">
             <a:extLst>
               <a:ext uri="{FF2B5EF4-FFF2-40B4-BE49-F238E27FC236}">
-                <a16:creationId xmlns:a16="http://schemas.microsoft.com/office/drawing/2014/main" id="{7E8211CD-10C1-9691-99A9-126CAA6A1F0F}"/>
+                <a16:creationId xmlns:a16="http://schemas.microsoft.com/office/drawing/2014/main" id="{4E3F3435-505D-6311-4A92-E9DED4BC4B55}"/>
               </a:ext>
             </a:extLst>
           </p:cNvPr>
@@ -8657,7 +8657,7 @@
           <p:cNvPr id="7" name="四角形: 角を丸くする 6">
             <a:extLst>
               <a:ext uri="{FF2B5EF4-FFF2-40B4-BE49-F238E27FC236}">
-                <a16:creationId xmlns:a16="http://schemas.microsoft.com/office/drawing/2014/main" id="{DA36B3BD-0319-A1ED-9EB8-AFC1D24DAF65}"/>
+                <a16:creationId xmlns:a16="http://schemas.microsoft.com/office/drawing/2014/main" id="{CD5CAF5B-FF16-967C-5E87-A22D4E4505F0}"/>
               </a:ext>
             </a:extLst>
           </p:cNvPr>
@@ -8727,7 +8727,7 @@
           <p:cNvPr id="8" name="テキスト ボックス 7">
             <a:extLst>
               <a:ext uri="{FF2B5EF4-FFF2-40B4-BE49-F238E27FC236}">
-                <a16:creationId xmlns:a16="http://schemas.microsoft.com/office/drawing/2014/main" id="{A135F6AD-0C79-F6C1-884A-B90C958A7176}"/>
+                <a16:creationId xmlns:a16="http://schemas.microsoft.com/office/drawing/2014/main" id="{1BC370D8-6911-B6BD-1A0B-46F4A1DE8879}"/>
               </a:ext>
             </a:extLst>
           </p:cNvPr>
@@ -8773,7 +8773,7 @@
           <p:cNvPr id="9" name="テキスト ボックス 8">
             <a:extLst>
               <a:ext uri="{FF2B5EF4-FFF2-40B4-BE49-F238E27FC236}">
-                <a16:creationId xmlns:a16="http://schemas.microsoft.com/office/drawing/2014/main" id="{D0814F8E-D351-7AF8-1D38-0B02BDE1AB79}"/>
+                <a16:creationId xmlns:a16="http://schemas.microsoft.com/office/drawing/2014/main" id="{010879A6-0ACA-403F-83F6-7F646891D588}"/>
               </a:ext>
             </a:extLst>
           </p:cNvPr>
@@ -8819,7 +8819,7 @@
           <p:cNvPr id="10" name="テキスト ボックス 9">
             <a:extLst>
               <a:ext uri="{FF2B5EF4-FFF2-40B4-BE49-F238E27FC236}">
-                <a16:creationId xmlns:a16="http://schemas.microsoft.com/office/drawing/2014/main" id="{7AA6BC2C-4B22-96F6-A929-6CD630CC3E44}"/>
+                <a16:creationId xmlns:a16="http://schemas.microsoft.com/office/drawing/2014/main" id="{4E02E4D2-81BE-31F1-7943-B96DB50EBF2F}"/>
               </a:ext>
             </a:extLst>
           </p:cNvPr>
@@ -8872,7 +8872,7 @@
           <p:cNvPr id="11" name="四角形: 角を丸くする 10">
             <a:extLst>
               <a:ext uri="{FF2B5EF4-FFF2-40B4-BE49-F238E27FC236}">
-                <a16:creationId xmlns:a16="http://schemas.microsoft.com/office/drawing/2014/main" id="{32CE5E2C-128B-F25B-F648-4599AC0C5C93}"/>
+                <a16:creationId xmlns:a16="http://schemas.microsoft.com/office/drawing/2014/main" id="{D67F67FC-20DA-8AEB-1B33-F36851F176EA}"/>
               </a:ext>
             </a:extLst>
           </p:cNvPr>
@@ -8928,7 +8928,7 @@
           <p:cNvPr id="12" name="正方形/長方形 11">
             <a:extLst>
               <a:ext uri="{FF2B5EF4-FFF2-40B4-BE49-F238E27FC236}">
-                <a16:creationId xmlns:a16="http://schemas.microsoft.com/office/drawing/2014/main" id="{C299B901-EF48-49BB-5CB5-74AD7599C0C8}"/>
+                <a16:creationId xmlns:a16="http://schemas.microsoft.com/office/drawing/2014/main" id="{22DF6C31-6244-9C92-3255-215DE2273AB1}"/>
               </a:ext>
             </a:extLst>
           </p:cNvPr>
@@ -8996,7 +8996,7 @@
           <p:cNvPr id="13" name="テキスト ボックス 12">
             <a:extLst>
               <a:ext uri="{FF2B5EF4-FFF2-40B4-BE49-F238E27FC236}">
-                <a16:creationId xmlns:a16="http://schemas.microsoft.com/office/drawing/2014/main" id="{82BD14A7-354C-FBAD-1DCD-E8C1675FBF44}"/>
+                <a16:creationId xmlns:a16="http://schemas.microsoft.com/office/drawing/2014/main" id="{44527BCD-298E-9835-512A-08BA9490F0D1}"/>
               </a:ext>
             </a:extLst>
           </p:cNvPr>
@@ -9042,7 +9042,7 @@
           <p:cNvPr id="14" name="テキスト ボックス 13">
             <a:extLst>
               <a:ext uri="{FF2B5EF4-FFF2-40B4-BE49-F238E27FC236}">
-                <a16:creationId xmlns:a16="http://schemas.microsoft.com/office/drawing/2014/main" id="{7B46CDAE-BBFF-2CA9-F1ED-D94C51C0AA42}"/>
+                <a16:creationId xmlns:a16="http://schemas.microsoft.com/office/drawing/2014/main" id="{705A24B8-6659-ABCF-7BAB-14F808EDF777}"/>
               </a:ext>
             </a:extLst>
           </p:cNvPr>
@@ -9088,7 +9088,7 @@
           <p:cNvPr id="15" name="テキスト ボックス 14">
             <a:extLst>
               <a:ext uri="{FF2B5EF4-FFF2-40B4-BE49-F238E27FC236}">
-                <a16:creationId xmlns:a16="http://schemas.microsoft.com/office/drawing/2014/main" id="{F62A06C8-84F4-DB42-CCD6-2E8E2E5D8FE1}"/>
+                <a16:creationId xmlns:a16="http://schemas.microsoft.com/office/drawing/2014/main" id="{121117C9-28E4-0A1F-138C-477B64955C80}"/>
               </a:ext>
             </a:extLst>
           </p:cNvPr>
@@ -9184,7 +9184,7 @@
           <p:cNvPr id="16" name="テキスト ボックス 15">
             <a:extLst>
               <a:ext uri="{FF2B5EF4-FFF2-40B4-BE49-F238E27FC236}">
-                <a16:creationId xmlns:a16="http://schemas.microsoft.com/office/drawing/2014/main" id="{FA84EFA8-960A-ABB0-1E40-D479511C3CB1}"/>
+                <a16:creationId xmlns:a16="http://schemas.microsoft.com/office/drawing/2014/main" id="{0CD4CF97-9C18-513E-553D-2593282109A5}"/>
               </a:ext>
             </a:extLst>
           </p:cNvPr>
@@ -9230,7 +9230,7 @@
           <p:cNvPr id="17" name="テキスト ボックス 16">
             <a:extLst>
               <a:ext uri="{FF2B5EF4-FFF2-40B4-BE49-F238E27FC236}">
-                <a16:creationId xmlns:a16="http://schemas.microsoft.com/office/drawing/2014/main" id="{FA64DB08-5738-CD68-56B5-5957B225C85B}"/>
+                <a16:creationId xmlns:a16="http://schemas.microsoft.com/office/drawing/2014/main" id="{D82EAB42-98AF-EFB9-08A9-35C88F670A38}"/>
               </a:ext>
             </a:extLst>
           </p:cNvPr>
@@ -9296,7 +9296,7 @@
           <p:cNvPr id="18" name="テキスト ボックス 17">
             <a:extLst>
               <a:ext uri="{FF2B5EF4-FFF2-40B4-BE49-F238E27FC236}">
-                <a16:creationId xmlns:a16="http://schemas.microsoft.com/office/drawing/2014/main" id="{564C9A2D-319C-F9B2-3E9D-0E991EC8159F}"/>
+                <a16:creationId xmlns:a16="http://schemas.microsoft.com/office/drawing/2014/main" id="{A496F109-4D95-9CE7-CA01-26FE74AD1C80}"/>
               </a:ext>
             </a:extLst>
           </p:cNvPr>
@@ -9342,7 +9342,7 @@
           <p:cNvPr id="19" name="テキスト ボックス 18">
             <a:extLst>
               <a:ext uri="{FF2B5EF4-FFF2-40B4-BE49-F238E27FC236}">
-                <a16:creationId xmlns:a16="http://schemas.microsoft.com/office/drawing/2014/main" id="{FDF13843-FA41-51D3-D548-785C04E2C823}"/>
+                <a16:creationId xmlns:a16="http://schemas.microsoft.com/office/drawing/2014/main" id="{21BDFFAD-AFED-3AC0-6779-20E0B964EC89}"/>
               </a:ext>
             </a:extLst>
           </p:cNvPr>
@@ -9388,7 +9388,7 @@
           <p:cNvPr id="20" name="四角形: 角を丸くする 19">
             <a:extLst>
               <a:ext uri="{FF2B5EF4-FFF2-40B4-BE49-F238E27FC236}">
-                <a16:creationId xmlns:a16="http://schemas.microsoft.com/office/drawing/2014/main" id="{5D04C86B-CB55-F90C-2E40-9E1D014651FD}"/>
+                <a16:creationId xmlns:a16="http://schemas.microsoft.com/office/drawing/2014/main" id="{F3769EDF-E181-F6D6-2E2A-312EFE136D52}"/>
               </a:ext>
             </a:extLst>
           </p:cNvPr>
@@ -9444,7 +9444,7 @@
           <p:cNvPr id="21" name="正方形/長方形 20">
             <a:extLst>
               <a:ext uri="{FF2B5EF4-FFF2-40B4-BE49-F238E27FC236}">
-                <a16:creationId xmlns:a16="http://schemas.microsoft.com/office/drawing/2014/main" id="{D4662A79-79DA-667F-B8E0-45E088BC54C6}"/>
+                <a16:creationId xmlns:a16="http://schemas.microsoft.com/office/drawing/2014/main" id="{1D78C90D-1AB6-0194-522B-CF9732A9F9C6}"/>
               </a:ext>
             </a:extLst>
           </p:cNvPr>
@@ -9512,7 +9512,7 @@
           <p:cNvPr id="22" name="テキスト ボックス 21">
             <a:extLst>
               <a:ext uri="{FF2B5EF4-FFF2-40B4-BE49-F238E27FC236}">
-                <a16:creationId xmlns:a16="http://schemas.microsoft.com/office/drawing/2014/main" id="{F64B6A7B-79D0-716F-4AC5-F238073790B0}"/>
+                <a16:creationId xmlns:a16="http://schemas.microsoft.com/office/drawing/2014/main" id="{F2C12480-35D6-79C1-5512-05D77D34C38E}"/>
               </a:ext>
             </a:extLst>
           </p:cNvPr>
@@ -9558,7 +9558,7 @@
           <p:cNvPr id="23" name="テキスト ボックス 22">
             <a:extLst>
               <a:ext uri="{FF2B5EF4-FFF2-40B4-BE49-F238E27FC236}">
-                <a16:creationId xmlns:a16="http://schemas.microsoft.com/office/drawing/2014/main" id="{8C4BF547-32FA-C014-E350-9B24A6A8ED2D}"/>
+                <a16:creationId xmlns:a16="http://schemas.microsoft.com/office/drawing/2014/main" id="{FD9A9B94-855E-35CB-F5AF-709FC689C20E}"/>
               </a:ext>
             </a:extLst>
           </p:cNvPr>
@@ -9604,7 +9604,7 @@
           <p:cNvPr id="24" name="正方形/長方形 23">
             <a:extLst>
               <a:ext uri="{FF2B5EF4-FFF2-40B4-BE49-F238E27FC236}">
-                <a16:creationId xmlns:a16="http://schemas.microsoft.com/office/drawing/2014/main" id="{8B9EDC65-7514-55CE-0A7A-48038BC3E198}"/>
+                <a16:creationId xmlns:a16="http://schemas.microsoft.com/office/drawing/2014/main" id="{2A3A600A-8CEF-9E45-2DD0-D40948BE3A30}"/>
               </a:ext>
             </a:extLst>
           </p:cNvPr>
@@ -9672,7 +9672,7 @@
           <p:cNvPr id="25" name="テキスト ボックス 24">
             <a:extLst>
               <a:ext uri="{FF2B5EF4-FFF2-40B4-BE49-F238E27FC236}">
-                <a16:creationId xmlns:a16="http://schemas.microsoft.com/office/drawing/2014/main" id="{A649EC37-9818-8F5F-FE6D-A699AB2E3B86}"/>
+                <a16:creationId xmlns:a16="http://schemas.microsoft.com/office/drawing/2014/main" id="{FB2E9CCD-BB87-9790-E25F-1C5CB61390C0}"/>
               </a:ext>
             </a:extLst>
           </p:cNvPr>
@@ -9718,7 +9718,7 @@
           <p:cNvPr id="26" name="テキスト ボックス 25">
             <a:extLst>
               <a:ext uri="{FF2B5EF4-FFF2-40B4-BE49-F238E27FC236}">
-                <a16:creationId xmlns:a16="http://schemas.microsoft.com/office/drawing/2014/main" id="{197835BC-3D29-EACF-D10D-A34D51642AE2}"/>
+                <a16:creationId xmlns:a16="http://schemas.microsoft.com/office/drawing/2014/main" id="{01D51D41-78DE-304B-00A1-A00A56D4E84A}"/>
               </a:ext>
             </a:extLst>
           </p:cNvPr>
@@ -9784,7 +9784,7 @@
           <p:cNvPr id="27" name="正方形/長方形 26">
             <a:extLst>
               <a:ext uri="{FF2B5EF4-FFF2-40B4-BE49-F238E27FC236}">
-                <a16:creationId xmlns:a16="http://schemas.microsoft.com/office/drawing/2014/main" id="{17947225-83D0-7D10-D32D-D7A159465F46}"/>
+                <a16:creationId xmlns:a16="http://schemas.microsoft.com/office/drawing/2014/main" id="{C6698261-BB65-3A40-CB95-9686C24792A7}"/>
               </a:ext>
             </a:extLst>
           </p:cNvPr>
@@ -9852,7 +9852,7 @@
           <p:cNvPr id="28" name="テキスト ボックス 27">
             <a:extLst>
               <a:ext uri="{FF2B5EF4-FFF2-40B4-BE49-F238E27FC236}">
-                <a16:creationId xmlns:a16="http://schemas.microsoft.com/office/drawing/2014/main" id="{494373DB-7AEA-FC5C-51A5-757D53B80FA8}"/>
+                <a16:creationId xmlns:a16="http://schemas.microsoft.com/office/drawing/2014/main" id="{67BD407E-3AB5-AD6B-8017-4289A1318A73}"/>
               </a:ext>
             </a:extLst>
           </p:cNvPr>
@@ -9898,7 +9898,7 @@
           <p:cNvPr id="29" name="テキスト ボックス 28">
             <a:extLst>
               <a:ext uri="{FF2B5EF4-FFF2-40B4-BE49-F238E27FC236}">
-                <a16:creationId xmlns:a16="http://schemas.microsoft.com/office/drawing/2014/main" id="{E08804B9-5A05-D399-E176-7554FA5143F6}"/>
+                <a16:creationId xmlns:a16="http://schemas.microsoft.com/office/drawing/2014/main" id="{FBFF5D0E-7F11-4A21-3AA4-BF67D5BA2FBF}"/>
               </a:ext>
             </a:extLst>
           </p:cNvPr>
@@ -9981,7 +9981,7 @@
           <p:cNvPr id="30" name="正方形/長方形 29">
             <a:extLst>
               <a:ext uri="{FF2B5EF4-FFF2-40B4-BE49-F238E27FC236}">
-                <a16:creationId xmlns:a16="http://schemas.microsoft.com/office/drawing/2014/main" id="{3F0CDF87-BDB6-F4FF-EA2B-CA6670B3DDE7}"/>
+                <a16:creationId xmlns:a16="http://schemas.microsoft.com/office/drawing/2014/main" id="{902F08EA-0F22-5B3A-1076-B4FA34C01D09}"/>
               </a:ext>
             </a:extLst>
           </p:cNvPr>
@@ -10049,7 +10049,7 @@
           <p:cNvPr id="31" name="テキスト ボックス 30">
             <a:extLst>
               <a:ext uri="{FF2B5EF4-FFF2-40B4-BE49-F238E27FC236}">
-                <a16:creationId xmlns:a16="http://schemas.microsoft.com/office/drawing/2014/main" id="{3A3D677A-D45F-ED4F-C291-35D53974C2A6}"/>
+                <a16:creationId xmlns:a16="http://schemas.microsoft.com/office/drawing/2014/main" id="{2377F726-5452-0D22-F3EC-95008660DB3A}"/>
               </a:ext>
             </a:extLst>
           </p:cNvPr>
@@ -10095,7 +10095,7 @@
           <p:cNvPr id="32" name="テキスト ボックス 31">
             <a:extLst>
               <a:ext uri="{FF2B5EF4-FFF2-40B4-BE49-F238E27FC236}">
-                <a16:creationId xmlns:a16="http://schemas.microsoft.com/office/drawing/2014/main" id="{7FD81309-4047-5121-8EA7-59C6BE2EF6D0}"/>
+                <a16:creationId xmlns:a16="http://schemas.microsoft.com/office/drawing/2014/main" id="{8CA5CDE9-8FD2-9AA1-CF36-D065247BE93E}"/>
               </a:ext>
             </a:extLst>
           </p:cNvPr>
@@ -10149,7 +10149,7 @@
     </p:spTree>
     <p:extLst>
       <p:ext uri="{BB962C8B-B14F-4D97-AF65-F5344CB8AC3E}">
-        <p14:creationId xmlns:p14="http://schemas.microsoft.com/office/powerpoint/2010/main" val="1891120402"/>
+        <p14:creationId xmlns:p14="http://schemas.microsoft.com/office/powerpoint/2010/main" val="2608227586"/>
       </p:ext>
     </p:extLst>
   </p:cSld>
@@ -10181,7 +10181,7 @@
           <p:cNvPr id="2" name="正方形/長方形 1">
             <a:extLst>
               <a:ext uri="{FF2B5EF4-FFF2-40B4-BE49-F238E27FC236}">
-                <a16:creationId xmlns:a16="http://schemas.microsoft.com/office/drawing/2014/main" id="{C8F6397B-AB90-36F0-5DFD-0D518BD4CE4E}"/>
+                <a16:creationId xmlns:a16="http://schemas.microsoft.com/office/drawing/2014/main" id="{2363F74C-8447-9C82-075A-23A4728D1BB1}"/>
               </a:ext>
             </a:extLst>
           </p:cNvPr>
@@ -10249,7 +10249,7 @@
           <p:cNvPr id="3" name="正方形/長方形 2">
             <a:extLst>
               <a:ext uri="{FF2B5EF4-FFF2-40B4-BE49-F238E27FC236}">
-                <a16:creationId xmlns:a16="http://schemas.microsoft.com/office/drawing/2014/main" id="{7B31FD53-28BA-57A6-02F7-FD27C2536E1F}"/>
+                <a16:creationId xmlns:a16="http://schemas.microsoft.com/office/drawing/2014/main" id="{CDB41952-7627-3493-B703-DC471B26F7DC}"/>
               </a:ext>
             </a:extLst>
           </p:cNvPr>
@@ -10317,7 +10317,7 @@
           <p:cNvPr id="4" name="テキスト ボックス 3">
             <a:extLst>
               <a:ext uri="{FF2B5EF4-FFF2-40B4-BE49-F238E27FC236}">
-                <a16:creationId xmlns:a16="http://schemas.microsoft.com/office/drawing/2014/main" id="{F043F845-0274-4FAA-E6F9-DAA54770D3FD}"/>
+                <a16:creationId xmlns:a16="http://schemas.microsoft.com/office/drawing/2014/main" id="{FBE7A79F-1C5E-DFE3-AC1E-33E88647D2EB}"/>
               </a:ext>
             </a:extLst>
           </p:cNvPr>
@@ -10370,7 +10370,7 @@
           <p:cNvPr id="5" name="テキスト ボックス 4">
             <a:extLst>
               <a:ext uri="{FF2B5EF4-FFF2-40B4-BE49-F238E27FC236}">
-                <a16:creationId xmlns:a16="http://schemas.microsoft.com/office/drawing/2014/main" id="{9F3AABED-143B-1E8C-6A8B-7AB5345DE579}"/>
+                <a16:creationId xmlns:a16="http://schemas.microsoft.com/office/drawing/2014/main" id="{C6B69EE7-039D-6469-CC71-AA20B24635CA}"/>
               </a:ext>
             </a:extLst>
           </p:cNvPr>
@@ -10436,7 +10436,7 @@
           <p:cNvPr id="6" name="正方形/長方形 5">
             <a:extLst>
               <a:ext uri="{FF2B5EF4-FFF2-40B4-BE49-F238E27FC236}">
-                <a16:creationId xmlns:a16="http://schemas.microsoft.com/office/drawing/2014/main" id="{7187A18F-D415-817A-F96B-39557F2DF02F}"/>
+                <a16:creationId xmlns:a16="http://schemas.microsoft.com/office/drawing/2014/main" id="{05FEA889-A1F2-8C19-3F7F-6FEF08085D0B}"/>
               </a:ext>
             </a:extLst>
           </p:cNvPr>
@@ -10504,7 +10504,7 @@
           <p:cNvPr id="7" name="テキスト ボックス 6">
             <a:extLst>
               <a:ext uri="{FF2B5EF4-FFF2-40B4-BE49-F238E27FC236}">
-                <a16:creationId xmlns:a16="http://schemas.microsoft.com/office/drawing/2014/main" id="{DBCA997B-1EBA-4D99-C962-D7FE39DF1AB1}"/>
+                <a16:creationId xmlns:a16="http://schemas.microsoft.com/office/drawing/2014/main" id="{3B49D953-EC83-A476-2028-6926049E5FBF}"/>
               </a:ext>
             </a:extLst>
           </p:cNvPr>
@@ -10550,7 +10550,7 @@
           <p:cNvPr id="8" name="テキスト ボックス 7">
             <a:extLst>
               <a:ext uri="{FF2B5EF4-FFF2-40B4-BE49-F238E27FC236}">
-                <a16:creationId xmlns:a16="http://schemas.microsoft.com/office/drawing/2014/main" id="{B19D267A-1833-9A31-26BC-3E0E517F2C3A}"/>
+                <a16:creationId xmlns:a16="http://schemas.microsoft.com/office/drawing/2014/main" id="{1A5ED2A7-E4C1-0C70-6A77-BA3EF8969216}"/>
               </a:ext>
             </a:extLst>
           </p:cNvPr>
@@ -10603,7 +10603,7 @@
           <p:cNvPr id="9" name="四角形: 角を丸くする 8">
             <a:extLst>
               <a:ext uri="{FF2B5EF4-FFF2-40B4-BE49-F238E27FC236}">
-                <a16:creationId xmlns:a16="http://schemas.microsoft.com/office/drawing/2014/main" id="{B7700ED2-4092-2CFA-A454-5747D9E1EDD6}"/>
+                <a16:creationId xmlns:a16="http://schemas.microsoft.com/office/drawing/2014/main" id="{7AB24BB0-A4B5-633E-A327-23E3260CED5D}"/>
               </a:ext>
             </a:extLst>
           </p:cNvPr>
@@ -10673,7 +10673,7 @@
           <p:cNvPr id="10" name="楕円 9">
             <a:extLst>
               <a:ext uri="{FF2B5EF4-FFF2-40B4-BE49-F238E27FC236}">
-                <a16:creationId xmlns:a16="http://schemas.microsoft.com/office/drawing/2014/main" id="{C2EC88A3-DCC6-55E9-28C0-3F8EF1F53B18}"/>
+                <a16:creationId xmlns:a16="http://schemas.microsoft.com/office/drawing/2014/main" id="{BE5F220C-E790-55AE-CEA4-A2843EEDC8F4}"/>
               </a:ext>
             </a:extLst>
           </p:cNvPr>
@@ -10741,7 +10741,7 @@
           <p:cNvPr id="11" name="テキスト ボックス 10">
             <a:extLst>
               <a:ext uri="{FF2B5EF4-FFF2-40B4-BE49-F238E27FC236}">
-                <a16:creationId xmlns:a16="http://schemas.microsoft.com/office/drawing/2014/main" id="{4524A019-F8FF-EF26-F337-8D45B993D0F3}"/>
+                <a16:creationId xmlns:a16="http://schemas.microsoft.com/office/drawing/2014/main" id="{DDFA1E02-47B5-CED9-BCE6-015F30724637}"/>
               </a:ext>
             </a:extLst>
           </p:cNvPr>
@@ -10794,7 +10794,7 @@
           <p:cNvPr id="12" name="テキスト ボックス 11">
             <a:extLst>
               <a:ext uri="{FF2B5EF4-FFF2-40B4-BE49-F238E27FC236}">
-                <a16:creationId xmlns:a16="http://schemas.microsoft.com/office/drawing/2014/main" id="{A2DF4736-3F57-83C5-42F0-8DB7DEA62B11}"/>
+                <a16:creationId xmlns:a16="http://schemas.microsoft.com/office/drawing/2014/main" id="{E3F0D8F8-9F21-AEFB-9C4D-4C1D4A75624D}"/>
               </a:ext>
             </a:extLst>
           </p:cNvPr>
@@ -10840,7 +10840,7 @@
           <p:cNvPr id="13" name="テキスト ボックス 12">
             <a:extLst>
               <a:ext uri="{FF2B5EF4-FFF2-40B4-BE49-F238E27FC236}">
-                <a16:creationId xmlns:a16="http://schemas.microsoft.com/office/drawing/2014/main" id="{2B1AA453-5B3C-56D8-ADAF-1D0695F6B4D2}"/>
+                <a16:creationId xmlns:a16="http://schemas.microsoft.com/office/drawing/2014/main" id="{9A08AD4A-EA18-260D-4B20-A14D4A6552C4}"/>
               </a:ext>
             </a:extLst>
           </p:cNvPr>
@@ -10886,7 +10886,7 @@
           <p:cNvPr id="14" name="四角形: 角を丸くする 13">
             <a:extLst>
               <a:ext uri="{FF2B5EF4-FFF2-40B4-BE49-F238E27FC236}">
-                <a16:creationId xmlns:a16="http://schemas.microsoft.com/office/drawing/2014/main" id="{100D2D71-867E-CAA2-3DFC-DD7AD683945A}"/>
+                <a16:creationId xmlns:a16="http://schemas.microsoft.com/office/drawing/2014/main" id="{2609ECC8-4460-3150-9D60-62B78B08A892}"/>
               </a:ext>
             </a:extLst>
           </p:cNvPr>
@@ -10956,7 +10956,7 @@
           <p:cNvPr id="15" name="楕円 14">
             <a:extLst>
               <a:ext uri="{FF2B5EF4-FFF2-40B4-BE49-F238E27FC236}">
-                <a16:creationId xmlns:a16="http://schemas.microsoft.com/office/drawing/2014/main" id="{B7BC16D6-6A54-19EB-1F9C-98AE2F982201}"/>
+                <a16:creationId xmlns:a16="http://schemas.microsoft.com/office/drawing/2014/main" id="{E5F5732E-D40C-B67E-2F17-CDCD9A4A9C08}"/>
               </a:ext>
             </a:extLst>
           </p:cNvPr>
@@ -11024,7 +11024,7 @@
           <p:cNvPr id="16" name="テキスト ボックス 15">
             <a:extLst>
               <a:ext uri="{FF2B5EF4-FFF2-40B4-BE49-F238E27FC236}">
-                <a16:creationId xmlns:a16="http://schemas.microsoft.com/office/drawing/2014/main" id="{AC0D3384-8342-48BF-0D12-D58C9BA61E98}"/>
+                <a16:creationId xmlns:a16="http://schemas.microsoft.com/office/drawing/2014/main" id="{B5900F7A-EFE3-9D45-D525-DF5142B7ECC1}"/>
               </a:ext>
             </a:extLst>
           </p:cNvPr>
@@ -11077,7 +11077,7 @@
           <p:cNvPr id="17" name="テキスト ボックス 16">
             <a:extLst>
               <a:ext uri="{FF2B5EF4-FFF2-40B4-BE49-F238E27FC236}">
-                <a16:creationId xmlns:a16="http://schemas.microsoft.com/office/drawing/2014/main" id="{B1ADEBBF-DEDB-5091-FFA1-01D561EBE764}"/>
+                <a16:creationId xmlns:a16="http://schemas.microsoft.com/office/drawing/2014/main" id="{5E2FA7BC-31B8-130F-60D2-54C9A4D0B1C4}"/>
               </a:ext>
             </a:extLst>
           </p:cNvPr>
@@ -11123,7 +11123,7 @@
           <p:cNvPr id="18" name="テキスト ボックス 17">
             <a:extLst>
               <a:ext uri="{FF2B5EF4-FFF2-40B4-BE49-F238E27FC236}">
-                <a16:creationId xmlns:a16="http://schemas.microsoft.com/office/drawing/2014/main" id="{9BD576B3-1EA9-0AD3-768A-735F78968629}"/>
+                <a16:creationId xmlns:a16="http://schemas.microsoft.com/office/drawing/2014/main" id="{1AD10062-8372-446A-23D2-936AA5E7D90A}"/>
               </a:ext>
             </a:extLst>
           </p:cNvPr>
@@ -11169,7 +11169,7 @@
           <p:cNvPr id="19" name="四角形: 角を丸くする 18">
             <a:extLst>
               <a:ext uri="{FF2B5EF4-FFF2-40B4-BE49-F238E27FC236}">
-                <a16:creationId xmlns:a16="http://schemas.microsoft.com/office/drawing/2014/main" id="{7B21338A-1948-1D49-FD57-3E7DC21F5CC4}"/>
+                <a16:creationId xmlns:a16="http://schemas.microsoft.com/office/drawing/2014/main" id="{9A92054E-506E-7E75-63A3-A987532CC8A5}"/>
               </a:ext>
             </a:extLst>
           </p:cNvPr>
@@ -11239,7 +11239,7 @@
           <p:cNvPr id="20" name="楕円 19">
             <a:extLst>
               <a:ext uri="{FF2B5EF4-FFF2-40B4-BE49-F238E27FC236}">
-                <a16:creationId xmlns:a16="http://schemas.microsoft.com/office/drawing/2014/main" id="{A1BE60B2-B4C8-C9FE-4CA2-8B0838F2824C}"/>
+                <a16:creationId xmlns:a16="http://schemas.microsoft.com/office/drawing/2014/main" id="{1E755932-73CD-4A30-69CA-FC859C55779B}"/>
               </a:ext>
             </a:extLst>
           </p:cNvPr>
@@ -11307,7 +11307,7 @@
           <p:cNvPr id="21" name="テキスト ボックス 20">
             <a:extLst>
               <a:ext uri="{FF2B5EF4-FFF2-40B4-BE49-F238E27FC236}">
-                <a16:creationId xmlns:a16="http://schemas.microsoft.com/office/drawing/2014/main" id="{2B81C87F-18E7-BF5D-5789-0A9C5E5D029F}"/>
+                <a16:creationId xmlns:a16="http://schemas.microsoft.com/office/drawing/2014/main" id="{87B64103-EEE2-2941-09D8-69D469FE57BB}"/>
               </a:ext>
             </a:extLst>
           </p:cNvPr>
@@ -11360,7 +11360,7 @@
           <p:cNvPr id="22" name="テキスト ボックス 21">
             <a:extLst>
               <a:ext uri="{FF2B5EF4-FFF2-40B4-BE49-F238E27FC236}">
-                <a16:creationId xmlns:a16="http://schemas.microsoft.com/office/drawing/2014/main" id="{AE5D6F04-39C1-B51E-F87C-6E586FB96E7C}"/>
+                <a16:creationId xmlns:a16="http://schemas.microsoft.com/office/drawing/2014/main" id="{45E8326A-7674-5763-E773-95AE6A169D42}"/>
               </a:ext>
             </a:extLst>
           </p:cNvPr>
@@ -11406,7 +11406,7 @@
           <p:cNvPr id="23" name="テキスト ボックス 22">
             <a:extLst>
               <a:ext uri="{FF2B5EF4-FFF2-40B4-BE49-F238E27FC236}">
-                <a16:creationId xmlns:a16="http://schemas.microsoft.com/office/drawing/2014/main" id="{3C6A90CA-B8F8-830D-E928-58BABE18406C}"/>
+                <a16:creationId xmlns:a16="http://schemas.microsoft.com/office/drawing/2014/main" id="{923BAEFE-65D1-4991-B317-B20A6F5DDCBD}"/>
               </a:ext>
             </a:extLst>
           </p:cNvPr>
@@ -11500,7 +11500,7 @@
     </p:spTree>
     <p:extLst>
       <p:ext uri="{BB962C8B-B14F-4D97-AF65-F5344CB8AC3E}">
-        <p14:creationId xmlns:p14="http://schemas.microsoft.com/office/powerpoint/2010/main" val="352229224"/>
+        <p14:creationId xmlns:p14="http://schemas.microsoft.com/office/powerpoint/2010/main" val="2694174200"/>
       </p:ext>
     </p:extLst>
   </p:cSld>
@@ -11532,7 +11532,7 @@
           <p:cNvPr id="2" name="正方形/長方形 1">
             <a:extLst>
               <a:ext uri="{FF2B5EF4-FFF2-40B4-BE49-F238E27FC236}">
-                <a16:creationId xmlns:a16="http://schemas.microsoft.com/office/drawing/2014/main" id="{380862F3-29B1-6DEA-EC30-069872C43E56}"/>
+                <a16:creationId xmlns:a16="http://schemas.microsoft.com/office/drawing/2014/main" id="{6C8DF4F7-68A9-C3F9-216B-575834DEF9BA}"/>
               </a:ext>
             </a:extLst>
           </p:cNvPr>
@@ -11600,7 +11600,7 @@
           <p:cNvPr id="3" name="正方形/長方形 2">
             <a:extLst>
               <a:ext uri="{FF2B5EF4-FFF2-40B4-BE49-F238E27FC236}">
-                <a16:creationId xmlns:a16="http://schemas.microsoft.com/office/drawing/2014/main" id="{7CEC5AAF-8A27-3923-A324-6C348FCA2A32}"/>
+                <a16:creationId xmlns:a16="http://schemas.microsoft.com/office/drawing/2014/main" id="{C1B3673E-0597-3F9E-4639-40D7C85455CC}"/>
               </a:ext>
             </a:extLst>
           </p:cNvPr>
@@ -11668,7 +11668,7 @@
           <p:cNvPr id="4" name="テキスト ボックス 3">
             <a:extLst>
               <a:ext uri="{FF2B5EF4-FFF2-40B4-BE49-F238E27FC236}">
-                <a16:creationId xmlns:a16="http://schemas.microsoft.com/office/drawing/2014/main" id="{B87B5F25-60AB-E3C4-B83E-2BF103EA7308}"/>
+                <a16:creationId xmlns:a16="http://schemas.microsoft.com/office/drawing/2014/main" id="{56B5CD0A-F01D-D37D-6BFA-8753D80B1978}"/>
               </a:ext>
             </a:extLst>
           </p:cNvPr>
@@ -11721,7 +11721,7 @@
           <p:cNvPr id="5" name="テキスト ボックス 4">
             <a:extLst>
               <a:ext uri="{FF2B5EF4-FFF2-40B4-BE49-F238E27FC236}">
-                <a16:creationId xmlns:a16="http://schemas.microsoft.com/office/drawing/2014/main" id="{6790969E-4DCE-15B6-4338-3115F059395B}"/>
+                <a16:creationId xmlns:a16="http://schemas.microsoft.com/office/drawing/2014/main" id="{9A4D7543-B7BE-AEB4-B1EB-2AD24FDDD718}"/>
               </a:ext>
             </a:extLst>
           </p:cNvPr>
@@ -11787,7 +11787,7 @@
           <p:cNvPr id="6" name="正方形/長方形 5">
             <a:extLst>
               <a:ext uri="{FF2B5EF4-FFF2-40B4-BE49-F238E27FC236}">
-                <a16:creationId xmlns:a16="http://schemas.microsoft.com/office/drawing/2014/main" id="{6A263ED9-5305-06CF-2F48-413C3F8F48FB}"/>
+                <a16:creationId xmlns:a16="http://schemas.microsoft.com/office/drawing/2014/main" id="{772BFBDB-FDD8-17BC-89DF-D2982872F86E}"/>
               </a:ext>
             </a:extLst>
           </p:cNvPr>
@@ -11855,7 +11855,7 @@
           <p:cNvPr id="7" name="テキスト ボックス 6">
             <a:extLst>
               <a:ext uri="{FF2B5EF4-FFF2-40B4-BE49-F238E27FC236}">
-                <a16:creationId xmlns:a16="http://schemas.microsoft.com/office/drawing/2014/main" id="{0FB86BB0-0BDD-B179-3363-1945ED129E92}"/>
+                <a16:creationId xmlns:a16="http://schemas.microsoft.com/office/drawing/2014/main" id="{97222006-0B24-E349-326E-E001E3A6F975}"/>
               </a:ext>
             </a:extLst>
           </p:cNvPr>
@@ -11901,7 +11901,7 @@
           <p:cNvPr id="8" name="テキスト ボックス 7">
             <a:extLst>
               <a:ext uri="{FF2B5EF4-FFF2-40B4-BE49-F238E27FC236}">
-                <a16:creationId xmlns:a16="http://schemas.microsoft.com/office/drawing/2014/main" id="{61016AD9-201B-D9B5-3589-1BC80106052D}"/>
+                <a16:creationId xmlns:a16="http://schemas.microsoft.com/office/drawing/2014/main" id="{F2DE5AE8-7EE3-7CF6-F271-BFF2485DF2CB}"/>
               </a:ext>
             </a:extLst>
           </p:cNvPr>
@@ -11954,7 +11954,7 @@
           <p:cNvPr id="9" name="四角形: 角を丸くする 8">
             <a:extLst>
               <a:ext uri="{FF2B5EF4-FFF2-40B4-BE49-F238E27FC236}">
-                <a16:creationId xmlns:a16="http://schemas.microsoft.com/office/drawing/2014/main" id="{BDAD77E3-81E2-F86B-CB76-AAEF89DF7AC9}"/>
+                <a16:creationId xmlns:a16="http://schemas.microsoft.com/office/drawing/2014/main" id="{684D9A1A-9DC5-1027-8F6A-40B1A96DC50A}"/>
               </a:ext>
             </a:extLst>
           </p:cNvPr>
@@ -12024,7 +12024,7 @@
           <p:cNvPr id="10" name="楕円 9">
             <a:extLst>
               <a:ext uri="{FF2B5EF4-FFF2-40B4-BE49-F238E27FC236}">
-                <a16:creationId xmlns:a16="http://schemas.microsoft.com/office/drawing/2014/main" id="{9A4CD2F3-C4F3-FF10-FEE3-7BC5EC899C89}"/>
+                <a16:creationId xmlns:a16="http://schemas.microsoft.com/office/drawing/2014/main" id="{D9F92511-6F29-805E-3811-24874CB8F55A}"/>
               </a:ext>
             </a:extLst>
           </p:cNvPr>
@@ -12092,7 +12092,7 @@
           <p:cNvPr id="11" name="テキスト ボックス 10">
             <a:extLst>
               <a:ext uri="{FF2B5EF4-FFF2-40B4-BE49-F238E27FC236}">
-                <a16:creationId xmlns:a16="http://schemas.microsoft.com/office/drawing/2014/main" id="{3D4A473F-9DCB-3DE2-1B56-6EB09A8F61E6}"/>
+                <a16:creationId xmlns:a16="http://schemas.microsoft.com/office/drawing/2014/main" id="{ABF3C6E5-E5C5-096E-E135-39E34A52D6CB}"/>
               </a:ext>
             </a:extLst>
           </p:cNvPr>
@@ -12145,7 +12145,7 @@
           <p:cNvPr id="12" name="テキスト ボックス 11">
             <a:extLst>
               <a:ext uri="{FF2B5EF4-FFF2-40B4-BE49-F238E27FC236}">
-                <a16:creationId xmlns:a16="http://schemas.microsoft.com/office/drawing/2014/main" id="{4ECFB4C8-1AB3-4783-900D-12E1EC25E5C0}"/>
+                <a16:creationId xmlns:a16="http://schemas.microsoft.com/office/drawing/2014/main" id="{80A7BA63-D0F9-9503-84D0-C6E0C4E46E91}"/>
               </a:ext>
             </a:extLst>
           </p:cNvPr>
@@ -12191,7 +12191,7 @@
           <p:cNvPr id="13" name="テキスト ボックス 12">
             <a:extLst>
               <a:ext uri="{FF2B5EF4-FFF2-40B4-BE49-F238E27FC236}">
-                <a16:creationId xmlns:a16="http://schemas.microsoft.com/office/drawing/2014/main" id="{81A6750A-CC70-6DBC-F542-A61566164A61}"/>
+                <a16:creationId xmlns:a16="http://schemas.microsoft.com/office/drawing/2014/main" id="{1ED3CD46-CD2A-2804-C97E-CAE1BA7E4F5E}"/>
               </a:ext>
             </a:extLst>
           </p:cNvPr>
@@ -12237,7 +12237,7 @@
           <p:cNvPr id="14" name="四角形: 角を丸くする 13">
             <a:extLst>
               <a:ext uri="{FF2B5EF4-FFF2-40B4-BE49-F238E27FC236}">
-                <a16:creationId xmlns:a16="http://schemas.microsoft.com/office/drawing/2014/main" id="{9200DE18-8986-EAEB-7E9C-F1A59AC22992}"/>
+                <a16:creationId xmlns:a16="http://schemas.microsoft.com/office/drawing/2014/main" id="{2C03BDAE-A794-A724-1A8E-0741F953477B}"/>
               </a:ext>
             </a:extLst>
           </p:cNvPr>
@@ -12307,7 +12307,7 @@
           <p:cNvPr id="15" name="楕円 14">
             <a:extLst>
               <a:ext uri="{FF2B5EF4-FFF2-40B4-BE49-F238E27FC236}">
-                <a16:creationId xmlns:a16="http://schemas.microsoft.com/office/drawing/2014/main" id="{0A69F218-2D88-A067-18EB-5EC8F9C78A90}"/>
+                <a16:creationId xmlns:a16="http://schemas.microsoft.com/office/drawing/2014/main" id="{19DCE7A8-04DD-E4E2-B0BD-5A37B5779F97}"/>
               </a:ext>
             </a:extLst>
           </p:cNvPr>
@@ -12375,7 +12375,7 @@
           <p:cNvPr id="16" name="テキスト ボックス 15">
             <a:extLst>
               <a:ext uri="{FF2B5EF4-FFF2-40B4-BE49-F238E27FC236}">
-                <a16:creationId xmlns:a16="http://schemas.microsoft.com/office/drawing/2014/main" id="{EFBE7DF8-9AE2-9AB6-21D7-F801BDF05C9F}"/>
+                <a16:creationId xmlns:a16="http://schemas.microsoft.com/office/drawing/2014/main" id="{7ADB8809-5141-A32E-0900-EFF303EE4427}"/>
               </a:ext>
             </a:extLst>
           </p:cNvPr>
@@ -12428,7 +12428,7 @@
           <p:cNvPr id="17" name="テキスト ボックス 16">
             <a:extLst>
               <a:ext uri="{FF2B5EF4-FFF2-40B4-BE49-F238E27FC236}">
-                <a16:creationId xmlns:a16="http://schemas.microsoft.com/office/drawing/2014/main" id="{7571EE60-5471-82E2-6C82-EC458C9B6817}"/>
+                <a16:creationId xmlns:a16="http://schemas.microsoft.com/office/drawing/2014/main" id="{685AD910-D850-1E5D-E80D-F86876B9E8C6}"/>
               </a:ext>
             </a:extLst>
           </p:cNvPr>
@@ -12474,7 +12474,7 @@
           <p:cNvPr id="18" name="テキスト ボックス 17">
             <a:extLst>
               <a:ext uri="{FF2B5EF4-FFF2-40B4-BE49-F238E27FC236}">
-                <a16:creationId xmlns:a16="http://schemas.microsoft.com/office/drawing/2014/main" id="{0A1451CD-232D-06C0-079C-00804775B286}"/>
+                <a16:creationId xmlns:a16="http://schemas.microsoft.com/office/drawing/2014/main" id="{5DD94A49-CB50-8336-A5B6-3A55454654F4}"/>
               </a:ext>
             </a:extLst>
           </p:cNvPr>
@@ -12520,7 +12520,7 @@
           <p:cNvPr id="19" name="四角形: 角を丸くする 18">
             <a:extLst>
               <a:ext uri="{FF2B5EF4-FFF2-40B4-BE49-F238E27FC236}">
-                <a16:creationId xmlns:a16="http://schemas.microsoft.com/office/drawing/2014/main" id="{86DBAA71-F863-812C-3FC2-3F41CA81FF53}"/>
+                <a16:creationId xmlns:a16="http://schemas.microsoft.com/office/drawing/2014/main" id="{DF145FF0-5EF3-C6D2-0C07-324A8AE2BF1C}"/>
               </a:ext>
             </a:extLst>
           </p:cNvPr>
@@ -12590,7 +12590,7 @@
           <p:cNvPr id="20" name="楕円 19">
             <a:extLst>
               <a:ext uri="{FF2B5EF4-FFF2-40B4-BE49-F238E27FC236}">
-                <a16:creationId xmlns:a16="http://schemas.microsoft.com/office/drawing/2014/main" id="{33560F74-F5D6-E78D-86D4-3FD5F2151728}"/>
+                <a16:creationId xmlns:a16="http://schemas.microsoft.com/office/drawing/2014/main" id="{184AF926-327A-A3CC-B69E-BE6CB64DAF19}"/>
               </a:ext>
             </a:extLst>
           </p:cNvPr>
@@ -12658,7 +12658,7 @@
           <p:cNvPr id="21" name="テキスト ボックス 20">
             <a:extLst>
               <a:ext uri="{FF2B5EF4-FFF2-40B4-BE49-F238E27FC236}">
-                <a16:creationId xmlns:a16="http://schemas.microsoft.com/office/drawing/2014/main" id="{67C15DD4-E722-BB92-6DE8-B93F037A7232}"/>
+                <a16:creationId xmlns:a16="http://schemas.microsoft.com/office/drawing/2014/main" id="{DC52C068-0C84-0E2E-4588-AF34197FBF7D}"/>
               </a:ext>
             </a:extLst>
           </p:cNvPr>
@@ -12711,7 +12711,7 @@
           <p:cNvPr id="22" name="テキスト ボックス 21">
             <a:extLst>
               <a:ext uri="{FF2B5EF4-FFF2-40B4-BE49-F238E27FC236}">
-                <a16:creationId xmlns:a16="http://schemas.microsoft.com/office/drawing/2014/main" id="{28257376-A6F8-9B8D-A036-0CBC5E8DE381}"/>
+                <a16:creationId xmlns:a16="http://schemas.microsoft.com/office/drawing/2014/main" id="{A809CE6D-9CBB-86BC-85FA-FD430B62B27D}"/>
               </a:ext>
             </a:extLst>
           </p:cNvPr>
@@ -12777,7 +12777,7 @@
           <p:cNvPr id="23" name="テキスト ボックス 22">
             <a:extLst>
               <a:ext uri="{FF2B5EF4-FFF2-40B4-BE49-F238E27FC236}">
-                <a16:creationId xmlns:a16="http://schemas.microsoft.com/office/drawing/2014/main" id="{009141D6-0614-5DB8-9CB2-D74632D1146D}"/>
+                <a16:creationId xmlns:a16="http://schemas.microsoft.com/office/drawing/2014/main" id="{AE873167-87BB-30FD-3B0B-12F768F801DC}"/>
               </a:ext>
             </a:extLst>
           </p:cNvPr>
@@ -12841,7 +12841,7 @@
     </p:spTree>
     <p:extLst>
       <p:ext uri="{BB962C8B-B14F-4D97-AF65-F5344CB8AC3E}">
-        <p14:creationId xmlns:p14="http://schemas.microsoft.com/office/powerpoint/2010/main" val="583688623"/>
+        <p14:creationId xmlns:p14="http://schemas.microsoft.com/office/powerpoint/2010/main" val="2869544306"/>
       </p:ext>
     </p:extLst>
   </p:cSld>
@@ -12873,7 +12873,7 @@
           <p:cNvPr id="2" name="正方形/長方形 1">
             <a:extLst>
               <a:ext uri="{FF2B5EF4-FFF2-40B4-BE49-F238E27FC236}">
-                <a16:creationId xmlns:a16="http://schemas.microsoft.com/office/drawing/2014/main" id="{D95D1566-C4B6-6FD9-7EC1-F3B4BC453303}"/>
+                <a16:creationId xmlns:a16="http://schemas.microsoft.com/office/drawing/2014/main" id="{D96C68DF-7F30-C7D6-2FBD-E4C04F2463B5}"/>
               </a:ext>
             </a:extLst>
           </p:cNvPr>
@@ -12941,7 +12941,7 @@
           <p:cNvPr id="3" name="正方形/長方形 2">
             <a:extLst>
               <a:ext uri="{FF2B5EF4-FFF2-40B4-BE49-F238E27FC236}">
-                <a16:creationId xmlns:a16="http://schemas.microsoft.com/office/drawing/2014/main" id="{075B661D-F283-7B2A-803C-B95B0789A08B}"/>
+                <a16:creationId xmlns:a16="http://schemas.microsoft.com/office/drawing/2014/main" id="{175C8538-69D4-3CF8-C703-C3166FBF4639}"/>
               </a:ext>
             </a:extLst>
           </p:cNvPr>
@@ -13009,7 +13009,7 @@
           <p:cNvPr id="4" name="テキスト ボックス 3">
             <a:extLst>
               <a:ext uri="{FF2B5EF4-FFF2-40B4-BE49-F238E27FC236}">
-                <a16:creationId xmlns:a16="http://schemas.microsoft.com/office/drawing/2014/main" id="{0CC3E1BC-DA85-8216-AD89-06C7136FAB0B}"/>
+                <a16:creationId xmlns:a16="http://schemas.microsoft.com/office/drawing/2014/main" id="{65AA1F73-5B72-B47D-0D6F-ABBD8CD1334F}"/>
               </a:ext>
             </a:extLst>
           </p:cNvPr>
@@ -13062,7 +13062,7 @@
           <p:cNvPr id="5" name="テキスト ボックス 4">
             <a:extLst>
               <a:ext uri="{FF2B5EF4-FFF2-40B4-BE49-F238E27FC236}">
-                <a16:creationId xmlns:a16="http://schemas.microsoft.com/office/drawing/2014/main" id="{CC05B1D5-33BD-6B9B-8C33-A10E8561015A}"/>
+                <a16:creationId xmlns:a16="http://schemas.microsoft.com/office/drawing/2014/main" id="{E357E53D-FB9F-88F1-1F52-B431DD18EA8E}"/>
               </a:ext>
             </a:extLst>
           </p:cNvPr>
@@ -13108,7 +13108,7 @@
           <p:cNvPr id="6" name="正方形/長方形 5">
             <a:extLst>
               <a:ext uri="{FF2B5EF4-FFF2-40B4-BE49-F238E27FC236}">
-                <a16:creationId xmlns:a16="http://schemas.microsoft.com/office/drawing/2014/main" id="{DC35F111-467B-CE42-C787-C9FF0046E12F}"/>
+                <a16:creationId xmlns:a16="http://schemas.microsoft.com/office/drawing/2014/main" id="{075C98BA-8503-3203-858C-0A54C2E4D97B}"/>
               </a:ext>
             </a:extLst>
           </p:cNvPr>
@@ -13176,7 +13176,7 @@
           <p:cNvPr id="7" name="テキスト ボックス 6">
             <a:extLst>
               <a:ext uri="{FF2B5EF4-FFF2-40B4-BE49-F238E27FC236}">
-                <a16:creationId xmlns:a16="http://schemas.microsoft.com/office/drawing/2014/main" id="{AB5A4D5B-2B18-9D37-6AFD-7F90CA6C98A9}"/>
+                <a16:creationId xmlns:a16="http://schemas.microsoft.com/office/drawing/2014/main" id="{525DB701-9739-EA54-719E-D1AF2E81CB6E}"/>
               </a:ext>
             </a:extLst>
           </p:cNvPr>
@@ -13222,7 +13222,7 @@
           <p:cNvPr id="8" name="テキスト ボックス 7">
             <a:extLst>
               <a:ext uri="{FF2B5EF4-FFF2-40B4-BE49-F238E27FC236}">
-                <a16:creationId xmlns:a16="http://schemas.microsoft.com/office/drawing/2014/main" id="{102BA932-9B7E-1565-189B-C5532F8A95AA}"/>
+                <a16:creationId xmlns:a16="http://schemas.microsoft.com/office/drawing/2014/main" id="{6EDBF70D-E00A-B6F1-8DE5-0646356E4884}"/>
               </a:ext>
             </a:extLst>
           </p:cNvPr>
@@ -13275,7 +13275,7 @@
           <p:cNvPr id="9" name="テキスト ボックス 8">
             <a:extLst>
               <a:ext uri="{FF2B5EF4-FFF2-40B4-BE49-F238E27FC236}">
-                <a16:creationId xmlns:a16="http://schemas.microsoft.com/office/drawing/2014/main" id="{EABEC702-7492-6FDF-4C74-9B0D5DD647E5}"/>
+                <a16:creationId xmlns:a16="http://schemas.microsoft.com/office/drawing/2014/main" id="{EB344356-C4DB-FF35-DDA0-CB803CD2BB9C}"/>
               </a:ext>
             </a:extLst>
           </p:cNvPr>
@@ -13321,7 +13321,7 @@
           <p:cNvPr id="10" name="表 9">
             <a:extLst>
               <a:ext uri="{FF2B5EF4-FFF2-40B4-BE49-F238E27FC236}">
-                <a16:creationId xmlns:a16="http://schemas.microsoft.com/office/drawing/2014/main" id="{928EEEA5-375C-F13C-8C22-17122E563C16}"/>
+                <a16:creationId xmlns:a16="http://schemas.microsoft.com/office/drawing/2014/main" id="{A2E3263E-7531-B176-B9D7-734034A723A4}"/>
               </a:ext>
             </a:extLst>
           </p:cNvPr>
@@ -13331,7 +13331,7 @@
           <p:nvPr>
             <p:extLst>
               <p:ext uri="{D42A27DB-BD31-4B8C-83A1-F6EECF244321}">
-                <p14:modId xmlns:p14="http://schemas.microsoft.com/office/powerpoint/2010/main" val="3500387817"/>
+                <p14:modId xmlns:p14="http://schemas.microsoft.com/office/powerpoint/2010/main" val="1928455970"/>
               </p:ext>
             </p:extLst>
           </p:nvPr>
@@ -13350,14 +13350,14 @@
                 <a:gridCol w="1905000">
                   <a:extLst>
                     <a:ext uri="{9D8B030D-6E8A-4147-A177-3AD203B41FA5}">
-                      <a16:colId xmlns:a16="http://schemas.microsoft.com/office/drawing/2014/main" val="1753882672"/>
+                      <a16:colId xmlns:a16="http://schemas.microsoft.com/office/drawing/2014/main" val="4008003692"/>
                     </a:ext>
                   </a:extLst>
                 </a:gridCol>
                 <a:gridCol w="3225800">
                   <a:extLst>
                     <a:ext uri="{9D8B030D-6E8A-4147-A177-3AD203B41FA5}">
-                      <a16:colId xmlns:a16="http://schemas.microsoft.com/office/drawing/2014/main" val="1888133915"/>
+                      <a16:colId xmlns:a16="http://schemas.microsoft.com/office/drawing/2014/main" val="278718643"/>
                     </a:ext>
                   </a:extLst>
                 </a:gridCol>
@@ -13431,7 +13431,7 @@
                 </a:tc>
                 <a:extLst>
                   <a:ext uri="{0D108BD9-81ED-4DB2-BD59-A6C34878D82A}">
-                    <a16:rowId xmlns:a16="http://schemas.microsoft.com/office/drawing/2014/main" val="1466574058"/>
+                    <a16:rowId xmlns:a16="http://schemas.microsoft.com/office/drawing/2014/main" val="2521021265"/>
                   </a:ext>
                 </a:extLst>
               </a:tr>
@@ -13514,7 +13514,7 @@
                 </a:tc>
                 <a:extLst>
                   <a:ext uri="{0D108BD9-81ED-4DB2-BD59-A6C34878D82A}">
-                    <a16:rowId xmlns:a16="http://schemas.microsoft.com/office/drawing/2014/main" val="826801604"/>
+                    <a16:rowId xmlns:a16="http://schemas.microsoft.com/office/drawing/2014/main" val="2001558222"/>
                   </a:ext>
                 </a:extLst>
               </a:tr>
@@ -13597,7 +13597,7 @@
                 </a:tc>
                 <a:extLst>
                   <a:ext uri="{0D108BD9-81ED-4DB2-BD59-A6C34878D82A}">
-                    <a16:rowId xmlns:a16="http://schemas.microsoft.com/office/drawing/2014/main" val="2779485856"/>
+                    <a16:rowId xmlns:a16="http://schemas.microsoft.com/office/drawing/2014/main" val="3020589244"/>
                   </a:ext>
                 </a:extLst>
               </a:tr>
@@ -13700,7 +13700,7 @@
                 </a:tc>
                 <a:extLst>
                   <a:ext uri="{0D108BD9-81ED-4DB2-BD59-A6C34878D82A}">
-                    <a16:rowId xmlns:a16="http://schemas.microsoft.com/office/drawing/2014/main" val="1083640429"/>
+                    <a16:rowId xmlns:a16="http://schemas.microsoft.com/office/drawing/2014/main" val="2462209236"/>
                   </a:ext>
                 </a:extLst>
               </a:tr>
@@ -13803,7 +13803,7 @@
                 </a:tc>
                 <a:extLst>
                   <a:ext uri="{0D108BD9-81ED-4DB2-BD59-A6C34878D82A}">
-                    <a16:rowId xmlns:a16="http://schemas.microsoft.com/office/drawing/2014/main" val="3677369418"/>
+                    <a16:rowId xmlns:a16="http://schemas.microsoft.com/office/drawing/2014/main" val="417756942"/>
                   </a:ext>
                 </a:extLst>
               </a:tr>
@@ -13816,7 +13816,7 @@
           <p:cNvPr id="11" name="テキスト ボックス 10">
             <a:extLst>
               <a:ext uri="{FF2B5EF4-FFF2-40B4-BE49-F238E27FC236}">
-                <a16:creationId xmlns:a16="http://schemas.microsoft.com/office/drawing/2014/main" id="{32A2E328-7D96-1481-E1AC-7113062D3C87}"/>
+                <a16:creationId xmlns:a16="http://schemas.microsoft.com/office/drawing/2014/main" id="{0438AC19-14B9-2077-D71F-E42C67374E63}"/>
               </a:ext>
             </a:extLst>
           </p:cNvPr>
@@ -13862,7 +13862,7 @@
           <p:cNvPr id="12" name="表 11">
             <a:extLst>
               <a:ext uri="{FF2B5EF4-FFF2-40B4-BE49-F238E27FC236}">
-                <a16:creationId xmlns:a16="http://schemas.microsoft.com/office/drawing/2014/main" id="{774AA302-4A2C-43D1-4A32-D017EC39A770}"/>
+                <a16:creationId xmlns:a16="http://schemas.microsoft.com/office/drawing/2014/main" id="{0C501282-7E67-B09F-A94C-593FF64AF7B2}"/>
               </a:ext>
             </a:extLst>
           </p:cNvPr>
@@ -13872,7 +13872,7 @@
           <p:nvPr>
             <p:extLst>
               <p:ext uri="{D42A27DB-BD31-4B8C-83A1-F6EECF244321}">
-                <p14:modId xmlns:p14="http://schemas.microsoft.com/office/powerpoint/2010/main" val="3444174513"/>
+                <p14:modId xmlns:p14="http://schemas.microsoft.com/office/powerpoint/2010/main" val="889420729"/>
               </p:ext>
             </p:extLst>
           </p:nvPr>
@@ -13891,14 +13891,14 @@
                 <a:gridCol w="1905000">
                   <a:extLst>
                     <a:ext uri="{9D8B030D-6E8A-4147-A177-3AD203B41FA5}">
-                      <a16:colId xmlns:a16="http://schemas.microsoft.com/office/drawing/2014/main" val="357201204"/>
+                      <a16:colId xmlns:a16="http://schemas.microsoft.com/office/drawing/2014/main" val="1261744215"/>
                     </a:ext>
                   </a:extLst>
                 </a:gridCol>
                 <a:gridCol w="3225800">
                   <a:extLst>
                     <a:ext uri="{9D8B030D-6E8A-4147-A177-3AD203B41FA5}">
-                      <a16:colId xmlns:a16="http://schemas.microsoft.com/office/drawing/2014/main" val="1590411311"/>
+                      <a16:colId xmlns:a16="http://schemas.microsoft.com/office/drawing/2014/main" val="2841341205"/>
                     </a:ext>
                   </a:extLst>
                 </a:gridCol>
@@ -13972,7 +13972,7 @@
                 </a:tc>
                 <a:extLst>
                   <a:ext uri="{0D108BD9-81ED-4DB2-BD59-A6C34878D82A}">
-                    <a16:rowId xmlns:a16="http://schemas.microsoft.com/office/drawing/2014/main" val="1292606200"/>
+                    <a16:rowId xmlns:a16="http://schemas.microsoft.com/office/drawing/2014/main" val="1344316098"/>
                   </a:ext>
                 </a:extLst>
               </a:tr>
@@ -14105,7 +14105,7 @@
                 </a:tc>
                 <a:extLst>
                   <a:ext uri="{0D108BD9-81ED-4DB2-BD59-A6C34878D82A}">
-                    <a16:rowId xmlns:a16="http://schemas.microsoft.com/office/drawing/2014/main" val="3191096570"/>
+                    <a16:rowId xmlns:a16="http://schemas.microsoft.com/office/drawing/2014/main" val="3664466804"/>
                   </a:ext>
                 </a:extLst>
               </a:tr>
@@ -14245,7 +14245,7 @@
                 </a:tc>
                 <a:extLst>
                   <a:ext uri="{0D108BD9-81ED-4DB2-BD59-A6C34878D82A}">
-                    <a16:rowId xmlns:a16="http://schemas.microsoft.com/office/drawing/2014/main" val="2995956232"/>
+                    <a16:rowId xmlns:a16="http://schemas.microsoft.com/office/drawing/2014/main" val="3625139152"/>
                   </a:ext>
                 </a:extLst>
               </a:tr>
@@ -14328,7 +14328,7 @@
                 </a:tc>
                 <a:extLst>
                   <a:ext uri="{0D108BD9-81ED-4DB2-BD59-A6C34878D82A}">
-                    <a16:rowId xmlns:a16="http://schemas.microsoft.com/office/drawing/2014/main" val="301567240"/>
+                    <a16:rowId xmlns:a16="http://schemas.microsoft.com/office/drawing/2014/main" val="1485855142"/>
                   </a:ext>
                 </a:extLst>
               </a:tr>
@@ -14448,7 +14448,7 @@
                 </a:tc>
                 <a:extLst>
                   <a:ext uri="{0D108BD9-81ED-4DB2-BD59-A6C34878D82A}">
-                    <a16:rowId xmlns:a16="http://schemas.microsoft.com/office/drawing/2014/main" val="2382426979"/>
+                    <a16:rowId xmlns:a16="http://schemas.microsoft.com/office/drawing/2014/main" val="1622507997"/>
                   </a:ext>
                 </a:extLst>
               </a:tr>
@@ -14459,7 +14459,7 @@
     </p:spTree>
     <p:extLst>
       <p:ext uri="{BB962C8B-B14F-4D97-AF65-F5344CB8AC3E}">
-        <p14:creationId xmlns:p14="http://schemas.microsoft.com/office/powerpoint/2010/main" val="1007667962"/>
+        <p14:creationId xmlns:p14="http://schemas.microsoft.com/office/powerpoint/2010/main" val="1662343669"/>
       </p:ext>
     </p:extLst>
   </p:cSld>
@@ -14491,7 +14491,7 @@
           <p:cNvPr id="2" name="正方形/長方形 1">
             <a:extLst>
               <a:ext uri="{FF2B5EF4-FFF2-40B4-BE49-F238E27FC236}">
-                <a16:creationId xmlns:a16="http://schemas.microsoft.com/office/drawing/2014/main" id="{60F0BA9A-0D3B-5C10-3964-9E47FAC4F77F}"/>
+                <a16:creationId xmlns:a16="http://schemas.microsoft.com/office/drawing/2014/main" id="{DBC53F4D-10B9-7404-122B-B8D01A648EC2}"/>
               </a:ext>
             </a:extLst>
           </p:cNvPr>
@@ -14559,7 +14559,7 @@
           <p:cNvPr id="3" name="正方形/長方形 2">
             <a:extLst>
               <a:ext uri="{FF2B5EF4-FFF2-40B4-BE49-F238E27FC236}">
-                <a16:creationId xmlns:a16="http://schemas.microsoft.com/office/drawing/2014/main" id="{8E79D427-DCB3-16D3-134A-8ACFA0108159}"/>
+                <a16:creationId xmlns:a16="http://schemas.microsoft.com/office/drawing/2014/main" id="{32E106E5-59D9-F46F-9E8C-31428ED2C6AF}"/>
               </a:ext>
             </a:extLst>
           </p:cNvPr>
@@ -14627,7 +14627,7 @@
           <p:cNvPr id="4" name="楕円 3">
             <a:extLst>
               <a:ext uri="{FF2B5EF4-FFF2-40B4-BE49-F238E27FC236}">
-                <a16:creationId xmlns:a16="http://schemas.microsoft.com/office/drawing/2014/main" id="{E5A294DC-5503-3D0E-1F11-E1D1B076CFAF}"/>
+                <a16:creationId xmlns:a16="http://schemas.microsoft.com/office/drawing/2014/main" id="{BCFBB02A-E8B3-822D-E307-E1899651C447}"/>
               </a:ext>
             </a:extLst>
           </p:cNvPr>
@@ -14697,7 +14697,7 @@
           <p:cNvPr id="5" name="正方形/長方形 4">
             <a:extLst>
               <a:ext uri="{FF2B5EF4-FFF2-40B4-BE49-F238E27FC236}">
-                <a16:creationId xmlns:a16="http://schemas.microsoft.com/office/drawing/2014/main" id="{E1F3F135-022E-5B46-4D4F-E9C1C6EB624F}"/>
+                <a16:creationId xmlns:a16="http://schemas.microsoft.com/office/drawing/2014/main" id="{CF0643B5-9C87-F4F5-53B7-5285070C622B}"/>
               </a:ext>
             </a:extLst>
           </p:cNvPr>
@@ -14765,7 +14765,7 @@
           <p:cNvPr id="6" name="テキスト ボックス 5">
             <a:extLst>
               <a:ext uri="{FF2B5EF4-FFF2-40B4-BE49-F238E27FC236}">
-                <a16:creationId xmlns:a16="http://schemas.microsoft.com/office/drawing/2014/main" id="{0171E701-C826-6D35-19FB-201B21E43D69}"/>
+                <a16:creationId xmlns:a16="http://schemas.microsoft.com/office/drawing/2014/main" id="{89E881F6-5F1F-5BC4-5B0D-18210D50BF42}"/>
               </a:ext>
             </a:extLst>
           </p:cNvPr>
@@ -14811,7 +14811,7 @@
           <p:cNvPr id="7" name="テキスト ボックス 6">
             <a:extLst>
               <a:ext uri="{FF2B5EF4-FFF2-40B4-BE49-F238E27FC236}">
-                <a16:creationId xmlns:a16="http://schemas.microsoft.com/office/drawing/2014/main" id="{506CBFE3-749A-D84E-5D42-91A6E71BEE56}"/>
+                <a16:creationId xmlns:a16="http://schemas.microsoft.com/office/drawing/2014/main" id="{FC799E91-4804-6B13-0536-1E56AF89F14D}"/>
               </a:ext>
             </a:extLst>
           </p:cNvPr>
@@ -14937,7 +14937,7 @@
           <p:cNvPr id="8" name="四角形: 角を丸くする 7">
             <a:extLst>
               <a:ext uri="{FF2B5EF4-FFF2-40B4-BE49-F238E27FC236}">
-                <a16:creationId xmlns:a16="http://schemas.microsoft.com/office/drawing/2014/main" id="{52F4CA7B-7AE7-B845-7F11-2D9E926FD6A4}"/>
+                <a16:creationId xmlns:a16="http://schemas.microsoft.com/office/drawing/2014/main" id="{EBE0B333-9214-70A9-7867-573450119847}"/>
               </a:ext>
             </a:extLst>
           </p:cNvPr>
@@ -15007,7 +15007,7 @@
           <p:cNvPr id="9" name="正方形/長方形 8">
             <a:extLst>
               <a:ext uri="{FF2B5EF4-FFF2-40B4-BE49-F238E27FC236}">
-                <a16:creationId xmlns:a16="http://schemas.microsoft.com/office/drawing/2014/main" id="{C28DFD2F-033A-1610-1D9D-DB10C326E6E1}"/>
+                <a16:creationId xmlns:a16="http://schemas.microsoft.com/office/drawing/2014/main" id="{DAF1133D-E2B6-2F08-E840-800526D27E21}"/>
               </a:ext>
             </a:extLst>
           </p:cNvPr>
@@ -15075,7 +15075,7 @@
           <p:cNvPr id="10" name="テキスト ボックス 9">
             <a:extLst>
               <a:ext uri="{FF2B5EF4-FFF2-40B4-BE49-F238E27FC236}">
-                <a16:creationId xmlns:a16="http://schemas.microsoft.com/office/drawing/2014/main" id="{A6B29C6B-39B1-061D-A6B4-BFC3B7A02A2F}"/>
+                <a16:creationId xmlns:a16="http://schemas.microsoft.com/office/drawing/2014/main" id="{CF7A75E2-1FAE-7BAD-D137-CBF4BC03376E}"/>
               </a:ext>
             </a:extLst>
           </p:cNvPr>
@@ -15121,7 +15121,7 @@
           <p:cNvPr id="11" name="テキスト ボックス 10">
             <a:extLst>
               <a:ext uri="{FF2B5EF4-FFF2-40B4-BE49-F238E27FC236}">
-                <a16:creationId xmlns:a16="http://schemas.microsoft.com/office/drawing/2014/main" id="{3EEA20C9-9753-D244-8704-B446B1CD148D}"/>
+                <a16:creationId xmlns:a16="http://schemas.microsoft.com/office/drawing/2014/main" id="{94A7EEE6-7F58-3B84-0F3E-3A408E0FED27}"/>
               </a:ext>
             </a:extLst>
           </p:cNvPr>
@@ -15167,7 +15167,7 @@
           <p:cNvPr id="12" name="四角形: 角を丸くする 11">
             <a:extLst>
               <a:ext uri="{FF2B5EF4-FFF2-40B4-BE49-F238E27FC236}">
-                <a16:creationId xmlns:a16="http://schemas.microsoft.com/office/drawing/2014/main" id="{10562295-38CA-2624-6DAF-AAC0025508EA}"/>
+                <a16:creationId xmlns:a16="http://schemas.microsoft.com/office/drawing/2014/main" id="{B1D1BB9A-14A2-D116-8E57-FF68B64B94FC}"/>
               </a:ext>
             </a:extLst>
           </p:cNvPr>
@@ -15237,7 +15237,7 @@
           <p:cNvPr id="13" name="正方形/長方形 12">
             <a:extLst>
               <a:ext uri="{FF2B5EF4-FFF2-40B4-BE49-F238E27FC236}">
-                <a16:creationId xmlns:a16="http://schemas.microsoft.com/office/drawing/2014/main" id="{3E4B2C65-7CF1-6906-CFE7-792146B5D659}"/>
+                <a16:creationId xmlns:a16="http://schemas.microsoft.com/office/drawing/2014/main" id="{D4C3E68F-8DC1-CE46-9271-5EA2C659518E}"/>
               </a:ext>
             </a:extLst>
           </p:cNvPr>
@@ -15305,7 +15305,7 @@
           <p:cNvPr id="14" name="テキスト ボックス 13">
             <a:extLst>
               <a:ext uri="{FF2B5EF4-FFF2-40B4-BE49-F238E27FC236}">
-                <a16:creationId xmlns:a16="http://schemas.microsoft.com/office/drawing/2014/main" id="{FF66577A-9B1E-84AF-ACB1-085BF41652AA}"/>
+                <a16:creationId xmlns:a16="http://schemas.microsoft.com/office/drawing/2014/main" id="{6AECA8DC-85EC-0CAA-FA5A-4C0E543B9186}"/>
               </a:ext>
             </a:extLst>
           </p:cNvPr>
@@ -15351,7 +15351,7 @@
           <p:cNvPr id="15" name="テキスト ボックス 14">
             <a:extLst>
               <a:ext uri="{FF2B5EF4-FFF2-40B4-BE49-F238E27FC236}">
-                <a16:creationId xmlns:a16="http://schemas.microsoft.com/office/drawing/2014/main" id="{FAD315A6-F13A-8151-10B4-F962B279BB36}"/>
+                <a16:creationId xmlns:a16="http://schemas.microsoft.com/office/drawing/2014/main" id="{10EF9722-1930-9030-BF6A-D7D1DCBBCA08}"/>
               </a:ext>
             </a:extLst>
           </p:cNvPr>
@@ -15397,7 +15397,7 @@
           <p:cNvPr id="16" name="四角形: 角を丸くする 15">
             <a:extLst>
               <a:ext uri="{FF2B5EF4-FFF2-40B4-BE49-F238E27FC236}">
-                <a16:creationId xmlns:a16="http://schemas.microsoft.com/office/drawing/2014/main" id="{6B53D7DD-5A28-D808-68A8-9D56DC2BF341}"/>
+                <a16:creationId xmlns:a16="http://schemas.microsoft.com/office/drawing/2014/main" id="{D48A8923-53EC-0B79-0F9E-3F6C1390C05B}"/>
               </a:ext>
             </a:extLst>
           </p:cNvPr>
@@ -15467,7 +15467,7 @@
           <p:cNvPr id="17" name="正方形/長方形 16">
             <a:extLst>
               <a:ext uri="{FF2B5EF4-FFF2-40B4-BE49-F238E27FC236}">
-                <a16:creationId xmlns:a16="http://schemas.microsoft.com/office/drawing/2014/main" id="{6C3C961F-2E77-98CA-F498-E0A16654BCC4}"/>
+                <a16:creationId xmlns:a16="http://schemas.microsoft.com/office/drawing/2014/main" id="{EEF43DE3-3175-E386-54BE-F484E1339D2F}"/>
               </a:ext>
             </a:extLst>
           </p:cNvPr>
@@ -15535,7 +15535,7 @@
           <p:cNvPr id="18" name="テキスト ボックス 17">
             <a:extLst>
               <a:ext uri="{FF2B5EF4-FFF2-40B4-BE49-F238E27FC236}">
-                <a16:creationId xmlns:a16="http://schemas.microsoft.com/office/drawing/2014/main" id="{99A6283A-D1CA-05F1-500B-5EA56BE2F5A0}"/>
+                <a16:creationId xmlns:a16="http://schemas.microsoft.com/office/drawing/2014/main" id="{FAD25363-7EB6-14D5-59A2-A9C88FCAD547}"/>
               </a:ext>
             </a:extLst>
           </p:cNvPr>
@@ -15581,7 +15581,7 @@
           <p:cNvPr id="19" name="テキスト ボックス 18">
             <a:extLst>
               <a:ext uri="{FF2B5EF4-FFF2-40B4-BE49-F238E27FC236}">
-                <a16:creationId xmlns:a16="http://schemas.microsoft.com/office/drawing/2014/main" id="{74C732BA-B114-F45F-FC21-5601F0056043}"/>
+                <a16:creationId xmlns:a16="http://schemas.microsoft.com/office/drawing/2014/main" id="{6BA0D66F-84AB-4E91-3AD7-7551C3F28251}"/>
               </a:ext>
             </a:extLst>
           </p:cNvPr>
@@ -15627,7 +15627,7 @@
           <p:cNvPr id="20" name="正方形/長方形 19">
             <a:extLst>
               <a:ext uri="{FF2B5EF4-FFF2-40B4-BE49-F238E27FC236}">
-                <a16:creationId xmlns:a16="http://schemas.microsoft.com/office/drawing/2014/main" id="{B5F0AB91-73F4-1A93-2593-5F2255B394E8}"/>
+                <a16:creationId xmlns:a16="http://schemas.microsoft.com/office/drawing/2014/main" id="{3317ADA3-D2DA-A57D-31CF-67F3D3304A2F}"/>
               </a:ext>
             </a:extLst>
           </p:cNvPr>
@@ -15695,7 +15695,7 @@
           <p:cNvPr id="21" name="テキスト ボックス 20">
             <a:extLst>
               <a:ext uri="{FF2B5EF4-FFF2-40B4-BE49-F238E27FC236}">
-                <a16:creationId xmlns:a16="http://schemas.microsoft.com/office/drawing/2014/main" id="{7240D523-4334-A756-95B2-6230CB01A023}"/>
+                <a16:creationId xmlns:a16="http://schemas.microsoft.com/office/drawing/2014/main" id="{78B56C8B-736D-B2C4-6FB4-422EEF1B4BB2}"/>
               </a:ext>
             </a:extLst>
           </p:cNvPr>
@@ -15759,7 +15759,7 @@
     </p:spTree>
     <p:extLst>
       <p:ext uri="{BB962C8B-B14F-4D97-AF65-F5344CB8AC3E}">
-        <p14:creationId xmlns:p14="http://schemas.microsoft.com/office/powerpoint/2010/main" val="2208343578"/>
+        <p14:creationId xmlns:p14="http://schemas.microsoft.com/office/powerpoint/2010/main" val="9819359"/>
       </p:ext>
     </p:extLst>
   </p:cSld>
@@ -15791,7 +15791,7 @@
           <p:cNvPr id="2" name="正方形/長方形 1">
             <a:extLst>
               <a:ext uri="{FF2B5EF4-FFF2-40B4-BE49-F238E27FC236}">
-                <a16:creationId xmlns:a16="http://schemas.microsoft.com/office/drawing/2014/main" id="{1FA0B872-7660-E271-1FA7-4E9BEB3D45BD}"/>
+                <a16:creationId xmlns:a16="http://schemas.microsoft.com/office/drawing/2014/main" id="{7E9A0575-FF77-5AB5-FCA3-AFE1FF7C17AC}"/>
               </a:ext>
             </a:extLst>
           </p:cNvPr>
@@ -15859,7 +15859,7 @@
           <p:cNvPr id="3" name="正方形/長方形 2">
             <a:extLst>
               <a:ext uri="{FF2B5EF4-FFF2-40B4-BE49-F238E27FC236}">
-                <a16:creationId xmlns:a16="http://schemas.microsoft.com/office/drawing/2014/main" id="{F67BC38C-FAD0-DF17-304A-0A7758D87563}"/>
+                <a16:creationId xmlns:a16="http://schemas.microsoft.com/office/drawing/2014/main" id="{F5D39797-5404-1E65-1910-49C609397E5B}"/>
               </a:ext>
             </a:extLst>
           </p:cNvPr>
@@ -15927,7 +15927,7 @@
           <p:cNvPr id="4" name="テキスト ボックス 3">
             <a:extLst>
               <a:ext uri="{FF2B5EF4-FFF2-40B4-BE49-F238E27FC236}">
-                <a16:creationId xmlns:a16="http://schemas.microsoft.com/office/drawing/2014/main" id="{B91A3754-2244-B0DF-B4EB-B2E295A6DD53}"/>
+                <a16:creationId xmlns:a16="http://schemas.microsoft.com/office/drawing/2014/main" id="{F2E70247-FFB4-D450-761A-5A53C42BEF62}"/>
               </a:ext>
             </a:extLst>
           </p:cNvPr>
@@ -15980,7 +15980,7 @@
           <p:cNvPr id="5" name="テキスト ボックス 4">
             <a:extLst>
               <a:ext uri="{FF2B5EF4-FFF2-40B4-BE49-F238E27FC236}">
-                <a16:creationId xmlns:a16="http://schemas.microsoft.com/office/drawing/2014/main" id="{A93CF1DE-367E-F0F0-0E44-FF6BB57C09A5}"/>
+                <a16:creationId xmlns:a16="http://schemas.microsoft.com/office/drawing/2014/main" id="{368AC513-E5A3-0CAB-D2D5-295ABAE8D21F}"/>
               </a:ext>
             </a:extLst>
           </p:cNvPr>
@@ -16026,7 +16026,7 @@
           <p:cNvPr id="6" name="正方形/長方形 5">
             <a:extLst>
               <a:ext uri="{FF2B5EF4-FFF2-40B4-BE49-F238E27FC236}">
-                <a16:creationId xmlns:a16="http://schemas.microsoft.com/office/drawing/2014/main" id="{91F75E54-567B-EEBB-0CB8-4CDC9582CE61}"/>
+                <a16:creationId xmlns:a16="http://schemas.microsoft.com/office/drawing/2014/main" id="{B7C4C017-D9A0-D6AD-9480-28EA25720C5C}"/>
               </a:ext>
             </a:extLst>
           </p:cNvPr>
@@ -16094,7 +16094,7 @@
           <p:cNvPr id="7" name="テキスト ボックス 6">
             <a:extLst>
               <a:ext uri="{FF2B5EF4-FFF2-40B4-BE49-F238E27FC236}">
-                <a16:creationId xmlns:a16="http://schemas.microsoft.com/office/drawing/2014/main" id="{EB0E6B6B-1AC1-4CE4-0AE2-A250D6C618C6}"/>
+                <a16:creationId xmlns:a16="http://schemas.microsoft.com/office/drawing/2014/main" id="{C2E34B8E-25E7-A52B-E1D0-0B463F8FB7BF}"/>
               </a:ext>
             </a:extLst>
           </p:cNvPr>
@@ -16140,7 +16140,7 @@
           <p:cNvPr id="8" name="テキスト ボックス 7">
             <a:extLst>
               <a:ext uri="{FF2B5EF4-FFF2-40B4-BE49-F238E27FC236}">
-                <a16:creationId xmlns:a16="http://schemas.microsoft.com/office/drawing/2014/main" id="{18EDA6DF-9704-E98C-9DC9-2BB0161A139B}"/>
+                <a16:creationId xmlns:a16="http://schemas.microsoft.com/office/drawing/2014/main" id="{2A5C319B-56B3-ABEE-A068-B65F7CC2AEA5}"/>
               </a:ext>
             </a:extLst>
           </p:cNvPr>
@@ -16193,7 +16193,7 @@
           <p:cNvPr id="9" name="テキスト ボックス 8">
             <a:extLst>
               <a:ext uri="{FF2B5EF4-FFF2-40B4-BE49-F238E27FC236}">
-                <a16:creationId xmlns:a16="http://schemas.microsoft.com/office/drawing/2014/main" id="{C94DF829-3098-00D0-7060-4A23BEED9DA2}"/>
+                <a16:creationId xmlns:a16="http://schemas.microsoft.com/office/drawing/2014/main" id="{97A855E8-D57A-B434-35FD-7E877AA173A6}"/>
               </a:ext>
             </a:extLst>
           </p:cNvPr>
@@ -16259,7 +16259,7 @@
           <p:cNvPr id="10" name="四角形: 角を丸くする 9">
             <a:extLst>
               <a:ext uri="{FF2B5EF4-FFF2-40B4-BE49-F238E27FC236}">
-                <a16:creationId xmlns:a16="http://schemas.microsoft.com/office/drawing/2014/main" id="{9E2B87FF-14C8-64E5-C85A-7DD0184D636E}"/>
+                <a16:creationId xmlns:a16="http://schemas.microsoft.com/office/drawing/2014/main" id="{683FC622-0913-6F64-E44E-AF8400C9A4CF}"/>
               </a:ext>
             </a:extLst>
           </p:cNvPr>
@@ -16315,7 +16315,7 @@
           <p:cNvPr id="11" name="正方形/長方形 10">
             <a:extLst>
               <a:ext uri="{FF2B5EF4-FFF2-40B4-BE49-F238E27FC236}">
-                <a16:creationId xmlns:a16="http://schemas.microsoft.com/office/drawing/2014/main" id="{66462ECA-56FF-6F0E-46F1-1E06AB21C0DB}"/>
+                <a16:creationId xmlns:a16="http://schemas.microsoft.com/office/drawing/2014/main" id="{F4FF06AF-EBDC-16BD-7E8E-25FCDE472519}"/>
               </a:ext>
             </a:extLst>
           </p:cNvPr>
@@ -16383,7 +16383,7 @@
           <p:cNvPr id="12" name="四角形: 角を丸くする 11">
             <a:extLst>
               <a:ext uri="{FF2B5EF4-FFF2-40B4-BE49-F238E27FC236}">
-                <a16:creationId xmlns:a16="http://schemas.microsoft.com/office/drawing/2014/main" id="{98DC91A3-238D-0765-5E1A-9773F750B6BA}"/>
+                <a16:creationId xmlns:a16="http://schemas.microsoft.com/office/drawing/2014/main" id="{B1417CF0-73DC-E41F-E5A0-2EE04E3F8758}"/>
               </a:ext>
             </a:extLst>
           </p:cNvPr>
@@ -16453,7 +16453,7 @@
           <p:cNvPr id="13" name="テキスト ボックス 12">
             <a:extLst>
               <a:ext uri="{FF2B5EF4-FFF2-40B4-BE49-F238E27FC236}">
-                <a16:creationId xmlns:a16="http://schemas.microsoft.com/office/drawing/2014/main" id="{CD8DB5E4-ED35-C036-FF3E-4FED9BE738BD}"/>
+                <a16:creationId xmlns:a16="http://schemas.microsoft.com/office/drawing/2014/main" id="{CA641D61-2BF7-FDA9-3457-949AA073DF74}"/>
               </a:ext>
             </a:extLst>
           </p:cNvPr>
@@ -16506,7 +16506,7 @@
           <p:cNvPr id="14" name="テキスト ボックス 13">
             <a:extLst>
               <a:ext uri="{FF2B5EF4-FFF2-40B4-BE49-F238E27FC236}">
-                <a16:creationId xmlns:a16="http://schemas.microsoft.com/office/drawing/2014/main" id="{F716A882-C992-4C4D-F266-1AE53ACB1747}"/>
+                <a16:creationId xmlns:a16="http://schemas.microsoft.com/office/drawing/2014/main" id="{BDD7524E-85B0-00B0-1CD8-6323425D00FB}"/>
               </a:ext>
             </a:extLst>
           </p:cNvPr>
@@ -16552,7 +16552,7 @@
           <p:cNvPr id="15" name="テキスト ボックス 14">
             <a:extLst>
               <a:ext uri="{FF2B5EF4-FFF2-40B4-BE49-F238E27FC236}">
-                <a16:creationId xmlns:a16="http://schemas.microsoft.com/office/drawing/2014/main" id="{84C8EBC4-B7AF-F178-EED2-846F3385328B}"/>
+                <a16:creationId xmlns:a16="http://schemas.microsoft.com/office/drawing/2014/main" id="{4E1CF2F2-57A2-B547-74DB-8EBCAFD7E6DA}"/>
               </a:ext>
             </a:extLst>
           </p:cNvPr>
@@ -16598,7 +16598,7 @@
           <p:cNvPr id="16" name="テキスト ボックス 15">
             <a:extLst>
               <a:ext uri="{FF2B5EF4-FFF2-40B4-BE49-F238E27FC236}">
-                <a16:creationId xmlns:a16="http://schemas.microsoft.com/office/drawing/2014/main" id="{38D182BE-6A5C-6D26-4B7E-0800C48BD632}"/>
+                <a16:creationId xmlns:a16="http://schemas.microsoft.com/office/drawing/2014/main" id="{8653288A-B2BA-22CB-924B-BE084CD16EEF}"/>
               </a:ext>
             </a:extLst>
           </p:cNvPr>
@@ -16687,7 +16687,7 @@
           <p:cNvPr id="17" name="四角形: 角を丸くする 16">
             <a:extLst>
               <a:ext uri="{FF2B5EF4-FFF2-40B4-BE49-F238E27FC236}">
-                <a16:creationId xmlns:a16="http://schemas.microsoft.com/office/drawing/2014/main" id="{DC70527D-6220-1C7A-1F6E-07CB4F10C9D4}"/>
+                <a16:creationId xmlns:a16="http://schemas.microsoft.com/office/drawing/2014/main" id="{7D16BCE6-B761-FC57-873D-ABDCC67FB32F}"/>
               </a:ext>
             </a:extLst>
           </p:cNvPr>
@@ -16743,7 +16743,7 @@
           <p:cNvPr id="18" name="正方形/長方形 17">
             <a:extLst>
               <a:ext uri="{FF2B5EF4-FFF2-40B4-BE49-F238E27FC236}">
-                <a16:creationId xmlns:a16="http://schemas.microsoft.com/office/drawing/2014/main" id="{BBC379F0-D635-7AC0-ADEB-D777D16D2C97}"/>
+                <a16:creationId xmlns:a16="http://schemas.microsoft.com/office/drawing/2014/main" id="{B0D55144-9A90-2299-BC49-8CEC37EE5A7F}"/>
               </a:ext>
             </a:extLst>
           </p:cNvPr>
@@ -16811,7 +16811,7 @@
           <p:cNvPr id="19" name="四角形: 角を丸くする 18">
             <a:extLst>
               <a:ext uri="{FF2B5EF4-FFF2-40B4-BE49-F238E27FC236}">
-                <a16:creationId xmlns:a16="http://schemas.microsoft.com/office/drawing/2014/main" id="{38EDA165-9460-C70A-EE64-66EBC27567A8}"/>
+                <a16:creationId xmlns:a16="http://schemas.microsoft.com/office/drawing/2014/main" id="{DD35E504-2C5D-E35E-8590-EEB5BD7A9C76}"/>
               </a:ext>
             </a:extLst>
           </p:cNvPr>
@@ -16881,7 +16881,7 @@
           <p:cNvPr id="20" name="テキスト ボックス 19">
             <a:extLst>
               <a:ext uri="{FF2B5EF4-FFF2-40B4-BE49-F238E27FC236}">
-                <a16:creationId xmlns:a16="http://schemas.microsoft.com/office/drawing/2014/main" id="{DFF1997A-5E83-C6C6-A52D-006B4791597E}"/>
+                <a16:creationId xmlns:a16="http://schemas.microsoft.com/office/drawing/2014/main" id="{621C7C62-3008-C17C-9A70-0A36AA6A89C0}"/>
               </a:ext>
             </a:extLst>
           </p:cNvPr>
@@ -16934,7 +16934,7 @@
           <p:cNvPr id="21" name="テキスト ボックス 20">
             <a:extLst>
               <a:ext uri="{FF2B5EF4-FFF2-40B4-BE49-F238E27FC236}">
-                <a16:creationId xmlns:a16="http://schemas.microsoft.com/office/drawing/2014/main" id="{6E2A782E-62DF-FF04-3AAF-B3EAF9674ECA}"/>
+                <a16:creationId xmlns:a16="http://schemas.microsoft.com/office/drawing/2014/main" id="{DC96E4FA-7E57-65E2-5F88-1FD1445985B8}"/>
               </a:ext>
             </a:extLst>
           </p:cNvPr>
@@ -16980,7 +16980,7 @@
           <p:cNvPr id="22" name="テキスト ボックス 21">
             <a:extLst>
               <a:ext uri="{FF2B5EF4-FFF2-40B4-BE49-F238E27FC236}">
-                <a16:creationId xmlns:a16="http://schemas.microsoft.com/office/drawing/2014/main" id="{80D473D2-CE16-456B-7B3C-50B5EDCEE4CB}"/>
+                <a16:creationId xmlns:a16="http://schemas.microsoft.com/office/drawing/2014/main" id="{6158B66D-9E8E-5721-2966-0E2C161EB25F}"/>
               </a:ext>
             </a:extLst>
           </p:cNvPr>
@@ -17026,7 +17026,7 @@
           <p:cNvPr id="23" name="テキスト ボックス 22">
             <a:extLst>
               <a:ext uri="{FF2B5EF4-FFF2-40B4-BE49-F238E27FC236}">
-                <a16:creationId xmlns:a16="http://schemas.microsoft.com/office/drawing/2014/main" id="{CE70D43A-AAFC-EA19-EFFF-E1B3825E8477}"/>
+                <a16:creationId xmlns:a16="http://schemas.microsoft.com/office/drawing/2014/main" id="{E575B9BC-FBDE-D4B3-0965-87E006865CC4}"/>
               </a:ext>
             </a:extLst>
           </p:cNvPr>
@@ -17115,7 +17115,7 @@
           <p:cNvPr id="24" name="四角形: 角を丸くする 23">
             <a:extLst>
               <a:ext uri="{FF2B5EF4-FFF2-40B4-BE49-F238E27FC236}">
-                <a16:creationId xmlns:a16="http://schemas.microsoft.com/office/drawing/2014/main" id="{70917622-46D9-1A4D-6269-CF6CF259B733}"/>
+                <a16:creationId xmlns:a16="http://schemas.microsoft.com/office/drawing/2014/main" id="{5E33799D-8A4D-4B7D-8500-B227DBBB118E}"/>
               </a:ext>
             </a:extLst>
           </p:cNvPr>
@@ -17185,7 +17185,7 @@
           <p:cNvPr id="25" name="正方形/長方形 24">
             <a:extLst>
               <a:ext uri="{FF2B5EF4-FFF2-40B4-BE49-F238E27FC236}">
-                <a16:creationId xmlns:a16="http://schemas.microsoft.com/office/drawing/2014/main" id="{8F27201A-80E0-5AB7-4348-D6754DBD6030}"/>
+                <a16:creationId xmlns:a16="http://schemas.microsoft.com/office/drawing/2014/main" id="{7F27875D-A364-71D3-226E-7B4642466C71}"/>
               </a:ext>
             </a:extLst>
           </p:cNvPr>
@@ -17253,7 +17253,7 @@
           <p:cNvPr id="26" name="テキスト ボックス 25">
             <a:extLst>
               <a:ext uri="{FF2B5EF4-FFF2-40B4-BE49-F238E27FC236}">
-                <a16:creationId xmlns:a16="http://schemas.microsoft.com/office/drawing/2014/main" id="{BAFC5419-133F-FA87-0FB0-7C10C87CD45F}"/>
+                <a16:creationId xmlns:a16="http://schemas.microsoft.com/office/drawing/2014/main" id="{F3534B2A-E3EC-74E9-65F2-AC3D887C54D1}"/>
               </a:ext>
             </a:extLst>
           </p:cNvPr>
@@ -17306,7 +17306,7 @@
           <p:cNvPr id="27" name="テキスト ボックス 26">
             <a:extLst>
               <a:ext uri="{FF2B5EF4-FFF2-40B4-BE49-F238E27FC236}">
-                <a16:creationId xmlns:a16="http://schemas.microsoft.com/office/drawing/2014/main" id="{F991D2C5-CAE6-7146-5612-81FF3659BC38}"/>
+                <a16:creationId xmlns:a16="http://schemas.microsoft.com/office/drawing/2014/main" id="{EE2D8026-52A8-B53A-70C3-B6F2FDD72413}"/>
               </a:ext>
             </a:extLst>
           </p:cNvPr>
@@ -17350,7 +17350,7 @@
     </p:spTree>
     <p:extLst>
       <p:ext uri="{BB962C8B-B14F-4D97-AF65-F5344CB8AC3E}">
-        <p14:creationId xmlns:p14="http://schemas.microsoft.com/office/powerpoint/2010/main" val="3776253345"/>
+        <p14:creationId xmlns:p14="http://schemas.microsoft.com/office/powerpoint/2010/main" val="4077495045"/>
       </p:ext>
     </p:extLst>
   </p:cSld>
@@ -17382,7 +17382,7 @@
           <p:cNvPr id="2" name="正方形/長方形 1">
             <a:extLst>
               <a:ext uri="{FF2B5EF4-FFF2-40B4-BE49-F238E27FC236}">
-                <a16:creationId xmlns:a16="http://schemas.microsoft.com/office/drawing/2014/main" id="{C681FDAD-9072-6D72-FDDE-15E596AE96FA}"/>
+                <a16:creationId xmlns:a16="http://schemas.microsoft.com/office/drawing/2014/main" id="{9665926D-1C55-4B5B-94D1-C81721723AD4}"/>
               </a:ext>
             </a:extLst>
           </p:cNvPr>
@@ -17450,7 +17450,7 @@
           <p:cNvPr id="3" name="正方形/長方形 2">
             <a:extLst>
               <a:ext uri="{FF2B5EF4-FFF2-40B4-BE49-F238E27FC236}">
-                <a16:creationId xmlns:a16="http://schemas.microsoft.com/office/drawing/2014/main" id="{B3F204FA-9962-52CF-7C88-FFEA20721E2F}"/>
+                <a16:creationId xmlns:a16="http://schemas.microsoft.com/office/drawing/2014/main" id="{368A0B70-EE1F-72AB-CAE5-D25107D4F331}"/>
               </a:ext>
             </a:extLst>
           </p:cNvPr>
@@ -17518,7 +17518,7 @@
           <p:cNvPr id="4" name="テキスト ボックス 3">
             <a:extLst>
               <a:ext uri="{FF2B5EF4-FFF2-40B4-BE49-F238E27FC236}">
-                <a16:creationId xmlns:a16="http://schemas.microsoft.com/office/drawing/2014/main" id="{70B7EE15-E2DE-F7CA-20F6-1FE3C540E35C}"/>
+                <a16:creationId xmlns:a16="http://schemas.microsoft.com/office/drawing/2014/main" id="{FB460E08-86F9-300B-8D2A-C17ED08DED35}"/>
               </a:ext>
             </a:extLst>
           </p:cNvPr>
@@ -17571,7 +17571,7 @@
           <p:cNvPr id="5" name="テキスト ボックス 4">
             <a:extLst>
               <a:ext uri="{FF2B5EF4-FFF2-40B4-BE49-F238E27FC236}">
-                <a16:creationId xmlns:a16="http://schemas.microsoft.com/office/drawing/2014/main" id="{FFC8B5AE-2E0A-FBA7-C234-7D802B4354D4}"/>
+                <a16:creationId xmlns:a16="http://schemas.microsoft.com/office/drawing/2014/main" id="{5B37D63E-D490-8D51-735C-CA40B78FD318}"/>
               </a:ext>
             </a:extLst>
           </p:cNvPr>
@@ -17617,7 +17617,7 @@
           <p:cNvPr id="6" name="正方形/長方形 5">
             <a:extLst>
               <a:ext uri="{FF2B5EF4-FFF2-40B4-BE49-F238E27FC236}">
-                <a16:creationId xmlns:a16="http://schemas.microsoft.com/office/drawing/2014/main" id="{39E27D1A-DA76-1C12-7B51-64C98B3656B9}"/>
+                <a16:creationId xmlns:a16="http://schemas.microsoft.com/office/drawing/2014/main" id="{4D2D85B9-144F-89E2-1489-DCE70DF3DCA7}"/>
               </a:ext>
             </a:extLst>
           </p:cNvPr>
@@ -17685,7 +17685,7 @@
           <p:cNvPr id="7" name="テキスト ボックス 6">
             <a:extLst>
               <a:ext uri="{FF2B5EF4-FFF2-40B4-BE49-F238E27FC236}">
-                <a16:creationId xmlns:a16="http://schemas.microsoft.com/office/drawing/2014/main" id="{D04E15F3-6495-2E1A-98D0-F6E70935936F}"/>
+                <a16:creationId xmlns:a16="http://schemas.microsoft.com/office/drawing/2014/main" id="{63FE631B-898C-EB70-8C00-5B7A8824A060}"/>
               </a:ext>
             </a:extLst>
           </p:cNvPr>
@@ -17731,7 +17731,7 @@
           <p:cNvPr id="8" name="テキスト ボックス 7">
             <a:extLst>
               <a:ext uri="{FF2B5EF4-FFF2-40B4-BE49-F238E27FC236}">
-                <a16:creationId xmlns:a16="http://schemas.microsoft.com/office/drawing/2014/main" id="{DE061014-44B3-3DB2-6183-56C4A32D9A76}"/>
+                <a16:creationId xmlns:a16="http://schemas.microsoft.com/office/drawing/2014/main" id="{CAD583F7-2F1F-3C12-DEB4-977325468548}"/>
               </a:ext>
             </a:extLst>
           </p:cNvPr>
@@ -17784,7 +17784,7 @@
           <p:cNvPr id="9" name="テキスト ボックス 8">
             <a:extLst>
               <a:ext uri="{FF2B5EF4-FFF2-40B4-BE49-F238E27FC236}">
-                <a16:creationId xmlns:a16="http://schemas.microsoft.com/office/drawing/2014/main" id="{27093F35-17CA-3CC6-A371-9D12CC55B9D5}"/>
+                <a16:creationId xmlns:a16="http://schemas.microsoft.com/office/drawing/2014/main" id="{605F1AF5-6F34-553F-8CF4-3B43EED30A2D}"/>
               </a:ext>
             </a:extLst>
           </p:cNvPr>
@@ -17830,7 +17830,7 @@
           <p:cNvPr id="10" name="四角形: 角を丸くする 9">
             <a:extLst>
               <a:ext uri="{FF2B5EF4-FFF2-40B4-BE49-F238E27FC236}">
-                <a16:creationId xmlns:a16="http://schemas.microsoft.com/office/drawing/2014/main" id="{F838F9F6-84C7-6CBD-4368-98CA5C3AECAE}"/>
+                <a16:creationId xmlns:a16="http://schemas.microsoft.com/office/drawing/2014/main" id="{EB3F4A82-2C46-2083-92AE-6C291113633D}"/>
               </a:ext>
             </a:extLst>
           </p:cNvPr>
@@ -17886,7 +17886,7 @@
           <p:cNvPr id="11" name="楕円 10">
             <a:extLst>
               <a:ext uri="{FF2B5EF4-FFF2-40B4-BE49-F238E27FC236}">
-                <a16:creationId xmlns:a16="http://schemas.microsoft.com/office/drawing/2014/main" id="{C616FA2E-0CD0-D97A-4918-2DD6724E1FD7}"/>
+                <a16:creationId xmlns:a16="http://schemas.microsoft.com/office/drawing/2014/main" id="{D8711E98-C2CF-7BAD-A77A-951C5FA07F7D}"/>
               </a:ext>
             </a:extLst>
           </p:cNvPr>
@@ -17954,7 +17954,7 @@
           <p:cNvPr id="12" name="テキスト ボックス 11">
             <a:extLst>
               <a:ext uri="{FF2B5EF4-FFF2-40B4-BE49-F238E27FC236}">
-                <a16:creationId xmlns:a16="http://schemas.microsoft.com/office/drawing/2014/main" id="{375C0C8E-2B0B-8919-158D-8D42C06AF5F2}"/>
+                <a16:creationId xmlns:a16="http://schemas.microsoft.com/office/drawing/2014/main" id="{0383D9AE-02CA-9535-1040-91CA141092DA}"/>
               </a:ext>
             </a:extLst>
           </p:cNvPr>
@@ -18007,7 +18007,7 @@
           <p:cNvPr id="13" name="テキスト ボックス 12">
             <a:extLst>
               <a:ext uri="{FF2B5EF4-FFF2-40B4-BE49-F238E27FC236}">
-                <a16:creationId xmlns:a16="http://schemas.microsoft.com/office/drawing/2014/main" id="{AC345E0C-0AA7-759E-ED8D-E0CDF0E1B043}"/>
+                <a16:creationId xmlns:a16="http://schemas.microsoft.com/office/drawing/2014/main" id="{439B139A-83A7-C997-F792-05F0B14D4CB9}"/>
               </a:ext>
             </a:extLst>
           </p:cNvPr>
@@ -18053,7 +18053,7 @@
           <p:cNvPr id="14" name="テキスト ボックス 13">
             <a:extLst>
               <a:ext uri="{FF2B5EF4-FFF2-40B4-BE49-F238E27FC236}">
-                <a16:creationId xmlns:a16="http://schemas.microsoft.com/office/drawing/2014/main" id="{C6E4CBF5-FC68-881B-444A-C3E943C02F3F}"/>
+                <a16:creationId xmlns:a16="http://schemas.microsoft.com/office/drawing/2014/main" id="{6ED8079B-83E0-DB0C-B28E-B2A5FAE63042}"/>
               </a:ext>
             </a:extLst>
           </p:cNvPr>
@@ -18126,7 +18126,7 @@
           <p:cNvPr id="15" name="四角形: 角を丸くする 14">
             <a:extLst>
               <a:ext uri="{FF2B5EF4-FFF2-40B4-BE49-F238E27FC236}">
-                <a16:creationId xmlns:a16="http://schemas.microsoft.com/office/drawing/2014/main" id="{EAE3E110-FC34-AE5F-A48E-C7C25B5D7A6E}"/>
+                <a16:creationId xmlns:a16="http://schemas.microsoft.com/office/drawing/2014/main" id="{A1035741-0C41-4578-6D8D-13AABB5B3480}"/>
               </a:ext>
             </a:extLst>
           </p:cNvPr>
@@ -18182,7 +18182,7 @@
           <p:cNvPr id="16" name="楕円 15">
             <a:extLst>
               <a:ext uri="{FF2B5EF4-FFF2-40B4-BE49-F238E27FC236}">
-                <a16:creationId xmlns:a16="http://schemas.microsoft.com/office/drawing/2014/main" id="{A28D2FFA-1477-F8C9-4C57-50234DC337DF}"/>
+                <a16:creationId xmlns:a16="http://schemas.microsoft.com/office/drawing/2014/main" id="{ADBEE842-FA2B-80D9-87C3-511D31DD0A63}"/>
               </a:ext>
             </a:extLst>
           </p:cNvPr>
@@ -18250,7 +18250,7 @@
           <p:cNvPr id="17" name="テキスト ボックス 16">
             <a:extLst>
               <a:ext uri="{FF2B5EF4-FFF2-40B4-BE49-F238E27FC236}">
-                <a16:creationId xmlns:a16="http://schemas.microsoft.com/office/drawing/2014/main" id="{46A4002B-233E-9DEB-EFAD-8DE618518E10}"/>
+                <a16:creationId xmlns:a16="http://schemas.microsoft.com/office/drawing/2014/main" id="{2B48BF8B-1AE2-4E2B-5109-A8F6DDCC6097}"/>
               </a:ext>
             </a:extLst>
           </p:cNvPr>
@@ -18303,7 +18303,7 @@
           <p:cNvPr id="18" name="テキスト ボックス 17">
             <a:extLst>
               <a:ext uri="{FF2B5EF4-FFF2-40B4-BE49-F238E27FC236}">
-                <a16:creationId xmlns:a16="http://schemas.microsoft.com/office/drawing/2014/main" id="{1EF8133C-846B-D7ED-E5C1-8392E43ABC09}"/>
+                <a16:creationId xmlns:a16="http://schemas.microsoft.com/office/drawing/2014/main" id="{D7B7050D-7C28-BBE1-62A3-2ED87DEC61D5}"/>
               </a:ext>
             </a:extLst>
           </p:cNvPr>
@@ -18349,7 +18349,7 @@
           <p:cNvPr id="19" name="テキスト ボックス 18">
             <a:extLst>
               <a:ext uri="{FF2B5EF4-FFF2-40B4-BE49-F238E27FC236}">
-                <a16:creationId xmlns:a16="http://schemas.microsoft.com/office/drawing/2014/main" id="{AC23EEF8-31C3-C5B2-DD24-295ADB1F05EA}"/>
+                <a16:creationId xmlns:a16="http://schemas.microsoft.com/office/drawing/2014/main" id="{D0A027B5-F013-5556-363C-99D71F6A84B8}"/>
               </a:ext>
             </a:extLst>
           </p:cNvPr>
@@ -18412,7 +18412,7 @@
           <p:cNvPr id="20" name="四角形: 角を丸くする 19">
             <a:extLst>
               <a:ext uri="{FF2B5EF4-FFF2-40B4-BE49-F238E27FC236}">
-                <a16:creationId xmlns:a16="http://schemas.microsoft.com/office/drawing/2014/main" id="{36CD97C1-1D92-09D7-DB3C-2102B910459F}"/>
+                <a16:creationId xmlns:a16="http://schemas.microsoft.com/office/drawing/2014/main" id="{E7356F7A-DB20-3D96-9963-EDD291620813}"/>
               </a:ext>
             </a:extLst>
           </p:cNvPr>
@@ -18468,7 +18468,7 @@
           <p:cNvPr id="21" name="楕円 20">
             <a:extLst>
               <a:ext uri="{FF2B5EF4-FFF2-40B4-BE49-F238E27FC236}">
-                <a16:creationId xmlns:a16="http://schemas.microsoft.com/office/drawing/2014/main" id="{40817DF6-0311-4280-987B-1C994CF2A355}"/>
+                <a16:creationId xmlns:a16="http://schemas.microsoft.com/office/drawing/2014/main" id="{EDDC90D0-DF6E-2808-F02A-DADF12D6F351}"/>
               </a:ext>
             </a:extLst>
           </p:cNvPr>
@@ -18536,7 +18536,7 @@
           <p:cNvPr id="22" name="テキスト ボックス 21">
             <a:extLst>
               <a:ext uri="{FF2B5EF4-FFF2-40B4-BE49-F238E27FC236}">
-                <a16:creationId xmlns:a16="http://schemas.microsoft.com/office/drawing/2014/main" id="{C459C7BD-755A-D747-8BEE-848EDBCD8F40}"/>
+                <a16:creationId xmlns:a16="http://schemas.microsoft.com/office/drawing/2014/main" id="{29CC64A9-5D17-1C77-FF00-8F184F822924}"/>
               </a:ext>
             </a:extLst>
           </p:cNvPr>
@@ -18589,7 +18589,7 @@
           <p:cNvPr id="23" name="テキスト ボックス 22">
             <a:extLst>
               <a:ext uri="{FF2B5EF4-FFF2-40B4-BE49-F238E27FC236}">
-                <a16:creationId xmlns:a16="http://schemas.microsoft.com/office/drawing/2014/main" id="{6362A009-AE68-886B-1E9D-7EE1B83BFF91}"/>
+                <a16:creationId xmlns:a16="http://schemas.microsoft.com/office/drawing/2014/main" id="{C5668AB5-F672-CF43-5789-9757FD779E00}"/>
               </a:ext>
             </a:extLst>
           </p:cNvPr>
@@ -18635,7 +18635,7 @@
           <p:cNvPr id="24" name="テキスト ボックス 23">
             <a:extLst>
               <a:ext uri="{FF2B5EF4-FFF2-40B4-BE49-F238E27FC236}">
-                <a16:creationId xmlns:a16="http://schemas.microsoft.com/office/drawing/2014/main" id="{37841B7D-A0A1-934E-F965-C01B787EF65D}"/>
+                <a16:creationId xmlns:a16="http://schemas.microsoft.com/office/drawing/2014/main" id="{7E42F221-46C4-58CE-375C-97EF63B3033E}"/>
               </a:ext>
             </a:extLst>
           </p:cNvPr>
@@ -18698,7 +18698,7 @@
           <p:cNvPr id="25" name="矢印: 右 24">
             <a:extLst>
               <a:ext uri="{FF2B5EF4-FFF2-40B4-BE49-F238E27FC236}">
-                <a16:creationId xmlns:a16="http://schemas.microsoft.com/office/drawing/2014/main" id="{C37F07A1-DDAA-3350-FF08-570846ECC9B9}"/>
+                <a16:creationId xmlns:a16="http://schemas.microsoft.com/office/drawing/2014/main" id="{A92CEEE6-6DB6-0C7C-85B6-55AEAB431F7F}"/>
               </a:ext>
             </a:extLst>
           </p:cNvPr>
@@ -18766,7 +18766,7 @@
           <p:cNvPr id="26" name="矢印: 右 25">
             <a:extLst>
               <a:ext uri="{FF2B5EF4-FFF2-40B4-BE49-F238E27FC236}">
-                <a16:creationId xmlns:a16="http://schemas.microsoft.com/office/drawing/2014/main" id="{AC144CB7-EE63-AC0A-616E-62FD0EF61F9A}"/>
+                <a16:creationId xmlns:a16="http://schemas.microsoft.com/office/drawing/2014/main" id="{FCD0E786-FA43-04DB-6AAB-E0CF3B0B7FD4}"/>
               </a:ext>
             </a:extLst>
           </p:cNvPr>
@@ -18834,7 +18834,7 @@
           <p:cNvPr id="27" name="四角形: 角を丸くする 26">
             <a:extLst>
               <a:ext uri="{FF2B5EF4-FFF2-40B4-BE49-F238E27FC236}">
-                <a16:creationId xmlns:a16="http://schemas.microsoft.com/office/drawing/2014/main" id="{9F11D5E6-05A9-ADF6-DA27-387326FE3941}"/>
+                <a16:creationId xmlns:a16="http://schemas.microsoft.com/office/drawing/2014/main" id="{1C13CE43-E77E-2A0D-C963-1DA6DA93B927}"/>
               </a:ext>
             </a:extLst>
           </p:cNvPr>
@@ -18904,7 +18904,7 @@
           <p:cNvPr id="28" name="正方形/長方形 27">
             <a:extLst>
               <a:ext uri="{FF2B5EF4-FFF2-40B4-BE49-F238E27FC236}">
-                <a16:creationId xmlns:a16="http://schemas.microsoft.com/office/drawing/2014/main" id="{EBE50EC5-5549-CD43-4559-0B174CBB3837}"/>
+                <a16:creationId xmlns:a16="http://schemas.microsoft.com/office/drawing/2014/main" id="{09D4F6F7-1BD4-4804-008C-D7C998666E45}"/>
               </a:ext>
             </a:extLst>
           </p:cNvPr>
@@ -18972,7 +18972,7 @@
           <p:cNvPr id="29" name="テキスト ボックス 28">
             <a:extLst>
               <a:ext uri="{FF2B5EF4-FFF2-40B4-BE49-F238E27FC236}">
-                <a16:creationId xmlns:a16="http://schemas.microsoft.com/office/drawing/2014/main" id="{B0BDFB49-7A81-471D-327F-50752D089540}"/>
+                <a16:creationId xmlns:a16="http://schemas.microsoft.com/office/drawing/2014/main" id="{FA979FD8-207B-E989-3427-B7F3198B7ADC}"/>
               </a:ext>
             </a:extLst>
           </p:cNvPr>
@@ -19018,7 +19018,7 @@
           <p:cNvPr id="30" name="テキスト ボックス 29">
             <a:extLst>
               <a:ext uri="{FF2B5EF4-FFF2-40B4-BE49-F238E27FC236}">
-                <a16:creationId xmlns:a16="http://schemas.microsoft.com/office/drawing/2014/main" id="{8BF0D03F-3371-65F1-D0B7-3102B79247D8}"/>
+                <a16:creationId xmlns:a16="http://schemas.microsoft.com/office/drawing/2014/main" id="{8A3C3D61-2CBE-6F45-1968-43E4C0B287C6}"/>
               </a:ext>
             </a:extLst>
           </p:cNvPr>
@@ -19062,7 +19062,7 @@
     </p:spTree>
     <p:extLst>
       <p:ext uri="{BB962C8B-B14F-4D97-AF65-F5344CB8AC3E}">
-        <p14:creationId xmlns:p14="http://schemas.microsoft.com/office/powerpoint/2010/main" val="344737582"/>
+        <p14:creationId xmlns:p14="http://schemas.microsoft.com/office/powerpoint/2010/main" val="115731678"/>
       </p:ext>
     </p:extLst>
   </p:cSld>
@@ -19094,7 +19094,7 @@
           <p:cNvPr id="2" name="正方形/長方形 1">
             <a:extLst>
               <a:ext uri="{FF2B5EF4-FFF2-40B4-BE49-F238E27FC236}">
-                <a16:creationId xmlns:a16="http://schemas.microsoft.com/office/drawing/2014/main" id="{03C49631-B9BF-F372-F3D9-8874F0BFEF28}"/>
+                <a16:creationId xmlns:a16="http://schemas.microsoft.com/office/drawing/2014/main" id="{8B5689B8-7CB8-21CB-60C8-C3A3E44994C4}"/>
               </a:ext>
             </a:extLst>
           </p:cNvPr>
@@ -19162,7 +19162,7 @@
           <p:cNvPr id="3" name="正方形/長方形 2">
             <a:extLst>
               <a:ext uri="{FF2B5EF4-FFF2-40B4-BE49-F238E27FC236}">
-                <a16:creationId xmlns:a16="http://schemas.microsoft.com/office/drawing/2014/main" id="{74BF3ADB-31EF-E9B5-C1F6-8C9364DF714F}"/>
+                <a16:creationId xmlns:a16="http://schemas.microsoft.com/office/drawing/2014/main" id="{8653528C-5D8A-FE42-6534-3D3BDC7A1A76}"/>
               </a:ext>
             </a:extLst>
           </p:cNvPr>
@@ -19230,7 +19230,7 @@
           <p:cNvPr id="4" name="テキスト ボックス 3">
             <a:extLst>
               <a:ext uri="{FF2B5EF4-FFF2-40B4-BE49-F238E27FC236}">
-                <a16:creationId xmlns:a16="http://schemas.microsoft.com/office/drawing/2014/main" id="{61F072D5-774D-87D8-E9C2-DA3ED383C224}"/>
+                <a16:creationId xmlns:a16="http://schemas.microsoft.com/office/drawing/2014/main" id="{633EB29C-F0D2-EA6D-A0D7-D9D16EAB7CF8}"/>
               </a:ext>
             </a:extLst>
           </p:cNvPr>
@@ -19283,7 +19283,7 @@
           <p:cNvPr id="5" name="テキスト ボックス 4">
             <a:extLst>
               <a:ext uri="{FF2B5EF4-FFF2-40B4-BE49-F238E27FC236}">
-                <a16:creationId xmlns:a16="http://schemas.microsoft.com/office/drawing/2014/main" id="{DA5F11B3-A328-74CE-789C-F468DAEA5B08}"/>
+                <a16:creationId xmlns:a16="http://schemas.microsoft.com/office/drawing/2014/main" id="{CDF8D410-8BBC-C0DE-F5A3-B72579C48BAE}"/>
               </a:ext>
             </a:extLst>
           </p:cNvPr>
@@ -19329,7 +19329,7 @@
           <p:cNvPr id="6" name="正方形/長方形 5">
             <a:extLst>
               <a:ext uri="{FF2B5EF4-FFF2-40B4-BE49-F238E27FC236}">
-                <a16:creationId xmlns:a16="http://schemas.microsoft.com/office/drawing/2014/main" id="{77482EF7-BDC0-EBE0-B082-A46891D00B1A}"/>
+                <a16:creationId xmlns:a16="http://schemas.microsoft.com/office/drawing/2014/main" id="{357166C8-F5C7-4453-355F-74263A353A33}"/>
               </a:ext>
             </a:extLst>
           </p:cNvPr>
@@ -19397,7 +19397,7 @@
           <p:cNvPr id="7" name="四角形: 角を丸くする 6">
             <a:extLst>
               <a:ext uri="{FF2B5EF4-FFF2-40B4-BE49-F238E27FC236}">
-                <a16:creationId xmlns:a16="http://schemas.microsoft.com/office/drawing/2014/main" id="{06DD3742-F4A2-1063-2821-D11D5F18440F}"/>
+                <a16:creationId xmlns:a16="http://schemas.microsoft.com/office/drawing/2014/main" id="{B92A7EC3-BF60-71ED-E9FB-5CC682691843}"/>
               </a:ext>
             </a:extLst>
           </p:cNvPr>
@@ -19467,7 +19467,7 @@
           <p:cNvPr id="8" name="テキスト ボックス 7">
             <a:extLst>
               <a:ext uri="{FF2B5EF4-FFF2-40B4-BE49-F238E27FC236}">
-                <a16:creationId xmlns:a16="http://schemas.microsoft.com/office/drawing/2014/main" id="{513B7E9C-A4E1-BADF-AF63-61729C391178}"/>
+                <a16:creationId xmlns:a16="http://schemas.microsoft.com/office/drawing/2014/main" id="{7803A7A6-FBAD-C667-FE01-714757E6FA06}"/>
               </a:ext>
             </a:extLst>
           </p:cNvPr>
@@ -19513,7 +19513,7 @@
           <p:cNvPr id="9" name="テキスト ボックス 8">
             <a:extLst>
               <a:ext uri="{FF2B5EF4-FFF2-40B4-BE49-F238E27FC236}">
-                <a16:creationId xmlns:a16="http://schemas.microsoft.com/office/drawing/2014/main" id="{EAFADB8C-78FD-67B0-094E-0627FFA6FE17}"/>
+                <a16:creationId xmlns:a16="http://schemas.microsoft.com/office/drawing/2014/main" id="{968AEA0A-DC09-E7CD-BF5A-3DF5BE758DDB}"/>
               </a:ext>
             </a:extLst>
           </p:cNvPr>
@@ -19559,7 +19559,7 @@
           <p:cNvPr id="10" name="テキスト ボックス 9">
             <a:extLst>
               <a:ext uri="{FF2B5EF4-FFF2-40B4-BE49-F238E27FC236}">
-                <a16:creationId xmlns:a16="http://schemas.microsoft.com/office/drawing/2014/main" id="{181F99DF-890D-A9CD-17EF-ED8C94158D6A}"/>
+                <a16:creationId xmlns:a16="http://schemas.microsoft.com/office/drawing/2014/main" id="{535AC65B-D8D7-0C71-DB50-CBAA99ABB773}"/>
               </a:ext>
             </a:extLst>
           </p:cNvPr>
@@ -19612,7 +19612,7 @@
           <p:cNvPr id="11" name="四角形: 角を丸くする 10">
             <a:extLst>
               <a:ext uri="{FF2B5EF4-FFF2-40B4-BE49-F238E27FC236}">
-                <a16:creationId xmlns:a16="http://schemas.microsoft.com/office/drawing/2014/main" id="{BC33C772-DF6A-6527-F9F7-483E025621F7}"/>
+                <a16:creationId xmlns:a16="http://schemas.microsoft.com/office/drawing/2014/main" id="{DC2364ED-C38A-E376-7218-F47C150AD9DE}"/>
               </a:ext>
             </a:extLst>
           </p:cNvPr>
@@ -19668,7 +19668,7 @@
           <p:cNvPr id="12" name="楕円 11">
             <a:extLst>
               <a:ext uri="{FF2B5EF4-FFF2-40B4-BE49-F238E27FC236}">
-                <a16:creationId xmlns:a16="http://schemas.microsoft.com/office/drawing/2014/main" id="{DE5A6F69-469A-5B18-3D7E-7F43053F25CA}"/>
+                <a16:creationId xmlns:a16="http://schemas.microsoft.com/office/drawing/2014/main" id="{B17FB09A-4213-2E29-63F5-BC250D2DDC94}"/>
               </a:ext>
             </a:extLst>
           </p:cNvPr>
@@ -19736,7 +19736,7 @@
           <p:cNvPr id="13" name="テキスト ボックス 12">
             <a:extLst>
               <a:ext uri="{FF2B5EF4-FFF2-40B4-BE49-F238E27FC236}">
-                <a16:creationId xmlns:a16="http://schemas.microsoft.com/office/drawing/2014/main" id="{B6854369-1CE3-2853-D309-7201F7727664}"/>
+                <a16:creationId xmlns:a16="http://schemas.microsoft.com/office/drawing/2014/main" id="{ED6E6577-BA62-CE1E-4117-E7A6A140EB3A}"/>
               </a:ext>
             </a:extLst>
           </p:cNvPr>
@@ -19789,7 +19789,7 @@
           <p:cNvPr id="14" name="テキスト ボックス 13">
             <a:extLst>
               <a:ext uri="{FF2B5EF4-FFF2-40B4-BE49-F238E27FC236}">
-                <a16:creationId xmlns:a16="http://schemas.microsoft.com/office/drawing/2014/main" id="{A81E9A7E-076E-10FA-70B3-9F1F284935DE}"/>
+                <a16:creationId xmlns:a16="http://schemas.microsoft.com/office/drawing/2014/main" id="{57D43E16-84C2-E0EB-609E-68203835C2AD}"/>
               </a:ext>
             </a:extLst>
           </p:cNvPr>
@@ -19835,7 +19835,7 @@
           <p:cNvPr id="15" name="テキスト ボックス 14">
             <a:extLst>
               <a:ext uri="{FF2B5EF4-FFF2-40B4-BE49-F238E27FC236}">
-                <a16:creationId xmlns:a16="http://schemas.microsoft.com/office/drawing/2014/main" id="{36679642-638E-E0F4-7714-633F84A8B0B3}"/>
+                <a16:creationId xmlns:a16="http://schemas.microsoft.com/office/drawing/2014/main" id="{F58AE453-8AF5-0966-4FA7-6FDCB1732BBA}"/>
               </a:ext>
             </a:extLst>
           </p:cNvPr>
@@ -19901,7 +19901,7 @@
           <p:cNvPr id="16" name="四角形: 角を丸くする 15">
             <a:extLst>
               <a:ext uri="{FF2B5EF4-FFF2-40B4-BE49-F238E27FC236}">
-                <a16:creationId xmlns:a16="http://schemas.microsoft.com/office/drawing/2014/main" id="{54C8B71C-91A5-55AB-82F6-50229F7487BC}"/>
+                <a16:creationId xmlns:a16="http://schemas.microsoft.com/office/drawing/2014/main" id="{5A59040A-9776-5DA7-8A0A-F8C9577FBB85}"/>
               </a:ext>
             </a:extLst>
           </p:cNvPr>
@@ -19957,7 +19957,7 @@
           <p:cNvPr id="17" name="楕円 16">
             <a:extLst>
               <a:ext uri="{FF2B5EF4-FFF2-40B4-BE49-F238E27FC236}">
-                <a16:creationId xmlns:a16="http://schemas.microsoft.com/office/drawing/2014/main" id="{43DAC763-ACF0-335A-3AEC-DE14081B7EE7}"/>
+                <a16:creationId xmlns:a16="http://schemas.microsoft.com/office/drawing/2014/main" id="{FE3AFCEF-A2BE-7D67-F37D-CD68115B77B6}"/>
               </a:ext>
             </a:extLst>
           </p:cNvPr>
@@ -20025,7 +20025,7 @@
           <p:cNvPr id="18" name="テキスト ボックス 17">
             <a:extLst>
               <a:ext uri="{FF2B5EF4-FFF2-40B4-BE49-F238E27FC236}">
-                <a16:creationId xmlns:a16="http://schemas.microsoft.com/office/drawing/2014/main" id="{576677DC-5D28-EEB2-38EB-877FAA688A02}"/>
+                <a16:creationId xmlns:a16="http://schemas.microsoft.com/office/drawing/2014/main" id="{992D8B70-848B-C295-4E4E-79675760A893}"/>
               </a:ext>
             </a:extLst>
           </p:cNvPr>
@@ -20078,7 +20078,7 @@
           <p:cNvPr id="19" name="テキスト ボックス 18">
             <a:extLst>
               <a:ext uri="{FF2B5EF4-FFF2-40B4-BE49-F238E27FC236}">
-                <a16:creationId xmlns:a16="http://schemas.microsoft.com/office/drawing/2014/main" id="{627CFC61-FEA7-6893-A0B5-05150DE57656}"/>
+                <a16:creationId xmlns:a16="http://schemas.microsoft.com/office/drawing/2014/main" id="{150BCBD1-FB29-9059-B70F-FDFBAB69CA84}"/>
               </a:ext>
             </a:extLst>
           </p:cNvPr>
@@ -20124,7 +20124,7 @@
           <p:cNvPr id="20" name="テキスト ボックス 19">
             <a:extLst>
               <a:ext uri="{FF2B5EF4-FFF2-40B4-BE49-F238E27FC236}">
-                <a16:creationId xmlns:a16="http://schemas.microsoft.com/office/drawing/2014/main" id="{3CD613FE-7F54-13BF-2CCB-4295E3C2951B}"/>
+                <a16:creationId xmlns:a16="http://schemas.microsoft.com/office/drawing/2014/main" id="{B909F696-894F-0257-51BE-345ADB778B78}"/>
               </a:ext>
             </a:extLst>
           </p:cNvPr>
@@ -20227,7 +20227,7 @@
           <p:cNvPr id="21" name="四角形: 角を丸くする 20">
             <a:extLst>
               <a:ext uri="{FF2B5EF4-FFF2-40B4-BE49-F238E27FC236}">
-                <a16:creationId xmlns:a16="http://schemas.microsoft.com/office/drawing/2014/main" id="{DFF2F58F-ADD2-DB1E-806B-433340DBC9CD}"/>
+                <a16:creationId xmlns:a16="http://schemas.microsoft.com/office/drawing/2014/main" id="{093213B3-7513-EF27-7AAA-399F9AD665FE}"/>
               </a:ext>
             </a:extLst>
           </p:cNvPr>
@@ -20283,7 +20283,7 @@
           <p:cNvPr id="22" name="楕円 21">
             <a:extLst>
               <a:ext uri="{FF2B5EF4-FFF2-40B4-BE49-F238E27FC236}">
-                <a16:creationId xmlns:a16="http://schemas.microsoft.com/office/drawing/2014/main" id="{E8FB0269-006F-4FBF-D691-A893AE26F250}"/>
+                <a16:creationId xmlns:a16="http://schemas.microsoft.com/office/drawing/2014/main" id="{D8E2DC57-D502-8E31-5BA3-5BD07F833F1A}"/>
               </a:ext>
             </a:extLst>
           </p:cNvPr>
@@ -20351,7 +20351,7 @@
           <p:cNvPr id="23" name="テキスト ボックス 22">
             <a:extLst>
               <a:ext uri="{FF2B5EF4-FFF2-40B4-BE49-F238E27FC236}">
-                <a16:creationId xmlns:a16="http://schemas.microsoft.com/office/drawing/2014/main" id="{959C495B-2500-A0C3-CF9C-F4534631D4B9}"/>
+                <a16:creationId xmlns:a16="http://schemas.microsoft.com/office/drawing/2014/main" id="{F4C8143F-FE0D-85E2-987B-3018C96FE835}"/>
               </a:ext>
             </a:extLst>
           </p:cNvPr>
@@ -20404,7 +20404,7 @@
           <p:cNvPr id="24" name="テキスト ボックス 23">
             <a:extLst>
               <a:ext uri="{FF2B5EF4-FFF2-40B4-BE49-F238E27FC236}">
-                <a16:creationId xmlns:a16="http://schemas.microsoft.com/office/drawing/2014/main" id="{CEE303A0-2EC9-6409-A095-B065FB815669}"/>
+                <a16:creationId xmlns:a16="http://schemas.microsoft.com/office/drawing/2014/main" id="{F778A07A-5F4C-7721-0523-BE764FE31448}"/>
               </a:ext>
             </a:extLst>
           </p:cNvPr>
@@ -20450,7 +20450,7 @@
           <p:cNvPr id="25" name="テキスト ボックス 24">
             <a:extLst>
               <a:ext uri="{FF2B5EF4-FFF2-40B4-BE49-F238E27FC236}">
-                <a16:creationId xmlns:a16="http://schemas.microsoft.com/office/drawing/2014/main" id="{9C5E71F6-2B15-823F-F09F-44A78F734D40}"/>
+                <a16:creationId xmlns:a16="http://schemas.microsoft.com/office/drawing/2014/main" id="{BF1120D6-854E-0CD4-FC8A-CB3A8ABA29F6}"/>
               </a:ext>
             </a:extLst>
           </p:cNvPr>
@@ -20496,7 +20496,7 @@
           <p:cNvPr id="26" name="四角形: 角を丸くする 25">
             <a:extLst>
               <a:ext uri="{FF2B5EF4-FFF2-40B4-BE49-F238E27FC236}">
-                <a16:creationId xmlns:a16="http://schemas.microsoft.com/office/drawing/2014/main" id="{91607384-7EE4-C7ED-D442-9D3930F3E496}"/>
+                <a16:creationId xmlns:a16="http://schemas.microsoft.com/office/drawing/2014/main" id="{CE0E34AA-C8A3-576E-0A3A-7682E5B89DEE}"/>
               </a:ext>
             </a:extLst>
           </p:cNvPr>
@@ -20566,7 +20566,7 @@
           <p:cNvPr id="27" name="正方形/長方形 26">
             <a:extLst>
               <a:ext uri="{FF2B5EF4-FFF2-40B4-BE49-F238E27FC236}">
-                <a16:creationId xmlns:a16="http://schemas.microsoft.com/office/drawing/2014/main" id="{53CB48E2-4D8E-40A6-E732-E52FA413638E}"/>
+                <a16:creationId xmlns:a16="http://schemas.microsoft.com/office/drawing/2014/main" id="{9402F09D-587D-A510-A2BE-B420B33DD759}"/>
               </a:ext>
             </a:extLst>
           </p:cNvPr>
@@ -20634,7 +20634,7 @@
           <p:cNvPr id="28" name="テキスト ボックス 27">
             <a:extLst>
               <a:ext uri="{FF2B5EF4-FFF2-40B4-BE49-F238E27FC236}">
-                <a16:creationId xmlns:a16="http://schemas.microsoft.com/office/drawing/2014/main" id="{48C95B70-9D75-45FE-1D32-04D69A10F56F}"/>
+                <a16:creationId xmlns:a16="http://schemas.microsoft.com/office/drawing/2014/main" id="{CF91A075-C15D-AFB7-050C-8F01D7FFD74C}"/>
               </a:ext>
             </a:extLst>
           </p:cNvPr>
@@ -20680,7 +20680,7 @@
           <p:cNvPr id="29" name="テキスト ボックス 28">
             <a:extLst>
               <a:ext uri="{FF2B5EF4-FFF2-40B4-BE49-F238E27FC236}">
-                <a16:creationId xmlns:a16="http://schemas.microsoft.com/office/drawing/2014/main" id="{686671DC-E352-716E-1CDF-64CEED9F1FC9}"/>
+                <a16:creationId xmlns:a16="http://schemas.microsoft.com/office/drawing/2014/main" id="{CA7413F9-F78B-549F-1669-A5CEB733444B}"/>
               </a:ext>
             </a:extLst>
           </p:cNvPr>
@@ -20726,7 +20726,7 @@
           <p:cNvPr id="30" name="四角形: 角を丸くする 29">
             <a:extLst>
               <a:ext uri="{FF2B5EF4-FFF2-40B4-BE49-F238E27FC236}">
-                <a16:creationId xmlns:a16="http://schemas.microsoft.com/office/drawing/2014/main" id="{3D211D8F-CBD6-0FB1-5391-BA0F4E62938C}"/>
+                <a16:creationId xmlns:a16="http://schemas.microsoft.com/office/drawing/2014/main" id="{8CE4C9BC-F3F1-0D88-8B5C-5B785B395C90}"/>
               </a:ext>
             </a:extLst>
           </p:cNvPr>
@@ -20796,7 +20796,7 @@
           <p:cNvPr id="31" name="正方形/長方形 30">
             <a:extLst>
               <a:ext uri="{FF2B5EF4-FFF2-40B4-BE49-F238E27FC236}">
-                <a16:creationId xmlns:a16="http://schemas.microsoft.com/office/drawing/2014/main" id="{FA692FEF-1203-E23B-994E-6FEF4F2BDDA4}"/>
+                <a16:creationId xmlns:a16="http://schemas.microsoft.com/office/drawing/2014/main" id="{FC1A40B0-0C29-E522-E6DC-849EBD39280B}"/>
               </a:ext>
             </a:extLst>
           </p:cNvPr>
@@ -20864,7 +20864,7 @@
           <p:cNvPr id="32" name="テキスト ボックス 31">
             <a:extLst>
               <a:ext uri="{FF2B5EF4-FFF2-40B4-BE49-F238E27FC236}">
-                <a16:creationId xmlns:a16="http://schemas.microsoft.com/office/drawing/2014/main" id="{320F7C19-92F2-3C3C-8028-40907851E8BA}"/>
+                <a16:creationId xmlns:a16="http://schemas.microsoft.com/office/drawing/2014/main" id="{2716B062-0D55-1A16-B61B-1B3BF874AC8E}"/>
               </a:ext>
             </a:extLst>
           </p:cNvPr>
@@ -20910,7 +20910,7 @@
           <p:cNvPr id="33" name="テキスト ボックス 32">
             <a:extLst>
               <a:ext uri="{FF2B5EF4-FFF2-40B4-BE49-F238E27FC236}">
-                <a16:creationId xmlns:a16="http://schemas.microsoft.com/office/drawing/2014/main" id="{8C84D826-B842-D0D7-679D-C61E2AFFABD7}"/>
+                <a16:creationId xmlns:a16="http://schemas.microsoft.com/office/drawing/2014/main" id="{0B38F82A-ED4D-2ABF-199E-0C3CE58F2605}"/>
               </a:ext>
             </a:extLst>
           </p:cNvPr>
@@ -20954,7 +20954,7 @@
     </p:spTree>
     <p:extLst>
       <p:ext uri="{BB962C8B-B14F-4D97-AF65-F5344CB8AC3E}">
-        <p14:creationId xmlns:p14="http://schemas.microsoft.com/office/powerpoint/2010/main" val="2174509671"/>
+        <p14:creationId xmlns:p14="http://schemas.microsoft.com/office/powerpoint/2010/main" val="2630435913"/>
       </p:ext>
     </p:extLst>
   </p:cSld>
@@ -20986,7 +20986,7 @@
           <p:cNvPr id="2" name="正方形/長方形 1">
             <a:extLst>
               <a:ext uri="{FF2B5EF4-FFF2-40B4-BE49-F238E27FC236}">
-                <a16:creationId xmlns:a16="http://schemas.microsoft.com/office/drawing/2014/main" id="{D8C33B9D-106C-2344-DD09-C31001A9AC1B}"/>
+                <a16:creationId xmlns:a16="http://schemas.microsoft.com/office/drawing/2014/main" id="{33D02608-482A-3B4C-8773-B04D9FC65F2D}"/>
               </a:ext>
             </a:extLst>
           </p:cNvPr>
@@ -21054,7 +21054,7 @@
           <p:cNvPr id="3" name="正方形/長方形 2">
             <a:extLst>
               <a:ext uri="{FF2B5EF4-FFF2-40B4-BE49-F238E27FC236}">
-                <a16:creationId xmlns:a16="http://schemas.microsoft.com/office/drawing/2014/main" id="{7A1F46D6-A6E7-20D8-B480-415235DC1D38}"/>
+                <a16:creationId xmlns:a16="http://schemas.microsoft.com/office/drawing/2014/main" id="{65C9B35F-D4F3-2314-7A0F-32DA26969057}"/>
               </a:ext>
             </a:extLst>
           </p:cNvPr>
@@ -21122,7 +21122,7 @@
           <p:cNvPr id="4" name="テキスト ボックス 3">
             <a:extLst>
               <a:ext uri="{FF2B5EF4-FFF2-40B4-BE49-F238E27FC236}">
-                <a16:creationId xmlns:a16="http://schemas.microsoft.com/office/drawing/2014/main" id="{D738C73E-43E8-DC0E-329E-B6621F404CF3}"/>
+                <a16:creationId xmlns:a16="http://schemas.microsoft.com/office/drawing/2014/main" id="{8EAF1DAA-921B-7B57-C713-EE1BC886F968}"/>
               </a:ext>
             </a:extLst>
           </p:cNvPr>
@@ -21175,7 +21175,7 @@
           <p:cNvPr id="5" name="テキスト ボックス 4">
             <a:extLst>
               <a:ext uri="{FF2B5EF4-FFF2-40B4-BE49-F238E27FC236}">
-                <a16:creationId xmlns:a16="http://schemas.microsoft.com/office/drawing/2014/main" id="{E45DFC08-1419-421E-4537-B2821019F2FF}"/>
+                <a16:creationId xmlns:a16="http://schemas.microsoft.com/office/drawing/2014/main" id="{B95D47B8-DA62-B9AA-FC40-BF48D3E3845D}"/>
               </a:ext>
             </a:extLst>
           </p:cNvPr>
@@ -21221,7 +21221,7 @@
           <p:cNvPr id="6" name="正方形/長方形 5">
             <a:extLst>
               <a:ext uri="{FF2B5EF4-FFF2-40B4-BE49-F238E27FC236}">
-                <a16:creationId xmlns:a16="http://schemas.microsoft.com/office/drawing/2014/main" id="{FD912783-3867-D556-B25D-EB5B72FD931D}"/>
+                <a16:creationId xmlns:a16="http://schemas.microsoft.com/office/drawing/2014/main" id="{C2F260B3-2564-0B3B-C1CC-1F065D1D158E}"/>
               </a:ext>
             </a:extLst>
           </p:cNvPr>
@@ -21289,7 +21289,7 @@
           <p:cNvPr id="7" name="四角形: 角を丸くする 6">
             <a:extLst>
               <a:ext uri="{FF2B5EF4-FFF2-40B4-BE49-F238E27FC236}">
-                <a16:creationId xmlns:a16="http://schemas.microsoft.com/office/drawing/2014/main" id="{25774A61-EEC9-DBEA-4B50-387FDC3D5D4E}"/>
+                <a16:creationId xmlns:a16="http://schemas.microsoft.com/office/drawing/2014/main" id="{9C63AE1C-A08F-63A5-F159-415C30AA9245}"/>
               </a:ext>
             </a:extLst>
           </p:cNvPr>
@@ -21359,7 +21359,7 @@
           <p:cNvPr id="8" name="テキスト ボックス 7">
             <a:extLst>
               <a:ext uri="{FF2B5EF4-FFF2-40B4-BE49-F238E27FC236}">
-                <a16:creationId xmlns:a16="http://schemas.microsoft.com/office/drawing/2014/main" id="{3D13CB24-74F3-262A-8AD3-6E8AD62600DA}"/>
+                <a16:creationId xmlns:a16="http://schemas.microsoft.com/office/drawing/2014/main" id="{B0767EDE-BEF6-A49E-A9E6-BED0645BE60B}"/>
               </a:ext>
             </a:extLst>
           </p:cNvPr>
@@ -21405,7 +21405,7 @@
           <p:cNvPr id="9" name="テキスト ボックス 8">
             <a:extLst>
               <a:ext uri="{FF2B5EF4-FFF2-40B4-BE49-F238E27FC236}">
-                <a16:creationId xmlns:a16="http://schemas.microsoft.com/office/drawing/2014/main" id="{F90E7AAB-FE70-02E3-7B68-3E734038C222}"/>
+                <a16:creationId xmlns:a16="http://schemas.microsoft.com/office/drawing/2014/main" id="{9EA79C5F-3F23-6242-02BB-EDA9DC6FD720}"/>
               </a:ext>
             </a:extLst>
           </p:cNvPr>
@@ -21451,7 +21451,7 @@
           <p:cNvPr id="10" name="テキスト ボックス 9">
             <a:extLst>
               <a:ext uri="{FF2B5EF4-FFF2-40B4-BE49-F238E27FC236}">
-                <a16:creationId xmlns:a16="http://schemas.microsoft.com/office/drawing/2014/main" id="{45668246-E6D4-393D-82D7-F42671BDFCD2}"/>
+                <a16:creationId xmlns:a16="http://schemas.microsoft.com/office/drawing/2014/main" id="{2CF44966-01E5-EFD6-B954-0B103107EF37}"/>
               </a:ext>
             </a:extLst>
           </p:cNvPr>
@@ -21504,7 +21504,7 @@
           <p:cNvPr id="11" name="テキスト ボックス 10">
             <a:extLst>
               <a:ext uri="{FF2B5EF4-FFF2-40B4-BE49-F238E27FC236}">
-                <a16:creationId xmlns:a16="http://schemas.microsoft.com/office/drawing/2014/main" id="{D2758B39-A88D-0E29-3FE1-CAA78156B74B}"/>
+                <a16:creationId xmlns:a16="http://schemas.microsoft.com/office/drawing/2014/main" id="{053E39FD-C5AF-E86D-5755-24657560369C}"/>
               </a:ext>
             </a:extLst>
           </p:cNvPr>
@@ -21570,7 +21570,7 @@
           <p:cNvPr id="12" name="表 11">
             <a:extLst>
               <a:ext uri="{FF2B5EF4-FFF2-40B4-BE49-F238E27FC236}">
-                <a16:creationId xmlns:a16="http://schemas.microsoft.com/office/drawing/2014/main" id="{37ED260A-8B9A-02B5-0022-954B5E6EBFE9}"/>
+                <a16:creationId xmlns:a16="http://schemas.microsoft.com/office/drawing/2014/main" id="{661BDC2E-ED21-F2A5-3409-7AF91D028B93}"/>
               </a:ext>
             </a:extLst>
           </p:cNvPr>
@@ -21580,7 +21580,7 @@
           <p:nvPr>
             <p:extLst>
               <p:ext uri="{D42A27DB-BD31-4B8C-83A1-F6EECF244321}">
-                <p14:modId xmlns:p14="http://schemas.microsoft.com/office/powerpoint/2010/main" val="51586820"/>
+                <p14:modId xmlns:p14="http://schemas.microsoft.com/office/powerpoint/2010/main" val="1616173914"/>
               </p:ext>
             </p:extLst>
           </p:nvPr>
@@ -21599,21 +21599,21 @@
                 <a:gridCol w="1905000">
                   <a:extLst>
                     <a:ext uri="{9D8B030D-6E8A-4147-A177-3AD203B41FA5}">
-                      <a16:colId xmlns:a16="http://schemas.microsoft.com/office/drawing/2014/main" val="2926089952"/>
+                      <a16:colId xmlns:a16="http://schemas.microsoft.com/office/drawing/2014/main" val="832974920"/>
                     </a:ext>
                   </a:extLst>
                 </a:gridCol>
                 <a:gridCol w="2413000">
                   <a:extLst>
                     <a:ext uri="{9D8B030D-6E8A-4147-A177-3AD203B41FA5}">
-                      <a16:colId xmlns:a16="http://schemas.microsoft.com/office/drawing/2014/main" val="4089007333"/>
+                      <a16:colId xmlns:a16="http://schemas.microsoft.com/office/drawing/2014/main" val="1300155195"/>
                     </a:ext>
                   </a:extLst>
                 </a:gridCol>
                 <a:gridCol w="6248400">
                   <a:extLst>
                     <a:ext uri="{9D8B030D-6E8A-4147-A177-3AD203B41FA5}">
-                      <a16:colId xmlns:a16="http://schemas.microsoft.com/office/drawing/2014/main" val="2976215483"/>
+                      <a16:colId xmlns:a16="http://schemas.microsoft.com/office/drawing/2014/main" val="3814468981"/>
                     </a:ext>
                   </a:extLst>
                 </a:gridCol>
@@ -21720,7 +21720,7 @@
                 </a:tc>
                 <a:extLst>
                   <a:ext uri="{0D108BD9-81ED-4DB2-BD59-A6C34878D82A}">
-                    <a16:rowId xmlns:a16="http://schemas.microsoft.com/office/drawing/2014/main" val="1848327257"/>
+                    <a16:rowId xmlns:a16="http://schemas.microsoft.com/office/drawing/2014/main" val="2560144251"/>
                   </a:ext>
                 </a:extLst>
               </a:tr>
@@ -21878,7 +21878,7 @@
                 </a:tc>
                 <a:extLst>
                   <a:ext uri="{0D108BD9-81ED-4DB2-BD59-A6C34878D82A}">
-                    <a16:rowId xmlns:a16="http://schemas.microsoft.com/office/drawing/2014/main" val="2500813205"/>
+                    <a16:rowId xmlns:a16="http://schemas.microsoft.com/office/drawing/2014/main" val="2489206145"/>
                   </a:ext>
                 </a:extLst>
               </a:tr>
@@ -22043,7 +22043,7 @@
                 </a:tc>
                 <a:extLst>
                   <a:ext uri="{0D108BD9-81ED-4DB2-BD59-A6C34878D82A}">
-                    <a16:rowId xmlns:a16="http://schemas.microsoft.com/office/drawing/2014/main" val="1020824126"/>
+                    <a16:rowId xmlns:a16="http://schemas.microsoft.com/office/drawing/2014/main" val="3031532786"/>
                   </a:ext>
                 </a:extLst>
               </a:tr>
@@ -22171,7 +22171,7 @@
                 </a:tc>
                 <a:extLst>
                   <a:ext uri="{0D108BD9-81ED-4DB2-BD59-A6C34878D82A}">
-                    <a16:rowId xmlns:a16="http://schemas.microsoft.com/office/drawing/2014/main" val="3832722124"/>
+                    <a16:rowId xmlns:a16="http://schemas.microsoft.com/office/drawing/2014/main" val="2671200599"/>
                   </a:ext>
                 </a:extLst>
               </a:tr>
@@ -22184,7 +22184,7 @@
           <p:cNvPr id="13" name="四角形: 角を丸くする 12">
             <a:extLst>
               <a:ext uri="{FF2B5EF4-FFF2-40B4-BE49-F238E27FC236}">
-                <a16:creationId xmlns:a16="http://schemas.microsoft.com/office/drawing/2014/main" id="{3E261552-B76D-41FD-8B46-E45B3B46B318}"/>
+                <a16:creationId xmlns:a16="http://schemas.microsoft.com/office/drawing/2014/main" id="{B4723131-1692-7442-E5CC-F657FC569A49}"/>
               </a:ext>
             </a:extLst>
           </p:cNvPr>
@@ -22254,7 +22254,7 @@
           <p:cNvPr id="14" name="正方形/長方形 13">
             <a:extLst>
               <a:ext uri="{FF2B5EF4-FFF2-40B4-BE49-F238E27FC236}">
-                <a16:creationId xmlns:a16="http://schemas.microsoft.com/office/drawing/2014/main" id="{4B46BC7B-83F0-3F27-04BC-F192BDB68A74}"/>
+                <a16:creationId xmlns:a16="http://schemas.microsoft.com/office/drawing/2014/main" id="{43C5D30B-9BAD-2E4B-928C-974AA031EB7E}"/>
               </a:ext>
             </a:extLst>
           </p:cNvPr>
@@ -22322,7 +22322,7 @@
           <p:cNvPr id="15" name="テキスト ボックス 14">
             <a:extLst>
               <a:ext uri="{FF2B5EF4-FFF2-40B4-BE49-F238E27FC236}">
-                <a16:creationId xmlns:a16="http://schemas.microsoft.com/office/drawing/2014/main" id="{3C27EC73-8321-D038-4AEC-B63364B7FE41}"/>
+                <a16:creationId xmlns:a16="http://schemas.microsoft.com/office/drawing/2014/main" id="{B3147EE7-188D-F58B-502A-3D278E06AEEA}"/>
               </a:ext>
             </a:extLst>
           </p:cNvPr>
@@ -22368,7 +22368,7 @@
           <p:cNvPr id="16" name="テキスト ボックス 15">
             <a:extLst>
               <a:ext uri="{FF2B5EF4-FFF2-40B4-BE49-F238E27FC236}">
-                <a16:creationId xmlns:a16="http://schemas.microsoft.com/office/drawing/2014/main" id="{732CB644-3A4C-3145-4148-7616E4C9E586}"/>
+                <a16:creationId xmlns:a16="http://schemas.microsoft.com/office/drawing/2014/main" id="{7F4A1CAA-A80B-E2ED-BB5B-062C421392E4}"/>
               </a:ext>
             </a:extLst>
           </p:cNvPr>
@@ -22522,7 +22522,7 @@
     </p:spTree>
     <p:extLst>
       <p:ext uri="{BB962C8B-B14F-4D97-AF65-F5344CB8AC3E}">
-        <p14:creationId xmlns:p14="http://schemas.microsoft.com/office/powerpoint/2010/main" val="2889486595"/>
+        <p14:creationId xmlns:p14="http://schemas.microsoft.com/office/powerpoint/2010/main" val="1419630435"/>
       </p:ext>
     </p:extLst>
   </p:cSld>
@@ -22554,7 +22554,7 @@
           <p:cNvPr id="2" name="正方形/長方形 1">
             <a:extLst>
               <a:ext uri="{FF2B5EF4-FFF2-40B4-BE49-F238E27FC236}">
-                <a16:creationId xmlns:a16="http://schemas.microsoft.com/office/drawing/2014/main" id="{733931DB-8C42-3D2F-F002-21EB8CD35FE5}"/>
+                <a16:creationId xmlns:a16="http://schemas.microsoft.com/office/drawing/2014/main" id="{148EFBE2-6A64-0F1C-037B-639C058E1D41}"/>
               </a:ext>
             </a:extLst>
           </p:cNvPr>
@@ -22622,7 +22622,7 @@
           <p:cNvPr id="3" name="正方形/長方形 2">
             <a:extLst>
               <a:ext uri="{FF2B5EF4-FFF2-40B4-BE49-F238E27FC236}">
-                <a16:creationId xmlns:a16="http://schemas.microsoft.com/office/drawing/2014/main" id="{504A9BE4-9EDE-CEBB-D806-86C5CD36E7F7}"/>
+                <a16:creationId xmlns:a16="http://schemas.microsoft.com/office/drawing/2014/main" id="{295BAE7F-5DEE-F703-EFC2-CB7701DD1DB8}"/>
               </a:ext>
             </a:extLst>
           </p:cNvPr>
@@ -22690,7 +22690,7 @@
           <p:cNvPr id="4" name="テキスト ボックス 3">
             <a:extLst>
               <a:ext uri="{FF2B5EF4-FFF2-40B4-BE49-F238E27FC236}">
-                <a16:creationId xmlns:a16="http://schemas.microsoft.com/office/drawing/2014/main" id="{9DB5D0F1-DF8D-EF28-98AD-8CF4BBA9AC7C}"/>
+                <a16:creationId xmlns:a16="http://schemas.microsoft.com/office/drawing/2014/main" id="{E0B028EF-4D04-FE6C-1AFD-2B350A271180}"/>
               </a:ext>
             </a:extLst>
           </p:cNvPr>
@@ -22743,7 +22743,7 @@
           <p:cNvPr id="5" name="テキスト ボックス 4">
             <a:extLst>
               <a:ext uri="{FF2B5EF4-FFF2-40B4-BE49-F238E27FC236}">
-                <a16:creationId xmlns:a16="http://schemas.microsoft.com/office/drawing/2014/main" id="{DFCDF3ED-45D1-0716-A85D-71A064323203}"/>
+                <a16:creationId xmlns:a16="http://schemas.microsoft.com/office/drawing/2014/main" id="{0A89A5BA-84E0-7D18-80E5-FC9E4F8B4AA8}"/>
               </a:ext>
             </a:extLst>
           </p:cNvPr>
@@ -22789,7 +22789,7 @@
           <p:cNvPr id="6" name="正方形/長方形 5">
             <a:extLst>
               <a:ext uri="{FF2B5EF4-FFF2-40B4-BE49-F238E27FC236}">
-                <a16:creationId xmlns:a16="http://schemas.microsoft.com/office/drawing/2014/main" id="{5EC2EB0D-DB7C-ECC6-42CE-6B0EC0D720FA}"/>
+                <a16:creationId xmlns:a16="http://schemas.microsoft.com/office/drawing/2014/main" id="{6806D3E3-F4A3-3B29-DF5B-1A9EE5508446}"/>
               </a:ext>
             </a:extLst>
           </p:cNvPr>
@@ -22857,7 +22857,7 @@
           <p:cNvPr id="7" name="四角形: 角を丸くする 6">
             <a:extLst>
               <a:ext uri="{FF2B5EF4-FFF2-40B4-BE49-F238E27FC236}">
-                <a16:creationId xmlns:a16="http://schemas.microsoft.com/office/drawing/2014/main" id="{56ED923C-BBFE-B58C-74B0-91341D43E844}"/>
+                <a16:creationId xmlns:a16="http://schemas.microsoft.com/office/drawing/2014/main" id="{1C074EE9-90D9-0B9C-C994-EC24854AE78B}"/>
               </a:ext>
             </a:extLst>
           </p:cNvPr>
@@ -22927,7 +22927,7 @@
           <p:cNvPr id="8" name="テキスト ボックス 7">
             <a:extLst>
               <a:ext uri="{FF2B5EF4-FFF2-40B4-BE49-F238E27FC236}">
-                <a16:creationId xmlns:a16="http://schemas.microsoft.com/office/drawing/2014/main" id="{DEE55D2F-86CE-F9B4-E573-219E5E7BA423}"/>
+                <a16:creationId xmlns:a16="http://schemas.microsoft.com/office/drawing/2014/main" id="{21CF1D07-95A7-8870-8340-A52732EF9EC6}"/>
               </a:ext>
             </a:extLst>
           </p:cNvPr>
@@ -22973,7 +22973,7 @@
           <p:cNvPr id="9" name="テキスト ボックス 8">
             <a:extLst>
               <a:ext uri="{FF2B5EF4-FFF2-40B4-BE49-F238E27FC236}">
-                <a16:creationId xmlns:a16="http://schemas.microsoft.com/office/drawing/2014/main" id="{6145AFB1-E006-C7EB-7ABC-97A1A8AB8A82}"/>
+                <a16:creationId xmlns:a16="http://schemas.microsoft.com/office/drawing/2014/main" id="{D94100AD-1C81-4414-03C1-8149092C7B8F}"/>
               </a:ext>
             </a:extLst>
           </p:cNvPr>
@@ -23019,7 +23019,7 @@
           <p:cNvPr id="10" name="テキスト ボックス 9">
             <a:extLst>
               <a:ext uri="{FF2B5EF4-FFF2-40B4-BE49-F238E27FC236}">
-                <a16:creationId xmlns:a16="http://schemas.microsoft.com/office/drawing/2014/main" id="{4CD8BB96-9C3F-B17C-0C9F-7B7CD2F2B216}"/>
+                <a16:creationId xmlns:a16="http://schemas.microsoft.com/office/drawing/2014/main" id="{0D441E5F-54A1-99DF-1458-0BE9B545B5C1}"/>
               </a:ext>
             </a:extLst>
           </p:cNvPr>
@@ -23072,7 +23072,7 @@
           <p:cNvPr id="11" name="テキスト ボックス 10">
             <a:extLst>
               <a:ext uri="{FF2B5EF4-FFF2-40B4-BE49-F238E27FC236}">
-                <a16:creationId xmlns:a16="http://schemas.microsoft.com/office/drawing/2014/main" id="{9ADA4127-772C-BD9B-EB78-4D2AB119BB47}"/>
+                <a16:creationId xmlns:a16="http://schemas.microsoft.com/office/drawing/2014/main" id="{47211823-C18D-10A1-BE9C-33E1F25F8B43}"/>
               </a:ext>
             </a:extLst>
           </p:cNvPr>
@@ -23118,7 +23118,7 @@
           <p:cNvPr id="12" name="表 11">
             <a:extLst>
               <a:ext uri="{FF2B5EF4-FFF2-40B4-BE49-F238E27FC236}">
-                <a16:creationId xmlns:a16="http://schemas.microsoft.com/office/drawing/2014/main" id="{4BB5D8B6-B023-107C-3459-1B1BBFFD5B6B}"/>
+                <a16:creationId xmlns:a16="http://schemas.microsoft.com/office/drawing/2014/main" id="{E2A8B320-9730-87DB-17AE-6F2CA02269E2}"/>
               </a:ext>
             </a:extLst>
           </p:cNvPr>
@@ -23128,7 +23128,7 @@
           <p:nvPr>
             <p:extLst>
               <p:ext uri="{D42A27DB-BD31-4B8C-83A1-F6EECF244321}">
-                <p14:modId xmlns:p14="http://schemas.microsoft.com/office/powerpoint/2010/main" val="1828769725"/>
+                <p14:modId xmlns:p14="http://schemas.microsoft.com/office/powerpoint/2010/main" val="3091805254"/>
               </p:ext>
             </p:extLst>
           </p:nvPr>
@@ -23147,14 +23147,14 @@
                 <a:gridCol w="5461000">
                   <a:extLst>
                     <a:ext uri="{9D8B030D-6E8A-4147-A177-3AD203B41FA5}">
-                      <a16:colId xmlns:a16="http://schemas.microsoft.com/office/drawing/2014/main" val="3829755527"/>
+                      <a16:colId xmlns:a16="http://schemas.microsoft.com/office/drawing/2014/main" val="1369730800"/>
                     </a:ext>
                   </a:extLst>
                 </a:gridCol>
                 <a:gridCol w="5105400">
                   <a:extLst>
                     <a:ext uri="{9D8B030D-6E8A-4147-A177-3AD203B41FA5}">
-                      <a16:colId xmlns:a16="http://schemas.microsoft.com/office/drawing/2014/main" val="3650860306"/>
+                      <a16:colId xmlns:a16="http://schemas.microsoft.com/office/drawing/2014/main" val="2916841856"/>
                     </a:ext>
                   </a:extLst>
                 </a:gridCol>
@@ -23228,7 +23228,7 @@
                 </a:tc>
                 <a:extLst>
                   <a:ext uri="{0D108BD9-81ED-4DB2-BD59-A6C34878D82A}">
-                    <a16:rowId xmlns:a16="http://schemas.microsoft.com/office/drawing/2014/main" val="261781157"/>
+                    <a16:rowId xmlns:a16="http://schemas.microsoft.com/office/drawing/2014/main" val="3467779265"/>
                   </a:ext>
                 </a:extLst>
               </a:tr>
@@ -23328,7 +23328,7 @@
                 </a:tc>
                 <a:extLst>
                   <a:ext uri="{0D108BD9-81ED-4DB2-BD59-A6C34878D82A}">
-                    <a16:rowId xmlns:a16="http://schemas.microsoft.com/office/drawing/2014/main" val="739420953"/>
+                    <a16:rowId xmlns:a16="http://schemas.microsoft.com/office/drawing/2014/main" val="833115591"/>
                   </a:ext>
                 </a:extLst>
               </a:tr>
@@ -23428,7 +23428,7 @@
                 </a:tc>
                 <a:extLst>
                   <a:ext uri="{0D108BD9-81ED-4DB2-BD59-A6C34878D82A}">
-                    <a16:rowId xmlns:a16="http://schemas.microsoft.com/office/drawing/2014/main" val="1694702790"/>
+                    <a16:rowId xmlns:a16="http://schemas.microsoft.com/office/drawing/2014/main" val="2002935884"/>
                   </a:ext>
                 </a:extLst>
               </a:tr>
@@ -23441,7 +23441,7 @@
           <p:cNvPr id="13" name="四角形: 角を丸くする 12">
             <a:extLst>
               <a:ext uri="{FF2B5EF4-FFF2-40B4-BE49-F238E27FC236}">
-                <a16:creationId xmlns:a16="http://schemas.microsoft.com/office/drawing/2014/main" id="{EF9C7C41-008C-31D4-E8F2-707531355046}"/>
+                <a16:creationId xmlns:a16="http://schemas.microsoft.com/office/drawing/2014/main" id="{1EBBB59C-97E2-0A32-85A0-9335F8FEB8B8}"/>
               </a:ext>
             </a:extLst>
           </p:cNvPr>
@@ -23511,7 +23511,7 @@
           <p:cNvPr id="14" name="正方形/長方形 13">
             <a:extLst>
               <a:ext uri="{FF2B5EF4-FFF2-40B4-BE49-F238E27FC236}">
-                <a16:creationId xmlns:a16="http://schemas.microsoft.com/office/drawing/2014/main" id="{557ED88C-65EB-45A6-C679-AD1D98926FB4}"/>
+                <a16:creationId xmlns:a16="http://schemas.microsoft.com/office/drawing/2014/main" id="{1A954B78-1F70-743D-C582-244D8E6FFDF9}"/>
               </a:ext>
             </a:extLst>
           </p:cNvPr>
@@ -23579,7 +23579,7 @@
           <p:cNvPr id="15" name="テキスト ボックス 14">
             <a:extLst>
               <a:ext uri="{FF2B5EF4-FFF2-40B4-BE49-F238E27FC236}">
-                <a16:creationId xmlns:a16="http://schemas.microsoft.com/office/drawing/2014/main" id="{850B20A3-B0A8-C92F-440E-7C715295894E}"/>
+                <a16:creationId xmlns:a16="http://schemas.microsoft.com/office/drawing/2014/main" id="{20A00453-D84A-2A6E-D7B9-E09F0C84BBBA}"/>
               </a:ext>
             </a:extLst>
           </p:cNvPr>
@@ -23625,7 +23625,7 @@
           <p:cNvPr id="16" name="テキスト ボックス 15">
             <a:extLst>
               <a:ext uri="{FF2B5EF4-FFF2-40B4-BE49-F238E27FC236}">
-                <a16:creationId xmlns:a16="http://schemas.microsoft.com/office/drawing/2014/main" id="{089E1D77-E9B4-4450-60D8-FF314AA109BC}"/>
+                <a16:creationId xmlns:a16="http://schemas.microsoft.com/office/drawing/2014/main" id="{292A2AEE-24BA-D6E8-D796-667EB8EC0EE9}"/>
               </a:ext>
             </a:extLst>
           </p:cNvPr>
@@ -23729,7 +23729,7 @@
     </p:spTree>
     <p:extLst>
       <p:ext uri="{BB962C8B-B14F-4D97-AF65-F5344CB8AC3E}">
-        <p14:creationId xmlns:p14="http://schemas.microsoft.com/office/powerpoint/2010/main" val="3617934994"/>
+        <p14:creationId xmlns:p14="http://schemas.microsoft.com/office/powerpoint/2010/main" val="3986759349"/>
       </p:ext>
     </p:extLst>
   </p:cSld>
@@ -23761,7 +23761,7 @@
           <p:cNvPr id="2" name="正方形/長方形 1">
             <a:extLst>
               <a:ext uri="{FF2B5EF4-FFF2-40B4-BE49-F238E27FC236}">
-                <a16:creationId xmlns:a16="http://schemas.microsoft.com/office/drawing/2014/main" id="{D2F44A97-0B02-DEA7-EBB6-626CCB0B81DE}"/>
+                <a16:creationId xmlns:a16="http://schemas.microsoft.com/office/drawing/2014/main" id="{3ECDBF21-3D2F-CC29-9D17-F30295EF88CC}"/>
               </a:ext>
             </a:extLst>
           </p:cNvPr>
@@ -23829,7 +23829,7 @@
           <p:cNvPr id="3" name="正方形/長方形 2">
             <a:extLst>
               <a:ext uri="{FF2B5EF4-FFF2-40B4-BE49-F238E27FC236}">
-                <a16:creationId xmlns:a16="http://schemas.microsoft.com/office/drawing/2014/main" id="{D310FDBA-92BC-11EB-F28B-7A803C173224}"/>
+                <a16:creationId xmlns:a16="http://schemas.microsoft.com/office/drawing/2014/main" id="{3109A8BE-D646-0484-72C8-DE0070CDB124}"/>
               </a:ext>
             </a:extLst>
           </p:cNvPr>
@@ -23897,7 +23897,7 @@
           <p:cNvPr id="4" name="テキスト ボックス 3">
             <a:extLst>
               <a:ext uri="{FF2B5EF4-FFF2-40B4-BE49-F238E27FC236}">
-                <a16:creationId xmlns:a16="http://schemas.microsoft.com/office/drawing/2014/main" id="{60E2BD1C-3507-6E17-4846-029A36668A50}"/>
+                <a16:creationId xmlns:a16="http://schemas.microsoft.com/office/drawing/2014/main" id="{BC7E8786-114C-54BB-A4B7-A0681DC2B70E}"/>
               </a:ext>
             </a:extLst>
           </p:cNvPr>
@@ -23950,7 +23950,7 @@
           <p:cNvPr id="5" name="テキスト ボックス 4">
             <a:extLst>
               <a:ext uri="{FF2B5EF4-FFF2-40B4-BE49-F238E27FC236}">
-                <a16:creationId xmlns:a16="http://schemas.microsoft.com/office/drawing/2014/main" id="{5E213814-B674-17DE-963B-65FDDA2F11B7}"/>
+                <a16:creationId xmlns:a16="http://schemas.microsoft.com/office/drawing/2014/main" id="{1AFFF445-1228-BA36-DC03-BC31966AF630}"/>
               </a:ext>
             </a:extLst>
           </p:cNvPr>
@@ -23996,7 +23996,7 @@
           <p:cNvPr id="6" name="正方形/長方形 5">
             <a:extLst>
               <a:ext uri="{FF2B5EF4-FFF2-40B4-BE49-F238E27FC236}">
-                <a16:creationId xmlns:a16="http://schemas.microsoft.com/office/drawing/2014/main" id="{E6854C2D-098C-23A3-F2BC-95C52BF4A954}"/>
+                <a16:creationId xmlns:a16="http://schemas.microsoft.com/office/drawing/2014/main" id="{F43FCA22-5BC1-B35C-9A7D-09E3CB641DD3}"/>
               </a:ext>
             </a:extLst>
           </p:cNvPr>
@@ -24064,7 +24064,7 @@
           <p:cNvPr id="7" name="四角形: 角を丸くする 6">
             <a:extLst>
               <a:ext uri="{FF2B5EF4-FFF2-40B4-BE49-F238E27FC236}">
-                <a16:creationId xmlns:a16="http://schemas.microsoft.com/office/drawing/2014/main" id="{D054A660-ADF7-4E9C-AE05-D56815B3D62C}"/>
+                <a16:creationId xmlns:a16="http://schemas.microsoft.com/office/drawing/2014/main" id="{74B1F074-3A0B-DF3F-1BA9-F11476411DEF}"/>
               </a:ext>
             </a:extLst>
           </p:cNvPr>
@@ -24134,7 +24134,7 @@
           <p:cNvPr id="8" name="テキスト ボックス 7">
             <a:extLst>
               <a:ext uri="{FF2B5EF4-FFF2-40B4-BE49-F238E27FC236}">
-                <a16:creationId xmlns:a16="http://schemas.microsoft.com/office/drawing/2014/main" id="{C4815A55-7C5F-DB29-80B6-606F8F1CD616}"/>
+                <a16:creationId xmlns:a16="http://schemas.microsoft.com/office/drawing/2014/main" id="{D7AF0045-12F9-3E7F-6A35-CCB648827D52}"/>
               </a:ext>
             </a:extLst>
           </p:cNvPr>
@@ -24180,7 +24180,7 @@
           <p:cNvPr id="9" name="テキスト ボックス 8">
             <a:extLst>
               <a:ext uri="{FF2B5EF4-FFF2-40B4-BE49-F238E27FC236}">
-                <a16:creationId xmlns:a16="http://schemas.microsoft.com/office/drawing/2014/main" id="{8918E8A0-D5D8-0635-4D0D-58AE8F72768E}"/>
+                <a16:creationId xmlns:a16="http://schemas.microsoft.com/office/drawing/2014/main" id="{F2F8E7C4-2228-346A-A434-45D1E6074F7B}"/>
               </a:ext>
             </a:extLst>
           </p:cNvPr>
@@ -24226,7 +24226,7 @@
           <p:cNvPr id="10" name="テキスト ボックス 9">
             <a:extLst>
               <a:ext uri="{FF2B5EF4-FFF2-40B4-BE49-F238E27FC236}">
-                <a16:creationId xmlns:a16="http://schemas.microsoft.com/office/drawing/2014/main" id="{CF2F9747-611C-D423-0868-0CC6B07393F2}"/>
+                <a16:creationId xmlns:a16="http://schemas.microsoft.com/office/drawing/2014/main" id="{D7D5DC51-92F8-6F97-4BA7-82D0D8E9E660}"/>
               </a:ext>
             </a:extLst>
           </p:cNvPr>
@@ -24279,7 +24279,7 @@
           <p:cNvPr id="11" name="テキスト ボックス 10">
             <a:extLst>
               <a:ext uri="{FF2B5EF4-FFF2-40B4-BE49-F238E27FC236}">
-                <a16:creationId xmlns:a16="http://schemas.microsoft.com/office/drawing/2014/main" id="{5534EFA2-0BA5-F022-F036-C38657BCB33B}"/>
+                <a16:creationId xmlns:a16="http://schemas.microsoft.com/office/drawing/2014/main" id="{C34658D3-E21A-0DC6-167F-EF8B38D91127}"/>
               </a:ext>
             </a:extLst>
           </p:cNvPr>
@@ -24365,7 +24365,7 @@
           <p:cNvPr id="12" name="四角形: 角を丸くする 11">
             <a:extLst>
               <a:ext uri="{FF2B5EF4-FFF2-40B4-BE49-F238E27FC236}">
-                <a16:creationId xmlns:a16="http://schemas.microsoft.com/office/drawing/2014/main" id="{F4A47FF4-BF7E-1B66-FF87-DF42A711B5CF}"/>
+                <a16:creationId xmlns:a16="http://schemas.microsoft.com/office/drawing/2014/main" id="{14F61B73-32BD-369C-C515-D3AE66E0D85A}"/>
               </a:ext>
             </a:extLst>
           </p:cNvPr>
@@ -24435,7 +24435,7 @@
           <p:cNvPr id="13" name="テキスト ボックス 12">
             <a:extLst>
               <a:ext uri="{FF2B5EF4-FFF2-40B4-BE49-F238E27FC236}">
-                <a16:creationId xmlns:a16="http://schemas.microsoft.com/office/drawing/2014/main" id="{B6CA27D3-BB23-9283-BEB0-67031FE9138D}"/>
+                <a16:creationId xmlns:a16="http://schemas.microsoft.com/office/drawing/2014/main" id="{80C274D3-B012-888C-4AD2-812CBE417DEE}"/>
               </a:ext>
             </a:extLst>
           </p:cNvPr>
@@ -24495,7 +24495,7 @@
           <p:cNvPr id="14" name="テキスト ボックス 13">
             <a:extLst>
               <a:ext uri="{FF2B5EF4-FFF2-40B4-BE49-F238E27FC236}">
-                <a16:creationId xmlns:a16="http://schemas.microsoft.com/office/drawing/2014/main" id="{887EE279-9E3E-86AE-3ADD-8382E7B09C80}"/>
+                <a16:creationId xmlns:a16="http://schemas.microsoft.com/office/drawing/2014/main" id="{D0B5559F-5095-9437-622B-D03FFDDA5E49}"/>
               </a:ext>
             </a:extLst>
           </p:cNvPr>
@@ -24561,7 +24561,7 @@
           <p:cNvPr id="15" name="四角形: 角を丸くする 14">
             <a:extLst>
               <a:ext uri="{FF2B5EF4-FFF2-40B4-BE49-F238E27FC236}">
-                <a16:creationId xmlns:a16="http://schemas.microsoft.com/office/drawing/2014/main" id="{0165E63C-6F3E-1467-2A33-F680BDB39597}"/>
+                <a16:creationId xmlns:a16="http://schemas.microsoft.com/office/drawing/2014/main" id="{32D5FC52-7CB2-A201-13D0-7C9BDCEE0643}"/>
               </a:ext>
             </a:extLst>
           </p:cNvPr>
@@ -24617,7 +24617,7 @@
           <p:cNvPr id="16" name="テキスト ボックス 15">
             <a:extLst>
               <a:ext uri="{FF2B5EF4-FFF2-40B4-BE49-F238E27FC236}">
-                <a16:creationId xmlns:a16="http://schemas.microsoft.com/office/drawing/2014/main" id="{C5466F25-4CC6-3A64-F824-E778DDB87B7E}"/>
+                <a16:creationId xmlns:a16="http://schemas.microsoft.com/office/drawing/2014/main" id="{D4E0CD87-C645-E1DA-97E2-9565D63473B9}"/>
               </a:ext>
             </a:extLst>
           </p:cNvPr>
@@ -24677,7 +24677,7 @@
           <p:cNvPr id="17" name="テキスト ボックス 16">
             <a:extLst>
               <a:ext uri="{FF2B5EF4-FFF2-40B4-BE49-F238E27FC236}">
-                <a16:creationId xmlns:a16="http://schemas.microsoft.com/office/drawing/2014/main" id="{89D59789-8A6F-AD2C-C80F-D6342C3A7612}"/>
+                <a16:creationId xmlns:a16="http://schemas.microsoft.com/office/drawing/2014/main" id="{A47598E5-A132-763C-CBE8-D539861FF34E}"/>
               </a:ext>
             </a:extLst>
           </p:cNvPr>
@@ -24723,7 +24723,7 @@
           <p:cNvPr id="18" name="テキスト ボックス 17">
             <a:extLst>
               <a:ext uri="{FF2B5EF4-FFF2-40B4-BE49-F238E27FC236}">
-                <a16:creationId xmlns:a16="http://schemas.microsoft.com/office/drawing/2014/main" id="{46C92E5A-C913-28E5-E253-8041516332C5}"/>
+                <a16:creationId xmlns:a16="http://schemas.microsoft.com/office/drawing/2014/main" id="{1084C315-1E46-5282-BCC8-B0BEFC105BF8}"/>
               </a:ext>
             </a:extLst>
           </p:cNvPr>
@@ -24789,7 +24789,7 @@
           <p:cNvPr id="19" name="四角形: 角を丸くする 18">
             <a:extLst>
               <a:ext uri="{FF2B5EF4-FFF2-40B4-BE49-F238E27FC236}">
-                <a16:creationId xmlns:a16="http://schemas.microsoft.com/office/drawing/2014/main" id="{C6E2FD0B-7029-67A0-71C8-15E59A736177}"/>
+                <a16:creationId xmlns:a16="http://schemas.microsoft.com/office/drawing/2014/main" id="{597A9D99-9EAF-3ABA-773B-3265BE27AE26}"/>
               </a:ext>
             </a:extLst>
           </p:cNvPr>
@@ -24845,7 +24845,7 @@
           <p:cNvPr id="20" name="テキスト ボックス 19">
             <a:extLst>
               <a:ext uri="{FF2B5EF4-FFF2-40B4-BE49-F238E27FC236}">
-                <a16:creationId xmlns:a16="http://schemas.microsoft.com/office/drawing/2014/main" id="{DF478AD3-17AC-B910-A8B0-EFD792E49DB4}"/>
+                <a16:creationId xmlns:a16="http://schemas.microsoft.com/office/drawing/2014/main" id="{506B1E64-DD45-FC6E-672B-05D1911FF4CC}"/>
               </a:ext>
             </a:extLst>
           </p:cNvPr>
@@ -24905,7 +24905,7 @@
           <p:cNvPr id="21" name="テキスト ボックス 20">
             <a:extLst>
               <a:ext uri="{FF2B5EF4-FFF2-40B4-BE49-F238E27FC236}">
-                <a16:creationId xmlns:a16="http://schemas.microsoft.com/office/drawing/2014/main" id="{8603A2CD-8E81-E2EA-1FFB-AC742A213C92}"/>
+                <a16:creationId xmlns:a16="http://schemas.microsoft.com/office/drawing/2014/main" id="{DE2F2148-4E48-5C65-0E7D-4C7B6C7E09A1}"/>
               </a:ext>
             </a:extLst>
           </p:cNvPr>
@@ -24961,7 +24961,7 @@
           <p:cNvPr id="22" name="テキスト ボックス 21">
             <a:extLst>
               <a:ext uri="{FF2B5EF4-FFF2-40B4-BE49-F238E27FC236}">
-                <a16:creationId xmlns:a16="http://schemas.microsoft.com/office/drawing/2014/main" id="{E015CF39-5ABD-BFD8-9207-5C2261C8CA6E}"/>
+                <a16:creationId xmlns:a16="http://schemas.microsoft.com/office/drawing/2014/main" id="{8DD49F63-0030-719B-F034-C2D16F20F0DF}"/>
               </a:ext>
             </a:extLst>
           </p:cNvPr>
@@ -25017,7 +25017,7 @@
           <p:cNvPr id="23" name="四角形: 角を丸くする 22">
             <a:extLst>
               <a:ext uri="{FF2B5EF4-FFF2-40B4-BE49-F238E27FC236}">
-                <a16:creationId xmlns:a16="http://schemas.microsoft.com/office/drawing/2014/main" id="{8D86B048-1420-2C17-26B2-AC71D4B03858}"/>
+                <a16:creationId xmlns:a16="http://schemas.microsoft.com/office/drawing/2014/main" id="{77A20CFD-4D1E-35B0-1D6A-BD4FE1020E68}"/>
               </a:ext>
             </a:extLst>
           </p:cNvPr>
@@ -25073,7 +25073,7 @@
           <p:cNvPr id="24" name="テキスト ボックス 23">
             <a:extLst>
               <a:ext uri="{FF2B5EF4-FFF2-40B4-BE49-F238E27FC236}">
-                <a16:creationId xmlns:a16="http://schemas.microsoft.com/office/drawing/2014/main" id="{01276BC6-EDA2-DF94-53DF-4BFA59516D3D}"/>
+                <a16:creationId xmlns:a16="http://schemas.microsoft.com/office/drawing/2014/main" id="{5C60A280-BA34-FE29-53D1-5F3E0C79A6FA}"/>
               </a:ext>
             </a:extLst>
           </p:cNvPr>
@@ -25133,7 +25133,7 @@
           <p:cNvPr id="25" name="テキスト ボックス 24">
             <a:extLst>
               <a:ext uri="{FF2B5EF4-FFF2-40B4-BE49-F238E27FC236}">
-                <a16:creationId xmlns:a16="http://schemas.microsoft.com/office/drawing/2014/main" id="{4BE22DB9-7B29-A6F6-662C-E34476820947}"/>
+                <a16:creationId xmlns:a16="http://schemas.microsoft.com/office/drawing/2014/main" id="{24CEBEF0-73B0-11BF-28B8-4996FF5E96EF}"/>
               </a:ext>
             </a:extLst>
           </p:cNvPr>
@@ -25189,7 +25189,7 @@
           <p:cNvPr id="26" name="テキスト ボックス 25">
             <a:extLst>
               <a:ext uri="{FF2B5EF4-FFF2-40B4-BE49-F238E27FC236}">
-                <a16:creationId xmlns:a16="http://schemas.microsoft.com/office/drawing/2014/main" id="{302AB9D4-AFB3-AE1D-B2A8-3882AF29E60E}"/>
+                <a16:creationId xmlns:a16="http://schemas.microsoft.com/office/drawing/2014/main" id="{2C6C60BC-D596-7072-1699-DDF6AC6B1F01}"/>
               </a:ext>
             </a:extLst>
           </p:cNvPr>
@@ -25235,7 +25235,7 @@
           <p:cNvPr id="27" name="四角形: 角を丸くする 26">
             <a:extLst>
               <a:ext uri="{FF2B5EF4-FFF2-40B4-BE49-F238E27FC236}">
-                <a16:creationId xmlns:a16="http://schemas.microsoft.com/office/drawing/2014/main" id="{4BBA3B95-0381-5747-F5DE-F8933909F1CF}"/>
+                <a16:creationId xmlns:a16="http://schemas.microsoft.com/office/drawing/2014/main" id="{6F73CD3A-B85D-2207-3FF9-987DF1EE2A90}"/>
               </a:ext>
             </a:extLst>
           </p:cNvPr>
@@ -25305,7 +25305,7 @@
           <p:cNvPr id="28" name="正方形/長方形 27">
             <a:extLst>
               <a:ext uri="{FF2B5EF4-FFF2-40B4-BE49-F238E27FC236}">
-                <a16:creationId xmlns:a16="http://schemas.microsoft.com/office/drawing/2014/main" id="{48B8F653-D7B3-CBB5-9C5A-BF0FB0EAEE4E}"/>
+                <a16:creationId xmlns:a16="http://schemas.microsoft.com/office/drawing/2014/main" id="{E7D0FBFA-9CBC-7AB2-52B4-68A3592A2C92}"/>
               </a:ext>
             </a:extLst>
           </p:cNvPr>
@@ -25373,7 +25373,7 @@
           <p:cNvPr id="29" name="テキスト ボックス 28">
             <a:extLst>
               <a:ext uri="{FF2B5EF4-FFF2-40B4-BE49-F238E27FC236}">
-                <a16:creationId xmlns:a16="http://schemas.microsoft.com/office/drawing/2014/main" id="{9C6DFFAA-3BC3-4C12-C695-AD1FC55D286C}"/>
+                <a16:creationId xmlns:a16="http://schemas.microsoft.com/office/drawing/2014/main" id="{31F65466-8654-B345-10F2-29EBDB534816}"/>
               </a:ext>
             </a:extLst>
           </p:cNvPr>
@@ -25419,7 +25419,7 @@
           <p:cNvPr id="30" name="テキスト ボックス 29">
             <a:extLst>
               <a:ext uri="{FF2B5EF4-FFF2-40B4-BE49-F238E27FC236}">
-                <a16:creationId xmlns:a16="http://schemas.microsoft.com/office/drawing/2014/main" id="{EB861726-69B7-5CAE-B7F8-1614CF8C46EC}"/>
+                <a16:creationId xmlns:a16="http://schemas.microsoft.com/office/drawing/2014/main" id="{BDCE8392-2DCD-EBA4-712D-7329F88E07A7}"/>
               </a:ext>
             </a:extLst>
           </p:cNvPr>
@@ -25473,7 +25473,7 @@
     </p:spTree>
     <p:extLst>
       <p:ext uri="{BB962C8B-B14F-4D97-AF65-F5344CB8AC3E}">
-        <p14:creationId xmlns:p14="http://schemas.microsoft.com/office/powerpoint/2010/main" val="1284585093"/>
+        <p14:creationId xmlns:p14="http://schemas.microsoft.com/office/powerpoint/2010/main" val="4130953525"/>
       </p:ext>
     </p:extLst>
   </p:cSld>
@@ -25505,7 +25505,7 @@
           <p:cNvPr id="2" name="正方形/長方形 1">
             <a:extLst>
               <a:ext uri="{FF2B5EF4-FFF2-40B4-BE49-F238E27FC236}">
-                <a16:creationId xmlns:a16="http://schemas.microsoft.com/office/drawing/2014/main" id="{DA7ED351-9613-97B7-FE92-03EE9B7C4BFC}"/>
+                <a16:creationId xmlns:a16="http://schemas.microsoft.com/office/drawing/2014/main" id="{249947C4-5513-B63F-1793-B40822582B04}"/>
               </a:ext>
             </a:extLst>
           </p:cNvPr>
@@ -25573,7 +25573,7 @@
           <p:cNvPr id="3" name="正方形/長方形 2">
             <a:extLst>
               <a:ext uri="{FF2B5EF4-FFF2-40B4-BE49-F238E27FC236}">
-                <a16:creationId xmlns:a16="http://schemas.microsoft.com/office/drawing/2014/main" id="{FEF6E7C1-FE9E-4CAB-9029-D04E22A4C24B}"/>
+                <a16:creationId xmlns:a16="http://schemas.microsoft.com/office/drawing/2014/main" id="{932953C5-5644-21E0-8FA9-6542256CE1BD}"/>
               </a:ext>
             </a:extLst>
           </p:cNvPr>
@@ -25641,7 +25641,7 @@
           <p:cNvPr id="4" name="テキスト ボックス 3">
             <a:extLst>
               <a:ext uri="{FF2B5EF4-FFF2-40B4-BE49-F238E27FC236}">
-                <a16:creationId xmlns:a16="http://schemas.microsoft.com/office/drawing/2014/main" id="{2B34AB39-374D-EBC9-918F-B514F8346E59}"/>
+                <a16:creationId xmlns:a16="http://schemas.microsoft.com/office/drawing/2014/main" id="{19449195-4F63-EE92-C1F4-A1559DB49EFA}"/>
               </a:ext>
             </a:extLst>
           </p:cNvPr>
@@ -25694,7 +25694,7 @@
           <p:cNvPr id="5" name="テキスト ボックス 4">
             <a:extLst>
               <a:ext uri="{FF2B5EF4-FFF2-40B4-BE49-F238E27FC236}">
-                <a16:creationId xmlns:a16="http://schemas.microsoft.com/office/drawing/2014/main" id="{0EFD9661-B2C0-36AC-640A-54F8BA0A741E}"/>
+                <a16:creationId xmlns:a16="http://schemas.microsoft.com/office/drawing/2014/main" id="{51640310-3266-88BB-6770-A680433B0555}"/>
               </a:ext>
             </a:extLst>
           </p:cNvPr>
@@ -25760,7 +25760,7 @@
           <p:cNvPr id="6" name="正方形/長方形 5">
             <a:extLst>
               <a:ext uri="{FF2B5EF4-FFF2-40B4-BE49-F238E27FC236}">
-                <a16:creationId xmlns:a16="http://schemas.microsoft.com/office/drawing/2014/main" id="{02F4A8D9-CC2E-6E8C-4277-242E23EC0C0E}"/>
+                <a16:creationId xmlns:a16="http://schemas.microsoft.com/office/drawing/2014/main" id="{73F0D186-FFB6-F2CC-4ECE-DD041459623B}"/>
               </a:ext>
             </a:extLst>
           </p:cNvPr>
@@ -25828,7 +25828,7 @@
           <p:cNvPr id="7" name="四角形: 角を丸くする 6">
             <a:extLst>
               <a:ext uri="{FF2B5EF4-FFF2-40B4-BE49-F238E27FC236}">
-                <a16:creationId xmlns:a16="http://schemas.microsoft.com/office/drawing/2014/main" id="{6CCAA133-D642-F1A4-C2D0-37FE44FF3FB3}"/>
+                <a16:creationId xmlns:a16="http://schemas.microsoft.com/office/drawing/2014/main" id="{4E503795-A651-2BB2-53EC-A6D5E489360C}"/>
               </a:ext>
             </a:extLst>
           </p:cNvPr>
@@ -25898,7 +25898,7 @@
           <p:cNvPr id="8" name="テキスト ボックス 7">
             <a:extLst>
               <a:ext uri="{FF2B5EF4-FFF2-40B4-BE49-F238E27FC236}">
-                <a16:creationId xmlns:a16="http://schemas.microsoft.com/office/drawing/2014/main" id="{1E535896-2C55-A732-A615-605703CA1542}"/>
+                <a16:creationId xmlns:a16="http://schemas.microsoft.com/office/drawing/2014/main" id="{F71B38EE-5F99-259F-7910-ABEB4C0E8812}"/>
               </a:ext>
             </a:extLst>
           </p:cNvPr>
@@ -25944,7 +25944,7 @@
           <p:cNvPr id="9" name="テキスト ボックス 8">
             <a:extLst>
               <a:ext uri="{FF2B5EF4-FFF2-40B4-BE49-F238E27FC236}">
-                <a16:creationId xmlns:a16="http://schemas.microsoft.com/office/drawing/2014/main" id="{73AD8791-21E7-72D2-642D-AFB3E7E59BA2}"/>
+                <a16:creationId xmlns:a16="http://schemas.microsoft.com/office/drawing/2014/main" id="{2FE88805-BCC2-F0BE-49F8-D5394AA8DB55}"/>
               </a:ext>
             </a:extLst>
           </p:cNvPr>
@@ -25990,7 +25990,7 @@
           <p:cNvPr id="10" name="テキスト ボックス 9">
             <a:extLst>
               <a:ext uri="{FF2B5EF4-FFF2-40B4-BE49-F238E27FC236}">
-                <a16:creationId xmlns:a16="http://schemas.microsoft.com/office/drawing/2014/main" id="{3A1C37E8-FF25-1847-33D4-3D762AF6AC44}"/>
+                <a16:creationId xmlns:a16="http://schemas.microsoft.com/office/drawing/2014/main" id="{2110CE79-5476-2146-81B2-39FCE8D1770E}"/>
               </a:ext>
             </a:extLst>
           </p:cNvPr>
@@ -26043,7 +26043,7 @@
           <p:cNvPr id="11" name="四角形: 角を丸くする 10">
             <a:extLst>
               <a:ext uri="{FF2B5EF4-FFF2-40B4-BE49-F238E27FC236}">
-                <a16:creationId xmlns:a16="http://schemas.microsoft.com/office/drawing/2014/main" id="{839EC4D7-1564-FD95-E9FC-C472418448B4}"/>
+                <a16:creationId xmlns:a16="http://schemas.microsoft.com/office/drawing/2014/main" id="{A39407D7-DE34-2A37-625F-5BF055292871}"/>
               </a:ext>
             </a:extLst>
           </p:cNvPr>
@@ -26099,7 +26099,7 @@
           <p:cNvPr id="12" name="正方形/長方形 11">
             <a:extLst>
               <a:ext uri="{FF2B5EF4-FFF2-40B4-BE49-F238E27FC236}">
-                <a16:creationId xmlns:a16="http://schemas.microsoft.com/office/drawing/2014/main" id="{8F60D924-4350-B649-CD14-6962E8776580}"/>
+                <a16:creationId xmlns:a16="http://schemas.microsoft.com/office/drawing/2014/main" id="{AE9CD9D3-D07B-7491-8869-5A903123DA06}"/>
               </a:ext>
             </a:extLst>
           </p:cNvPr>
@@ -26167,7 +26167,7 @@
           <p:cNvPr id="13" name="テキスト ボックス 12">
             <a:extLst>
               <a:ext uri="{FF2B5EF4-FFF2-40B4-BE49-F238E27FC236}">
-                <a16:creationId xmlns:a16="http://schemas.microsoft.com/office/drawing/2014/main" id="{DC8CD352-001C-6840-588B-D256991B6A51}"/>
+                <a16:creationId xmlns:a16="http://schemas.microsoft.com/office/drawing/2014/main" id="{B278E036-AB23-AE29-C54F-CA879123535D}"/>
               </a:ext>
             </a:extLst>
           </p:cNvPr>
@@ -26213,7 +26213,7 @@
           <p:cNvPr id="14" name="テキスト ボックス 13">
             <a:extLst>
               <a:ext uri="{FF2B5EF4-FFF2-40B4-BE49-F238E27FC236}">
-                <a16:creationId xmlns:a16="http://schemas.microsoft.com/office/drawing/2014/main" id="{AD5D69BB-55C6-4249-FF7B-6AE5CA977BE8}"/>
+                <a16:creationId xmlns:a16="http://schemas.microsoft.com/office/drawing/2014/main" id="{943EFD9D-E356-D063-161F-86204C4BDAEB}"/>
               </a:ext>
             </a:extLst>
           </p:cNvPr>
@@ -26259,7 +26259,7 @@
           <p:cNvPr id="15" name="四角形: 角を丸くする 14">
             <a:extLst>
               <a:ext uri="{FF2B5EF4-FFF2-40B4-BE49-F238E27FC236}">
-                <a16:creationId xmlns:a16="http://schemas.microsoft.com/office/drawing/2014/main" id="{C473C88D-B13A-B027-6C75-866731333665}"/>
+                <a16:creationId xmlns:a16="http://schemas.microsoft.com/office/drawing/2014/main" id="{B36C979F-F87F-490A-40E0-4831835E5A26}"/>
               </a:ext>
             </a:extLst>
           </p:cNvPr>
@@ -26315,7 +26315,7 @@
           <p:cNvPr id="16" name="正方形/長方形 15">
             <a:extLst>
               <a:ext uri="{FF2B5EF4-FFF2-40B4-BE49-F238E27FC236}">
-                <a16:creationId xmlns:a16="http://schemas.microsoft.com/office/drawing/2014/main" id="{8C4B48D0-093B-8D44-2BFB-ACE93A072A11}"/>
+                <a16:creationId xmlns:a16="http://schemas.microsoft.com/office/drawing/2014/main" id="{471C7B0C-57C7-F1B9-90E6-BDC1C278AA39}"/>
               </a:ext>
             </a:extLst>
           </p:cNvPr>
@@ -26383,7 +26383,7 @@
           <p:cNvPr id="17" name="テキスト ボックス 16">
             <a:extLst>
               <a:ext uri="{FF2B5EF4-FFF2-40B4-BE49-F238E27FC236}">
-                <a16:creationId xmlns:a16="http://schemas.microsoft.com/office/drawing/2014/main" id="{C0BBE8EB-5440-9AE4-CF35-8939DB8BF59B}"/>
+                <a16:creationId xmlns:a16="http://schemas.microsoft.com/office/drawing/2014/main" id="{D37D27A3-DC7C-9B11-DBD1-CBCC28C0864D}"/>
               </a:ext>
             </a:extLst>
           </p:cNvPr>
@@ -26429,7 +26429,7 @@
           <p:cNvPr id="18" name="テキスト ボックス 17">
             <a:extLst>
               <a:ext uri="{FF2B5EF4-FFF2-40B4-BE49-F238E27FC236}">
-                <a16:creationId xmlns:a16="http://schemas.microsoft.com/office/drawing/2014/main" id="{22F763F2-277B-59E4-2789-65F4E4582361}"/>
+                <a16:creationId xmlns:a16="http://schemas.microsoft.com/office/drawing/2014/main" id="{AA8FDA28-1208-C27D-B4C4-54D536480BB1}"/>
               </a:ext>
             </a:extLst>
           </p:cNvPr>
@@ -26475,7 +26475,7 @@
           <p:cNvPr id="19" name="四角形: 角を丸くする 18">
             <a:extLst>
               <a:ext uri="{FF2B5EF4-FFF2-40B4-BE49-F238E27FC236}">
-                <a16:creationId xmlns:a16="http://schemas.microsoft.com/office/drawing/2014/main" id="{3E334442-50B6-0E8F-C7E4-49DC163E0572}"/>
+                <a16:creationId xmlns:a16="http://schemas.microsoft.com/office/drawing/2014/main" id="{BB072B57-DB29-7078-1A5B-DBE9C8D94380}"/>
               </a:ext>
             </a:extLst>
           </p:cNvPr>
@@ -26531,7 +26531,7 @@
           <p:cNvPr id="20" name="正方形/長方形 19">
             <a:extLst>
               <a:ext uri="{FF2B5EF4-FFF2-40B4-BE49-F238E27FC236}">
-                <a16:creationId xmlns:a16="http://schemas.microsoft.com/office/drawing/2014/main" id="{ACD33015-6E1B-9883-AE39-3130E1AE6962}"/>
+                <a16:creationId xmlns:a16="http://schemas.microsoft.com/office/drawing/2014/main" id="{AF1E0808-52E6-DE1B-F266-DE6573103D27}"/>
               </a:ext>
             </a:extLst>
           </p:cNvPr>
@@ -26599,7 +26599,7 @@
           <p:cNvPr id="21" name="テキスト ボックス 20">
             <a:extLst>
               <a:ext uri="{FF2B5EF4-FFF2-40B4-BE49-F238E27FC236}">
-                <a16:creationId xmlns:a16="http://schemas.microsoft.com/office/drawing/2014/main" id="{F87D5007-E57F-A44B-D755-EB9A6E952B93}"/>
+                <a16:creationId xmlns:a16="http://schemas.microsoft.com/office/drawing/2014/main" id="{30FDA571-2502-A7A7-F047-483AF320DB7A}"/>
               </a:ext>
             </a:extLst>
           </p:cNvPr>
@@ -26645,7 +26645,7 @@
           <p:cNvPr id="22" name="テキスト ボックス 21">
             <a:extLst>
               <a:ext uri="{FF2B5EF4-FFF2-40B4-BE49-F238E27FC236}">
-                <a16:creationId xmlns:a16="http://schemas.microsoft.com/office/drawing/2014/main" id="{43990A0A-8D8D-4055-27CE-DC4A10EB448F}"/>
+                <a16:creationId xmlns:a16="http://schemas.microsoft.com/office/drawing/2014/main" id="{B13A8E30-D33E-86CB-32CD-E5443D3DEC28}"/>
               </a:ext>
             </a:extLst>
           </p:cNvPr>
@@ -26689,7 +26689,7 @@
     </p:spTree>
     <p:extLst>
       <p:ext uri="{BB962C8B-B14F-4D97-AF65-F5344CB8AC3E}">
-        <p14:creationId xmlns:p14="http://schemas.microsoft.com/office/powerpoint/2010/main" val="1748083280"/>
+        <p14:creationId xmlns:p14="http://schemas.microsoft.com/office/powerpoint/2010/main" val="2278458"/>
       </p:ext>
     </p:extLst>
   </p:cSld>
@@ -26721,7 +26721,7 @@
           <p:cNvPr id="2" name="正方形/長方形 1">
             <a:extLst>
               <a:ext uri="{FF2B5EF4-FFF2-40B4-BE49-F238E27FC236}">
-                <a16:creationId xmlns:a16="http://schemas.microsoft.com/office/drawing/2014/main" id="{3154C749-8AF7-D6A5-EABE-5AA01B0B1FF2}"/>
+                <a16:creationId xmlns:a16="http://schemas.microsoft.com/office/drawing/2014/main" id="{FAFC1608-3838-4A8D-717C-0E07BB3C5742}"/>
               </a:ext>
             </a:extLst>
           </p:cNvPr>
@@ -26789,7 +26789,7 @@
           <p:cNvPr id="3" name="正方形/長方形 2">
             <a:extLst>
               <a:ext uri="{FF2B5EF4-FFF2-40B4-BE49-F238E27FC236}">
-                <a16:creationId xmlns:a16="http://schemas.microsoft.com/office/drawing/2014/main" id="{E9B159E4-2D17-BDEB-805F-CDFF8B1C5BCE}"/>
+                <a16:creationId xmlns:a16="http://schemas.microsoft.com/office/drawing/2014/main" id="{59A76E1F-04E4-0A2C-2EA6-12B65E174FA1}"/>
               </a:ext>
             </a:extLst>
           </p:cNvPr>
@@ -26857,7 +26857,7 @@
           <p:cNvPr id="4" name="テキスト ボックス 3">
             <a:extLst>
               <a:ext uri="{FF2B5EF4-FFF2-40B4-BE49-F238E27FC236}">
-                <a16:creationId xmlns:a16="http://schemas.microsoft.com/office/drawing/2014/main" id="{921B63DD-4631-038F-ED48-EC2728240BDB}"/>
+                <a16:creationId xmlns:a16="http://schemas.microsoft.com/office/drawing/2014/main" id="{E5B0151A-9EF8-F8FC-DCE0-9270F3E06E88}"/>
               </a:ext>
             </a:extLst>
           </p:cNvPr>
@@ -26910,7 +26910,7 @@
           <p:cNvPr id="5" name="テキスト ボックス 4">
             <a:extLst>
               <a:ext uri="{FF2B5EF4-FFF2-40B4-BE49-F238E27FC236}">
-                <a16:creationId xmlns:a16="http://schemas.microsoft.com/office/drawing/2014/main" id="{A2930DE3-90ED-599E-ACFF-A5E93B294487}"/>
+                <a16:creationId xmlns:a16="http://schemas.microsoft.com/office/drawing/2014/main" id="{0A6DECBE-F13C-7783-B401-2D458F9591E7}"/>
               </a:ext>
             </a:extLst>
           </p:cNvPr>
@@ -26956,7 +26956,7 @@
           <p:cNvPr id="6" name="正方形/長方形 5">
             <a:extLst>
               <a:ext uri="{FF2B5EF4-FFF2-40B4-BE49-F238E27FC236}">
-                <a16:creationId xmlns:a16="http://schemas.microsoft.com/office/drawing/2014/main" id="{D5AE42C7-6599-DB71-8E62-A7ED5F6506CB}"/>
+                <a16:creationId xmlns:a16="http://schemas.microsoft.com/office/drawing/2014/main" id="{6E7BF40A-A699-3B06-FB4F-AFC3B87611B1}"/>
               </a:ext>
             </a:extLst>
           </p:cNvPr>
@@ -27024,7 +27024,7 @@
           <p:cNvPr id="7" name="四角形: 角を丸くする 6">
             <a:extLst>
               <a:ext uri="{FF2B5EF4-FFF2-40B4-BE49-F238E27FC236}">
-                <a16:creationId xmlns:a16="http://schemas.microsoft.com/office/drawing/2014/main" id="{9BEE2407-8CFA-4B59-0F95-84E1CC2FA478}"/>
+                <a16:creationId xmlns:a16="http://schemas.microsoft.com/office/drawing/2014/main" id="{168CDFCE-D3EF-CB6B-B43B-0AF0D6227846}"/>
               </a:ext>
             </a:extLst>
           </p:cNvPr>
@@ -27094,7 +27094,7 @@
           <p:cNvPr id="8" name="テキスト ボックス 7">
             <a:extLst>
               <a:ext uri="{FF2B5EF4-FFF2-40B4-BE49-F238E27FC236}">
-                <a16:creationId xmlns:a16="http://schemas.microsoft.com/office/drawing/2014/main" id="{72B5FB21-A79C-3EF9-C1A0-41028B897661}"/>
+                <a16:creationId xmlns:a16="http://schemas.microsoft.com/office/drawing/2014/main" id="{E861C7BB-783F-97CE-614C-308D9DBF0DE1}"/>
               </a:ext>
             </a:extLst>
           </p:cNvPr>
@@ -27140,7 +27140,7 @@
           <p:cNvPr id="9" name="テキスト ボックス 8">
             <a:extLst>
               <a:ext uri="{FF2B5EF4-FFF2-40B4-BE49-F238E27FC236}">
-                <a16:creationId xmlns:a16="http://schemas.microsoft.com/office/drawing/2014/main" id="{8A0FDD55-868F-8942-858D-C327C5D1F1AA}"/>
+                <a16:creationId xmlns:a16="http://schemas.microsoft.com/office/drawing/2014/main" id="{074B7EC1-D8F0-7E07-7A3C-F6D4D0B4AB27}"/>
               </a:ext>
             </a:extLst>
           </p:cNvPr>
@@ -27186,7 +27186,7 @@
           <p:cNvPr id="10" name="テキスト ボックス 9">
             <a:extLst>
               <a:ext uri="{FF2B5EF4-FFF2-40B4-BE49-F238E27FC236}">
-                <a16:creationId xmlns:a16="http://schemas.microsoft.com/office/drawing/2014/main" id="{0421DB43-19B3-B175-B763-08976393A6DE}"/>
+                <a16:creationId xmlns:a16="http://schemas.microsoft.com/office/drawing/2014/main" id="{80814D6B-0343-E1AD-16CB-E725AD9A4AA7}"/>
               </a:ext>
             </a:extLst>
           </p:cNvPr>
@@ -27239,7 +27239,7 @@
           <p:cNvPr id="11" name="四角形: 角を丸くする 10">
             <a:extLst>
               <a:ext uri="{FF2B5EF4-FFF2-40B4-BE49-F238E27FC236}">
-                <a16:creationId xmlns:a16="http://schemas.microsoft.com/office/drawing/2014/main" id="{70AE9284-6087-4E66-508F-946911EC14F6}"/>
+                <a16:creationId xmlns:a16="http://schemas.microsoft.com/office/drawing/2014/main" id="{460EA644-93EE-E193-51CF-C321C884FDB5}"/>
               </a:ext>
             </a:extLst>
           </p:cNvPr>
@@ -27295,7 +27295,7 @@
           <p:cNvPr id="12" name="四角形: 角を丸くする 11">
             <a:extLst>
               <a:ext uri="{FF2B5EF4-FFF2-40B4-BE49-F238E27FC236}">
-                <a16:creationId xmlns:a16="http://schemas.microsoft.com/office/drawing/2014/main" id="{E5C484E9-4D6E-188D-49E1-6E852F5A6ECE}"/>
+                <a16:creationId xmlns:a16="http://schemas.microsoft.com/office/drawing/2014/main" id="{43F4FED5-886C-B207-6CE9-5043C5E3EAA9}"/>
               </a:ext>
             </a:extLst>
           </p:cNvPr>
@@ -27365,7 +27365,7 @@
           <p:cNvPr id="13" name="テキスト ボックス 12">
             <a:extLst>
               <a:ext uri="{FF2B5EF4-FFF2-40B4-BE49-F238E27FC236}">
-                <a16:creationId xmlns:a16="http://schemas.microsoft.com/office/drawing/2014/main" id="{DD057E51-26BB-8639-0638-F4193C06E4F8}"/>
+                <a16:creationId xmlns:a16="http://schemas.microsoft.com/office/drawing/2014/main" id="{2DE3026A-5A38-E5D7-BB73-FAB117454814}"/>
               </a:ext>
             </a:extLst>
           </p:cNvPr>
@@ -27418,7 +27418,7 @@
           <p:cNvPr id="14" name="テキスト ボックス 13">
             <a:extLst>
               <a:ext uri="{FF2B5EF4-FFF2-40B4-BE49-F238E27FC236}">
-                <a16:creationId xmlns:a16="http://schemas.microsoft.com/office/drawing/2014/main" id="{23165752-6948-FD56-3AED-288A8CCD98A2}"/>
+                <a16:creationId xmlns:a16="http://schemas.microsoft.com/office/drawing/2014/main" id="{EFBDA3F7-7F8D-CFF9-DF39-D02F7D9DA701}"/>
               </a:ext>
             </a:extLst>
           </p:cNvPr>
@@ -27464,7 +27464,7 @@
           <p:cNvPr id="15" name="テキスト ボックス 14">
             <a:extLst>
               <a:ext uri="{FF2B5EF4-FFF2-40B4-BE49-F238E27FC236}">
-                <a16:creationId xmlns:a16="http://schemas.microsoft.com/office/drawing/2014/main" id="{E51E623A-EE7C-9675-CEDE-5262AD654E78}"/>
+                <a16:creationId xmlns:a16="http://schemas.microsoft.com/office/drawing/2014/main" id="{47DE65CA-57DD-3954-F4FE-ABDA07D0EC24}"/>
               </a:ext>
             </a:extLst>
           </p:cNvPr>
@@ -27603,7 +27603,7 @@
           <p:cNvPr id="16" name="四角形: 角を丸くする 15">
             <a:extLst>
               <a:ext uri="{FF2B5EF4-FFF2-40B4-BE49-F238E27FC236}">
-                <a16:creationId xmlns:a16="http://schemas.microsoft.com/office/drawing/2014/main" id="{1574682D-D517-9435-0864-56C08726D3AE}"/>
+                <a16:creationId xmlns:a16="http://schemas.microsoft.com/office/drawing/2014/main" id="{96F24676-F1B5-3D40-4E65-33152AFC0FA8}"/>
               </a:ext>
             </a:extLst>
           </p:cNvPr>
@@ -27673,7 +27673,7 @@
           <p:cNvPr id="17" name="四角形: 角を丸くする 16">
             <a:extLst>
               <a:ext uri="{FF2B5EF4-FFF2-40B4-BE49-F238E27FC236}">
-                <a16:creationId xmlns:a16="http://schemas.microsoft.com/office/drawing/2014/main" id="{5D18AE86-8CA1-2F80-6570-DAF123C4EBD2}"/>
+                <a16:creationId xmlns:a16="http://schemas.microsoft.com/office/drawing/2014/main" id="{186A315E-E82F-B1C4-DB74-8E366CBADCEB}"/>
               </a:ext>
             </a:extLst>
           </p:cNvPr>
@@ -27743,7 +27743,7 @@
           <p:cNvPr id="18" name="テキスト ボックス 17">
             <a:extLst>
               <a:ext uri="{FF2B5EF4-FFF2-40B4-BE49-F238E27FC236}">
-                <a16:creationId xmlns:a16="http://schemas.microsoft.com/office/drawing/2014/main" id="{41576F8E-BBF8-6C15-F061-6A25E3F8A9F7}"/>
+                <a16:creationId xmlns:a16="http://schemas.microsoft.com/office/drawing/2014/main" id="{1EFA2781-E641-242F-DE3C-24678F853CAC}"/>
               </a:ext>
             </a:extLst>
           </p:cNvPr>
@@ -27796,7 +27796,7 @@
           <p:cNvPr id="19" name="テキスト ボックス 18">
             <a:extLst>
               <a:ext uri="{FF2B5EF4-FFF2-40B4-BE49-F238E27FC236}">
-                <a16:creationId xmlns:a16="http://schemas.microsoft.com/office/drawing/2014/main" id="{B45BF9CE-9412-3C30-F8B4-64BD41318192}"/>
+                <a16:creationId xmlns:a16="http://schemas.microsoft.com/office/drawing/2014/main" id="{55B10DA6-9A4E-0B60-71CC-18B3C24C0778}"/>
               </a:ext>
             </a:extLst>
           </p:cNvPr>
@@ -27862,7 +27862,7 @@
           <p:cNvPr id="20" name="四角形: 角を丸くする 19">
             <a:extLst>
               <a:ext uri="{FF2B5EF4-FFF2-40B4-BE49-F238E27FC236}">
-                <a16:creationId xmlns:a16="http://schemas.microsoft.com/office/drawing/2014/main" id="{821783B4-A729-C2B0-C282-724CC57B970F}"/>
+                <a16:creationId xmlns:a16="http://schemas.microsoft.com/office/drawing/2014/main" id="{AEE04B3E-FBC9-9F78-078C-718459B9D0C6}"/>
               </a:ext>
             </a:extLst>
           </p:cNvPr>
@@ -27918,7 +27918,7 @@
           <p:cNvPr id="21" name="テキスト ボックス 20">
             <a:extLst>
               <a:ext uri="{FF2B5EF4-FFF2-40B4-BE49-F238E27FC236}">
-                <a16:creationId xmlns:a16="http://schemas.microsoft.com/office/drawing/2014/main" id="{1A67175B-B1D9-410F-885B-DEDC720F5252}"/>
+                <a16:creationId xmlns:a16="http://schemas.microsoft.com/office/drawing/2014/main" id="{101593F4-0B24-F2A7-5B5B-4E304D4C5884}"/>
               </a:ext>
             </a:extLst>
           </p:cNvPr>
@@ -27971,7 +27971,7 @@
           <p:cNvPr id="22" name="テキスト ボックス 21">
             <a:extLst>
               <a:ext uri="{FF2B5EF4-FFF2-40B4-BE49-F238E27FC236}">
-                <a16:creationId xmlns:a16="http://schemas.microsoft.com/office/drawing/2014/main" id="{E942902A-3513-5A93-39FC-BA9C6416EFD1}"/>
+                <a16:creationId xmlns:a16="http://schemas.microsoft.com/office/drawing/2014/main" id="{C139A5A0-D14D-8153-E9A5-FEE02B342645}"/>
               </a:ext>
             </a:extLst>
           </p:cNvPr>
@@ -28024,7 +28024,7 @@
           <p:cNvPr id="23" name="四角形: 角を丸くする 22">
             <a:extLst>
               <a:ext uri="{FF2B5EF4-FFF2-40B4-BE49-F238E27FC236}">
-                <a16:creationId xmlns:a16="http://schemas.microsoft.com/office/drawing/2014/main" id="{42373691-643F-2450-C167-E2D648F84B63}"/>
+                <a16:creationId xmlns:a16="http://schemas.microsoft.com/office/drawing/2014/main" id="{5A3F959C-4099-4F4B-770D-402AE20932EF}"/>
               </a:ext>
             </a:extLst>
           </p:cNvPr>
@@ -28080,7 +28080,7 @@
           <p:cNvPr id="24" name="テキスト ボックス 23">
             <a:extLst>
               <a:ext uri="{FF2B5EF4-FFF2-40B4-BE49-F238E27FC236}">
-                <a16:creationId xmlns:a16="http://schemas.microsoft.com/office/drawing/2014/main" id="{F19FF844-29CA-65F4-AC7F-AC673E458204}"/>
+                <a16:creationId xmlns:a16="http://schemas.microsoft.com/office/drawing/2014/main" id="{647A59CC-6E8C-34CE-C73A-15BEF683BAF8}"/>
               </a:ext>
             </a:extLst>
           </p:cNvPr>
@@ -28133,7 +28133,7 @@
           <p:cNvPr id="25" name="テキスト ボックス 24">
             <a:extLst>
               <a:ext uri="{FF2B5EF4-FFF2-40B4-BE49-F238E27FC236}">
-                <a16:creationId xmlns:a16="http://schemas.microsoft.com/office/drawing/2014/main" id="{AA52490C-9B7A-9469-5519-7C965A4E7CAD}"/>
+                <a16:creationId xmlns:a16="http://schemas.microsoft.com/office/drawing/2014/main" id="{AB08076C-7E14-802A-2D39-09B600FC7E1F}"/>
               </a:ext>
             </a:extLst>
           </p:cNvPr>
@@ -28186,7 +28186,7 @@
           <p:cNvPr id="26" name="四角形: 角を丸くする 25">
             <a:extLst>
               <a:ext uri="{FF2B5EF4-FFF2-40B4-BE49-F238E27FC236}">
-                <a16:creationId xmlns:a16="http://schemas.microsoft.com/office/drawing/2014/main" id="{6F4BFE2B-2921-04D2-B597-58FCEDECA8D1}"/>
+                <a16:creationId xmlns:a16="http://schemas.microsoft.com/office/drawing/2014/main" id="{7649E6C6-87BC-B6AE-B110-7195EE139485}"/>
               </a:ext>
             </a:extLst>
           </p:cNvPr>
@@ -28242,7 +28242,7 @@
           <p:cNvPr id="27" name="テキスト ボックス 26">
             <a:extLst>
               <a:ext uri="{FF2B5EF4-FFF2-40B4-BE49-F238E27FC236}">
-                <a16:creationId xmlns:a16="http://schemas.microsoft.com/office/drawing/2014/main" id="{B0E07228-5FC0-4233-89B0-0BC69532BC37}"/>
+                <a16:creationId xmlns:a16="http://schemas.microsoft.com/office/drawing/2014/main" id="{1F0B329D-ABCF-F3E4-F320-8C1E04604D1C}"/>
               </a:ext>
             </a:extLst>
           </p:cNvPr>
@@ -28295,7 +28295,7 @@
           <p:cNvPr id="28" name="テキスト ボックス 27">
             <a:extLst>
               <a:ext uri="{FF2B5EF4-FFF2-40B4-BE49-F238E27FC236}">
-                <a16:creationId xmlns:a16="http://schemas.microsoft.com/office/drawing/2014/main" id="{8F27EFA0-A2C7-30BB-87FA-C9479C5DBF8B}"/>
+                <a16:creationId xmlns:a16="http://schemas.microsoft.com/office/drawing/2014/main" id="{A8DD6DCE-5C0D-31CC-843F-DB61BA1D9745}"/>
               </a:ext>
             </a:extLst>
           </p:cNvPr>
@@ -28341,7 +28341,7 @@
           <p:cNvPr id="29" name="四角形: 角を丸くする 28">
             <a:extLst>
               <a:ext uri="{FF2B5EF4-FFF2-40B4-BE49-F238E27FC236}">
-                <a16:creationId xmlns:a16="http://schemas.microsoft.com/office/drawing/2014/main" id="{D16D15F1-31C4-F68A-9BFB-A06F8457C81F}"/>
+                <a16:creationId xmlns:a16="http://schemas.microsoft.com/office/drawing/2014/main" id="{15E4EE49-576D-231E-DDE9-98740F5C2829}"/>
               </a:ext>
             </a:extLst>
           </p:cNvPr>
@@ -28411,7 +28411,7 @@
           <p:cNvPr id="30" name="正方形/長方形 29">
             <a:extLst>
               <a:ext uri="{FF2B5EF4-FFF2-40B4-BE49-F238E27FC236}">
-                <a16:creationId xmlns:a16="http://schemas.microsoft.com/office/drawing/2014/main" id="{B90DDED1-6A0E-7329-BB2C-A96C04E2415A}"/>
+                <a16:creationId xmlns:a16="http://schemas.microsoft.com/office/drawing/2014/main" id="{B6985043-A076-6C3E-ED32-E58DEEF24AD6}"/>
               </a:ext>
             </a:extLst>
           </p:cNvPr>
@@ -28479,7 +28479,7 @@
           <p:cNvPr id="31" name="テキスト ボックス 30">
             <a:extLst>
               <a:ext uri="{FF2B5EF4-FFF2-40B4-BE49-F238E27FC236}">
-                <a16:creationId xmlns:a16="http://schemas.microsoft.com/office/drawing/2014/main" id="{BA514D95-7DC1-ADDF-22D6-327074E03459}"/>
+                <a16:creationId xmlns:a16="http://schemas.microsoft.com/office/drawing/2014/main" id="{9DA86CEC-E5E9-A07D-425F-1F88EEB434EE}"/>
               </a:ext>
             </a:extLst>
           </p:cNvPr>
@@ -28525,7 +28525,7 @@
           <p:cNvPr id="32" name="テキスト ボックス 31">
             <a:extLst>
               <a:ext uri="{FF2B5EF4-FFF2-40B4-BE49-F238E27FC236}">
-                <a16:creationId xmlns:a16="http://schemas.microsoft.com/office/drawing/2014/main" id="{DA1DD6D1-7E69-5F85-18FD-B161E14EF606}"/>
+                <a16:creationId xmlns:a16="http://schemas.microsoft.com/office/drawing/2014/main" id="{67FEAEA5-ADA2-D139-AD85-A1F1826FB0B8}"/>
               </a:ext>
             </a:extLst>
           </p:cNvPr>
@@ -28569,7 +28569,7 @@
     </p:spTree>
     <p:extLst>
       <p:ext uri="{BB962C8B-B14F-4D97-AF65-F5344CB8AC3E}">
-        <p14:creationId xmlns:p14="http://schemas.microsoft.com/office/powerpoint/2010/main" val="1658158305"/>
+        <p14:creationId xmlns:p14="http://schemas.microsoft.com/office/powerpoint/2010/main" val="2966964243"/>
       </p:ext>
     </p:extLst>
   </p:cSld>

--- a/docs/操作ガイド.pptx
+++ b/docs/操作ガイド.pptx
@@ -147,7 +147,7 @@
           <p:cNvPr id="2" name="タイトル 1">
             <a:extLst>
               <a:ext uri="{FF2B5EF4-FFF2-40B4-BE49-F238E27FC236}">
-                <a16:creationId xmlns:a16="http://schemas.microsoft.com/office/drawing/2014/main" id="{BDDFCBA5-1EA0-E270-5390-BD81DFEAE08F}"/>
+                <a16:creationId xmlns:a16="http://schemas.microsoft.com/office/drawing/2014/main" id="{0D7D0273-B300-8B3B-5586-F5DD32264DCA}"/>
               </a:ext>
             </a:extLst>
           </p:cNvPr>
@@ -184,7 +184,7 @@
           <p:cNvPr id="3" name="字幕 2">
             <a:extLst>
               <a:ext uri="{FF2B5EF4-FFF2-40B4-BE49-F238E27FC236}">
-                <a16:creationId xmlns:a16="http://schemas.microsoft.com/office/drawing/2014/main" id="{A673ED21-5CA1-35F2-6F9E-40FA00FC3206}"/>
+                <a16:creationId xmlns:a16="http://schemas.microsoft.com/office/drawing/2014/main" id="{61D43A2A-0AD2-DC7B-6298-CD2E5E80F587}"/>
               </a:ext>
             </a:extLst>
           </p:cNvPr>
@@ -254,7 +254,7 @@
           <p:cNvPr id="4" name="日付プレースホルダー 3">
             <a:extLst>
               <a:ext uri="{FF2B5EF4-FFF2-40B4-BE49-F238E27FC236}">
-                <a16:creationId xmlns:a16="http://schemas.microsoft.com/office/drawing/2014/main" id="{8E23E605-0B6F-E891-22C6-66C6D350538C}"/>
+                <a16:creationId xmlns:a16="http://schemas.microsoft.com/office/drawing/2014/main" id="{58658082-C8E9-7467-8CC5-86901D04A6AB}"/>
               </a:ext>
             </a:extLst>
           </p:cNvPr>
@@ -270,7 +270,7 @@
           <a:bodyPr/>
           <a:lstStyle/>
           <a:p>
-            <a:fld id="{0F69FF7E-59E9-410A-AF9F-592922283F94}" type="datetimeFigureOut">
+            <a:fld id="{700A14B1-0F86-4E96-B4A8-1C51CAA5F750}" type="datetimeFigureOut">
               <a:rPr kumimoji="1" lang="ja-JP" altLang="en-US" smtClean="0"/>
               <a:t>2026/9/12</a:t>
             </a:fld>
@@ -283,7 +283,7 @@
           <p:cNvPr id="5" name="フッター プレースホルダー 4">
             <a:extLst>
               <a:ext uri="{FF2B5EF4-FFF2-40B4-BE49-F238E27FC236}">
-                <a16:creationId xmlns:a16="http://schemas.microsoft.com/office/drawing/2014/main" id="{6737C683-1603-5769-9C56-C4A0846B01CB}"/>
+                <a16:creationId xmlns:a16="http://schemas.microsoft.com/office/drawing/2014/main" id="{4E370D10-BCD4-FADA-BBCA-A4992EFA6CD1}"/>
               </a:ext>
             </a:extLst>
           </p:cNvPr>
@@ -308,7 +308,7 @@
           <p:cNvPr id="6" name="スライド番号プレースホルダー 5">
             <a:extLst>
               <a:ext uri="{FF2B5EF4-FFF2-40B4-BE49-F238E27FC236}">
-                <a16:creationId xmlns:a16="http://schemas.microsoft.com/office/drawing/2014/main" id="{4C6469E2-44DE-F5C2-9F8A-B5982BAEBCE8}"/>
+                <a16:creationId xmlns:a16="http://schemas.microsoft.com/office/drawing/2014/main" id="{41BD3B3E-4B8E-F28E-D0ED-794964C6EED7}"/>
               </a:ext>
             </a:extLst>
           </p:cNvPr>
@@ -324,7 +324,7 @@
           <a:bodyPr/>
           <a:lstStyle/>
           <a:p>
-            <a:fld id="{3B7095A3-C087-43C9-AAF3-94457615C100}" type="slidenum">
+            <a:fld id="{BEDED656-19E1-4C31-9E7D-6AD1D1FE664F}" type="slidenum">
               <a:rPr kumimoji="1" lang="ja-JP" altLang="en-US" smtClean="0"/>
               <a:t>‹#›</a:t>
             </a:fld>
@@ -335,7 +335,7 @@
     </p:spTree>
     <p:extLst>
       <p:ext uri="{BB962C8B-B14F-4D97-AF65-F5344CB8AC3E}">
-        <p14:creationId xmlns:p14="http://schemas.microsoft.com/office/powerpoint/2010/main" val="3279029324"/>
+        <p14:creationId xmlns:p14="http://schemas.microsoft.com/office/powerpoint/2010/main" val="1057325030"/>
       </p:ext>
     </p:extLst>
   </p:cSld>
@@ -367,7 +367,7 @@
           <p:cNvPr id="2" name="タイトル 1">
             <a:extLst>
               <a:ext uri="{FF2B5EF4-FFF2-40B4-BE49-F238E27FC236}">
-                <a16:creationId xmlns:a16="http://schemas.microsoft.com/office/drawing/2014/main" id="{D0E82FCC-9ABA-CA6F-8541-A24C6E664428}"/>
+                <a16:creationId xmlns:a16="http://schemas.microsoft.com/office/drawing/2014/main" id="{91A399F2-9215-44D9-7977-55960704BD98}"/>
               </a:ext>
             </a:extLst>
           </p:cNvPr>
@@ -395,7 +395,7 @@
           <p:cNvPr id="3" name="縦書きテキスト プレースホルダー 2">
             <a:extLst>
               <a:ext uri="{FF2B5EF4-FFF2-40B4-BE49-F238E27FC236}">
-                <a16:creationId xmlns:a16="http://schemas.microsoft.com/office/drawing/2014/main" id="{2CB6D786-D75C-5C7A-2BBC-E8CD9E41A681}"/>
+                <a16:creationId xmlns:a16="http://schemas.microsoft.com/office/drawing/2014/main" id="{6E8883C6-3E85-6BDD-281A-CA873675FAB5}"/>
               </a:ext>
             </a:extLst>
           </p:cNvPr>
@@ -484,7 +484,7 @@
           <p:cNvPr id="4" name="日付プレースホルダー 3">
             <a:extLst>
               <a:ext uri="{FF2B5EF4-FFF2-40B4-BE49-F238E27FC236}">
-                <a16:creationId xmlns:a16="http://schemas.microsoft.com/office/drawing/2014/main" id="{9CD93EBC-FBD8-A640-A016-005365179193}"/>
+                <a16:creationId xmlns:a16="http://schemas.microsoft.com/office/drawing/2014/main" id="{5E67386E-74DE-22E9-9C7F-1BEC3D2B1484}"/>
               </a:ext>
             </a:extLst>
           </p:cNvPr>
@@ -500,7 +500,7 @@
           <a:bodyPr/>
           <a:lstStyle/>
           <a:p>
-            <a:fld id="{0F69FF7E-59E9-410A-AF9F-592922283F94}" type="datetimeFigureOut">
+            <a:fld id="{700A14B1-0F86-4E96-B4A8-1C51CAA5F750}" type="datetimeFigureOut">
               <a:rPr kumimoji="1" lang="ja-JP" altLang="en-US" smtClean="0"/>
               <a:t>2026/9/12</a:t>
             </a:fld>
@@ -513,7 +513,7 @@
           <p:cNvPr id="5" name="フッター プレースホルダー 4">
             <a:extLst>
               <a:ext uri="{FF2B5EF4-FFF2-40B4-BE49-F238E27FC236}">
-                <a16:creationId xmlns:a16="http://schemas.microsoft.com/office/drawing/2014/main" id="{0519587E-98D5-3018-AAA6-17FA16E2A99C}"/>
+                <a16:creationId xmlns:a16="http://schemas.microsoft.com/office/drawing/2014/main" id="{D686F35F-008A-86B3-EFED-5B8D0A807E5F}"/>
               </a:ext>
             </a:extLst>
           </p:cNvPr>
@@ -538,7 +538,7 @@
           <p:cNvPr id="6" name="スライド番号プレースホルダー 5">
             <a:extLst>
               <a:ext uri="{FF2B5EF4-FFF2-40B4-BE49-F238E27FC236}">
-                <a16:creationId xmlns:a16="http://schemas.microsoft.com/office/drawing/2014/main" id="{D214F463-CA16-0D34-6780-6AA4CF35CDC2}"/>
+                <a16:creationId xmlns:a16="http://schemas.microsoft.com/office/drawing/2014/main" id="{2BF1354B-3688-80A9-92AE-A28C412CA43F}"/>
               </a:ext>
             </a:extLst>
           </p:cNvPr>
@@ -554,7 +554,7 @@
           <a:bodyPr/>
           <a:lstStyle/>
           <a:p>
-            <a:fld id="{3B7095A3-C087-43C9-AAF3-94457615C100}" type="slidenum">
+            <a:fld id="{BEDED656-19E1-4C31-9E7D-6AD1D1FE664F}" type="slidenum">
               <a:rPr kumimoji="1" lang="ja-JP" altLang="en-US" smtClean="0"/>
               <a:t>‹#›</a:t>
             </a:fld>
@@ -565,7 +565,7 @@
     </p:spTree>
     <p:extLst>
       <p:ext uri="{BB962C8B-B14F-4D97-AF65-F5344CB8AC3E}">
-        <p14:creationId xmlns:p14="http://schemas.microsoft.com/office/powerpoint/2010/main" val="3717888952"/>
+        <p14:creationId xmlns:p14="http://schemas.microsoft.com/office/powerpoint/2010/main" val="3013335938"/>
       </p:ext>
     </p:extLst>
   </p:cSld>
@@ -597,7 +597,7 @@
           <p:cNvPr id="2" name="縦書きタイトル 1">
             <a:extLst>
               <a:ext uri="{FF2B5EF4-FFF2-40B4-BE49-F238E27FC236}">
-                <a16:creationId xmlns:a16="http://schemas.microsoft.com/office/drawing/2014/main" id="{CD5D77DA-F216-E4C5-8336-A95286C2E909}"/>
+                <a16:creationId xmlns:a16="http://schemas.microsoft.com/office/drawing/2014/main" id="{91396346-E80B-5D64-D50D-ADFBCED2A97C}"/>
               </a:ext>
             </a:extLst>
           </p:cNvPr>
@@ -630,7 +630,7 @@
           <p:cNvPr id="3" name="縦書きテキスト プレースホルダー 2">
             <a:extLst>
               <a:ext uri="{FF2B5EF4-FFF2-40B4-BE49-F238E27FC236}">
-                <a16:creationId xmlns:a16="http://schemas.microsoft.com/office/drawing/2014/main" id="{E0516E5F-BF7C-4216-B92E-8A370168EEA7}"/>
+                <a16:creationId xmlns:a16="http://schemas.microsoft.com/office/drawing/2014/main" id="{90CA60B4-CDAE-EF44-2A02-420B50CDE28F}"/>
               </a:ext>
             </a:extLst>
           </p:cNvPr>
@@ -724,7 +724,7 @@
           <p:cNvPr id="4" name="日付プレースホルダー 3">
             <a:extLst>
               <a:ext uri="{FF2B5EF4-FFF2-40B4-BE49-F238E27FC236}">
-                <a16:creationId xmlns:a16="http://schemas.microsoft.com/office/drawing/2014/main" id="{319A4288-A3D3-1F8C-DDB1-895762EA27E5}"/>
+                <a16:creationId xmlns:a16="http://schemas.microsoft.com/office/drawing/2014/main" id="{0DA7D265-B5A1-17F5-DF1D-394910B0F192}"/>
               </a:ext>
             </a:extLst>
           </p:cNvPr>
@@ -740,7 +740,7 @@
           <a:bodyPr/>
           <a:lstStyle/>
           <a:p>
-            <a:fld id="{0F69FF7E-59E9-410A-AF9F-592922283F94}" type="datetimeFigureOut">
+            <a:fld id="{700A14B1-0F86-4E96-B4A8-1C51CAA5F750}" type="datetimeFigureOut">
               <a:rPr kumimoji="1" lang="ja-JP" altLang="en-US" smtClean="0"/>
               <a:t>2026/9/12</a:t>
             </a:fld>
@@ -753,7 +753,7 @@
           <p:cNvPr id="5" name="フッター プレースホルダー 4">
             <a:extLst>
               <a:ext uri="{FF2B5EF4-FFF2-40B4-BE49-F238E27FC236}">
-                <a16:creationId xmlns:a16="http://schemas.microsoft.com/office/drawing/2014/main" id="{1AA40F0C-D83E-88B6-6348-7EF2ECB586E7}"/>
+                <a16:creationId xmlns:a16="http://schemas.microsoft.com/office/drawing/2014/main" id="{86309E38-F745-4163-A54D-1C32A85E5F87}"/>
               </a:ext>
             </a:extLst>
           </p:cNvPr>
@@ -778,7 +778,7 @@
           <p:cNvPr id="6" name="スライド番号プレースホルダー 5">
             <a:extLst>
               <a:ext uri="{FF2B5EF4-FFF2-40B4-BE49-F238E27FC236}">
-                <a16:creationId xmlns:a16="http://schemas.microsoft.com/office/drawing/2014/main" id="{20A5BC16-854B-2366-7956-F5C114D24E0C}"/>
+                <a16:creationId xmlns:a16="http://schemas.microsoft.com/office/drawing/2014/main" id="{F5A85F3B-EC7F-CCEC-0A00-0BBFAAC60A89}"/>
               </a:ext>
             </a:extLst>
           </p:cNvPr>
@@ -794,7 +794,7 @@
           <a:bodyPr/>
           <a:lstStyle/>
           <a:p>
-            <a:fld id="{3B7095A3-C087-43C9-AAF3-94457615C100}" type="slidenum">
+            <a:fld id="{BEDED656-19E1-4C31-9E7D-6AD1D1FE664F}" type="slidenum">
               <a:rPr kumimoji="1" lang="ja-JP" altLang="en-US" smtClean="0"/>
               <a:t>‹#›</a:t>
             </a:fld>
@@ -805,7 +805,7 @@
     </p:spTree>
     <p:extLst>
       <p:ext uri="{BB962C8B-B14F-4D97-AF65-F5344CB8AC3E}">
-        <p14:creationId xmlns:p14="http://schemas.microsoft.com/office/powerpoint/2010/main" val="1732323245"/>
+        <p14:creationId xmlns:p14="http://schemas.microsoft.com/office/powerpoint/2010/main" val="305526404"/>
       </p:ext>
     </p:extLst>
   </p:cSld>
@@ -837,7 +837,7 @@
           <p:cNvPr id="2" name="タイトル 1">
             <a:extLst>
               <a:ext uri="{FF2B5EF4-FFF2-40B4-BE49-F238E27FC236}">
-                <a16:creationId xmlns:a16="http://schemas.microsoft.com/office/drawing/2014/main" id="{CC06378A-5AEE-92A2-CFF0-2FB54BF5093A}"/>
+                <a16:creationId xmlns:a16="http://schemas.microsoft.com/office/drawing/2014/main" id="{164D6FD4-7765-5CB1-10FB-DA1393CED5C5}"/>
               </a:ext>
             </a:extLst>
           </p:cNvPr>
@@ -865,7 +865,7 @@
           <p:cNvPr id="3" name="コンテンツ プレースホルダー 2">
             <a:extLst>
               <a:ext uri="{FF2B5EF4-FFF2-40B4-BE49-F238E27FC236}">
-                <a16:creationId xmlns:a16="http://schemas.microsoft.com/office/drawing/2014/main" id="{A936C38B-A856-E244-DF98-688CA0491F00}"/>
+                <a16:creationId xmlns:a16="http://schemas.microsoft.com/office/drawing/2014/main" id="{BC5312D7-F1EB-5CAD-E699-7764E4AC39F0}"/>
               </a:ext>
             </a:extLst>
           </p:cNvPr>
@@ -954,7 +954,7 @@
           <p:cNvPr id="4" name="日付プレースホルダー 3">
             <a:extLst>
               <a:ext uri="{FF2B5EF4-FFF2-40B4-BE49-F238E27FC236}">
-                <a16:creationId xmlns:a16="http://schemas.microsoft.com/office/drawing/2014/main" id="{09C2EC19-BC41-8936-1C3A-37C40D2461A9}"/>
+                <a16:creationId xmlns:a16="http://schemas.microsoft.com/office/drawing/2014/main" id="{D7968F88-D439-38DC-A618-76802D2CBE06}"/>
               </a:ext>
             </a:extLst>
           </p:cNvPr>
@@ -970,7 +970,7 @@
           <a:bodyPr/>
           <a:lstStyle/>
           <a:p>
-            <a:fld id="{0F69FF7E-59E9-410A-AF9F-592922283F94}" type="datetimeFigureOut">
+            <a:fld id="{700A14B1-0F86-4E96-B4A8-1C51CAA5F750}" type="datetimeFigureOut">
               <a:rPr kumimoji="1" lang="ja-JP" altLang="en-US" smtClean="0"/>
               <a:t>2026/9/12</a:t>
             </a:fld>
@@ -983,7 +983,7 @@
           <p:cNvPr id="5" name="フッター プレースホルダー 4">
             <a:extLst>
               <a:ext uri="{FF2B5EF4-FFF2-40B4-BE49-F238E27FC236}">
-                <a16:creationId xmlns:a16="http://schemas.microsoft.com/office/drawing/2014/main" id="{26E2D8D1-D70D-71C6-FBB8-BCA4FE085D91}"/>
+                <a16:creationId xmlns:a16="http://schemas.microsoft.com/office/drawing/2014/main" id="{9C6EFBC5-5631-7014-981C-A31B108282C5}"/>
               </a:ext>
             </a:extLst>
           </p:cNvPr>
@@ -1008,7 +1008,7 @@
           <p:cNvPr id="6" name="スライド番号プレースホルダー 5">
             <a:extLst>
               <a:ext uri="{FF2B5EF4-FFF2-40B4-BE49-F238E27FC236}">
-                <a16:creationId xmlns:a16="http://schemas.microsoft.com/office/drawing/2014/main" id="{2598C8AE-480A-3D28-98B3-4F36BC47541B}"/>
+                <a16:creationId xmlns:a16="http://schemas.microsoft.com/office/drawing/2014/main" id="{9064E7A6-4EDE-0860-C0BB-4777CE5E772A}"/>
               </a:ext>
             </a:extLst>
           </p:cNvPr>
@@ -1024,7 +1024,7 @@
           <a:bodyPr/>
           <a:lstStyle/>
           <a:p>
-            <a:fld id="{3B7095A3-C087-43C9-AAF3-94457615C100}" type="slidenum">
+            <a:fld id="{BEDED656-19E1-4C31-9E7D-6AD1D1FE664F}" type="slidenum">
               <a:rPr kumimoji="1" lang="ja-JP" altLang="en-US" smtClean="0"/>
               <a:t>‹#›</a:t>
             </a:fld>
@@ -1035,7 +1035,7 @@
     </p:spTree>
     <p:extLst>
       <p:ext uri="{BB962C8B-B14F-4D97-AF65-F5344CB8AC3E}">
-        <p14:creationId xmlns:p14="http://schemas.microsoft.com/office/powerpoint/2010/main" val="2746548876"/>
+        <p14:creationId xmlns:p14="http://schemas.microsoft.com/office/powerpoint/2010/main" val="3497019846"/>
       </p:ext>
     </p:extLst>
   </p:cSld>
@@ -1067,7 +1067,7 @@
           <p:cNvPr id="2" name="タイトル 1">
             <a:extLst>
               <a:ext uri="{FF2B5EF4-FFF2-40B4-BE49-F238E27FC236}">
-                <a16:creationId xmlns:a16="http://schemas.microsoft.com/office/drawing/2014/main" id="{B2080A83-C53F-20B9-9AC4-F945CE7DD703}"/>
+                <a16:creationId xmlns:a16="http://schemas.microsoft.com/office/drawing/2014/main" id="{9D23490C-6BF2-2101-A007-107699CFB23E}"/>
               </a:ext>
             </a:extLst>
           </p:cNvPr>
@@ -1104,7 +1104,7 @@
           <p:cNvPr id="3" name="テキスト プレースホルダー 2">
             <a:extLst>
               <a:ext uri="{FF2B5EF4-FFF2-40B4-BE49-F238E27FC236}">
-                <a16:creationId xmlns:a16="http://schemas.microsoft.com/office/drawing/2014/main" id="{BDAAAABC-A187-D640-97FC-A8C9B9FBC6E8}"/>
+                <a16:creationId xmlns:a16="http://schemas.microsoft.com/office/drawing/2014/main" id="{2FCE285C-49E9-97C2-C276-AD68B111350F}"/>
               </a:ext>
             </a:extLst>
           </p:cNvPr>
@@ -1229,7 +1229,7 @@
           <p:cNvPr id="4" name="日付プレースホルダー 3">
             <a:extLst>
               <a:ext uri="{FF2B5EF4-FFF2-40B4-BE49-F238E27FC236}">
-                <a16:creationId xmlns:a16="http://schemas.microsoft.com/office/drawing/2014/main" id="{E8E0CC4F-0FC2-EF6C-795B-3DECD1F22CDA}"/>
+                <a16:creationId xmlns:a16="http://schemas.microsoft.com/office/drawing/2014/main" id="{1E148F63-A193-2C6A-CD24-F5A45824F9C6}"/>
               </a:ext>
             </a:extLst>
           </p:cNvPr>
@@ -1245,7 +1245,7 @@
           <a:bodyPr/>
           <a:lstStyle/>
           <a:p>
-            <a:fld id="{0F69FF7E-59E9-410A-AF9F-592922283F94}" type="datetimeFigureOut">
+            <a:fld id="{700A14B1-0F86-4E96-B4A8-1C51CAA5F750}" type="datetimeFigureOut">
               <a:rPr kumimoji="1" lang="ja-JP" altLang="en-US" smtClean="0"/>
               <a:t>2026/9/12</a:t>
             </a:fld>
@@ -1258,7 +1258,7 @@
           <p:cNvPr id="5" name="フッター プレースホルダー 4">
             <a:extLst>
               <a:ext uri="{FF2B5EF4-FFF2-40B4-BE49-F238E27FC236}">
-                <a16:creationId xmlns:a16="http://schemas.microsoft.com/office/drawing/2014/main" id="{675067DE-B546-8DBA-A59E-4917B1512B5E}"/>
+                <a16:creationId xmlns:a16="http://schemas.microsoft.com/office/drawing/2014/main" id="{CD87955A-D658-7181-F697-3A2143D9410C}"/>
               </a:ext>
             </a:extLst>
           </p:cNvPr>
@@ -1283,7 +1283,7 @@
           <p:cNvPr id="6" name="スライド番号プレースホルダー 5">
             <a:extLst>
               <a:ext uri="{FF2B5EF4-FFF2-40B4-BE49-F238E27FC236}">
-                <a16:creationId xmlns:a16="http://schemas.microsoft.com/office/drawing/2014/main" id="{A55FEA0A-D29F-0FAB-4851-12F4D242D6AE}"/>
+                <a16:creationId xmlns:a16="http://schemas.microsoft.com/office/drawing/2014/main" id="{E0FA9118-76EC-5FC3-75A8-2D1341A48B3F}"/>
               </a:ext>
             </a:extLst>
           </p:cNvPr>
@@ -1299,7 +1299,7 @@
           <a:bodyPr/>
           <a:lstStyle/>
           <a:p>
-            <a:fld id="{3B7095A3-C087-43C9-AAF3-94457615C100}" type="slidenum">
+            <a:fld id="{BEDED656-19E1-4C31-9E7D-6AD1D1FE664F}" type="slidenum">
               <a:rPr kumimoji="1" lang="ja-JP" altLang="en-US" smtClean="0"/>
               <a:t>‹#›</a:t>
             </a:fld>
@@ -1310,7 +1310,7 @@
     </p:spTree>
     <p:extLst>
       <p:ext uri="{BB962C8B-B14F-4D97-AF65-F5344CB8AC3E}">
-        <p14:creationId xmlns:p14="http://schemas.microsoft.com/office/powerpoint/2010/main" val="2757004904"/>
+        <p14:creationId xmlns:p14="http://schemas.microsoft.com/office/powerpoint/2010/main" val="101781043"/>
       </p:ext>
     </p:extLst>
   </p:cSld>
@@ -1342,7 +1342,7 @@
           <p:cNvPr id="2" name="タイトル 1">
             <a:extLst>
               <a:ext uri="{FF2B5EF4-FFF2-40B4-BE49-F238E27FC236}">
-                <a16:creationId xmlns:a16="http://schemas.microsoft.com/office/drawing/2014/main" id="{E620E969-AAA2-61DA-FF57-2A07F3C641FB}"/>
+                <a16:creationId xmlns:a16="http://schemas.microsoft.com/office/drawing/2014/main" id="{7A00BD76-E59A-3F00-35A4-C652A8507572}"/>
               </a:ext>
             </a:extLst>
           </p:cNvPr>
@@ -1370,7 +1370,7 @@
           <p:cNvPr id="3" name="コンテンツ プレースホルダー 2">
             <a:extLst>
               <a:ext uri="{FF2B5EF4-FFF2-40B4-BE49-F238E27FC236}">
-                <a16:creationId xmlns:a16="http://schemas.microsoft.com/office/drawing/2014/main" id="{888826C7-9EED-26B3-BED3-56CD6CB84889}"/>
+                <a16:creationId xmlns:a16="http://schemas.microsoft.com/office/drawing/2014/main" id="{8DFEC804-8F4A-FBE6-0FB0-A6F1C1AE81BC}"/>
               </a:ext>
             </a:extLst>
           </p:cNvPr>
@@ -1464,7 +1464,7 @@
           <p:cNvPr id="4" name="コンテンツ プレースホルダー 3">
             <a:extLst>
               <a:ext uri="{FF2B5EF4-FFF2-40B4-BE49-F238E27FC236}">
-                <a16:creationId xmlns:a16="http://schemas.microsoft.com/office/drawing/2014/main" id="{771E9600-B76D-0C7F-DD76-639FD69BDCC7}"/>
+                <a16:creationId xmlns:a16="http://schemas.microsoft.com/office/drawing/2014/main" id="{4E4AF811-CF3B-A853-9266-1EDE1DFC06C2}"/>
               </a:ext>
             </a:extLst>
           </p:cNvPr>
@@ -1558,7 +1558,7 @@
           <p:cNvPr id="5" name="日付プレースホルダー 4">
             <a:extLst>
               <a:ext uri="{FF2B5EF4-FFF2-40B4-BE49-F238E27FC236}">
-                <a16:creationId xmlns:a16="http://schemas.microsoft.com/office/drawing/2014/main" id="{2CE0AAAF-2B9C-74BD-CBAF-FA154A74C7FB}"/>
+                <a16:creationId xmlns:a16="http://schemas.microsoft.com/office/drawing/2014/main" id="{74D29E37-B7F0-61E3-37F7-490304B7C311}"/>
               </a:ext>
             </a:extLst>
           </p:cNvPr>
@@ -1574,7 +1574,7 @@
           <a:bodyPr/>
           <a:lstStyle/>
           <a:p>
-            <a:fld id="{0F69FF7E-59E9-410A-AF9F-592922283F94}" type="datetimeFigureOut">
+            <a:fld id="{700A14B1-0F86-4E96-B4A8-1C51CAA5F750}" type="datetimeFigureOut">
               <a:rPr kumimoji="1" lang="ja-JP" altLang="en-US" smtClean="0"/>
               <a:t>2026/9/12</a:t>
             </a:fld>
@@ -1587,7 +1587,7 @@
           <p:cNvPr id="6" name="フッター プレースホルダー 5">
             <a:extLst>
               <a:ext uri="{FF2B5EF4-FFF2-40B4-BE49-F238E27FC236}">
-                <a16:creationId xmlns:a16="http://schemas.microsoft.com/office/drawing/2014/main" id="{76880A52-4C47-65C0-FF96-AB4DD6ECBB01}"/>
+                <a16:creationId xmlns:a16="http://schemas.microsoft.com/office/drawing/2014/main" id="{37D36540-A92A-678A-CA6F-CA7297F82814}"/>
               </a:ext>
             </a:extLst>
           </p:cNvPr>
@@ -1612,7 +1612,7 @@
           <p:cNvPr id="7" name="スライド番号プレースホルダー 6">
             <a:extLst>
               <a:ext uri="{FF2B5EF4-FFF2-40B4-BE49-F238E27FC236}">
-                <a16:creationId xmlns:a16="http://schemas.microsoft.com/office/drawing/2014/main" id="{2A05B71D-D187-023B-55D5-38C8CF3732D6}"/>
+                <a16:creationId xmlns:a16="http://schemas.microsoft.com/office/drawing/2014/main" id="{BC556E1E-9AFD-0001-A660-498275341008}"/>
               </a:ext>
             </a:extLst>
           </p:cNvPr>
@@ -1628,7 +1628,7 @@
           <a:bodyPr/>
           <a:lstStyle/>
           <a:p>
-            <a:fld id="{3B7095A3-C087-43C9-AAF3-94457615C100}" type="slidenum">
+            <a:fld id="{BEDED656-19E1-4C31-9E7D-6AD1D1FE664F}" type="slidenum">
               <a:rPr kumimoji="1" lang="ja-JP" altLang="en-US" smtClean="0"/>
               <a:t>‹#›</a:t>
             </a:fld>
@@ -1639,7 +1639,7 @@
     </p:spTree>
     <p:extLst>
       <p:ext uri="{BB962C8B-B14F-4D97-AF65-F5344CB8AC3E}">
-        <p14:creationId xmlns:p14="http://schemas.microsoft.com/office/powerpoint/2010/main" val="3607672508"/>
+        <p14:creationId xmlns:p14="http://schemas.microsoft.com/office/powerpoint/2010/main" val="4091440821"/>
       </p:ext>
     </p:extLst>
   </p:cSld>
@@ -1671,7 +1671,7 @@
           <p:cNvPr id="2" name="タイトル 1">
             <a:extLst>
               <a:ext uri="{FF2B5EF4-FFF2-40B4-BE49-F238E27FC236}">
-                <a16:creationId xmlns:a16="http://schemas.microsoft.com/office/drawing/2014/main" id="{4D583434-92CE-F90B-A75E-006D26DD4345}"/>
+                <a16:creationId xmlns:a16="http://schemas.microsoft.com/office/drawing/2014/main" id="{C5E6B3F4-9254-C4E2-45E5-75CE979F77FE}"/>
               </a:ext>
             </a:extLst>
           </p:cNvPr>
@@ -1704,7 +1704,7 @@
           <p:cNvPr id="3" name="テキスト プレースホルダー 2">
             <a:extLst>
               <a:ext uri="{FF2B5EF4-FFF2-40B4-BE49-F238E27FC236}">
-                <a16:creationId xmlns:a16="http://schemas.microsoft.com/office/drawing/2014/main" id="{D4C52EC2-81AF-FBF4-EFCF-89829A5B23A8}"/>
+                <a16:creationId xmlns:a16="http://schemas.microsoft.com/office/drawing/2014/main" id="{D4429A07-880B-6E47-33D9-2C40034CF5B3}"/>
               </a:ext>
             </a:extLst>
           </p:cNvPr>
@@ -1775,7 +1775,7 @@
           <p:cNvPr id="4" name="コンテンツ プレースホルダー 3">
             <a:extLst>
               <a:ext uri="{FF2B5EF4-FFF2-40B4-BE49-F238E27FC236}">
-                <a16:creationId xmlns:a16="http://schemas.microsoft.com/office/drawing/2014/main" id="{9E1E30EE-FD34-3881-0899-A8579D6829FD}"/>
+                <a16:creationId xmlns:a16="http://schemas.microsoft.com/office/drawing/2014/main" id="{1B3ADA97-B863-022B-D54A-7FD690E95CEE}"/>
               </a:ext>
             </a:extLst>
           </p:cNvPr>
@@ -1869,7 +1869,7 @@
           <p:cNvPr id="5" name="テキスト プレースホルダー 4">
             <a:extLst>
               <a:ext uri="{FF2B5EF4-FFF2-40B4-BE49-F238E27FC236}">
-                <a16:creationId xmlns:a16="http://schemas.microsoft.com/office/drawing/2014/main" id="{2837DE73-C7E4-E6E3-FB35-FFF41DBEBAAB}"/>
+                <a16:creationId xmlns:a16="http://schemas.microsoft.com/office/drawing/2014/main" id="{A5B4384C-5FA9-9F19-457E-F4A5212DAF81}"/>
               </a:ext>
             </a:extLst>
           </p:cNvPr>
@@ -1940,7 +1940,7 @@
           <p:cNvPr id="6" name="コンテンツ プレースホルダー 5">
             <a:extLst>
               <a:ext uri="{FF2B5EF4-FFF2-40B4-BE49-F238E27FC236}">
-                <a16:creationId xmlns:a16="http://schemas.microsoft.com/office/drawing/2014/main" id="{ED92E732-6437-8CB5-5AC8-239AAB6BBA87}"/>
+                <a16:creationId xmlns:a16="http://schemas.microsoft.com/office/drawing/2014/main" id="{4C13F871-8B2F-DA82-4101-0E7A4384FC24}"/>
               </a:ext>
             </a:extLst>
           </p:cNvPr>
@@ -2034,7 +2034,7 @@
           <p:cNvPr id="7" name="日付プレースホルダー 6">
             <a:extLst>
               <a:ext uri="{FF2B5EF4-FFF2-40B4-BE49-F238E27FC236}">
-                <a16:creationId xmlns:a16="http://schemas.microsoft.com/office/drawing/2014/main" id="{215AAD47-807C-9DB2-3604-87542E43A198}"/>
+                <a16:creationId xmlns:a16="http://schemas.microsoft.com/office/drawing/2014/main" id="{D67BE993-7219-103B-2800-2A5D81BD6167}"/>
               </a:ext>
             </a:extLst>
           </p:cNvPr>
@@ -2050,7 +2050,7 @@
           <a:bodyPr/>
           <a:lstStyle/>
           <a:p>
-            <a:fld id="{0F69FF7E-59E9-410A-AF9F-592922283F94}" type="datetimeFigureOut">
+            <a:fld id="{700A14B1-0F86-4E96-B4A8-1C51CAA5F750}" type="datetimeFigureOut">
               <a:rPr kumimoji="1" lang="ja-JP" altLang="en-US" smtClean="0"/>
               <a:t>2026/9/12</a:t>
             </a:fld>
@@ -2063,7 +2063,7 @@
           <p:cNvPr id="8" name="フッター プレースホルダー 7">
             <a:extLst>
               <a:ext uri="{FF2B5EF4-FFF2-40B4-BE49-F238E27FC236}">
-                <a16:creationId xmlns:a16="http://schemas.microsoft.com/office/drawing/2014/main" id="{07E0B372-C738-F27D-773A-706D31BCF26B}"/>
+                <a16:creationId xmlns:a16="http://schemas.microsoft.com/office/drawing/2014/main" id="{A2825909-BDC4-98DC-52DF-F0697BCE744B}"/>
               </a:ext>
             </a:extLst>
           </p:cNvPr>
@@ -2088,7 +2088,7 @@
           <p:cNvPr id="9" name="スライド番号プレースホルダー 8">
             <a:extLst>
               <a:ext uri="{FF2B5EF4-FFF2-40B4-BE49-F238E27FC236}">
-                <a16:creationId xmlns:a16="http://schemas.microsoft.com/office/drawing/2014/main" id="{D03AF765-FFDA-CE6F-56AE-CD7356FE1D1A}"/>
+                <a16:creationId xmlns:a16="http://schemas.microsoft.com/office/drawing/2014/main" id="{446D9342-E03D-984A-E0EF-5CE60128504B}"/>
               </a:ext>
             </a:extLst>
           </p:cNvPr>
@@ -2104,7 +2104,7 @@
           <a:bodyPr/>
           <a:lstStyle/>
           <a:p>
-            <a:fld id="{3B7095A3-C087-43C9-AAF3-94457615C100}" type="slidenum">
+            <a:fld id="{BEDED656-19E1-4C31-9E7D-6AD1D1FE664F}" type="slidenum">
               <a:rPr kumimoji="1" lang="ja-JP" altLang="en-US" smtClean="0"/>
               <a:t>‹#›</a:t>
             </a:fld>
@@ -2115,7 +2115,7 @@
     </p:spTree>
     <p:extLst>
       <p:ext uri="{BB962C8B-B14F-4D97-AF65-F5344CB8AC3E}">
-        <p14:creationId xmlns:p14="http://schemas.microsoft.com/office/powerpoint/2010/main" val="1314902375"/>
+        <p14:creationId xmlns:p14="http://schemas.microsoft.com/office/powerpoint/2010/main" val="2251995704"/>
       </p:ext>
     </p:extLst>
   </p:cSld>
@@ -2147,7 +2147,7 @@
           <p:cNvPr id="2" name="タイトル 1">
             <a:extLst>
               <a:ext uri="{FF2B5EF4-FFF2-40B4-BE49-F238E27FC236}">
-                <a16:creationId xmlns:a16="http://schemas.microsoft.com/office/drawing/2014/main" id="{F141E395-6B7C-6165-C9B7-A265F5FA97D4}"/>
+                <a16:creationId xmlns:a16="http://schemas.microsoft.com/office/drawing/2014/main" id="{4AD2DE5D-EACF-950D-5DBE-BD45C6018B50}"/>
               </a:ext>
             </a:extLst>
           </p:cNvPr>
@@ -2175,7 +2175,7 @@
           <p:cNvPr id="3" name="日付プレースホルダー 2">
             <a:extLst>
               <a:ext uri="{FF2B5EF4-FFF2-40B4-BE49-F238E27FC236}">
-                <a16:creationId xmlns:a16="http://schemas.microsoft.com/office/drawing/2014/main" id="{AD6B585A-9C1F-6E7E-9C08-C0859AF58A03}"/>
+                <a16:creationId xmlns:a16="http://schemas.microsoft.com/office/drawing/2014/main" id="{7B50618F-3AE7-7176-2925-4BCD63DF83E0}"/>
               </a:ext>
             </a:extLst>
           </p:cNvPr>
@@ -2191,7 +2191,7 @@
           <a:bodyPr/>
           <a:lstStyle/>
           <a:p>
-            <a:fld id="{0F69FF7E-59E9-410A-AF9F-592922283F94}" type="datetimeFigureOut">
+            <a:fld id="{700A14B1-0F86-4E96-B4A8-1C51CAA5F750}" type="datetimeFigureOut">
               <a:rPr kumimoji="1" lang="ja-JP" altLang="en-US" smtClean="0"/>
               <a:t>2026/9/12</a:t>
             </a:fld>
@@ -2204,7 +2204,7 @@
           <p:cNvPr id="4" name="フッター プレースホルダー 3">
             <a:extLst>
               <a:ext uri="{FF2B5EF4-FFF2-40B4-BE49-F238E27FC236}">
-                <a16:creationId xmlns:a16="http://schemas.microsoft.com/office/drawing/2014/main" id="{1F91A707-26DE-7211-A230-0EA57AD31D3F}"/>
+                <a16:creationId xmlns:a16="http://schemas.microsoft.com/office/drawing/2014/main" id="{45CCC65D-74C5-43D9-3F94-EA20DB03767E}"/>
               </a:ext>
             </a:extLst>
           </p:cNvPr>
@@ -2229,7 +2229,7 @@
           <p:cNvPr id="5" name="スライド番号プレースホルダー 4">
             <a:extLst>
               <a:ext uri="{FF2B5EF4-FFF2-40B4-BE49-F238E27FC236}">
-                <a16:creationId xmlns:a16="http://schemas.microsoft.com/office/drawing/2014/main" id="{F185DF65-8C50-5070-FD7F-0DCBB4FFD1DA}"/>
+                <a16:creationId xmlns:a16="http://schemas.microsoft.com/office/drawing/2014/main" id="{8296E855-BD78-3B67-59FE-3BA73E86A8D9}"/>
               </a:ext>
             </a:extLst>
           </p:cNvPr>
@@ -2245,7 +2245,7 @@
           <a:bodyPr/>
           <a:lstStyle/>
           <a:p>
-            <a:fld id="{3B7095A3-C087-43C9-AAF3-94457615C100}" type="slidenum">
+            <a:fld id="{BEDED656-19E1-4C31-9E7D-6AD1D1FE664F}" type="slidenum">
               <a:rPr kumimoji="1" lang="ja-JP" altLang="en-US" smtClean="0"/>
               <a:t>‹#›</a:t>
             </a:fld>
@@ -2256,7 +2256,7 @@
     </p:spTree>
     <p:extLst>
       <p:ext uri="{BB962C8B-B14F-4D97-AF65-F5344CB8AC3E}">
-        <p14:creationId xmlns:p14="http://schemas.microsoft.com/office/powerpoint/2010/main" val="1855830095"/>
+        <p14:creationId xmlns:p14="http://schemas.microsoft.com/office/powerpoint/2010/main" val="1897840892"/>
       </p:ext>
     </p:extLst>
   </p:cSld>
@@ -2288,7 +2288,7 @@
           <p:cNvPr id="2" name="日付プレースホルダー 1">
             <a:extLst>
               <a:ext uri="{FF2B5EF4-FFF2-40B4-BE49-F238E27FC236}">
-                <a16:creationId xmlns:a16="http://schemas.microsoft.com/office/drawing/2014/main" id="{075F3C4B-1DE4-7A70-098F-37B76F63E412}"/>
+                <a16:creationId xmlns:a16="http://schemas.microsoft.com/office/drawing/2014/main" id="{F6492CAF-2CC4-D588-EC3F-0A1E1A877DF0}"/>
               </a:ext>
             </a:extLst>
           </p:cNvPr>
@@ -2304,7 +2304,7 @@
           <a:bodyPr/>
           <a:lstStyle/>
           <a:p>
-            <a:fld id="{0F69FF7E-59E9-410A-AF9F-592922283F94}" type="datetimeFigureOut">
+            <a:fld id="{700A14B1-0F86-4E96-B4A8-1C51CAA5F750}" type="datetimeFigureOut">
               <a:rPr kumimoji="1" lang="ja-JP" altLang="en-US" smtClean="0"/>
               <a:t>2026/9/12</a:t>
             </a:fld>
@@ -2317,7 +2317,7 @@
           <p:cNvPr id="3" name="フッター プレースホルダー 2">
             <a:extLst>
               <a:ext uri="{FF2B5EF4-FFF2-40B4-BE49-F238E27FC236}">
-                <a16:creationId xmlns:a16="http://schemas.microsoft.com/office/drawing/2014/main" id="{3DD3500A-5AB8-8275-3120-02673DAB7E8C}"/>
+                <a16:creationId xmlns:a16="http://schemas.microsoft.com/office/drawing/2014/main" id="{E96737D8-4456-39BE-5A6C-7BAC9690266B}"/>
               </a:ext>
             </a:extLst>
           </p:cNvPr>
@@ -2342,7 +2342,7 @@
           <p:cNvPr id="4" name="スライド番号プレースホルダー 3">
             <a:extLst>
               <a:ext uri="{FF2B5EF4-FFF2-40B4-BE49-F238E27FC236}">
-                <a16:creationId xmlns:a16="http://schemas.microsoft.com/office/drawing/2014/main" id="{BB2CB4BA-2229-3898-9FFE-99D216A22154}"/>
+                <a16:creationId xmlns:a16="http://schemas.microsoft.com/office/drawing/2014/main" id="{1610FD63-E657-9C94-3DEA-EDE1AC01BEE1}"/>
               </a:ext>
             </a:extLst>
           </p:cNvPr>
@@ -2358,7 +2358,7 @@
           <a:bodyPr/>
           <a:lstStyle/>
           <a:p>
-            <a:fld id="{3B7095A3-C087-43C9-AAF3-94457615C100}" type="slidenum">
+            <a:fld id="{BEDED656-19E1-4C31-9E7D-6AD1D1FE664F}" type="slidenum">
               <a:rPr kumimoji="1" lang="ja-JP" altLang="en-US" smtClean="0"/>
               <a:t>‹#›</a:t>
             </a:fld>
@@ -2369,7 +2369,7 @@
     </p:spTree>
     <p:extLst>
       <p:ext uri="{BB962C8B-B14F-4D97-AF65-F5344CB8AC3E}">
-        <p14:creationId xmlns:p14="http://schemas.microsoft.com/office/powerpoint/2010/main" val="3907162894"/>
+        <p14:creationId xmlns:p14="http://schemas.microsoft.com/office/powerpoint/2010/main" val="2310921712"/>
       </p:ext>
     </p:extLst>
   </p:cSld>
@@ -2401,7 +2401,7 @@
           <p:cNvPr id="2" name="タイトル 1">
             <a:extLst>
               <a:ext uri="{FF2B5EF4-FFF2-40B4-BE49-F238E27FC236}">
-                <a16:creationId xmlns:a16="http://schemas.microsoft.com/office/drawing/2014/main" id="{40F3EAAF-BBA8-CDEC-E061-BEABA6132C63}"/>
+                <a16:creationId xmlns:a16="http://schemas.microsoft.com/office/drawing/2014/main" id="{81E24F7A-D38E-4BAA-9A1E-344CA4A6C9E2}"/>
               </a:ext>
             </a:extLst>
           </p:cNvPr>
@@ -2438,7 +2438,7 @@
           <p:cNvPr id="3" name="コンテンツ プレースホルダー 2">
             <a:extLst>
               <a:ext uri="{FF2B5EF4-FFF2-40B4-BE49-F238E27FC236}">
-                <a16:creationId xmlns:a16="http://schemas.microsoft.com/office/drawing/2014/main" id="{A7EDC549-1679-7C06-8EFD-0AC401A922D8}"/>
+                <a16:creationId xmlns:a16="http://schemas.microsoft.com/office/drawing/2014/main" id="{D4D7F527-EF02-4030-A34C-CE3178528490}"/>
               </a:ext>
             </a:extLst>
           </p:cNvPr>
@@ -2560,7 +2560,7 @@
           <p:cNvPr id="4" name="テキスト プレースホルダー 3">
             <a:extLst>
               <a:ext uri="{FF2B5EF4-FFF2-40B4-BE49-F238E27FC236}">
-                <a16:creationId xmlns:a16="http://schemas.microsoft.com/office/drawing/2014/main" id="{FA64D8D1-7DFA-D759-0EB0-D2902AA48216}"/>
+                <a16:creationId xmlns:a16="http://schemas.microsoft.com/office/drawing/2014/main" id="{B6DA2173-2D9F-9F93-646B-4B7A1A3D9DF0}"/>
               </a:ext>
             </a:extLst>
           </p:cNvPr>
@@ -2631,7 +2631,7 @@
           <p:cNvPr id="5" name="日付プレースホルダー 4">
             <a:extLst>
               <a:ext uri="{FF2B5EF4-FFF2-40B4-BE49-F238E27FC236}">
-                <a16:creationId xmlns:a16="http://schemas.microsoft.com/office/drawing/2014/main" id="{9C9CB886-F503-DB31-57CC-378F0496A8D0}"/>
+                <a16:creationId xmlns:a16="http://schemas.microsoft.com/office/drawing/2014/main" id="{C753E58C-CC2B-5C9C-8B8B-70E363F98015}"/>
               </a:ext>
             </a:extLst>
           </p:cNvPr>
@@ -2647,7 +2647,7 @@
           <a:bodyPr/>
           <a:lstStyle/>
           <a:p>
-            <a:fld id="{0F69FF7E-59E9-410A-AF9F-592922283F94}" type="datetimeFigureOut">
+            <a:fld id="{700A14B1-0F86-4E96-B4A8-1C51CAA5F750}" type="datetimeFigureOut">
               <a:rPr kumimoji="1" lang="ja-JP" altLang="en-US" smtClean="0"/>
               <a:t>2026/9/12</a:t>
             </a:fld>
@@ -2660,7 +2660,7 @@
           <p:cNvPr id="6" name="フッター プレースホルダー 5">
             <a:extLst>
               <a:ext uri="{FF2B5EF4-FFF2-40B4-BE49-F238E27FC236}">
-                <a16:creationId xmlns:a16="http://schemas.microsoft.com/office/drawing/2014/main" id="{62E7B659-6593-EA24-B1C1-1C5BC27303EB}"/>
+                <a16:creationId xmlns:a16="http://schemas.microsoft.com/office/drawing/2014/main" id="{B1FAF5CA-68E9-CA9D-EC76-9F30C02928EA}"/>
               </a:ext>
             </a:extLst>
           </p:cNvPr>
@@ -2685,7 +2685,7 @@
           <p:cNvPr id="7" name="スライド番号プレースホルダー 6">
             <a:extLst>
               <a:ext uri="{FF2B5EF4-FFF2-40B4-BE49-F238E27FC236}">
-                <a16:creationId xmlns:a16="http://schemas.microsoft.com/office/drawing/2014/main" id="{8602EF98-67B1-0E62-1FA9-3AC29A8262BF}"/>
+                <a16:creationId xmlns:a16="http://schemas.microsoft.com/office/drawing/2014/main" id="{69A244E9-BB92-0C1D-A438-0E4C29A6F396}"/>
               </a:ext>
             </a:extLst>
           </p:cNvPr>
@@ -2701,7 +2701,7 @@
           <a:bodyPr/>
           <a:lstStyle/>
           <a:p>
-            <a:fld id="{3B7095A3-C087-43C9-AAF3-94457615C100}" type="slidenum">
+            <a:fld id="{BEDED656-19E1-4C31-9E7D-6AD1D1FE664F}" type="slidenum">
               <a:rPr kumimoji="1" lang="ja-JP" altLang="en-US" smtClean="0"/>
               <a:t>‹#›</a:t>
             </a:fld>
@@ -2712,7 +2712,7 @@
     </p:spTree>
     <p:extLst>
       <p:ext uri="{BB962C8B-B14F-4D97-AF65-F5344CB8AC3E}">
-        <p14:creationId xmlns:p14="http://schemas.microsoft.com/office/powerpoint/2010/main" val="1725491776"/>
+        <p14:creationId xmlns:p14="http://schemas.microsoft.com/office/powerpoint/2010/main" val="1949981884"/>
       </p:ext>
     </p:extLst>
   </p:cSld>
@@ -2744,7 +2744,7 @@
           <p:cNvPr id="2" name="タイトル 1">
             <a:extLst>
               <a:ext uri="{FF2B5EF4-FFF2-40B4-BE49-F238E27FC236}">
-                <a16:creationId xmlns:a16="http://schemas.microsoft.com/office/drawing/2014/main" id="{6B1D1184-F422-B4F8-F5EE-A9310215F3B2}"/>
+                <a16:creationId xmlns:a16="http://schemas.microsoft.com/office/drawing/2014/main" id="{D4700544-51ED-12BB-8D44-8CFB0B70B0B3}"/>
               </a:ext>
             </a:extLst>
           </p:cNvPr>
@@ -2781,7 +2781,7 @@
           <p:cNvPr id="3" name="図プレースホルダー 2">
             <a:extLst>
               <a:ext uri="{FF2B5EF4-FFF2-40B4-BE49-F238E27FC236}">
-                <a16:creationId xmlns:a16="http://schemas.microsoft.com/office/drawing/2014/main" id="{614A4AF9-7EAB-B3F6-4259-49A5A0BE9FC9}"/>
+                <a16:creationId xmlns:a16="http://schemas.microsoft.com/office/drawing/2014/main" id="{51B5A256-4CAE-297E-6CC6-A746E71E22B5}"/>
               </a:ext>
             </a:extLst>
           </p:cNvPr>
@@ -2848,7 +2848,7 @@
           <p:cNvPr id="4" name="テキスト プレースホルダー 3">
             <a:extLst>
               <a:ext uri="{FF2B5EF4-FFF2-40B4-BE49-F238E27FC236}">
-                <a16:creationId xmlns:a16="http://schemas.microsoft.com/office/drawing/2014/main" id="{03AE59B4-23C9-A241-6A96-A828FD3F793B}"/>
+                <a16:creationId xmlns:a16="http://schemas.microsoft.com/office/drawing/2014/main" id="{667D5FBE-C898-0187-30D9-B5DE2B5BFCE1}"/>
               </a:ext>
             </a:extLst>
           </p:cNvPr>
@@ -2919,7 +2919,7 @@
           <p:cNvPr id="5" name="日付プレースホルダー 4">
             <a:extLst>
               <a:ext uri="{FF2B5EF4-FFF2-40B4-BE49-F238E27FC236}">
-                <a16:creationId xmlns:a16="http://schemas.microsoft.com/office/drawing/2014/main" id="{14455F27-ED0C-BA11-FF9D-1E14DB410BD8}"/>
+                <a16:creationId xmlns:a16="http://schemas.microsoft.com/office/drawing/2014/main" id="{398CD336-8184-3440-556C-505A5B5480AF}"/>
               </a:ext>
             </a:extLst>
           </p:cNvPr>
@@ -2935,7 +2935,7 @@
           <a:bodyPr/>
           <a:lstStyle/>
           <a:p>
-            <a:fld id="{0F69FF7E-59E9-410A-AF9F-592922283F94}" type="datetimeFigureOut">
+            <a:fld id="{700A14B1-0F86-4E96-B4A8-1C51CAA5F750}" type="datetimeFigureOut">
               <a:rPr kumimoji="1" lang="ja-JP" altLang="en-US" smtClean="0"/>
               <a:t>2026/9/12</a:t>
             </a:fld>
@@ -2948,7 +2948,7 @@
           <p:cNvPr id="6" name="フッター プレースホルダー 5">
             <a:extLst>
               <a:ext uri="{FF2B5EF4-FFF2-40B4-BE49-F238E27FC236}">
-                <a16:creationId xmlns:a16="http://schemas.microsoft.com/office/drawing/2014/main" id="{090BC815-8910-F8DA-9021-7410CAC38381}"/>
+                <a16:creationId xmlns:a16="http://schemas.microsoft.com/office/drawing/2014/main" id="{367140C4-BA41-ECD4-A10C-0E37DE8180B1}"/>
               </a:ext>
             </a:extLst>
           </p:cNvPr>
@@ -2973,7 +2973,7 @@
           <p:cNvPr id="7" name="スライド番号プレースホルダー 6">
             <a:extLst>
               <a:ext uri="{FF2B5EF4-FFF2-40B4-BE49-F238E27FC236}">
-                <a16:creationId xmlns:a16="http://schemas.microsoft.com/office/drawing/2014/main" id="{1A9420D3-5C3B-4CB0-C9E1-4FB756D9FFC5}"/>
+                <a16:creationId xmlns:a16="http://schemas.microsoft.com/office/drawing/2014/main" id="{E778833E-8F08-03E8-5200-5FB394509F36}"/>
               </a:ext>
             </a:extLst>
           </p:cNvPr>
@@ -2989,7 +2989,7 @@
           <a:bodyPr/>
           <a:lstStyle/>
           <a:p>
-            <a:fld id="{3B7095A3-C087-43C9-AAF3-94457615C100}" type="slidenum">
+            <a:fld id="{BEDED656-19E1-4C31-9E7D-6AD1D1FE664F}" type="slidenum">
               <a:rPr kumimoji="1" lang="ja-JP" altLang="en-US" smtClean="0"/>
               <a:t>‹#›</a:t>
             </a:fld>
@@ -3000,7 +3000,7 @@
     </p:spTree>
     <p:extLst>
       <p:ext uri="{BB962C8B-B14F-4D97-AF65-F5344CB8AC3E}">
-        <p14:creationId xmlns:p14="http://schemas.microsoft.com/office/powerpoint/2010/main" val="718653627"/>
+        <p14:creationId xmlns:p14="http://schemas.microsoft.com/office/powerpoint/2010/main" val="4151477805"/>
       </p:ext>
     </p:extLst>
   </p:cSld>
@@ -3037,7 +3037,7 @@
           <p:cNvPr id="2" name="タイトル プレースホルダー 1">
             <a:extLst>
               <a:ext uri="{FF2B5EF4-FFF2-40B4-BE49-F238E27FC236}">
-                <a16:creationId xmlns:a16="http://schemas.microsoft.com/office/drawing/2014/main" id="{0E2A2DC8-9E84-7893-1333-A6A08E376394}"/>
+                <a16:creationId xmlns:a16="http://schemas.microsoft.com/office/drawing/2014/main" id="{A366CF4C-33F0-66EF-9A29-74E50EFD3AA7}"/>
               </a:ext>
             </a:extLst>
           </p:cNvPr>
@@ -3075,7 +3075,7 @@
           <p:cNvPr id="3" name="テキスト プレースホルダー 2">
             <a:extLst>
               <a:ext uri="{FF2B5EF4-FFF2-40B4-BE49-F238E27FC236}">
-                <a16:creationId xmlns:a16="http://schemas.microsoft.com/office/drawing/2014/main" id="{770B3658-4BC1-F324-ED35-F05ED0C2112F}"/>
+                <a16:creationId xmlns:a16="http://schemas.microsoft.com/office/drawing/2014/main" id="{AF4620AD-4793-B839-5456-694A2E010116}"/>
               </a:ext>
             </a:extLst>
           </p:cNvPr>
@@ -3174,7 +3174,7 @@
           <p:cNvPr id="4" name="日付プレースホルダー 3">
             <a:extLst>
               <a:ext uri="{FF2B5EF4-FFF2-40B4-BE49-F238E27FC236}">
-                <a16:creationId xmlns:a16="http://schemas.microsoft.com/office/drawing/2014/main" id="{5A05A9A9-EF96-AE3A-CC47-559D0774A1F1}"/>
+                <a16:creationId xmlns:a16="http://schemas.microsoft.com/office/drawing/2014/main" id="{D341BF62-350A-27F9-A67A-E3484DF1725E}"/>
               </a:ext>
             </a:extLst>
           </p:cNvPr>
@@ -3208,7 +3208,7 @@
             </a:lvl1pPr>
           </a:lstStyle>
           <a:p>
-            <a:fld id="{0F69FF7E-59E9-410A-AF9F-592922283F94}" type="datetimeFigureOut">
+            <a:fld id="{700A14B1-0F86-4E96-B4A8-1C51CAA5F750}" type="datetimeFigureOut">
               <a:rPr kumimoji="1" lang="ja-JP" altLang="en-US" smtClean="0"/>
               <a:t>2026/9/12</a:t>
             </a:fld>
@@ -3221,7 +3221,7 @@
           <p:cNvPr id="5" name="フッター プレースホルダー 4">
             <a:extLst>
               <a:ext uri="{FF2B5EF4-FFF2-40B4-BE49-F238E27FC236}">
-                <a16:creationId xmlns:a16="http://schemas.microsoft.com/office/drawing/2014/main" id="{E4B5F8D3-076E-5D3F-A1D0-9B62586C81CE}"/>
+                <a16:creationId xmlns:a16="http://schemas.microsoft.com/office/drawing/2014/main" id="{09DEE4EF-ABCA-3B20-44E1-9ACE9F22D2E2}"/>
               </a:ext>
             </a:extLst>
           </p:cNvPr>
@@ -3264,7 +3264,7 @@
           <p:cNvPr id="6" name="スライド番号プレースホルダー 5">
             <a:extLst>
               <a:ext uri="{FF2B5EF4-FFF2-40B4-BE49-F238E27FC236}">
-                <a16:creationId xmlns:a16="http://schemas.microsoft.com/office/drawing/2014/main" id="{8EA9FE06-D967-B0DD-7DA4-78CD1C96DB49}"/>
+                <a16:creationId xmlns:a16="http://schemas.microsoft.com/office/drawing/2014/main" id="{6DBC254C-E836-0593-2A04-03D5AC166EAD}"/>
               </a:ext>
             </a:extLst>
           </p:cNvPr>
@@ -3298,7 +3298,7 @@
             </a:lvl1pPr>
           </a:lstStyle>
           <a:p>
-            <a:fld id="{3B7095A3-C087-43C9-AAF3-94457615C100}" type="slidenum">
+            <a:fld id="{BEDED656-19E1-4C31-9E7D-6AD1D1FE664F}" type="slidenum">
               <a:rPr kumimoji="1" lang="ja-JP" altLang="en-US" smtClean="0"/>
               <a:t>‹#›</a:t>
             </a:fld>
@@ -3309,7 +3309,7 @@
     </p:spTree>
     <p:extLst>
       <p:ext uri="{BB962C8B-B14F-4D97-AF65-F5344CB8AC3E}">
-        <p14:creationId xmlns:p14="http://schemas.microsoft.com/office/powerpoint/2010/main" val="4159878740"/>
+        <p14:creationId xmlns:p14="http://schemas.microsoft.com/office/powerpoint/2010/main" val="129617232"/>
       </p:ext>
     </p:extLst>
   </p:cSld>
@@ -3632,7 +3632,7 @@
           <p:cNvPr id="2" name="正方形/長方形 1">
             <a:extLst>
               <a:ext uri="{FF2B5EF4-FFF2-40B4-BE49-F238E27FC236}">
-                <a16:creationId xmlns:a16="http://schemas.microsoft.com/office/drawing/2014/main" id="{DD12F232-F9B1-5092-C6BD-410AEDE7A938}"/>
+                <a16:creationId xmlns:a16="http://schemas.microsoft.com/office/drawing/2014/main" id="{8AADD28C-8B15-86B7-2F79-48EB88459D6D}"/>
               </a:ext>
             </a:extLst>
           </p:cNvPr>
@@ -3700,7 +3700,7 @@
           <p:cNvPr id="3" name="正方形/長方形 2">
             <a:extLst>
               <a:ext uri="{FF2B5EF4-FFF2-40B4-BE49-F238E27FC236}">
-                <a16:creationId xmlns:a16="http://schemas.microsoft.com/office/drawing/2014/main" id="{EDF41308-B3CD-483D-9497-F5F2318C1D05}"/>
+                <a16:creationId xmlns:a16="http://schemas.microsoft.com/office/drawing/2014/main" id="{12C141B2-4415-FBF0-6949-488A97FF057D}"/>
               </a:ext>
             </a:extLst>
           </p:cNvPr>
@@ -3768,7 +3768,7 @@
           <p:cNvPr id="4" name="楕円 3">
             <a:extLst>
               <a:ext uri="{FF2B5EF4-FFF2-40B4-BE49-F238E27FC236}">
-                <a16:creationId xmlns:a16="http://schemas.microsoft.com/office/drawing/2014/main" id="{F46473BE-76F1-AACC-6DCC-5A459FD1904D}"/>
+                <a16:creationId xmlns:a16="http://schemas.microsoft.com/office/drawing/2014/main" id="{2775F9A5-37A1-235E-CD1A-4F4CBBCB40A7}"/>
               </a:ext>
             </a:extLst>
           </p:cNvPr>
@@ -3838,7 +3838,7 @@
           <p:cNvPr id="5" name="楕円 4">
             <a:extLst>
               <a:ext uri="{FF2B5EF4-FFF2-40B4-BE49-F238E27FC236}">
-                <a16:creationId xmlns:a16="http://schemas.microsoft.com/office/drawing/2014/main" id="{AFA128A1-74E4-5ADC-1417-87C790919E2A}"/>
+                <a16:creationId xmlns:a16="http://schemas.microsoft.com/office/drawing/2014/main" id="{D3CC513A-B159-ED72-2B94-5368E3E1DE5E}"/>
               </a:ext>
             </a:extLst>
           </p:cNvPr>
@@ -3908,7 +3908,7 @@
           <p:cNvPr id="6" name="正方形/長方形 5">
             <a:extLst>
               <a:ext uri="{FF2B5EF4-FFF2-40B4-BE49-F238E27FC236}">
-                <a16:creationId xmlns:a16="http://schemas.microsoft.com/office/drawing/2014/main" id="{D50EFBDE-1B7B-32A2-59A6-797E57104C4F}"/>
+                <a16:creationId xmlns:a16="http://schemas.microsoft.com/office/drawing/2014/main" id="{1008237B-301E-8DA7-C223-4381E2926E49}"/>
               </a:ext>
             </a:extLst>
           </p:cNvPr>
@@ -3976,7 +3976,7 @@
           <p:cNvPr id="7" name="テキスト ボックス 6">
             <a:extLst>
               <a:ext uri="{FF2B5EF4-FFF2-40B4-BE49-F238E27FC236}">
-                <a16:creationId xmlns:a16="http://schemas.microsoft.com/office/drawing/2014/main" id="{FEBCF3B4-9D6D-A581-34AF-E4ED94144217}"/>
+                <a16:creationId xmlns:a16="http://schemas.microsoft.com/office/drawing/2014/main" id="{4CA27613-3021-F0BD-3677-B45CCB382F6B}"/>
               </a:ext>
             </a:extLst>
           </p:cNvPr>
@@ -4029,7 +4029,7 @@
           <p:cNvPr id="8" name="テキスト ボックス 7">
             <a:extLst>
               <a:ext uri="{FF2B5EF4-FFF2-40B4-BE49-F238E27FC236}">
-                <a16:creationId xmlns:a16="http://schemas.microsoft.com/office/drawing/2014/main" id="{00179070-8318-ECDA-DE8F-B0F36772C6C1}"/>
+                <a16:creationId xmlns:a16="http://schemas.microsoft.com/office/drawing/2014/main" id="{3022D950-EE33-B572-5754-09DB7F7DB161}"/>
               </a:ext>
             </a:extLst>
           </p:cNvPr>
@@ -4075,7 +4075,7 @@
           <p:cNvPr id="9" name="テキスト ボックス 8">
             <a:extLst>
               <a:ext uri="{FF2B5EF4-FFF2-40B4-BE49-F238E27FC236}">
-                <a16:creationId xmlns:a16="http://schemas.microsoft.com/office/drawing/2014/main" id="{F5A3269F-268B-9DB3-CA09-23BCB012F2EA}"/>
+                <a16:creationId xmlns:a16="http://schemas.microsoft.com/office/drawing/2014/main" id="{98E8776A-5ECF-D1CF-2181-35384A2B5607}"/>
               </a:ext>
             </a:extLst>
           </p:cNvPr>
@@ -4148,7 +4148,7 @@
           <p:cNvPr id="10" name="四角形: 角を丸くする 9">
             <a:extLst>
               <a:ext uri="{FF2B5EF4-FFF2-40B4-BE49-F238E27FC236}">
-                <a16:creationId xmlns:a16="http://schemas.microsoft.com/office/drawing/2014/main" id="{4760F7E3-917A-FE26-5AF6-2DBBCC33BA13}"/>
+                <a16:creationId xmlns:a16="http://schemas.microsoft.com/office/drawing/2014/main" id="{6658F8CF-C987-A95D-771E-A2CEF8E8FB9B}"/>
               </a:ext>
             </a:extLst>
           </p:cNvPr>
@@ -4218,7 +4218,7 @@
           <p:cNvPr id="11" name="テキスト ボックス 10">
             <a:extLst>
               <a:ext uri="{FF2B5EF4-FFF2-40B4-BE49-F238E27FC236}">
-                <a16:creationId xmlns:a16="http://schemas.microsoft.com/office/drawing/2014/main" id="{596884E6-873A-5ABF-015F-2EBC89CFC15E}"/>
+                <a16:creationId xmlns:a16="http://schemas.microsoft.com/office/drawing/2014/main" id="{E7F49527-B43E-2E9C-C31B-BD44BE66975B}"/>
               </a:ext>
             </a:extLst>
           </p:cNvPr>
@@ -4264,7 +4264,7 @@
           <p:cNvPr id="12" name="四角形: 角を丸くする 11">
             <a:extLst>
               <a:ext uri="{FF2B5EF4-FFF2-40B4-BE49-F238E27FC236}">
-                <a16:creationId xmlns:a16="http://schemas.microsoft.com/office/drawing/2014/main" id="{8FF00F4D-798A-47A2-5534-9127BE9C3179}"/>
+                <a16:creationId xmlns:a16="http://schemas.microsoft.com/office/drawing/2014/main" id="{2FDDCD69-A3F1-3A1C-85DE-B8C0C6D80039}"/>
               </a:ext>
             </a:extLst>
           </p:cNvPr>
@@ -4334,7 +4334,7 @@
           <p:cNvPr id="13" name="テキスト ボックス 12">
             <a:extLst>
               <a:ext uri="{FF2B5EF4-FFF2-40B4-BE49-F238E27FC236}">
-                <a16:creationId xmlns:a16="http://schemas.microsoft.com/office/drawing/2014/main" id="{F82D0E9F-9D7F-4E19-DFE4-B23240E67157}"/>
+                <a16:creationId xmlns:a16="http://schemas.microsoft.com/office/drawing/2014/main" id="{3D6A9A28-0801-AED6-6043-FA2A1BCF4E72}"/>
               </a:ext>
             </a:extLst>
           </p:cNvPr>
@@ -4380,7 +4380,7 @@
           <p:cNvPr id="14" name="正方形/長方形 13">
             <a:extLst>
               <a:ext uri="{FF2B5EF4-FFF2-40B4-BE49-F238E27FC236}">
-                <a16:creationId xmlns:a16="http://schemas.microsoft.com/office/drawing/2014/main" id="{9249EC3D-A1CE-34C0-BDE3-BE6C71897090}"/>
+                <a16:creationId xmlns:a16="http://schemas.microsoft.com/office/drawing/2014/main" id="{6FE10370-7D63-28C2-7ED2-2BC4A4B4D900}"/>
               </a:ext>
             </a:extLst>
           </p:cNvPr>
@@ -4448,7 +4448,7 @@
           <p:cNvPr id="15" name="テキスト ボックス 14">
             <a:extLst>
               <a:ext uri="{FF2B5EF4-FFF2-40B4-BE49-F238E27FC236}">
-                <a16:creationId xmlns:a16="http://schemas.microsoft.com/office/drawing/2014/main" id="{04AE5F4C-656E-FA14-4805-4854A4781146}"/>
+                <a16:creationId xmlns:a16="http://schemas.microsoft.com/office/drawing/2014/main" id="{4BCA2020-13FC-21FD-F189-23FE0AE3FDCD}"/>
               </a:ext>
             </a:extLst>
           </p:cNvPr>
@@ -4542,7 +4542,7 @@
     </p:spTree>
     <p:extLst>
       <p:ext uri="{BB962C8B-B14F-4D97-AF65-F5344CB8AC3E}">
-        <p14:creationId xmlns:p14="http://schemas.microsoft.com/office/powerpoint/2010/main" val="3360397661"/>
+        <p14:creationId xmlns:p14="http://schemas.microsoft.com/office/powerpoint/2010/main" val="3091954362"/>
       </p:ext>
     </p:extLst>
   </p:cSld>
@@ -4574,7 +4574,7 @@
           <p:cNvPr id="2" name="正方形/長方形 1">
             <a:extLst>
               <a:ext uri="{FF2B5EF4-FFF2-40B4-BE49-F238E27FC236}">
-                <a16:creationId xmlns:a16="http://schemas.microsoft.com/office/drawing/2014/main" id="{D0F30E27-38CC-240A-C1A5-B6747B41134B}"/>
+                <a16:creationId xmlns:a16="http://schemas.microsoft.com/office/drawing/2014/main" id="{3C3B9BEA-3331-6F63-8CA5-434C8458FD52}"/>
               </a:ext>
             </a:extLst>
           </p:cNvPr>
@@ -4642,7 +4642,7 @@
           <p:cNvPr id="3" name="正方形/長方形 2">
             <a:extLst>
               <a:ext uri="{FF2B5EF4-FFF2-40B4-BE49-F238E27FC236}">
-                <a16:creationId xmlns:a16="http://schemas.microsoft.com/office/drawing/2014/main" id="{1159D24C-E722-602E-7467-68030B56AA52}"/>
+                <a16:creationId xmlns:a16="http://schemas.microsoft.com/office/drawing/2014/main" id="{8515706C-4FF1-7E37-A0FF-2EC81EE6E64D}"/>
               </a:ext>
             </a:extLst>
           </p:cNvPr>
@@ -4710,7 +4710,7 @@
           <p:cNvPr id="4" name="テキスト ボックス 3">
             <a:extLst>
               <a:ext uri="{FF2B5EF4-FFF2-40B4-BE49-F238E27FC236}">
-                <a16:creationId xmlns:a16="http://schemas.microsoft.com/office/drawing/2014/main" id="{2228BBF2-2E55-2911-4BBB-5935C03B5D96}"/>
+                <a16:creationId xmlns:a16="http://schemas.microsoft.com/office/drawing/2014/main" id="{8FD471DC-ECC2-35FF-CAFE-F51FDB0F84B1}"/>
               </a:ext>
             </a:extLst>
           </p:cNvPr>
@@ -4763,7 +4763,7 @@
           <p:cNvPr id="5" name="テキスト ボックス 4">
             <a:extLst>
               <a:ext uri="{FF2B5EF4-FFF2-40B4-BE49-F238E27FC236}">
-                <a16:creationId xmlns:a16="http://schemas.microsoft.com/office/drawing/2014/main" id="{41D7B6D0-3C17-B9F5-0744-F8A051379374}"/>
+                <a16:creationId xmlns:a16="http://schemas.microsoft.com/office/drawing/2014/main" id="{094E71C0-05BD-C812-6ADD-E38F3C0F3952}"/>
               </a:ext>
             </a:extLst>
           </p:cNvPr>
@@ -4809,7 +4809,7 @@
           <p:cNvPr id="6" name="正方形/長方形 5">
             <a:extLst>
               <a:ext uri="{FF2B5EF4-FFF2-40B4-BE49-F238E27FC236}">
-                <a16:creationId xmlns:a16="http://schemas.microsoft.com/office/drawing/2014/main" id="{0A0A0188-2EFF-75CA-0C61-5A57D4291E1E}"/>
+                <a16:creationId xmlns:a16="http://schemas.microsoft.com/office/drawing/2014/main" id="{29CEEF44-6C07-A4B2-8965-85C2EB00794B}"/>
               </a:ext>
             </a:extLst>
           </p:cNvPr>
@@ -4877,7 +4877,7 @@
           <p:cNvPr id="7" name="四角形: 角を丸くする 6">
             <a:extLst>
               <a:ext uri="{FF2B5EF4-FFF2-40B4-BE49-F238E27FC236}">
-                <a16:creationId xmlns:a16="http://schemas.microsoft.com/office/drawing/2014/main" id="{6DE8746F-1CAD-26B4-BDEE-8B09D5E4F0F5}"/>
+                <a16:creationId xmlns:a16="http://schemas.microsoft.com/office/drawing/2014/main" id="{548039BC-D682-D745-5412-E377AD406B30}"/>
               </a:ext>
             </a:extLst>
           </p:cNvPr>
@@ -4947,7 +4947,7 @@
           <p:cNvPr id="8" name="テキスト ボックス 7">
             <a:extLst>
               <a:ext uri="{FF2B5EF4-FFF2-40B4-BE49-F238E27FC236}">
-                <a16:creationId xmlns:a16="http://schemas.microsoft.com/office/drawing/2014/main" id="{56AF0BBD-D178-52DE-0A07-B9FEDAD8CF2E}"/>
+                <a16:creationId xmlns:a16="http://schemas.microsoft.com/office/drawing/2014/main" id="{E184DE42-CC32-2C3A-2C8F-2AA37C93661A}"/>
               </a:ext>
             </a:extLst>
           </p:cNvPr>
@@ -4993,7 +4993,7 @@
           <p:cNvPr id="9" name="テキスト ボックス 8">
             <a:extLst>
               <a:ext uri="{FF2B5EF4-FFF2-40B4-BE49-F238E27FC236}">
-                <a16:creationId xmlns:a16="http://schemas.microsoft.com/office/drawing/2014/main" id="{25974F10-0F30-EBE2-5D8F-5D3DA887F266}"/>
+                <a16:creationId xmlns:a16="http://schemas.microsoft.com/office/drawing/2014/main" id="{7C72FBCA-DA3C-4954-F691-EB02A46CAA7D}"/>
               </a:ext>
             </a:extLst>
           </p:cNvPr>
@@ -5039,7 +5039,7 @@
           <p:cNvPr id="10" name="テキスト ボックス 9">
             <a:extLst>
               <a:ext uri="{FF2B5EF4-FFF2-40B4-BE49-F238E27FC236}">
-                <a16:creationId xmlns:a16="http://schemas.microsoft.com/office/drawing/2014/main" id="{CCCFBB42-7E9A-403E-C872-040EB2360A08}"/>
+                <a16:creationId xmlns:a16="http://schemas.microsoft.com/office/drawing/2014/main" id="{0FDA14E0-46D1-EA62-1DC4-EEE830227A34}"/>
               </a:ext>
             </a:extLst>
           </p:cNvPr>
@@ -5092,7 +5092,7 @@
           <p:cNvPr id="11" name="四角形: 角を丸くする 10">
             <a:extLst>
               <a:ext uri="{FF2B5EF4-FFF2-40B4-BE49-F238E27FC236}">
-                <a16:creationId xmlns:a16="http://schemas.microsoft.com/office/drawing/2014/main" id="{95D953AC-1659-3818-2D40-3D48E83C3454}"/>
+                <a16:creationId xmlns:a16="http://schemas.microsoft.com/office/drawing/2014/main" id="{0E04660A-B70A-D464-C37C-0EED7B813C67}"/>
               </a:ext>
             </a:extLst>
           </p:cNvPr>
@@ -5148,7 +5148,7 @@
           <p:cNvPr id="12" name="四角形: 角を丸くする 11">
             <a:extLst>
               <a:ext uri="{FF2B5EF4-FFF2-40B4-BE49-F238E27FC236}">
-                <a16:creationId xmlns:a16="http://schemas.microsoft.com/office/drawing/2014/main" id="{9D1557AE-21E3-032F-B0FE-CEC6B12E4BD0}"/>
+                <a16:creationId xmlns:a16="http://schemas.microsoft.com/office/drawing/2014/main" id="{4CD532B8-D486-8086-E82D-C00735B7E3C3}"/>
               </a:ext>
             </a:extLst>
           </p:cNvPr>
@@ -5218,7 +5218,7 @@
           <p:cNvPr id="13" name="テキスト ボックス 12">
             <a:extLst>
               <a:ext uri="{FF2B5EF4-FFF2-40B4-BE49-F238E27FC236}">
-                <a16:creationId xmlns:a16="http://schemas.microsoft.com/office/drawing/2014/main" id="{7831E41A-D112-2CC0-512E-6A2B03ADC08C}"/>
+                <a16:creationId xmlns:a16="http://schemas.microsoft.com/office/drawing/2014/main" id="{6C679BE4-3193-DE2A-53C4-987A405D409B}"/>
               </a:ext>
             </a:extLst>
           </p:cNvPr>
@@ -5271,7 +5271,7 @@
           <p:cNvPr id="14" name="テキスト ボックス 13">
             <a:extLst>
               <a:ext uri="{FF2B5EF4-FFF2-40B4-BE49-F238E27FC236}">
-                <a16:creationId xmlns:a16="http://schemas.microsoft.com/office/drawing/2014/main" id="{99FB30F1-703A-B0D4-4678-F1E668E7B7AD}"/>
+                <a16:creationId xmlns:a16="http://schemas.microsoft.com/office/drawing/2014/main" id="{06976D8B-6A09-7E42-9F1E-1B02BAFB17B8}"/>
               </a:ext>
             </a:extLst>
           </p:cNvPr>
@@ -5317,7 +5317,7 @@
           <p:cNvPr id="15" name="テキスト ボックス 14">
             <a:extLst>
               <a:ext uri="{FF2B5EF4-FFF2-40B4-BE49-F238E27FC236}">
-                <a16:creationId xmlns:a16="http://schemas.microsoft.com/office/drawing/2014/main" id="{1556FF09-E2D0-2B71-519D-BB6E658749CB}"/>
+                <a16:creationId xmlns:a16="http://schemas.microsoft.com/office/drawing/2014/main" id="{233CB1C4-6F91-18DB-8B37-85E8BF03FD0E}"/>
               </a:ext>
             </a:extLst>
           </p:cNvPr>
@@ -5456,7 +5456,7 @@
           <p:cNvPr id="16" name="四角形: 角を丸くする 15">
             <a:extLst>
               <a:ext uri="{FF2B5EF4-FFF2-40B4-BE49-F238E27FC236}">
-                <a16:creationId xmlns:a16="http://schemas.microsoft.com/office/drawing/2014/main" id="{83268515-EB6E-65B0-5C66-7B8A8D78B482}"/>
+                <a16:creationId xmlns:a16="http://schemas.microsoft.com/office/drawing/2014/main" id="{14DE2B9A-6640-DC31-C697-96C79BC6EB1E}"/>
               </a:ext>
             </a:extLst>
           </p:cNvPr>
@@ -5526,7 +5526,7 @@
           <p:cNvPr id="17" name="四角形: 角を丸くする 16">
             <a:extLst>
               <a:ext uri="{FF2B5EF4-FFF2-40B4-BE49-F238E27FC236}">
-                <a16:creationId xmlns:a16="http://schemas.microsoft.com/office/drawing/2014/main" id="{0654DD93-A2CF-F522-E206-A329BB2E2EB6}"/>
+                <a16:creationId xmlns:a16="http://schemas.microsoft.com/office/drawing/2014/main" id="{040D604F-B857-A359-D9F7-66DA44E99737}"/>
               </a:ext>
             </a:extLst>
           </p:cNvPr>
@@ -5596,7 +5596,7 @@
           <p:cNvPr id="18" name="テキスト ボックス 17">
             <a:extLst>
               <a:ext uri="{FF2B5EF4-FFF2-40B4-BE49-F238E27FC236}">
-                <a16:creationId xmlns:a16="http://schemas.microsoft.com/office/drawing/2014/main" id="{276C2056-4807-CD92-6CAE-28BD8C279254}"/>
+                <a16:creationId xmlns:a16="http://schemas.microsoft.com/office/drawing/2014/main" id="{3FBC6BE0-8C7D-6349-93D3-F96935F4C83E}"/>
               </a:ext>
             </a:extLst>
           </p:cNvPr>
@@ -5649,7 +5649,7 @@
           <p:cNvPr id="19" name="テキスト ボックス 18">
             <a:extLst>
               <a:ext uri="{FF2B5EF4-FFF2-40B4-BE49-F238E27FC236}">
-                <a16:creationId xmlns:a16="http://schemas.microsoft.com/office/drawing/2014/main" id="{77331AD8-D5EC-C773-876F-ACBE5A4FC451}"/>
+                <a16:creationId xmlns:a16="http://schemas.microsoft.com/office/drawing/2014/main" id="{D69DDA2A-75FB-9921-8AC2-27C5C0F93093}"/>
               </a:ext>
             </a:extLst>
           </p:cNvPr>
@@ -5715,7 +5715,7 @@
           <p:cNvPr id="20" name="四角形: 角を丸くする 19">
             <a:extLst>
               <a:ext uri="{FF2B5EF4-FFF2-40B4-BE49-F238E27FC236}">
-                <a16:creationId xmlns:a16="http://schemas.microsoft.com/office/drawing/2014/main" id="{4638ED83-2179-FEA4-49B8-0FA481367367}"/>
+                <a16:creationId xmlns:a16="http://schemas.microsoft.com/office/drawing/2014/main" id="{A6F4CB53-7A59-CD58-7EC7-798E7F393C09}"/>
               </a:ext>
             </a:extLst>
           </p:cNvPr>
@@ -5771,7 +5771,7 @@
           <p:cNvPr id="21" name="テキスト ボックス 20">
             <a:extLst>
               <a:ext uri="{FF2B5EF4-FFF2-40B4-BE49-F238E27FC236}">
-                <a16:creationId xmlns:a16="http://schemas.microsoft.com/office/drawing/2014/main" id="{D0490D68-2CD0-76A6-7C33-AAA6B78CE618}"/>
+                <a16:creationId xmlns:a16="http://schemas.microsoft.com/office/drawing/2014/main" id="{5F67175F-8D05-9FBC-1226-582998D58086}"/>
               </a:ext>
             </a:extLst>
           </p:cNvPr>
@@ -5824,7 +5824,7 @@
           <p:cNvPr id="22" name="テキスト ボックス 21">
             <a:extLst>
               <a:ext uri="{FF2B5EF4-FFF2-40B4-BE49-F238E27FC236}">
-                <a16:creationId xmlns:a16="http://schemas.microsoft.com/office/drawing/2014/main" id="{28DF73A0-C6FC-986F-107A-2F5158E62705}"/>
+                <a16:creationId xmlns:a16="http://schemas.microsoft.com/office/drawing/2014/main" id="{0772B25B-7A91-9632-F8A4-E636BB4AFFD9}"/>
               </a:ext>
             </a:extLst>
           </p:cNvPr>
@@ -5877,7 +5877,7 @@
           <p:cNvPr id="23" name="四角形: 角を丸くする 22">
             <a:extLst>
               <a:ext uri="{FF2B5EF4-FFF2-40B4-BE49-F238E27FC236}">
-                <a16:creationId xmlns:a16="http://schemas.microsoft.com/office/drawing/2014/main" id="{0F6921E7-324F-F8F2-DB83-A3D4354CDE98}"/>
+                <a16:creationId xmlns:a16="http://schemas.microsoft.com/office/drawing/2014/main" id="{3B04CAE9-C307-A50B-B443-A5ACB1BAE21A}"/>
               </a:ext>
             </a:extLst>
           </p:cNvPr>
@@ -5933,7 +5933,7 @@
           <p:cNvPr id="24" name="テキスト ボックス 23">
             <a:extLst>
               <a:ext uri="{FF2B5EF4-FFF2-40B4-BE49-F238E27FC236}">
-                <a16:creationId xmlns:a16="http://schemas.microsoft.com/office/drawing/2014/main" id="{26239B56-AC38-F50A-C4EA-DC0CFD7B15A5}"/>
+                <a16:creationId xmlns:a16="http://schemas.microsoft.com/office/drawing/2014/main" id="{9ED1FF0F-9A62-3490-862F-FA4F2DE5F6B3}"/>
               </a:ext>
             </a:extLst>
           </p:cNvPr>
@@ -5986,7 +5986,7 @@
           <p:cNvPr id="25" name="テキスト ボックス 24">
             <a:extLst>
               <a:ext uri="{FF2B5EF4-FFF2-40B4-BE49-F238E27FC236}">
-                <a16:creationId xmlns:a16="http://schemas.microsoft.com/office/drawing/2014/main" id="{8C6D0FC9-4A7A-AF8B-9446-DE31A1610A8E}"/>
+                <a16:creationId xmlns:a16="http://schemas.microsoft.com/office/drawing/2014/main" id="{9E867D67-B12C-32E0-69C5-70763400B1F5}"/>
               </a:ext>
             </a:extLst>
           </p:cNvPr>
@@ -6039,7 +6039,7 @@
           <p:cNvPr id="26" name="四角形: 角を丸くする 25">
             <a:extLst>
               <a:ext uri="{FF2B5EF4-FFF2-40B4-BE49-F238E27FC236}">
-                <a16:creationId xmlns:a16="http://schemas.microsoft.com/office/drawing/2014/main" id="{96585725-1128-9441-51F1-171E43F18105}"/>
+                <a16:creationId xmlns:a16="http://schemas.microsoft.com/office/drawing/2014/main" id="{C47940A2-F5FE-CADC-87BE-DFD7BE7A680C}"/>
               </a:ext>
             </a:extLst>
           </p:cNvPr>
@@ -6095,7 +6095,7 @@
           <p:cNvPr id="27" name="テキスト ボックス 26">
             <a:extLst>
               <a:ext uri="{FF2B5EF4-FFF2-40B4-BE49-F238E27FC236}">
-                <a16:creationId xmlns:a16="http://schemas.microsoft.com/office/drawing/2014/main" id="{2F4FC355-69BA-9F6A-FA04-4A14A6A792FC}"/>
+                <a16:creationId xmlns:a16="http://schemas.microsoft.com/office/drawing/2014/main" id="{3CBAC2C3-A843-33DA-2CC5-A62EB55FBB98}"/>
               </a:ext>
             </a:extLst>
           </p:cNvPr>
@@ -6148,7 +6148,7 @@
           <p:cNvPr id="28" name="テキスト ボックス 27">
             <a:extLst>
               <a:ext uri="{FF2B5EF4-FFF2-40B4-BE49-F238E27FC236}">
-                <a16:creationId xmlns:a16="http://schemas.microsoft.com/office/drawing/2014/main" id="{4217F6CA-4C0E-D3FB-1CDA-8C12D677CB46}"/>
+                <a16:creationId xmlns:a16="http://schemas.microsoft.com/office/drawing/2014/main" id="{8E866CAB-B87B-781E-6D4A-6BBBFA4015C3}"/>
               </a:ext>
             </a:extLst>
           </p:cNvPr>
@@ -6194,7 +6194,7 @@
           <p:cNvPr id="29" name="四角形: 角を丸くする 28">
             <a:extLst>
               <a:ext uri="{FF2B5EF4-FFF2-40B4-BE49-F238E27FC236}">
-                <a16:creationId xmlns:a16="http://schemas.microsoft.com/office/drawing/2014/main" id="{6A0F061A-F02E-82B0-3A99-E36836B69E26}"/>
+                <a16:creationId xmlns:a16="http://schemas.microsoft.com/office/drawing/2014/main" id="{C50DB2CE-10C3-BE96-4CE3-E1A6FB7ED347}"/>
               </a:ext>
             </a:extLst>
           </p:cNvPr>
@@ -6264,7 +6264,7 @@
           <p:cNvPr id="30" name="正方形/長方形 29">
             <a:extLst>
               <a:ext uri="{FF2B5EF4-FFF2-40B4-BE49-F238E27FC236}">
-                <a16:creationId xmlns:a16="http://schemas.microsoft.com/office/drawing/2014/main" id="{FFCDD6F8-D1AA-B2A8-66A6-1DFD5AFF4DE7}"/>
+                <a16:creationId xmlns:a16="http://schemas.microsoft.com/office/drawing/2014/main" id="{ACE4DC63-5B0B-5A90-B76E-F3FCD0386930}"/>
               </a:ext>
             </a:extLst>
           </p:cNvPr>
@@ -6332,7 +6332,7 @@
           <p:cNvPr id="31" name="テキスト ボックス 30">
             <a:extLst>
               <a:ext uri="{FF2B5EF4-FFF2-40B4-BE49-F238E27FC236}">
-                <a16:creationId xmlns:a16="http://schemas.microsoft.com/office/drawing/2014/main" id="{CCD3F464-DFA3-DC68-6E07-4A18A1F75D86}"/>
+                <a16:creationId xmlns:a16="http://schemas.microsoft.com/office/drawing/2014/main" id="{B45B15D9-DA3D-7963-51E5-76B4BFB9CD10}"/>
               </a:ext>
             </a:extLst>
           </p:cNvPr>
@@ -6378,7 +6378,7 @@
           <p:cNvPr id="32" name="テキスト ボックス 31">
             <a:extLst>
               <a:ext uri="{FF2B5EF4-FFF2-40B4-BE49-F238E27FC236}">
-                <a16:creationId xmlns:a16="http://schemas.microsoft.com/office/drawing/2014/main" id="{276B81DF-9EAA-D064-D6B3-47CB6D8D9B93}"/>
+                <a16:creationId xmlns:a16="http://schemas.microsoft.com/office/drawing/2014/main" id="{ED3DCE79-82FB-D48E-2548-6DF659BEA4B7}"/>
               </a:ext>
             </a:extLst>
           </p:cNvPr>
@@ -6422,7 +6422,7 @@
     </p:spTree>
     <p:extLst>
       <p:ext uri="{BB962C8B-B14F-4D97-AF65-F5344CB8AC3E}">
-        <p14:creationId xmlns:p14="http://schemas.microsoft.com/office/powerpoint/2010/main" val="3984882245"/>
+        <p14:creationId xmlns:p14="http://schemas.microsoft.com/office/powerpoint/2010/main" val="3822909691"/>
       </p:ext>
     </p:extLst>
   </p:cSld>
@@ -6454,7 +6454,7 @@
           <p:cNvPr id="2" name="正方形/長方形 1">
             <a:extLst>
               <a:ext uri="{FF2B5EF4-FFF2-40B4-BE49-F238E27FC236}">
-                <a16:creationId xmlns:a16="http://schemas.microsoft.com/office/drawing/2014/main" id="{044E75F2-76E9-7BE8-DC39-259258799B95}"/>
+                <a16:creationId xmlns:a16="http://schemas.microsoft.com/office/drawing/2014/main" id="{E16BE40C-1740-FBCE-9AFA-268E26717177}"/>
               </a:ext>
             </a:extLst>
           </p:cNvPr>
@@ -6522,7 +6522,7 @@
           <p:cNvPr id="3" name="正方形/長方形 2">
             <a:extLst>
               <a:ext uri="{FF2B5EF4-FFF2-40B4-BE49-F238E27FC236}">
-                <a16:creationId xmlns:a16="http://schemas.microsoft.com/office/drawing/2014/main" id="{016DBBA1-9E59-2823-8842-E87115A2665B}"/>
+                <a16:creationId xmlns:a16="http://schemas.microsoft.com/office/drawing/2014/main" id="{FD944EFE-31A2-FA77-0247-622DD9C10797}"/>
               </a:ext>
             </a:extLst>
           </p:cNvPr>
@@ -6590,7 +6590,7 @@
           <p:cNvPr id="4" name="テキスト ボックス 3">
             <a:extLst>
               <a:ext uri="{FF2B5EF4-FFF2-40B4-BE49-F238E27FC236}">
-                <a16:creationId xmlns:a16="http://schemas.microsoft.com/office/drawing/2014/main" id="{9DA2A6CE-E7E6-24F1-6471-39D73211E9BA}"/>
+                <a16:creationId xmlns:a16="http://schemas.microsoft.com/office/drawing/2014/main" id="{73439003-D141-FB18-9CB4-5A12CA0BFE46}"/>
               </a:ext>
             </a:extLst>
           </p:cNvPr>
@@ -6643,7 +6643,7 @@
           <p:cNvPr id="5" name="テキスト ボックス 4">
             <a:extLst>
               <a:ext uri="{FF2B5EF4-FFF2-40B4-BE49-F238E27FC236}">
-                <a16:creationId xmlns:a16="http://schemas.microsoft.com/office/drawing/2014/main" id="{2274BFA6-4F40-D432-66A4-68FE3D3F468F}"/>
+                <a16:creationId xmlns:a16="http://schemas.microsoft.com/office/drawing/2014/main" id="{C9F7A40A-79DE-2872-E358-96E726BC3328}"/>
               </a:ext>
             </a:extLst>
           </p:cNvPr>
@@ -6689,7 +6689,7 @@
           <p:cNvPr id="6" name="正方形/長方形 5">
             <a:extLst>
               <a:ext uri="{FF2B5EF4-FFF2-40B4-BE49-F238E27FC236}">
-                <a16:creationId xmlns:a16="http://schemas.microsoft.com/office/drawing/2014/main" id="{B2C475E2-62C6-26C1-FD1F-BA9491A0BAAB}"/>
+                <a16:creationId xmlns:a16="http://schemas.microsoft.com/office/drawing/2014/main" id="{E558B0E6-5B75-9041-60FF-759724531CEE}"/>
               </a:ext>
             </a:extLst>
           </p:cNvPr>
@@ -6757,7 +6757,7 @@
           <p:cNvPr id="7" name="四角形: 角を丸くする 6">
             <a:extLst>
               <a:ext uri="{FF2B5EF4-FFF2-40B4-BE49-F238E27FC236}">
-                <a16:creationId xmlns:a16="http://schemas.microsoft.com/office/drawing/2014/main" id="{10E113DA-E63C-F371-14A2-F688FC715D50}"/>
+                <a16:creationId xmlns:a16="http://schemas.microsoft.com/office/drawing/2014/main" id="{FBBCB93B-30B5-B4B6-54B2-8AD18CA2646E}"/>
               </a:ext>
             </a:extLst>
           </p:cNvPr>
@@ -6827,7 +6827,7 @@
           <p:cNvPr id="8" name="テキスト ボックス 7">
             <a:extLst>
               <a:ext uri="{FF2B5EF4-FFF2-40B4-BE49-F238E27FC236}">
-                <a16:creationId xmlns:a16="http://schemas.microsoft.com/office/drawing/2014/main" id="{C9B954F5-586B-C788-3F7D-2D42176296A6}"/>
+                <a16:creationId xmlns:a16="http://schemas.microsoft.com/office/drawing/2014/main" id="{F24070E9-3F4F-5DFA-F5A5-9D24842F985F}"/>
               </a:ext>
             </a:extLst>
           </p:cNvPr>
@@ -6873,7 +6873,7 @@
           <p:cNvPr id="9" name="テキスト ボックス 8">
             <a:extLst>
               <a:ext uri="{FF2B5EF4-FFF2-40B4-BE49-F238E27FC236}">
-                <a16:creationId xmlns:a16="http://schemas.microsoft.com/office/drawing/2014/main" id="{0366A6A0-A7F9-4AD1-9FA9-44DDD2D37A77}"/>
+                <a16:creationId xmlns:a16="http://schemas.microsoft.com/office/drawing/2014/main" id="{512A1005-EAC0-C333-7F8B-5169C6128FC0}"/>
               </a:ext>
             </a:extLst>
           </p:cNvPr>
@@ -6919,7 +6919,7 @@
           <p:cNvPr id="10" name="テキスト ボックス 9">
             <a:extLst>
               <a:ext uri="{FF2B5EF4-FFF2-40B4-BE49-F238E27FC236}">
-                <a16:creationId xmlns:a16="http://schemas.microsoft.com/office/drawing/2014/main" id="{434649A4-F89A-F08E-9989-5F0AD42D9E64}"/>
+                <a16:creationId xmlns:a16="http://schemas.microsoft.com/office/drawing/2014/main" id="{8CBD5FF9-4B02-D904-C24E-004BA4F8D961}"/>
               </a:ext>
             </a:extLst>
           </p:cNvPr>
@@ -6972,7 +6972,7 @@
           <p:cNvPr id="11" name="表 10">
             <a:extLst>
               <a:ext uri="{FF2B5EF4-FFF2-40B4-BE49-F238E27FC236}">
-                <a16:creationId xmlns:a16="http://schemas.microsoft.com/office/drawing/2014/main" id="{E1B8B51E-52D9-80C6-F841-82E622C6FA7B}"/>
+                <a16:creationId xmlns:a16="http://schemas.microsoft.com/office/drawing/2014/main" id="{91EBA2C5-A344-5E94-29D4-757D5B14328D}"/>
               </a:ext>
             </a:extLst>
           </p:cNvPr>
@@ -6982,7 +6982,7 @@
           <p:nvPr>
             <p:extLst>
               <p:ext uri="{D42A27DB-BD31-4B8C-83A1-F6EECF244321}">
-                <p14:modId xmlns:p14="http://schemas.microsoft.com/office/powerpoint/2010/main" val="2296516513"/>
+                <p14:modId xmlns:p14="http://schemas.microsoft.com/office/powerpoint/2010/main" val="2353655457"/>
               </p:ext>
             </p:extLst>
           </p:nvPr>
@@ -7001,14 +7001,14 @@
                 <a:gridCol w="3200400">
                   <a:extLst>
                     <a:ext uri="{9D8B030D-6E8A-4147-A177-3AD203B41FA5}">
-                      <a16:colId xmlns:a16="http://schemas.microsoft.com/office/drawing/2014/main" val="1687808791"/>
+                      <a16:colId xmlns:a16="http://schemas.microsoft.com/office/drawing/2014/main" val="3726121323"/>
                     </a:ext>
                   </a:extLst>
                 </a:gridCol>
                 <a:gridCol w="7366000">
                   <a:extLst>
                     <a:ext uri="{9D8B030D-6E8A-4147-A177-3AD203B41FA5}">
-                      <a16:colId xmlns:a16="http://schemas.microsoft.com/office/drawing/2014/main" val="2957435060"/>
+                      <a16:colId xmlns:a16="http://schemas.microsoft.com/office/drawing/2014/main" val="323159532"/>
                     </a:ext>
                   </a:extLst>
                 </a:gridCol>
@@ -7082,7 +7082,7 @@
                 </a:tc>
                 <a:extLst>
                   <a:ext uri="{0D108BD9-81ED-4DB2-BD59-A6C34878D82A}">
-                    <a16:rowId xmlns:a16="http://schemas.microsoft.com/office/drawing/2014/main" val="4003140695"/>
+                    <a16:rowId xmlns:a16="http://schemas.microsoft.com/office/drawing/2014/main" val="3914354638"/>
                   </a:ext>
                 </a:extLst>
               </a:tr>
@@ -7185,7 +7185,7 @@
                 </a:tc>
                 <a:extLst>
                   <a:ext uri="{0D108BD9-81ED-4DB2-BD59-A6C34878D82A}">
-                    <a16:rowId xmlns:a16="http://schemas.microsoft.com/office/drawing/2014/main" val="4144446148"/>
+                    <a16:rowId xmlns:a16="http://schemas.microsoft.com/office/drawing/2014/main" val="2922334373"/>
                   </a:ext>
                 </a:extLst>
               </a:tr>
@@ -7308,7 +7308,7 @@
                 </a:tc>
                 <a:extLst>
                   <a:ext uri="{0D108BD9-81ED-4DB2-BD59-A6C34878D82A}">
-                    <a16:rowId xmlns:a16="http://schemas.microsoft.com/office/drawing/2014/main" val="4126293146"/>
+                    <a16:rowId xmlns:a16="http://schemas.microsoft.com/office/drawing/2014/main" val="932995714"/>
                   </a:ext>
                 </a:extLst>
               </a:tr>
@@ -7431,7 +7431,7 @@
                 </a:tc>
                 <a:extLst>
                   <a:ext uri="{0D108BD9-81ED-4DB2-BD59-A6C34878D82A}">
-                    <a16:rowId xmlns:a16="http://schemas.microsoft.com/office/drawing/2014/main" val="3086951298"/>
+                    <a16:rowId xmlns:a16="http://schemas.microsoft.com/office/drawing/2014/main" val="2903035437"/>
                   </a:ext>
                 </a:extLst>
               </a:tr>
@@ -7534,7 +7534,7 @@
                 </a:tc>
                 <a:extLst>
                   <a:ext uri="{0D108BD9-81ED-4DB2-BD59-A6C34878D82A}">
-                    <a16:rowId xmlns:a16="http://schemas.microsoft.com/office/drawing/2014/main" val="4117723501"/>
+                    <a16:rowId xmlns:a16="http://schemas.microsoft.com/office/drawing/2014/main" val="2596616657"/>
                   </a:ext>
                 </a:extLst>
               </a:tr>
@@ -7667,7 +7667,7 @@
                 </a:tc>
                 <a:extLst>
                   <a:ext uri="{0D108BD9-81ED-4DB2-BD59-A6C34878D82A}">
-                    <a16:rowId xmlns:a16="http://schemas.microsoft.com/office/drawing/2014/main" val="564865208"/>
+                    <a16:rowId xmlns:a16="http://schemas.microsoft.com/office/drawing/2014/main" val="966078577"/>
                   </a:ext>
                 </a:extLst>
               </a:tr>
@@ -7750,7 +7750,7 @@
                 </a:tc>
                 <a:extLst>
                   <a:ext uri="{0D108BD9-81ED-4DB2-BD59-A6C34878D82A}">
-                    <a16:rowId xmlns:a16="http://schemas.microsoft.com/office/drawing/2014/main" val="2740467869"/>
+                    <a16:rowId xmlns:a16="http://schemas.microsoft.com/office/drawing/2014/main" val="4091116856"/>
                   </a:ext>
                 </a:extLst>
               </a:tr>
@@ -7763,7 +7763,7 @@
           <p:cNvPr id="12" name="四角形: 角を丸くする 11">
             <a:extLst>
               <a:ext uri="{FF2B5EF4-FFF2-40B4-BE49-F238E27FC236}">
-                <a16:creationId xmlns:a16="http://schemas.microsoft.com/office/drawing/2014/main" id="{FF340E7A-320A-7DB4-D6DC-07CA41247011}"/>
+                <a16:creationId xmlns:a16="http://schemas.microsoft.com/office/drawing/2014/main" id="{3CCC02E8-5008-B9C0-04BB-E6FB81F987F9}"/>
               </a:ext>
             </a:extLst>
           </p:cNvPr>
@@ -7833,7 +7833,7 @@
           <p:cNvPr id="13" name="正方形/長方形 12">
             <a:extLst>
               <a:ext uri="{FF2B5EF4-FFF2-40B4-BE49-F238E27FC236}">
-                <a16:creationId xmlns:a16="http://schemas.microsoft.com/office/drawing/2014/main" id="{55608598-9FDA-9A19-44F7-F49FC8009CAF}"/>
+                <a16:creationId xmlns:a16="http://schemas.microsoft.com/office/drawing/2014/main" id="{54BD9EDC-69A2-8602-1B16-C0C4C7A90796}"/>
               </a:ext>
             </a:extLst>
           </p:cNvPr>
@@ -7901,7 +7901,7 @@
           <p:cNvPr id="14" name="テキスト ボックス 13">
             <a:extLst>
               <a:ext uri="{FF2B5EF4-FFF2-40B4-BE49-F238E27FC236}">
-                <a16:creationId xmlns:a16="http://schemas.microsoft.com/office/drawing/2014/main" id="{1C7DB01A-5444-758E-606D-DC2E4EA11EE3}"/>
+                <a16:creationId xmlns:a16="http://schemas.microsoft.com/office/drawing/2014/main" id="{3E2C3EFF-EAF5-761E-0D4C-D3038D8DC841}"/>
               </a:ext>
             </a:extLst>
           </p:cNvPr>
@@ -7947,7 +7947,7 @@
           <p:cNvPr id="15" name="テキスト ボックス 14">
             <a:extLst>
               <a:ext uri="{FF2B5EF4-FFF2-40B4-BE49-F238E27FC236}">
-                <a16:creationId xmlns:a16="http://schemas.microsoft.com/office/drawing/2014/main" id="{3943BB48-80B0-2CA0-DF78-79E987E541A8}"/>
+                <a16:creationId xmlns:a16="http://schemas.microsoft.com/office/drawing/2014/main" id="{A0C0B1A5-C3E5-3186-EACB-65979EDC543C}"/>
               </a:ext>
             </a:extLst>
           </p:cNvPr>
@@ -8121,7 +8121,7 @@
     </p:spTree>
     <p:extLst>
       <p:ext uri="{BB962C8B-B14F-4D97-AF65-F5344CB8AC3E}">
-        <p14:creationId xmlns:p14="http://schemas.microsoft.com/office/powerpoint/2010/main" val="4014140662"/>
+        <p14:creationId xmlns:p14="http://schemas.microsoft.com/office/powerpoint/2010/main" val="3908299107"/>
       </p:ext>
     </p:extLst>
   </p:cSld>
@@ -8153,7 +8153,7 @@
           <p:cNvPr id="2" name="正方形/長方形 1">
             <a:extLst>
               <a:ext uri="{FF2B5EF4-FFF2-40B4-BE49-F238E27FC236}">
-                <a16:creationId xmlns:a16="http://schemas.microsoft.com/office/drawing/2014/main" id="{F2E98CF9-16EA-0BC8-42F0-F0EA65702B5E}"/>
+                <a16:creationId xmlns:a16="http://schemas.microsoft.com/office/drawing/2014/main" id="{D1E787CB-31E6-0D81-68D8-98AB6AF42D70}"/>
               </a:ext>
             </a:extLst>
           </p:cNvPr>
@@ -8221,7 +8221,7 @@
           <p:cNvPr id="3" name="正方形/長方形 2">
             <a:extLst>
               <a:ext uri="{FF2B5EF4-FFF2-40B4-BE49-F238E27FC236}">
-                <a16:creationId xmlns:a16="http://schemas.microsoft.com/office/drawing/2014/main" id="{2ADF0D66-FD47-C4F4-95B0-D34444B01D71}"/>
+                <a16:creationId xmlns:a16="http://schemas.microsoft.com/office/drawing/2014/main" id="{A5FB2ABE-50B8-3B51-74D8-B7ACE88B18BB}"/>
               </a:ext>
             </a:extLst>
           </p:cNvPr>
@@ -8289,7 +8289,7 @@
           <p:cNvPr id="4" name="テキスト ボックス 3">
             <a:extLst>
               <a:ext uri="{FF2B5EF4-FFF2-40B4-BE49-F238E27FC236}">
-                <a16:creationId xmlns:a16="http://schemas.microsoft.com/office/drawing/2014/main" id="{E1F3FB7F-4718-81D7-BA4D-2EB05B6644D6}"/>
+                <a16:creationId xmlns:a16="http://schemas.microsoft.com/office/drawing/2014/main" id="{5AC3409A-8969-A6B1-FB1C-1827017A1EB7}"/>
               </a:ext>
             </a:extLst>
           </p:cNvPr>
@@ -8342,7 +8342,7 @@
           <p:cNvPr id="5" name="テキスト ボックス 4">
             <a:extLst>
               <a:ext uri="{FF2B5EF4-FFF2-40B4-BE49-F238E27FC236}">
-                <a16:creationId xmlns:a16="http://schemas.microsoft.com/office/drawing/2014/main" id="{F4496143-695E-AFA9-AAD6-A3BC009597AC}"/>
+                <a16:creationId xmlns:a16="http://schemas.microsoft.com/office/drawing/2014/main" id="{2EE3B702-5382-90AC-D5C4-BA3902037552}"/>
               </a:ext>
             </a:extLst>
           </p:cNvPr>
@@ -8388,7 +8388,7 @@
           <p:cNvPr id="6" name="正方形/長方形 5">
             <a:extLst>
               <a:ext uri="{FF2B5EF4-FFF2-40B4-BE49-F238E27FC236}">
-                <a16:creationId xmlns:a16="http://schemas.microsoft.com/office/drawing/2014/main" id="{F5F698C0-85CF-8816-A02A-96A46C2CA314}"/>
+                <a16:creationId xmlns:a16="http://schemas.microsoft.com/office/drawing/2014/main" id="{F8670BC3-8A6A-E802-550A-6CDAB7C8C322}"/>
               </a:ext>
             </a:extLst>
           </p:cNvPr>
@@ -8456,7 +8456,7 @@
           <p:cNvPr id="7" name="四角形: 角を丸くする 6">
             <a:extLst>
               <a:ext uri="{FF2B5EF4-FFF2-40B4-BE49-F238E27FC236}">
-                <a16:creationId xmlns:a16="http://schemas.microsoft.com/office/drawing/2014/main" id="{5AFC7D16-B7B3-8600-8597-614F5F38EB3D}"/>
+                <a16:creationId xmlns:a16="http://schemas.microsoft.com/office/drawing/2014/main" id="{909087E2-B00B-4AAA-4D6E-7AE60C002523}"/>
               </a:ext>
             </a:extLst>
           </p:cNvPr>
@@ -8526,7 +8526,7 @@
           <p:cNvPr id="8" name="テキスト ボックス 7">
             <a:extLst>
               <a:ext uri="{FF2B5EF4-FFF2-40B4-BE49-F238E27FC236}">
-                <a16:creationId xmlns:a16="http://schemas.microsoft.com/office/drawing/2014/main" id="{0F7F33B7-424E-CE7B-B505-E468B313A30E}"/>
+                <a16:creationId xmlns:a16="http://schemas.microsoft.com/office/drawing/2014/main" id="{9BC1B412-A593-DFEA-2865-494CF73F742D}"/>
               </a:ext>
             </a:extLst>
           </p:cNvPr>
@@ -8572,7 +8572,7 @@
           <p:cNvPr id="9" name="テキスト ボックス 8">
             <a:extLst>
               <a:ext uri="{FF2B5EF4-FFF2-40B4-BE49-F238E27FC236}">
-                <a16:creationId xmlns:a16="http://schemas.microsoft.com/office/drawing/2014/main" id="{59E19EAF-B500-EB85-349A-C37B9E5B8D95}"/>
+                <a16:creationId xmlns:a16="http://schemas.microsoft.com/office/drawing/2014/main" id="{8E2D9EB5-2981-3033-4FD8-909D022D0940}"/>
               </a:ext>
             </a:extLst>
           </p:cNvPr>
@@ -8618,7 +8618,7 @@
           <p:cNvPr id="10" name="テキスト ボックス 9">
             <a:extLst>
               <a:ext uri="{FF2B5EF4-FFF2-40B4-BE49-F238E27FC236}">
-                <a16:creationId xmlns:a16="http://schemas.microsoft.com/office/drawing/2014/main" id="{8B77E85F-9773-6E34-28DD-D012E51D2608}"/>
+                <a16:creationId xmlns:a16="http://schemas.microsoft.com/office/drawing/2014/main" id="{EBD0E3CB-CD25-19DE-48A6-A80899AC12B8}"/>
               </a:ext>
             </a:extLst>
           </p:cNvPr>
@@ -8671,7 +8671,7 @@
           <p:cNvPr id="11" name="四角形: 角を丸くする 10">
             <a:extLst>
               <a:ext uri="{FF2B5EF4-FFF2-40B4-BE49-F238E27FC236}">
-                <a16:creationId xmlns:a16="http://schemas.microsoft.com/office/drawing/2014/main" id="{7F986AB4-381A-7A4D-F16D-AF2712E8D668}"/>
+                <a16:creationId xmlns:a16="http://schemas.microsoft.com/office/drawing/2014/main" id="{6C3ED693-AC23-AFB7-F3A9-E76F6649F376}"/>
               </a:ext>
             </a:extLst>
           </p:cNvPr>
@@ -8727,7 +8727,7 @@
           <p:cNvPr id="12" name="四角形: 角を丸くする 11">
             <a:extLst>
               <a:ext uri="{FF2B5EF4-FFF2-40B4-BE49-F238E27FC236}">
-                <a16:creationId xmlns:a16="http://schemas.microsoft.com/office/drawing/2014/main" id="{A5ADDD14-F1AC-3329-CE84-7E0C75123D0D}"/>
+                <a16:creationId xmlns:a16="http://schemas.microsoft.com/office/drawing/2014/main" id="{39044CD9-828F-7E8A-2CA4-C2247390FCCE}"/>
               </a:ext>
             </a:extLst>
           </p:cNvPr>
@@ -8797,7 +8797,7 @@
           <p:cNvPr id="13" name="テキスト ボックス 12">
             <a:extLst>
               <a:ext uri="{FF2B5EF4-FFF2-40B4-BE49-F238E27FC236}">
-                <a16:creationId xmlns:a16="http://schemas.microsoft.com/office/drawing/2014/main" id="{9E7606C6-D228-BA17-6DBA-0617DCE0F63F}"/>
+                <a16:creationId xmlns:a16="http://schemas.microsoft.com/office/drawing/2014/main" id="{CAB12D88-60E6-FFD0-90C1-4ACE6A2F04A0}"/>
               </a:ext>
             </a:extLst>
           </p:cNvPr>
@@ -8850,7 +8850,7 @@
           <p:cNvPr id="14" name="テキスト ボックス 13">
             <a:extLst>
               <a:ext uri="{FF2B5EF4-FFF2-40B4-BE49-F238E27FC236}">
-                <a16:creationId xmlns:a16="http://schemas.microsoft.com/office/drawing/2014/main" id="{A25ADFFE-2594-48E7-9995-3A550065343B}"/>
+                <a16:creationId xmlns:a16="http://schemas.microsoft.com/office/drawing/2014/main" id="{B8F56DFC-A89B-BAA7-B9E3-DDF48184F0CD}"/>
               </a:ext>
             </a:extLst>
           </p:cNvPr>
@@ -8916,7 +8916,7 @@
           <p:cNvPr id="15" name="テキスト ボックス 14">
             <a:extLst>
               <a:ext uri="{FF2B5EF4-FFF2-40B4-BE49-F238E27FC236}">
-                <a16:creationId xmlns:a16="http://schemas.microsoft.com/office/drawing/2014/main" id="{D4F28801-2195-B741-0411-9803658542EC}"/>
+                <a16:creationId xmlns:a16="http://schemas.microsoft.com/office/drawing/2014/main" id="{A3599E82-30B9-42F3-D76A-D7367FE80B2E}"/>
               </a:ext>
             </a:extLst>
           </p:cNvPr>
@@ -9045,7 +9045,7 @@
           <p:cNvPr id="16" name="四角形: 角を丸くする 15">
             <a:extLst>
               <a:ext uri="{FF2B5EF4-FFF2-40B4-BE49-F238E27FC236}">
-                <a16:creationId xmlns:a16="http://schemas.microsoft.com/office/drawing/2014/main" id="{94D347C7-C23D-0277-0FDA-E5A99AB9BEC1}"/>
+                <a16:creationId xmlns:a16="http://schemas.microsoft.com/office/drawing/2014/main" id="{8B2F9673-8EAD-68FE-938D-1CC178B8DBEC}"/>
               </a:ext>
             </a:extLst>
           </p:cNvPr>
@@ -9101,7 +9101,7 @@
           <p:cNvPr id="17" name="四角形: 角を丸くする 16">
             <a:extLst>
               <a:ext uri="{FF2B5EF4-FFF2-40B4-BE49-F238E27FC236}">
-                <a16:creationId xmlns:a16="http://schemas.microsoft.com/office/drawing/2014/main" id="{68BB3660-9790-1FEB-AB95-57B03158D5D7}"/>
+                <a16:creationId xmlns:a16="http://schemas.microsoft.com/office/drawing/2014/main" id="{2A582FFA-53FD-4CB2-BD34-F7E7679C3553}"/>
               </a:ext>
             </a:extLst>
           </p:cNvPr>
@@ -9171,7 +9171,7 @@
           <p:cNvPr id="18" name="テキスト ボックス 17">
             <a:extLst>
               <a:ext uri="{FF2B5EF4-FFF2-40B4-BE49-F238E27FC236}">
-                <a16:creationId xmlns:a16="http://schemas.microsoft.com/office/drawing/2014/main" id="{B13C6308-7832-679E-3B8D-BB6784164317}"/>
+                <a16:creationId xmlns:a16="http://schemas.microsoft.com/office/drawing/2014/main" id="{9B0C9890-3193-87B9-F0E5-F8A9F0F5C220}"/>
               </a:ext>
             </a:extLst>
           </p:cNvPr>
@@ -9224,7 +9224,7 @@
           <p:cNvPr id="19" name="テキスト ボックス 18">
             <a:extLst>
               <a:ext uri="{FF2B5EF4-FFF2-40B4-BE49-F238E27FC236}">
-                <a16:creationId xmlns:a16="http://schemas.microsoft.com/office/drawing/2014/main" id="{F8D09689-D032-3365-9274-0886DF847C78}"/>
+                <a16:creationId xmlns:a16="http://schemas.microsoft.com/office/drawing/2014/main" id="{C8731A13-B041-7715-4B76-DA723BD9EA5D}"/>
               </a:ext>
             </a:extLst>
           </p:cNvPr>
@@ -9270,7 +9270,7 @@
           <p:cNvPr id="20" name="テキスト ボックス 19">
             <a:extLst>
               <a:ext uri="{FF2B5EF4-FFF2-40B4-BE49-F238E27FC236}">
-                <a16:creationId xmlns:a16="http://schemas.microsoft.com/office/drawing/2014/main" id="{50DAFEF3-E223-2D62-FA48-464D7119C1A4}"/>
+                <a16:creationId xmlns:a16="http://schemas.microsoft.com/office/drawing/2014/main" id="{E35A5B51-73E5-7F30-F320-5598B7A4F366}"/>
               </a:ext>
             </a:extLst>
           </p:cNvPr>
@@ -9429,7 +9429,7 @@
           <p:cNvPr id="21" name="四角形: 角を丸くする 20">
             <a:extLst>
               <a:ext uri="{FF2B5EF4-FFF2-40B4-BE49-F238E27FC236}">
-                <a16:creationId xmlns:a16="http://schemas.microsoft.com/office/drawing/2014/main" id="{BEAD0D28-1ED1-AE00-5B47-AEDE5E526788}"/>
+                <a16:creationId xmlns:a16="http://schemas.microsoft.com/office/drawing/2014/main" id="{8468CE74-F9F1-8CB5-6497-E37824B3B3E7}"/>
               </a:ext>
             </a:extLst>
           </p:cNvPr>
@@ -9499,7 +9499,7 @@
           <p:cNvPr id="22" name="正方形/長方形 21">
             <a:extLst>
               <a:ext uri="{FF2B5EF4-FFF2-40B4-BE49-F238E27FC236}">
-                <a16:creationId xmlns:a16="http://schemas.microsoft.com/office/drawing/2014/main" id="{2911DE79-B47C-C33B-E223-D21B7F62490F}"/>
+                <a16:creationId xmlns:a16="http://schemas.microsoft.com/office/drawing/2014/main" id="{470297C9-DB62-E6AF-9060-C2439DD24EF2}"/>
               </a:ext>
             </a:extLst>
           </p:cNvPr>
@@ -9567,7 +9567,7 @@
           <p:cNvPr id="23" name="テキスト ボックス 22">
             <a:extLst>
               <a:ext uri="{FF2B5EF4-FFF2-40B4-BE49-F238E27FC236}">
-                <a16:creationId xmlns:a16="http://schemas.microsoft.com/office/drawing/2014/main" id="{A3804103-D263-F385-58BB-65D3BE704B46}"/>
+                <a16:creationId xmlns:a16="http://schemas.microsoft.com/office/drawing/2014/main" id="{BD5E880A-C69C-2661-DD16-DB4EA9DBC684}"/>
               </a:ext>
             </a:extLst>
           </p:cNvPr>
@@ -9613,7 +9613,7 @@
           <p:cNvPr id="24" name="テキスト ボックス 23">
             <a:extLst>
               <a:ext uri="{FF2B5EF4-FFF2-40B4-BE49-F238E27FC236}">
-                <a16:creationId xmlns:a16="http://schemas.microsoft.com/office/drawing/2014/main" id="{DD31D798-9383-35A0-B8FE-8179E9446049}"/>
+                <a16:creationId xmlns:a16="http://schemas.microsoft.com/office/drawing/2014/main" id="{6D9D47EF-906C-5346-FE75-AEAB986CAB36}"/>
               </a:ext>
             </a:extLst>
           </p:cNvPr>
@@ -9677,7 +9677,7 @@
     </p:spTree>
     <p:extLst>
       <p:ext uri="{BB962C8B-B14F-4D97-AF65-F5344CB8AC3E}">
-        <p14:creationId xmlns:p14="http://schemas.microsoft.com/office/powerpoint/2010/main" val="2397993073"/>
+        <p14:creationId xmlns:p14="http://schemas.microsoft.com/office/powerpoint/2010/main" val="104515879"/>
       </p:ext>
     </p:extLst>
   </p:cSld>
@@ -9709,7 +9709,7 @@
           <p:cNvPr id="2" name="正方形/長方形 1">
             <a:extLst>
               <a:ext uri="{FF2B5EF4-FFF2-40B4-BE49-F238E27FC236}">
-                <a16:creationId xmlns:a16="http://schemas.microsoft.com/office/drawing/2014/main" id="{AF59CB17-F46A-6621-3FFF-266DCBAD6E9B}"/>
+                <a16:creationId xmlns:a16="http://schemas.microsoft.com/office/drawing/2014/main" id="{68826942-8818-DA2E-E135-1401B5DF42D0}"/>
               </a:ext>
             </a:extLst>
           </p:cNvPr>
@@ -9777,7 +9777,7 @@
           <p:cNvPr id="3" name="正方形/長方形 2">
             <a:extLst>
               <a:ext uri="{FF2B5EF4-FFF2-40B4-BE49-F238E27FC236}">
-                <a16:creationId xmlns:a16="http://schemas.microsoft.com/office/drawing/2014/main" id="{D17F7D0D-9989-FD37-9D90-730533E119BF}"/>
+                <a16:creationId xmlns:a16="http://schemas.microsoft.com/office/drawing/2014/main" id="{884CFB2C-53AB-42C9-1A40-A6C1B58BDF73}"/>
               </a:ext>
             </a:extLst>
           </p:cNvPr>
@@ -9845,7 +9845,7 @@
           <p:cNvPr id="4" name="テキスト ボックス 3">
             <a:extLst>
               <a:ext uri="{FF2B5EF4-FFF2-40B4-BE49-F238E27FC236}">
-                <a16:creationId xmlns:a16="http://schemas.microsoft.com/office/drawing/2014/main" id="{66198D34-6CBE-71A4-EC83-729DAB2617C4}"/>
+                <a16:creationId xmlns:a16="http://schemas.microsoft.com/office/drawing/2014/main" id="{FC49774B-29C1-E9D5-853E-CB1F314AF8C9}"/>
               </a:ext>
             </a:extLst>
           </p:cNvPr>
@@ -9898,7 +9898,7 @@
           <p:cNvPr id="5" name="テキスト ボックス 4">
             <a:extLst>
               <a:ext uri="{FF2B5EF4-FFF2-40B4-BE49-F238E27FC236}">
-                <a16:creationId xmlns:a16="http://schemas.microsoft.com/office/drawing/2014/main" id="{8833AACB-E496-1574-B4F5-85DE2B653EC3}"/>
+                <a16:creationId xmlns:a16="http://schemas.microsoft.com/office/drawing/2014/main" id="{5AFAE383-4434-8697-BD3E-3585ECBE2AFA}"/>
               </a:ext>
             </a:extLst>
           </p:cNvPr>
@@ -9944,7 +9944,7 @@
           <p:cNvPr id="6" name="正方形/長方形 5">
             <a:extLst>
               <a:ext uri="{FF2B5EF4-FFF2-40B4-BE49-F238E27FC236}">
-                <a16:creationId xmlns:a16="http://schemas.microsoft.com/office/drawing/2014/main" id="{EC673787-F872-C7C4-90AF-FC6BD4CB9D03}"/>
+                <a16:creationId xmlns:a16="http://schemas.microsoft.com/office/drawing/2014/main" id="{239E1E1E-DF7A-756B-A1A0-8B99EB7777E7}"/>
               </a:ext>
             </a:extLst>
           </p:cNvPr>
@@ -10012,7 +10012,7 @@
           <p:cNvPr id="7" name="四角形: 角を丸くする 6">
             <a:extLst>
               <a:ext uri="{FF2B5EF4-FFF2-40B4-BE49-F238E27FC236}">
-                <a16:creationId xmlns:a16="http://schemas.microsoft.com/office/drawing/2014/main" id="{94EFC4B3-881A-5769-0B0A-B704B6578082}"/>
+                <a16:creationId xmlns:a16="http://schemas.microsoft.com/office/drawing/2014/main" id="{BF014161-3FDD-E8A2-43FF-DED3632DDF29}"/>
               </a:ext>
             </a:extLst>
           </p:cNvPr>
@@ -10082,7 +10082,7 @@
           <p:cNvPr id="8" name="テキスト ボックス 7">
             <a:extLst>
               <a:ext uri="{FF2B5EF4-FFF2-40B4-BE49-F238E27FC236}">
-                <a16:creationId xmlns:a16="http://schemas.microsoft.com/office/drawing/2014/main" id="{D78C46D5-224A-528C-6DBE-B50E1401AB71}"/>
+                <a16:creationId xmlns:a16="http://schemas.microsoft.com/office/drawing/2014/main" id="{E3E48177-CC1A-9392-DB98-7129F13E161A}"/>
               </a:ext>
             </a:extLst>
           </p:cNvPr>
@@ -10128,7 +10128,7 @@
           <p:cNvPr id="9" name="テキスト ボックス 8">
             <a:extLst>
               <a:ext uri="{FF2B5EF4-FFF2-40B4-BE49-F238E27FC236}">
-                <a16:creationId xmlns:a16="http://schemas.microsoft.com/office/drawing/2014/main" id="{FEDDEFF5-F42A-8909-E023-2E54074C65D6}"/>
+                <a16:creationId xmlns:a16="http://schemas.microsoft.com/office/drawing/2014/main" id="{7F3C1BF7-6CAD-E4B3-A2E3-183E7754062F}"/>
               </a:ext>
             </a:extLst>
           </p:cNvPr>
@@ -10174,7 +10174,7 @@
           <p:cNvPr id="10" name="テキスト ボックス 9">
             <a:extLst>
               <a:ext uri="{FF2B5EF4-FFF2-40B4-BE49-F238E27FC236}">
-                <a16:creationId xmlns:a16="http://schemas.microsoft.com/office/drawing/2014/main" id="{CE5A039D-CF06-7624-E65D-3CE28E62D108}"/>
+                <a16:creationId xmlns:a16="http://schemas.microsoft.com/office/drawing/2014/main" id="{5BD3D417-D36B-26C8-6D9A-ABFBA38DCE5A}"/>
               </a:ext>
             </a:extLst>
           </p:cNvPr>
@@ -10227,7 +10227,7 @@
           <p:cNvPr id="11" name="テキスト ボックス 10">
             <a:extLst>
               <a:ext uri="{FF2B5EF4-FFF2-40B4-BE49-F238E27FC236}">
-                <a16:creationId xmlns:a16="http://schemas.microsoft.com/office/drawing/2014/main" id="{86E7E0EA-DEA0-2AC9-D4BE-34BF051A1686}"/>
+                <a16:creationId xmlns:a16="http://schemas.microsoft.com/office/drawing/2014/main" id="{0D566E2F-7082-3FC9-AF0B-3D9876069645}"/>
               </a:ext>
             </a:extLst>
           </p:cNvPr>
@@ -10293,7 +10293,7 @@
           <p:cNvPr id="12" name="正方形/長方形 11">
             <a:extLst>
               <a:ext uri="{FF2B5EF4-FFF2-40B4-BE49-F238E27FC236}">
-                <a16:creationId xmlns:a16="http://schemas.microsoft.com/office/drawing/2014/main" id="{E76BD27B-741F-054D-A603-BC06A05630C9}"/>
+                <a16:creationId xmlns:a16="http://schemas.microsoft.com/office/drawing/2014/main" id="{20ADF375-6843-A51D-6B3A-E589A8D715BE}"/>
               </a:ext>
             </a:extLst>
           </p:cNvPr>
@@ -10361,7 +10361,7 @@
           <p:cNvPr id="13" name="テキスト ボックス 12">
             <a:extLst>
               <a:ext uri="{FF2B5EF4-FFF2-40B4-BE49-F238E27FC236}">
-                <a16:creationId xmlns:a16="http://schemas.microsoft.com/office/drawing/2014/main" id="{E1B6C2B8-3F6D-FAD9-18F5-4442FAE3FD30}"/>
+                <a16:creationId xmlns:a16="http://schemas.microsoft.com/office/drawing/2014/main" id="{02957497-3396-BA9C-4170-3C7A58EDC54B}"/>
               </a:ext>
             </a:extLst>
           </p:cNvPr>
@@ -10414,7 +10414,7 @@
           <p:cNvPr id="14" name="楕円 13">
             <a:extLst>
               <a:ext uri="{FF2B5EF4-FFF2-40B4-BE49-F238E27FC236}">
-                <a16:creationId xmlns:a16="http://schemas.microsoft.com/office/drawing/2014/main" id="{263F1067-2CEF-1711-42E1-342BA90B80EF}"/>
+                <a16:creationId xmlns:a16="http://schemas.microsoft.com/office/drawing/2014/main" id="{857ABE6C-0959-149C-3955-91A749C085A6}"/>
               </a:ext>
             </a:extLst>
           </p:cNvPr>
@@ -10468,7 +10468,7 @@
           <p:cNvPr id="15" name="四角形: 角を丸くする 14">
             <a:extLst>
               <a:ext uri="{FF2B5EF4-FFF2-40B4-BE49-F238E27FC236}">
-                <a16:creationId xmlns:a16="http://schemas.microsoft.com/office/drawing/2014/main" id="{28D2C2E2-048A-3FD8-0C08-7EBDCB644F46}"/>
+                <a16:creationId xmlns:a16="http://schemas.microsoft.com/office/drawing/2014/main" id="{81AC91A7-15FD-905C-C78D-3CC33F336E6D}"/>
               </a:ext>
             </a:extLst>
           </p:cNvPr>
@@ -10538,7 +10538,7 @@
           <p:cNvPr id="16" name="テキスト ボックス 15">
             <a:extLst>
               <a:ext uri="{FF2B5EF4-FFF2-40B4-BE49-F238E27FC236}">
-                <a16:creationId xmlns:a16="http://schemas.microsoft.com/office/drawing/2014/main" id="{348127F7-00A6-EC8C-A90E-BF2D7AF72DC5}"/>
+                <a16:creationId xmlns:a16="http://schemas.microsoft.com/office/drawing/2014/main" id="{0C114068-732B-63BC-AD3D-F145B12EAC07}"/>
               </a:ext>
             </a:extLst>
           </p:cNvPr>
@@ -10584,7 +10584,7 @@
           <p:cNvPr id="17" name="テキスト ボックス 16">
             <a:extLst>
               <a:ext uri="{FF2B5EF4-FFF2-40B4-BE49-F238E27FC236}">
-                <a16:creationId xmlns:a16="http://schemas.microsoft.com/office/drawing/2014/main" id="{87DA4FFC-F439-CF14-2811-916EC3EE8B5B}"/>
+                <a16:creationId xmlns:a16="http://schemas.microsoft.com/office/drawing/2014/main" id="{FE195D56-3FAE-5F64-FBE6-E48F58772194}"/>
               </a:ext>
             </a:extLst>
           </p:cNvPr>
@@ -10630,7 +10630,7 @@
           <p:cNvPr id="18" name="テキスト ボックス 17">
             <a:extLst>
               <a:ext uri="{FF2B5EF4-FFF2-40B4-BE49-F238E27FC236}">
-                <a16:creationId xmlns:a16="http://schemas.microsoft.com/office/drawing/2014/main" id="{B08DF60F-B3C8-DA4F-21D8-06D542C75EAC}"/>
+                <a16:creationId xmlns:a16="http://schemas.microsoft.com/office/drawing/2014/main" id="{7E1B1F42-0248-7E0D-FB14-2A5CBBA9BC5D}"/>
               </a:ext>
             </a:extLst>
           </p:cNvPr>
@@ -10683,7 +10683,7 @@
           <p:cNvPr id="19" name="楕円 18">
             <a:extLst>
               <a:ext uri="{FF2B5EF4-FFF2-40B4-BE49-F238E27FC236}">
-                <a16:creationId xmlns:a16="http://schemas.microsoft.com/office/drawing/2014/main" id="{BEDA5F76-28F8-F857-6840-C936C4BF5FCF}"/>
+                <a16:creationId xmlns:a16="http://schemas.microsoft.com/office/drawing/2014/main" id="{850A5719-81A6-B95D-9D4A-D63699013D73}"/>
               </a:ext>
             </a:extLst>
           </p:cNvPr>
@@ -10737,7 +10737,7 @@
           <p:cNvPr id="20" name="四角形: 角を丸くする 19">
             <a:extLst>
               <a:ext uri="{FF2B5EF4-FFF2-40B4-BE49-F238E27FC236}">
-                <a16:creationId xmlns:a16="http://schemas.microsoft.com/office/drawing/2014/main" id="{6BA62396-FBA4-D992-F8AE-43062644F83B}"/>
+                <a16:creationId xmlns:a16="http://schemas.microsoft.com/office/drawing/2014/main" id="{1D63765A-0FE7-976E-9E4D-43C4925A58E0}"/>
               </a:ext>
             </a:extLst>
           </p:cNvPr>
@@ -10807,7 +10807,7 @@
           <p:cNvPr id="21" name="テキスト ボックス 20">
             <a:extLst>
               <a:ext uri="{FF2B5EF4-FFF2-40B4-BE49-F238E27FC236}">
-                <a16:creationId xmlns:a16="http://schemas.microsoft.com/office/drawing/2014/main" id="{73A2F3CB-E5A4-6908-9B19-55BED0AB35E5}"/>
+                <a16:creationId xmlns:a16="http://schemas.microsoft.com/office/drawing/2014/main" id="{AB77903F-3D53-93B4-AB13-A38C4FCE7CBF}"/>
               </a:ext>
             </a:extLst>
           </p:cNvPr>
@@ -10863,7 +10863,7 @@
           <p:cNvPr id="22" name="テキスト ボックス 21">
             <a:extLst>
               <a:ext uri="{FF2B5EF4-FFF2-40B4-BE49-F238E27FC236}">
-                <a16:creationId xmlns:a16="http://schemas.microsoft.com/office/drawing/2014/main" id="{68A4E375-807D-4C38-5E47-3B8294A8C0AD}"/>
+                <a16:creationId xmlns:a16="http://schemas.microsoft.com/office/drawing/2014/main" id="{596C807F-8A94-B28B-7917-884263BE5C1D}"/>
               </a:ext>
             </a:extLst>
           </p:cNvPr>
@@ -10909,7 +10909,7 @@
           <p:cNvPr id="23" name="テキスト ボックス 22">
             <a:extLst>
               <a:ext uri="{FF2B5EF4-FFF2-40B4-BE49-F238E27FC236}">
-                <a16:creationId xmlns:a16="http://schemas.microsoft.com/office/drawing/2014/main" id="{2CC14799-185A-70EB-A4DB-A7FFB20FCA2E}"/>
+                <a16:creationId xmlns:a16="http://schemas.microsoft.com/office/drawing/2014/main" id="{A11B598E-493F-4076-F5C2-36ECA1B1A123}"/>
               </a:ext>
             </a:extLst>
           </p:cNvPr>
@@ -10955,7 +10955,7 @@
           <p:cNvPr id="24" name="楕円 23">
             <a:extLst>
               <a:ext uri="{FF2B5EF4-FFF2-40B4-BE49-F238E27FC236}">
-                <a16:creationId xmlns:a16="http://schemas.microsoft.com/office/drawing/2014/main" id="{F1383F67-56B0-85F7-D5CC-6677BC7D6694}"/>
+                <a16:creationId xmlns:a16="http://schemas.microsoft.com/office/drawing/2014/main" id="{41A9F633-F289-BB5A-AF9B-D565B8A12E2D}"/>
               </a:ext>
             </a:extLst>
           </p:cNvPr>
@@ -11009,7 +11009,7 @@
           <p:cNvPr id="25" name="四角形: 角を丸くする 24">
             <a:extLst>
               <a:ext uri="{FF2B5EF4-FFF2-40B4-BE49-F238E27FC236}">
-                <a16:creationId xmlns:a16="http://schemas.microsoft.com/office/drawing/2014/main" id="{3A2D0BE5-7373-CE4F-1B4D-5441C3D6EF51}"/>
+                <a16:creationId xmlns:a16="http://schemas.microsoft.com/office/drawing/2014/main" id="{60744497-DCEA-C5DD-EEBE-DE1B107C638E}"/>
               </a:ext>
             </a:extLst>
           </p:cNvPr>
@@ -11079,7 +11079,7 @@
           <p:cNvPr id="26" name="テキスト ボックス 25">
             <a:extLst>
               <a:ext uri="{FF2B5EF4-FFF2-40B4-BE49-F238E27FC236}">
-                <a16:creationId xmlns:a16="http://schemas.microsoft.com/office/drawing/2014/main" id="{5ABB7310-6EBD-C9A5-2D0B-FC40AC3B9B48}"/>
+                <a16:creationId xmlns:a16="http://schemas.microsoft.com/office/drawing/2014/main" id="{FC9E7BC4-0363-FDC5-D8DB-EA75DDAABEBC}"/>
               </a:ext>
             </a:extLst>
           </p:cNvPr>
@@ -11135,7 +11135,7 @@
           <p:cNvPr id="27" name="テキスト ボックス 26">
             <a:extLst>
               <a:ext uri="{FF2B5EF4-FFF2-40B4-BE49-F238E27FC236}">
-                <a16:creationId xmlns:a16="http://schemas.microsoft.com/office/drawing/2014/main" id="{F108DFBC-84DA-CD24-FC8D-1D25DA27335B}"/>
+                <a16:creationId xmlns:a16="http://schemas.microsoft.com/office/drawing/2014/main" id="{A3A56C19-ADB1-478E-6C49-3875FE1D83A3}"/>
               </a:ext>
             </a:extLst>
           </p:cNvPr>
@@ -11181,7 +11181,7 @@
           <p:cNvPr id="28" name="テキスト ボックス 27">
             <a:extLst>
               <a:ext uri="{FF2B5EF4-FFF2-40B4-BE49-F238E27FC236}">
-                <a16:creationId xmlns:a16="http://schemas.microsoft.com/office/drawing/2014/main" id="{885F6CD9-A5E3-9AAA-D521-3DB63DAA0079}"/>
+                <a16:creationId xmlns:a16="http://schemas.microsoft.com/office/drawing/2014/main" id="{1013041F-912E-503D-142E-58DCC25F5FE1}"/>
               </a:ext>
             </a:extLst>
           </p:cNvPr>
@@ -11227,7 +11227,7 @@
           <p:cNvPr id="29" name="楕円 28">
             <a:extLst>
               <a:ext uri="{FF2B5EF4-FFF2-40B4-BE49-F238E27FC236}">
-                <a16:creationId xmlns:a16="http://schemas.microsoft.com/office/drawing/2014/main" id="{F926F4AA-DE0F-A3A6-0619-B105990E1E2D}"/>
+                <a16:creationId xmlns:a16="http://schemas.microsoft.com/office/drawing/2014/main" id="{2928CF10-6C63-7028-FBA4-4D49A287458F}"/>
               </a:ext>
             </a:extLst>
           </p:cNvPr>
@@ -11281,7 +11281,7 @@
           <p:cNvPr id="30" name="四角形: 角を丸くする 29">
             <a:extLst>
               <a:ext uri="{FF2B5EF4-FFF2-40B4-BE49-F238E27FC236}">
-                <a16:creationId xmlns:a16="http://schemas.microsoft.com/office/drawing/2014/main" id="{C0A5FC56-B507-6383-0EE3-1BF0C29F1922}"/>
+                <a16:creationId xmlns:a16="http://schemas.microsoft.com/office/drawing/2014/main" id="{A6ABBFDD-06AC-5AEF-4046-670981036811}"/>
               </a:ext>
             </a:extLst>
           </p:cNvPr>
@@ -11351,7 +11351,7 @@
           <p:cNvPr id="31" name="テキスト ボックス 30">
             <a:extLst>
               <a:ext uri="{FF2B5EF4-FFF2-40B4-BE49-F238E27FC236}">
-                <a16:creationId xmlns:a16="http://schemas.microsoft.com/office/drawing/2014/main" id="{9FED3D6D-8B96-A215-762B-741D12940CA7}"/>
+                <a16:creationId xmlns:a16="http://schemas.microsoft.com/office/drawing/2014/main" id="{EB47A98F-7B82-4C5D-D7C0-DEAFE9D801F6}"/>
               </a:ext>
             </a:extLst>
           </p:cNvPr>
@@ -11397,7 +11397,7 @@
           <p:cNvPr id="32" name="テキスト ボックス 31">
             <a:extLst>
               <a:ext uri="{FF2B5EF4-FFF2-40B4-BE49-F238E27FC236}">
-                <a16:creationId xmlns:a16="http://schemas.microsoft.com/office/drawing/2014/main" id="{C2A18AC2-F012-D116-9410-29D5D7FB1582}"/>
+                <a16:creationId xmlns:a16="http://schemas.microsoft.com/office/drawing/2014/main" id="{6A9586AE-BAAD-D213-5319-35157CA1A4E7}"/>
               </a:ext>
             </a:extLst>
           </p:cNvPr>
@@ -11473,7 +11473,7 @@
           <p:cNvPr id="33" name="四角形: 角を丸くする 32">
             <a:extLst>
               <a:ext uri="{FF2B5EF4-FFF2-40B4-BE49-F238E27FC236}">
-                <a16:creationId xmlns:a16="http://schemas.microsoft.com/office/drawing/2014/main" id="{F0A4B9ED-E130-9D21-22ED-E9048CD7D6C8}"/>
+                <a16:creationId xmlns:a16="http://schemas.microsoft.com/office/drawing/2014/main" id="{97960EF2-4A7F-2EE3-4030-5C9CCD8BDB60}"/>
               </a:ext>
             </a:extLst>
           </p:cNvPr>
@@ -11543,7 +11543,7 @@
           <p:cNvPr id="34" name="正方形/長方形 33">
             <a:extLst>
               <a:ext uri="{FF2B5EF4-FFF2-40B4-BE49-F238E27FC236}">
-                <a16:creationId xmlns:a16="http://schemas.microsoft.com/office/drawing/2014/main" id="{B00C4BF4-F50F-9F47-15C7-048706A8171D}"/>
+                <a16:creationId xmlns:a16="http://schemas.microsoft.com/office/drawing/2014/main" id="{2F84F9BA-F65E-3118-1CB8-97E5F47C4061}"/>
               </a:ext>
             </a:extLst>
           </p:cNvPr>
@@ -11611,7 +11611,7 @@
           <p:cNvPr id="35" name="テキスト ボックス 34">
             <a:extLst>
               <a:ext uri="{FF2B5EF4-FFF2-40B4-BE49-F238E27FC236}">
-                <a16:creationId xmlns:a16="http://schemas.microsoft.com/office/drawing/2014/main" id="{0C8A2953-82DF-0117-F329-3CFDCB4AE8FE}"/>
+                <a16:creationId xmlns:a16="http://schemas.microsoft.com/office/drawing/2014/main" id="{B02074C5-71E4-06A0-64F6-101FA1092FC1}"/>
               </a:ext>
             </a:extLst>
           </p:cNvPr>
@@ -11657,7 +11657,7 @@
           <p:cNvPr id="36" name="テキスト ボックス 35">
             <a:extLst>
               <a:ext uri="{FF2B5EF4-FFF2-40B4-BE49-F238E27FC236}">
-                <a16:creationId xmlns:a16="http://schemas.microsoft.com/office/drawing/2014/main" id="{EF922E86-5CF8-CC83-3758-CFFC1DF9685A}"/>
+                <a16:creationId xmlns:a16="http://schemas.microsoft.com/office/drawing/2014/main" id="{C91ABA4C-E398-4BF1-A688-EB79B921B7FD}"/>
               </a:ext>
             </a:extLst>
           </p:cNvPr>
@@ -11761,7 +11761,7 @@
     </p:spTree>
     <p:extLst>
       <p:ext uri="{BB962C8B-B14F-4D97-AF65-F5344CB8AC3E}">
-        <p14:creationId xmlns:p14="http://schemas.microsoft.com/office/powerpoint/2010/main" val="852758738"/>
+        <p14:creationId xmlns:p14="http://schemas.microsoft.com/office/powerpoint/2010/main" val="358812588"/>
       </p:ext>
     </p:extLst>
   </p:cSld>
@@ -11793,7 +11793,7 @@
           <p:cNvPr id="2" name="正方形/長方形 1">
             <a:extLst>
               <a:ext uri="{FF2B5EF4-FFF2-40B4-BE49-F238E27FC236}">
-                <a16:creationId xmlns:a16="http://schemas.microsoft.com/office/drawing/2014/main" id="{6E35B67F-B9C7-D0F1-FBAD-8F64D0E402D7}"/>
+                <a16:creationId xmlns:a16="http://schemas.microsoft.com/office/drawing/2014/main" id="{E135CBB9-6058-EBCA-2521-8CBFD55D9D65}"/>
               </a:ext>
             </a:extLst>
           </p:cNvPr>
@@ -11861,7 +11861,7 @@
           <p:cNvPr id="3" name="正方形/長方形 2">
             <a:extLst>
               <a:ext uri="{FF2B5EF4-FFF2-40B4-BE49-F238E27FC236}">
-                <a16:creationId xmlns:a16="http://schemas.microsoft.com/office/drawing/2014/main" id="{5D1803D0-4D00-74ED-3153-A8B577354E01}"/>
+                <a16:creationId xmlns:a16="http://schemas.microsoft.com/office/drawing/2014/main" id="{A403A0FE-490E-1BC6-92CD-74804FFA94F0}"/>
               </a:ext>
             </a:extLst>
           </p:cNvPr>
@@ -11929,7 +11929,7 @@
           <p:cNvPr id="4" name="テキスト ボックス 3">
             <a:extLst>
               <a:ext uri="{FF2B5EF4-FFF2-40B4-BE49-F238E27FC236}">
-                <a16:creationId xmlns:a16="http://schemas.microsoft.com/office/drawing/2014/main" id="{0BDE5BAD-E82D-86B4-8F68-7250F802A7FD}"/>
+                <a16:creationId xmlns:a16="http://schemas.microsoft.com/office/drawing/2014/main" id="{0CF5E38A-3018-9B1D-BD62-FF0523270812}"/>
               </a:ext>
             </a:extLst>
           </p:cNvPr>
@@ -11982,7 +11982,7 @@
           <p:cNvPr id="5" name="テキスト ボックス 4">
             <a:extLst>
               <a:ext uri="{FF2B5EF4-FFF2-40B4-BE49-F238E27FC236}">
-                <a16:creationId xmlns:a16="http://schemas.microsoft.com/office/drawing/2014/main" id="{77FBA7CB-57CB-1C0A-6F46-379248661F73}"/>
+                <a16:creationId xmlns:a16="http://schemas.microsoft.com/office/drawing/2014/main" id="{9BC9ADAF-14FE-FDEF-A5B9-C72ADDECCD4E}"/>
               </a:ext>
             </a:extLst>
           </p:cNvPr>
@@ -12028,7 +12028,7 @@
           <p:cNvPr id="6" name="正方形/長方形 5">
             <a:extLst>
               <a:ext uri="{FF2B5EF4-FFF2-40B4-BE49-F238E27FC236}">
-                <a16:creationId xmlns:a16="http://schemas.microsoft.com/office/drawing/2014/main" id="{32808615-4B89-59A3-B5A2-B21855264279}"/>
+                <a16:creationId xmlns:a16="http://schemas.microsoft.com/office/drawing/2014/main" id="{8FD3A0E4-1B85-2555-6F20-A2D99FE0187A}"/>
               </a:ext>
             </a:extLst>
           </p:cNvPr>
@@ -12096,7 +12096,7 @@
           <p:cNvPr id="7" name="四角形: 角を丸くする 6">
             <a:extLst>
               <a:ext uri="{FF2B5EF4-FFF2-40B4-BE49-F238E27FC236}">
-                <a16:creationId xmlns:a16="http://schemas.microsoft.com/office/drawing/2014/main" id="{60EAB3F2-1234-03D8-675F-395C57E6D316}"/>
+                <a16:creationId xmlns:a16="http://schemas.microsoft.com/office/drawing/2014/main" id="{D884FA6D-62D0-02FF-C800-E6A213791F97}"/>
               </a:ext>
             </a:extLst>
           </p:cNvPr>
@@ -12166,7 +12166,7 @@
           <p:cNvPr id="8" name="テキスト ボックス 7">
             <a:extLst>
               <a:ext uri="{FF2B5EF4-FFF2-40B4-BE49-F238E27FC236}">
-                <a16:creationId xmlns:a16="http://schemas.microsoft.com/office/drawing/2014/main" id="{30A4E454-3915-FA80-3E41-5D6C3FA9B653}"/>
+                <a16:creationId xmlns:a16="http://schemas.microsoft.com/office/drawing/2014/main" id="{A78E72A5-11DC-218E-255F-6C90A39DA43E}"/>
               </a:ext>
             </a:extLst>
           </p:cNvPr>
@@ -12212,7 +12212,7 @@
           <p:cNvPr id="9" name="テキスト ボックス 8">
             <a:extLst>
               <a:ext uri="{FF2B5EF4-FFF2-40B4-BE49-F238E27FC236}">
-                <a16:creationId xmlns:a16="http://schemas.microsoft.com/office/drawing/2014/main" id="{556ED9D6-C574-CBC3-D0E3-7016D66D0443}"/>
+                <a16:creationId xmlns:a16="http://schemas.microsoft.com/office/drawing/2014/main" id="{AC44050C-B815-F85D-8F68-0D48FB0A55BF}"/>
               </a:ext>
             </a:extLst>
           </p:cNvPr>
@@ -12258,7 +12258,7 @@
           <p:cNvPr id="10" name="テキスト ボックス 9">
             <a:extLst>
               <a:ext uri="{FF2B5EF4-FFF2-40B4-BE49-F238E27FC236}">
-                <a16:creationId xmlns:a16="http://schemas.microsoft.com/office/drawing/2014/main" id="{4E9BCB8B-3F82-C843-6ED0-000D76E12B55}"/>
+                <a16:creationId xmlns:a16="http://schemas.microsoft.com/office/drawing/2014/main" id="{8AD264DC-729F-6452-CD0B-98D4820867F2}"/>
               </a:ext>
             </a:extLst>
           </p:cNvPr>
@@ -12311,7 +12311,7 @@
           <p:cNvPr id="11" name="四角形: 角を丸くする 10">
             <a:extLst>
               <a:ext uri="{FF2B5EF4-FFF2-40B4-BE49-F238E27FC236}">
-                <a16:creationId xmlns:a16="http://schemas.microsoft.com/office/drawing/2014/main" id="{2489C0E1-41E1-E680-952D-17C18DFF793C}"/>
+                <a16:creationId xmlns:a16="http://schemas.microsoft.com/office/drawing/2014/main" id="{5389E4CA-6BE5-DF89-A912-42FF96899F35}"/>
               </a:ext>
             </a:extLst>
           </p:cNvPr>
@@ -12367,7 +12367,7 @@
           <p:cNvPr id="12" name="正方形/長方形 11">
             <a:extLst>
               <a:ext uri="{FF2B5EF4-FFF2-40B4-BE49-F238E27FC236}">
-                <a16:creationId xmlns:a16="http://schemas.microsoft.com/office/drawing/2014/main" id="{21E56CF2-E05E-C3E4-E5CE-C237238998E3}"/>
+                <a16:creationId xmlns:a16="http://schemas.microsoft.com/office/drawing/2014/main" id="{528460C3-8213-1884-8F97-2CF2520C2C08}"/>
               </a:ext>
             </a:extLst>
           </p:cNvPr>
@@ -12435,7 +12435,7 @@
           <p:cNvPr id="13" name="テキスト ボックス 12">
             <a:extLst>
               <a:ext uri="{FF2B5EF4-FFF2-40B4-BE49-F238E27FC236}">
-                <a16:creationId xmlns:a16="http://schemas.microsoft.com/office/drawing/2014/main" id="{DFAC5B06-1EF4-6ABE-20F9-B90EDB8FC9A3}"/>
+                <a16:creationId xmlns:a16="http://schemas.microsoft.com/office/drawing/2014/main" id="{E09E3422-295A-6059-A62D-EEAC65FAB8EE}"/>
               </a:ext>
             </a:extLst>
           </p:cNvPr>
@@ -12481,7 +12481,7 @@
           <p:cNvPr id="14" name="テキスト ボックス 13">
             <a:extLst>
               <a:ext uri="{FF2B5EF4-FFF2-40B4-BE49-F238E27FC236}">
-                <a16:creationId xmlns:a16="http://schemas.microsoft.com/office/drawing/2014/main" id="{8330BE10-2796-1663-A559-F3163576AE30}"/>
+                <a16:creationId xmlns:a16="http://schemas.microsoft.com/office/drawing/2014/main" id="{DF223A33-B99A-C9C2-4C70-2E27BF4CDB99}"/>
               </a:ext>
             </a:extLst>
           </p:cNvPr>
@@ -12527,7 +12527,7 @@
           <p:cNvPr id="15" name="テキスト ボックス 14">
             <a:extLst>
               <a:ext uri="{FF2B5EF4-FFF2-40B4-BE49-F238E27FC236}">
-                <a16:creationId xmlns:a16="http://schemas.microsoft.com/office/drawing/2014/main" id="{74D3994C-8BA8-0282-97A1-4666B8F86EBA}"/>
+                <a16:creationId xmlns:a16="http://schemas.microsoft.com/office/drawing/2014/main" id="{629B6951-664C-0A12-E7B3-9AE517990740}"/>
               </a:ext>
             </a:extLst>
           </p:cNvPr>
@@ -12623,7 +12623,7 @@
           <p:cNvPr id="16" name="テキスト ボックス 15">
             <a:extLst>
               <a:ext uri="{FF2B5EF4-FFF2-40B4-BE49-F238E27FC236}">
-                <a16:creationId xmlns:a16="http://schemas.microsoft.com/office/drawing/2014/main" id="{FDE24B44-4356-D6E2-0CA7-60476EA04B56}"/>
+                <a16:creationId xmlns:a16="http://schemas.microsoft.com/office/drawing/2014/main" id="{1372FEE6-79B9-F6EF-155C-A3C18B00D6A9}"/>
               </a:ext>
             </a:extLst>
           </p:cNvPr>
@@ -12669,7 +12669,7 @@
           <p:cNvPr id="17" name="テキスト ボックス 16">
             <a:extLst>
               <a:ext uri="{FF2B5EF4-FFF2-40B4-BE49-F238E27FC236}">
-                <a16:creationId xmlns:a16="http://schemas.microsoft.com/office/drawing/2014/main" id="{A929A195-02B0-C16C-1FD4-439E77E7E829}"/>
+                <a16:creationId xmlns:a16="http://schemas.microsoft.com/office/drawing/2014/main" id="{1E66CB91-7E41-EC79-8559-6B0675CDF637}"/>
               </a:ext>
             </a:extLst>
           </p:cNvPr>
@@ -12735,7 +12735,7 @@
           <p:cNvPr id="18" name="テキスト ボックス 17">
             <a:extLst>
               <a:ext uri="{FF2B5EF4-FFF2-40B4-BE49-F238E27FC236}">
-                <a16:creationId xmlns:a16="http://schemas.microsoft.com/office/drawing/2014/main" id="{4FB801E4-D3CA-4E0D-FD73-D7BB41D9FE30}"/>
+                <a16:creationId xmlns:a16="http://schemas.microsoft.com/office/drawing/2014/main" id="{658CD8E7-99E7-E773-711A-1B2F00EEF1D9}"/>
               </a:ext>
             </a:extLst>
           </p:cNvPr>
@@ -12781,7 +12781,7 @@
           <p:cNvPr id="19" name="テキスト ボックス 18">
             <a:extLst>
               <a:ext uri="{FF2B5EF4-FFF2-40B4-BE49-F238E27FC236}">
-                <a16:creationId xmlns:a16="http://schemas.microsoft.com/office/drawing/2014/main" id="{6570ECB2-17C0-2287-49A0-98FFDAC5523C}"/>
+                <a16:creationId xmlns:a16="http://schemas.microsoft.com/office/drawing/2014/main" id="{71B7C435-3867-46B9-8B3F-464B69978FDF}"/>
               </a:ext>
             </a:extLst>
           </p:cNvPr>
@@ -12827,7 +12827,7 @@
           <p:cNvPr id="20" name="四角形: 角を丸くする 19">
             <a:extLst>
               <a:ext uri="{FF2B5EF4-FFF2-40B4-BE49-F238E27FC236}">
-                <a16:creationId xmlns:a16="http://schemas.microsoft.com/office/drawing/2014/main" id="{F7230CC3-5C47-AAF4-A596-23FECD48DB22}"/>
+                <a16:creationId xmlns:a16="http://schemas.microsoft.com/office/drawing/2014/main" id="{EBC49895-2812-CB4C-1737-3D977BDC1004}"/>
               </a:ext>
             </a:extLst>
           </p:cNvPr>
@@ -12883,7 +12883,7 @@
           <p:cNvPr id="21" name="正方形/長方形 20">
             <a:extLst>
               <a:ext uri="{FF2B5EF4-FFF2-40B4-BE49-F238E27FC236}">
-                <a16:creationId xmlns:a16="http://schemas.microsoft.com/office/drawing/2014/main" id="{54F64DC6-F255-E80B-29AC-548A2D8435DF}"/>
+                <a16:creationId xmlns:a16="http://schemas.microsoft.com/office/drawing/2014/main" id="{8D51F2A8-31EC-5999-4D45-2FB708C7C3E1}"/>
               </a:ext>
             </a:extLst>
           </p:cNvPr>
@@ -12951,7 +12951,7 @@
           <p:cNvPr id="22" name="テキスト ボックス 21">
             <a:extLst>
               <a:ext uri="{FF2B5EF4-FFF2-40B4-BE49-F238E27FC236}">
-                <a16:creationId xmlns:a16="http://schemas.microsoft.com/office/drawing/2014/main" id="{90C2B60C-EF20-C8F4-F921-7565728E66B2}"/>
+                <a16:creationId xmlns:a16="http://schemas.microsoft.com/office/drawing/2014/main" id="{89D8BC1B-C88D-696B-0822-94A3F64EA1D1}"/>
               </a:ext>
             </a:extLst>
           </p:cNvPr>
@@ -12997,7 +12997,7 @@
           <p:cNvPr id="23" name="テキスト ボックス 22">
             <a:extLst>
               <a:ext uri="{FF2B5EF4-FFF2-40B4-BE49-F238E27FC236}">
-                <a16:creationId xmlns:a16="http://schemas.microsoft.com/office/drawing/2014/main" id="{1309CDA8-FD42-75BD-3085-D8EB72612A50}"/>
+                <a16:creationId xmlns:a16="http://schemas.microsoft.com/office/drawing/2014/main" id="{2F268ADF-3580-B279-A091-11185D1D6D53}"/>
               </a:ext>
             </a:extLst>
           </p:cNvPr>
@@ -13043,7 +13043,7 @@
           <p:cNvPr id="24" name="正方形/長方形 23">
             <a:extLst>
               <a:ext uri="{FF2B5EF4-FFF2-40B4-BE49-F238E27FC236}">
-                <a16:creationId xmlns:a16="http://schemas.microsoft.com/office/drawing/2014/main" id="{6A638C7A-3143-4734-7D44-F4B3AA6FA082}"/>
+                <a16:creationId xmlns:a16="http://schemas.microsoft.com/office/drawing/2014/main" id="{C511E36D-A092-005B-12D2-947D9EB9FCAF}"/>
               </a:ext>
             </a:extLst>
           </p:cNvPr>
@@ -13111,7 +13111,7 @@
           <p:cNvPr id="25" name="テキスト ボックス 24">
             <a:extLst>
               <a:ext uri="{FF2B5EF4-FFF2-40B4-BE49-F238E27FC236}">
-                <a16:creationId xmlns:a16="http://schemas.microsoft.com/office/drawing/2014/main" id="{A157EE14-1EF4-2556-7A65-53D12F16E12E}"/>
+                <a16:creationId xmlns:a16="http://schemas.microsoft.com/office/drawing/2014/main" id="{9E303ED4-3FC5-6926-72C1-28FBCE21B6DF}"/>
               </a:ext>
             </a:extLst>
           </p:cNvPr>
@@ -13157,7 +13157,7 @@
           <p:cNvPr id="26" name="テキスト ボックス 25">
             <a:extLst>
               <a:ext uri="{FF2B5EF4-FFF2-40B4-BE49-F238E27FC236}">
-                <a16:creationId xmlns:a16="http://schemas.microsoft.com/office/drawing/2014/main" id="{850D6A31-63E0-4D81-27DF-80D8CF887BEE}"/>
+                <a16:creationId xmlns:a16="http://schemas.microsoft.com/office/drawing/2014/main" id="{89F7F235-AE19-A732-77D1-40F71D084DB1}"/>
               </a:ext>
             </a:extLst>
           </p:cNvPr>
@@ -13193,7 +13193,7 @@
                 <a:latin typeface="Yu Gothic UI" panose="020B0500000000000000" pitchFamily="50" charset="-128"/>
                 <a:ea typeface="Yu Gothic UI" panose="020B0500000000000000" pitchFamily="50" charset="-128"/>
               </a:rPr>
-              <a:t>監視フォルダと同じ階層の </a:t>
+              <a:t>この </a:t>
             </a:r>
             <a:r>
               <a:rPr kumimoji="1" lang="en-US" altLang="ja-JP" sz="1250">
@@ -13203,7 +13203,7 @@
                 <a:latin typeface="Yu Gothic UI" panose="020B0500000000000000" pitchFamily="50" charset="-128"/>
                 <a:ea typeface="Yu Gothic UI" panose="020B0500000000000000" pitchFamily="50" charset="-128"/>
               </a:rPr>
-              <a:t>logs </a:t>
+              <a:t>PC </a:t>
             </a:r>
             <a:r>
               <a:rPr kumimoji="1" lang="ja-JP" altLang="en-US" sz="1250">
@@ -13213,8 +13213,25 @@
                 <a:latin typeface="Yu Gothic UI" panose="020B0500000000000000" pitchFamily="50" charset="-128"/>
                 <a:ea typeface="Yu Gothic UI" panose="020B0500000000000000" pitchFamily="50" charset="-128"/>
               </a:rPr>
-              <a:t>フォルダ</a:t>
-            </a:r>
+              <a:t>の </a:t>
+            </a:r>
+            <a:r>
+              <a:rPr kumimoji="1" lang="en-US" altLang="ja-JP" sz="1250">
+                <a:solidFill>
+                  <a:srgbClr val="465263"/>
+                </a:solidFill>
+                <a:latin typeface="Yu Gothic UI" panose="020B0500000000000000" pitchFamily="50" charset="-128"/>
+                <a:ea typeface="Yu Gothic UI" panose="020B0500000000000000" pitchFamily="50" charset="-128"/>
+              </a:rPr>
+              <a:t>LocalAppData\PdfSignage\logs</a:t>
+            </a:r>
+            <a:endParaRPr kumimoji="1" lang="ja-JP" altLang="en-US" sz="1250">
+              <a:solidFill>
+                <a:srgbClr val="465263"/>
+              </a:solidFill>
+              <a:latin typeface="Yu Gothic UI" panose="020B0500000000000000" pitchFamily="50" charset="-128"/>
+              <a:ea typeface="Yu Gothic UI" panose="020B0500000000000000" pitchFamily="50" charset="-128"/>
+            </a:endParaRPr>
           </a:p>
         </p:txBody>
       </p:sp>
@@ -13223,7 +13240,7 @@
           <p:cNvPr id="27" name="正方形/長方形 26">
             <a:extLst>
               <a:ext uri="{FF2B5EF4-FFF2-40B4-BE49-F238E27FC236}">
-                <a16:creationId xmlns:a16="http://schemas.microsoft.com/office/drawing/2014/main" id="{CE98C637-13AC-D819-C188-A3DE794618AF}"/>
+                <a16:creationId xmlns:a16="http://schemas.microsoft.com/office/drawing/2014/main" id="{0E88BE69-3DDA-D87B-D610-39014ED3C281}"/>
               </a:ext>
             </a:extLst>
           </p:cNvPr>
@@ -13291,7 +13308,7 @@
           <p:cNvPr id="28" name="テキスト ボックス 27">
             <a:extLst>
               <a:ext uri="{FF2B5EF4-FFF2-40B4-BE49-F238E27FC236}">
-                <a16:creationId xmlns:a16="http://schemas.microsoft.com/office/drawing/2014/main" id="{56BF1A62-1127-202E-3177-2B4AFE4E4511}"/>
+                <a16:creationId xmlns:a16="http://schemas.microsoft.com/office/drawing/2014/main" id="{16D8649E-08B3-ECD5-5D4D-726C939BF58F}"/>
               </a:ext>
             </a:extLst>
           </p:cNvPr>
@@ -13327,7 +13344,7 @@
                 <a:latin typeface="Yu Gothic UI" panose="020B0500000000000000" pitchFamily="50" charset="-128"/>
                 <a:ea typeface="Yu Gothic UI" panose="020B0500000000000000" pitchFamily="50" charset="-128"/>
               </a:rPr>
-              <a:t>例</a:t>
+              <a:t>確認</a:t>
             </a:r>
           </a:p>
         </p:txBody>
@@ -13337,7 +13354,7 @@
           <p:cNvPr id="29" name="テキスト ボックス 28">
             <a:extLst>
               <a:ext uri="{FF2B5EF4-FFF2-40B4-BE49-F238E27FC236}">
-                <a16:creationId xmlns:a16="http://schemas.microsoft.com/office/drawing/2014/main" id="{1BF8A218-F199-FE46-8031-0FCBA20533C4}"/>
+                <a16:creationId xmlns:a16="http://schemas.microsoft.com/office/drawing/2014/main" id="{FA6953D1-68A2-1599-2CF7-BC50F3327F7E}"/>
               </a:ext>
             </a:extLst>
           </p:cNvPr>
@@ -13373,45 +13390,8 @@
                 <a:latin typeface="Yu Gothic UI" panose="020B0500000000000000" pitchFamily="50" charset="-128"/>
                 <a:ea typeface="Yu Gothic UI" panose="020B0500000000000000" pitchFamily="50" charset="-128"/>
               </a:rPr>
-              <a:t>監視フォルダが </a:t>
-            </a:r>
-            <a:r>
-              <a:rPr kumimoji="1" lang="en-US" altLang="ja-JP" sz="1250">
-                <a:solidFill>
-                  <a:srgbClr val="465263"/>
-                </a:solidFill>
-                <a:latin typeface="Yu Gothic UI" panose="020B0500000000000000" pitchFamily="50" charset="-128"/>
-                <a:ea typeface="Yu Gothic UI" panose="020B0500000000000000" pitchFamily="50" charset="-128"/>
-              </a:rPr>
-              <a:t>D:\Signage → </a:t>
-            </a:r>
-            <a:r>
-              <a:rPr kumimoji="1" lang="ja-JP" altLang="en-US" sz="1250">
-                <a:solidFill>
-                  <a:srgbClr val="465263"/>
-                </a:solidFill>
-                <a:latin typeface="Yu Gothic UI" panose="020B0500000000000000" pitchFamily="50" charset="-128"/>
-                <a:ea typeface="Yu Gothic UI" panose="020B0500000000000000" pitchFamily="50" charset="-128"/>
-              </a:rPr>
-              <a:t>ログは </a:t>
-            </a:r>
-            <a:r>
-              <a:rPr kumimoji="1" lang="en-US" altLang="ja-JP" sz="1250">
-                <a:solidFill>
-                  <a:srgbClr val="465263"/>
-                </a:solidFill>
-                <a:latin typeface="Yu Gothic UI" panose="020B0500000000000000" pitchFamily="50" charset="-128"/>
-                <a:ea typeface="Yu Gothic UI" panose="020B0500000000000000" pitchFamily="50" charset="-128"/>
-              </a:rPr>
-              <a:t>D:\logs</a:t>
-            </a:r>
-            <a:endParaRPr kumimoji="1" lang="ja-JP" altLang="en-US" sz="1250">
-              <a:solidFill>
-                <a:srgbClr val="465263"/>
-              </a:solidFill>
-              <a:latin typeface="Yu Gothic UI" panose="020B0500000000000000" pitchFamily="50" charset="-128"/>
-              <a:ea typeface="Yu Gothic UI" panose="020B0500000000000000" pitchFamily="50" charset="-128"/>
-            </a:endParaRPr>
+              <a:t>管理画面の「ログフォルダ」に実パスが出る</a:t>
+            </a:r>
           </a:p>
         </p:txBody>
       </p:sp>
@@ -13420,7 +13400,7 @@
           <p:cNvPr id="30" name="正方形/長方形 29">
             <a:extLst>
               <a:ext uri="{FF2B5EF4-FFF2-40B4-BE49-F238E27FC236}">
-                <a16:creationId xmlns:a16="http://schemas.microsoft.com/office/drawing/2014/main" id="{C787C439-5CBD-D619-07F6-731653E61BF4}"/>
+                <a16:creationId xmlns:a16="http://schemas.microsoft.com/office/drawing/2014/main" id="{299F3156-380B-EF83-34D2-D4DB27AA4EDF}"/>
               </a:ext>
             </a:extLst>
           </p:cNvPr>
@@ -13488,7 +13468,7 @@
           <p:cNvPr id="31" name="テキスト ボックス 30">
             <a:extLst>
               <a:ext uri="{FF2B5EF4-FFF2-40B4-BE49-F238E27FC236}">
-                <a16:creationId xmlns:a16="http://schemas.microsoft.com/office/drawing/2014/main" id="{273E5A99-DA50-22B6-032E-FF257DC04628}"/>
+                <a16:creationId xmlns:a16="http://schemas.microsoft.com/office/drawing/2014/main" id="{8EF9516B-226D-CACC-411D-A75180E272AC}"/>
               </a:ext>
             </a:extLst>
           </p:cNvPr>
@@ -13534,7 +13514,7 @@
           <p:cNvPr id="32" name="テキスト ボックス 31">
             <a:extLst>
               <a:ext uri="{FF2B5EF4-FFF2-40B4-BE49-F238E27FC236}">
-                <a16:creationId xmlns:a16="http://schemas.microsoft.com/office/drawing/2014/main" id="{1098AC0A-B148-A5A3-520C-4AF1D190723B}"/>
+                <a16:creationId xmlns:a16="http://schemas.microsoft.com/office/drawing/2014/main" id="{B835DB39-FCE9-5B9E-871E-F0A95670769D}"/>
               </a:ext>
             </a:extLst>
           </p:cNvPr>
@@ -13588,7 +13568,7 @@
     </p:spTree>
     <p:extLst>
       <p:ext uri="{BB962C8B-B14F-4D97-AF65-F5344CB8AC3E}">
-        <p14:creationId xmlns:p14="http://schemas.microsoft.com/office/powerpoint/2010/main" val="3223267870"/>
+        <p14:creationId xmlns:p14="http://schemas.microsoft.com/office/powerpoint/2010/main" val="3586785598"/>
       </p:ext>
     </p:extLst>
   </p:cSld>
@@ -13620,7 +13600,7 @@
           <p:cNvPr id="2" name="正方形/長方形 1">
             <a:extLst>
               <a:ext uri="{FF2B5EF4-FFF2-40B4-BE49-F238E27FC236}">
-                <a16:creationId xmlns:a16="http://schemas.microsoft.com/office/drawing/2014/main" id="{F64B94BE-F395-FDC8-8DCE-83212D4A1D2C}"/>
+                <a16:creationId xmlns:a16="http://schemas.microsoft.com/office/drawing/2014/main" id="{C1B70D17-1F05-7FCE-1002-8D4C4C7D8250}"/>
               </a:ext>
             </a:extLst>
           </p:cNvPr>
@@ -13688,7 +13668,7 @@
           <p:cNvPr id="3" name="正方形/長方形 2">
             <a:extLst>
               <a:ext uri="{FF2B5EF4-FFF2-40B4-BE49-F238E27FC236}">
-                <a16:creationId xmlns:a16="http://schemas.microsoft.com/office/drawing/2014/main" id="{9BC4DA53-5319-345F-B4B2-DF03DCE22394}"/>
+                <a16:creationId xmlns:a16="http://schemas.microsoft.com/office/drawing/2014/main" id="{5B8B0344-984B-BAF0-86C9-1023E4548189}"/>
               </a:ext>
             </a:extLst>
           </p:cNvPr>
@@ -13756,7 +13736,7 @@
           <p:cNvPr id="4" name="テキスト ボックス 3">
             <a:extLst>
               <a:ext uri="{FF2B5EF4-FFF2-40B4-BE49-F238E27FC236}">
-                <a16:creationId xmlns:a16="http://schemas.microsoft.com/office/drawing/2014/main" id="{C9153FA0-1DD9-9BE0-D4B1-CA444AB92526}"/>
+                <a16:creationId xmlns:a16="http://schemas.microsoft.com/office/drawing/2014/main" id="{67F20258-E4A1-CD61-D5FD-1076590290CB}"/>
               </a:ext>
             </a:extLst>
           </p:cNvPr>
@@ -13809,7 +13789,7 @@
           <p:cNvPr id="5" name="テキスト ボックス 4">
             <a:extLst>
               <a:ext uri="{FF2B5EF4-FFF2-40B4-BE49-F238E27FC236}">
-                <a16:creationId xmlns:a16="http://schemas.microsoft.com/office/drawing/2014/main" id="{B81480BF-1DD4-7466-2A00-E6498DCF1801}"/>
+                <a16:creationId xmlns:a16="http://schemas.microsoft.com/office/drawing/2014/main" id="{3C34BB9D-9EC1-E3BA-65A4-35ADD0F8E2DA}"/>
               </a:ext>
             </a:extLst>
           </p:cNvPr>
@@ -13875,7 +13855,7 @@
           <p:cNvPr id="6" name="正方形/長方形 5">
             <a:extLst>
               <a:ext uri="{FF2B5EF4-FFF2-40B4-BE49-F238E27FC236}">
-                <a16:creationId xmlns:a16="http://schemas.microsoft.com/office/drawing/2014/main" id="{6C72488A-CA74-39E3-B37A-03C4A09A2764}"/>
+                <a16:creationId xmlns:a16="http://schemas.microsoft.com/office/drawing/2014/main" id="{35306FEA-CA94-3F2D-4C04-8F693A335938}"/>
               </a:ext>
             </a:extLst>
           </p:cNvPr>
@@ -13943,7 +13923,7 @@
           <p:cNvPr id="7" name="テキスト ボックス 6">
             <a:extLst>
               <a:ext uri="{FF2B5EF4-FFF2-40B4-BE49-F238E27FC236}">
-                <a16:creationId xmlns:a16="http://schemas.microsoft.com/office/drawing/2014/main" id="{4D88085D-FD51-4C48-A044-E77A717B198C}"/>
+                <a16:creationId xmlns:a16="http://schemas.microsoft.com/office/drawing/2014/main" id="{DF34EC6D-54FE-3F24-99C6-99C03D06C635}"/>
               </a:ext>
             </a:extLst>
           </p:cNvPr>
@@ -13989,7 +13969,7 @@
           <p:cNvPr id="8" name="テキスト ボックス 7">
             <a:extLst>
               <a:ext uri="{FF2B5EF4-FFF2-40B4-BE49-F238E27FC236}">
-                <a16:creationId xmlns:a16="http://schemas.microsoft.com/office/drawing/2014/main" id="{D2023451-91FE-8E13-D3C1-006DC13C42EF}"/>
+                <a16:creationId xmlns:a16="http://schemas.microsoft.com/office/drawing/2014/main" id="{B9F00C5C-5CFE-9ED6-9D87-53D1E2EA80CF}"/>
               </a:ext>
             </a:extLst>
           </p:cNvPr>
@@ -14042,7 +14022,7 @@
           <p:cNvPr id="9" name="四角形: 角を丸くする 8">
             <a:extLst>
               <a:ext uri="{FF2B5EF4-FFF2-40B4-BE49-F238E27FC236}">
-                <a16:creationId xmlns:a16="http://schemas.microsoft.com/office/drawing/2014/main" id="{A0A156F0-1FA3-33B2-B30D-58908B0A54D1}"/>
+                <a16:creationId xmlns:a16="http://schemas.microsoft.com/office/drawing/2014/main" id="{454C38B8-86F6-8C98-2F7D-32D8A0D61AC7}"/>
               </a:ext>
             </a:extLst>
           </p:cNvPr>
@@ -14112,7 +14092,7 @@
           <p:cNvPr id="10" name="楕円 9">
             <a:extLst>
               <a:ext uri="{FF2B5EF4-FFF2-40B4-BE49-F238E27FC236}">
-                <a16:creationId xmlns:a16="http://schemas.microsoft.com/office/drawing/2014/main" id="{984F2A18-6FC5-E87E-21FF-96750984BAA3}"/>
+                <a16:creationId xmlns:a16="http://schemas.microsoft.com/office/drawing/2014/main" id="{E2DF222E-1348-208F-227D-F8823FB74291}"/>
               </a:ext>
             </a:extLst>
           </p:cNvPr>
@@ -14180,7 +14160,7 @@
           <p:cNvPr id="11" name="テキスト ボックス 10">
             <a:extLst>
               <a:ext uri="{FF2B5EF4-FFF2-40B4-BE49-F238E27FC236}">
-                <a16:creationId xmlns:a16="http://schemas.microsoft.com/office/drawing/2014/main" id="{9553EEB6-0996-4009-1078-6D1F199D1B12}"/>
+                <a16:creationId xmlns:a16="http://schemas.microsoft.com/office/drawing/2014/main" id="{3BBD20BC-DAEC-34E4-D05E-8C1BFE473128}"/>
               </a:ext>
             </a:extLst>
           </p:cNvPr>
@@ -14233,7 +14213,7 @@
           <p:cNvPr id="12" name="テキスト ボックス 11">
             <a:extLst>
               <a:ext uri="{FF2B5EF4-FFF2-40B4-BE49-F238E27FC236}">
-                <a16:creationId xmlns:a16="http://schemas.microsoft.com/office/drawing/2014/main" id="{0C2FE65A-7554-FE93-75A7-6951382C9749}"/>
+                <a16:creationId xmlns:a16="http://schemas.microsoft.com/office/drawing/2014/main" id="{9BCCE889-A1D6-7104-80BF-E7369C40BF35}"/>
               </a:ext>
             </a:extLst>
           </p:cNvPr>
@@ -14279,7 +14259,7 @@
           <p:cNvPr id="13" name="テキスト ボックス 12">
             <a:extLst>
               <a:ext uri="{FF2B5EF4-FFF2-40B4-BE49-F238E27FC236}">
-                <a16:creationId xmlns:a16="http://schemas.microsoft.com/office/drawing/2014/main" id="{ADE22594-0A58-76D1-A4B1-77E1AB64EEE6}"/>
+                <a16:creationId xmlns:a16="http://schemas.microsoft.com/office/drawing/2014/main" id="{C8D516E6-DCAF-9666-6107-9E7F7EBD6C7B}"/>
               </a:ext>
             </a:extLst>
           </p:cNvPr>
@@ -14325,7 +14305,7 @@
           <p:cNvPr id="14" name="四角形: 角を丸くする 13">
             <a:extLst>
               <a:ext uri="{FF2B5EF4-FFF2-40B4-BE49-F238E27FC236}">
-                <a16:creationId xmlns:a16="http://schemas.microsoft.com/office/drawing/2014/main" id="{509E949C-7BC7-9A62-3137-178B1698DEAA}"/>
+                <a16:creationId xmlns:a16="http://schemas.microsoft.com/office/drawing/2014/main" id="{524CAD98-20E7-7F51-EB6E-5A64AD9A69C3}"/>
               </a:ext>
             </a:extLst>
           </p:cNvPr>
@@ -14395,7 +14375,7 @@
           <p:cNvPr id="15" name="楕円 14">
             <a:extLst>
               <a:ext uri="{FF2B5EF4-FFF2-40B4-BE49-F238E27FC236}">
-                <a16:creationId xmlns:a16="http://schemas.microsoft.com/office/drawing/2014/main" id="{FAB38D22-2B7C-9707-B113-6465D4D883D5}"/>
+                <a16:creationId xmlns:a16="http://schemas.microsoft.com/office/drawing/2014/main" id="{DFDCF01F-12DE-C50B-CD65-29326B8CE560}"/>
               </a:ext>
             </a:extLst>
           </p:cNvPr>
@@ -14463,7 +14443,7 @@
           <p:cNvPr id="16" name="テキスト ボックス 15">
             <a:extLst>
               <a:ext uri="{FF2B5EF4-FFF2-40B4-BE49-F238E27FC236}">
-                <a16:creationId xmlns:a16="http://schemas.microsoft.com/office/drawing/2014/main" id="{CE79CBC7-3B6F-5DA5-5AF4-258FFBFD1491}"/>
+                <a16:creationId xmlns:a16="http://schemas.microsoft.com/office/drawing/2014/main" id="{5F75B3BC-63DA-6869-7E7A-FDBA1B4F52B6}"/>
               </a:ext>
             </a:extLst>
           </p:cNvPr>
@@ -14516,7 +14496,7 @@
           <p:cNvPr id="17" name="テキスト ボックス 16">
             <a:extLst>
               <a:ext uri="{FF2B5EF4-FFF2-40B4-BE49-F238E27FC236}">
-                <a16:creationId xmlns:a16="http://schemas.microsoft.com/office/drawing/2014/main" id="{BC3E27D3-989F-A42F-8879-0ED33CA1BA27}"/>
+                <a16:creationId xmlns:a16="http://schemas.microsoft.com/office/drawing/2014/main" id="{8A8A0C87-92D8-16FA-EC0C-DBD74F1D981B}"/>
               </a:ext>
             </a:extLst>
           </p:cNvPr>
@@ -14562,7 +14542,7 @@
           <p:cNvPr id="18" name="テキスト ボックス 17">
             <a:extLst>
               <a:ext uri="{FF2B5EF4-FFF2-40B4-BE49-F238E27FC236}">
-                <a16:creationId xmlns:a16="http://schemas.microsoft.com/office/drawing/2014/main" id="{E1E940BE-70EA-0D89-56C5-F1FE0A0F9193}"/>
+                <a16:creationId xmlns:a16="http://schemas.microsoft.com/office/drawing/2014/main" id="{1FAB6939-0D4B-3223-CB0B-8EACE90EACE6}"/>
               </a:ext>
             </a:extLst>
           </p:cNvPr>
@@ -14608,7 +14588,7 @@
           <p:cNvPr id="19" name="四角形: 角を丸くする 18">
             <a:extLst>
               <a:ext uri="{FF2B5EF4-FFF2-40B4-BE49-F238E27FC236}">
-                <a16:creationId xmlns:a16="http://schemas.microsoft.com/office/drawing/2014/main" id="{ACD69C43-C304-82BD-2DD5-85AB569950E1}"/>
+                <a16:creationId xmlns:a16="http://schemas.microsoft.com/office/drawing/2014/main" id="{26CA4C35-F2AF-9FB1-F319-89B68441091B}"/>
               </a:ext>
             </a:extLst>
           </p:cNvPr>
@@ -14678,7 +14658,7 @@
           <p:cNvPr id="20" name="楕円 19">
             <a:extLst>
               <a:ext uri="{FF2B5EF4-FFF2-40B4-BE49-F238E27FC236}">
-                <a16:creationId xmlns:a16="http://schemas.microsoft.com/office/drawing/2014/main" id="{8AA582AA-37C6-6A5A-B0E6-BBB3401459FE}"/>
+                <a16:creationId xmlns:a16="http://schemas.microsoft.com/office/drawing/2014/main" id="{402CAC67-4EF5-73EC-8FAE-32746804013E}"/>
               </a:ext>
             </a:extLst>
           </p:cNvPr>
@@ -14746,7 +14726,7 @@
           <p:cNvPr id="21" name="テキスト ボックス 20">
             <a:extLst>
               <a:ext uri="{FF2B5EF4-FFF2-40B4-BE49-F238E27FC236}">
-                <a16:creationId xmlns:a16="http://schemas.microsoft.com/office/drawing/2014/main" id="{31995A72-DD33-3D87-33B6-6CC2B5DEC3D8}"/>
+                <a16:creationId xmlns:a16="http://schemas.microsoft.com/office/drawing/2014/main" id="{E2F5C214-9EA1-EC77-24E5-5E2B3BC0207B}"/>
               </a:ext>
             </a:extLst>
           </p:cNvPr>
@@ -14799,7 +14779,7 @@
           <p:cNvPr id="22" name="テキスト ボックス 21">
             <a:extLst>
               <a:ext uri="{FF2B5EF4-FFF2-40B4-BE49-F238E27FC236}">
-                <a16:creationId xmlns:a16="http://schemas.microsoft.com/office/drawing/2014/main" id="{AA96FD06-AC13-2A0A-1780-E6CF00CB9E7F}"/>
+                <a16:creationId xmlns:a16="http://schemas.microsoft.com/office/drawing/2014/main" id="{B69B8C97-0462-83CF-74BF-7BF750F3C3B1}"/>
               </a:ext>
             </a:extLst>
           </p:cNvPr>
@@ -14845,7 +14825,7 @@
           <p:cNvPr id="23" name="テキスト ボックス 22">
             <a:extLst>
               <a:ext uri="{FF2B5EF4-FFF2-40B4-BE49-F238E27FC236}">
-                <a16:creationId xmlns:a16="http://schemas.microsoft.com/office/drawing/2014/main" id="{1F8836A3-6ECB-5099-6BAD-2D7D6AE5F312}"/>
+                <a16:creationId xmlns:a16="http://schemas.microsoft.com/office/drawing/2014/main" id="{A8C80828-0849-A8BA-2CB1-864BD54D231E}"/>
               </a:ext>
             </a:extLst>
           </p:cNvPr>
@@ -14939,7 +14919,7 @@
     </p:spTree>
     <p:extLst>
       <p:ext uri="{BB962C8B-B14F-4D97-AF65-F5344CB8AC3E}">
-        <p14:creationId xmlns:p14="http://schemas.microsoft.com/office/powerpoint/2010/main" val="467407216"/>
+        <p14:creationId xmlns:p14="http://schemas.microsoft.com/office/powerpoint/2010/main" val="1073048249"/>
       </p:ext>
     </p:extLst>
   </p:cSld>
@@ -14971,7 +14951,7 @@
           <p:cNvPr id="2" name="正方形/長方形 1">
             <a:extLst>
               <a:ext uri="{FF2B5EF4-FFF2-40B4-BE49-F238E27FC236}">
-                <a16:creationId xmlns:a16="http://schemas.microsoft.com/office/drawing/2014/main" id="{D59E54DC-4F57-B091-EBF3-C3AFE5608679}"/>
+                <a16:creationId xmlns:a16="http://schemas.microsoft.com/office/drawing/2014/main" id="{09033F73-C1F0-65BA-229E-686C06D4743B}"/>
               </a:ext>
             </a:extLst>
           </p:cNvPr>
@@ -15039,7 +15019,7 @@
           <p:cNvPr id="3" name="正方形/長方形 2">
             <a:extLst>
               <a:ext uri="{FF2B5EF4-FFF2-40B4-BE49-F238E27FC236}">
-                <a16:creationId xmlns:a16="http://schemas.microsoft.com/office/drawing/2014/main" id="{9270C320-C9FD-65DF-99CC-4EBFBD255C0A}"/>
+                <a16:creationId xmlns:a16="http://schemas.microsoft.com/office/drawing/2014/main" id="{17F187AE-A8C0-5CB5-00B7-37BEE325AB83}"/>
               </a:ext>
             </a:extLst>
           </p:cNvPr>
@@ -15107,7 +15087,7 @@
           <p:cNvPr id="4" name="テキスト ボックス 3">
             <a:extLst>
               <a:ext uri="{FF2B5EF4-FFF2-40B4-BE49-F238E27FC236}">
-                <a16:creationId xmlns:a16="http://schemas.microsoft.com/office/drawing/2014/main" id="{B9455229-ACB5-8789-6BDE-90CCE9133381}"/>
+                <a16:creationId xmlns:a16="http://schemas.microsoft.com/office/drawing/2014/main" id="{119601D4-9DCD-EF72-827E-1B9C61EB4964}"/>
               </a:ext>
             </a:extLst>
           </p:cNvPr>
@@ -15160,7 +15140,7 @@
           <p:cNvPr id="5" name="テキスト ボックス 4">
             <a:extLst>
               <a:ext uri="{FF2B5EF4-FFF2-40B4-BE49-F238E27FC236}">
-                <a16:creationId xmlns:a16="http://schemas.microsoft.com/office/drawing/2014/main" id="{4E04D57C-8270-D4C8-E66A-4E7AD1C6A4A4}"/>
+                <a16:creationId xmlns:a16="http://schemas.microsoft.com/office/drawing/2014/main" id="{EAAB0AD9-146E-00E2-76E6-07752CA093BB}"/>
               </a:ext>
             </a:extLst>
           </p:cNvPr>
@@ -15226,7 +15206,7 @@
           <p:cNvPr id="6" name="正方形/長方形 5">
             <a:extLst>
               <a:ext uri="{FF2B5EF4-FFF2-40B4-BE49-F238E27FC236}">
-                <a16:creationId xmlns:a16="http://schemas.microsoft.com/office/drawing/2014/main" id="{801E4F2A-C827-E97E-6E8F-A0FE3C662F17}"/>
+                <a16:creationId xmlns:a16="http://schemas.microsoft.com/office/drawing/2014/main" id="{55EC1E80-BE6D-35DF-DCBF-2F717EB1E09C}"/>
               </a:ext>
             </a:extLst>
           </p:cNvPr>
@@ -15294,7 +15274,7 @@
           <p:cNvPr id="7" name="テキスト ボックス 6">
             <a:extLst>
               <a:ext uri="{FF2B5EF4-FFF2-40B4-BE49-F238E27FC236}">
-                <a16:creationId xmlns:a16="http://schemas.microsoft.com/office/drawing/2014/main" id="{8D824D1B-5CF7-2254-64EA-0B05DD0491F1}"/>
+                <a16:creationId xmlns:a16="http://schemas.microsoft.com/office/drawing/2014/main" id="{96C80746-A88B-0EED-F084-E1800C1864BF}"/>
               </a:ext>
             </a:extLst>
           </p:cNvPr>
@@ -15340,7 +15320,7 @@
           <p:cNvPr id="8" name="テキスト ボックス 7">
             <a:extLst>
               <a:ext uri="{FF2B5EF4-FFF2-40B4-BE49-F238E27FC236}">
-                <a16:creationId xmlns:a16="http://schemas.microsoft.com/office/drawing/2014/main" id="{21ECA7FD-EB3E-4DF3-9F92-86377439748B}"/>
+                <a16:creationId xmlns:a16="http://schemas.microsoft.com/office/drawing/2014/main" id="{22A63906-BBA4-CC6F-EC13-7215F29BA1AA}"/>
               </a:ext>
             </a:extLst>
           </p:cNvPr>
@@ -15393,7 +15373,7 @@
           <p:cNvPr id="9" name="四角形: 角を丸くする 8">
             <a:extLst>
               <a:ext uri="{FF2B5EF4-FFF2-40B4-BE49-F238E27FC236}">
-                <a16:creationId xmlns:a16="http://schemas.microsoft.com/office/drawing/2014/main" id="{670D7DFB-8585-365B-E730-6087042660E7}"/>
+                <a16:creationId xmlns:a16="http://schemas.microsoft.com/office/drawing/2014/main" id="{011E6EEA-2C7A-0323-D76D-ADE8613C2C35}"/>
               </a:ext>
             </a:extLst>
           </p:cNvPr>
@@ -15463,7 +15443,7 @@
           <p:cNvPr id="10" name="楕円 9">
             <a:extLst>
               <a:ext uri="{FF2B5EF4-FFF2-40B4-BE49-F238E27FC236}">
-                <a16:creationId xmlns:a16="http://schemas.microsoft.com/office/drawing/2014/main" id="{F9FB3F69-FB76-51B4-7231-113CF2139746}"/>
+                <a16:creationId xmlns:a16="http://schemas.microsoft.com/office/drawing/2014/main" id="{7D29F801-3A92-4B88-C30B-576ADDDF9A0C}"/>
               </a:ext>
             </a:extLst>
           </p:cNvPr>
@@ -15531,7 +15511,7 @@
           <p:cNvPr id="11" name="テキスト ボックス 10">
             <a:extLst>
               <a:ext uri="{FF2B5EF4-FFF2-40B4-BE49-F238E27FC236}">
-                <a16:creationId xmlns:a16="http://schemas.microsoft.com/office/drawing/2014/main" id="{141C0CA1-F6B2-6486-5BDA-4165183108A3}"/>
+                <a16:creationId xmlns:a16="http://schemas.microsoft.com/office/drawing/2014/main" id="{1AEBCEF8-8151-C70D-0FED-C6FCD2429DAC}"/>
               </a:ext>
             </a:extLst>
           </p:cNvPr>
@@ -15584,7 +15564,7 @@
           <p:cNvPr id="12" name="テキスト ボックス 11">
             <a:extLst>
               <a:ext uri="{FF2B5EF4-FFF2-40B4-BE49-F238E27FC236}">
-                <a16:creationId xmlns:a16="http://schemas.microsoft.com/office/drawing/2014/main" id="{93FA1AD3-75D0-B247-AF32-3BAD2FF90948}"/>
+                <a16:creationId xmlns:a16="http://schemas.microsoft.com/office/drawing/2014/main" id="{DAEDE163-E0BD-9A21-A496-902BF221ADEF}"/>
               </a:ext>
             </a:extLst>
           </p:cNvPr>
@@ -15630,7 +15610,7 @@
           <p:cNvPr id="13" name="テキスト ボックス 12">
             <a:extLst>
               <a:ext uri="{FF2B5EF4-FFF2-40B4-BE49-F238E27FC236}">
-                <a16:creationId xmlns:a16="http://schemas.microsoft.com/office/drawing/2014/main" id="{BB014598-FEE5-9B69-8713-B190E2868870}"/>
+                <a16:creationId xmlns:a16="http://schemas.microsoft.com/office/drawing/2014/main" id="{C1CB7DC1-D8D5-073C-63DB-4F403315D70E}"/>
               </a:ext>
             </a:extLst>
           </p:cNvPr>
@@ -15676,7 +15656,7 @@
           <p:cNvPr id="14" name="四角形: 角を丸くする 13">
             <a:extLst>
               <a:ext uri="{FF2B5EF4-FFF2-40B4-BE49-F238E27FC236}">
-                <a16:creationId xmlns:a16="http://schemas.microsoft.com/office/drawing/2014/main" id="{25527E7C-23AF-79DA-9B17-6B29F0E5955D}"/>
+                <a16:creationId xmlns:a16="http://schemas.microsoft.com/office/drawing/2014/main" id="{05F646E4-6400-3FA1-F4B1-A5C0EB7C9F09}"/>
               </a:ext>
             </a:extLst>
           </p:cNvPr>
@@ -15746,7 +15726,7 @@
           <p:cNvPr id="15" name="楕円 14">
             <a:extLst>
               <a:ext uri="{FF2B5EF4-FFF2-40B4-BE49-F238E27FC236}">
-                <a16:creationId xmlns:a16="http://schemas.microsoft.com/office/drawing/2014/main" id="{BD5B7428-12D5-DA3B-AC8F-3BE8B3C05832}"/>
+                <a16:creationId xmlns:a16="http://schemas.microsoft.com/office/drawing/2014/main" id="{A9249339-B907-433A-0DF9-9CAA9BC8E77A}"/>
               </a:ext>
             </a:extLst>
           </p:cNvPr>
@@ -15814,7 +15794,7 @@
           <p:cNvPr id="16" name="テキスト ボックス 15">
             <a:extLst>
               <a:ext uri="{FF2B5EF4-FFF2-40B4-BE49-F238E27FC236}">
-                <a16:creationId xmlns:a16="http://schemas.microsoft.com/office/drawing/2014/main" id="{0C6A4DB0-C862-9220-F60E-4BB7BD324980}"/>
+                <a16:creationId xmlns:a16="http://schemas.microsoft.com/office/drawing/2014/main" id="{329F091C-5305-BBC5-31DF-8DFCD0FCB7DB}"/>
               </a:ext>
             </a:extLst>
           </p:cNvPr>
@@ -15867,7 +15847,7 @@
           <p:cNvPr id="17" name="テキスト ボックス 16">
             <a:extLst>
               <a:ext uri="{FF2B5EF4-FFF2-40B4-BE49-F238E27FC236}">
-                <a16:creationId xmlns:a16="http://schemas.microsoft.com/office/drawing/2014/main" id="{9183BB42-9474-2389-5EF3-D3E698822B51}"/>
+                <a16:creationId xmlns:a16="http://schemas.microsoft.com/office/drawing/2014/main" id="{E43EA77B-3870-74AB-EF4B-AE9CD1820327}"/>
               </a:ext>
             </a:extLst>
           </p:cNvPr>
@@ -15913,7 +15893,7 @@
           <p:cNvPr id="18" name="テキスト ボックス 17">
             <a:extLst>
               <a:ext uri="{FF2B5EF4-FFF2-40B4-BE49-F238E27FC236}">
-                <a16:creationId xmlns:a16="http://schemas.microsoft.com/office/drawing/2014/main" id="{037194E2-5814-DDEA-2328-9D6AD0D64BF7}"/>
+                <a16:creationId xmlns:a16="http://schemas.microsoft.com/office/drawing/2014/main" id="{7B25D6DC-A6D3-ED75-D73A-D7086BC6833E}"/>
               </a:ext>
             </a:extLst>
           </p:cNvPr>
@@ -16019,7 +15999,7 @@
           <p:cNvPr id="19" name="四角形: 角を丸くする 18">
             <a:extLst>
               <a:ext uri="{FF2B5EF4-FFF2-40B4-BE49-F238E27FC236}">
-                <a16:creationId xmlns:a16="http://schemas.microsoft.com/office/drawing/2014/main" id="{A842A48F-87CE-71EB-B562-EB1628649F89}"/>
+                <a16:creationId xmlns:a16="http://schemas.microsoft.com/office/drawing/2014/main" id="{799A478D-D68B-5A3A-F898-C1AF0E58F796}"/>
               </a:ext>
             </a:extLst>
           </p:cNvPr>
@@ -16089,7 +16069,7 @@
           <p:cNvPr id="20" name="楕円 19">
             <a:extLst>
               <a:ext uri="{FF2B5EF4-FFF2-40B4-BE49-F238E27FC236}">
-                <a16:creationId xmlns:a16="http://schemas.microsoft.com/office/drawing/2014/main" id="{8839D8EA-638B-D4B8-506F-7A19E3D86B3D}"/>
+                <a16:creationId xmlns:a16="http://schemas.microsoft.com/office/drawing/2014/main" id="{DA866A32-9DA2-EA6C-1C73-BC99A9328447}"/>
               </a:ext>
             </a:extLst>
           </p:cNvPr>
@@ -16157,7 +16137,7 @@
           <p:cNvPr id="21" name="テキスト ボックス 20">
             <a:extLst>
               <a:ext uri="{FF2B5EF4-FFF2-40B4-BE49-F238E27FC236}">
-                <a16:creationId xmlns:a16="http://schemas.microsoft.com/office/drawing/2014/main" id="{D7CC7E73-E990-CF3B-C950-5899347D69CD}"/>
+                <a16:creationId xmlns:a16="http://schemas.microsoft.com/office/drawing/2014/main" id="{F4553616-8560-10AF-5C06-BE189C100AA5}"/>
               </a:ext>
             </a:extLst>
           </p:cNvPr>
@@ -16210,7 +16190,7 @@
           <p:cNvPr id="22" name="テキスト ボックス 21">
             <a:extLst>
               <a:ext uri="{FF2B5EF4-FFF2-40B4-BE49-F238E27FC236}">
-                <a16:creationId xmlns:a16="http://schemas.microsoft.com/office/drawing/2014/main" id="{EC59B201-FD02-B016-6A81-BC15A6DCD8DD}"/>
+                <a16:creationId xmlns:a16="http://schemas.microsoft.com/office/drawing/2014/main" id="{9F50CB97-EDFE-66B8-1BF5-D65DEF236EA4}"/>
               </a:ext>
             </a:extLst>
           </p:cNvPr>
@@ -16276,7 +16256,7 @@
           <p:cNvPr id="23" name="テキスト ボックス 22">
             <a:extLst>
               <a:ext uri="{FF2B5EF4-FFF2-40B4-BE49-F238E27FC236}">
-                <a16:creationId xmlns:a16="http://schemas.microsoft.com/office/drawing/2014/main" id="{E04617E2-9CD5-7FEA-1AE8-F5F8617CC30C}"/>
+                <a16:creationId xmlns:a16="http://schemas.microsoft.com/office/drawing/2014/main" id="{181AFFCE-1B35-E742-FFAE-A5938FD76568}"/>
               </a:ext>
             </a:extLst>
           </p:cNvPr>
@@ -16340,7 +16320,7 @@
     </p:spTree>
     <p:extLst>
       <p:ext uri="{BB962C8B-B14F-4D97-AF65-F5344CB8AC3E}">
-        <p14:creationId xmlns:p14="http://schemas.microsoft.com/office/powerpoint/2010/main" val="3640073972"/>
+        <p14:creationId xmlns:p14="http://schemas.microsoft.com/office/powerpoint/2010/main" val="2657259350"/>
       </p:ext>
     </p:extLst>
   </p:cSld>
@@ -16372,7 +16352,7 @@
           <p:cNvPr id="2" name="正方形/長方形 1">
             <a:extLst>
               <a:ext uri="{FF2B5EF4-FFF2-40B4-BE49-F238E27FC236}">
-                <a16:creationId xmlns:a16="http://schemas.microsoft.com/office/drawing/2014/main" id="{540A33F9-1291-4D3C-4F7B-B7A84E55A348}"/>
+                <a16:creationId xmlns:a16="http://schemas.microsoft.com/office/drawing/2014/main" id="{0A2A5BDE-D5F3-9F46-1320-A23A1D1303FB}"/>
               </a:ext>
             </a:extLst>
           </p:cNvPr>
@@ -16440,7 +16420,7 @@
           <p:cNvPr id="3" name="正方形/長方形 2">
             <a:extLst>
               <a:ext uri="{FF2B5EF4-FFF2-40B4-BE49-F238E27FC236}">
-                <a16:creationId xmlns:a16="http://schemas.microsoft.com/office/drawing/2014/main" id="{588B5EDC-074F-0ABA-31CF-A337262E039F}"/>
+                <a16:creationId xmlns:a16="http://schemas.microsoft.com/office/drawing/2014/main" id="{DA3ACA24-4A1D-2BDA-8CDE-FA3000F0810E}"/>
               </a:ext>
             </a:extLst>
           </p:cNvPr>
@@ -16508,7 +16488,7 @@
           <p:cNvPr id="4" name="テキスト ボックス 3">
             <a:extLst>
               <a:ext uri="{FF2B5EF4-FFF2-40B4-BE49-F238E27FC236}">
-                <a16:creationId xmlns:a16="http://schemas.microsoft.com/office/drawing/2014/main" id="{6AAA2EB3-8FFE-ACAB-515B-E884CEA05BC8}"/>
+                <a16:creationId xmlns:a16="http://schemas.microsoft.com/office/drawing/2014/main" id="{150839C0-0D8C-73CE-CDD5-EF67E2A14E85}"/>
               </a:ext>
             </a:extLst>
           </p:cNvPr>
@@ -16561,7 +16541,7 @@
           <p:cNvPr id="5" name="テキスト ボックス 4">
             <a:extLst>
               <a:ext uri="{FF2B5EF4-FFF2-40B4-BE49-F238E27FC236}">
-                <a16:creationId xmlns:a16="http://schemas.microsoft.com/office/drawing/2014/main" id="{08E8359E-E8DB-8965-2966-B869ED858087}"/>
+                <a16:creationId xmlns:a16="http://schemas.microsoft.com/office/drawing/2014/main" id="{177B2E6C-1B36-18D7-34A8-1FFF6B8AA2E5}"/>
               </a:ext>
             </a:extLst>
           </p:cNvPr>
@@ -16627,7 +16607,7 @@
           <p:cNvPr id="6" name="正方形/長方形 5">
             <a:extLst>
               <a:ext uri="{FF2B5EF4-FFF2-40B4-BE49-F238E27FC236}">
-                <a16:creationId xmlns:a16="http://schemas.microsoft.com/office/drawing/2014/main" id="{D29460E7-CB54-9CDA-3C52-BC676C5FE020}"/>
+                <a16:creationId xmlns:a16="http://schemas.microsoft.com/office/drawing/2014/main" id="{97F54443-E8E5-7CFB-087E-282BD22F3F33}"/>
               </a:ext>
             </a:extLst>
           </p:cNvPr>
@@ -16695,7 +16675,7 @@
           <p:cNvPr id="7" name="テキスト ボックス 6">
             <a:extLst>
               <a:ext uri="{FF2B5EF4-FFF2-40B4-BE49-F238E27FC236}">
-                <a16:creationId xmlns:a16="http://schemas.microsoft.com/office/drawing/2014/main" id="{503A447E-A383-A6D8-7286-EF154E886D7F}"/>
+                <a16:creationId xmlns:a16="http://schemas.microsoft.com/office/drawing/2014/main" id="{2155F9B9-929B-A785-0010-470218EB4081}"/>
               </a:ext>
             </a:extLst>
           </p:cNvPr>
@@ -16741,7 +16721,7 @@
           <p:cNvPr id="8" name="テキスト ボックス 7">
             <a:extLst>
               <a:ext uri="{FF2B5EF4-FFF2-40B4-BE49-F238E27FC236}">
-                <a16:creationId xmlns:a16="http://schemas.microsoft.com/office/drawing/2014/main" id="{873ECC0F-4DA0-440B-09B4-15E3028FD21E}"/>
+                <a16:creationId xmlns:a16="http://schemas.microsoft.com/office/drawing/2014/main" id="{1AB2A4BC-DD1A-1B5B-B4EB-DC57E3B7CC36}"/>
               </a:ext>
             </a:extLst>
           </p:cNvPr>
@@ -16794,7 +16774,7 @@
           <p:cNvPr id="9" name="四角形: 角を丸くする 8">
             <a:extLst>
               <a:ext uri="{FF2B5EF4-FFF2-40B4-BE49-F238E27FC236}">
-                <a16:creationId xmlns:a16="http://schemas.microsoft.com/office/drawing/2014/main" id="{E267E79C-4155-D1B4-622A-971BB84D0F4A}"/>
+                <a16:creationId xmlns:a16="http://schemas.microsoft.com/office/drawing/2014/main" id="{17114E96-9257-C768-0758-C82453B2C061}"/>
               </a:ext>
             </a:extLst>
           </p:cNvPr>
@@ -16864,7 +16844,7 @@
           <p:cNvPr id="10" name="楕円 9">
             <a:extLst>
               <a:ext uri="{FF2B5EF4-FFF2-40B4-BE49-F238E27FC236}">
-                <a16:creationId xmlns:a16="http://schemas.microsoft.com/office/drawing/2014/main" id="{2E3CAE49-2EBA-CE95-A32A-239B2CCA759E}"/>
+                <a16:creationId xmlns:a16="http://schemas.microsoft.com/office/drawing/2014/main" id="{BBEE65CC-C945-4874-FDD8-7E7A532BA00D}"/>
               </a:ext>
             </a:extLst>
           </p:cNvPr>
@@ -16932,7 +16912,7 @@
           <p:cNvPr id="11" name="テキスト ボックス 10">
             <a:extLst>
               <a:ext uri="{FF2B5EF4-FFF2-40B4-BE49-F238E27FC236}">
-                <a16:creationId xmlns:a16="http://schemas.microsoft.com/office/drawing/2014/main" id="{05476035-4466-BA60-ACEF-85B37A2E6780}"/>
+                <a16:creationId xmlns:a16="http://schemas.microsoft.com/office/drawing/2014/main" id="{BF533B3A-C648-81C3-A9E0-918212EBEB82}"/>
               </a:ext>
             </a:extLst>
           </p:cNvPr>
@@ -16985,7 +16965,7 @@
           <p:cNvPr id="12" name="テキスト ボックス 11">
             <a:extLst>
               <a:ext uri="{FF2B5EF4-FFF2-40B4-BE49-F238E27FC236}">
-                <a16:creationId xmlns:a16="http://schemas.microsoft.com/office/drawing/2014/main" id="{31902835-840A-FD06-E3F1-732A8C0A97C8}"/>
+                <a16:creationId xmlns:a16="http://schemas.microsoft.com/office/drawing/2014/main" id="{5F17C627-9B73-A78E-7D39-979CE61C9D0A}"/>
               </a:ext>
             </a:extLst>
           </p:cNvPr>
@@ -17031,7 +17011,7 @@
           <p:cNvPr id="13" name="テキスト ボックス 12">
             <a:extLst>
               <a:ext uri="{FF2B5EF4-FFF2-40B4-BE49-F238E27FC236}">
-                <a16:creationId xmlns:a16="http://schemas.microsoft.com/office/drawing/2014/main" id="{1FFF4282-5BE3-6D8A-5BB9-B2A43C79006A}"/>
+                <a16:creationId xmlns:a16="http://schemas.microsoft.com/office/drawing/2014/main" id="{EBE8A366-AA47-5B5F-73E4-978EB524684B}"/>
               </a:ext>
             </a:extLst>
           </p:cNvPr>
@@ -17135,7 +17115,7 @@
     </p:spTree>
     <p:extLst>
       <p:ext uri="{BB962C8B-B14F-4D97-AF65-F5344CB8AC3E}">
-        <p14:creationId xmlns:p14="http://schemas.microsoft.com/office/powerpoint/2010/main" val="2148527375"/>
+        <p14:creationId xmlns:p14="http://schemas.microsoft.com/office/powerpoint/2010/main" val="3877405989"/>
       </p:ext>
     </p:extLst>
   </p:cSld>
@@ -17167,7 +17147,7 @@
           <p:cNvPr id="2" name="正方形/長方形 1">
             <a:extLst>
               <a:ext uri="{FF2B5EF4-FFF2-40B4-BE49-F238E27FC236}">
-                <a16:creationId xmlns:a16="http://schemas.microsoft.com/office/drawing/2014/main" id="{B22A2B23-FC23-2E63-253E-C722715B10BF}"/>
+                <a16:creationId xmlns:a16="http://schemas.microsoft.com/office/drawing/2014/main" id="{9625DF34-59DC-9DAB-F02B-BA3C8E88DD3A}"/>
               </a:ext>
             </a:extLst>
           </p:cNvPr>
@@ -17235,7 +17215,7 @@
           <p:cNvPr id="3" name="正方形/長方形 2">
             <a:extLst>
               <a:ext uri="{FF2B5EF4-FFF2-40B4-BE49-F238E27FC236}">
-                <a16:creationId xmlns:a16="http://schemas.microsoft.com/office/drawing/2014/main" id="{8291A95D-BEEB-DD2F-3CE7-074A8BD736AB}"/>
+                <a16:creationId xmlns:a16="http://schemas.microsoft.com/office/drawing/2014/main" id="{A005EED2-A6CF-BEEA-52D4-4C1F4DBE1B9C}"/>
               </a:ext>
             </a:extLst>
           </p:cNvPr>
@@ -17303,7 +17283,7 @@
           <p:cNvPr id="4" name="テキスト ボックス 3">
             <a:extLst>
               <a:ext uri="{FF2B5EF4-FFF2-40B4-BE49-F238E27FC236}">
-                <a16:creationId xmlns:a16="http://schemas.microsoft.com/office/drawing/2014/main" id="{1C1FE6E5-F717-E1EC-15BF-14576FF229A5}"/>
+                <a16:creationId xmlns:a16="http://schemas.microsoft.com/office/drawing/2014/main" id="{2FCC1559-7713-0717-7039-D2BC205FC8DE}"/>
               </a:ext>
             </a:extLst>
           </p:cNvPr>
@@ -17356,7 +17336,7 @@
           <p:cNvPr id="5" name="テキスト ボックス 4">
             <a:extLst>
               <a:ext uri="{FF2B5EF4-FFF2-40B4-BE49-F238E27FC236}">
-                <a16:creationId xmlns:a16="http://schemas.microsoft.com/office/drawing/2014/main" id="{628FA8E9-D5AA-6776-3D34-C3AB62CC135D}"/>
+                <a16:creationId xmlns:a16="http://schemas.microsoft.com/office/drawing/2014/main" id="{976523C5-C463-9D52-F6F0-5A02523F3FA2}"/>
               </a:ext>
             </a:extLst>
           </p:cNvPr>
@@ -17402,7 +17382,7 @@
           <p:cNvPr id="6" name="正方形/長方形 5">
             <a:extLst>
               <a:ext uri="{FF2B5EF4-FFF2-40B4-BE49-F238E27FC236}">
-                <a16:creationId xmlns:a16="http://schemas.microsoft.com/office/drawing/2014/main" id="{594BC001-0644-61F0-47AE-30B7DCBC7950}"/>
+                <a16:creationId xmlns:a16="http://schemas.microsoft.com/office/drawing/2014/main" id="{5EC17D29-B3D2-2A23-3B52-DE9EAC6D2BBC}"/>
               </a:ext>
             </a:extLst>
           </p:cNvPr>
@@ -17470,7 +17450,7 @@
           <p:cNvPr id="7" name="テキスト ボックス 6">
             <a:extLst>
               <a:ext uri="{FF2B5EF4-FFF2-40B4-BE49-F238E27FC236}">
-                <a16:creationId xmlns:a16="http://schemas.microsoft.com/office/drawing/2014/main" id="{755E1A04-4D3F-5E93-C57A-FFEAB10ABFAB}"/>
+                <a16:creationId xmlns:a16="http://schemas.microsoft.com/office/drawing/2014/main" id="{7C3B99CD-F1BB-3BDA-DB7F-05D1B8ED522D}"/>
               </a:ext>
             </a:extLst>
           </p:cNvPr>
@@ -17516,7 +17496,7 @@
           <p:cNvPr id="8" name="テキスト ボックス 7">
             <a:extLst>
               <a:ext uri="{FF2B5EF4-FFF2-40B4-BE49-F238E27FC236}">
-                <a16:creationId xmlns:a16="http://schemas.microsoft.com/office/drawing/2014/main" id="{5DADE250-B0CF-F411-6A3A-061EAACD2BF0}"/>
+                <a16:creationId xmlns:a16="http://schemas.microsoft.com/office/drawing/2014/main" id="{37D2BB41-F5DD-2957-B0FC-C2C0277B19E7}"/>
               </a:ext>
             </a:extLst>
           </p:cNvPr>
@@ -17569,7 +17549,7 @@
           <p:cNvPr id="9" name="テキスト ボックス 8">
             <a:extLst>
               <a:ext uri="{FF2B5EF4-FFF2-40B4-BE49-F238E27FC236}">
-                <a16:creationId xmlns:a16="http://schemas.microsoft.com/office/drawing/2014/main" id="{F5C11D16-9DED-14DB-CD0B-5BEB5C12AE36}"/>
+                <a16:creationId xmlns:a16="http://schemas.microsoft.com/office/drawing/2014/main" id="{4FCF592C-3D77-E1CC-47D7-0AB905B97077}"/>
               </a:ext>
             </a:extLst>
           </p:cNvPr>
@@ -17615,7 +17595,7 @@
           <p:cNvPr id="10" name="表 9">
             <a:extLst>
               <a:ext uri="{FF2B5EF4-FFF2-40B4-BE49-F238E27FC236}">
-                <a16:creationId xmlns:a16="http://schemas.microsoft.com/office/drawing/2014/main" id="{439C6BFA-54DB-5752-5D80-EB75C2F0FD8D}"/>
+                <a16:creationId xmlns:a16="http://schemas.microsoft.com/office/drawing/2014/main" id="{1657DDB5-356D-11FB-99DE-D858B6FB9CBD}"/>
               </a:ext>
             </a:extLst>
           </p:cNvPr>
@@ -17625,7 +17605,7 @@
           <p:nvPr>
             <p:extLst>
               <p:ext uri="{D42A27DB-BD31-4B8C-83A1-F6EECF244321}">
-                <p14:modId xmlns:p14="http://schemas.microsoft.com/office/powerpoint/2010/main" val="2371921182"/>
+                <p14:modId xmlns:p14="http://schemas.microsoft.com/office/powerpoint/2010/main" val="1984571974"/>
               </p:ext>
             </p:extLst>
           </p:nvPr>
@@ -17644,14 +17624,14 @@
                 <a:gridCol w="1905000">
                   <a:extLst>
                     <a:ext uri="{9D8B030D-6E8A-4147-A177-3AD203B41FA5}">
-                      <a16:colId xmlns:a16="http://schemas.microsoft.com/office/drawing/2014/main" val="1956997031"/>
+                      <a16:colId xmlns:a16="http://schemas.microsoft.com/office/drawing/2014/main" val="2573741416"/>
                     </a:ext>
                   </a:extLst>
                 </a:gridCol>
                 <a:gridCol w="3225800">
                   <a:extLst>
                     <a:ext uri="{9D8B030D-6E8A-4147-A177-3AD203B41FA5}">
-                      <a16:colId xmlns:a16="http://schemas.microsoft.com/office/drawing/2014/main" val="1246730259"/>
+                      <a16:colId xmlns:a16="http://schemas.microsoft.com/office/drawing/2014/main" val="3916735040"/>
                     </a:ext>
                   </a:extLst>
                 </a:gridCol>
@@ -17725,7 +17705,7 @@
                 </a:tc>
                 <a:extLst>
                   <a:ext uri="{0D108BD9-81ED-4DB2-BD59-A6C34878D82A}">
-                    <a16:rowId xmlns:a16="http://schemas.microsoft.com/office/drawing/2014/main" val="2203161022"/>
+                    <a16:rowId xmlns:a16="http://schemas.microsoft.com/office/drawing/2014/main" val="4250050605"/>
                   </a:ext>
                 </a:extLst>
               </a:tr>
@@ -17808,7 +17788,7 @@
                 </a:tc>
                 <a:extLst>
                   <a:ext uri="{0D108BD9-81ED-4DB2-BD59-A6C34878D82A}">
-                    <a16:rowId xmlns:a16="http://schemas.microsoft.com/office/drawing/2014/main" val="675017202"/>
+                    <a16:rowId xmlns:a16="http://schemas.microsoft.com/office/drawing/2014/main" val="1091914843"/>
                   </a:ext>
                 </a:extLst>
               </a:tr>
@@ -17891,7 +17871,7 @@
                 </a:tc>
                 <a:extLst>
                   <a:ext uri="{0D108BD9-81ED-4DB2-BD59-A6C34878D82A}">
-                    <a16:rowId xmlns:a16="http://schemas.microsoft.com/office/drawing/2014/main" val="1969608176"/>
+                    <a16:rowId xmlns:a16="http://schemas.microsoft.com/office/drawing/2014/main" val="1203589176"/>
                   </a:ext>
                 </a:extLst>
               </a:tr>
@@ -17994,7 +17974,7 @@
                 </a:tc>
                 <a:extLst>
                   <a:ext uri="{0D108BD9-81ED-4DB2-BD59-A6C34878D82A}">
-                    <a16:rowId xmlns:a16="http://schemas.microsoft.com/office/drawing/2014/main" val="3871371135"/>
+                    <a16:rowId xmlns:a16="http://schemas.microsoft.com/office/drawing/2014/main" val="23229540"/>
                   </a:ext>
                 </a:extLst>
               </a:tr>
@@ -18097,7 +18077,7 @@
                 </a:tc>
                 <a:extLst>
                   <a:ext uri="{0D108BD9-81ED-4DB2-BD59-A6C34878D82A}">
-                    <a16:rowId xmlns:a16="http://schemas.microsoft.com/office/drawing/2014/main" val="2567864531"/>
+                    <a16:rowId xmlns:a16="http://schemas.microsoft.com/office/drawing/2014/main" val="2267318792"/>
                   </a:ext>
                 </a:extLst>
               </a:tr>
@@ -18200,7 +18180,7 @@
                 </a:tc>
                 <a:extLst>
                   <a:ext uri="{0D108BD9-81ED-4DB2-BD59-A6C34878D82A}">
-                    <a16:rowId xmlns:a16="http://schemas.microsoft.com/office/drawing/2014/main" val="1812080315"/>
+                    <a16:rowId xmlns:a16="http://schemas.microsoft.com/office/drawing/2014/main" val="4286867235"/>
                   </a:ext>
                 </a:extLst>
               </a:tr>
@@ -18213,7 +18193,7 @@
           <p:cNvPr id="11" name="テキスト ボックス 10">
             <a:extLst>
               <a:ext uri="{FF2B5EF4-FFF2-40B4-BE49-F238E27FC236}">
-                <a16:creationId xmlns:a16="http://schemas.microsoft.com/office/drawing/2014/main" id="{55AA7BEB-7B93-92BC-B282-B944F2CBEE34}"/>
+                <a16:creationId xmlns:a16="http://schemas.microsoft.com/office/drawing/2014/main" id="{433982E2-4DA6-1B31-3AA7-CB0224DA2DDF}"/>
               </a:ext>
             </a:extLst>
           </p:cNvPr>
@@ -18259,7 +18239,7 @@
           <p:cNvPr id="12" name="表 11">
             <a:extLst>
               <a:ext uri="{FF2B5EF4-FFF2-40B4-BE49-F238E27FC236}">
-                <a16:creationId xmlns:a16="http://schemas.microsoft.com/office/drawing/2014/main" id="{3CC24CE4-7AA7-FF5E-76BC-751BAFEFA727}"/>
+                <a16:creationId xmlns:a16="http://schemas.microsoft.com/office/drawing/2014/main" id="{0C0B8DD7-6FC1-C4FE-185F-F77EDC9DFE38}"/>
               </a:ext>
             </a:extLst>
           </p:cNvPr>
@@ -18269,7 +18249,7 @@
           <p:nvPr>
             <p:extLst>
               <p:ext uri="{D42A27DB-BD31-4B8C-83A1-F6EECF244321}">
-                <p14:modId xmlns:p14="http://schemas.microsoft.com/office/powerpoint/2010/main" val="187693270"/>
+                <p14:modId xmlns:p14="http://schemas.microsoft.com/office/powerpoint/2010/main" val="2030512195"/>
               </p:ext>
             </p:extLst>
           </p:nvPr>
@@ -18288,14 +18268,14 @@
                 <a:gridCol w="1905000">
                   <a:extLst>
                     <a:ext uri="{9D8B030D-6E8A-4147-A177-3AD203B41FA5}">
-                      <a16:colId xmlns:a16="http://schemas.microsoft.com/office/drawing/2014/main" val="1244244419"/>
+                      <a16:colId xmlns:a16="http://schemas.microsoft.com/office/drawing/2014/main" val="1467100138"/>
                     </a:ext>
                   </a:extLst>
                 </a:gridCol>
                 <a:gridCol w="3225800">
                   <a:extLst>
                     <a:ext uri="{9D8B030D-6E8A-4147-A177-3AD203B41FA5}">
-                      <a16:colId xmlns:a16="http://schemas.microsoft.com/office/drawing/2014/main" val="3551645"/>
+                      <a16:colId xmlns:a16="http://schemas.microsoft.com/office/drawing/2014/main" val="1649736606"/>
                     </a:ext>
                   </a:extLst>
                 </a:gridCol>
@@ -18369,7 +18349,7 @@
                 </a:tc>
                 <a:extLst>
                   <a:ext uri="{0D108BD9-81ED-4DB2-BD59-A6C34878D82A}">
-                    <a16:rowId xmlns:a16="http://schemas.microsoft.com/office/drawing/2014/main" val="2108770580"/>
+                    <a16:rowId xmlns:a16="http://schemas.microsoft.com/office/drawing/2014/main" val="4283157529"/>
                   </a:ext>
                 </a:extLst>
               </a:tr>
@@ -18502,7 +18482,7 @@
                 </a:tc>
                 <a:extLst>
                   <a:ext uri="{0D108BD9-81ED-4DB2-BD59-A6C34878D82A}">
-                    <a16:rowId xmlns:a16="http://schemas.microsoft.com/office/drawing/2014/main" val="2241165079"/>
+                    <a16:rowId xmlns:a16="http://schemas.microsoft.com/office/drawing/2014/main" val="3950442791"/>
                   </a:ext>
                 </a:extLst>
               </a:tr>
@@ -18642,7 +18622,7 @@
                 </a:tc>
                 <a:extLst>
                   <a:ext uri="{0D108BD9-81ED-4DB2-BD59-A6C34878D82A}">
-                    <a16:rowId xmlns:a16="http://schemas.microsoft.com/office/drawing/2014/main" val="4007988536"/>
+                    <a16:rowId xmlns:a16="http://schemas.microsoft.com/office/drawing/2014/main" val="4117992481"/>
                   </a:ext>
                 </a:extLst>
               </a:tr>
@@ -18725,7 +18705,7 @@
                 </a:tc>
                 <a:extLst>
                   <a:ext uri="{0D108BD9-81ED-4DB2-BD59-A6C34878D82A}">
-                    <a16:rowId xmlns:a16="http://schemas.microsoft.com/office/drawing/2014/main" val="3798445470"/>
+                    <a16:rowId xmlns:a16="http://schemas.microsoft.com/office/drawing/2014/main" val="3939244914"/>
                   </a:ext>
                 </a:extLst>
               </a:tr>
@@ -18845,7 +18825,7 @@
                 </a:tc>
                 <a:extLst>
                   <a:ext uri="{0D108BD9-81ED-4DB2-BD59-A6C34878D82A}">
-                    <a16:rowId xmlns:a16="http://schemas.microsoft.com/office/drawing/2014/main" val="869026652"/>
+                    <a16:rowId xmlns:a16="http://schemas.microsoft.com/office/drawing/2014/main" val="2753683938"/>
                   </a:ext>
                 </a:extLst>
               </a:tr>
@@ -18928,7 +18908,7 @@
                 </a:tc>
                 <a:extLst>
                   <a:ext uri="{0D108BD9-81ED-4DB2-BD59-A6C34878D82A}">
-                    <a16:rowId xmlns:a16="http://schemas.microsoft.com/office/drawing/2014/main" val="3055313229"/>
+                    <a16:rowId xmlns:a16="http://schemas.microsoft.com/office/drawing/2014/main" val="3857687693"/>
                   </a:ext>
                 </a:extLst>
               </a:tr>
@@ -19011,7 +18991,7 @@
                 </a:tc>
                 <a:extLst>
                   <a:ext uri="{0D108BD9-81ED-4DB2-BD59-A6C34878D82A}">
-                    <a16:rowId xmlns:a16="http://schemas.microsoft.com/office/drawing/2014/main" val="532223534"/>
+                    <a16:rowId xmlns:a16="http://schemas.microsoft.com/office/drawing/2014/main" val="1338326102"/>
                   </a:ext>
                 </a:extLst>
               </a:tr>
@@ -19022,7 +19002,7 @@
     </p:spTree>
     <p:extLst>
       <p:ext uri="{BB962C8B-B14F-4D97-AF65-F5344CB8AC3E}">
-        <p14:creationId xmlns:p14="http://schemas.microsoft.com/office/powerpoint/2010/main" val="3584414429"/>
+        <p14:creationId xmlns:p14="http://schemas.microsoft.com/office/powerpoint/2010/main" val="2771662060"/>
       </p:ext>
     </p:extLst>
   </p:cSld>
@@ -19054,7 +19034,7 @@
           <p:cNvPr id="2" name="正方形/長方形 1">
             <a:extLst>
               <a:ext uri="{FF2B5EF4-FFF2-40B4-BE49-F238E27FC236}">
-                <a16:creationId xmlns:a16="http://schemas.microsoft.com/office/drawing/2014/main" id="{39E3B50F-7BC8-523A-82E6-263AF074970E}"/>
+                <a16:creationId xmlns:a16="http://schemas.microsoft.com/office/drawing/2014/main" id="{2C8AC3AE-EA76-1434-1887-F2B57369BE1D}"/>
               </a:ext>
             </a:extLst>
           </p:cNvPr>
@@ -19122,7 +19102,7 @@
           <p:cNvPr id="3" name="正方形/長方形 2">
             <a:extLst>
               <a:ext uri="{FF2B5EF4-FFF2-40B4-BE49-F238E27FC236}">
-                <a16:creationId xmlns:a16="http://schemas.microsoft.com/office/drawing/2014/main" id="{76AE7483-7B45-A846-0CC3-5F08E83F6C0B}"/>
+                <a16:creationId xmlns:a16="http://schemas.microsoft.com/office/drawing/2014/main" id="{382E7BFE-BF37-C230-00F8-C31E999595DA}"/>
               </a:ext>
             </a:extLst>
           </p:cNvPr>
@@ -19190,7 +19170,7 @@
           <p:cNvPr id="4" name="楕円 3">
             <a:extLst>
               <a:ext uri="{FF2B5EF4-FFF2-40B4-BE49-F238E27FC236}">
-                <a16:creationId xmlns:a16="http://schemas.microsoft.com/office/drawing/2014/main" id="{DCD480EE-4577-714E-48BA-4065F9F9F9BD}"/>
+                <a16:creationId xmlns:a16="http://schemas.microsoft.com/office/drawing/2014/main" id="{928769F1-5BFC-CA81-70B7-A5B480D85020}"/>
               </a:ext>
             </a:extLst>
           </p:cNvPr>
@@ -19260,7 +19240,7 @@
           <p:cNvPr id="5" name="正方形/長方形 4">
             <a:extLst>
               <a:ext uri="{FF2B5EF4-FFF2-40B4-BE49-F238E27FC236}">
-                <a16:creationId xmlns:a16="http://schemas.microsoft.com/office/drawing/2014/main" id="{622F936E-DB17-67E8-A3B1-26C023C9D8DD}"/>
+                <a16:creationId xmlns:a16="http://schemas.microsoft.com/office/drawing/2014/main" id="{72D59EE0-4E89-C0C9-835A-324CA353CE98}"/>
               </a:ext>
             </a:extLst>
           </p:cNvPr>
@@ -19328,7 +19308,7 @@
           <p:cNvPr id="6" name="テキスト ボックス 5">
             <a:extLst>
               <a:ext uri="{FF2B5EF4-FFF2-40B4-BE49-F238E27FC236}">
-                <a16:creationId xmlns:a16="http://schemas.microsoft.com/office/drawing/2014/main" id="{78B45245-2545-81F5-2B56-5CE01BF70143}"/>
+                <a16:creationId xmlns:a16="http://schemas.microsoft.com/office/drawing/2014/main" id="{8E29DC6C-8EDD-33F6-B299-BAC174E1FE6E}"/>
               </a:ext>
             </a:extLst>
           </p:cNvPr>
@@ -19374,7 +19354,7 @@
           <p:cNvPr id="7" name="テキスト ボックス 6">
             <a:extLst>
               <a:ext uri="{FF2B5EF4-FFF2-40B4-BE49-F238E27FC236}">
-                <a16:creationId xmlns:a16="http://schemas.microsoft.com/office/drawing/2014/main" id="{57CEC412-0C1A-751C-884B-A06F71D89EC0}"/>
+                <a16:creationId xmlns:a16="http://schemas.microsoft.com/office/drawing/2014/main" id="{76457AEA-2E17-2A16-AA9F-9F62A9347E83}"/>
               </a:ext>
             </a:extLst>
           </p:cNvPr>
@@ -19500,7 +19480,7 @@
           <p:cNvPr id="8" name="四角形: 角を丸くする 7">
             <a:extLst>
               <a:ext uri="{FF2B5EF4-FFF2-40B4-BE49-F238E27FC236}">
-                <a16:creationId xmlns:a16="http://schemas.microsoft.com/office/drawing/2014/main" id="{43F4349F-B0C3-A078-A281-CBD98E2DBC2B}"/>
+                <a16:creationId xmlns:a16="http://schemas.microsoft.com/office/drawing/2014/main" id="{330CFDDE-B1B3-BECE-6553-90B62E2FCA50}"/>
               </a:ext>
             </a:extLst>
           </p:cNvPr>
@@ -19570,7 +19550,7 @@
           <p:cNvPr id="9" name="正方形/長方形 8">
             <a:extLst>
               <a:ext uri="{FF2B5EF4-FFF2-40B4-BE49-F238E27FC236}">
-                <a16:creationId xmlns:a16="http://schemas.microsoft.com/office/drawing/2014/main" id="{8D2A11D6-0779-F184-79D5-686B8C8D2118}"/>
+                <a16:creationId xmlns:a16="http://schemas.microsoft.com/office/drawing/2014/main" id="{A3F6CDFD-6FD9-F196-AD16-2AD359B66336}"/>
               </a:ext>
             </a:extLst>
           </p:cNvPr>
@@ -19638,7 +19618,7 @@
           <p:cNvPr id="10" name="テキスト ボックス 9">
             <a:extLst>
               <a:ext uri="{FF2B5EF4-FFF2-40B4-BE49-F238E27FC236}">
-                <a16:creationId xmlns:a16="http://schemas.microsoft.com/office/drawing/2014/main" id="{60C7C6AD-6195-BEC6-E9D5-A612BA7F11E9}"/>
+                <a16:creationId xmlns:a16="http://schemas.microsoft.com/office/drawing/2014/main" id="{5D33C0BD-546B-F7C4-83DE-91E95BCFA99F}"/>
               </a:ext>
             </a:extLst>
           </p:cNvPr>
@@ -19684,7 +19664,7 @@
           <p:cNvPr id="11" name="テキスト ボックス 10">
             <a:extLst>
               <a:ext uri="{FF2B5EF4-FFF2-40B4-BE49-F238E27FC236}">
-                <a16:creationId xmlns:a16="http://schemas.microsoft.com/office/drawing/2014/main" id="{E81AC414-1A05-E2C9-DAB8-6E24368C965E}"/>
+                <a16:creationId xmlns:a16="http://schemas.microsoft.com/office/drawing/2014/main" id="{671FB82A-3A04-E7C5-1DB4-4DB8CBCA8B9A}"/>
               </a:ext>
             </a:extLst>
           </p:cNvPr>
@@ -19730,7 +19710,7 @@
           <p:cNvPr id="12" name="四角形: 角を丸くする 11">
             <a:extLst>
               <a:ext uri="{FF2B5EF4-FFF2-40B4-BE49-F238E27FC236}">
-                <a16:creationId xmlns:a16="http://schemas.microsoft.com/office/drawing/2014/main" id="{03678B96-40F8-AD42-D937-DE4441D16E1B}"/>
+                <a16:creationId xmlns:a16="http://schemas.microsoft.com/office/drawing/2014/main" id="{87CECC17-B96D-0152-4824-880D6016B682}"/>
               </a:ext>
             </a:extLst>
           </p:cNvPr>
@@ -19800,7 +19780,7 @@
           <p:cNvPr id="13" name="正方形/長方形 12">
             <a:extLst>
               <a:ext uri="{FF2B5EF4-FFF2-40B4-BE49-F238E27FC236}">
-                <a16:creationId xmlns:a16="http://schemas.microsoft.com/office/drawing/2014/main" id="{0C0BD3CA-3CA7-428B-C457-9BAFAC1FB3D8}"/>
+                <a16:creationId xmlns:a16="http://schemas.microsoft.com/office/drawing/2014/main" id="{EDBB2F41-BDEE-5E4A-530D-DA60E242AF00}"/>
               </a:ext>
             </a:extLst>
           </p:cNvPr>
@@ -19868,7 +19848,7 @@
           <p:cNvPr id="14" name="テキスト ボックス 13">
             <a:extLst>
               <a:ext uri="{FF2B5EF4-FFF2-40B4-BE49-F238E27FC236}">
-                <a16:creationId xmlns:a16="http://schemas.microsoft.com/office/drawing/2014/main" id="{B02DA008-CCE5-429F-34E6-7D611D50DC91}"/>
+                <a16:creationId xmlns:a16="http://schemas.microsoft.com/office/drawing/2014/main" id="{98B6FF66-426F-D865-65E4-87F768B74F15}"/>
               </a:ext>
             </a:extLst>
           </p:cNvPr>
@@ -19914,7 +19894,7 @@
           <p:cNvPr id="15" name="テキスト ボックス 14">
             <a:extLst>
               <a:ext uri="{FF2B5EF4-FFF2-40B4-BE49-F238E27FC236}">
-                <a16:creationId xmlns:a16="http://schemas.microsoft.com/office/drawing/2014/main" id="{8149FFE3-562B-3C80-27C5-3F6D8A2C512B}"/>
+                <a16:creationId xmlns:a16="http://schemas.microsoft.com/office/drawing/2014/main" id="{DD5819D5-014C-7044-76FE-AF8E47E2084C}"/>
               </a:ext>
             </a:extLst>
           </p:cNvPr>
@@ -19960,7 +19940,7 @@
           <p:cNvPr id="16" name="四角形: 角を丸くする 15">
             <a:extLst>
               <a:ext uri="{FF2B5EF4-FFF2-40B4-BE49-F238E27FC236}">
-                <a16:creationId xmlns:a16="http://schemas.microsoft.com/office/drawing/2014/main" id="{A6889B76-C63F-1683-6CD0-54EA26D7F761}"/>
+                <a16:creationId xmlns:a16="http://schemas.microsoft.com/office/drawing/2014/main" id="{264DD5FD-22C2-14B0-8832-BEFCB9A5D4EA}"/>
               </a:ext>
             </a:extLst>
           </p:cNvPr>
@@ -20030,7 +20010,7 @@
           <p:cNvPr id="17" name="正方形/長方形 16">
             <a:extLst>
               <a:ext uri="{FF2B5EF4-FFF2-40B4-BE49-F238E27FC236}">
-                <a16:creationId xmlns:a16="http://schemas.microsoft.com/office/drawing/2014/main" id="{ED24B6F4-5AEE-FD51-7B08-C1A69899DA17}"/>
+                <a16:creationId xmlns:a16="http://schemas.microsoft.com/office/drawing/2014/main" id="{9F1151E4-4CD3-8C8F-3078-878D679057A2}"/>
               </a:ext>
             </a:extLst>
           </p:cNvPr>
@@ -20098,7 +20078,7 @@
           <p:cNvPr id="18" name="テキスト ボックス 17">
             <a:extLst>
               <a:ext uri="{FF2B5EF4-FFF2-40B4-BE49-F238E27FC236}">
-                <a16:creationId xmlns:a16="http://schemas.microsoft.com/office/drawing/2014/main" id="{83DE9D80-0533-FB11-225E-6D9AC610A903}"/>
+                <a16:creationId xmlns:a16="http://schemas.microsoft.com/office/drawing/2014/main" id="{1F56AB23-3E83-F630-C418-F5397BB43438}"/>
               </a:ext>
             </a:extLst>
           </p:cNvPr>
@@ -20144,7 +20124,7 @@
           <p:cNvPr id="19" name="テキスト ボックス 18">
             <a:extLst>
               <a:ext uri="{FF2B5EF4-FFF2-40B4-BE49-F238E27FC236}">
-                <a16:creationId xmlns:a16="http://schemas.microsoft.com/office/drawing/2014/main" id="{BC4D7028-C6CA-49DB-6702-C2EA25A05339}"/>
+                <a16:creationId xmlns:a16="http://schemas.microsoft.com/office/drawing/2014/main" id="{C0A4FD70-047A-1F35-796D-769720C0371A}"/>
               </a:ext>
             </a:extLst>
           </p:cNvPr>
@@ -20190,7 +20170,7 @@
           <p:cNvPr id="20" name="正方形/長方形 19">
             <a:extLst>
               <a:ext uri="{FF2B5EF4-FFF2-40B4-BE49-F238E27FC236}">
-                <a16:creationId xmlns:a16="http://schemas.microsoft.com/office/drawing/2014/main" id="{D4F80A49-1D02-1AFE-1C23-7468F6B0EC92}"/>
+                <a16:creationId xmlns:a16="http://schemas.microsoft.com/office/drawing/2014/main" id="{D10F00BE-C09C-DF77-9915-3EE81474D209}"/>
               </a:ext>
             </a:extLst>
           </p:cNvPr>
@@ -20258,7 +20238,7 @@
           <p:cNvPr id="21" name="テキスト ボックス 20">
             <a:extLst>
               <a:ext uri="{FF2B5EF4-FFF2-40B4-BE49-F238E27FC236}">
-                <a16:creationId xmlns:a16="http://schemas.microsoft.com/office/drawing/2014/main" id="{A71EEB53-9E5A-C2DA-2C79-BCDF7D387380}"/>
+                <a16:creationId xmlns:a16="http://schemas.microsoft.com/office/drawing/2014/main" id="{AF322060-6CF0-13CB-20E9-01D7801673A9}"/>
               </a:ext>
             </a:extLst>
           </p:cNvPr>
@@ -20322,7 +20302,7 @@
     </p:spTree>
     <p:extLst>
       <p:ext uri="{BB962C8B-B14F-4D97-AF65-F5344CB8AC3E}">
-        <p14:creationId xmlns:p14="http://schemas.microsoft.com/office/powerpoint/2010/main" val="3083873518"/>
+        <p14:creationId xmlns:p14="http://schemas.microsoft.com/office/powerpoint/2010/main" val="3186298334"/>
       </p:ext>
     </p:extLst>
   </p:cSld>
@@ -20354,7 +20334,7 @@
           <p:cNvPr id="2" name="正方形/長方形 1">
             <a:extLst>
               <a:ext uri="{FF2B5EF4-FFF2-40B4-BE49-F238E27FC236}">
-                <a16:creationId xmlns:a16="http://schemas.microsoft.com/office/drawing/2014/main" id="{16163A2D-FA46-9D9F-BF22-069E871F10D7}"/>
+                <a16:creationId xmlns:a16="http://schemas.microsoft.com/office/drawing/2014/main" id="{004C321B-A898-CB0C-7F75-DC1677786CE5}"/>
               </a:ext>
             </a:extLst>
           </p:cNvPr>
@@ -20422,7 +20402,7 @@
           <p:cNvPr id="3" name="正方形/長方形 2">
             <a:extLst>
               <a:ext uri="{FF2B5EF4-FFF2-40B4-BE49-F238E27FC236}">
-                <a16:creationId xmlns:a16="http://schemas.microsoft.com/office/drawing/2014/main" id="{250591F8-EBE7-F1D2-AA31-24FC465AEFF2}"/>
+                <a16:creationId xmlns:a16="http://schemas.microsoft.com/office/drawing/2014/main" id="{5007F7FD-1A93-8548-2C42-28C08A821A77}"/>
               </a:ext>
             </a:extLst>
           </p:cNvPr>
@@ -20490,7 +20470,7 @@
           <p:cNvPr id="4" name="テキスト ボックス 3">
             <a:extLst>
               <a:ext uri="{FF2B5EF4-FFF2-40B4-BE49-F238E27FC236}">
-                <a16:creationId xmlns:a16="http://schemas.microsoft.com/office/drawing/2014/main" id="{BA845175-04B9-111A-2819-506F11FC9584}"/>
+                <a16:creationId xmlns:a16="http://schemas.microsoft.com/office/drawing/2014/main" id="{468244CC-C83E-90C5-3A97-86874CD1CE5F}"/>
               </a:ext>
             </a:extLst>
           </p:cNvPr>
@@ -20543,7 +20523,7 @@
           <p:cNvPr id="5" name="テキスト ボックス 4">
             <a:extLst>
               <a:ext uri="{FF2B5EF4-FFF2-40B4-BE49-F238E27FC236}">
-                <a16:creationId xmlns:a16="http://schemas.microsoft.com/office/drawing/2014/main" id="{5502C4AA-6720-D4EF-2A31-220498CF66F4}"/>
+                <a16:creationId xmlns:a16="http://schemas.microsoft.com/office/drawing/2014/main" id="{C6119AB7-2C84-087D-2718-ED762C8FC249}"/>
               </a:ext>
             </a:extLst>
           </p:cNvPr>
@@ -20589,7 +20569,7 @@
           <p:cNvPr id="6" name="正方形/長方形 5">
             <a:extLst>
               <a:ext uri="{FF2B5EF4-FFF2-40B4-BE49-F238E27FC236}">
-                <a16:creationId xmlns:a16="http://schemas.microsoft.com/office/drawing/2014/main" id="{93E9CF30-7D81-1802-B1D1-788F51528084}"/>
+                <a16:creationId xmlns:a16="http://schemas.microsoft.com/office/drawing/2014/main" id="{7033DC43-A818-96AE-EFC1-FDA1ED5AEC10}"/>
               </a:ext>
             </a:extLst>
           </p:cNvPr>
@@ -20657,7 +20637,7 @@
           <p:cNvPr id="7" name="テキスト ボックス 6">
             <a:extLst>
               <a:ext uri="{FF2B5EF4-FFF2-40B4-BE49-F238E27FC236}">
-                <a16:creationId xmlns:a16="http://schemas.microsoft.com/office/drawing/2014/main" id="{3A91CE33-3F37-8756-360E-B0D8892DD5E0}"/>
+                <a16:creationId xmlns:a16="http://schemas.microsoft.com/office/drawing/2014/main" id="{C34E8426-A313-D185-7209-C0EBF3238B62}"/>
               </a:ext>
             </a:extLst>
           </p:cNvPr>
@@ -20703,7 +20683,7 @@
           <p:cNvPr id="8" name="テキスト ボックス 7">
             <a:extLst>
               <a:ext uri="{FF2B5EF4-FFF2-40B4-BE49-F238E27FC236}">
-                <a16:creationId xmlns:a16="http://schemas.microsoft.com/office/drawing/2014/main" id="{7E8F98B0-BBD7-2108-7A5B-98D8C71F9904}"/>
+                <a16:creationId xmlns:a16="http://schemas.microsoft.com/office/drawing/2014/main" id="{36E57FC4-BDDA-5513-6F3B-31FA3DDB0420}"/>
               </a:ext>
             </a:extLst>
           </p:cNvPr>
@@ -20756,7 +20736,7 @@
           <p:cNvPr id="9" name="テキスト ボックス 8">
             <a:extLst>
               <a:ext uri="{FF2B5EF4-FFF2-40B4-BE49-F238E27FC236}">
-                <a16:creationId xmlns:a16="http://schemas.microsoft.com/office/drawing/2014/main" id="{489B387C-1C64-4BB5-9334-71F7F8001797}"/>
+                <a16:creationId xmlns:a16="http://schemas.microsoft.com/office/drawing/2014/main" id="{F7526CBC-9DEE-8307-3417-C9B8432EC908}"/>
               </a:ext>
             </a:extLst>
           </p:cNvPr>
@@ -20822,7 +20802,7 @@
           <p:cNvPr id="10" name="四角形: 角を丸くする 9">
             <a:extLst>
               <a:ext uri="{FF2B5EF4-FFF2-40B4-BE49-F238E27FC236}">
-                <a16:creationId xmlns:a16="http://schemas.microsoft.com/office/drawing/2014/main" id="{C81B628D-AC13-794A-8996-66A9765987CE}"/>
+                <a16:creationId xmlns:a16="http://schemas.microsoft.com/office/drawing/2014/main" id="{101070EE-1123-A8FB-12C5-9713EBBD3800}"/>
               </a:ext>
             </a:extLst>
           </p:cNvPr>
@@ -20878,7 +20858,7 @@
           <p:cNvPr id="11" name="正方形/長方形 10">
             <a:extLst>
               <a:ext uri="{FF2B5EF4-FFF2-40B4-BE49-F238E27FC236}">
-                <a16:creationId xmlns:a16="http://schemas.microsoft.com/office/drawing/2014/main" id="{DA3E956C-C6C1-A41E-C343-A42281024598}"/>
+                <a16:creationId xmlns:a16="http://schemas.microsoft.com/office/drawing/2014/main" id="{1847A91E-068C-A62D-3CF4-3B548FF7A321}"/>
               </a:ext>
             </a:extLst>
           </p:cNvPr>
@@ -20946,7 +20926,7 @@
           <p:cNvPr id="12" name="四角形: 角を丸くする 11">
             <a:extLst>
               <a:ext uri="{FF2B5EF4-FFF2-40B4-BE49-F238E27FC236}">
-                <a16:creationId xmlns:a16="http://schemas.microsoft.com/office/drawing/2014/main" id="{79A75802-29E5-4A21-F485-E2EB9D4B1EFF}"/>
+                <a16:creationId xmlns:a16="http://schemas.microsoft.com/office/drawing/2014/main" id="{8D563891-B41F-B6B4-4616-0A86876A4F2B}"/>
               </a:ext>
             </a:extLst>
           </p:cNvPr>
@@ -21016,7 +20996,7 @@
           <p:cNvPr id="13" name="テキスト ボックス 12">
             <a:extLst>
               <a:ext uri="{FF2B5EF4-FFF2-40B4-BE49-F238E27FC236}">
-                <a16:creationId xmlns:a16="http://schemas.microsoft.com/office/drawing/2014/main" id="{06E8364A-A5DC-231E-52F4-A510E340F46E}"/>
+                <a16:creationId xmlns:a16="http://schemas.microsoft.com/office/drawing/2014/main" id="{4C61765A-6AF0-71A1-22C1-2CCC90503F86}"/>
               </a:ext>
             </a:extLst>
           </p:cNvPr>
@@ -21069,7 +21049,7 @@
           <p:cNvPr id="14" name="テキスト ボックス 13">
             <a:extLst>
               <a:ext uri="{FF2B5EF4-FFF2-40B4-BE49-F238E27FC236}">
-                <a16:creationId xmlns:a16="http://schemas.microsoft.com/office/drawing/2014/main" id="{77A6A8A5-48FE-9BBD-4B68-6A4F4A917671}"/>
+                <a16:creationId xmlns:a16="http://schemas.microsoft.com/office/drawing/2014/main" id="{EE786151-5759-A95B-79B4-2E3DC9BB1A67}"/>
               </a:ext>
             </a:extLst>
           </p:cNvPr>
@@ -21115,7 +21095,7 @@
           <p:cNvPr id="15" name="テキスト ボックス 14">
             <a:extLst>
               <a:ext uri="{FF2B5EF4-FFF2-40B4-BE49-F238E27FC236}">
-                <a16:creationId xmlns:a16="http://schemas.microsoft.com/office/drawing/2014/main" id="{CF65C6FF-3B30-D339-3471-843ED3EE844C}"/>
+                <a16:creationId xmlns:a16="http://schemas.microsoft.com/office/drawing/2014/main" id="{F3954442-AB27-FFB6-C8F0-5CD1C597053C}"/>
               </a:ext>
             </a:extLst>
           </p:cNvPr>
@@ -21161,7 +21141,7 @@
           <p:cNvPr id="16" name="テキスト ボックス 15">
             <a:extLst>
               <a:ext uri="{FF2B5EF4-FFF2-40B4-BE49-F238E27FC236}">
-                <a16:creationId xmlns:a16="http://schemas.microsoft.com/office/drawing/2014/main" id="{3E6B64BB-AAB9-F99E-B293-69C1E43FACB4}"/>
+                <a16:creationId xmlns:a16="http://schemas.microsoft.com/office/drawing/2014/main" id="{1474F5C1-CAE8-C5B9-E16C-8F26DFD2F790}"/>
               </a:ext>
             </a:extLst>
           </p:cNvPr>
@@ -21250,7 +21230,7 @@
           <p:cNvPr id="17" name="四角形: 角を丸くする 16">
             <a:extLst>
               <a:ext uri="{FF2B5EF4-FFF2-40B4-BE49-F238E27FC236}">
-                <a16:creationId xmlns:a16="http://schemas.microsoft.com/office/drawing/2014/main" id="{FC6832F2-3417-E861-9B2D-A38D5EFDCFB6}"/>
+                <a16:creationId xmlns:a16="http://schemas.microsoft.com/office/drawing/2014/main" id="{F46AE816-B995-9A8E-CC49-56C1AE8986AB}"/>
               </a:ext>
             </a:extLst>
           </p:cNvPr>
@@ -21306,7 +21286,7 @@
           <p:cNvPr id="18" name="正方形/長方形 17">
             <a:extLst>
               <a:ext uri="{FF2B5EF4-FFF2-40B4-BE49-F238E27FC236}">
-                <a16:creationId xmlns:a16="http://schemas.microsoft.com/office/drawing/2014/main" id="{ED800825-80DD-AA1C-9AC2-75250DD3287E}"/>
+                <a16:creationId xmlns:a16="http://schemas.microsoft.com/office/drawing/2014/main" id="{2FC0F4FD-BD35-6134-A8B8-D66B124778D3}"/>
               </a:ext>
             </a:extLst>
           </p:cNvPr>
@@ -21374,7 +21354,7 @@
           <p:cNvPr id="19" name="四角形: 角を丸くする 18">
             <a:extLst>
               <a:ext uri="{FF2B5EF4-FFF2-40B4-BE49-F238E27FC236}">
-                <a16:creationId xmlns:a16="http://schemas.microsoft.com/office/drawing/2014/main" id="{5A90A128-FDC4-67C7-565A-D890DDFC9D00}"/>
+                <a16:creationId xmlns:a16="http://schemas.microsoft.com/office/drawing/2014/main" id="{9806AD4C-6862-0E51-00CA-4F7E3F3D16BD}"/>
               </a:ext>
             </a:extLst>
           </p:cNvPr>
@@ -21444,7 +21424,7 @@
           <p:cNvPr id="20" name="テキスト ボックス 19">
             <a:extLst>
               <a:ext uri="{FF2B5EF4-FFF2-40B4-BE49-F238E27FC236}">
-                <a16:creationId xmlns:a16="http://schemas.microsoft.com/office/drawing/2014/main" id="{C5A50B84-5EB4-790B-2AA5-FF59E11353B9}"/>
+                <a16:creationId xmlns:a16="http://schemas.microsoft.com/office/drawing/2014/main" id="{D91BE002-F70F-142B-8AC6-8717396E6DEA}"/>
               </a:ext>
             </a:extLst>
           </p:cNvPr>
@@ -21497,7 +21477,7 @@
           <p:cNvPr id="21" name="テキスト ボックス 20">
             <a:extLst>
               <a:ext uri="{FF2B5EF4-FFF2-40B4-BE49-F238E27FC236}">
-                <a16:creationId xmlns:a16="http://schemas.microsoft.com/office/drawing/2014/main" id="{5FB97994-4A9A-1EE2-1EF0-114D262F13AE}"/>
+                <a16:creationId xmlns:a16="http://schemas.microsoft.com/office/drawing/2014/main" id="{B7BD4143-3D1B-E7B6-6173-1A4F61116593}"/>
               </a:ext>
             </a:extLst>
           </p:cNvPr>
@@ -21543,7 +21523,7 @@
           <p:cNvPr id="22" name="テキスト ボックス 21">
             <a:extLst>
               <a:ext uri="{FF2B5EF4-FFF2-40B4-BE49-F238E27FC236}">
-                <a16:creationId xmlns:a16="http://schemas.microsoft.com/office/drawing/2014/main" id="{9C6289A1-8F42-C725-F403-8BEC5CC15408}"/>
+                <a16:creationId xmlns:a16="http://schemas.microsoft.com/office/drawing/2014/main" id="{34DCE2D8-CB5C-B0B3-C14E-66DA658120B4}"/>
               </a:ext>
             </a:extLst>
           </p:cNvPr>
@@ -21589,7 +21569,7 @@
           <p:cNvPr id="23" name="テキスト ボックス 22">
             <a:extLst>
               <a:ext uri="{FF2B5EF4-FFF2-40B4-BE49-F238E27FC236}">
-                <a16:creationId xmlns:a16="http://schemas.microsoft.com/office/drawing/2014/main" id="{C5B51208-2965-B2D7-22F7-C96C6E4C8355}"/>
+                <a16:creationId xmlns:a16="http://schemas.microsoft.com/office/drawing/2014/main" id="{0CE6C835-3F5F-B700-B983-6CAE7B99BE21}"/>
               </a:ext>
             </a:extLst>
           </p:cNvPr>
@@ -21678,7 +21658,7 @@
           <p:cNvPr id="24" name="四角形: 角を丸くする 23">
             <a:extLst>
               <a:ext uri="{FF2B5EF4-FFF2-40B4-BE49-F238E27FC236}">
-                <a16:creationId xmlns:a16="http://schemas.microsoft.com/office/drawing/2014/main" id="{E1561335-9E66-F3C5-0D56-BC5CB8A81A23}"/>
+                <a16:creationId xmlns:a16="http://schemas.microsoft.com/office/drawing/2014/main" id="{9A949C9A-A88B-C50E-3D16-AE0226BA0C8B}"/>
               </a:ext>
             </a:extLst>
           </p:cNvPr>
@@ -21748,7 +21728,7 @@
           <p:cNvPr id="25" name="正方形/長方形 24">
             <a:extLst>
               <a:ext uri="{FF2B5EF4-FFF2-40B4-BE49-F238E27FC236}">
-                <a16:creationId xmlns:a16="http://schemas.microsoft.com/office/drawing/2014/main" id="{447513B1-B791-63FA-DBFC-DE06812F80A0}"/>
+                <a16:creationId xmlns:a16="http://schemas.microsoft.com/office/drawing/2014/main" id="{6404329A-595E-216A-4F3B-E980E8CA8135}"/>
               </a:ext>
             </a:extLst>
           </p:cNvPr>
@@ -21816,7 +21796,7 @@
           <p:cNvPr id="26" name="テキスト ボックス 25">
             <a:extLst>
               <a:ext uri="{FF2B5EF4-FFF2-40B4-BE49-F238E27FC236}">
-                <a16:creationId xmlns:a16="http://schemas.microsoft.com/office/drawing/2014/main" id="{B0F7B8E2-DAE1-AA8D-CB64-95D87711E4A9}"/>
+                <a16:creationId xmlns:a16="http://schemas.microsoft.com/office/drawing/2014/main" id="{FD4030C0-4791-84C4-950E-E0D7193B4CB8}"/>
               </a:ext>
             </a:extLst>
           </p:cNvPr>
@@ -21869,7 +21849,7 @@
           <p:cNvPr id="27" name="テキスト ボックス 26">
             <a:extLst>
               <a:ext uri="{FF2B5EF4-FFF2-40B4-BE49-F238E27FC236}">
-                <a16:creationId xmlns:a16="http://schemas.microsoft.com/office/drawing/2014/main" id="{F07425CB-4B44-4081-4114-DF28C2BF028A}"/>
+                <a16:creationId xmlns:a16="http://schemas.microsoft.com/office/drawing/2014/main" id="{E5BEBFBD-E880-BBD2-3614-860D4BC4750D}"/>
               </a:ext>
             </a:extLst>
           </p:cNvPr>
@@ -21913,7 +21893,7 @@
     </p:spTree>
     <p:extLst>
       <p:ext uri="{BB962C8B-B14F-4D97-AF65-F5344CB8AC3E}">
-        <p14:creationId xmlns:p14="http://schemas.microsoft.com/office/powerpoint/2010/main" val="3552689750"/>
+        <p14:creationId xmlns:p14="http://schemas.microsoft.com/office/powerpoint/2010/main" val="3056490106"/>
       </p:ext>
     </p:extLst>
   </p:cSld>
@@ -21945,7 +21925,7 @@
           <p:cNvPr id="2" name="正方形/長方形 1">
             <a:extLst>
               <a:ext uri="{FF2B5EF4-FFF2-40B4-BE49-F238E27FC236}">
-                <a16:creationId xmlns:a16="http://schemas.microsoft.com/office/drawing/2014/main" id="{4293C5BE-4BB6-65AC-5A02-06B2C9679046}"/>
+                <a16:creationId xmlns:a16="http://schemas.microsoft.com/office/drawing/2014/main" id="{9939FD0B-A0C7-7FF6-7145-7A86C12129F5}"/>
               </a:ext>
             </a:extLst>
           </p:cNvPr>
@@ -22013,7 +21993,7 @@
           <p:cNvPr id="3" name="正方形/長方形 2">
             <a:extLst>
               <a:ext uri="{FF2B5EF4-FFF2-40B4-BE49-F238E27FC236}">
-                <a16:creationId xmlns:a16="http://schemas.microsoft.com/office/drawing/2014/main" id="{B4E54F21-0D47-908C-7B4C-83CEEE1E819F}"/>
+                <a16:creationId xmlns:a16="http://schemas.microsoft.com/office/drawing/2014/main" id="{24ABF57B-BD40-0786-9ED3-F5CEBF73D8E3}"/>
               </a:ext>
             </a:extLst>
           </p:cNvPr>
@@ -22081,7 +22061,7 @@
           <p:cNvPr id="4" name="テキスト ボックス 3">
             <a:extLst>
               <a:ext uri="{FF2B5EF4-FFF2-40B4-BE49-F238E27FC236}">
-                <a16:creationId xmlns:a16="http://schemas.microsoft.com/office/drawing/2014/main" id="{05A73C01-B830-CAE4-C3D1-089B052CD590}"/>
+                <a16:creationId xmlns:a16="http://schemas.microsoft.com/office/drawing/2014/main" id="{BB60FBBE-17E3-A9AC-4FDD-95440422C634}"/>
               </a:ext>
             </a:extLst>
           </p:cNvPr>
@@ -22134,7 +22114,7 @@
           <p:cNvPr id="5" name="テキスト ボックス 4">
             <a:extLst>
               <a:ext uri="{FF2B5EF4-FFF2-40B4-BE49-F238E27FC236}">
-                <a16:creationId xmlns:a16="http://schemas.microsoft.com/office/drawing/2014/main" id="{FA310E47-0D96-A31D-7846-4785788E21F3}"/>
+                <a16:creationId xmlns:a16="http://schemas.microsoft.com/office/drawing/2014/main" id="{53AD53B9-4066-841D-601F-3F8A110DA3D8}"/>
               </a:ext>
             </a:extLst>
           </p:cNvPr>
@@ -22180,7 +22160,7 @@
           <p:cNvPr id="6" name="正方形/長方形 5">
             <a:extLst>
               <a:ext uri="{FF2B5EF4-FFF2-40B4-BE49-F238E27FC236}">
-                <a16:creationId xmlns:a16="http://schemas.microsoft.com/office/drawing/2014/main" id="{E2D3D259-CF6C-0D30-C030-C5AEB97EED73}"/>
+                <a16:creationId xmlns:a16="http://schemas.microsoft.com/office/drawing/2014/main" id="{B77505B1-2E76-9448-0F33-0B4A7D813E2B}"/>
               </a:ext>
             </a:extLst>
           </p:cNvPr>
@@ -22248,7 +22228,7 @@
           <p:cNvPr id="7" name="テキスト ボックス 6">
             <a:extLst>
               <a:ext uri="{FF2B5EF4-FFF2-40B4-BE49-F238E27FC236}">
-                <a16:creationId xmlns:a16="http://schemas.microsoft.com/office/drawing/2014/main" id="{0712716A-CF91-4A1F-F29E-C4FD691B686F}"/>
+                <a16:creationId xmlns:a16="http://schemas.microsoft.com/office/drawing/2014/main" id="{8327F2D0-F58B-122D-7DC3-45D076690AD2}"/>
               </a:ext>
             </a:extLst>
           </p:cNvPr>
@@ -22294,7 +22274,7 @@
           <p:cNvPr id="8" name="テキスト ボックス 7">
             <a:extLst>
               <a:ext uri="{FF2B5EF4-FFF2-40B4-BE49-F238E27FC236}">
-                <a16:creationId xmlns:a16="http://schemas.microsoft.com/office/drawing/2014/main" id="{04DA6961-A8E0-47BC-9AAC-A6089CD36771}"/>
+                <a16:creationId xmlns:a16="http://schemas.microsoft.com/office/drawing/2014/main" id="{06D93071-91BB-173A-BF32-1B5809C5AB81}"/>
               </a:ext>
             </a:extLst>
           </p:cNvPr>
@@ -22347,7 +22327,7 @@
           <p:cNvPr id="9" name="テキスト ボックス 8">
             <a:extLst>
               <a:ext uri="{FF2B5EF4-FFF2-40B4-BE49-F238E27FC236}">
-                <a16:creationId xmlns:a16="http://schemas.microsoft.com/office/drawing/2014/main" id="{07A52C9A-4A22-8A36-C981-6583902E713E}"/>
+                <a16:creationId xmlns:a16="http://schemas.microsoft.com/office/drawing/2014/main" id="{88E9D98B-6C0A-26AF-8F1B-ECEA14E3A1BB}"/>
               </a:ext>
             </a:extLst>
           </p:cNvPr>
@@ -22393,7 +22373,7 @@
           <p:cNvPr id="10" name="四角形: 角を丸くする 9">
             <a:extLst>
               <a:ext uri="{FF2B5EF4-FFF2-40B4-BE49-F238E27FC236}">
-                <a16:creationId xmlns:a16="http://schemas.microsoft.com/office/drawing/2014/main" id="{2788BF29-81C1-0ADF-3523-0898392C44D9}"/>
+                <a16:creationId xmlns:a16="http://schemas.microsoft.com/office/drawing/2014/main" id="{814E086B-96C6-0F98-B6AF-0B96DD6B76A7}"/>
               </a:ext>
             </a:extLst>
           </p:cNvPr>
@@ -22449,7 +22429,7 @@
           <p:cNvPr id="11" name="楕円 10">
             <a:extLst>
               <a:ext uri="{FF2B5EF4-FFF2-40B4-BE49-F238E27FC236}">
-                <a16:creationId xmlns:a16="http://schemas.microsoft.com/office/drawing/2014/main" id="{DA0237A7-026D-1853-CDF5-8B961697C943}"/>
+                <a16:creationId xmlns:a16="http://schemas.microsoft.com/office/drawing/2014/main" id="{8709CD8C-1DA2-42C3-26C8-02AE030A2322}"/>
               </a:ext>
             </a:extLst>
           </p:cNvPr>
@@ -22517,7 +22497,7 @@
           <p:cNvPr id="12" name="テキスト ボックス 11">
             <a:extLst>
               <a:ext uri="{FF2B5EF4-FFF2-40B4-BE49-F238E27FC236}">
-                <a16:creationId xmlns:a16="http://schemas.microsoft.com/office/drawing/2014/main" id="{7FCBBA31-9CF6-4AB8-74DA-1CEB853DB406}"/>
+                <a16:creationId xmlns:a16="http://schemas.microsoft.com/office/drawing/2014/main" id="{C97C160C-2C93-BCFD-D86C-62E1C6F7B9B0}"/>
               </a:ext>
             </a:extLst>
           </p:cNvPr>
@@ -22570,7 +22550,7 @@
           <p:cNvPr id="13" name="テキスト ボックス 12">
             <a:extLst>
               <a:ext uri="{FF2B5EF4-FFF2-40B4-BE49-F238E27FC236}">
-                <a16:creationId xmlns:a16="http://schemas.microsoft.com/office/drawing/2014/main" id="{05390F06-D9D0-5195-C565-70C7CE1E408B}"/>
+                <a16:creationId xmlns:a16="http://schemas.microsoft.com/office/drawing/2014/main" id="{DF452A84-CAFF-69C6-69EC-3FA324A92219}"/>
               </a:ext>
             </a:extLst>
           </p:cNvPr>
@@ -22616,7 +22596,7 @@
           <p:cNvPr id="14" name="テキスト ボックス 13">
             <a:extLst>
               <a:ext uri="{FF2B5EF4-FFF2-40B4-BE49-F238E27FC236}">
-                <a16:creationId xmlns:a16="http://schemas.microsoft.com/office/drawing/2014/main" id="{3B555D7C-F3EE-0B57-75B3-15B7F818C85C}"/>
+                <a16:creationId xmlns:a16="http://schemas.microsoft.com/office/drawing/2014/main" id="{8F9F6EA8-7032-981B-E58E-E949D13BDC65}"/>
               </a:ext>
             </a:extLst>
           </p:cNvPr>
@@ -22689,7 +22669,7 @@
           <p:cNvPr id="15" name="四角形: 角を丸くする 14">
             <a:extLst>
               <a:ext uri="{FF2B5EF4-FFF2-40B4-BE49-F238E27FC236}">
-                <a16:creationId xmlns:a16="http://schemas.microsoft.com/office/drawing/2014/main" id="{346F5B96-463D-11EE-6FDC-1FE64167A956}"/>
+                <a16:creationId xmlns:a16="http://schemas.microsoft.com/office/drawing/2014/main" id="{2AD33207-838D-F366-8C72-9323B5F0AF24}"/>
               </a:ext>
             </a:extLst>
           </p:cNvPr>
@@ -22745,7 +22725,7 @@
           <p:cNvPr id="16" name="楕円 15">
             <a:extLst>
               <a:ext uri="{FF2B5EF4-FFF2-40B4-BE49-F238E27FC236}">
-                <a16:creationId xmlns:a16="http://schemas.microsoft.com/office/drawing/2014/main" id="{E845FB28-2069-892B-638D-9D5ACCEE1D32}"/>
+                <a16:creationId xmlns:a16="http://schemas.microsoft.com/office/drawing/2014/main" id="{8955D103-718D-4400-3DCD-8ECCD1BAD2AA}"/>
               </a:ext>
             </a:extLst>
           </p:cNvPr>
@@ -22813,7 +22793,7 @@
           <p:cNvPr id="17" name="テキスト ボックス 16">
             <a:extLst>
               <a:ext uri="{FF2B5EF4-FFF2-40B4-BE49-F238E27FC236}">
-                <a16:creationId xmlns:a16="http://schemas.microsoft.com/office/drawing/2014/main" id="{291CC74C-883F-1948-A79E-FC35405491B8}"/>
+                <a16:creationId xmlns:a16="http://schemas.microsoft.com/office/drawing/2014/main" id="{E3B304AB-0229-79EB-7779-0498D1B15BB5}"/>
               </a:ext>
             </a:extLst>
           </p:cNvPr>
@@ -22866,7 +22846,7 @@
           <p:cNvPr id="18" name="テキスト ボックス 17">
             <a:extLst>
               <a:ext uri="{FF2B5EF4-FFF2-40B4-BE49-F238E27FC236}">
-                <a16:creationId xmlns:a16="http://schemas.microsoft.com/office/drawing/2014/main" id="{EE2C8081-856B-D453-4D5B-9FA3C1C2606C}"/>
+                <a16:creationId xmlns:a16="http://schemas.microsoft.com/office/drawing/2014/main" id="{A7435841-F029-726D-88B9-7FCF09BD8165}"/>
               </a:ext>
             </a:extLst>
           </p:cNvPr>
@@ -22912,7 +22892,7 @@
           <p:cNvPr id="19" name="テキスト ボックス 18">
             <a:extLst>
               <a:ext uri="{FF2B5EF4-FFF2-40B4-BE49-F238E27FC236}">
-                <a16:creationId xmlns:a16="http://schemas.microsoft.com/office/drawing/2014/main" id="{F41301AB-D760-97DF-5E84-2542A355353B}"/>
+                <a16:creationId xmlns:a16="http://schemas.microsoft.com/office/drawing/2014/main" id="{47AE88A6-2A18-CDD6-3812-44D9C734E38D}"/>
               </a:ext>
             </a:extLst>
           </p:cNvPr>
@@ -22975,7 +22955,7 @@
           <p:cNvPr id="20" name="四角形: 角を丸くする 19">
             <a:extLst>
               <a:ext uri="{FF2B5EF4-FFF2-40B4-BE49-F238E27FC236}">
-                <a16:creationId xmlns:a16="http://schemas.microsoft.com/office/drawing/2014/main" id="{C50FA135-5218-4207-6168-AEEF946412A4}"/>
+                <a16:creationId xmlns:a16="http://schemas.microsoft.com/office/drawing/2014/main" id="{7CF9E610-9605-958B-A1D6-97693DEBE379}"/>
               </a:ext>
             </a:extLst>
           </p:cNvPr>
@@ -23031,7 +23011,7 @@
           <p:cNvPr id="21" name="楕円 20">
             <a:extLst>
               <a:ext uri="{FF2B5EF4-FFF2-40B4-BE49-F238E27FC236}">
-                <a16:creationId xmlns:a16="http://schemas.microsoft.com/office/drawing/2014/main" id="{A8CE6BA1-CC3F-9788-6F7E-38530F803E0C}"/>
+                <a16:creationId xmlns:a16="http://schemas.microsoft.com/office/drawing/2014/main" id="{E044BB59-3B89-2058-9A81-8724C930404D}"/>
               </a:ext>
             </a:extLst>
           </p:cNvPr>
@@ -23099,7 +23079,7 @@
           <p:cNvPr id="22" name="テキスト ボックス 21">
             <a:extLst>
               <a:ext uri="{FF2B5EF4-FFF2-40B4-BE49-F238E27FC236}">
-                <a16:creationId xmlns:a16="http://schemas.microsoft.com/office/drawing/2014/main" id="{31515930-ABE1-0F17-3A03-7E7218C0F4FA}"/>
+                <a16:creationId xmlns:a16="http://schemas.microsoft.com/office/drawing/2014/main" id="{569890C6-A99C-D9AC-28BC-62E34220510F}"/>
               </a:ext>
             </a:extLst>
           </p:cNvPr>
@@ -23152,7 +23132,7 @@
           <p:cNvPr id="23" name="テキスト ボックス 22">
             <a:extLst>
               <a:ext uri="{FF2B5EF4-FFF2-40B4-BE49-F238E27FC236}">
-                <a16:creationId xmlns:a16="http://schemas.microsoft.com/office/drawing/2014/main" id="{20AD89A9-FAE9-C852-E431-898FE2EC3B7E}"/>
+                <a16:creationId xmlns:a16="http://schemas.microsoft.com/office/drawing/2014/main" id="{4D1ACAE9-F708-2D25-8C13-4308A83F2D6A}"/>
               </a:ext>
             </a:extLst>
           </p:cNvPr>
@@ -23198,7 +23178,7 @@
           <p:cNvPr id="24" name="テキスト ボックス 23">
             <a:extLst>
               <a:ext uri="{FF2B5EF4-FFF2-40B4-BE49-F238E27FC236}">
-                <a16:creationId xmlns:a16="http://schemas.microsoft.com/office/drawing/2014/main" id="{1C02370F-AC5D-EB49-E2D5-387DF47C423D}"/>
+                <a16:creationId xmlns:a16="http://schemas.microsoft.com/office/drawing/2014/main" id="{B9CD6A8F-4846-03C2-519F-E5E447869966}"/>
               </a:ext>
             </a:extLst>
           </p:cNvPr>
@@ -23261,7 +23241,7 @@
           <p:cNvPr id="25" name="矢印: 右 24">
             <a:extLst>
               <a:ext uri="{FF2B5EF4-FFF2-40B4-BE49-F238E27FC236}">
-                <a16:creationId xmlns:a16="http://schemas.microsoft.com/office/drawing/2014/main" id="{BCB20EC8-DB92-5BDE-2B66-FD8F3B95BD67}"/>
+                <a16:creationId xmlns:a16="http://schemas.microsoft.com/office/drawing/2014/main" id="{9773484F-734F-A88C-C132-417ED336FCDA}"/>
               </a:ext>
             </a:extLst>
           </p:cNvPr>
@@ -23329,7 +23309,7 @@
           <p:cNvPr id="26" name="矢印: 右 25">
             <a:extLst>
               <a:ext uri="{FF2B5EF4-FFF2-40B4-BE49-F238E27FC236}">
-                <a16:creationId xmlns:a16="http://schemas.microsoft.com/office/drawing/2014/main" id="{C90DB1E1-E82D-C4DF-5123-0D29DF683F0A}"/>
+                <a16:creationId xmlns:a16="http://schemas.microsoft.com/office/drawing/2014/main" id="{16169BD1-5F16-028B-3523-46B72BA21686}"/>
               </a:ext>
             </a:extLst>
           </p:cNvPr>
@@ -23397,7 +23377,7 @@
           <p:cNvPr id="27" name="四角形: 角を丸くする 26">
             <a:extLst>
               <a:ext uri="{FF2B5EF4-FFF2-40B4-BE49-F238E27FC236}">
-                <a16:creationId xmlns:a16="http://schemas.microsoft.com/office/drawing/2014/main" id="{91FF6FC2-E1E5-AA78-E56F-98C97D418958}"/>
+                <a16:creationId xmlns:a16="http://schemas.microsoft.com/office/drawing/2014/main" id="{93E2844C-78F3-E49F-EC49-EC46DA1723F5}"/>
               </a:ext>
             </a:extLst>
           </p:cNvPr>
@@ -23467,7 +23447,7 @@
           <p:cNvPr id="28" name="正方形/長方形 27">
             <a:extLst>
               <a:ext uri="{FF2B5EF4-FFF2-40B4-BE49-F238E27FC236}">
-                <a16:creationId xmlns:a16="http://schemas.microsoft.com/office/drawing/2014/main" id="{BD315A24-9B7B-FAC7-5BA1-63F10F69D9CB}"/>
+                <a16:creationId xmlns:a16="http://schemas.microsoft.com/office/drawing/2014/main" id="{2F2A8FB1-54B0-0BF1-0C23-C7E246EA337C}"/>
               </a:ext>
             </a:extLst>
           </p:cNvPr>
@@ -23535,7 +23515,7 @@
           <p:cNvPr id="29" name="テキスト ボックス 28">
             <a:extLst>
               <a:ext uri="{FF2B5EF4-FFF2-40B4-BE49-F238E27FC236}">
-                <a16:creationId xmlns:a16="http://schemas.microsoft.com/office/drawing/2014/main" id="{41EB42C9-804B-5300-E05D-E813DC759D25}"/>
+                <a16:creationId xmlns:a16="http://schemas.microsoft.com/office/drawing/2014/main" id="{22771532-B6F6-2BFE-A122-27E7FF5EA283}"/>
               </a:ext>
             </a:extLst>
           </p:cNvPr>
@@ -23581,7 +23561,7 @@
           <p:cNvPr id="30" name="テキスト ボックス 29">
             <a:extLst>
               <a:ext uri="{FF2B5EF4-FFF2-40B4-BE49-F238E27FC236}">
-                <a16:creationId xmlns:a16="http://schemas.microsoft.com/office/drawing/2014/main" id="{648A488C-5767-A05D-5A9F-4D30AECD1D07}"/>
+                <a16:creationId xmlns:a16="http://schemas.microsoft.com/office/drawing/2014/main" id="{F2A1F08D-795A-2E8A-E590-D308D8B36455}"/>
               </a:ext>
             </a:extLst>
           </p:cNvPr>
@@ -23625,7 +23605,7 @@
     </p:spTree>
     <p:extLst>
       <p:ext uri="{BB962C8B-B14F-4D97-AF65-F5344CB8AC3E}">
-        <p14:creationId xmlns:p14="http://schemas.microsoft.com/office/powerpoint/2010/main" val="691189667"/>
+        <p14:creationId xmlns:p14="http://schemas.microsoft.com/office/powerpoint/2010/main" val="3935046322"/>
       </p:ext>
     </p:extLst>
   </p:cSld>
@@ -23657,7 +23637,7 @@
           <p:cNvPr id="2" name="正方形/長方形 1">
             <a:extLst>
               <a:ext uri="{FF2B5EF4-FFF2-40B4-BE49-F238E27FC236}">
-                <a16:creationId xmlns:a16="http://schemas.microsoft.com/office/drawing/2014/main" id="{67E6A0DB-31FF-22DF-008A-849966AA1163}"/>
+                <a16:creationId xmlns:a16="http://schemas.microsoft.com/office/drawing/2014/main" id="{7A3FDE90-0919-ED97-0EA0-E185E598A4B3}"/>
               </a:ext>
             </a:extLst>
           </p:cNvPr>
@@ -23725,7 +23705,7 @@
           <p:cNvPr id="3" name="正方形/長方形 2">
             <a:extLst>
               <a:ext uri="{FF2B5EF4-FFF2-40B4-BE49-F238E27FC236}">
-                <a16:creationId xmlns:a16="http://schemas.microsoft.com/office/drawing/2014/main" id="{01655108-E15E-F6B0-3D79-D2B55E7B1A45}"/>
+                <a16:creationId xmlns:a16="http://schemas.microsoft.com/office/drawing/2014/main" id="{469BDEC3-4853-A197-F828-608B5B32F2F7}"/>
               </a:ext>
             </a:extLst>
           </p:cNvPr>
@@ -23793,7 +23773,7 @@
           <p:cNvPr id="4" name="テキスト ボックス 3">
             <a:extLst>
               <a:ext uri="{FF2B5EF4-FFF2-40B4-BE49-F238E27FC236}">
-                <a16:creationId xmlns:a16="http://schemas.microsoft.com/office/drawing/2014/main" id="{0AFC8B44-4019-1CF2-E1C2-9CBA98DE96B8}"/>
+                <a16:creationId xmlns:a16="http://schemas.microsoft.com/office/drawing/2014/main" id="{A501E7DC-BFB7-243B-C58C-258397046434}"/>
               </a:ext>
             </a:extLst>
           </p:cNvPr>
@@ -23846,7 +23826,7 @@
           <p:cNvPr id="5" name="テキスト ボックス 4">
             <a:extLst>
               <a:ext uri="{FF2B5EF4-FFF2-40B4-BE49-F238E27FC236}">
-                <a16:creationId xmlns:a16="http://schemas.microsoft.com/office/drawing/2014/main" id="{B5B6D975-B531-5D9D-8B76-D7A58CAAEFB0}"/>
+                <a16:creationId xmlns:a16="http://schemas.microsoft.com/office/drawing/2014/main" id="{9D3ACD44-3892-B5F1-E8E9-3FDC07A2D821}"/>
               </a:ext>
             </a:extLst>
           </p:cNvPr>
@@ -23892,7 +23872,7 @@
           <p:cNvPr id="6" name="正方形/長方形 5">
             <a:extLst>
               <a:ext uri="{FF2B5EF4-FFF2-40B4-BE49-F238E27FC236}">
-                <a16:creationId xmlns:a16="http://schemas.microsoft.com/office/drawing/2014/main" id="{15078660-A02D-B8DB-C26E-9B661C8F74D1}"/>
+                <a16:creationId xmlns:a16="http://schemas.microsoft.com/office/drawing/2014/main" id="{46BFE8B9-F749-B6F7-7BD1-B12AE4B9A8B9}"/>
               </a:ext>
             </a:extLst>
           </p:cNvPr>
@@ -23960,7 +23940,7 @@
           <p:cNvPr id="7" name="四角形: 角を丸くする 6">
             <a:extLst>
               <a:ext uri="{FF2B5EF4-FFF2-40B4-BE49-F238E27FC236}">
-                <a16:creationId xmlns:a16="http://schemas.microsoft.com/office/drawing/2014/main" id="{E37F6E79-6926-2D3F-033B-A8FCD8C19C2A}"/>
+                <a16:creationId xmlns:a16="http://schemas.microsoft.com/office/drawing/2014/main" id="{D83FBF1F-11BB-F1FF-2225-FB5A63D73A8D}"/>
               </a:ext>
             </a:extLst>
           </p:cNvPr>
@@ -24030,7 +24010,7 @@
           <p:cNvPr id="8" name="テキスト ボックス 7">
             <a:extLst>
               <a:ext uri="{FF2B5EF4-FFF2-40B4-BE49-F238E27FC236}">
-                <a16:creationId xmlns:a16="http://schemas.microsoft.com/office/drawing/2014/main" id="{69DB8620-5E70-B5E6-0AF3-9A61BBF2AACC}"/>
+                <a16:creationId xmlns:a16="http://schemas.microsoft.com/office/drawing/2014/main" id="{E8E582CA-6327-7528-3FBB-C7C690BA103B}"/>
               </a:ext>
             </a:extLst>
           </p:cNvPr>
@@ -24076,7 +24056,7 @@
           <p:cNvPr id="9" name="テキスト ボックス 8">
             <a:extLst>
               <a:ext uri="{FF2B5EF4-FFF2-40B4-BE49-F238E27FC236}">
-                <a16:creationId xmlns:a16="http://schemas.microsoft.com/office/drawing/2014/main" id="{0C7DCA99-1534-CE14-607E-75DF31C0A719}"/>
+                <a16:creationId xmlns:a16="http://schemas.microsoft.com/office/drawing/2014/main" id="{BDDC7FD3-3EE7-05EF-0E36-ED94D05C8FA3}"/>
               </a:ext>
             </a:extLst>
           </p:cNvPr>
@@ -24122,7 +24102,7 @@
           <p:cNvPr id="10" name="テキスト ボックス 9">
             <a:extLst>
               <a:ext uri="{FF2B5EF4-FFF2-40B4-BE49-F238E27FC236}">
-                <a16:creationId xmlns:a16="http://schemas.microsoft.com/office/drawing/2014/main" id="{77015916-4EF6-93BD-E6AB-D1709E48F4C7}"/>
+                <a16:creationId xmlns:a16="http://schemas.microsoft.com/office/drawing/2014/main" id="{0275CE52-A9F5-641B-BA32-2F923902B972}"/>
               </a:ext>
             </a:extLst>
           </p:cNvPr>
@@ -24175,7 +24155,7 @@
           <p:cNvPr id="11" name="四角形: 角を丸くする 10">
             <a:extLst>
               <a:ext uri="{FF2B5EF4-FFF2-40B4-BE49-F238E27FC236}">
-                <a16:creationId xmlns:a16="http://schemas.microsoft.com/office/drawing/2014/main" id="{3D71FEF2-863F-E0FC-A7B1-399112AE697A}"/>
+                <a16:creationId xmlns:a16="http://schemas.microsoft.com/office/drawing/2014/main" id="{B98010B2-5EB5-AD24-CE92-E7821B7EA44B}"/>
               </a:ext>
             </a:extLst>
           </p:cNvPr>
@@ -24231,7 +24211,7 @@
           <p:cNvPr id="12" name="楕円 11">
             <a:extLst>
               <a:ext uri="{FF2B5EF4-FFF2-40B4-BE49-F238E27FC236}">
-                <a16:creationId xmlns:a16="http://schemas.microsoft.com/office/drawing/2014/main" id="{F4C7C65D-CEA3-8AB2-D563-FEC7EAF105D7}"/>
+                <a16:creationId xmlns:a16="http://schemas.microsoft.com/office/drawing/2014/main" id="{5597DBFE-9F1D-17D1-2735-8B2D4A7D8D3B}"/>
               </a:ext>
             </a:extLst>
           </p:cNvPr>
@@ -24299,7 +24279,7 @@
           <p:cNvPr id="13" name="テキスト ボックス 12">
             <a:extLst>
               <a:ext uri="{FF2B5EF4-FFF2-40B4-BE49-F238E27FC236}">
-                <a16:creationId xmlns:a16="http://schemas.microsoft.com/office/drawing/2014/main" id="{9617E909-0EB2-9F2F-ACB8-8DA86A992ADF}"/>
+                <a16:creationId xmlns:a16="http://schemas.microsoft.com/office/drawing/2014/main" id="{4E5533FC-860B-0DFA-3368-66161E893C63}"/>
               </a:ext>
             </a:extLst>
           </p:cNvPr>
@@ -24352,7 +24332,7 @@
           <p:cNvPr id="14" name="テキスト ボックス 13">
             <a:extLst>
               <a:ext uri="{FF2B5EF4-FFF2-40B4-BE49-F238E27FC236}">
-                <a16:creationId xmlns:a16="http://schemas.microsoft.com/office/drawing/2014/main" id="{ACC86B55-4FB0-9290-D5A5-7BF00BE54620}"/>
+                <a16:creationId xmlns:a16="http://schemas.microsoft.com/office/drawing/2014/main" id="{E52E5264-AA9E-2108-05C8-11C9EBCE0478}"/>
               </a:ext>
             </a:extLst>
           </p:cNvPr>
@@ -24398,7 +24378,7 @@
           <p:cNvPr id="15" name="テキスト ボックス 14">
             <a:extLst>
               <a:ext uri="{FF2B5EF4-FFF2-40B4-BE49-F238E27FC236}">
-                <a16:creationId xmlns:a16="http://schemas.microsoft.com/office/drawing/2014/main" id="{398874D9-0F0E-D57F-4DDB-81AA812C9045}"/>
+                <a16:creationId xmlns:a16="http://schemas.microsoft.com/office/drawing/2014/main" id="{207BE966-C253-F956-1793-AD895A159546}"/>
               </a:ext>
             </a:extLst>
           </p:cNvPr>
@@ -24464,7 +24444,7 @@
           <p:cNvPr id="16" name="四角形: 角を丸くする 15">
             <a:extLst>
               <a:ext uri="{FF2B5EF4-FFF2-40B4-BE49-F238E27FC236}">
-                <a16:creationId xmlns:a16="http://schemas.microsoft.com/office/drawing/2014/main" id="{425973C1-F91D-6A40-7716-E9195CC44CD8}"/>
+                <a16:creationId xmlns:a16="http://schemas.microsoft.com/office/drawing/2014/main" id="{0E7948A2-5D77-D5DF-0A29-8A638E40D877}"/>
               </a:ext>
             </a:extLst>
           </p:cNvPr>
@@ -24520,7 +24500,7 @@
           <p:cNvPr id="17" name="楕円 16">
             <a:extLst>
               <a:ext uri="{FF2B5EF4-FFF2-40B4-BE49-F238E27FC236}">
-                <a16:creationId xmlns:a16="http://schemas.microsoft.com/office/drawing/2014/main" id="{43E4D051-6811-09A5-30C2-8B15E9AB57C3}"/>
+                <a16:creationId xmlns:a16="http://schemas.microsoft.com/office/drawing/2014/main" id="{CDBD6BE8-1EAB-495A-6990-4C9DE3701FCF}"/>
               </a:ext>
             </a:extLst>
           </p:cNvPr>
@@ -24588,7 +24568,7 @@
           <p:cNvPr id="18" name="テキスト ボックス 17">
             <a:extLst>
               <a:ext uri="{FF2B5EF4-FFF2-40B4-BE49-F238E27FC236}">
-                <a16:creationId xmlns:a16="http://schemas.microsoft.com/office/drawing/2014/main" id="{3FEC120E-A769-B4D6-689F-6CD4A4B27137}"/>
+                <a16:creationId xmlns:a16="http://schemas.microsoft.com/office/drawing/2014/main" id="{F7075823-1194-95DD-11D8-BC899988AB0D}"/>
               </a:ext>
             </a:extLst>
           </p:cNvPr>
@@ -24641,7 +24621,7 @@
           <p:cNvPr id="19" name="テキスト ボックス 18">
             <a:extLst>
               <a:ext uri="{FF2B5EF4-FFF2-40B4-BE49-F238E27FC236}">
-                <a16:creationId xmlns:a16="http://schemas.microsoft.com/office/drawing/2014/main" id="{2F969F3A-EA26-F763-29FE-959C54960E38}"/>
+                <a16:creationId xmlns:a16="http://schemas.microsoft.com/office/drawing/2014/main" id="{1648B965-38F2-2791-3EEB-3B88994CAAFB}"/>
               </a:ext>
             </a:extLst>
           </p:cNvPr>
@@ -24687,7 +24667,7 @@
           <p:cNvPr id="20" name="テキスト ボックス 19">
             <a:extLst>
               <a:ext uri="{FF2B5EF4-FFF2-40B4-BE49-F238E27FC236}">
-                <a16:creationId xmlns:a16="http://schemas.microsoft.com/office/drawing/2014/main" id="{565F8A41-DAB9-2638-D256-F222EBDADA5C}"/>
+                <a16:creationId xmlns:a16="http://schemas.microsoft.com/office/drawing/2014/main" id="{8F329FCF-6413-5F7D-08F1-DE8F1FA0616D}"/>
               </a:ext>
             </a:extLst>
           </p:cNvPr>
@@ -24790,7 +24770,7 @@
           <p:cNvPr id="21" name="四角形: 角を丸くする 20">
             <a:extLst>
               <a:ext uri="{FF2B5EF4-FFF2-40B4-BE49-F238E27FC236}">
-                <a16:creationId xmlns:a16="http://schemas.microsoft.com/office/drawing/2014/main" id="{71A90391-7CE2-F4EA-B529-0B1D3A4588EF}"/>
+                <a16:creationId xmlns:a16="http://schemas.microsoft.com/office/drawing/2014/main" id="{598E28A7-867E-252E-47A1-3AAB5266FC69}"/>
               </a:ext>
             </a:extLst>
           </p:cNvPr>
@@ -24846,7 +24826,7 @@
           <p:cNvPr id="22" name="楕円 21">
             <a:extLst>
               <a:ext uri="{FF2B5EF4-FFF2-40B4-BE49-F238E27FC236}">
-                <a16:creationId xmlns:a16="http://schemas.microsoft.com/office/drawing/2014/main" id="{5ED36F06-1FEE-56D7-1DA4-E564532B957C}"/>
+                <a16:creationId xmlns:a16="http://schemas.microsoft.com/office/drawing/2014/main" id="{6B8A78A4-87BF-116D-5877-C0CB14142C2B}"/>
               </a:ext>
             </a:extLst>
           </p:cNvPr>
@@ -24914,7 +24894,7 @@
           <p:cNvPr id="23" name="テキスト ボックス 22">
             <a:extLst>
               <a:ext uri="{FF2B5EF4-FFF2-40B4-BE49-F238E27FC236}">
-                <a16:creationId xmlns:a16="http://schemas.microsoft.com/office/drawing/2014/main" id="{FB1C53C4-9CE0-DEB0-3F00-E9CEB4F7466B}"/>
+                <a16:creationId xmlns:a16="http://schemas.microsoft.com/office/drawing/2014/main" id="{28899BC5-47C6-A92A-FFF7-5386F7D75751}"/>
               </a:ext>
             </a:extLst>
           </p:cNvPr>
@@ -24967,7 +24947,7 @@
           <p:cNvPr id="24" name="テキスト ボックス 23">
             <a:extLst>
               <a:ext uri="{FF2B5EF4-FFF2-40B4-BE49-F238E27FC236}">
-                <a16:creationId xmlns:a16="http://schemas.microsoft.com/office/drawing/2014/main" id="{006B7514-56E5-B5A8-4C99-62A19006378E}"/>
+                <a16:creationId xmlns:a16="http://schemas.microsoft.com/office/drawing/2014/main" id="{1769E0A3-F7C9-2704-507E-7189A5237F1A}"/>
               </a:ext>
             </a:extLst>
           </p:cNvPr>
@@ -25013,7 +24993,7 @@
           <p:cNvPr id="25" name="テキスト ボックス 24">
             <a:extLst>
               <a:ext uri="{FF2B5EF4-FFF2-40B4-BE49-F238E27FC236}">
-                <a16:creationId xmlns:a16="http://schemas.microsoft.com/office/drawing/2014/main" id="{B4242FCE-ECEC-E286-95D8-515C10FFA400}"/>
+                <a16:creationId xmlns:a16="http://schemas.microsoft.com/office/drawing/2014/main" id="{8804E984-A4C4-6C07-BBF5-A2808C2F1BA5}"/>
               </a:ext>
             </a:extLst>
           </p:cNvPr>
@@ -25059,7 +25039,7 @@
           <p:cNvPr id="26" name="四角形: 角を丸くする 25">
             <a:extLst>
               <a:ext uri="{FF2B5EF4-FFF2-40B4-BE49-F238E27FC236}">
-                <a16:creationId xmlns:a16="http://schemas.microsoft.com/office/drawing/2014/main" id="{F90D3470-8D41-D52C-4880-3FE419A4257C}"/>
+                <a16:creationId xmlns:a16="http://schemas.microsoft.com/office/drawing/2014/main" id="{F2941431-4F62-7C0D-4760-3A4A4FCE0C32}"/>
               </a:ext>
             </a:extLst>
           </p:cNvPr>
@@ -25129,7 +25109,7 @@
           <p:cNvPr id="27" name="正方形/長方形 26">
             <a:extLst>
               <a:ext uri="{FF2B5EF4-FFF2-40B4-BE49-F238E27FC236}">
-                <a16:creationId xmlns:a16="http://schemas.microsoft.com/office/drawing/2014/main" id="{23033331-56ED-7F7E-6A68-51D761A627C5}"/>
+                <a16:creationId xmlns:a16="http://schemas.microsoft.com/office/drawing/2014/main" id="{AF558F2D-400F-416D-0A2F-06BEC5AFEF2E}"/>
               </a:ext>
             </a:extLst>
           </p:cNvPr>
@@ -25197,7 +25177,7 @@
           <p:cNvPr id="28" name="テキスト ボックス 27">
             <a:extLst>
               <a:ext uri="{FF2B5EF4-FFF2-40B4-BE49-F238E27FC236}">
-                <a16:creationId xmlns:a16="http://schemas.microsoft.com/office/drawing/2014/main" id="{7DB44D19-CEEE-6874-F330-CD084E3CD3AC}"/>
+                <a16:creationId xmlns:a16="http://schemas.microsoft.com/office/drawing/2014/main" id="{1EE2C398-9F7A-7255-DAA2-54AC75BBB9CE}"/>
               </a:ext>
             </a:extLst>
           </p:cNvPr>
@@ -25243,7 +25223,7 @@
           <p:cNvPr id="29" name="テキスト ボックス 28">
             <a:extLst>
               <a:ext uri="{FF2B5EF4-FFF2-40B4-BE49-F238E27FC236}">
-                <a16:creationId xmlns:a16="http://schemas.microsoft.com/office/drawing/2014/main" id="{FEE96E4E-3564-5077-4CE9-DC9835D4A8BC}"/>
+                <a16:creationId xmlns:a16="http://schemas.microsoft.com/office/drawing/2014/main" id="{3853DA7C-C1A5-F617-D925-9A079E14255A}"/>
               </a:ext>
             </a:extLst>
           </p:cNvPr>
@@ -25289,7 +25269,7 @@
           <p:cNvPr id="30" name="四角形: 角を丸くする 29">
             <a:extLst>
               <a:ext uri="{FF2B5EF4-FFF2-40B4-BE49-F238E27FC236}">
-                <a16:creationId xmlns:a16="http://schemas.microsoft.com/office/drawing/2014/main" id="{0A5CE9BB-C4E2-2E31-3A5C-ED7703AE3E73}"/>
+                <a16:creationId xmlns:a16="http://schemas.microsoft.com/office/drawing/2014/main" id="{55F6A349-0DBB-5C40-9E47-A3216B86962C}"/>
               </a:ext>
             </a:extLst>
           </p:cNvPr>
@@ -25359,7 +25339,7 @@
           <p:cNvPr id="31" name="正方形/長方形 30">
             <a:extLst>
               <a:ext uri="{FF2B5EF4-FFF2-40B4-BE49-F238E27FC236}">
-                <a16:creationId xmlns:a16="http://schemas.microsoft.com/office/drawing/2014/main" id="{2A34C004-F47F-E657-050D-3CB8E8F0DE6C}"/>
+                <a16:creationId xmlns:a16="http://schemas.microsoft.com/office/drawing/2014/main" id="{61CEA9A3-6817-62AE-2CB9-38C770459F56}"/>
               </a:ext>
             </a:extLst>
           </p:cNvPr>
@@ -25427,7 +25407,7 @@
           <p:cNvPr id="32" name="テキスト ボックス 31">
             <a:extLst>
               <a:ext uri="{FF2B5EF4-FFF2-40B4-BE49-F238E27FC236}">
-                <a16:creationId xmlns:a16="http://schemas.microsoft.com/office/drawing/2014/main" id="{5DDD0AE8-CA7D-FF3C-B57B-E70FFE73652F}"/>
+                <a16:creationId xmlns:a16="http://schemas.microsoft.com/office/drawing/2014/main" id="{0E40B98F-D7FE-5EF7-BF5D-CF1E8AD00932}"/>
               </a:ext>
             </a:extLst>
           </p:cNvPr>
@@ -25473,7 +25453,7 @@
           <p:cNvPr id="33" name="テキスト ボックス 32">
             <a:extLst>
               <a:ext uri="{FF2B5EF4-FFF2-40B4-BE49-F238E27FC236}">
-                <a16:creationId xmlns:a16="http://schemas.microsoft.com/office/drawing/2014/main" id="{C96C4077-DE62-147A-ECA4-7D5B2987C033}"/>
+                <a16:creationId xmlns:a16="http://schemas.microsoft.com/office/drawing/2014/main" id="{99BC628B-5E39-C1EC-0AFF-50F09D743736}"/>
               </a:ext>
             </a:extLst>
           </p:cNvPr>
@@ -25517,7 +25497,7 @@
     </p:spTree>
     <p:extLst>
       <p:ext uri="{BB962C8B-B14F-4D97-AF65-F5344CB8AC3E}">
-        <p14:creationId xmlns:p14="http://schemas.microsoft.com/office/powerpoint/2010/main" val="3437908179"/>
+        <p14:creationId xmlns:p14="http://schemas.microsoft.com/office/powerpoint/2010/main" val="2990889254"/>
       </p:ext>
     </p:extLst>
   </p:cSld>
@@ -25549,7 +25529,7 @@
           <p:cNvPr id="2" name="正方形/長方形 1">
             <a:extLst>
               <a:ext uri="{FF2B5EF4-FFF2-40B4-BE49-F238E27FC236}">
-                <a16:creationId xmlns:a16="http://schemas.microsoft.com/office/drawing/2014/main" id="{61F0A44D-224D-1073-C71E-E004C933DB4E}"/>
+                <a16:creationId xmlns:a16="http://schemas.microsoft.com/office/drawing/2014/main" id="{3370DEC1-92D2-C799-F86E-5F75D5A3F95D}"/>
               </a:ext>
             </a:extLst>
           </p:cNvPr>
@@ -25617,7 +25597,7 @@
           <p:cNvPr id="3" name="正方形/長方形 2">
             <a:extLst>
               <a:ext uri="{FF2B5EF4-FFF2-40B4-BE49-F238E27FC236}">
-                <a16:creationId xmlns:a16="http://schemas.microsoft.com/office/drawing/2014/main" id="{9192B1B9-D859-8DA5-EEE2-AAD3AF1F3570}"/>
+                <a16:creationId xmlns:a16="http://schemas.microsoft.com/office/drawing/2014/main" id="{64CBDCE7-4CF7-A315-E9EB-B8D053C3F30D}"/>
               </a:ext>
             </a:extLst>
           </p:cNvPr>
@@ -25685,7 +25665,7 @@
           <p:cNvPr id="4" name="テキスト ボックス 3">
             <a:extLst>
               <a:ext uri="{FF2B5EF4-FFF2-40B4-BE49-F238E27FC236}">
-                <a16:creationId xmlns:a16="http://schemas.microsoft.com/office/drawing/2014/main" id="{B3116B94-637F-917D-DF9A-45AAE2947505}"/>
+                <a16:creationId xmlns:a16="http://schemas.microsoft.com/office/drawing/2014/main" id="{E699A3B6-81DF-0C9A-E620-06348FF76211}"/>
               </a:ext>
             </a:extLst>
           </p:cNvPr>
@@ -25738,7 +25718,7 @@
           <p:cNvPr id="5" name="テキスト ボックス 4">
             <a:extLst>
               <a:ext uri="{FF2B5EF4-FFF2-40B4-BE49-F238E27FC236}">
-                <a16:creationId xmlns:a16="http://schemas.microsoft.com/office/drawing/2014/main" id="{4176E849-EC56-E6A0-43F6-B79F9B035AC9}"/>
+                <a16:creationId xmlns:a16="http://schemas.microsoft.com/office/drawing/2014/main" id="{34ACB8C5-266D-FAB7-88F6-99FF513376ED}"/>
               </a:ext>
             </a:extLst>
           </p:cNvPr>
@@ -25784,7 +25764,7 @@
           <p:cNvPr id="6" name="正方形/長方形 5">
             <a:extLst>
               <a:ext uri="{FF2B5EF4-FFF2-40B4-BE49-F238E27FC236}">
-                <a16:creationId xmlns:a16="http://schemas.microsoft.com/office/drawing/2014/main" id="{3B409D10-8BB9-59B5-B263-19A623E4B9A1}"/>
+                <a16:creationId xmlns:a16="http://schemas.microsoft.com/office/drawing/2014/main" id="{83B1A1D5-4EC6-81D5-D330-BFE2F96DC88E}"/>
               </a:ext>
             </a:extLst>
           </p:cNvPr>
@@ -25852,7 +25832,7 @@
           <p:cNvPr id="7" name="四角形: 角を丸くする 6">
             <a:extLst>
               <a:ext uri="{FF2B5EF4-FFF2-40B4-BE49-F238E27FC236}">
-                <a16:creationId xmlns:a16="http://schemas.microsoft.com/office/drawing/2014/main" id="{2F47EBC9-B2CF-2CF9-8DE5-C9672D52C3CB}"/>
+                <a16:creationId xmlns:a16="http://schemas.microsoft.com/office/drawing/2014/main" id="{70802874-9379-84A8-3CCD-C37687CE5EEF}"/>
               </a:ext>
             </a:extLst>
           </p:cNvPr>
@@ -25922,7 +25902,7 @@
           <p:cNvPr id="8" name="テキスト ボックス 7">
             <a:extLst>
               <a:ext uri="{FF2B5EF4-FFF2-40B4-BE49-F238E27FC236}">
-                <a16:creationId xmlns:a16="http://schemas.microsoft.com/office/drawing/2014/main" id="{2315C7FE-6834-539B-F5DE-108E8B0A518C}"/>
+                <a16:creationId xmlns:a16="http://schemas.microsoft.com/office/drawing/2014/main" id="{1330E87E-2E52-8199-3CEA-F8F132726410}"/>
               </a:ext>
             </a:extLst>
           </p:cNvPr>
@@ -25968,7 +25948,7 @@
           <p:cNvPr id="9" name="テキスト ボックス 8">
             <a:extLst>
               <a:ext uri="{FF2B5EF4-FFF2-40B4-BE49-F238E27FC236}">
-                <a16:creationId xmlns:a16="http://schemas.microsoft.com/office/drawing/2014/main" id="{A93F4578-B225-244A-71BB-7282C744BC4A}"/>
+                <a16:creationId xmlns:a16="http://schemas.microsoft.com/office/drawing/2014/main" id="{04B6D004-17D6-285B-4286-E797518020D4}"/>
               </a:ext>
             </a:extLst>
           </p:cNvPr>
@@ -26014,7 +25994,7 @@
           <p:cNvPr id="10" name="テキスト ボックス 9">
             <a:extLst>
               <a:ext uri="{FF2B5EF4-FFF2-40B4-BE49-F238E27FC236}">
-                <a16:creationId xmlns:a16="http://schemas.microsoft.com/office/drawing/2014/main" id="{BC54177D-641C-6F9B-C5F5-272BA35CC3A5}"/>
+                <a16:creationId xmlns:a16="http://schemas.microsoft.com/office/drawing/2014/main" id="{C63E746C-4FBF-6555-7CA7-21E3ED7D6183}"/>
               </a:ext>
             </a:extLst>
           </p:cNvPr>
@@ -26067,7 +26047,7 @@
           <p:cNvPr id="11" name="テキスト ボックス 10">
             <a:extLst>
               <a:ext uri="{FF2B5EF4-FFF2-40B4-BE49-F238E27FC236}">
-                <a16:creationId xmlns:a16="http://schemas.microsoft.com/office/drawing/2014/main" id="{A635A91B-18B9-C7D9-3766-A771FECEC800}"/>
+                <a16:creationId xmlns:a16="http://schemas.microsoft.com/office/drawing/2014/main" id="{A65FF71A-03B8-FF31-194F-FA1B4758C7C3}"/>
               </a:ext>
             </a:extLst>
           </p:cNvPr>
@@ -26133,7 +26113,7 @@
           <p:cNvPr id="12" name="表 11">
             <a:extLst>
               <a:ext uri="{FF2B5EF4-FFF2-40B4-BE49-F238E27FC236}">
-                <a16:creationId xmlns:a16="http://schemas.microsoft.com/office/drawing/2014/main" id="{28FFF0AA-0750-6D45-7134-B5F67DC37A7C}"/>
+                <a16:creationId xmlns:a16="http://schemas.microsoft.com/office/drawing/2014/main" id="{2973EEE2-4CE5-12EB-5001-1771C03ACEC5}"/>
               </a:ext>
             </a:extLst>
           </p:cNvPr>
@@ -26143,7 +26123,7 @@
           <p:nvPr>
             <p:extLst>
               <p:ext uri="{D42A27DB-BD31-4B8C-83A1-F6EECF244321}">
-                <p14:modId xmlns:p14="http://schemas.microsoft.com/office/powerpoint/2010/main" val="75636927"/>
+                <p14:modId xmlns:p14="http://schemas.microsoft.com/office/powerpoint/2010/main" val="3344222704"/>
               </p:ext>
             </p:extLst>
           </p:nvPr>
@@ -26162,21 +26142,21 @@
                 <a:gridCol w="1905000">
                   <a:extLst>
                     <a:ext uri="{9D8B030D-6E8A-4147-A177-3AD203B41FA5}">
-                      <a16:colId xmlns:a16="http://schemas.microsoft.com/office/drawing/2014/main" val="2958949489"/>
+                      <a16:colId xmlns:a16="http://schemas.microsoft.com/office/drawing/2014/main" val="716195101"/>
                     </a:ext>
                   </a:extLst>
                 </a:gridCol>
                 <a:gridCol w="2413000">
                   <a:extLst>
                     <a:ext uri="{9D8B030D-6E8A-4147-A177-3AD203B41FA5}">
-                      <a16:colId xmlns:a16="http://schemas.microsoft.com/office/drawing/2014/main" val="4264630976"/>
+                      <a16:colId xmlns:a16="http://schemas.microsoft.com/office/drawing/2014/main" val="3084786699"/>
                     </a:ext>
                   </a:extLst>
                 </a:gridCol>
                 <a:gridCol w="6248400">
                   <a:extLst>
                     <a:ext uri="{9D8B030D-6E8A-4147-A177-3AD203B41FA5}">
-                      <a16:colId xmlns:a16="http://schemas.microsoft.com/office/drawing/2014/main" val="999339029"/>
+                      <a16:colId xmlns:a16="http://schemas.microsoft.com/office/drawing/2014/main" val="4013546612"/>
                     </a:ext>
                   </a:extLst>
                 </a:gridCol>
@@ -26283,7 +26263,7 @@
                 </a:tc>
                 <a:extLst>
                   <a:ext uri="{0D108BD9-81ED-4DB2-BD59-A6C34878D82A}">
-                    <a16:rowId xmlns:a16="http://schemas.microsoft.com/office/drawing/2014/main" val="694080870"/>
+                    <a16:rowId xmlns:a16="http://schemas.microsoft.com/office/drawing/2014/main" val="197857850"/>
                   </a:ext>
                 </a:extLst>
               </a:tr>
@@ -26441,7 +26421,7 @@
                 </a:tc>
                 <a:extLst>
                   <a:ext uri="{0D108BD9-81ED-4DB2-BD59-A6C34878D82A}">
-                    <a16:rowId xmlns:a16="http://schemas.microsoft.com/office/drawing/2014/main" val="1001158844"/>
+                    <a16:rowId xmlns:a16="http://schemas.microsoft.com/office/drawing/2014/main" val="3327741837"/>
                   </a:ext>
                 </a:extLst>
               </a:tr>
@@ -26606,7 +26586,7 @@
                 </a:tc>
                 <a:extLst>
                   <a:ext uri="{0D108BD9-81ED-4DB2-BD59-A6C34878D82A}">
-                    <a16:rowId xmlns:a16="http://schemas.microsoft.com/office/drawing/2014/main" val="87052386"/>
+                    <a16:rowId xmlns:a16="http://schemas.microsoft.com/office/drawing/2014/main" val="788704831"/>
                   </a:ext>
                 </a:extLst>
               </a:tr>
@@ -26734,7 +26714,7 @@
                 </a:tc>
                 <a:extLst>
                   <a:ext uri="{0D108BD9-81ED-4DB2-BD59-A6C34878D82A}">
-                    <a16:rowId xmlns:a16="http://schemas.microsoft.com/office/drawing/2014/main" val="3493679486"/>
+                    <a16:rowId xmlns:a16="http://schemas.microsoft.com/office/drawing/2014/main" val="3816834211"/>
                   </a:ext>
                 </a:extLst>
               </a:tr>
@@ -26747,7 +26727,7 @@
           <p:cNvPr id="13" name="四角形: 角を丸くする 12">
             <a:extLst>
               <a:ext uri="{FF2B5EF4-FFF2-40B4-BE49-F238E27FC236}">
-                <a16:creationId xmlns:a16="http://schemas.microsoft.com/office/drawing/2014/main" id="{BD86D8DF-E8A0-494F-D6E5-2FDB42E90FB6}"/>
+                <a16:creationId xmlns:a16="http://schemas.microsoft.com/office/drawing/2014/main" id="{1C2A2AF3-92C1-A030-52C1-366D124BCA3E}"/>
               </a:ext>
             </a:extLst>
           </p:cNvPr>
@@ -26817,7 +26797,7 @@
           <p:cNvPr id="14" name="正方形/長方形 13">
             <a:extLst>
               <a:ext uri="{FF2B5EF4-FFF2-40B4-BE49-F238E27FC236}">
-                <a16:creationId xmlns:a16="http://schemas.microsoft.com/office/drawing/2014/main" id="{B761CEC3-7E0C-40C2-BF86-0E9D9F295345}"/>
+                <a16:creationId xmlns:a16="http://schemas.microsoft.com/office/drawing/2014/main" id="{333989EE-D7BA-330D-1D7F-D87710E4E8AF}"/>
               </a:ext>
             </a:extLst>
           </p:cNvPr>
@@ -26885,7 +26865,7 @@
           <p:cNvPr id="15" name="テキスト ボックス 14">
             <a:extLst>
               <a:ext uri="{FF2B5EF4-FFF2-40B4-BE49-F238E27FC236}">
-                <a16:creationId xmlns:a16="http://schemas.microsoft.com/office/drawing/2014/main" id="{2AA37AA1-990B-A035-BF5D-937B0A624BC5}"/>
+                <a16:creationId xmlns:a16="http://schemas.microsoft.com/office/drawing/2014/main" id="{F327AA4D-AC5B-C54A-0B49-4B4B12910BB0}"/>
               </a:ext>
             </a:extLst>
           </p:cNvPr>
@@ -26931,7 +26911,7 @@
           <p:cNvPr id="16" name="テキスト ボックス 15">
             <a:extLst>
               <a:ext uri="{FF2B5EF4-FFF2-40B4-BE49-F238E27FC236}">
-                <a16:creationId xmlns:a16="http://schemas.microsoft.com/office/drawing/2014/main" id="{8A418382-75A8-ABBF-F7E5-EBFD47A1CB0E}"/>
+                <a16:creationId xmlns:a16="http://schemas.microsoft.com/office/drawing/2014/main" id="{7354FDCA-559C-7E8E-7D96-FF339E4D56E4}"/>
               </a:ext>
             </a:extLst>
           </p:cNvPr>
@@ -27085,7 +27065,7 @@
     </p:spTree>
     <p:extLst>
       <p:ext uri="{BB962C8B-B14F-4D97-AF65-F5344CB8AC3E}">
-        <p14:creationId xmlns:p14="http://schemas.microsoft.com/office/powerpoint/2010/main" val="213041108"/>
+        <p14:creationId xmlns:p14="http://schemas.microsoft.com/office/powerpoint/2010/main" val="3755198244"/>
       </p:ext>
     </p:extLst>
   </p:cSld>
@@ -27117,7 +27097,7 @@
           <p:cNvPr id="2" name="正方形/長方形 1">
             <a:extLst>
               <a:ext uri="{FF2B5EF4-FFF2-40B4-BE49-F238E27FC236}">
-                <a16:creationId xmlns:a16="http://schemas.microsoft.com/office/drawing/2014/main" id="{5F18A7A1-726D-DD9E-20F8-9E2705C394F7}"/>
+                <a16:creationId xmlns:a16="http://schemas.microsoft.com/office/drawing/2014/main" id="{CB48C4FB-4352-6CC4-E74F-DA493610BEEB}"/>
               </a:ext>
             </a:extLst>
           </p:cNvPr>
@@ -27185,7 +27165,7 @@
           <p:cNvPr id="3" name="正方形/長方形 2">
             <a:extLst>
               <a:ext uri="{FF2B5EF4-FFF2-40B4-BE49-F238E27FC236}">
-                <a16:creationId xmlns:a16="http://schemas.microsoft.com/office/drawing/2014/main" id="{8620DBE9-DCCF-3C4D-2E2A-0FF733A289D1}"/>
+                <a16:creationId xmlns:a16="http://schemas.microsoft.com/office/drawing/2014/main" id="{10670D60-051C-2A45-88AD-AE0376DF1143}"/>
               </a:ext>
             </a:extLst>
           </p:cNvPr>
@@ -27253,7 +27233,7 @@
           <p:cNvPr id="4" name="テキスト ボックス 3">
             <a:extLst>
               <a:ext uri="{FF2B5EF4-FFF2-40B4-BE49-F238E27FC236}">
-                <a16:creationId xmlns:a16="http://schemas.microsoft.com/office/drawing/2014/main" id="{A5017D1B-6FE4-B538-2FF0-C24106A222EB}"/>
+                <a16:creationId xmlns:a16="http://schemas.microsoft.com/office/drawing/2014/main" id="{D696D1F3-42AC-294B-2C0F-026F9FA9A1BD}"/>
               </a:ext>
             </a:extLst>
           </p:cNvPr>
@@ -27306,7 +27286,7 @@
           <p:cNvPr id="5" name="テキスト ボックス 4">
             <a:extLst>
               <a:ext uri="{FF2B5EF4-FFF2-40B4-BE49-F238E27FC236}">
-                <a16:creationId xmlns:a16="http://schemas.microsoft.com/office/drawing/2014/main" id="{DC791446-741A-A5EF-4359-FB4383A87A29}"/>
+                <a16:creationId xmlns:a16="http://schemas.microsoft.com/office/drawing/2014/main" id="{64757857-FBB8-3496-E871-D15496EB05CA}"/>
               </a:ext>
             </a:extLst>
           </p:cNvPr>
@@ -27352,7 +27332,7 @@
           <p:cNvPr id="6" name="正方形/長方形 5">
             <a:extLst>
               <a:ext uri="{FF2B5EF4-FFF2-40B4-BE49-F238E27FC236}">
-                <a16:creationId xmlns:a16="http://schemas.microsoft.com/office/drawing/2014/main" id="{6B185826-A766-495E-AF7A-47FA18549333}"/>
+                <a16:creationId xmlns:a16="http://schemas.microsoft.com/office/drawing/2014/main" id="{8BB14545-B72D-E82E-079A-A2A9B5883DCF}"/>
               </a:ext>
             </a:extLst>
           </p:cNvPr>
@@ -27420,7 +27400,7 @@
           <p:cNvPr id="7" name="四角形: 角を丸くする 6">
             <a:extLst>
               <a:ext uri="{FF2B5EF4-FFF2-40B4-BE49-F238E27FC236}">
-                <a16:creationId xmlns:a16="http://schemas.microsoft.com/office/drawing/2014/main" id="{352670FB-9030-62E3-CC93-C1D16A5939FC}"/>
+                <a16:creationId xmlns:a16="http://schemas.microsoft.com/office/drawing/2014/main" id="{B887EAD3-45F7-4E8E-1D7D-DA11CCC0C082}"/>
               </a:ext>
             </a:extLst>
           </p:cNvPr>
@@ -27490,7 +27470,7 @@
           <p:cNvPr id="8" name="テキスト ボックス 7">
             <a:extLst>
               <a:ext uri="{FF2B5EF4-FFF2-40B4-BE49-F238E27FC236}">
-                <a16:creationId xmlns:a16="http://schemas.microsoft.com/office/drawing/2014/main" id="{DFC933C1-35E6-224F-8AEA-D8BCA1C1C26D}"/>
+                <a16:creationId xmlns:a16="http://schemas.microsoft.com/office/drawing/2014/main" id="{F9558230-EF3C-A114-6E14-9A734D82B563}"/>
               </a:ext>
             </a:extLst>
           </p:cNvPr>
@@ -27536,7 +27516,7 @@
           <p:cNvPr id="9" name="テキスト ボックス 8">
             <a:extLst>
               <a:ext uri="{FF2B5EF4-FFF2-40B4-BE49-F238E27FC236}">
-                <a16:creationId xmlns:a16="http://schemas.microsoft.com/office/drawing/2014/main" id="{68CA4BDF-F1D1-D1D7-81E1-E872B6351D7B}"/>
+                <a16:creationId xmlns:a16="http://schemas.microsoft.com/office/drawing/2014/main" id="{24325126-7872-D947-1C90-7807DA958897}"/>
               </a:ext>
             </a:extLst>
           </p:cNvPr>
@@ -27582,7 +27562,7 @@
           <p:cNvPr id="10" name="テキスト ボックス 9">
             <a:extLst>
               <a:ext uri="{FF2B5EF4-FFF2-40B4-BE49-F238E27FC236}">
-                <a16:creationId xmlns:a16="http://schemas.microsoft.com/office/drawing/2014/main" id="{6AC4B401-DE27-55B2-66FD-C975B305C54D}"/>
+                <a16:creationId xmlns:a16="http://schemas.microsoft.com/office/drawing/2014/main" id="{AB521072-F196-DC33-F57A-36FA6D5E33F6}"/>
               </a:ext>
             </a:extLst>
           </p:cNvPr>
@@ -27635,7 +27615,7 @@
           <p:cNvPr id="11" name="テキスト ボックス 10">
             <a:extLst>
               <a:ext uri="{FF2B5EF4-FFF2-40B4-BE49-F238E27FC236}">
-                <a16:creationId xmlns:a16="http://schemas.microsoft.com/office/drawing/2014/main" id="{98A52EBE-5475-2BC9-45BE-4378CB37E359}"/>
+                <a16:creationId xmlns:a16="http://schemas.microsoft.com/office/drawing/2014/main" id="{1FFC6615-DC8F-1E27-EE8A-909AE29D47CB}"/>
               </a:ext>
             </a:extLst>
           </p:cNvPr>
@@ -27701,7 +27681,7 @@
           <p:cNvPr id="12" name="表 11">
             <a:extLst>
               <a:ext uri="{FF2B5EF4-FFF2-40B4-BE49-F238E27FC236}">
-                <a16:creationId xmlns:a16="http://schemas.microsoft.com/office/drawing/2014/main" id="{994A62CB-B7E2-E64E-7940-F02FDF0587E0}"/>
+                <a16:creationId xmlns:a16="http://schemas.microsoft.com/office/drawing/2014/main" id="{53514DC3-DDD6-D065-8149-43ECDB8C41A9}"/>
               </a:ext>
             </a:extLst>
           </p:cNvPr>
@@ -27711,7 +27691,7 @@
           <p:nvPr>
             <p:extLst>
               <p:ext uri="{D42A27DB-BD31-4B8C-83A1-F6EECF244321}">
-                <p14:modId xmlns:p14="http://schemas.microsoft.com/office/powerpoint/2010/main" val="524171700"/>
+                <p14:modId xmlns:p14="http://schemas.microsoft.com/office/powerpoint/2010/main" val="3126074928"/>
               </p:ext>
             </p:extLst>
           </p:nvPr>
@@ -27730,14 +27710,14 @@
                 <a:gridCol w="5461000">
                   <a:extLst>
                     <a:ext uri="{9D8B030D-6E8A-4147-A177-3AD203B41FA5}">
-                      <a16:colId xmlns:a16="http://schemas.microsoft.com/office/drawing/2014/main" val="563979788"/>
+                      <a16:colId xmlns:a16="http://schemas.microsoft.com/office/drawing/2014/main" val="3426365607"/>
                     </a:ext>
                   </a:extLst>
                 </a:gridCol>
                 <a:gridCol w="5105400">
                   <a:extLst>
                     <a:ext uri="{9D8B030D-6E8A-4147-A177-3AD203B41FA5}">
-                      <a16:colId xmlns:a16="http://schemas.microsoft.com/office/drawing/2014/main" val="1194959034"/>
+                      <a16:colId xmlns:a16="http://schemas.microsoft.com/office/drawing/2014/main" val="4176031421"/>
                     </a:ext>
                   </a:extLst>
                 </a:gridCol>
@@ -27811,7 +27791,7 @@
                 </a:tc>
                 <a:extLst>
                   <a:ext uri="{0D108BD9-81ED-4DB2-BD59-A6C34878D82A}">
-                    <a16:rowId xmlns:a16="http://schemas.microsoft.com/office/drawing/2014/main" val="1078051215"/>
+                    <a16:rowId xmlns:a16="http://schemas.microsoft.com/office/drawing/2014/main" val="3462373519"/>
                   </a:ext>
                 </a:extLst>
               </a:tr>
@@ -27911,7 +27891,7 @@
                 </a:tc>
                 <a:extLst>
                   <a:ext uri="{0D108BD9-81ED-4DB2-BD59-A6C34878D82A}">
-                    <a16:rowId xmlns:a16="http://schemas.microsoft.com/office/drawing/2014/main" val="4217910227"/>
+                    <a16:rowId xmlns:a16="http://schemas.microsoft.com/office/drawing/2014/main" val="3103435417"/>
                   </a:ext>
                 </a:extLst>
               </a:tr>
@@ -28011,7 +27991,7 @@
                 </a:tc>
                 <a:extLst>
                   <a:ext uri="{0D108BD9-81ED-4DB2-BD59-A6C34878D82A}">
-                    <a16:rowId xmlns:a16="http://schemas.microsoft.com/office/drawing/2014/main" val="3682851993"/>
+                    <a16:rowId xmlns:a16="http://schemas.microsoft.com/office/drawing/2014/main" val="2077634516"/>
                   </a:ext>
                 </a:extLst>
               </a:tr>
@@ -28024,7 +28004,7 @@
           <p:cNvPr id="13" name="四角形: 角を丸くする 12">
             <a:extLst>
               <a:ext uri="{FF2B5EF4-FFF2-40B4-BE49-F238E27FC236}">
-                <a16:creationId xmlns:a16="http://schemas.microsoft.com/office/drawing/2014/main" id="{B4EE951B-E8BA-84C8-F239-5A5E38E89249}"/>
+                <a16:creationId xmlns:a16="http://schemas.microsoft.com/office/drawing/2014/main" id="{5168D830-3D86-C59A-C1BA-AAE2B29D9274}"/>
               </a:ext>
             </a:extLst>
           </p:cNvPr>
@@ -28094,7 +28074,7 @@
           <p:cNvPr id="14" name="正方形/長方形 13">
             <a:extLst>
               <a:ext uri="{FF2B5EF4-FFF2-40B4-BE49-F238E27FC236}">
-                <a16:creationId xmlns:a16="http://schemas.microsoft.com/office/drawing/2014/main" id="{3A20B696-2243-A12B-5BBC-00FD80ECFD92}"/>
+                <a16:creationId xmlns:a16="http://schemas.microsoft.com/office/drawing/2014/main" id="{A3BD8890-6945-2D83-E9D5-4F1E3FE2DDD2}"/>
               </a:ext>
             </a:extLst>
           </p:cNvPr>
@@ -28162,7 +28142,7 @@
           <p:cNvPr id="15" name="テキスト ボックス 14">
             <a:extLst>
               <a:ext uri="{FF2B5EF4-FFF2-40B4-BE49-F238E27FC236}">
-                <a16:creationId xmlns:a16="http://schemas.microsoft.com/office/drawing/2014/main" id="{8BE78D0C-F463-DB68-F1A1-D29AC5F3399E}"/>
+                <a16:creationId xmlns:a16="http://schemas.microsoft.com/office/drawing/2014/main" id="{4A254970-660B-20FE-D9DB-D3D2891E79BD}"/>
               </a:ext>
             </a:extLst>
           </p:cNvPr>
@@ -28208,7 +28188,7 @@
           <p:cNvPr id="16" name="テキスト ボックス 15">
             <a:extLst>
               <a:ext uri="{FF2B5EF4-FFF2-40B4-BE49-F238E27FC236}">
-                <a16:creationId xmlns:a16="http://schemas.microsoft.com/office/drawing/2014/main" id="{3B45237D-2793-9916-996A-24DB73C92FFD}"/>
+                <a16:creationId xmlns:a16="http://schemas.microsoft.com/office/drawing/2014/main" id="{9C58E6C8-2484-86CF-8798-F1BFCDCF6C3A}"/>
               </a:ext>
             </a:extLst>
           </p:cNvPr>
@@ -28312,7 +28292,7 @@
     </p:spTree>
     <p:extLst>
       <p:ext uri="{BB962C8B-B14F-4D97-AF65-F5344CB8AC3E}">
-        <p14:creationId xmlns:p14="http://schemas.microsoft.com/office/powerpoint/2010/main" val="779935089"/>
+        <p14:creationId xmlns:p14="http://schemas.microsoft.com/office/powerpoint/2010/main" val="3520264819"/>
       </p:ext>
     </p:extLst>
   </p:cSld>
@@ -28344,7 +28324,7 @@
           <p:cNvPr id="2" name="正方形/長方形 1">
             <a:extLst>
               <a:ext uri="{FF2B5EF4-FFF2-40B4-BE49-F238E27FC236}">
-                <a16:creationId xmlns:a16="http://schemas.microsoft.com/office/drawing/2014/main" id="{FE31CA13-1CC1-EF11-E309-B8B2887A7C2E}"/>
+                <a16:creationId xmlns:a16="http://schemas.microsoft.com/office/drawing/2014/main" id="{87008096-58C5-367A-2F47-EF5375D39BD0}"/>
               </a:ext>
             </a:extLst>
           </p:cNvPr>
@@ -28412,7 +28392,7 @@
           <p:cNvPr id="3" name="正方形/長方形 2">
             <a:extLst>
               <a:ext uri="{FF2B5EF4-FFF2-40B4-BE49-F238E27FC236}">
-                <a16:creationId xmlns:a16="http://schemas.microsoft.com/office/drawing/2014/main" id="{5C6029AF-39AD-4C72-97DC-830F52E580F4}"/>
+                <a16:creationId xmlns:a16="http://schemas.microsoft.com/office/drawing/2014/main" id="{33E00B2D-9767-0385-FFEE-7A28A8B50435}"/>
               </a:ext>
             </a:extLst>
           </p:cNvPr>
@@ -28480,7 +28460,7 @@
           <p:cNvPr id="4" name="テキスト ボックス 3">
             <a:extLst>
               <a:ext uri="{FF2B5EF4-FFF2-40B4-BE49-F238E27FC236}">
-                <a16:creationId xmlns:a16="http://schemas.microsoft.com/office/drawing/2014/main" id="{45CBBF05-7FE0-0133-0D0B-9A751485CB16}"/>
+                <a16:creationId xmlns:a16="http://schemas.microsoft.com/office/drawing/2014/main" id="{6A5F528D-644A-97EC-5C42-4248AA146FF3}"/>
               </a:ext>
             </a:extLst>
           </p:cNvPr>
@@ -28533,7 +28513,7 @@
           <p:cNvPr id="5" name="テキスト ボックス 4">
             <a:extLst>
               <a:ext uri="{FF2B5EF4-FFF2-40B4-BE49-F238E27FC236}">
-                <a16:creationId xmlns:a16="http://schemas.microsoft.com/office/drawing/2014/main" id="{1D1D73BD-E8C6-B345-64C6-4F83A11A64B6}"/>
+                <a16:creationId xmlns:a16="http://schemas.microsoft.com/office/drawing/2014/main" id="{5644A53D-5679-9712-B15B-02D653ABA119}"/>
               </a:ext>
             </a:extLst>
           </p:cNvPr>
@@ -28579,7 +28559,7 @@
           <p:cNvPr id="6" name="正方形/長方形 5">
             <a:extLst>
               <a:ext uri="{FF2B5EF4-FFF2-40B4-BE49-F238E27FC236}">
-                <a16:creationId xmlns:a16="http://schemas.microsoft.com/office/drawing/2014/main" id="{98BC8B53-9438-003D-707D-9F5C7AD76951}"/>
+                <a16:creationId xmlns:a16="http://schemas.microsoft.com/office/drawing/2014/main" id="{7CE1AA38-6727-970C-078D-58BA75495F09}"/>
               </a:ext>
             </a:extLst>
           </p:cNvPr>
@@ -28647,7 +28627,7 @@
           <p:cNvPr id="7" name="四角形: 角を丸くする 6">
             <a:extLst>
               <a:ext uri="{FF2B5EF4-FFF2-40B4-BE49-F238E27FC236}">
-                <a16:creationId xmlns:a16="http://schemas.microsoft.com/office/drawing/2014/main" id="{D885CF98-A74E-1877-B1C0-2DB34A677E09}"/>
+                <a16:creationId xmlns:a16="http://schemas.microsoft.com/office/drawing/2014/main" id="{2753497F-19BC-C4BD-4784-A3CD6BECAF57}"/>
               </a:ext>
             </a:extLst>
           </p:cNvPr>
@@ -28717,7 +28697,7 @@
           <p:cNvPr id="8" name="テキスト ボックス 7">
             <a:extLst>
               <a:ext uri="{FF2B5EF4-FFF2-40B4-BE49-F238E27FC236}">
-                <a16:creationId xmlns:a16="http://schemas.microsoft.com/office/drawing/2014/main" id="{07191735-48BD-8238-63D9-BDE3F7B5768E}"/>
+                <a16:creationId xmlns:a16="http://schemas.microsoft.com/office/drawing/2014/main" id="{ED2F56F5-5FF6-AD98-F9DE-F9C88CA77D49}"/>
               </a:ext>
             </a:extLst>
           </p:cNvPr>
@@ -28763,7 +28743,7 @@
           <p:cNvPr id="9" name="テキスト ボックス 8">
             <a:extLst>
               <a:ext uri="{FF2B5EF4-FFF2-40B4-BE49-F238E27FC236}">
-                <a16:creationId xmlns:a16="http://schemas.microsoft.com/office/drawing/2014/main" id="{400F44DC-AE45-295B-F6BA-5BCD77F6DAD9}"/>
+                <a16:creationId xmlns:a16="http://schemas.microsoft.com/office/drawing/2014/main" id="{5BA5B141-99F2-28A7-D5B3-18258ABB4EE1}"/>
               </a:ext>
             </a:extLst>
           </p:cNvPr>
@@ -28809,7 +28789,7 @@
           <p:cNvPr id="10" name="テキスト ボックス 9">
             <a:extLst>
               <a:ext uri="{FF2B5EF4-FFF2-40B4-BE49-F238E27FC236}">
-                <a16:creationId xmlns:a16="http://schemas.microsoft.com/office/drawing/2014/main" id="{F04D5A21-EF0A-EC82-72CB-BF49AB7AD40C}"/>
+                <a16:creationId xmlns:a16="http://schemas.microsoft.com/office/drawing/2014/main" id="{5D15698B-670A-0429-53D9-8206EECEF95E}"/>
               </a:ext>
             </a:extLst>
           </p:cNvPr>
@@ -28862,7 +28842,7 @@
           <p:cNvPr id="11" name="テキスト ボックス 10">
             <a:extLst>
               <a:ext uri="{FF2B5EF4-FFF2-40B4-BE49-F238E27FC236}">
-                <a16:creationId xmlns:a16="http://schemas.microsoft.com/office/drawing/2014/main" id="{BB77C86F-E0D9-4498-6C27-E7A72148CA12}"/>
+                <a16:creationId xmlns:a16="http://schemas.microsoft.com/office/drawing/2014/main" id="{8D79B77A-3DE2-3820-5636-BD44444F6FEB}"/>
               </a:ext>
             </a:extLst>
           </p:cNvPr>
@@ -28968,7 +28948,7 @@
           <p:cNvPr id="12" name="四角形: 角を丸くする 11">
             <a:extLst>
               <a:ext uri="{FF2B5EF4-FFF2-40B4-BE49-F238E27FC236}">
-                <a16:creationId xmlns:a16="http://schemas.microsoft.com/office/drawing/2014/main" id="{0ABABB49-94F9-B03B-B605-2BC46029F63F}"/>
+                <a16:creationId xmlns:a16="http://schemas.microsoft.com/office/drawing/2014/main" id="{594BC4D5-1C09-F40E-75A6-BE9C461BB349}"/>
               </a:ext>
             </a:extLst>
           </p:cNvPr>
@@ -29038,7 +29018,7 @@
           <p:cNvPr id="13" name="テキスト ボックス 12">
             <a:extLst>
               <a:ext uri="{FF2B5EF4-FFF2-40B4-BE49-F238E27FC236}">
-                <a16:creationId xmlns:a16="http://schemas.microsoft.com/office/drawing/2014/main" id="{10A3E591-75A2-EA43-788B-5C0BEDEF4CA8}"/>
+                <a16:creationId xmlns:a16="http://schemas.microsoft.com/office/drawing/2014/main" id="{5091D533-766F-BCB5-83E8-6FA359C880A8}"/>
               </a:ext>
             </a:extLst>
           </p:cNvPr>
@@ -29098,7 +29078,7 @@
           <p:cNvPr id="14" name="テキスト ボックス 13">
             <a:extLst>
               <a:ext uri="{FF2B5EF4-FFF2-40B4-BE49-F238E27FC236}">
-                <a16:creationId xmlns:a16="http://schemas.microsoft.com/office/drawing/2014/main" id="{1CA8CD79-0947-6F0F-B3EE-0D758E1DB29B}"/>
+                <a16:creationId xmlns:a16="http://schemas.microsoft.com/office/drawing/2014/main" id="{B3BD0194-519B-8EC0-3C8D-6A2B56EA1332}"/>
               </a:ext>
             </a:extLst>
           </p:cNvPr>
@@ -29164,7 +29144,7 @@
           <p:cNvPr id="15" name="四角形: 角を丸くする 14">
             <a:extLst>
               <a:ext uri="{FF2B5EF4-FFF2-40B4-BE49-F238E27FC236}">
-                <a16:creationId xmlns:a16="http://schemas.microsoft.com/office/drawing/2014/main" id="{535173AF-6330-9B98-A1A5-77A6F3E61011}"/>
+                <a16:creationId xmlns:a16="http://schemas.microsoft.com/office/drawing/2014/main" id="{2F6C2E9A-EDFC-126A-C4EA-D88915DD5F55}"/>
               </a:ext>
             </a:extLst>
           </p:cNvPr>
@@ -29220,7 +29200,7 @@
           <p:cNvPr id="16" name="テキスト ボックス 15">
             <a:extLst>
               <a:ext uri="{FF2B5EF4-FFF2-40B4-BE49-F238E27FC236}">
-                <a16:creationId xmlns:a16="http://schemas.microsoft.com/office/drawing/2014/main" id="{42EC651A-A7D4-14EB-ED94-14EBCF538041}"/>
+                <a16:creationId xmlns:a16="http://schemas.microsoft.com/office/drawing/2014/main" id="{9A66CAA1-93FC-E26B-905E-4C7B2AD3A0E5}"/>
               </a:ext>
             </a:extLst>
           </p:cNvPr>
@@ -29280,7 +29260,7 @@
           <p:cNvPr id="17" name="テキスト ボックス 16">
             <a:extLst>
               <a:ext uri="{FF2B5EF4-FFF2-40B4-BE49-F238E27FC236}">
-                <a16:creationId xmlns:a16="http://schemas.microsoft.com/office/drawing/2014/main" id="{D66BC86F-BE5E-F2B7-311E-228559A117FC}"/>
+                <a16:creationId xmlns:a16="http://schemas.microsoft.com/office/drawing/2014/main" id="{7E295C72-0815-3DFC-3061-527B93619522}"/>
               </a:ext>
             </a:extLst>
           </p:cNvPr>
@@ -29326,7 +29306,7 @@
           <p:cNvPr id="18" name="テキスト ボックス 17">
             <a:extLst>
               <a:ext uri="{FF2B5EF4-FFF2-40B4-BE49-F238E27FC236}">
-                <a16:creationId xmlns:a16="http://schemas.microsoft.com/office/drawing/2014/main" id="{356E1736-550E-FF02-32F3-E0E06A27B36A}"/>
+                <a16:creationId xmlns:a16="http://schemas.microsoft.com/office/drawing/2014/main" id="{071BFC90-06F6-DC67-9910-0DBD3047BA17}"/>
               </a:ext>
             </a:extLst>
           </p:cNvPr>
@@ -29392,7 +29372,7 @@
           <p:cNvPr id="19" name="四角形: 角を丸くする 18">
             <a:extLst>
               <a:ext uri="{FF2B5EF4-FFF2-40B4-BE49-F238E27FC236}">
-                <a16:creationId xmlns:a16="http://schemas.microsoft.com/office/drawing/2014/main" id="{E9FF0453-AA2A-11FB-B06B-566605E489FB}"/>
+                <a16:creationId xmlns:a16="http://schemas.microsoft.com/office/drawing/2014/main" id="{695A694B-2D07-2678-AE09-0E2586FD5E59}"/>
               </a:ext>
             </a:extLst>
           </p:cNvPr>
@@ -29448,7 +29428,7 @@
           <p:cNvPr id="20" name="テキスト ボックス 19">
             <a:extLst>
               <a:ext uri="{FF2B5EF4-FFF2-40B4-BE49-F238E27FC236}">
-                <a16:creationId xmlns:a16="http://schemas.microsoft.com/office/drawing/2014/main" id="{E9C9B780-66B2-E073-4437-C691F18E0E1B}"/>
+                <a16:creationId xmlns:a16="http://schemas.microsoft.com/office/drawing/2014/main" id="{090581CE-C256-53B9-CBB4-897F100B5117}"/>
               </a:ext>
             </a:extLst>
           </p:cNvPr>
@@ -29508,7 +29488,7 @@
           <p:cNvPr id="21" name="テキスト ボックス 20">
             <a:extLst>
               <a:ext uri="{FF2B5EF4-FFF2-40B4-BE49-F238E27FC236}">
-                <a16:creationId xmlns:a16="http://schemas.microsoft.com/office/drawing/2014/main" id="{5653BB55-1412-FFFB-1836-ABA2389664F7}"/>
+                <a16:creationId xmlns:a16="http://schemas.microsoft.com/office/drawing/2014/main" id="{5A5B9829-202A-9F0A-AF0E-EB1192DAF006}"/>
               </a:ext>
             </a:extLst>
           </p:cNvPr>
@@ -29564,7 +29544,7 @@
           <p:cNvPr id="22" name="テキスト ボックス 21">
             <a:extLst>
               <a:ext uri="{FF2B5EF4-FFF2-40B4-BE49-F238E27FC236}">
-                <a16:creationId xmlns:a16="http://schemas.microsoft.com/office/drawing/2014/main" id="{433EC652-E4DD-84C4-B67B-E2C06826D65A}"/>
+                <a16:creationId xmlns:a16="http://schemas.microsoft.com/office/drawing/2014/main" id="{990BD991-2C3A-BA2D-50B4-1160B4E3D743}"/>
               </a:ext>
             </a:extLst>
           </p:cNvPr>
@@ -29620,7 +29600,7 @@
           <p:cNvPr id="23" name="四角形: 角を丸くする 22">
             <a:extLst>
               <a:ext uri="{FF2B5EF4-FFF2-40B4-BE49-F238E27FC236}">
-                <a16:creationId xmlns:a16="http://schemas.microsoft.com/office/drawing/2014/main" id="{06E6B81C-2BDF-BB5A-949D-4B2374F54431}"/>
+                <a16:creationId xmlns:a16="http://schemas.microsoft.com/office/drawing/2014/main" id="{9FE6ABD8-1746-38A4-3C1E-60F095150B1D}"/>
               </a:ext>
             </a:extLst>
           </p:cNvPr>
@@ -29676,7 +29656,7 @@
           <p:cNvPr id="24" name="テキスト ボックス 23">
             <a:extLst>
               <a:ext uri="{FF2B5EF4-FFF2-40B4-BE49-F238E27FC236}">
-                <a16:creationId xmlns:a16="http://schemas.microsoft.com/office/drawing/2014/main" id="{7346DC9B-8BC6-F894-D7F1-46CD8E99FBA9}"/>
+                <a16:creationId xmlns:a16="http://schemas.microsoft.com/office/drawing/2014/main" id="{3A0A3E87-A24C-ACB1-11CF-6783A931FEB8}"/>
               </a:ext>
             </a:extLst>
           </p:cNvPr>
@@ -29736,7 +29716,7 @@
           <p:cNvPr id="25" name="テキスト ボックス 24">
             <a:extLst>
               <a:ext uri="{FF2B5EF4-FFF2-40B4-BE49-F238E27FC236}">
-                <a16:creationId xmlns:a16="http://schemas.microsoft.com/office/drawing/2014/main" id="{C305E9CE-CC0D-A6B5-31C6-62DBCEA9F338}"/>
+                <a16:creationId xmlns:a16="http://schemas.microsoft.com/office/drawing/2014/main" id="{D67144AA-526D-2F36-2CF4-65710D1F85B4}"/>
               </a:ext>
             </a:extLst>
           </p:cNvPr>
@@ -29792,7 +29772,7 @@
           <p:cNvPr id="26" name="テキスト ボックス 25">
             <a:extLst>
               <a:ext uri="{FF2B5EF4-FFF2-40B4-BE49-F238E27FC236}">
-                <a16:creationId xmlns:a16="http://schemas.microsoft.com/office/drawing/2014/main" id="{FE73E1B2-8ADA-FB18-3316-A49469DFD23B}"/>
+                <a16:creationId xmlns:a16="http://schemas.microsoft.com/office/drawing/2014/main" id="{69FF9C1D-08F6-BC8F-FC00-85E3AFFA697B}"/>
               </a:ext>
             </a:extLst>
           </p:cNvPr>
@@ -29838,7 +29818,7 @@
           <p:cNvPr id="27" name="四角形: 角を丸くする 26">
             <a:extLst>
               <a:ext uri="{FF2B5EF4-FFF2-40B4-BE49-F238E27FC236}">
-                <a16:creationId xmlns:a16="http://schemas.microsoft.com/office/drawing/2014/main" id="{3112A2A5-9A25-8239-4F06-96EDCDDFD5BF}"/>
+                <a16:creationId xmlns:a16="http://schemas.microsoft.com/office/drawing/2014/main" id="{BC5C625A-3561-1834-B3DE-FA3715C7641C}"/>
               </a:ext>
             </a:extLst>
           </p:cNvPr>
@@ -29908,7 +29888,7 @@
           <p:cNvPr id="28" name="正方形/長方形 27">
             <a:extLst>
               <a:ext uri="{FF2B5EF4-FFF2-40B4-BE49-F238E27FC236}">
-                <a16:creationId xmlns:a16="http://schemas.microsoft.com/office/drawing/2014/main" id="{EB3854C5-5874-FCD5-6ED2-84A5315C234B}"/>
+                <a16:creationId xmlns:a16="http://schemas.microsoft.com/office/drawing/2014/main" id="{100AB4DB-E2A9-44E1-109C-D9FAE0025F01}"/>
               </a:ext>
             </a:extLst>
           </p:cNvPr>
@@ -29976,7 +29956,7 @@
           <p:cNvPr id="29" name="テキスト ボックス 28">
             <a:extLst>
               <a:ext uri="{FF2B5EF4-FFF2-40B4-BE49-F238E27FC236}">
-                <a16:creationId xmlns:a16="http://schemas.microsoft.com/office/drawing/2014/main" id="{8AED9439-8E2E-7FA0-EDEC-51492ECF12DD}"/>
+                <a16:creationId xmlns:a16="http://schemas.microsoft.com/office/drawing/2014/main" id="{9199E8A0-8FA7-A104-F78F-0A4491F28F4A}"/>
               </a:ext>
             </a:extLst>
           </p:cNvPr>
@@ -30022,7 +30002,7 @@
           <p:cNvPr id="30" name="テキスト ボックス 29">
             <a:extLst>
               <a:ext uri="{FF2B5EF4-FFF2-40B4-BE49-F238E27FC236}">
-                <a16:creationId xmlns:a16="http://schemas.microsoft.com/office/drawing/2014/main" id="{70B70E82-5E04-21EA-6915-8C9979D875F8}"/>
+                <a16:creationId xmlns:a16="http://schemas.microsoft.com/office/drawing/2014/main" id="{8788B682-C214-EA59-D919-E31C4A48AC4C}"/>
               </a:ext>
             </a:extLst>
           </p:cNvPr>
@@ -30076,7 +30056,7 @@
     </p:spTree>
     <p:extLst>
       <p:ext uri="{BB962C8B-B14F-4D97-AF65-F5344CB8AC3E}">
-        <p14:creationId xmlns:p14="http://schemas.microsoft.com/office/powerpoint/2010/main" val="1339934858"/>
+        <p14:creationId xmlns:p14="http://schemas.microsoft.com/office/powerpoint/2010/main" val="3599067500"/>
       </p:ext>
     </p:extLst>
   </p:cSld>
@@ -30108,7 +30088,7 @@
           <p:cNvPr id="2" name="正方形/長方形 1">
             <a:extLst>
               <a:ext uri="{FF2B5EF4-FFF2-40B4-BE49-F238E27FC236}">
-                <a16:creationId xmlns:a16="http://schemas.microsoft.com/office/drawing/2014/main" id="{3EB3A776-07A3-8DDB-E498-03560AE7A8F5}"/>
+                <a16:creationId xmlns:a16="http://schemas.microsoft.com/office/drawing/2014/main" id="{00A0247C-E754-2813-F184-62650BA21F10}"/>
               </a:ext>
             </a:extLst>
           </p:cNvPr>
@@ -30176,7 +30156,7 @@
           <p:cNvPr id="3" name="正方形/長方形 2">
             <a:extLst>
               <a:ext uri="{FF2B5EF4-FFF2-40B4-BE49-F238E27FC236}">
-                <a16:creationId xmlns:a16="http://schemas.microsoft.com/office/drawing/2014/main" id="{3171768D-78D9-979D-720C-D6EB8F9C6E64}"/>
+                <a16:creationId xmlns:a16="http://schemas.microsoft.com/office/drawing/2014/main" id="{50C09430-595C-752F-7727-937743B5D4F1}"/>
               </a:ext>
             </a:extLst>
           </p:cNvPr>
@@ -30244,7 +30224,7 @@
           <p:cNvPr id="4" name="テキスト ボックス 3">
             <a:extLst>
               <a:ext uri="{FF2B5EF4-FFF2-40B4-BE49-F238E27FC236}">
-                <a16:creationId xmlns:a16="http://schemas.microsoft.com/office/drawing/2014/main" id="{055FA9BD-4906-E073-0D2E-09A0A5EBE0E4}"/>
+                <a16:creationId xmlns:a16="http://schemas.microsoft.com/office/drawing/2014/main" id="{22F58C18-F420-1B38-2C97-DD378DF24E7A}"/>
               </a:ext>
             </a:extLst>
           </p:cNvPr>
@@ -30297,7 +30277,7 @@
           <p:cNvPr id="5" name="テキスト ボックス 4">
             <a:extLst>
               <a:ext uri="{FF2B5EF4-FFF2-40B4-BE49-F238E27FC236}">
-                <a16:creationId xmlns:a16="http://schemas.microsoft.com/office/drawing/2014/main" id="{9EE99447-C514-0B94-D68B-CEC2C912F4CC}"/>
+                <a16:creationId xmlns:a16="http://schemas.microsoft.com/office/drawing/2014/main" id="{3D7F2101-C4F4-840A-AC05-65B9498762E5}"/>
               </a:ext>
             </a:extLst>
           </p:cNvPr>
@@ -30343,7 +30323,7 @@
           <p:cNvPr id="6" name="正方形/長方形 5">
             <a:extLst>
               <a:ext uri="{FF2B5EF4-FFF2-40B4-BE49-F238E27FC236}">
-                <a16:creationId xmlns:a16="http://schemas.microsoft.com/office/drawing/2014/main" id="{05F35C0C-EF54-C3AE-91D0-8EBA5237C9C5}"/>
+                <a16:creationId xmlns:a16="http://schemas.microsoft.com/office/drawing/2014/main" id="{47C69FBF-9960-E9D7-38B2-581CCDB7E419}"/>
               </a:ext>
             </a:extLst>
           </p:cNvPr>
@@ -30411,7 +30391,7 @@
           <p:cNvPr id="7" name="四角形: 角を丸くする 6">
             <a:extLst>
               <a:ext uri="{FF2B5EF4-FFF2-40B4-BE49-F238E27FC236}">
-                <a16:creationId xmlns:a16="http://schemas.microsoft.com/office/drawing/2014/main" id="{4564F40C-632E-1C91-3714-01546DD38A1B}"/>
+                <a16:creationId xmlns:a16="http://schemas.microsoft.com/office/drawing/2014/main" id="{A8121352-BECF-E5F3-C7D9-907F20012191}"/>
               </a:ext>
             </a:extLst>
           </p:cNvPr>
@@ -30481,7 +30461,7 @@
           <p:cNvPr id="8" name="テキスト ボックス 7">
             <a:extLst>
               <a:ext uri="{FF2B5EF4-FFF2-40B4-BE49-F238E27FC236}">
-                <a16:creationId xmlns:a16="http://schemas.microsoft.com/office/drawing/2014/main" id="{32FC7C7E-24B1-F71C-5CA3-625E58E110A7}"/>
+                <a16:creationId xmlns:a16="http://schemas.microsoft.com/office/drawing/2014/main" id="{9B57DD35-F0E3-52EB-46BE-6D364E3188E4}"/>
               </a:ext>
             </a:extLst>
           </p:cNvPr>
@@ -30527,7 +30507,7 @@
           <p:cNvPr id="9" name="テキスト ボックス 8">
             <a:extLst>
               <a:ext uri="{FF2B5EF4-FFF2-40B4-BE49-F238E27FC236}">
-                <a16:creationId xmlns:a16="http://schemas.microsoft.com/office/drawing/2014/main" id="{4255173C-98AD-385A-493E-FA0FAFBA7579}"/>
+                <a16:creationId xmlns:a16="http://schemas.microsoft.com/office/drawing/2014/main" id="{DF2A4921-CC4F-BECE-87DB-591E3CAECB3C}"/>
               </a:ext>
             </a:extLst>
           </p:cNvPr>
@@ -30573,7 +30553,7 @@
           <p:cNvPr id="10" name="テキスト ボックス 9">
             <a:extLst>
               <a:ext uri="{FF2B5EF4-FFF2-40B4-BE49-F238E27FC236}">
-                <a16:creationId xmlns:a16="http://schemas.microsoft.com/office/drawing/2014/main" id="{A022833D-A335-7587-9790-06E0F6EA4A0D}"/>
+                <a16:creationId xmlns:a16="http://schemas.microsoft.com/office/drawing/2014/main" id="{DAEAD3E4-B9FA-7E75-9283-6F38E5170CC9}"/>
               </a:ext>
             </a:extLst>
           </p:cNvPr>
@@ -30626,7 +30606,7 @@
           <p:cNvPr id="11" name="テキスト ボックス 10">
             <a:extLst>
               <a:ext uri="{FF2B5EF4-FFF2-40B4-BE49-F238E27FC236}">
-                <a16:creationId xmlns:a16="http://schemas.microsoft.com/office/drawing/2014/main" id="{E3582599-5FF9-B5E6-672B-3C3C3B104147}"/>
+                <a16:creationId xmlns:a16="http://schemas.microsoft.com/office/drawing/2014/main" id="{0CBDA12F-EBB1-9FC7-D0D6-838A6F936B43}"/>
               </a:ext>
             </a:extLst>
           </p:cNvPr>
@@ -30712,7 +30692,7 @@
           <p:cNvPr id="12" name="四角形: 角を丸くする 11">
             <a:extLst>
               <a:ext uri="{FF2B5EF4-FFF2-40B4-BE49-F238E27FC236}">
-                <a16:creationId xmlns:a16="http://schemas.microsoft.com/office/drawing/2014/main" id="{556FDD85-F3DD-1A2A-3D29-2195398AFE59}"/>
+                <a16:creationId xmlns:a16="http://schemas.microsoft.com/office/drawing/2014/main" id="{B8BB9123-49D4-C970-AD0B-1D73316431B8}"/>
               </a:ext>
             </a:extLst>
           </p:cNvPr>
@@ -30782,7 +30762,7 @@
           <p:cNvPr id="13" name="テキスト ボックス 12">
             <a:extLst>
               <a:ext uri="{FF2B5EF4-FFF2-40B4-BE49-F238E27FC236}">
-                <a16:creationId xmlns:a16="http://schemas.microsoft.com/office/drawing/2014/main" id="{9FD3AA8E-39BC-8397-3D1D-C97E2915CD1D}"/>
+                <a16:creationId xmlns:a16="http://schemas.microsoft.com/office/drawing/2014/main" id="{B618F3DB-AFEB-8572-3F8F-8FF7F282F768}"/>
               </a:ext>
             </a:extLst>
           </p:cNvPr>
@@ -30842,7 +30822,7 @@
           <p:cNvPr id="14" name="テキスト ボックス 13">
             <a:extLst>
               <a:ext uri="{FF2B5EF4-FFF2-40B4-BE49-F238E27FC236}">
-                <a16:creationId xmlns:a16="http://schemas.microsoft.com/office/drawing/2014/main" id="{410505AA-B2A6-C5E9-0E59-74FFDBA30B42}"/>
+                <a16:creationId xmlns:a16="http://schemas.microsoft.com/office/drawing/2014/main" id="{4DE14EC2-B465-F100-3866-D936F1632C10}"/>
               </a:ext>
             </a:extLst>
           </p:cNvPr>
@@ -30948,7 +30928,7 @@
           <p:cNvPr id="15" name="四角形: 角を丸くする 14">
             <a:extLst>
               <a:ext uri="{FF2B5EF4-FFF2-40B4-BE49-F238E27FC236}">
-                <a16:creationId xmlns:a16="http://schemas.microsoft.com/office/drawing/2014/main" id="{2D57AC9C-B724-37A8-592F-ADF00705F3AC}"/>
+                <a16:creationId xmlns:a16="http://schemas.microsoft.com/office/drawing/2014/main" id="{6E991B12-2887-4879-2D5B-2C62BE9604C6}"/>
               </a:ext>
             </a:extLst>
           </p:cNvPr>
@@ -31004,7 +30984,7 @@
           <p:cNvPr id="16" name="テキスト ボックス 15">
             <a:extLst>
               <a:ext uri="{FF2B5EF4-FFF2-40B4-BE49-F238E27FC236}">
-                <a16:creationId xmlns:a16="http://schemas.microsoft.com/office/drawing/2014/main" id="{DF806992-32DE-51DC-BC7F-4B9AA55D8811}"/>
+                <a16:creationId xmlns:a16="http://schemas.microsoft.com/office/drawing/2014/main" id="{77251605-74D4-FDDF-BE36-5581BA8BD034}"/>
               </a:ext>
             </a:extLst>
           </p:cNvPr>
@@ -31064,7 +31044,7 @@
           <p:cNvPr id="17" name="テキスト ボックス 16">
             <a:extLst>
               <a:ext uri="{FF2B5EF4-FFF2-40B4-BE49-F238E27FC236}">
-                <a16:creationId xmlns:a16="http://schemas.microsoft.com/office/drawing/2014/main" id="{D49FD782-2170-3C2F-4757-27B6EC79AF7B}"/>
+                <a16:creationId xmlns:a16="http://schemas.microsoft.com/office/drawing/2014/main" id="{339CBE54-247E-6643-34EF-290D4FF3321D}"/>
               </a:ext>
             </a:extLst>
           </p:cNvPr>
@@ -31110,7 +31090,7 @@
           <p:cNvPr id="18" name="テキスト ボックス 17">
             <a:extLst>
               <a:ext uri="{FF2B5EF4-FFF2-40B4-BE49-F238E27FC236}">
-                <a16:creationId xmlns:a16="http://schemas.microsoft.com/office/drawing/2014/main" id="{FF382724-FF7D-9C53-7756-1FC75B63BE12}"/>
+                <a16:creationId xmlns:a16="http://schemas.microsoft.com/office/drawing/2014/main" id="{F820C34C-7D10-D07C-166D-526428EF3F17}"/>
               </a:ext>
             </a:extLst>
           </p:cNvPr>
@@ -31196,7 +31176,7 @@
           <p:cNvPr id="19" name="四角形: 角を丸くする 18">
             <a:extLst>
               <a:ext uri="{FF2B5EF4-FFF2-40B4-BE49-F238E27FC236}">
-                <a16:creationId xmlns:a16="http://schemas.microsoft.com/office/drawing/2014/main" id="{5265A7D8-6B2E-ACFE-98B4-D660AEBFCA34}"/>
+                <a16:creationId xmlns:a16="http://schemas.microsoft.com/office/drawing/2014/main" id="{423298ED-87C0-8484-9C93-09C41E32307E}"/>
               </a:ext>
             </a:extLst>
           </p:cNvPr>
@@ -31252,7 +31232,7 @@
           <p:cNvPr id="20" name="テキスト ボックス 19">
             <a:extLst>
               <a:ext uri="{FF2B5EF4-FFF2-40B4-BE49-F238E27FC236}">
-                <a16:creationId xmlns:a16="http://schemas.microsoft.com/office/drawing/2014/main" id="{6CD5198B-B976-A048-F16C-604E5B9BDC14}"/>
+                <a16:creationId xmlns:a16="http://schemas.microsoft.com/office/drawing/2014/main" id="{EA1DDB2C-BAC6-A4E7-7AAB-78DA53081C2A}"/>
               </a:ext>
             </a:extLst>
           </p:cNvPr>
@@ -31312,7 +31292,7 @@
           <p:cNvPr id="21" name="テキスト ボックス 20">
             <a:extLst>
               <a:ext uri="{FF2B5EF4-FFF2-40B4-BE49-F238E27FC236}">
-                <a16:creationId xmlns:a16="http://schemas.microsoft.com/office/drawing/2014/main" id="{937ABD70-4BBF-E889-E03D-C367A120580F}"/>
+                <a16:creationId xmlns:a16="http://schemas.microsoft.com/office/drawing/2014/main" id="{30A52EF7-D4F2-302D-0582-349633B3D24B}"/>
               </a:ext>
             </a:extLst>
           </p:cNvPr>
@@ -31358,7 +31338,7 @@
           <p:cNvPr id="22" name="テキスト ボックス 21">
             <a:extLst>
               <a:ext uri="{FF2B5EF4-FFF2-40B4-BE49-F238E27FC236}">
-                <a16:creationId xmlns:a16="http://schemas.microsoft.com/office/drawing/2014/main" id="{B3616744-AF07-F9E2-19B2-851B4DF6E04C}"/>
+                <a16:creationId xmlns:a16="http://schemas.microsoft.com/office/drawing/2014/main" id="{7411EE3C-0D97-181B-E1B6-E1AF63ABD0E9}"/>
               </a:ext>
             </a:extLst>
           </p:cNvPr>
@@ -31454,7 +31434,7 @@
           <p:cNvPr id="23" name="四角形: 角を丸くする 22">
             <a:extLst>
               <a:ext uri="{FF2B5EF4-FFF2-40B4-BE49-F238E27FC236}">
-                <a16:creationId xmlns:a16="http://schemas.microsoft.com/office/drawing/2014/main" id="{2807E6AD-8A3D-735A-B4BC-1FB2EBA6E4E9}"/>
+                <a16:creationId xmlns:a16="http://schemas.microsoft.com/office/drawing/2014/main" id="{FC77457A-A888-24C2-C763-4B0CA4CEC1B9}"/>
               </a:ext>
             </a:extLst>
           </p:cNvPr>
@@ -31510,7 +31490,7 @@
           <p:cNvPr id="24" name="テキスト ボックス 23">
             <a:extLst>
               <a:ext uri="{FF2B5EF4-FFF2-40B4-BE49-F238E27FC236}">
-                <a16:creationId xmlns:a16="http://schemas.microsoft.com/office/drawing/2014/main" id="{787FFEBD-E6A8-E295-3002-3EF242F96234}"/>
+                <a16:creationId xmlns:a16="http://schemas.microsoft.com/office/drawing/2014/main" id="{B5F50FE0-3814-D519-62CE-5F0007402466}"/>
               </a:ext>
             </a:extLst>
           </p:cNvPr>
@@ -31570,7 +31550,7 @@
           <p:cNvPr id="25" name="テキスト ボックス 24">
             <a:extLst>
               <a:ext uri="{FF2B5EF4-FFF2-40B4-BE49-F238E27FC236}">
-                <a16:creationId xmlns:a16="http://schemas.microsoft.com/office/drawing/2014/main" id="{4F0BEE30-92DF-B855-0A83-AB069E660AA2}"/>
+                <a16:creationId xmlns:a16="http://schemas.microsoft.com/office/drawing/2014/main" id="{8745084E-1157-E7D7-66C3-EDABA1B7DCA9}"/>
               </a:ext>
             </a:extLst>
           </p:cNvPr>
@@ -31616,7 +31596,7 @@
           <p:cNvPr id="26" name="テキスト ボックス 25">
             <a:extLst>
               <a:ext uri="{FF2B5EF4-FFF2-40B4-BE49-F238E27FC236}">
-                <a16:creationId xmlns:a16="http://schemas.microsoft.com/office/drawing/2014/main" id="{365EFAA7-3FCA-2249-B3D3-037C84A3795E}"/>
+                <a16:creationId xmlns:a16="http://schemas.microsoft.com/office/drawing/2014/main" id="{1C270FB9-71A2-2961-28BC-6071B7B8EFAA}"/>
               </a:ext>
             </a:extLst>
           </p:cNvPr>
@@ -31712,7 +31692,7 @@
           <p:cNvPr id="27" name="四角形: 角を丸くする 26">
             <a:extLst>
               <a:ext uri="{FF2B5EF4-FFF2-40B4-BE49-F238E27FC236}">
-                <a16:creationId xmlns:a16="http://schemas.microsoft.com/office/drawing/2014/main" id="{CFBEA9A4-AF7B-C799-72AE-ADC4C32C58FC}"/>
+                <a16:creationId xmlns:a16="http://schemas.microsoft.com/office/drawing/2014/main" id="{B524BF47-593A-0269-EF91-61CB24380E49}"/>
               </a:ext>
             </a:extLst>
           </p:cNvPr>
@@ -31782,7 +31762,7 @@
           <p:cNvPr id="28" name="正方形/長方形 27">
             <a:extLst>
               <a:ext uri="{FF2B5EF4-FFF2-40B4-BE49-F238E27FC236}">
-                <a16:creationId xmlns:a16="http://schemas.microsoft.com/office/drawing/2014/main" id="{DB712EC8-407B-4E9A-7B37-7AEAE2F9F273}"/>
+                <a16:creationId xmlns:a16="http://schemas.microsoft.com/office/drawing/2014/main" id="{83111E45-09CD-FF77-FA37-E060F1E30059}"/>
               </a:ext>
             </a:extLst>
           </p:cNvPr>
@@ -31850,7 +31830,7 @@
           <p:cNvPr id="29" name="テキスト ボックス 28">
             <a:extLst>
               <a:ext uri="{FF2B5EF4-FFF2-40B4-BE49-F238E27FC236}">
-                <a16:creationId xmlns:a16="http://schemas.microsoft.com/office/drawing/2014/main" id="{B44883AD-04D2-46F8-9525-52930641C7B1}"/>
+                <a16:creationId xmlns:a16="http://schemas.microsoft.com/office/drawing/2014/main" id="{A843F456-C87C-CC38-012E-A76E1FD3EEBF}"/>
               </a:ext>
             </a:extLst>
           </p:cNvPr>
@@ -31896,7 +31876,7 @@
           <p:cNvPr id="30" name="テキスト ボックス 29">
             <a:extLst>
               <a:ext uri="{FF2B5EF4-FFF2-40B4-BE49-F238E27FC236}">
-                <a16:creationId xmlns:a16="http://schemas.microsoft.com/office/drawing/2014/main" id="{5EFE1E37-E745-C025-6412-78B30671CBC6}"/>
+                <a16:creationId xmlns:a16="http://schemas.microsoft.com/office/drawing/2014/main" id="{67947F4D-DC62-FAB0-A123-C2E73EDD0257}"/>
               </a:ext>
             </a:extLst>
           </p:cNvPr>
@@ -31980,7 +31960,7 @@
     </p:spTree>
     <p:extLst>
       <p:ext uri="{BB962C8B-B14F-4D97-AF65-F5344CB8AC3E}">
-        <p14:creationId xmlns:p14="http://schemas.microsoft.com/office/powerpoint/2010/main" val="921773658"/>
+        <p14:creationId xmlns:p14="http://schemas.microsoft.com/office/powerpoint/2010/main" val="242704708"/>
       </p:ext>
     </p:extLst>
   </p:cSld>
@@ -32012,7 +31992,7 @@
           <p:cNvPr id="2" name="正方形/長方形 1">
             <a:extLst>
               <a:ext uri="{FF2B5EF4-FFF2-40B4-BE49-F238E27FC236}">
-                <a16:creationId xmlns:a16="http://schemas.microsoft.com/office/drawing/2014/main" id="{8DEEC124-2B6D-2C64-8FA8-FB9A8ADA355D}"/>
+                <a16:creationId xmlns:a16="http://schemas.microsoft.com/office/drawing/2014/main" id="{14E19E36-D24F-1008-A803-B228F3332D6A}"/>
               </a:ext>
             </a:extLst>
           </p:cNvPr>
@@ -32080,7 +32060,7 @@
           <p:cNvPr id="3" name="正方形/長方形 2">
             <a:extLst>
               <a:ext uri="{FF2B5EF4-FFF2-40B4-BE49-F238E27FC236}">
-                <a16:creationId xmlns:a16="http://schemas.microsoft.com/office/drawing/2014/main" id="{B0CFB4B6-33B1-F645-C96B-F0C4EE18A2FA}"/>
+                <a16:creationId xmlns:a16="http://schemas.microsoft.com/office/drawing/2014/main" id="{49E7652F-DE93-ED52-8890-C4AA5A662D05}"/>
               </a:ext>
             </a:extLst>
           </p:cNvPr>
@@ -32148,7 +32128,7 @@
           <p:cNvPr id="4" name="テキスト ボックス 3">
             <a:extLst>
               <a:ext uri="{FF2B5EF4-FFF2-40B4-BE49-F238E27FC236}">
-                <a16:creationId xmlns:a16="http://schemas.microsoft.com/office/drawing/2014/main" id="{13A1E47B-2782-8EBB-290E-43230055F691}"/>
+                <a16:creationId xmlns:a16="http://schemas.microsoft.com/office/drawing/2014/main" id="{46DE0445-2D47-0857-0201-27E39B83257B}"/>
               </a:ext>
             </a:extLst>
           </p:cNvPr>
@@ -32201,7 +32181,7 @@
           <p:cNvPr id="5" name="テキスト ボックス 4">
             <a:extLst>
               <a:ext uri="{FF2B5EF4-FFF2-40B4-BE49-F238E27FC236}">
-                <a16:creationId xmlns:a16="http://schemas.microsoft.com/office/drawing/2014/main" id="{5A5655CC-0DA8-3CC6-A922-22BC68590FB3}"/>
+                <a16:creationId xmlns:a16="http://schemas.microsoft.com/office/drawing/2014/main" id="{7EFF1EE1-BBD9-267B-FF82-62F3BDDF11AB}"/>
               </a:ext>
             </a:extLst>
           </p:cNvPr>
@@ -32267,7 +32247,7 @@
           <p:cNvPr id="6" name="正方形/長方形 5">
             <a:extLst>
               <a:ext uri="{FF2B5EF4-FFF2-40B4-BE49-F238E27FC236}">
-                <a16:creationId xmlns:a16="http://schemas.microsoft.com/office/drawing/2014/main" id="{30C50E38-A709-4FA9-9DF7-1BA99F210834}"/>
+                <a16:creationId xmlns:a16="http://schemas.microsoft.com/office/drawing/2014/main" id="{5765B8F5-09EF-3361-C8F6-70FA30420027}"/>
               </a:ext>
             </a:extLst>
           </p:cNvPr>
@@ -32335,7 +32315,7 @@
           <p:cNvPr id="7" name="四角形: 角を丸くする 6">
             <a:extLst>
               <a:ext uri="{FF2B5EF4-FFF2-40B4-BE49-F238E27FC236}">
-                <a16:creationId xmlns:a16="http://schemas.microsoft.com/office/drawing/2014/main" id="{CFE11701-F79D-DC8F-2F7A-0381EB162103}"/>
+                <a16:creationId xmlns:a16="http://schemas.microsoft.com/office/drawing/2014/main" id="{59D46091-95FA-9E39-988A-D89F3C17FF44}"/>
               </a:ext>
             </a:extLst>
           </p:cNvPr>
@@ -32405,7 +32385,7 @@
           <p:cNvPr id="8" name="テキスト ボックス 7">
             <a:extLst>
               <a:ext uri="{FF2B5EF4-FFF2-40B4-BE49-F238E27FC236}">
-                <a16:creationId xmlns:a16="http://schemas.microsoft.com/office/drawing/2014/main" id="{A481C865-F82D-17E5-80CD-194387C3932E}"/>
+                <a16:creationId xmlns:a16="http://schemas.microsoft.com/office/drawing/2014/main" id="{E64DA8BE-8C55-5AD0-60CF-80B6DA9CB3CA}"/>
               </a:ext>
             </a:extLst>
           </p:cNvPr>
@@ -32451,7 +32431,7 @@
           <p:cNvPr id="9" name="テキスト ボックス 8">
             <a:extLst>
               <a:ext uri="{FF2B5EF4-FFF2-40B4-BE49-F238E27FC236}">
-                <a16:creationId xmlns:a16="http://schemas.microsoft.com/office/drawing/2014/main" id="{35CD482B-3E10-1B49-21CB-36678E8A41E9}"/>
+                <a16:creationId xmlns:a16="http://schemas.microsoft.com/office/drawing/2014/main" id="{2F0099D7-E4F6-7493-D852-D171D308CD16}"/>
               </a:ext>
             </a:extLst>
           </p:cNvPr>
@@ -32497,7 +32477,7 @@
           <p:cNvPr id="10" name="テキスト ボックス 9">
             <a:extLst>
               <a:ext uri="{FF2B5EF4-FFF2-40B4-BE49-F238E27FC236}">
-                <a16:creationId xmlns:a16="http://schemas.microsoft.com/office/drawing/2014/main" id="{0C66A3C9-8A38-B7F5-4A3F-2FA32C3000B0}"/>
+                <a16:creationId xmlns:a16="http://schemas.microsoft.com/office/drawing/2014/main" id="{6367F442-E929-4B7F-9271-F60EA0015635}"/>
               </a:ext>
             </a:extLst>
           </p:cNvPr>
@@ -32550,7 +32530,7 @@
           <p:cNvPr id="11" name="四角形: 角を丸くする 10">
             <a:extLst>
               <a:ext uri="{FF2B5EF4-FFF2-40B4-BE49-F238E27FC236}">
-                <a16:creationId xmlns:a16="http://schemas.microsoft.com/office/drawing/2014/main" id="{231B850F-3F6F-F172-6C58-7AADBD78F583}"/>
+                <a16:creationId xmlns:a16="http://schemas.microsoft.com/office/drawing/2014/main" id="{908FC0E1-5CDE-51DE-185B-544CC593D664}"/>
               </a:ext>
             </a:extLst>
           </p:cNvPr>
@@ -32606,7 +32586,7 @@
           <p:cNvPr id="12" name="正方形/長方形 11">
             <a:extLst>
               <a:ext uri="{FF2B5EF4-FFF2-40B4-BE49-F238E27FC236}">
-                <a16:creationId xmlns:a16="http://schemas.microsoft.com/office/drawing/2014/main" id="{A2B6889C-45B9-AF37-E4EC-40C4D360880A}"/>
+                <a16:creationId xmlns:a16="http://schemas.microsoft.com/office/drawing/2014/main" id="{99091D53-AB05-2E28-31EB-C5D516C5203D}"/>
               </a:ext>
             </a:extLst>
           </p:cNvPr>
@@ -32674,7 +32654,7 @@
           <p:cNvPr id="13" name="テキスト ボックス 12">
             <a:extLst>
               <a:ext uri="{FF2B5EF4-FFF2-40B4-BE49-F238E27FC236}">
-                <a16:creationId xmlns:a16="http://schemas.microsoft.com/office/drawing/2014/main" id="{4B652D5E-C507-A624-FB32-8B413C4B7D65}"/>
+                <a16:creationId xmlns:a16="http://schemas.microsoft.com/office/drawing/2014/main" id="{C5FA7B1F-438B-62F8-5CB9-D375737CE715}"/>
               </a:ext>
             </a:extLst>
           </p:cNvPr>
@@ -32720,7 +32700,7 @@
           <p:cNvPr id="14" name="テキスト ボックス 13">
             <a:extLst>
               <a:ext uri="{FF2B5EF4-FFF2-40B4-BE49-F238E27FC236}">
-                <a16:creationId xmlns:a16="http://schemas.microsoft.com/office/drawing/2014/main" id="{F2BC2A18-EEA6-A8D5-7441-42A890AEC085}"/>
+                <a16:creationId xmlns:a16="http://schemas.microsoft.com/office/drawing/2014/main" id="{D4443691-07AE-FC2A-F6C7-85EE96E7F2E2}"/>
               </a:ext>
             </a:extLst>
           </p:cNvPr>
@@ -32766,7 +32746,7 @@
           <p:cNvPr id="15" name="四角形: 角を丸くする 14">
             <a:extLst>
               <a:ext uri="{FF2B5EF4-FFF2-40B4-BE49-F238E27FC236}">
-                <a16:creationId xmlns:a16="http://schemas.microsoft.com/office/drawing/2014/main" id="{8CED5A22-9879-B8D0-CDC6-564A95A00C5B}"/>
+                <a16:creationId xmlns:a16="http://schemas.microsoft.com/office/drawing/2014/main" id="{5832E115-78B1-3A11-3CDC-2B667387BB8B}"/>
               </a:ext>
             </a:extLst>
           </p:cNvPr>
@@ -32822,7 +32802,7 @@
           <p:cNvPr id="16" name="正方形/長方形 15">
             <a:extLst>
               <a:ext uri="{FF2B5EF4-FFF2-40B4-BE49-F238E27FC236}">
-                <a16:creationId xmlns:a16="http://schemas.microsoft.com/office/drawing/2014/main" id="{A6700332-FB66-731D-DF69-B2004F6AF1C3}"/>
+                <a16:creationId xmlns:a16="http://schemas.microsoft.com/office/drawing/2014/main" id="{495BCE23-A71E-C26E-999B-F265CF2A2B2D}"/>
               </a:ext>
             </a:extLst>
           </p:cNvPr>
@@ -32890,7 +32870,7 @@
           <p:cNvPr id="17" name="テキスト ボックス 16">
             <a:extLst>
               <a:ext uri="{FF2B5EF4-FFF2-40B4-BE49-F238E27FC236}">
-                <a16:creationId xmlns:a16="http://schemas.microsoft.com/office/drawing/2014/main" id="{10C82598-5043-4311-E9BA-EE6D57A8EBD1}"/>
+                <a16:creationId xmlns:a16="http://schemas.microsoft.com/office/drawing/2014/main" id="{0C76F437-3109-414F-E881-89823A554CA5}"/>
               </a:ext>
             </a:extLst>
           </p:cNvPr>
@@ -32936,7 +32916,7 @@
           <p:cNvPr id="18" name="テキスト ボックス 17">
             <a:extLst>
               <a:ext uri="{FF2B5EF4-FFF2-40B4-BE49-F238E27FC236}">
-                <a16:creationId xmlns:a16="http://schemas.microsoft.com/office/drawing/2014/main" id="{0DED7EE8-78E4-C1AF-3DC7-17AFC48576AA}"/>
+                <a16:creationId xmlns:a16="http://schemas.microsoft.com/office/drawing/2014/main" id="{120BF1BD-CC34-70F5-77F6-6876CB581ACB}"/>
               </a:ext>
             </a:extLst>
           </p:cNvPr>
@@ -32982,7 +32962,7 @@
           <p:cNvPr id="19" name="四角形: 角を丸くする 18">
             <a:extLst>
               <a:ext uri="{FF2B5EF4-FFF2-40B4-BE49-F238E27FC236}">
-                <a16:creationId xmlns:a16="http://schemas.microsoft.com/office/drawing/2014/main" id="{90210637-AEE0-0D35-787A-28ED3453C4F4}"/>
+                <a16:creationId xmlns:a16="http://schemas.microsoft.com/office/drawing/2014/main" id="{0E5082C6-E5C9-58D1-7FC0-6214170F5AA9}"/>
               </a:ext>
             </a:extLst>
           </p:cNvPr>
@@ -33038,7 +33018,7 @@
           <p:cNvPr id="20" name="正方形/長方形 19">
             <a:extLst>
               <a:ext uri="{FF2B5EF4-FFF2-40B4-BE49-F238E27FC236}">
-                <a16:creationId xmlns:a16="http://schemas.microsoft.com/office/drawing/2014/main" id="{296250DF-A749-3EC6-2DA2-D2967D471653}"/>
+                <a16:creationId xmlns:a16="http://schemas.microsoft.com/office/drawing/2014/main" id="{E5E5548E-00A2-F90F-F01A-E4F586CCDD14}"/>
               </a:ext>
             </a:extLst>
           </p:cNvPr>
@@ -33106,7 +33086,7 @@
           <p:cNvPr id="21" name="テキスト ボックス 20">
             <a:extLst>
               <a:ext uri="{FF2B5EF4-FFF2-40B4-BE49-F238E27FC236}">
-                <a16:creationId xmlns:a16="http://schemas.microsoft.com/office/drawing/2014/main" id="{7402B470-EF0A-1E21-157C-6D88EAE44421}"/>
+                <a16:creationId xmlns:a16="http://schemas.microsoft.com/office/drawing/2014/main" id="{4207B250-DC8E-7111-3C91-2FCB142937BD}"/>
               </a:ext>
             </a:extLst>
           </p:cNvPr>
@@ -33152,7 +33132,7 @@
           <p:cNvPr id="22" name="テキスト ボックス 21">
             <a:extLst>
               <a:ext uri="{FF2B5EF4-FFF2-40B4-BE49-F238E27FC236}">
-                <a16:creationId xmlns:a16="http://schemas.microsoft.com/office/drawing/2014/main" id="{5D02A6BA-1A34-E815-EE5E-8C116E08C541}"/>
+                <a16:creationId xmlns:a16="http://schemas.microsoft.com/office/drawing/2014/main" id="{C5597070-E7EE-8C5D-86F1-9FD7FFDB099B}"/>
               </a:ext>
             </a:extLst>
           </p:cNvPr>
@@ -33196,7 +33176,7 @@
     </p:spTree>
     <p:extLst>
       <p:ext uri="{BB962C8B-B14F-4D97-AF65-F5344CB8AC3E}">
-        <p14:creationId xmlns:p14="http://schemas.microsoft.com/office/powerpoint/2010/main" val="3698273734"/>
+        <p14:creationId xmlns:p14="http://schemas.microsoft.com/office/powerpoint/2010/main" val="529864577"/>
       </p:ext>
     </p:extLst>
   </p:cSld>

--- a/docs/操作ガイド.pptx
+++ b/docs/操作ガイド.pptx
@@ -147,7 +147,7 @@
           <p:cNvPr id="2" name="タイトル 1">
             <a:extLst>
               <a:ext uri="{FF2B5EF4-FFF2-40B4-BE49-F238E27FC236}">
-                <a16:creationId xmlns:a16="http://schemas.microsoft.com/office/drawing/2014/main" id="{0D7D0273-B300-8B3B-5586-F5DD32264DCA}"/>
+                <a16:creationId xmlns:a16="http://schemas.microsoft.com/office/drawing/2014/main" id="{75AF0150-2413-D298-5D51-C681E5E8F844}"/>
               </a:ext>
             </a:extLst>
           </p:cNvPr>
@@ -184,7 +184,7 @@
           <p:cNvPr id="3" name="字幕 2">
             <a:extLst>
               <a:ext uri="{FF2B5EF4-FFF2-40B4-BE49-F238E27FC236}">
-                <a16:creationId xmlns:a16="http://schemas.microsoft.com/office/drawing/2014/main" id="{61D43A2A-0AD2-DC7B-6298-CD2E5E80F587}"/>
+                <a16:creationId xmlns:a16="http://schemas.microsoft.com/office/drawing/2014/main" id="{A31895CC-E0E4-69B2-AA2B-350C8920A6AB}"/>
               </a:ext>
             </a:extLst>
           </p:cNvPr>
@@ -254,7 +254,7 @@
           <p:cNvPr id="4" name="日付プレースホルダー 3">
             <a:extLst>
               <a:ext uri="{FF2B5EF4-FFF2-40B4-BE49-F238E27FC236}">
-                <a16:creationId xmlns:a16="http://schemas.microsoft.com/office/drawing/2014/main" id="{58658082-C8E9-7467-8CC5-86901D04A6AB}"/>
+                <a16:creationId xmlns:a16="http://schemas.microsoft.com/office/drawing/2014/main" id="{83C3022B-58A2-6F29-F132-AE1435E10DE1}"/>
               </a:ext>
             </a:extLst>
           </p:cNvPr>
@@ -270,7 +270,7 @@
           <a:bodyPr/>
           <a:lstStyle/>
           <a:p>
-            <a:fld id="{700A14B1-0F86-4E96-B4A8-1C51CAA5F750}" type="datetimeFigureOut">
+            <a:fld id="{B7470CBC-C122-40DA-A9FA-F1018DF8E254}" type="datetimeFigureOut">
               <a:rPr kumimoji="1" lang="ja-JP" altLang="en-US" smtClean="0"/>
               <a:t>2026/9/12</a:t>
             </a:fld>
@@ -283,7 +283,7 @@
           <p:cNvPr id="5" name="フッター プレースホルダー 4">
             <a:extLst>
               <a:ext uri="{FF2B5EF4-FFF2-40B4-BE49-F238E27FC236}">
-                <a16:creationId xmlns:a16="http://schemas.microsoft.com/office/drawing/2014/main" id="{4E370D10-BCD4-FADA-BBCA-A4992EFA6CD1}"/>
+                <a16:creationId xmlns:a16="http://schemas.microsoft.com/office/drawing/2014/main" id="{2B23B85D-0F41-81FF-C2ED-EF76DEF961DD}"/>
               </a:ext>
             </a:extLst>
           </p:cNvPr>
@@ -308,7 +308,7 @@
           <p:cNvPr id="6" name="スライド番号プレースホルダー 5">
             <a:extLst>
               <a:ext uri="{FF2B5EF4-FFF2-40B4-BE49-F238E27FC236}">
-                <a16:creationId xmlns:a16="http://schemas.microsoft.com/office/drawing/2014/main" id="{41BD3B3E-4B8E-F28E-D0ED-794964C6EED7}"/>
+                <a16:creationId xmlns:a16="http://schemas.microsoft.com/office/drawing/2014/main" id="{4CDF1CCB-9D47-F3D7-65A6-5497E7218074}"/>
               </a:ext>
             </a:extLst>
           </p:cNvPr>
@@ -324,7 +324,7 @@
           <a:bodyPr/>
           <a:lstStyle/>
           <a:p>
-            <a:fld id="{BEDED656-19E1-4C31-9E7D-6AD1D1FE664F}" type="slidenum">
+            <a:fld id="{7BB5449D-F0F2-430C-B147-4BDEDFCC4C12}" type="slidenum">
               <a:rPr kumimoji="1" lang="ja-JP" altLang="en-US" smtClean="0"/>
               <a:t>‹#›</a:t>
             </a:fld>
@@ -335,7 +335,7 @@
     </p:spTree>
     <p:extLst>
       <p:ext uri="{BB962C8B-B14F-4D97-AF65-F5344CB8AC3E}">
-        <p14:creationId xmlns:p14="http://schemas.microsoft.com/office/powerpoint/2010/main" val="1057325030"/>
+        <p14:creationId xmlns:p14="http://schemas.microsoft.com/office/powerpoint/2010/main" val="3376520197"/>
       </p:ext>
     </p:extLst>
   </p:cSld>
@@ -367,7 +367,7 @@
           <p:cNvPr id="2" name="タイトル 1">
             <a:extLst>
               <a:ext uri="{FF2B5EF4-FFF2-40B4-BE49-F238E27FC236}">
-                <a16:creationId xmlns:a16="http://schemas.microsoft.com/office/drawing/2014/main" id="{91A399F2-9215-44D9-7977-55960704BD98}"/>
+                <a16:creationId xmlns:a16="http://schemas.microsoft.com/office/drawing/2014/main" id="{DD0F61D3-B5E6-F4E1-6820-3BDF4AA36356}"/>
               </a:ext>
             </a:extLst>
           </p:cNvPr>
@@ -395,7 +395,7 @@
           <p:cNvPr id="3" name="縦書きテキスト プレースホルダー 2">
             <a:extLst>
               <a:ext uri="{FF2B5EF4-FFF2-40B4-BE49-F238E27FC236}">
-                <a16:creationId xmlns:a16="http://schemas.microsoft.com/office/drawing/2014/main" id="{6E8883C6-3E85-6BDD-281A-CA873675FAB5}"/>
+                <a16:creationId xmlns:a16="http://schemas.microsoft.com/office/drawing/2014/main" id="{7F548E7B-66A7-F9D0-C7E5-834D320172CF}"/>
               </a:ext>
             </a:extLst>
           </p:cNvPr>
@@ -484,7 +484,7 @@
           <p:cNvPr id="4" name="日付プレースホルダー 3">
             <a:extLst>
               <a:ext uri="{FF2B5EF4-FFF2-40B4-BE49-F238E27FC236}">
-                <a16:creationId xmlns:a16="http://schemas.microsoft.com/office/drawing/2014/main" id="{5E67386E-74DE-22E9-9C7F-1BEC3D2B1484}"/>
+                <a16:creationId xmlns:a16="http://schemas.microsoft.com/office/drawing/2014/main" id="{FEE76347-8895-6F0A-A94E-EFCA2EB50D08}"/>
               </a:ext>
             </a:extLst>
           </p:cNvPr>
@@ -500,7 +500,7 @@
           <a:bodyPr/>
           <a:lstStyle/>
           <a:p>
-            <a:fld id="{700A14B1-0F86-4E96-B4A8-1C51CAA5F750}" type="datetimeFigureOut">
+            <a:fld id="{B7470CBC-C122-40DA-A9FA-F1018DF8E254}" type="datetimeFigureOut">
               <a:rPr kumimoji="1" lang="ja-JP" altLang="en-US" smtClean="0"/>
               <a:t>2026/9/12</a:t>
             </a:fld>
@@ -513,7 +513,7 @@
           <p:cNvPr id="5" name="フッター プレースホルダー 4">
             <a:extLst>
               <a:ext uri="{FF2B5EF4-FFF2-40B4-BE49-F238E27FC236}">
-                <a16:creationId xmlns:a16="http://schemas.microsoft.com/office/drawing/2014/main" id="{D686F35F-008A-86B3-EFED-5B8D0A807E5F}"/>
+                <a16:creationId xmlns:a16="http://schemas.microsoft.com/office/drawing/2014/main" id="{49B3E53C-C974-7D56-4F47-E8D6CA4FE902}"/>
               </a:ext>
             </a:extLst>
           </p:cNvPr>
@@ -538,7 +538,7 @@
           <p:cNvPr id="6" name="スライド番号プレースホルダー 5">
             <a:extLst>
               <a:ext uri="{FF2B5EF4-FFF2-40B4-BE49-F238E27FC236}">
-                <a16:creationId xmlns:a16="http://schemas.microsoft.com/office/drawing/2014/main" id="{2BF1354B-3688-80A9-92AE-A28C412CA43F}"/>
+                <a16:creationId xmlns:a16="http://schemas.microsoft.com/office/drawing/2014/main" id="{45D4E9C1-D02F-3DC0-31CD-ABFE7E714B77}"/>
               </a:ext>
             </a:extLst>
           </p:cNvPr>
@@ -554,7 +554,7 @@
           <a:bodyPr/>
           <a:lstStyle/>
           <a:p>
-            <a:fld id="{BEDED656-19E1-4C31-9E7D-6AD1D1FE664F}" type="slidenum">
+            <a:fld id="{7BB5449D-F0F2-430C-B147-4BDEDFCC4C12}" type="slidenum">
               <a:rPr kumimoji="1" lang="ja-JP" altLang="en-US" smtClean="0"/>
               <a:t>‹#›</a:t>
             </a:fld>
@@ -565,7 +565,7 @@
     </p:spTree>
     <p:extLst>
       <p:ext uri="{BB962C8B-B14F-4D97-AF65-F5344CB8AC3E}">
-        <p14:creationId xmlns:p14="http://schemas.microsoft.com/office/powerpoint/2010/main" val="3013335938"/>
+        <p14:creationId xmlns:p14="http://schemas.microsoft.com/office/powerpoint/2010/main" val="2933614414"/>
       </p:ext>
     </p:extLst>
   </p:cSld>
@@ -597,7 +597,7 @@
           <p:cNvPr id="2" name="縦書きタイトル 1">
             <a:extLst>
               <a:ext uri="{FF2B5EF4-FFF2-40B4-BE49-F238E27FC236}">
-                <a16:creationId xmlns:a16="http://schemas.microsoft.com/office/drawing/2014/main" id="{91396346-E80B-5D64-D50D-ADFBCED2A97C}"/>
+                <a16:creationId xmlns:a16="http://schemas.microsoft.com/office/drawing/2014/main" id="{4F6A4473-5D75-DDB6-F067-F2AE6D80836B}"/>
               </a:ext>
             </a:extLst>
           </p:cNvPr>
@@ -630,7 +630,7 @@
           <p:cNvPr id="3" name="縦書きテキスト プレースホルダー 2">
             <a:extLst>
               <a:ext uri="{FF2B5EF4-FFF2-40B4-BE49-F238E27FC236}">
-                <a16:creationId xmlns:a16="http://schemas.microsoft.com/office/drawing/2014/main" id="{90CA60B4-CDAE-EF44-2A02-420B50CDE28F}"/>
+                <a16:creationId xmlns:a16="http://schemas.microsoft.com/office/drawing/2014/main" id="{77150A49-063E-6B80-BF9E-02B5C2F090AC}"/>
               </a:ext>
             </a:extLst>
           </p:cNvPr>
@@ -724,7 +724,7 @@
           <p:cNvPr id="4" name="日付プレースホルダー 3">
             <a:extLst>
               <a:ext uri="{FF2B5EF4-FFF2-40B4-BE49-F238E27FC236}">
-                <a16:creationId xmlns:a16="http://schemas.microsoft.com/office/drawing/2014/main" id="{0DA7D265-B5A1-17F5-DF1D-394910B0F192}"/>
+                <a16:creationId xmlns:a16="http://schemas.microsoft.com/office/drawing/2014/main" id="{D5EB5078-4825-B325-E4AE-4D5203A39B17}"/>
               </a:ext>
             </a:extLst>
           </p:cNvPr>
@@ -740,7 +740,7 @@
           <a:bodyPr/>
           <a:lstStyle/>
           <a:p>
-            <a:fld id="{700A14B1-0F86-4E96-B4A8-1C51CAA5F750}" type="datetimeFigureOut">
+            <a:fld id="{B7470CBC-C122-40DA-A9FA-F1018DF8E254}" type="datetimeFigureOut">
               <a:rPr kumimoji="1" lang="ja-JP" altLang="en-US" smtClean="0"/>
               <a:t>2026/9/12</a:t>
             </a:fld>
@@ -753,7 +753,7 @@
           <p:cNvPr id="5" name="フッター プレースホルダー 4">
             <a:extLst>
               <a:ext uri="{FF2B5EF4-FFF2-40B4-BE49-F238E27FC236}">
-                <a16:creationId xmlns:a16="http://schemas.microsoft.com/office/drawing/2014/main" id="{86309E38-F745-4163-A54D-1C32A85E5F87}"/>
+                <a16:creationId xmlns:a16="http://schemas.microsoft.com/office/drawing/2014/main" id="{217395BA-04DC-7645-9E5D-7EB1D244367B}"/>
               </a:ext>
             </a:extLst>
           </p:cNvPr>
@@ -778,7 +778,7 @@
           <p:cNvPr id="6" name="スライド番号プレースホルダー 5">
             <a:extLst>
               <a:ext uri="{FF2B5EF4-FFF2-40B4-BE49-F238E27FC236}">
-                <a16:creationId xmlns:a16="http://schemas.microsoft.com/office/drawing/2014/main" id="{F5A85F3B-EC7F-CCEC-0A00-0BBFAAC60A89}"/>
+                <a16:creationId xmlns:a16="http://schemas.microsoft.com/office/drawing/2014/main" id="{7A878635-658F-3161-8A07-69B6A586D00E}"/>
               </a:ext>
             </a:extLst>
           </p:cNvPr>
@@ -794,7 +794,7 @@
           <a:bodyPr/>
           <a:lstStyle/>
           <a:p>
-            <a:fld id="{BEDED656-19E1-4C31-9E7D-6AD1D1FE664F}" type="slidenum">
+            <a:fld id="{7BB5449D-F0F2-430C-B147-4BDEDFCC4C12}" type="slidenum">
               <a:rPr kumimoji="1" lang="ja-JP" altLang="en-US" smtClean="0"/>
               <a:t>‹#›</a:t>
             </a:fld>
@@ -805,7 +805,7 @@
     </p:spTree>
     <p:extLst>
       <p:ext uri="{BB962C8B-B14F-4D97-AF65-F5344CB8AC3E}">
-        <p14:creationId xmlns:p14="http://schemas.microsoft.com/office/powerpoint/2010/main" val="305526404"/>
+        <p14:creationId xmlns:p14="http://schemas.microsoft.com/office/powerpoint/2010/main" val="2251405351"/>
       </p:ext>
     </p:extLst>
   </p:cSld>
@@ -837,7 +837,7 @@
           <p:cNvPr id="2" name="タイトル 1">
             <a:extLst>
               <a:ext uri="{FF2B5EF4-FFF2-40B4-BE49-F238E27FC236}">
-                <a16:creationId xmlns:a16="http://schemas.microsoft.com/office/drawing/2014/main" id="{164D6FD4-7765-5CB1-10FB-DA1393CED5C5}"/>
+                <a16:creationId xmlns:a16="http://schemas.microsoft.com/office/drawing/2014/main" id="{BE19091F-0CF5-C1BE-A42D-FD4D78BBCF32}"/>
               </a:ext>
             </a:extLst>
           </p:cNvPr>
@@ -865,7 +865,7 @@
           <p:cNvPr id="3" name="コンテンツ プレースホルダー 2">
             <a:extLst>
               <a:ext uri="{FF2B5EF4-FFF2-40B4-BE49-F238E27FC236}">
-                <a16:creationId xmlns:a16="http://schemas.microsoft.com/office/drawing/2014/main" id="{BC5312D7-F1EB-5CAD-E699-7764E4AC39F0}"/>
+                <a16:creationId xmlns:a16="http://schemas.microsoft.com/office/drawing/2014/main" id="{CB6B7FDE-5C03-EB42-2E36-FE9563BA5E56}"/>
               </a:ext>
             </a:extLst>
           </p:cNvPr>
@@ -954,7 +954,7 @@
           <p:cNvPr id="4" name="日付プレースホルダー 3">
             <a:extLst>
               <a:ext uri="{FF2B5EF4-FFF2-40B4-BE49-F238E27FC236}">
-                <a16:creationId xmlns:a16="http://schemas.microsoft.com/office/drawing/2014/main" id="{D7968F88-D439-38DC-A618-76802D2CBE06}"/>
+                <a16:creationId xmlns:a16="http://schemas.microsoft.com/office/drawing/2014/main" id="{3C862C18-5167-58E5-3C12-76460C0EEEBC}"/>
               </a:ext>
             </a:extLst>
           </p:cNvPr>
@@ -970,7 +970,7 @@
           <a:bodyPr/>
           <a:lstStyle/>
           <a:p>
-            <a:fld id="{700A14B1-0F86-4E96-B4A8-1C51CAA5F750}" type="datetimeFigureOut">
+            <a:fld id="{B7470CBC-C122-40DA-A9FA-F1018DF8E254}" type="datetimeFigureOut">
               <a:rPr kumimoji="1" lang="ja-JP" altLang="en-US" smtClean="0"/>
               <a:t>2026/9/12</a:t>
             </a:fld>
@@ -983,7 +983,7 @@
           <p:cNvPr id="5" name="フッター プレースホルダー 4">
             <a:extLst>
               <a:ext uri="{FF2B5EF4-FFF2-40B4-BE49-F238E27FC236}">
-                <a16:creationId xmlns:a16="http://schemas.microsoft.com/office/drawing/2014/main" id="{9C6EFBC5-5631-7014-981C-A31B108282C5}"/>
+                <a16:creationId xmlns:a16="http://schemas.microsoft.com/office/drawing/2014/main" id="{60A7BB6A-D86E-694C-031B-3774BC220427}"/>
               </a:ext>
             </a:extLst>
           </p:cNvPr>
@@ -1008,7 +1008,7 @@
           <p:cNvPr id="6" name="スライド番号プレースホルダー 5">
             <a:extLst>
               <a:ext uri="{FF2B5EF4-FFF2-40B4-BE49-F238E27FC236}">
-                <a16:creationId xmlns:a16="http://schemas.microsoft.com/office/drawing/2014/main" id="{9064E7A6-4EDE-0860-C0BB-4777CE5E772A}"/>
+                <a16:creationId xmlns:a16="http://schemas.microsoft.com/office/drawing/2014/main" id="{9B78A9AC-49AB-6507-9BAF-20047402C7C3}"/>
               </a:ext>
             </a:extLst>
           </p:cNvPr>
@@ -1024,7 +1024,7 @@
           <a:bodyPr/>
           <a:lstStyle/>
           <a:p>
-            <a:fld id="{BEDED656-19E1-4C31-9E7D-6AD1D1FE664F}" type="slidenum">
+            <a:fld id="{7BB5449D-F0F2-430C-B147-4BDEDFCC4C12}" type="slidenum">
               <a:rPr kumimoji="1" lang="ja-JP" altLang="en-US" smtClean="0"/>
               <a:t>‹#›</a:t>
             </a:fld>
@@ -1035,7 +1035,7 @@
     </p:spTree>
     <p:extLst>
       <p:ext uri="{BB962C8B-B14F-4D97-AF65-F5344CB8AC3E}">
-        <p14:creationId xmlns:p14="http://schemas.microsoft.com/office/powerpoint/2010/main" val="3497019846"/>
+        <p14:creationId xmlns:p14="http://schemas.microsoft.com/office/powerpoint/2010/main" val="1285828611"/>
       </p:ext>
     </p:extLst>
   </p:cSld>
@@ -1067,7 +1067,7 @@
           <p:cNvPr id="2" name="タイトル 1">
             <a:extLst>
               <a:ext uri="{FF2B5EF4-FFF2-40B4-BE49-F238E27FC236}">
-                <a16:creationId xmlns:a16="http://schemas.microsoft.com/office/drawing/2014/main" id="{9D23490C-6BF2-2101-A007-107699CFB23E}"/>
+                <a16:creationId xmlns:a16="http://schemas.microsoft.com/office/drawing/2014/main" id="{9E189270-1775-0235-CCE5-22E0241BE50E}"/>
               </a:ext>
             </a:extLst>
           </p:cNvPr>
@@ -1104,7 +1104,7 @@
           <p:cNvPr id="3" name="テキスト プレースホルダー 2">
             <a:extLst>
               <a:ext uri="{FF2B5EF4-FFF2-40B4-BE49-F238E27FC236}">
-                <a16:creationId xmlns:a16="http://schemas.microsoft.com/office/drawing/2014/main" id="{2FCE285C-49E9-97C2-C276-AD68B111350F}"/>
+                <a16:creationId xmlns:a16="http://schemas.microsoft.com/office/drawing/2014/main" id="{A85D0929-0FC3-B90C-A533-3535AB17C907}"/>
               </a:ext>
             </a:extLst>
           </p:cNvPr>
@@ -1229,7 +1229,7 @@
           <p:cNvPr id="4" name="日付プレースホルダー 3">
             <a:extLst>
               <a:ext uri="{FF2B5EF4-FFF2-40B4-BE49-F238E27FC236}">
-                <a16:creationId xmlns:a16="http://schemas.microsoft.com/office/drawing/2014/main" id="{1E148F63-A193-2C6A-CD24-F5A45824F9C6}"/>
+                <a16:creationId xmlns:a16="http://schemas.microsoft.com/office/drawing/2014/main" id="{5AD9E4AC-46B9-D86B-2012-88E0ACC25A0F}"/>
               </a:ext>
             </a:extLst>
           </p:cNvPr>
@@ -1245,7 +1245,7 @@
           <a:bodyPr/>
           <a:lstStyle/>
           <a:p>
-            <a:fld id="{700A14B1-0F86-4E96-B4A8-1C51CAA5F750}" type="datetimeFigureOut">
+            <a:fld id="{B7470CBC-C122-40DA-A9FA-F1018DF8E254}" type="datetimeFigureOut">
               <a:rPr kumimoji="1" lang="ja-JP" altLang="en-US" smtClean="0"/>
               <a:t>2026/9/12</a:t>
             </a:fld>
@@ -1258,7 +1258,7 @@
           <p:cNvPr id="5" name="フッター プレースホルダー 4">
             <a:extLst>
               <a:ext uri="{FF2B5EF4-FFF2-40B4-BE49-F238E27FC236}">
-                <a16:creationId xmlns:a16="http://schemas.microsoft.com/office/drawing/2014/main" id="{CD87955A-D658-7181-F697-3A2143D9410C}"/>
+                <a16:creationId xmlns:a16="http://schemas.microsoft.com/office/drawing/2014/main" id="{F00E9D1D-E08D-15AE-67D5-12BDC56DA703}"/>
               </a:ext>
             </a:extLst>
           </p:cNvPr>
@@ -1283,7 +1283,7 @@
           <p:cNvPr id="6" name="スライド番号プレースホルダー 5">
             <a:extLst>
               <a:ext uri="{FF2B5EF4-FFF2-40B4-BE49-F238E27FC236}">
-                <a16:creationId xmlns:a16="http://schemas.microsoft.com/office/drawing/2014/main" id="{E0FA9118-76EC-5FC3-75A8-2D1341A48B3F}"/>
+                <a16:creationId xmlns:a16="http://schemas.microsoft.com/office/drawing/2014/main" id="{7D518051-B686-08AB-E8C1-8F694D36F7B7}"/>
               </a:ext>
             </a:extLst>
           </p:cNvPr>
@@ -1299,7 +1299,7 @@
           <a:bodyPr/>
           <a:lstStyle/>
           <a:p>
-            <a:fld id="{BEDED656-19E1-4C31-9E7D-6AD1D1FE664F}" type="slidenum">
+            <a:fld id="{7BB5449D-F0F2-430C-B147-4BDEDFCC4C12}" type="slidenum">
               <a:rPr kumimoji="1" lang="ja-JP" altLang="en-US" smtClean="0"/>
               <a:t>‹#›</a:t>
             </a:fld>
@@ -1310,7 +1310,7 @@
     </p:spTree>
     <p:extLst>
       <p:ext uri="{BB962C8B-B14F-4D97-AF65-F5344CB8AC3E}">
-        <p14:creationId xmlns:p14="http://schemas.microsoft.com/office/powerpoint/2010/main" val="101781043"/>
+        <p14:creationId xmlns:p14="http://schemas.microsoft.com/office/powerpoint/2010/main" val="2359969179"/>
       </p:ext>
     </p:extLst>
   </p:cSld>
@@ -1342,7 +1342,7 @@
           <p:cNvPr id="2" name="タイトル 1">
             <a:extLst>
               <a:ext uri="{FF2B5EF4-FFF2-40B4-BE49-F238E27FC236}">
-                <a16:creationId xmlns:a16="http://schemas.microsoft.com/office/drawing/2014/main" id="{7A00BD76-E59A-3F00-35A4-C652A8507572}"/>
+                <a16:creationId xmlns:a16="http://schemas.microsoft.com/office/drawing/2014/main" id="{B53A31FF-7CED-FC8B-B6C6-6414A5780402}"/>
               </a:ext>
             </a:extLst>
           </p:cNvPr>
@@ -1370,7 +1370,7 @@
           <p:cNvPr id="3" name="コンテンツ プレースホルダー 2">
             <a:extLst>
               <a:ext uri="{FF2B5EF4-FFF2-40B4-BE49-F238E27FC236}">
-                <a16:creationId xmlns:a16="http://schemas.microsoft.com/office/drawing/2014/main" id="{8DFEC804-8F4A-FBE6-0FB0-A6F1C1AE81BC}"/>
+                <a16:creationId xmlns:a16="http://schemas.microsoft.com/office/drawing/2014/main" id="{6C651EBA-498F-DC43-8F63-5BD7D8B2FBD1}"/>
               </a:ext>
             </a:extLst>
           </p:cNvPr>
@@ -1464,7 +1464,7 @@
           <p:cNvPr id="4" name="コンテンツ プレースホルダー 3">
             <a:extLst>
               <a:ext uri="{FF2B5EF4-FFF2-40B4-BE49-F238E27FC236}">
-                <a16:creationId xmlns:a16="http://schemas.microsoft.com/office/drawing/2014/main" id="{4E4AF811-CF3B-A853-9266-1EDE1DFC06C2}"/>
+                <a16:creationId xmlns:a16="http://schemas.microsoft.com/office/drawing/2014/main" id="{1BF8C819-5095-1057-F647-404AED00813E}"/>
               </a:ext>
             </a:extLst>
           </p:cNvPr>
@@ -1558,7 +1558,7 @@
           <p:cNvPr id="5" name="日付プレースホルダー 4">
             <a:extLst>
               <a:ext uri="{FF2B5EF4-FFF2-40B4-BE49-F238E27FC236}">
-                <a16:creationId xmlns:a16="http://schemas.microsoft.com/office/drawing/2014/main" id="{74D29E37-B7F0-61E3-37F7-490304B7C311}"/>
+                <a16:creationId xmlns:a16="http://schemas.microsoft.com/office/drawing/2014/main" id="{4A19544B-3D33-EA90-4A27-A985BA3C142D}"/>
               </a:ext>
             </a:extLst>
           </p:cNvPr>
@@ -1574,7 +1574,7 @@
           <a:bodyPr/>
           <a:lstStyle/>
           <a:p>
-            <a:fld id="{700A14B1-0F86-4E96-B4A8-1C51CAA5F750}" type="datetimeFigureOut">
+            <a:fld id="{B7470CBC-C122-40DA-A9FA-F1018DF8E254}" type="datetimeFigureOut">
               <a:rPr kumimoji="1" lang="ja-JP" altLang="en-US" smtClean="0"/>
               <a:t>2026/9/12</a:t>
             </a:fld>
@@ -1587,7 +1587,7 @@
           <p:cNvPr id="6" name="フッター プレースホルダー 5">
             <a:extLst>
               <a:ext uri="{FF2B5EF4-FFF2-40B4-BE49-F238E27FC236}">
-                <a16:creationId xmlns:a16="http://schemas.microsoft.com/office/drawing/2014/main" id="{37D36540-A92A-678A-CA6F-CA7297F82814}"/>
+                <a16:creationId xmlns:a16="http://schemas.microsoft.com/office/drawing/2014/main" id="{E95F0185-A3DA-C609-512B-75ED3EF84BBB}"/>
               </a:ext>
             </a:extLst>
           </p:cNvPr>
@@ -1612,7 +1612,7 @@
           <p:cNvPr id="7" name="スライド番号プレースホルダー 6">
             <a:extLst>
               <a:ext uri="{FF2B5EF4-FFF2-40B4-BE49-F238E27FC236}">
-                <a16:creationId xmlns:a16="http://schemas.microsoft.com/office/drawing/2014/main" id="{BC556E1E-9AFD-0001-A660-498275341008}"/>
+                <a16:creationId xmlns:a16="http://schemas.microsoft.com/office/drawing/2014/main" id="{779F23F0-C5CA-6EBC-8630-96E135FADF5F}"/>
               </a:ext>
             </a:extLst>
           </p:cNvPr>
@@ -1628,7 +1628,7 @@
           <a:bodyPr/>
           <a:lstStyle/>
           <a:p>
-            <a:fld id="{BEDED656-19E1-4C31-9E7D-6AD1D1FE664F}" type="slidenum">
+            <a:fld id="{7BB5449D-F0F2-430C-B147-4BDEDFCC4C12}" type="slidenum">
               <a:rPr kumimoji="1" lang="ja-JP" altLang="en-US" smtClean="0"/>
               <a:t>‹#›</a:t>
             </a:fld>
@@ -1639,7 +1639,7 @@
     </p:spTree>
     <p:extLst>
       <p:ext uri="{BB962C8B-B14F-4D97-AF65-F5344CB8AC3E}">
-        <p14:creationId xmlns:p14="http://schemas.microsoft.com/office/powerpoint/2010/main" val="4091440821"/>
+        <p14:creationId xmlns:p14="http://schemas.microsoft.com/office/powerpoint/2010/main" val="2292313477"/>
       </p:ext>
     </p:extLst>
   </p:cSld>
@@ -1671,7 +1671,7 @@
           <p:cNvPr id="2" name="タイトル 1">
             <a:extLst>
               <a:ext uri="{FF2B5EF4-FFF2-40B4-BE49-F238E27FC236}">
-                <a16:creationId xmlns:a16="http://schemas.microsoft.com/office/drawing/2014/main" id="{C5E6B3F4-9254-C4E2-45E5-75CE979F77FE}"/>
+                <a16:creationId xmlns:a16="http://schemas.microsoft.com/office/drawing/2014/main" id="{29239426-9098-8D26-D882-6D83F15F0B3F}"/>
               </a:ext>
             </a:extLst>
           </p:cNvPr>
@@ -1704,7 +1704,7 @@
           <p:cNvPr id="3" name="テキスト プレースホルダー 2">
             <a:extLst>
               <a:ext uri="{FF2B5EF4-FFF2-40B4-BE49-F238E27FC236}">
-                <a16:creationId xmlns:a16="http://schemas.microsoft.com/office/drawing/2014/main" id="{D4429A07-880B-6E47-33D9-2C40034CF5B3}"/>
+                <a16:creationId xmlns:a16="http://schemas.microsoft.com/office/drawing/2014/main" id="{9713C8BE-5790-E58C-6BB7-B617908E19B3}"/>
               </a:ext>
             </a:extLst>
           </p:cNvPr>
@@ -1775,7 +1775,7 @@
           <p:cNvPr id="4" name="コンテンツ プレースホルダー 3">
             <a:extLst>
               <a:ext uri="{FF2B5EF4-FFF2-40B4-BE49-F238E27FC236}">
-                <a16:creationId xmlns:a16="http://schemas.microsoft.com/office/drawing/2014/main" id="{1B3ADA97-B863-022B-D54A-7FD690E95CEE}"/>
+                <a16:creationId xmlns:a16="http://schemas.microsoft.com/office/drawing/2014/main" id="{6A97F1A2-BB76-7437-436B-8400F5C11C04}"/>
               </a:ext>
             </a:extLst>
           </p:cNvPr>
@@ -1869,7 +1869,7 @@
           <p:cNvPr id="5" name="テキスト プレースホルダー 4">
             <a:extLst>
               <a:ext uri="{FF2B5EF4-FFF2-40B4-BE49-F238E27FC236}">
-                <a16:creationId xmlns:a16="http://schemas.microsoft.com/office/drawing/2014/main" id="{A5B4384C-5FA9-9F19-457E-F4A5212DAF81}"/>
+                <a16:creationId xmlns:a16="http://schemas.microsoft.com/office/drawing/2014/main" id="{D3A7A8BD-CA95-582F-DC7B-D0BB2E2FA9B9}"/>
               </a:ext>
             </a:extLst>
           </p:cNvPr>
@@ -1940,7 +1940,7 @@
           <p:cNvPr id="6" name="コンテンツ プレースホルダー 5">
             <a:extLst>
               <a:ext uri="{FF2B5EF4-FFF2-40B4-BE49-F238E27FC236}">
-                <a16:creationId xmlns:a16="http://schemas.microsoft.com/office/drawing/2014/main" id="{4C13F871-8B2F-DA82-4101-0E7A4384FC24}"/>
+                <a16:creationId xmlns:a16="http://schemas.microsoft.com/office/drawing/2014/main" id="{ABDA309E-26CB-3903-3D67-446FA624C7AD}"/>
               </a:ext>
             </a:extLst>
           </p:cNvPr>
@@ -2034,7 +2034,7 @@
           <p:cNvPr id="7" name="日付プレースホルダー 6">
             <a:extLst>
               <a:ext uri="{FF2B5EF4-FFF2-40B4-BE49-F238E27FC236}">
-                <a16:creationId xmlns:a16="http://schemas.microsoft.com/office/drawing/2014/main" id="{D67BE993-7219-103B-2800-2A5D81BD6167}"/>
+                <a16:creationId xmlns:a16="http://schemas.microsoft.com/office/drawing/2014/main" id="{75E3F969-8BC7-3400-EFE4-DEAE491E1CAF}"/>
               </a:ext>
             </a:extLst>
           </p:cNvPr>
@@ -2050,7 +2050,7 @@
           <a:bodyPr/>
           <a:lstStyle/>
           <a:p>
-            <a:fld id="{700A14B1-0F86-4E96-B4A8-1C51CAA5F750}" type="datetimeFigureOut">
+            <a:fld id="{B7470CBC-C122-40DA-A9FA-F1018DF8E254}" type="datetimeFigureOut">
               <a:rPr kumimoji="1" lang="ja-JP" altLang="en-US" smtClean="0"/>
               <a:t>2026/9/12</a:t>
             </a:fld>
@@ -2063,7 +2063,7 @@
           <p:cNvPr id="8" name="フッター プレースホルダー 7">
             <a:extLst>
               <a:ext uri="{FF2B5EF4-FFF2-40B4-BE49-F238E27FC236}">
-                <a16:creationId xmlns:a16="http://schemas.microsoft.com/office/drawing/2014/main" id="{A2825909-BDC4-98DC-52DF-F0697BCE744B}"/>
+                <a16:creationId xmlns:a16="http://schemas.microsoft.com/office/drawing/2014/main" id="{72BFEDAF-FD30-E4CC-0414-D82F2C83464C}"/>
               </a:ext>
             </a:extLst>
           </p:cNvPr>
@@ -2088,7 +2088,7 @@
           <p:cNvPr id="9" name="スライド番号プレースホルダー 8">
             <a:extLst>
               <a:ext uri="{FF2B5EF4-FFF2-40B4-BE49-F238E27FC236}">
-                <a16:creationId xmlns:a16="http://schemas.microsoft.com/office/drawing/2014/main" id="{446D9342-E03D-984A-E0EF-5CE60128504B}"/>
+                <a16:creationId xmlns:a16="http://schemas.microsoft.com/office/drawing/2014/main" id="{1FC5DDB6-6BA3-1E4F-C0AE-06EB32BB05FF}"/>
               </a:ext>
             </a:extLst>
           </p:cNvPr>
@@ -2104,7 +2104,7 @@
           <a:bodyPr/>
           <a:lstStyle/>
           <a:p>
-            <a:fld id="{BEDED656-19E1-4C31-9E7D-6AD1D1FE664F}" type="slidenum">
+            <a:fld id="{7BB5449D-F0F2-430C-B147-4BDEDFCC4C12}" type="slidenum">
               <a:rPr kumimoji="1" lang="ja-JP" altLang="en-US" smtClean="0"/>
               <a:t>‹#›</a:t>
             </a:fld>
@@ -2115,7 +2115,7 @@
     </p:spTree>
     <p:extLst>
       <p:ext uri="{BB962C8B-B14F-4D97-AF65-F5344CB8AC3E}">
-        <p14:creationId xmlns:p14="http://schemas.microsoft.com/office/powerpoint/2010/main" val="2251995704"/>
+        <p14:creationId xmlns:p14="http://schemas.microsoft.com/office/powerpoint/2010/main" val="1242974593"/>
       </p:ext>
     </p:extLst>
   </p:cSld>
@@ -2147,7 +2147,7 @@
           <p:cNvPr id="2" name="タイトル 1">
             <a:extLst>
               <a:ext uri="{FF2B5EF4-FFF2-40B4-BE49-F238E27FC236}">
-                <a16:creationId xmlns:a16="http://schemas.microsoft.com/office/drawing/2014/main" id="{4AD2DE5D-EACF-950D-5DBE-BD45C6018B50}"/>
+                <a16:creationId xmlns:a16="http://schemas.microsoft.com/office/drawing/2014/main" id="{09C1E59F-725C-880F-96D4-64DC68BBBE78}"/>
               </a:ext>
             </a:extLst>
           </p:cNvPr>
@@ -2175,7 +2175,7 @@
           <p:cNvPr id="3" name="日付プレースホルダー 2">
             <a:extLst>
               <a:ext uri="{FF2B5EF4-FFF2-40B4-BE49-F238E27FC236}">
-                <a16:creationId xmlns:a16="http://schemas.microsoft.com/office/drawing/2014/main" id="{7B50618F-3AE7-7176-2925-4BCD63DF83E0}"/>
+                <a16:creationId xmlns:a16="http://schemas.microsoft.com/office/drawing/2014/main" id="{07E0FBCB-4ABC-1085-1893-3B333090609A}"/>
               </a:ext>
             </a:extLst>
           </p:cNvPr>
@@ -2191,7 +2191,7 @@
           <a:bodyPr/>
           <a:lstStyle/>
           <a:p>
-            <a:fld id="{700A14B1-0F86-4E96-B4A8-1C51CAA5F750}" type="datetimeFigureOut">
+            <a:fld id="{B7470CBC-C122-40DA-A9FA-F1018DF8E254}" type="datetimeFigureOut">
               <a:rPr kumimoji="1" lang="ja-JP" altLang="en-US" smtClean="0"/>
               <a:t>2026/9/12</a:t>
             </a:fld>
@@ -2204,7 +2204,7 @@
           <p:cNvPr id="4" name="フッター プレースホルダー 3">
             <a:extLst>
               <a:ext uri="{FF2B5EF4-FFF2-40B4-BE49-F238E27FC236}">
-                <a16:creationId xmlns:a16="http://schemas.microsoft.com/office/drawing/2014/main" id="{45CCC65D-74C5-43D9-3F94-EA20DB03767E}"/>
+                <a16:creationId xmlns:a16="http://schemas.microsoft.com/office/drawing/2014/main" id="{F87CF1C5-0332-904B-2A3B-A6415FEF4A3E}"/>
               </a:ext>
             </a:extLst>
           </p:cNvPr>
@@ -2229,7 +2229,7 @@
           <p:cNvPr id="5" name="スライド番号プレースホルダー 4">
             <a:extLst>
               <a:ext uri="{FF2B5EF4-FFF2-40B4-BE49-F238E27FC236}">
-                <a16:creationId xmlns:a16="http://schemas.microsoft.com/office/drawing/2014/main" id="{8296E855-BD78-3B67-59FE-3BA73E86A8D9}"/>
+                <a16:creationId xmlns:a16="http://schemas.microsoft.com/office/drawing/2014/main" id="{960CE497-74BB-EEA5-1821-DEA3E5E3DE59}"/>
               </a:ext>
             </a:extLst>
           </p:cNvPr>
@@ -2245,7 +2245,7 @@
           <a:bodyPr/>
           <a:lstStyle/>
           <a:p>
-            <a:fld id="{BEDED656-19E1-4C31-9E7D-6AD1D1FE664F}" type="slidenum">
+            <a:fld id="{7BB5449D-F0F2-430C-B147-4BDEDFCC4C12}" type="slidenum">
               <a:rPr kumimoji="1" lang="ja-JP" altLang="en-US" smtClean="0"/>
               <a:t>‹#›</a:t>
             </a:fld>
@@ -2256,7 +2256,7 @@
     </p:spTree>
     <p:extLst>
       <p:ext uri="{BB962C8B-B14F-4D97-AF65-F5344CB8AC3E}">
-        <p14:creationId xmlns:p14="http://schemas.microsoft.com/office/powerpoint/2010/main" val="1897840892"/>
+        <p14:creationId xmlns:p14="http://schemas.microsoft.com/office/powerpoint/2010/main" val="2667080644"/>
       </p:ext>
     </p:extLst>
   </p:cSld>
@@ -2288,7 +2288,7 @@
           <p:cNvPr id="2" name="日付プレースホルダー 1">
             <a:extLst>
               <a:ext uri="{FF2B5EF4-FFF2-40B4-BE49-F238E27FC236}">
-                <a16:creationId xmlns:a16="http://schemas.microsoft.com/office/drawing/2014/main" id="{F6492CAF-2CC4-D588-EC3F-0A1E1A877DF0}"/>
+                <a16:creationId xmlns:a16="http://schemas.microsoft.com/office/drawing/2014/main" id="{5916B67C-275F-088B-12E9-9043B8B4803E}"/>
               </a:ext>
             </a:extLst>
           </p:cNvPr>
@@ -2304,7 +2304,7 @@
           <a:bodyPr/>
           <a:lstStyle/>
           <a:p>
-            <a:fld id="{700A14B1-0F86-4E96-B4A8-1C51CAA5F750}" type="datetimeFigureOut">
+            <a:fld id="{B7470CBC-C122-40DA-A9FA-F1018DF8E254}" type="datetimeFigureOut">
               <a:rPr kumimoji="1" lang="ja-JP" altLang="en-US" smtClean="0"/>
               <a:t>2026/9/12</a:t>
             </a:fld>
@@ -2317,7 +2317,7 @@
           <p:cNvPr id="3" name="フッター プレースホルダー 2">
             <a:extLst>
               <a:ext uri="{FF2B5EF4-FFF2-40B4-BE49-F238E27FC236}">
-                <a16:creationId xmlns:a16="http://schemas.microsoft.com/office/drawing/2014/main" id="{E96737D8-4456-39BE-5A6C-7BAC9690266B}"/>
+                <a16:creationId xmlns:a16="http://schemas.microsoft.com/office/drawing/2014/main" id="{8A446846-816A-B410-C8FA-09721071D896}"/>
               </a:ext>
             </a:extLst>
           </p:cNvPr>
@@ -2342,7 +2342,7 @@
           <p:cNvPr id="4" name="スライド番号プレースホルダー 3">
             <a:extLst>
               <a:ext uri="{FF2B5EF4-FFF2-40B4-BE49-F238E27FC236}">
-                <a16:creationId xmlns:a16="http://schemas.microsoft.com/office/drawing/2014/main" id="{1610FD63-E657-9C94-3DEA-EDE1AC01BEE1}"/>
+                <a16:creationId xmlns:a16="http://schemas.microsoft.com/office/drawing/2014/main" id="{935A48CB-1329-DDA4-43AA-A82D9C5AB326}"/>
               </a:ext>
             </a:extLst>
           </p:cNvPr>
@@ -2358,7 +2358,7 @@
           <a:bodyPr/>
           <a:lstStyle/>
           <a:p>
-            <a:fld id="{BEDED656-19E1-4C31-9E7D-6AD1D1FE664F}" type="slidenum">
+            <a:fld id="{7BB5449D-F0F2-430C-B147-4BDEDFCC4C12}" type="slidenum">
               <a:rPr kumimoji="1" lang="ja-JP" altLang="en-US" smtClean="0"/>
               <a:t>‹#›</a:t>
             </a:fld>
@@ -2369,7 +2369,7 @@
     </p:spTree>
     <p:extLst>
       <p:ext uri="{BB962C8B-B14F-4D97-AF65-F5344CB8AC3E}">
-        <p14:creationId xmlns:p14="http://schemas.microsoft.com/office/powerpoint/2010/main" val="2310921712"/>
+        <p14:creationId xmlns:p14="http://schemas.microsoft.com/office/powerpoint/2010/main" val="3923084353"/>
       </p:ext>
     </p:extLst>
   </p:cSld>
@@ -2401,7 +2401,7 @@
           <p:cNvPr id="2" name="タイトル 1">
             <a:extLst>
               <a:ext uri="{FF2B5EF4-FFF2-40B4-BE49-F238E27FC236}">
-                <a16:creationId xmlns:a16="http://schemas.microsoft.com/office/drawing/2014/main" id="{81E24F7A-D38E-4BAA-9A1E-344CA4A6C9E2}"/>
+                <a16:creationId xmlns:a16="http://schemas.microsoft.com/office/drawing/2014/main" id="{D27FF213-AD10-CA9B-3099-4FAA01986DE0}"/>
               </a:ext>
             </a:extLst>
           </p:cNvPr>
@@ -2438,7 +2438,7 @@
           <p:cNvPr id="3" name="コンテンツ プレースホルダー 2">
             <a:extLst>
               <a:ext uri="{FF2B5EF4-FFF2-40B4-BE49-F238E27FC236}">
-                <a16:creationId xmlns:a16="http://schemas.microsoft.com/office/drawing/2014/main" id="{D4D7F527-EF02-4030-A34C-CE3178528490}"/>
+                <a16:creationId xmlns:a16="http://schemas.microsoft.com/office/drawing/2014/main" id="{96AE3D60-8396-00B9-264B-738745CAD53F}"/>
               </a:ext>
             </a:extLst>
           </p:cNvPr>
@@ -2560,7 +2560,7 @@
           <p:cNvPr id="4" name="テキスト プレースホルダー 3">
             <a:extLst>
               <a:ext uri="{FF2B5EF4-FFF2-40B4-BE49-F238E27FC236}">
-                <a16:creationId xmlns:a16="http://schemas.microsoft.com/office/drawing/2014/main" id="{B6DA2173-2D9F-9F93-646B-4B7A1A3D9DF0}"/>
+                <a16:creationId xmlns:a16="http://schemas.microsoft.com/office/drawing/2014/main" id="{FAFE53B8-2841-AC40-8C0D-F55D719B1A3A}"/>
               </a:ext>
             </a:extLst>
           </p:cNvPr>
@@ -2631,7 +2631,7 @@
           <p:cNvPr id="5" name="日付プレースホルダー 4">
             <a:extLst>
               <a:ext uri="{FF2B5EF4-FFF2-40B4-BE49-F238E27FC236}">
-                <a16:creationId xmlns:a16="http://schemas.microsoft.com/office/drawing/2014/main" id="{C753E58C-CC2B-5C9C-8B8B-70E363F98015}"/>
+                <a16:creationId xmlns:a16="http://schemas.microsoft.com/office/drawing/2014/main" id="{E2CDD44F-C239-015B-8895-BC37FBF878C2}"/>
               </a:ext>
             </a:extLst>
           </p:cNvPr>
@@ -2647,7 +2647,7 @@
           <a:bodyPr/>
           <a:lstStyle/>
           <a:p>
-            <a:fld id="{700A14B1-0F86-4E96-B4A8-1C51CAA5F750}" type="datetimeFigureOut">
+            <a:fld id="{B7470CBC-C122-40DA-A9FA-F1018DF8E254}" type="datetimeFigureOut">
               <a:rPr kumimoji="1" lang="ja-JP" altLang="en-US" smtClean="0"/>
               <a:t>2026/9/12</a:t>
             </a:fld>
@@ -2660,7 +2660,7 @@
           <p:cNvPr id="6" name="フッター プレースホルダー 5">
             <a:extLst>
               <a:ext uri="{FF2B5EF4-FFF2-40B4-BE49-F238E27FC236}">
-                <a16:creationId xmlns:a16="http://schemas.microsoft.com/office/drawing/2014/main" id="{B1FAF5CA-68E9-CA9D-EC76-9F30C02928EA}"/>
+                <a16:creationId xmlns:a16="http://schemas.microsoft.com/office/drawing/2014/main" id="{F8F8ECDB-31FA-2265-62D4-B9BFD95182DB}"/>
               </a:ext>
             </a:extLst>
           </p:cNvPr>
@@ -2685,7 +2685,7 @@
           <p:cNvPr id="7" name="スライド番号プレースホルダー 6">
             <a:extLst>
               <a:ext uri="{FF2B5EF4-FFF2-40B4-BE49-F238E27FC236}">
-                <a16:creationId xmlns:a16="http://schemas.microsoft.com/office/drawing/2014/main" id="{69A244E9-BB92-0C1D-A438-0E4C29A6F396}"/>
+                <a16:creationId xmlns:a16="http://schemas.microsoft.com/office/drawing/2014/main" id="{753C2C36-B01A-0AA2-40A9-3994C00E1D40}"/>
               </a:ext>
             </a:extLst>
           </p:cNvPr>
@@ -2701,7 +2701,7 @@
           <a:bodyPr/>
           <a:lstStyle/>
           <a:p>
-            <a:fld id="{BEDED656-19E1-4C31-9E7D-6AD1D1FE664F}" type="slidenum">
+            <a:fld id="{7BB5449D-F0F2-430C-B147-4BDEDFCC4C12}" type="slidenum">
               <a:rPr kumimoji="1" lang="ja-JP" altLang="en-US" smtClean="0"/>
               <a:t>‹#›</a:t>
             </a:fld>
@@ -2712,7 +2712,7 @@
     </p:spTree>
     <p:extLst>
       <p:ext uri="{BB962C8B-B14F-4D97-AF65-F5344CB8AC3E}">
-        <p14:creationId xmlns:p14="http://schemas.microsoft.com/office/powerpoint/2010/main" val="1949981884"/>
+        <p14:creationId xmlns:p14="http://schemas.microsoft.com/office/powerpoint/2010/main" val="3152174734"/>
       </p:ext>
     </p:extLst>
   </p:cSld>
@@ -2744,7 +2744,7 @@
           <p:cNvPr id="2" name="タイトル 1">
             <a:extLst>
               <a:ext uri="{FF2B5EF4-FFF2-40B4-BE49-F238E27FC236}">
-                <a16:creationId xmlns:a16="http://schemas.microsoft.com/office/drawing/2014/main" id="{D4700544-51ED-12BB-8D44-8CFB0B70B0B3}"/>
+                <a16:creationId xmlns:a16="http://schemas.microsoft.com/office/drawing/2014/main" id="{6E70B038-5DE7-BCCB-1A79-F51A9F40C1BA}"/>
               </a:ext>
             </a:extLst>
           </p:cNvPr>
@@ -2781,7 +2781,7 @@
           <p:cNvPr id="3" name="図プレースホルダー 2">
             <a:extLst>
               <a:ext uri="{FF2B5EF4-FFF2-40B4-BE49-F238E27FC236}">
-                <a16:creationId xmlns:a16="http://schemas.microsoft.com/office/drawing/2014/main" id="{51B5A256-4CAE-297E-6CC6-A746E71E22B5}"/>
+                <a16:creationId xmlns:a16="http://schemas.microsoft.com/office/drawing/2014/main" id="{BA2E99F2-6488-8034-C10A-2F4C4F41B3D8}"/>
               </a:ext>
             </a:extLst>
           </p:cNvPr>
@@ -2848,7 +2848,7 @@
           <p:cNvPr id="4" name="テキスト プレースホルダー 3">
             <a:extLst>
               <a:ext uri="{FF2B5EF4-FFF2-40B4-BE49-F238E27FC236}">
-                <a16:creationId xmlns:a16="http://schemas.microsoft.com/office/drawing/2014/main" id="{667D5FBE-C898-0187-30D9-B5DE2B5BFCE1}"/>
+                <a16:creationId xmlns:a16="http://schemas.microsoft.com/office/drawing/2014/main" id="{C13B35C2-16DA-9E88-E24B-FA7AC440851C}"/>
               </a:ext>
             </a:extLst>
           </p:cNvPr>
@@ -2919,7 +2919,7 @@
           <p:cNvPr id="5" name="日付プレースホルダー 4">
             <a:extLst>
               <a:ext uri="{FF2B5EF4-FFF2-40B4-BE49-F238E27FC236}">
-                <a16:creationId xmlns:a16="http://schemas.microsoft.com/office/drawing/2014/main" id="{398CD336-8184-3440-556C-505A5B5480AF}"/>
+                <a16:creationId xmlns:a16="http://schemas.microsoft.com/office/drawing/2014/main" id="{510A8104-DD95-B166-1388-4EB72D9DAB98}"/>
               </a:ext>
             </a:extLst>
           </p:cNvPr>
@@ -2935,7 +2935,7 @@
           <a:bodyPr/>
           <a:lstStyle/>
           <a:p>
-            <a:fld id="{700A14B1-0F86-4E96-B4A8-1C51CAA5F750}" type="datetimeFigureOut">
+            <a:fld id="{B7470CBC-C122-40DA-A9FA-F1018DF8E254}" type="datetimeFigureOut">
               <a:rPr kumimoji="1" lang="ja-JP" altLang="en-US" smtClean="0"/>
               <a:t>2026/9/12</a:t>
             </a:fld>
@@ -2948,7 +2948,7 @@
           <p:cNvPr id="6" name="フッター プレースホルダー 5">
             <a:extLst>
               <a:ext uri="{FF2B5EF4-FFF2-40B4-BE49-F238E27FC236}">
-                <a16:creationId xmlns:a16="http://schemas.microsoft.com/office/drawing/2014/main" id="{367140C4-BA41-ECD4-A10C-0E37DE8180B1}"/>
+                <a16:creationId xmlns:a16="http://schemas.microsoft.com/office/drawing/2014/main" id="{19784C0D-A463-98EA-7A80-CDE4E9F2E17C}"/>
               </a:ext>
             </a:extLst>
           </p:cNvPr>
@@ -2973,7 +2973,7 @@
           <p:cNvPr id="7" name="スライド番号プレースホルダー 6">
             <a:extLst>
               <a:ext uri="{FF2B5EF4-FFF2-40B4-BE49-F238E27FC236}">
-                <a16:creationId xmlns:a16="http://schemas.microsoft.com/office/drawing/2014/main" id="{E778833E-8F08-03E8-5200-5FB394509F36}"/>
+                <a16:creationId xmlns:a16="http://schemas.microsoft.com/office/drawing/2014/main" id="{712A90E6-5BD6-9715-798B-776986EE7585}"/>
               </a:ext>
             </a:extLst>
           </p:cNvPr>
@@ -2989,7 +2989,7 @@
           <a:bodyPr/>
           <a:lstStyle/>
           <a:p>
-            <a:fld id="{BEDED656-19E1-4C31-9E7D-6AD1D1FE664F}" type="slidenum">
+            <a:fld id="{7BB5449D-F0F2-430C-B147-4BDEDFCC4C12}" type="slidenum">
               <a:rPr kumimoji="1" lang="ja-JP" altLang="en-US" smtClean="0"/>
               <a:t>‹#›</a:t>
             </a:fld>
@@ -3000,7 +3000,7 @@
     </p:spTree>
     <p:extLst>
       <p:ext uri="{BB962C8B-B14F-4D97-AF65-F5344CB8AC3E}">
-        <p14:creationId xmlns:p14="http://schemas.microsoft.com/office/powerpoint/2010/main" val="4151477805"/>
+        <p14:creationId xmlns:p14="http://schemas.microsoft.com/office/powerpoint/2010/main" val="2416466412"/>
       </p:ext>
     </p:extLst>
   </p:cSld>
@@ -3037,7 +3037,7 @@
           <p:cNvPr id="2" name="タイトル プレースホルダー 1">
             <a:extLst>
               <a:ext uri="{FF2B5EF4-FFF2-40B4-BE49-F238E27FC236}">
-                <a16:creationId xmlns:a16="http://schemas.microsoft.com/office/drawing/2014/main" id="{A366CF4C-33F0-66EF-9A29-74E50EFD3AA7}"/>
+                <a16:creationId xmlns:a16="http://schemas.microsoft.com/office/drawing/2014/main" id="{5F4D1E27-DC61-CBD4-E5A7-3F06FAF60B04}"/>
               </a:ext>
             </a:extLst>
           </p:cNvPr>
@@ -3075,7 +3075,7 @@
           <p:cNvPr id="3" name="テキスト プレースホルダー 2">
             <a:extLst>
               <a:ext uri="{FF2B5EF4-FFF2-40B4-BE49-F238E27FC236}">
-                <a16:creationId xmlns:a16="http://schemas.microsoft.com/office/drawing/2014/main" id="{AF4620AD-4793-B839-5456-694A2E010116}"/>
+                <a16:creationId xmlns:a16="http://schemas.microsoft.com/office/drawing/2014/main" id="{9A36C452-6400-CD29-068F-C2DE420CA7AE}"/>
               </a:ext>
             </a:extLst>
           </p:cNvPr>
@@ -3174,7 +3174,7 @@
           <p:cNvPr id="4" name="日付プレースホルダー 3">
             <a:extLst>
               <a:ext uri="{FF2B5EF4-FFF2-40B4-BE49-F238E27FC236}">
-                <a16:creationId xmlns:a16="http://schemas.microsoft.com/office/drawing/2014/main" id="{D341BF62-350A-27F9-A67A-E3484DF1725E}"/>
+                <a16:creationId xmlns:a16="http://schemas.microsoft.com/office/drawing/2014/main" id="{46F4B673-2D91-0439-B529-CD89A57EFEF0}"/>
               </a:ext>
             </a:extLst>
           </p:cNvPr>
@@ -3208,7 +3208,7 @@
             </a:lvl1pPr>
           </a:lstStyle>
           <a:p>
-            <a:fld id="{700A14B1-0F86-4E96-B4A8-1C51CAA5F750}" type="datetimeFigureOut">
+            <a:fld id="{B7470CBC-C122-40DA-A9FA-F1018DF8E254}" type="datetimeFigureOut">
               <a:rPr kumimoji="1" lang="ja-JP" altLang="en-US" smtClean="0"/>
               <a:t>2026/9/12</a:t>
             </a:fld>
@@ -3221,7 +3221,7 @@
           <p:cNvPr id="5" name="フッター プレースホルダー 4">
             <a:extLst>
               <a:ext uri="{FF2B5EF4-FFF2-40B4-BE49-F238E27FC236}">
-                <a16:creationId xmlns:a16="http://schemas.microsoft.com/office/drawing/2014/main" id="{09DEE4EF-ABCA-3B20-44E1-9ACE9F22D2E2}"/>
+                <a16:creationId xmlns:a16="http://schemas.microsoft.com/office/drawing/2014/main" id="{2335C4B9-482E-302E-766F-5F6DFCF61714}"/>
               </a:ext>
             </a:extLst>
           </p:cNvPr>
@@ -3264,7 +3264,7 @@
           <p:cNvPr id="6" name="スライド番号プレースホルダー 5">
             <a:extLst>
               <a:ext uri="{FF2B5EF4-FFF2-40B4-BE49-F238E27FC236}">
-                <a16:creationId xmlns:a16="http://schemas.microsoft.com/office/drawing/2014/main" id="{6DBC254C-E836-0593-2A04-03D5AC166EAD}"/>
+                <a16:creationId xmlns:a16="http://schemas.microsoft.com/office/drawing/2014/main" id="{DC2C47B6-B28B-BD6A-839E-CD3A5F177315}"/>
               </a:ext>
             </a:extLst>
           </p:cNvPr>
@@ -3298,7 +3298,7 @@
             </a:lvl1pPr>
           </a:lstStyle>
           <a:p>
-            <a:fld id="{BEDED656-19E1-4C31-9E7D-6AD1D1FE664F}" type="slidenum">
+            <a:fld id="{7BB5449D-F0F2-430C-B147-4BDEDFCC4C12}" type="slidenum">
               <a:rPr kumimoji="1" lang="ja-JP" altLang="en-US" smtClean="0"/>
               <a:t>‹#›</a:t>
             </a:fld>
@@ -3309,7 +3309,7 @@
     </p:spTree>
     <p:extLst>
       <p:ext uri="{BB962C8B-B14F-4D97-AF65-F5344CB8AC3E}">
-        <p14:creationId xmlns:p14="http://schemas.microsoft.com/office/powerpoint/2010/main" val="129617232"/>
+        <p14:creationId xmlns:p14="http://schemas.microsoft.com/office/powerpoint/2010/main" val="815162345"/>
       </p:ext>
     </p:extLst>
   </p:cSld>
@@ -3632,7 +3632,7 @@
           <p:cNvPr id="2" name="正方形/長方形 1">
             <a:extLst>
               <a:ext uri="{FF2B5EF4-FFF2-40B4-BE49-F238E27FC236}">
-                <a16:creationId xmlns:a16="http://schemas.microsoft.com/office/drawing/2014/main" id="{8AADD28C-8B15-86B7-2F79-48EB88459D6D}"/>
+                <a16:creationId xmlns:a16="http://schemas.microsoft.com/office/drawing/2014/main" id="{E1319458-D2CC-23F7-896F-E134E43FFA40}"/>
               </a:ext>
             </a:extLst>
           </p:cNvPr>
@@ -3700,7 +3700,7 @@
           <p:cNvPr id="3" name="正方形/長方形 2">
             <a:extLst>
               <a:ext uri="{FF2B5EF4-FFF2-40B4-BE49-F238E27FC236}">
-                <a16:creationId xmlns:a16="http://schemas.microsoft.com/office/drawing/2014/main" id="{12C141B2-4415-FBF0-6949-488A97FF057D}"/>
+                <a16:creationId xmlns:a16="http://schemas.microsoft.com/office/drawing/2014/main" id="{5BCD83C6-F28F-58E9-DA8F-DB5820995BA8}"/>
               </a:ext>
             </a:extLst>
           </p:cNvPr>
@@ -3768,7 +3768,7 @@
           <p:cNvPr id="4" name="楕円 3">
             <a:extLst>
               <a:ext uri="{FF2B5EF4-FFF2-40B4-BE49-F238E27FC236}">
-                <a16:creationId xmlns:a16="http://schemas.microsoft.com/office/drawing/2014/main" id="{2775F9A5-37A1-235E-CD1A-4F4CBBCB40A7}"/>
+                <a16:creationId xmlns:a16="http://schemas.microsoft.com/office/drawing/2014/main" id="{E534DD3B-B65E-B5D4-3322-9284336BB9B8}"/>
               </a:ext>
             </a:extLst>
           </p:cNvPr>
@@ -3838,7 +3838,7 @@
           <p:cNvPr id="5" name="楕円 4">
             <a:extLst>
               <a:ext uri="{FF2B5EF4-FFF2-40B4-BE49-F238E27FC236}">
-                <a16:creationId xmlns:a16="http://schemas.microsoft.com/office/drawing/2014/main" id="{D3CC513A-B159-ED72-2B94-5368E3E1DE5E}"/>
+                <a16:creationId xmlns:a16="http://schemas.microsoft.com/office/drawing/2014/main" id="{98D5919F-73E6-BAAE-EE9D-8C12D34DF820}"/>
               </a:ext>
             </a:extLst>
           </p:cNvPr>
@@ -3908,7 +3908,7 @@
           <p:cNvPr id="6" name="正方形/長方形 5">
             <a:extLst>
               <a:ext uri="{FF2B5EF4-FFF2-40B4-BE49-F238E27FC236}">
-                <a16:creationId xmlns:a16="http://schemas.microsoft.com/office/drawing/2014/main" id="{1008237B-301E-8DA7-C223-4381E2926E49}"/>
+                <a16:creationId xmlns:a16="http://schemas.microsoft.com/office/drawing/2014/main" id="{BC98CC52-339B-1380-5E5D-527F902D5E47}"/>
               </a:ext>
             </a:extLst>
           </p:cNvPr>
@@ -3976,7 +3976,7 @@
           <p:cNvPr id="7" name="テキスト ボックス 6">
             <a:extLst>
               <a:ext uri="{FF2B5EF4-FFF2-40B4-BE49-F238E27FC236}">
-                <a16:creationId xmlns:a16="http://schemas.microsoft.com/office/drawing/2014/main" id="{4CA27613-3021-F0BD-3677-B45CCB382F6B}"/>
+                <a16:creationId xmlns:a16="http://schemas.microsoft.com/office/drawing/2014/main" id="{42BA8F67-044F-2114-1E32-1A3DE465328D}"/>
               </a:ext>
             </a:extLst>
           </p:cNvPr>
@@ -3986,7 +3986,7 @@
         <p:spPr>
           <a:xfrm>
             <a:off x="812800" y="1498600"/>
-            <a:ext cx="6350000" cy="254000"/>
+            <a:ext cx="7874000" cy="254000"/>
           </a:xfrm>
           <a:prstGeom prst="rect">
             <a:avLst/>
@@ -4005,22 +4005,15 @@
               </a:lnSpc>
             </a:pPr>
             <a:r>
-              <a:rPr kumimoji="1" lang="en-US" altLang="ja-JP" sz="1250" b="1">
+              <a:rPr kumimoji="1" lang="ja-JP" altLang="en-US" sz="1250" b="1">
                 <a:solidFill>
                   <a:srgbClr val="7FA6F5"/>
                 </a:solidFill>
                 <a:latin typeface="Yu Gothic UI" panose="020B0500000000000000" pitchFamily="50" charset="-128"/>
                 <a:ea typeface="Yu Gothic UI" panose="020B0500000000000000" pitchFamily="50" charset="-128"/>
               </a:rPr>
-              <a:t>SIMPLE DIGITAL SIGNAGE</a:t>
-            </a:r>
-            <a:endParaRPr kumimoji="1" lang="ja-JP" altLang="en-US" sz="1250" b="1">
-              <a:solidFill>
-                <a:srgbClr val="7FA6F5"/>
-              </a:solidFill>
-              <a:latin typeface="Yu Gothic UI" panose="020B0500000000000000" pitchFamily="50" charset="-128"/>
-              <a:ea typeface="Yu Gothic UI" panose="020B0500000000000000" pitchFamily="50" charset="-128"/>
-            </a:endParaRPr>
+              <a:t>簡単！シンプル！サイネージ</a:t>
+            </a:r>
           </a:p>
         </p:txBody>
       </p:sp>
@@ -4029,7 +4022,7 @@
           <p:cNvPr id="8" name="テキスト ボックス 7">
             <a:extLst>
               <a:ext uri="{FF2B5EF4-FFF2-40B4-BE49-F238E27FC236}">
-                <a16:creationId xmlns:a16="http://schemas.microsoft.com/office/drawing/2014/main" id="{3022D950-EE33-B572-5754-09DB7F7DB161}"/>
+                <a16:creationId xmlns:a16="http://schemas.microsoft.com/office/drawing/2014/main" id="{4B16C32E-886E-72CE-140E-53AEFD23FA63}"/>
               </a:ext>
             </a:extLst>
           </p:cNvPr>
@@ -4075,7 +4068,7 @@
           <p:cNvPr id="9" name="テキスト ボックス 8">
             <a:extLst>
               <a:ext uri="{FF2B5EF4-FFF2-40B4-BE49-F238E27FC236}">
-                <a16:creationId xmlns:a16="http://schemas.microsoft.com/office/drawing/2014/main" id="{98E8776A-5ECF-D1CF-2181-35384A2B5607}"/>
+                <a16:creationId xmlns:a16="http://schemas.microsoft.com/office/drawing/2014/main" id="{C78168F8-DC1C-0EE6-7535-352CF081507E}"/>
               </a:ext>
             </a:extLst>
           </p:cNvPr>
@@ -4148,7 +4141,7 @@
           <p:cNvPr id="10" name="四角形: 角を丸くする 9">
             <a:extLst>
               <a:ext uri="{FF2B5EF4-FFF2-40B4-BE49-F238E27FC236}">
-                <a16:creationId xmlns:a16="http://schemas.microsoft.com/office/drawing/2014/main" id="{6658F8CF-C987-A95D-771E-A2CEF8E8FB9B}"/>
+                <a16:creationId xmlns:a16="http://schemas.microsoft.com/office/drawing/2014/main" id="{ACA2A34B-1097-78BB-082F-4FF5A783B013}"/>
               </a:ext>
             </a:extLst>
           </p:cNvPr>
@@ -4218,7 +4211,7 @@
           <p:cNvPr id="11" name="テキスト ボックス 10">
             <a:extLst>
               <a:ext uri="{FF2B5EF4-FFF2-40B4-BE49-F238E27FC236}">
-                <a16:creationId xmlns:a16="http://schemas.microsoft.com/office/drawing/2014/main" id="{E7F49527-B43E-2E9C-C31B-BD44BE66975B}"/>
+                <a16:creationId xmlns:a16="http://schemas.microsoft.com/office/drawing/2014/main" id="{F5109DDB-E309-3A78-D5A9-21071ECA9F52}"/>
               </a:ext>
             </a:extLst>
           </p:cNvPr>
@@ -4264,7 +4257,7 @@
           <p:cNvPr id="12" name="四角形: 角を丸くする 11">
             <a:extLst>
               <a:ext uri="{FF2B5EF4-FFF2-40B4-BE49-F238E27FC236}">
-                <a16:creationId xmlns:a16="http://schemas.microsoft.com/office/drawing/2014/main" id="{2FDDCD69-A3F1-3A1C-85DE-B8C0C6D80039}"/>
+                <a16:creationId xmlns:a16="http://schemas.microsoft.com/office/drawing/2014/main" id="{48FEF812-4BDA-0A77-1FCA-051ABAC240B3}"/>
               </a:ext>
             </a:extLst>
           </p:cNvPr>
@@ -4334,7 +4327,7 @@
           <p:cNvPr id="13" name="テキスト ボックス 12">
             <a:extLst>
               <a:ext uri="{FF2B5EF4-FFF2-40B4-BE49-F238E27FC236}">
-                <a16:creationId xmlns:a16="http://schemas.microsoft.com/office/drawing/2014/main" id="{3D6A9A28-0801-AED6-6043-FA2A1BCF4E72}"/>
+                <a16:creationId xmlns:a16="http://schemas.microsoft.com/office/drawing/2014/main" id="{E7C5B9C1-F702-A73C-2509-680AFD2B25F6}"/>
               </a:ext>
             </a:extLst>
           </p:cNvPr>
@@ -4380,7 +4373,7 @@
           <p:cNvPr id="14" name="正方形/長方形 13">
             <a:extLst>
               <a:ext uri="{FF2B5EF4-FFF2-40B4-BE49-F238E27FC236}">
-                <a16:creationId xmlns:a16="http://schemas.microsoft.com/office/drawing/2014/main" id="{6FE10370-7D63-28C2-7ED2-2BC4A4B4D900}"/>
+                <a16:creationId xmlns:a16="http://schemas.microsoft.com/office/drawing/2014/main" id="{171B0C6F-7949-6335-4EE4-1E7F8B56EE9F}"/>
               </a:ext>
             </a:extLst>
           </p:cNvPr>
@@ -4448,7 +4441,7 @@
           <p:cNvPr id="15" name="テキスト ボックス 14">
             <a:extLst>
               <a:ext uri="{FF2B5EF4-FFF2-40B4-BE49-F238E27FC236}">
-                <a16:creationId xmlns:a16="http://schemas.microsoft.com/office/drawing/2014/main" id="{4BCA2020-13FC-21FD-F189-23FE0AE3FDCD}"/>
+                <a16:creationId xmlns:a16="http://schemas.microsoft.com/office/drawing/2014/main" id="{FC7FA2D6-AD65-48BB-550E-93DE9CE870A7}"/>
               </a:ext>
             </a:extLst>
           </p:cNvPr>
@@ -4542,7 +4535,7 @@
     </p:spTree>
     <p:extLst>
       <p:ext uri="{BB962C8B-B14F-4D97-AF65-F5344CB8AC3E}">
-        <p14:creationId xmlns:p14="http://schemas.microsoft.com/office/powerpoint/2010/main" val="3091954362"/>
+        <p14:creationId xmlns:p14="http://schemas.microsoft.com/office/powerpoint/2010/main" val="3075298560"/>
       </p:ext>
     </p:extLst>
   </p:cSld>
@@ -4574,7 +4567,7 @@
           <p:cNvPr id="2" name="正方形/長方形 1">
             <a:extLst>
               <a:ext uri="{FF2B5EF4-FFF2-40B4-BE49-F238E27FC236}">
-                <a16:creationId xmlns:a16="http://schemas.microsoft.com/office/drawing/2014/main" id="{3C3B9BEA-3331-6F63-8CA5-434C8458FD52}"/>
+                <a16:creationId xmlns:a16="http://schemas.microsoft.com/office/drawing/2014/main" id="{8E7620F1-2CE5-0494-BE03-B13DFDA9E81F}"/>
               </a:ext>
             </a:extLst>
           </p:cNvPr>
@@ -4642,7 +4635,7 @@
           <p:cNvPr id="3" name="正方形/長方形 2">
             <a:extLst>
               <a:ext uri="{FF2B5EF4-FFF2-40B4-BE49-F238E27FC236}">
-                <a16:creationId xmlns:a16="http://schemas.microsoft.com/office/drawing/2014/main" id="{8515706C-4FF1-7E37-A0FF-2EC81EE6E64D}"/>
+                <a16:creationId xmlns:a16="http://schemas.microsoft.com/office/drawing/2014/main" id="{709F84FF-982F-7035-DEE9-A60698C99C1A}"/>
               </a:ext>
             </a:extLst>
           </p:cNvPr>
@@ -4710,7 +4703,7 @@
           <p:cNvPr id="4" name="テキスト ボックス 3">
             <a:extLst>
               <a:ext uri="{FF2B5EF4-FFF2-40B4-BE49-F238E27FC236}">
-                <a16:creationId xmlns:a16="http://schemas.microsoft.com/office/drawing/2014/main" id="{8FD471DC-ECC2-35FF-CAFE-F51FDB0F84B1}"/>
+                <a16:creationId xmlns:a16="http://schemas.microsoft.com/office/drawing/2014/main" id="{2B23600B-85D5-0DD1-BCD8-4C384B2175E0}"/>
               </a:ext>
             </a:extLst>
           </p:cNvPr>
@@ -4763,7 +4756,7 @@
           <p:cNvPr id="5" name="テキスト ボックス 4">
             <a:extLst>
               <a:ext uri="{FF2B5EF4-FFF2-40B4-BE49-F238E27FC236}">
-                <a16:creationId xmlns:a16="http://schemas.microsoft.com/office/drawing/2014/main" id="{094E71C0-05BD-C812-6ADD-E38F3C0F3952}"/>
+                <a16:creationId xmlns:a16="http://schemas.microsoft.com/office/drawing/2014/main" id="{7BB9A831-44BD-725D-C8D5-619DD1BA3CF9}"/>
               </a:ext>
             </a:extLst>
           </p:cNvPr>
@@ -4809,7 +4802,7 @@
           <p:cNvPr id="6" name="正方形/長方形 5">
             <a:extLst>
               <a:ext uri="{FF2B5EF4-FFF2-40B4-BE49-F238E27FC236}">
-                <a16:creationId xmlns:a16="http://schemas.microsoft.com/office/drawing/2014/main" id="{29CEEF44-6C07-A4B2-8965-85C2EB00794B}"/>
+                <a16:creationId xmlns:a16="http://schemas.microsoft.com/office/drawing/2014/main" id="{6F8A0461-AD31-4F39-B8DD-669C8011E862}"/>
               </a:ext>
             </a:extLst>
           </p:cNvPr>
@@ -4877,7 +4870,7 @@
           <p:cNvPr id="7" name="四角形: 角を丸くする 6">
             <a:extLst>
               <a:ext uri="{FF2B5EF4-FFF2-40B4-BE49-F238E27FC236}">
-                <a16:creationId xmlns:a16="http://schemas.microsoft.com/office/drawing/2014/main" id="{548039BC-D682-D745-5412-E377AD406B30}"/>
+                <a16:creationId xmlns:a16="http://schemas.microsoft.com/office/drawing/2014/main" id="{E217BDFF-39E0-758E-2D9D-573766A79606}"/>
               </a:ext>
             </a:extLst>
           </p:cNvPr>
@@ -4947,7 +4940,7 @@
           <p:cNvPr id="8" name="テキスト ボックス 7">
             <a:extLst>
               <a:ext uri="{FF2B5EF4-FFF2-40B4-BE49-F238E27FC236}">
-                <a16:creationId xmlns:a16="http://schemas.microsoft.com/office/drawing/2014/main" id="{E184DE42-CC32-2C3A-2C8F-2AA37C93661A}"/>
+                <a16:creationId xmlns:a16="http://schemas.microsoft.com/office/drawing/2014/main" id="{1127899A-E82B-CB8B-03AF-EE085073D4DC}"/>
               </a:ext>
             </a:extLst>
           </p:cNvPr>
@@ -4993,7 +4986,7 @@
           <p:cNvPr id="9" name="テキスト ボックス 8">
             <a:extLst>
               <a:ext uri="{FF2B5EF4-FFF2-40B4-BE49-F238E27FC236}">
-                <a16:creationId xmlns:a16="http://schemas.microsoft.com/office/drawing/2014/main" id="{7C72FBCA-DA3C-4954-F691-EB02A46CAA7D}"/>
+                <a16:creationId xmlns:a16="http://schemas.microsoft.com/office/drawing/2014/main" id="{CB33C608-A0FA-7609-7A18-27002FE3E8BD}"/>
               </a:ext>
             </a:extLst>
           </p:cNvPr>
@@ -5003,7 +4996,7 @@
         <p:spPr>
           <a:xfrm>
             <a:off x="812800" y="6375400"/>
-            <a:ext cx="5080000" cy="177800"/>
+            <a:ext cx="6604000" cy="177800"/>
           </a:xfrm>
           <a:prstGeom prst="rect">
             <a:avLst/>
@@ -5029,7 +5022,7 @@
                 <a:latin typeface="Yu Gothic UI" panose="020B0500000000000000" pitchFamily="50" charset="-128"/>
                 <a:ea typeface="Yu Gothic UI" panose="020B0500000000000000" pitchFamily="50" charset="-128"/>
               </a:rPr>
-              <a:t>簡易デジタルサイネージ ｜ 操作ガイド</a:t>
+              <a:t>簡単！シンプル！サイネージ ｜ 操作ガイド</a:t>
             </a:r>
           </a:p>
         </p:txBody>
@@ -5039,7 +5032,7 @@
           <p:cNvPr id="10" name="テキスト ボックス 9">
             <a:extLst>
               <a:ext uri="{FF2B5EF4-FFF2-40B4-BE49-F238E27FC236}">
-                <a16:creationId xmlns:a16="http://schemas.microsoft.com/office/drawing/2014/main" id="{0FDA14E0-46D1-EA62-1DC4-EEE830227A34}"/>
+                <a16:creationId xmlns:a16="http://schemas.microsoft.com/office/drawing/2014/main" id="{E2510F3C-85D1-1648-BE46-BBD19948BD20}"/>
               </a:ext>
             </a:extLst>
           </p:cNvPr>
@@ -5092,7 +5085,7 @@
           <p:cNvPr id="11" name="四角形: 角を丸くする 10">
             <a:extLst>
               <a:ext uri="{FF2B5EF4-FFF2-40B4-BE49-F238E27FC236}">
-                <a16:creationId xmlns:a16="http://schemas.microsoft.com/office/drawing/2014/main" id="{0E04660A-B70A-D464-C37C-0EED7B813C67}"/>
+                <a16:creationId xmlns:a16="http://schemas.microsoft.com/office/drawing/2014/main" id="{B2522DA9-E28F-7071-13A0-768F63350B6F}"/>
               </a:ext>
             </a:extLst>
           </p:cNvPr>
@@ -5148,7 +5141,7 @@
           <p:cNvPr id="12" name="四角形: 角を丸くする 11">
             <a:extLst>
               <a:ext uri="{FF2B5EF4-FFF2-40B4-BE49-F238E27FC236}">
-                <a16:creationId xmlns:a16="http://schemas.microsoft.com/office/drawing/2014/main" id="{4CD532B8-D486-8086-E82D-C00735B7E3C3}"/>
+                <a16:creationId xmlns:a16="http://schemas.microsoft.com/office/drawing/2014/main" id="{C83D157C-E171-AC54-3238-F8E2A0C056CB}"/>
               </a:ext>
             </a:extLst>
           </p:cNvPr>
@@ -5218,7 +5211,7 @@
           <p:cNvPr id="13" name="テキスト ボックス 12">
             <a:extLst>
               <a:ext uri="{FF2B5EF4-FFF2-40B4-BE49-F238E27FC236}">
-                <a16:creationId xmlns:a16="http://schemas.microsoft.com/office/drawing/2014/main" id="{6C679BE4-3193-DE2A-53C4-987A405D409B}"/>
+                <a16:creationId xmlns:a16="http://schemas.microsoft.com/office/drawing/2014/main" id="{1D83C025-4590-458B-FC71-21E1D2723994}"/>
               </a:ext>
             </a:extLst>
           </p:cNvPr>
@@ -5271,7 +5264,7 @@
           <p:cNvPr id="14" name="テキスト ボックス 13">
             <a:extLst>
               <a:ext uri="{FF2B5EF4-FFF2-40B4-BE49-F238E27FC236}">
-                <a16:creationId xmlns:a16="http://schemas.microsoft.com/office/drawing/2014/main" id="{06976D8B-6A09-7E42-9F1E-1B02BAFB17B8}"/>
+                <a16:creationId xmlns:a16="http://schemas.microsoft.com/office/drawing/2014/main" id="{AFA74CF5-F649-BB17-4ED0-6CFE66A97792}"/>
               </a:ext>
             </a:extLst>
           </p:cNvPr>
@@ -5317,7 +5310,7 @@
           <p:cNvPr id="15" name="テキスト ボックス 14">
             <a:extLst>
               <a:ext uri="{FF2B5EF4-FFF2-40B4-BE49-F238E27FC236}">
-                <a16:creationId xmlns:a16="http://schemas.microsoft.com/office/drawing/2014/main" id="{233CB1C4-6F91-18DB-8B37-85E8BF03FD0E}"/>
+                <a16:creationId xmlns:a16="http://schemas.microsoft.com/office/drawing/2014/main" id="{512C539A-F0BF-6D90-FCDD-76B680B5BEBC}"/>
               </a:ext>
             </a:extLst>
           </p:cNvPr>
@@ -5456,7 +5449,7 @@
           <p:cNvPr id="16" name="四角形: 角を丸くする 15">
             <a:extLst>
               <a:ext uri="{FF2B5EF4-FFF2-40B4-BE49-F238E27FC236}">
-                <a16:creationId xmlns:a16="http://schemas.microsoft.com/office/drawing/2014/main" id="{14DE2B9A-6640-DC31-C697-96C79BC6EB1E}"/>
+                <a16:creationId xmlns:a16="http://schemas.microsoft.com/office/drawing/2014/main" id="{17A03EF0-4B38-D330-80EE-DB4EC9655435}"/>
               </a:ext>
             </a:extLst>
           </p:cNvPr>
@@ -5526,7 +5519,7 @@
           <p:cNvPr id="17" name="四角形: 角を丸くする 16">
             <a:extLst>
               <a:ext uri="{FF2B5EF4-FFF2-40B4-BE49-F238E27FC236}">
-                <a16:creationId xmlns:a16="http://schemas.microsoft.com/office/drawing/2014/main" id="{040D604F-B857-A359-D9F7-66DA44E99737}"/>
+                <a16:creationId xmlns:a16="http://schemas.microsoft.com/office/drawing/2014/main" id="{D644B964-F2CF-980D-0F7D-EF3AF22ADE30}"/>
               </a:ext>
             </a:extLst>
           </p:cNvPr>
@@ -5596,7 +5589,7 @@
           <p:cNvPr id="18" name="テキスト ボックス 17">
             <a:extLst>
               <a:ext uri="{FF2B5EF4-FFF2-40B4-BE49-F238E27FC236}">
-                <a16:creationId xmlns:a16="http://schemas.microsoft.com/office/drawing/2014/main" id="{3FBC6BE0-8C7D-6349-93D3-F96935F4C83E}"/>
+                <a16:creationId xmlns:a16="http://schemas.microsoft.com/office/drawing/2014/main" id="{1060FF68-9F95-7F5B-058E-03A88D7FE212}"/>
               </a:ext>
             </a:extLst>
           </p:cNvPr>
@@ -5649,7 +5642,7 @@
           <p:cNvPr id="19" name="テキスト ボックス 18">
             <a:extLst>
               <a:ext uri="{FF2B5EF4-FFF2-40B4-BE49-F238E27FC236}">
-                <a16:creationId xmlns:a16="http://schemas.microsoft.com/office/drawing/2014/main" id="{D69DDA2A-75FB-9921-8AC2-27C5C0F93093}"/>
+                <a16:creationId xmlns:a16="http://schemas.microsoft.com/office/drawing/2014/main" id="{590641E7-6807-A949-337D-F3A1F3148EE7}"/>
               </a:ext>
             </a:extLst>
           </p:cNvPr>
@@ -5715,7 +5708,7 @@
           <p:cNvPr id="20" name="四角形: 角を丸くする 19">
             <a:extLst>
               <a:ext uri="{FF2B5EF4-FFF2-40B4-BE49-F238E27FC236}">
-                <a16:creationId xmlns:a16="http://schemas.microsoft.com/office/drawing/2014/main" id="{A6F4CB53-7A59-CD58-7EC7-798E7F393C09}"/>
+                <a16:creationId xmlns:a16="http://schemas.microsoft.com/office/drawing/2014/main" id="{FFD8516E-39E5-5490-ECEF-CAC29EC04EA0}"/>
               </a:ext>
             </a:extLst>
           </p:cNvPr>
@@ -5771,7 +5764,7 @@
           <p:cNvPr id="21" name="テキスト ボックス 20">
             <a:extLst>
               <a:ext uri="{FF2B5EF4-FFF2-40B4-BE49-F238E27FC236}">
-                <a16:creationId xmlns:a16="http://schemas.microsoft.com/office/drawing/2014/main" id="{5F67175F-8D05-9FBC-1226-582998D58086}"/>
+                <a16:creationId xmlns:a16="http://schemas.microsoft.com/office/drawing/2014/main" id="{52B8DB8D-3683-C571-88DD-A97EB6C3552B}"/>
               </a:ext>
             </a:extLst>
           </p:cNvPr>
@@ -5824,7 +5817,7 @@
           <p:cNvPr id="22" name="テキスト ボックス 21">
             <a:extLst>
               <a:ext uri="{FF2B5EF4-FFF2-40B4-BE49-F238E27FC236}">
-                <a16:creationId xmlns:a16="http://schemas.microsoft.com/office/drawing/2014/main" id="{0772B25B-7A91-9632-F8A4-E636BB4AFFD9}"/>
+                <a16:creationId xmlns:a16="http://schemas.microsoft.com/office/drawing/2014/main" id="{DF217115-B7AB-89A5-495C-A5C1D88B343F}"/>
               </a:ext>
             </a:extLst>
           </p:cNvPr>
@@ -5877,7 +5870,7 @@
           <p:cNvPr id="23" name="四角形: 角を丸くする 22">
             <a:extLst>
               <a:ext uri="{FF2B5EF4-FFF2-40B4-BE49-F238E27FC236}">
-                <a16:creationId xmlns:a16="http://schemas.microsoft.com/office/drawing/2014/main" id="{3B04CAE9-C307-A50B-B443-A5ACB1BAE21A}"/>
+                <a16:creationId xmlns:a16="http://schemas.microsoft.com/office/drawing/2014/main" id="{E4B44391-82D7-CCE6-B62E-265AA30E3B67}"/>
               </a:ext>
             </a:extLst>
           </p:cNvPr>
@@ -5933,7 +5926,7 @@
           <p:cNvPr id="24" name="テキスト ボックス 23">
             <a:extLst>
               <a:ext uri="{FF2B5EF4-FFF2-40B4-BE49-F238E27FC236}">
-                <a16:creationId xmlns:a16="http://schemas.microsoft.com/office/drawing/2014/main" id="{9ED1FF0F-9A62-3490-862F-FA4F2DE5F6B3}"/>
+                <a16:creationId xmlns:a16="http://schemas.microsoft.com/office/drawing/2014/main" id="{3CEEDB12-B733-ED2B-1E5D-726A404FD3EC}"/>
               </a:ext>
             </a:extLst>
           </p:cNvPr>
@@ -5986,7 +5979,7 @@
           <p:cNvPr id="25" name="テキスト ボックス 24">
             <a:extLst>
               <a:ext uri="{FF2B5EF4-FFF2-40B4-BE49-F238E27FC236}">
-                <a16:creationId xmlns:a16="http://schemas.microsoft.com/office/drawing/2014/main" id="{9E867D67-B12C-32E0-69C5-70763400B1F5}"/>
+                <a16:creationId xmlns:a16="http://schemas.microsoft.com/office/drawing/2014/main" id="{D1FCA945-34A0-EFB6-7621-14FA625CC111}"/>
               </a:ext>
             </a:extLst>
           </p:cNvPr>
@@ -6039,7 +6032,7 @@
           <p:cNvPr id="26" name="四角形: 角を丸くする 25">
             <a:extLst>
               <a:ext uri="{FF2B5EF4-FFF2-40B4-BE49-F238E27FC236}">
-                <a16:creationId xmlns:a16="http://schemas.microsoft.com/office/drawing/2014/main" id="{C47940A2-F5FE-CADC-87BE-DFD7BE7A680C}"/>
+                <a16:creationId xmlns:a16="http://schemas.microsoft.com/office/drawing/2014/main" id="{188E2CBB-1A5D-C82F-72FD-1FCB1B5833FC}"/>
               </a:ext>
             </a:extLst>
           </p:cNvPr>
@@ -6095,7 +6088,7 @@
           <p:cNvPr id="27" name="テキスト ボックス 26">
             <a:extLst>
               <a:ext uri="{FF2B5EF4-FFF2-40B4-BE49-F238E27FC236}">
-                <a16:creationId xmlns:a16="http://schemas.microsoft.com/office/drawing/2014/main" id="{3CBAC2C3-A843-33DA-2CC5-A62EB55FBB98}"/>
+                <a16:creationId xmlns:a16="http://schemas.microsoft.com/office/drawing/2014/main" id="{688A4E00-6C45-1490-983F-B32122F0855D}"/>
               </a:ext>
             </a:extLst>
           </p:cNvPr>
@@ -6148,7 +6141,7 @@
           <p:cNvPr id="28" name="テキスト ボックス 27">
             <a:extLst>
               <a:ext uri="{FF2B5EF4-FFF2-40B4-BE49-F238E27FC236}">
-                <a16:creationId xmlns:a16="http://schemas.microsoft.com/office/drawing/2014/main" id="{8E866CAB-B87B-781E-6D4A-6BBBFA4015C3}"/>
+                <a16:creationId xmlns:a16="http://schemas.microsoft.com/office/drawing/2014/main" id="{5AD2ADC1-F356-9F35-97EA-018C8DAEE497}"/>
               </a:ext>
             </a:extLst>
           </p:cNvPr>
@@ -6194,7 +6187,7 @@
           <p:cNvPr id="29" name="四角形: 角を丸くする 28">
             <a:extLst>
               <a:ext uri="{FF2B5EF4-FFF2-40B4-BE49-F238E27FC236}">
-                <a16:creationId xmlns:a16="http://schemas.microsoft.com/office/drawing/2014/main" id="{C50DB2CE-10C3-BE96-4CE3-E1A6FB7ED347}"/>
+                <a16:creationId xmlns:a16="http://schemas.microsoft.com/office/drawing/2014/main" id="{A3CA5651-02E7-FD8C-9F14-C2B536268DB0}"/>
               </a:ext>
             </a:extLst>
           </p:cNvPr>
@@ -6264,7 +6257,7 @@
           <p:cNvPr id="30" name="正方形/長方形 29">
             <a:extLst>
               <a:ext uri="{FF2B5EF4-FFF2-40B4-BE49-F238E27FC236}">
-                <a16:creationId xmlns:a16="http://schemas.microsoft.com/office/drawing/2014/main" id="{ACE4DC63-5B0B-5A90-B76E-F3FCD0386930}"/>
+                <a16:creationId xmlns:a16="http://schemas.microsoft.com/office/drawing/2014/main" id="{9D7D8DD6-8E25-CBC7-F657-A1FB35AE7354}"/>
               </a:ext>
             </a:extLst>
           </p:cNvPr>
@@ -6332,7 +6325,7 @@
           <p:cNvPr id="31" name="テキスト ボックス 30">
             <a:extLst>
               <a:ext uri="{FF2B5EF4-FFF2-40B4-BE49-F238E27FC236}">
-                <a16:creationId xmlns:a16="http://schemas.microsoft.com/office/drawing/2014/main" id="{B45B15D9-DA3D-7963-51E5-76B4BFB9CD10}"/>
+                <a16:creationId xmlns:a16="http://schemas.microsoft.com/office/drawing/2014/main" id="{B1D5ACAD-DD19-4AED-05D9-F34903892D44}"/>
               </a:ext>
             </a:extLst>
           </p:cNvPr>
@@ -6378,7 +6371,7 @@
           <p:cNvPr id="32" name="テキスト ボックス 31">
             <a:extLst>
               <a:ext uri="{FF2B5EF4-FFF2-40B4-BE49-F238E27FC236}">
-                <a16:creationId xmlns:a16="http://schemas.microsoft.com/office/drawing/2014/main" id="{ED3DCE79-82FB-D48E-2548-6DF659BEA4B7}"/>
+                <a16:creationId xmlns:a16="http://schemas.microsoft.com/office/drawing/2014/main" id="{BD5AC2D0-2B71-CBD5-1A7A-F35D7A875AFB}"/>
               </a:ext>
             </a:extLst>
           </p:cNvPr>
@@ -6422,7 +6415,7 @@
     </p:spTree>
     <p:extLst>
       <p:ext uri="{BB962C8B-B14F-4D97-AF65-F5344CB8AC3E}">
-        <p14:creationId xmlns:p14="http://schemas.microsoft.com/office/powerpoint/2010/main" val="3822909691"/>
+        <p14:creationId xmlns:p14="http://schemas.microsoft.com/office/powerpoint/2010/main" val="3311658748"/>
       </p:ext>
     </p:extLst>
   </p:cSld>
@@ -6454,7 +6447,7 @@
           <p:cNvPr id="2" name="正方形/長方形 1">
             <a:extLst>
               <a:ext uri="{FF2B5EF4-FFF2-40B4-BE49-F238E27FC236}">
-                <a16:creationId xmlns:a16="http://schemas.microsoft.com/office/drawing/2014/main" id="{E16BE40C-1740-FBCE-9AFA-268E26717177}"/>
+                <a16:creationId xmlns:a16="http://schemas.microsoft.com/office/drawing/2014/main" id="{E8B9AADA-4127-ED32-1334-5FF71C5B640C}"/>
               </a:ext>
             </a:extLst>
           </p:cNvPr>
@@ -6522,7 +6515,7 @@
           <p:cNvPr id="3" name="正方形/長方形 2">
             <a:extLst>
               <a:ext uri="{FF2B5EF4-FFF2-40B4-BE49-F238E27FC236}">
-                <a16:creationId xmlns:a16="http://schemas.microsoft.com/office/drawing/2014/main" id="{FD944EFE-31A2-FA77-0247-622DD9C10797}"/>
+                <a16:creationId xmlns:a16="http://schemas.microsoft.com/office/drawing/2014/main" id="{E5D71524-A930-BA62-9AC6-5C88AE990DFB}"/>
               </a:ext>
             </a:extLst>
           </p:cNvPr>
@@ -6590,7 +6583,7 @@
           <p:cNvPr id="4" name="テキスト ボックス 3">
             <a:extLst>
               <a:ext uri="{FF2B5EF4-FFF2-40B4-BE49-F238E27FC236}">
-                <a16:creationId xmlns:a16="http://schemas.microsoft.com/office/drawing/2014/main" id="{73439003-D141-FB18-9CB4-5A12CA0BFE46}"/>
+                <a16:creationId xmlns:a16="http://schemas.microsoft.com/office/drawing/2014/main" id="{DDD127D6-02EA-3625-8C87-06F1221BBAE4}"/>
               </a:ext>
             </a:extLst>
           </p:cNvPr>
@@ -6643,7 +6636,7 @@
           <p:cNvPr id="5" name="テキスト ボックス 4">
             <a:extLst>
               <a:ext uri="{FF2B5EF4-FFF2-40B4-BE49-F238E27FC236}">
-                <a16:creationId xmlns:a16="http://schemas.microsoft.com/office/drawing/2014/main" id="{C9F7A40A-79DE-2872-E358-96E726BC3328}"/>
+                <a16:creationId xmlns:a16="http://schemas.microsoft.com/office/drawing/2014/main" id="{B37FC5C4-EC2F-FED9-3779-CB411D832813}"/>
               </a:ext>
             </a:extLst>
           </p:cNvPr>
@@ -6689,7 +6682,7 @@
           <p:cNvPr id="6" name="正方形/長方形 5">
             <a:extLst>
               <a:ext uri="{FF2B5EF4-FFF2-40B4-BE49-F238E27FC236}">
-                <a16:creationId xmlns:a16="http://schemas.microsoft.com/office/drawing/2014/main" id="{E558B0E6-5B75-9041-60FF-759724531CEE}"/>
+                <a16:creationId xmlns:a16="http://schemas.microsoft.com/office/drawing/2014/main" id="{B7A248F8-69AD-FB64-845E-9156B5FE0C8B}"/>
               </a:ext>
             </a:extLst>
           </p:cNvPr>
@@ -6757,7 +6750,7 @@
           <p:cNvPr id="7" name="四角形: 角を丸くする 6">
             <a:extLst>
               <a:ext uri="{FF2B5EF4-FFF2-40B4-BE49-F238E27FC236}">
-                <a16:creationId xmlns:a16="http://schemas.microsoft.com/office/drawing/2014/main" id="{FBBCB93B-30B5-B4B6-54B2-8AD18CA2646E}"/>
+                <a16:creationId xmlns:a16="http://schemas.microsoft.com/office/drawing/2014/main" id="{DC3F6F99-E553-1C20-2AB6-8ABF50AFABB1}"/>
               </a:ext>
             </a:extLst>
           </p:cNvPr>
@@ -6827,7 +6820,7 @@
           <p:cNvPr id="8" name="テキスト ボックス 7">
             <a:extLst>
               <a:ext uri="{FF2B5EF4-FFF2-40B4-BE49-F238E27FC236}">
-                <a16:creationId xmlns:a16="http://schemas.microsoft.com/office/drawing/2014/main" id="{F24070E9-3F4F-5DFA-F5A5-9D24842F985F}"/>
+                <a16:creationId xmlns:a16="http://schemas.microsoft.com/office/drawing/2014/main" id="{5F41B5E7-D6C4-E950-116A-4622076328C2}"/>
               </a:ext>
             </a:extLst>
           </p:cNvPr>
@@ -6873,7 +6866,7 @@
           <p:cNvPr id="9" name="テキスト ボックス 8">
             <a:extLst>
               <a:ext uri="{FF2B5EF4-FFF2-40B4-BE49-F238E27FC236}">
-                <a16:creationId xmlns:a16="http://schemas.microsoft.com/office/drawing/2014/main" id="{512A1005-EAC0-C333-7F8B-5169C6128FC0}"/>
+                <a16:creationId xmlns:a16="http://schemas.microsoft.com/office/drawing/2014/main" id="{44EAD007-5050-1F6C-A81B-BFE96FE12520}"/>
               </a:ext>
             </a:extLst>
           </p:cNvPr>
@@ -6883,7 +6876,7 @@
         <p:spPr>
           <a:xfrm>
             <a:off x="812800" y="6375400"/>
-            <a:ext cx="5080000" cy="177800"/>
+            <a:ext cx="6604000" cy="177800"/>
           </a:xfrm>
           <a:prstGeom prst="rect">
             <a:avLst/>
@@ -6909,7 +6902,7 @@
                 <a:latin typeface="Yu Gothic UI" panose="020B0500000000000000" pitchFamily="50" charset="-128"/>
                 <a:ea typeface="Yu Gothic UI" panose="020B0500000000000000" pitchFamily="50" charset="-128"/>
               </a:rPr>
-              <a:t>簡易デジタルサイネージ ｜ 操作ガイド</a:t>
+              <a:t>簡単！シンプル！サイネージ ｜ 操作ガイド</a:t>
             </a:r>
           </a:p>
         </p:txBody>
@@ -6919,7 +6912,7 @@
           <p:cNvPr id="10" name="テキスト ボックス 9">
             <a:extLst>
               <a:ext uri="{FF2B5EF4-FFF2-40B4-BE49-F238E27FC236}">
-                <a16:creationId xmlns:a16="http://schemas.microsoft.com/office/drawing/2014/main" id="{8CBD5FF9-4B02-D904-C24E-004BA4F8D961}"/>
+                <a16:creationId xmlns:a16="http://schemas.microsoft.com/office/drawing/2014/main" id="{2789E732-9C41-5D26-0E52-F12009460ECC}"/>
               </a:ext>
             </a:extLst>
           </p:cNvPr>
@@ -6972,7 +6965,7 @@
           <p:cNvPr id="11" name="表 10">
             <a:extLst>
               <a:ext uri="{FF2B5EF4-FFF2-40B4-BE49-F238E27FC236}">
-                <a16:creationId xmlns:a16="http://schemas.microsoft.com/office/drawing/2014/main" id="{91EBA2C5-A344-5E94-29D4-757D5B14328D}"/>
+                <a16:creationId xmlns:a16="http://schemas.microsoft.com/office/drawing/2014/main" id="{5FF6AAAE-1A9C-D815-1FE4-F718165C85DB}"/>
               </a:ext>
             </a:extLst>
           </p:cNvPr>
@@ -6982,7 +6975,7 @@
           <p:nvPr>
             <p:extLst>
               <p:ext uri="{D42A27DB-BD31-4B8C-83A1-F6EECF244321}">
-                <p14:modId xmlns:p14="http://schemas.microsoft.com/office/powerpoint/2010/main" val="2353655457"/>
+                <p14:modId xmlns:p14="http://schemas.microsoft.com/office/powerpoint/2010/main" val="21131506"/>
               </p:ext>
             </p:extLst>
           </p:nvPr>
@@ -7001,14 +6994,14 @@
                 <a:gridCol w="3200400">
                   <a:extLst>
                     <a:ext uri="{9D8B030D-6E8A-4147-A177-3AD203B41FA5}">
-                      <a16:colId xmlns:a16="http://schemas.microsoft.com/office/drawing/2014/main" val="3726121323"/>
+                      <a16:colId xmlns:a16="http://schemas.microsoft.com/office/drawing/2014/main" val="10331178"/>
                     </a:ext>
                   </a:extLst>
                 </a:gridCol>
                 <a:gridCol w="7366000">
                   <a:extLst>
                     <a:ext uri="{9D8B030D-6E8A-4147-A177-3AD203B41FA5}">
-                      <a16:colId xmlns:a16="http://schemas.microsoft.com/office/drawing/2014/main" val="323159532"/>
+                      <a16:colId xmlns:a16="http://schemas.microsoft.com/office/drawing/2014/main" val="3233115489"/>
                     </a:ext>
                   </a:extLst>
                 </a:gridCol>
@@ -7082,7 +7075,7 @@
                 </a:tc>
                 <a:extLst>
                   <a:ext uri="{0D108BD9-81ED-4DB2-BD59-A6C34878D82A}">
-                    <a16:rowId xmlns:a16="http://schemas.microsoft.com/office/drawing/2014/main" val="3914354638"/>
+                    <a16:rowId xmlns:a16="http://schemas.microsoft.com/office/drawing/2014/main" val="2241886"/>
                   </a:ext>
                 </a:extLst>
               </a:tr>
@@ -7185,7 +7178,7 @@
                 </a:tc>
                 <a:extLst>
                   <a:ext uri="{0D108BD9-81ED-4DB2-BD59-A6C34878D82A}">
-                    <a16:rowId xmlns:a16="http://schemas.microsoft.com/office/drawing/2014/main" val="2922334373"/>
+                    <a16:rowId xmlns:a16="http://schemas.microsoft.com/office/drawing/2014/main" val="2674719565"/>
                   </a:ext>
                 </a:extLst>
               </a:tr>
@@ -7308,7 +7301,7 @@
                 </a:tc>
                 <a:extLst>
                   <a:ext uri="{0D108BD9-81ED-4DB2-BD59-A6C34878D82A}">
-                    <a16:rowId xmlns:a16="http://schemas.microsoft.com/office/drawing/2014/main" val="932995714"/>
+                    <a16:rowId xmlns:a16="http://schemas.microsoft.com/office/drawing/2014/main" val="74110732"/>
                   </a:ext>
                 </a:extLst>
               </a:tr>
@@ -7431,7 +7424,7 @@
                 </a:tc>
                 <a:extLst>
                   <a:ext uri="{0D108BD9-81ED-4DB2-BD59-A6C34878D82A}">
-                    <a16:rowId xmlns:a16="http://schemas.microsoft.com/office/drawing/2014/main" val="2903035437"/>
+                    <a16:rowId xmlns:a16="http://schemas.microsoft.com/office/drawing/2014/main" val="2028857006"/>
                   </a:ext>
                 </a:extLst>
               </a:tr>
@@ -7534,7 +7527,7 @@
                 </a:tc>
                 <a:extLst>
                   <a:ext uri="{0D108BD9-81ED-4DB2-BD59-A6C34878D82A}">
-                    <a16:rowId xmlns:a16="http://schemas.microsoft.com/office/drawing/2014/main" val="2596616657"/>
+                    <a16:rowId xmlns:a16="http://schemas.microsoft.com/office/drawing/2014/main" val="1244969782"/>
                   </a:ext>
                 </a:extLst>
               </a:tr>
@@ -7667,7 +7660,7 @@
                 </a:tc>
                 <a:extLst>
                   <a:ext uri="{0D108BD9-81ED-4DB2-BD59-A6C34878D82A}">
-                    <a16:rowId xmlns:a16="http://schemas.microsoft.com/office/drawing/2014/main" val="966078577"/>
+                    <a16:rowId xmlns:a16="http://schemas.microsoft.com/office/drawing/2014/main" val="1495916914"/>
                   </a:ext>
                 </a:extLst>
               </a:tr>
@@ -7750,7 +7743,7 @@
                 </a:tc>
                 <a:extLst>
                   <a:ext uri="{0D108BD9-81ED-4DB2-BD59-A6C34878D82A}">
-                    <a16:rowId xmlns:a16="http://schemas.microsoft.com/office/drawing/2014/main" val="4091116856"/>
+                    <a16:rowId xmlns:a16="http://schemas.microsoft.com/office/drawing/2014/main" val="1417007481"/>
                   </a:ext>
                 </a:extLst>
               </a:tr>
@@ -7763,7 +7756,7 @@
           <p:cNvPr id="12" name="四角形: 角を丸くする 11">
             <a:extLst>
               <a:ext uri="{FF2B5EF4-FFF2-40B4-BE49-F238E27FC236}">
-                <a16:creationId xmlns:a16="http://schemas.microsoft.com/office/drawing/2014/main" id="{3CCC02E8-5008-B9C0-04BB-E6FB81F987F9}"/>
+                <a16:creationId xmlns:a16="http://schemas.microsoft.com/office/drawing/2014/main" id="{461588BC-9C6E-A356-B18D-78748604006F}"/>
               </a:ext>
             </a:extLst>
           </p:cNvPr>
@@ -7833,7 +7826,7 @@
           <p:cNvPr id="13" name="正方形/長方形 12">
             <a:extLst>
               <a:ext uri="{FF2B5EF4-FFF2-40B4-BE49-F238E27FC236}">
-                <a16:creationId xmlns:a16="http://schemas.microsoft.com/office/drawing/2014/main" id="{54BD9EDC-69A2-8602-1B16-C0C4C7A90796}"/>
+                <a16:creationId xmlns:a16="http://schemas.microsoft.com/office/drawing/2014/main" id="{685718C8-86A2-0273-8237-6C80331EB79F}"/>
               </a:ext>
             </a:extLst>
           </p:cNvPr>
@@ -7901,7 +7894,7 @@
           <p:cNvPr id="14" name="テキスト ボックス 13">
             <a:extLst>
               <a:ext uri="{FF2B5EF4-FFF2-40B4-BE49-F238E27FC236}">
-                <a16:creationId xmlns:a16="http://schemas.microsoft.com/office/drawing/2014/main" id="{3E2C3EFF-EAF5-761E-0D4C-D3038D8DC841}"/>
+                <a16:creationId xmlns:a16="http://schemas.microsoft.com/office/drawing/2014/main" id="{5EE7EF98-0D84-4281-D386-12E5641CCD87}"/>
               </a:ext>
             </a:extLst>
           </p:cNvPr>
@@ -7947,7 +7940,7 @@
           <p:cNvPr id="15" name="テキスト ボックス 14">
             <a:extLst>
               <a:ext uri="{FF2B5EF4-FFF2-40B4-BE49-F238E27FC236}">
-                <a16:creationId xmlns:a16="http://schemas.microsoft.com/office/drawing/2014/main" id="{A0C0B1A5-C3E5-3186-EACB-65979EDC543C}"/>
+                <a16:creationId xmlns:a16="http://schemas.microsoft.com/office/drawing/2014/main" id="{E67BE109-7E91-D491-7513-5C02641CD033}"/>
               </a:ext>
             </a:extLst>
           </p:cNvPr>
@@ -8121,7 +8114,7 @@
     </p:spTree>
     <p:extLst>
       <p:ext uri="{BB962C8B-B14F-4D97-AF65-F5344CB8AC3E}">
-        <p14:creationId xmlns:p14="http://schemas.microsoft.com/office/powerpoint/2010/main" val="3908299107"/>
+        <p14:creationId xmlns:p14="http://schemas.microsoft.com/office/powerpoint/2010/main" val="3572840603"/>
       </p:ext>
     </p:extLst>
   </p:cSld>
@@ -8153,7 +8146,7 @@
           <p:cNvPr id="2" name="正方形/長方形 1">
             <a:extLst>
               <a:ext uri="{FF2B5EF4-FFF2-40B4-BE49-F238E27FC236}">
-                <a16:creationId xmlns:a16="http://schemas.microsoft.com/office/drawing/2014/main" id="{D1E787CB-31E6-0D81-68D8-98AB6AF42D70}"/>
+                <a16:creationId xmlns:a16="http://schemas.microsoft.com/office/drawing/2014/main" id="{C38E9EC4-CCB5-CFD2-73EE-46B23804B65F}"/>
               </a:ext>
             </a:extLst>
           </p:cNvPr>
@@ -8221,7 +8214,7 @@
           <p:cNvPr id="3" name="正方形/長方形 2">
             <a:extLst>
               <a:ext uri="{FF2B5EF4-FFF2-40B4-BE49-F238E27FC236}">
-                <a16:creationId xmlns:a16="http://schemas.microsoft.com/office/drawing/2014/main" id="{A5FB2ABE-50B8-3B51-74D8-B7ACE88B18BB}"/>
+                <a16:creationId xmlns:a16="http://schemas.microsoft.com/office/drawing/2014/main" id="{9235619E-7B07-0C1A-0EE0-102A458BB849}"/>
               </a:ext>
             </a:extLst>
           </p:cNvPr>
@@ -8289,7 +8282,7 @@
           <p:cNvPr id="4" name="テキスト ボックス 3">
             <a:extLst>
               <a:ext uri="{FF2B5EF4-FFF2-40B4-BE49-F238E27FC236}">
-                <a16:creationId xmlns:a16="http://schemas.microsoft.com/office/drawing/2014/main" id="{5AC3409A-8969-A6B1-FB1C-1827017A1EB7}"/>
+                <a16:creationId xmlns:a16="http://schemas.microsoft.com/office/drawing/2014/main" id="{0CF6FBFD-445E-EC24-B112-1F21D965A34C}"/>
               </a:ext>
             </a:extLst>
           </p:cNvPr>
@@ -8342,7 +8335,7 @@
           <p:cNvPr id="5" name="テキスト ボックス 4">
             <a:extLst>
               <a:ext uri="{FF2B5EF4-FFF2-40B4-BE49-F238E27FC236}">
-                <a16:creationId xmlns:a16="http://schemas.microsoft.com/office/drawing/2014/main" id="{2EE3B702-5382-90AC-D5C4-BA3902037552}"/>
+                <a16:creationId xmlns:a16="http://schemas.microsoft.com/office/drawing/2014/main" id="{8DDCA058-FE3F-91E7-0530-16FB6D95FF17}"/>
               </a:ext>
             </a:extLst>
           </p:cNvPr>
@@ -8388,7 +8381,7 @@
           <p:cNvPr id="6" name="正方形/長方形 5">
             <a:extLst>
               <a:ext uri="{FF2B5EF4-FFF2-40B4-BE49-F238E27FC236}">
-                <a16:creationId xmlns:a16="http://schemas.microsoft.com/office/drawing/2014/main" id="{F8670BC3-8A6A-E802-550A-6CDAB7C8C322}"/>
+                <a16:creationId xmlns:a16="http://schemas.microsoft.com/office/drawing/2014/main" id="{D8158C21-7971-535D-7548-46ECF8DB70A4}"/>
               </a:ext>
             </a:extLst>
           </p:cNvPr>
@@ -8456,7 +8449,7 @@
           <p:cNvPr id="7" name="四角形: 角を丸くする 6">
             <a:extLst>
               <a:ext uri="{FF2B5EF4-FFF2-40B4-BE49-F238E27FC236}">
-                <a16:creationId xmlns:a16="http://schemas.microsoft.com/office/drawing/2014/main" id="{909087E2-B00B-4AAA-4D6E-7AE60C002523}"/>
+                <a16:creationId xmlns:a16="http://schemas.microsoft.com/office/drawing/2014/main" id="{CFAE173B-B6B3-1B6E-1443-58B2E213AE7A}"/>
               </a:ext>
             </a:extLst>
           </p:cNvPr>
@@ -8526,7 +8519,7 @@
           <p:cNvPr id="8" name="テキスト ボックス 7">
             <a:extLst>
               <a:ext uri="{FF2B5EF4-FFF2-40B4-BE49-F238E27FC236}">
-                <a16:creationId xmlns:a16="http://schemas.microsoft.com/office/drawing/2014/main" id="{9BC1B412-A593-DFEA-2865-494CF73F742D}"/>
+                <a16:creationId xmlns:a16="http://schemas.microsoft.com/office/drawing/2014/main" id="{7009F29A-02F6-BFA1-F727-E59B3E82FA6A}"/>
               </a:ext>
             </a:extLst>
           </p:cNvPr>
@@ -8572,7 +8565,7 @@
           <p:cNvPr id="9" name="テキスト ボックス 8">
             <a:extLst>
               <a:ext uri="{FF2B5EF4-FFF2-40B4-BE49-F238E27FC236}">
-                <a16:creationId xmlns:a16="http://schemas.microsoft.com/office/drawing/2014/main" id="{8E2D9EB5-2981-3033-4FD8-909D022D0940}"/>
+                <a16:creationId xmlns:a16="http://schemas.microsoft.com/office/drawing/2014/main" id="{31197238-D6C7-05C7-7DB0-BE0D11C34905}"/>
               </a:ext>
             </a:extLst>
           </p:cNvPr>
@@ -8582,7 +8575,7 @@
         <p:spPr>
           <a:xfrm>
             <a:off x="812800" y="6375400"/>
-            <a:ext cx="5080000" cy="177800"/>
+            <a:ext cx="6604000" cy="177800"/>
           </a:xfrm>
           <a:prstGeom prst="rect">
             <a:avLst/>
@@ -8608,7 +8601,7 @@
                 <a:latin typeface="Yu Gothic UI" panose="020B0500000000000000" pitchFamily="50" charset="-128"/>
                 <a:ea typeface="Yu Gothic UI" panose="020B0500000000000000" pitchFamily="50" charset="-128"/>
               </a:rPr>
-              <a:t>簡易デジタルサイネージ ｜ 操作ガイド</a:t>
+              <a:t>簡単！シンプル！サイネージ ｜ 操作ガイド</a:t>
             </a:r>
           </a:p>
         </p:txBody>
@@ -8618,7 +8611,7 @@
           <p:cNvPr id="10" name="テキスト ボックス 9">
             <a:extLst>
               <a:ext uri="{FF2B5EF4-FFF2-40B4-BE49-F238E27FC236}">
-                <a16:creationId xmlns:a16="http://schemas.microsoft.com/office/drawing/2014/main" id="{EBD0E3CB-CD25-19DE-48A6-A80899AC12B8}"/>
+                <a16:creationId xmlns:a16="http://schemas.microsoft.com/office/drawing/2014/main" id="{7E10C6C4-CEFD-4C51-B02C-F3FF060141B2}"/>
               </a:ext>
             </a:extLst>
           </p:cNvPr>
@@ -8671,7 +8664,7 @@
           <p:cNvPr id="11" name="四角形: 角を丸くする 10">
             <a:extLst>
               <a:ext uri="{FF2B5EF4-FFF2-40B4-BE49-F238E27FC236}">
-                <a16:creationId xmlns:a16="http://schemas.microsoft.com/office/drawing/2014/main" id="{6C3ED693-AC23-AFB7-F3A9-E76F6649F376}"/>
+                <a16:creationId xmlns:a16="http://schemas.microsoft.com/office/drawing/2014/main" id="{95470336-88F8-33C5-DC8D-24943B9D3866}"/>
               </a:ext>
             </a:extLst>
           </p:cNvPr>
@@ -8727,7 +8720,7 @@
           <p:cNvPr id="12" name="四角形: 角を丸くする 11">
             <a:extLst>
               <a:ext uri="{FF2B5EF4-FFF2-40B4-BE49-F238E27FC236}">
-                <a16:creationId xmlns:a16="http://schemas.microsoft.com/office/drawing/2014/main" id="{39044CD9-828F-7E8A-2CA4-C2247390FCCE}"/>
+                <a16:creationId xmlns:a16="http://schemas.microsoft.com/office/drawing/2014/main" id="{6B0EABE7-4498-2EFE-FB65-BB5DA7EB99A4}"/>
               </a:ext>
             </a:extLst>
           </p:cNvPr>
@@ -8797,7 +8790,7 @@
           <p:cNvPr id="13" name="テキスト ボックス 12">
             <a:extLst>
               <a:ext uri="{FF2B5EF4-FFF2-40B4-BE49-F238E27FC236}">
-                <a16:creationId xmlns:a16="http://schemas.microsoft.com/office/drawing/2014/main" id="{CAB12D88-60E6-FFD0-90C1-4ACE6A2F04A0}"/>
+                <a16:creationId xmlns:a16="http://schemas.microsoft.com/office/drawing/2014/main" id="{2670BCA8-A3BE-109B-6440-05E5AFE09FD6}"/>
               </a:ext>
             </a:extLst>
           </p:cNvPr>
@@ -8850,7 +8843,7 @@
           <p:cNvPr id="14" name="テキスト ボックス 13">
             <a:extLst>
               <a:ext uri="{FF2B5EF4-FFF2-40B4-BE49-F238E27FC236}">
-                <a16:creationId xmlns:a16="http://schemas.microsoft.com/office/drawing/2014/main" id="{B8F56DFC-A89B-BAA7-B9E3-DDF48184F0CD}"/>
+                <a16:creationId xmlns:a16="http://schemas.microsoft.com/office/drawing/2014/main" id="{FF2D62EB-ECEE-873B-3E3A-FF498A035E69}"/>
               </a:ext>
             </a:extLst>
           </p:cNvPr>
@@ -8916,7 +8909,7 @@
           <p:cNvPr id="15" name="テキスト ボックス 14">
             <a:extLst>
               <a:ext uri="{FF2B5EF4-FFF2-40B4-BE49-F238E27FC236}">
-                <a16:creationId xmlns:a16="http://schemas.microsoft.com/office/drawing/2014/main" id="{A3599E82-30B9-42F3-D76A-D7367FE80B2E}"/>
+                <a16:creationId xmlns:a16="http://schemas.microsoft.com/office/drawing/2014/main" id="{076433CE-A049-E6CE-4DD4-EAF2BB47D6FC}"/>
               </a:ext>
             </a:extLst>
           </p:cNvPr>
@@ -9045,7 +9038,7 @@
           <p:cNvPr id="16" name="四角形: 角を丸くする 15">
             <a:extLst>
               <a:ext uri="{FF2B5EF4-FFF2-40B4-BE49-F238E27FC236}">
-                <a16:creationId xmlns:a16="http://schemas.microsoft.com/office/drawing/2014/main" id="{8B2F9673-8EAD-68FE-938D-1CC178B8DBEC}"/>
+                <a16:creationId xmlns:a16="http://schemas.microsoft.com/office/drawing/2014/main" id="{5148FC3F-71E8-FC96-709D-9E34F928005B}"/>
               </a:ext>
             </a:extLst>
           </p:cNvPr>
@@ -9101,7 +9094,7 @@
           <p:cNvPr id="17" name="四角形: 角を丸くする 16">
             <a:extLst>
               <a:ext uri="{FF2B5EF4-FFF2-40B4-BE49-F238E27FC236}">
-                <a16:creationId xmlns:a16="http://schemas.microsoft.com/office/drawing/2014/main" id="{2A582FFA-53FD-4CB2-BD34-F7E7679C3553}"/>
+                <a16:creationId xmlns:a16="http://schemas.microsoft.com/office/drawing/2014/main" id="{EE23865F-5884-0022-0DAE-D9BB04FA1556}"/>
               </a:ext>
             </a:extLst>
           </p:cNvPr>
@@ -9171,7 +9164,7 @@
           <p:cNvPr id="18" name="テキスト ボックス 17">
             <a:extLst>
               <a:ext uri="{FF2B5EF4-FFF2-40B4-BE49-F238E27FC236}">
-                <a16:creationId xmlns:a16="http://schemas.microsoft.com/office/drawing/2014/main" id="{9B0C9890-3193-87B9-F0E5-F8A9F0F5C220}"/>
+                <a16:creationId xmlns:a16="http://schemas.microsoft.com/office/drawing/2014/main" id="{C738EF80-9E1B-DFC6-FAE9-380E4B51F829}"/>
               </a:ext>
             </a:extLst>
           </p:cNvPr>
@@ -9224,7 +9217,7 @@
           <p:cNvPr id="19" name="テキスト ボックス 18">
             <a:extLst>
               <a:ext uri="{FF2B5EF4-FFF2-40B4-BE49-F238E27FC236}">
-                <a16:creationId xmlns:a16="http://schemas.microsoft.com/office/drawing/2014/main" id="{C8731A13-B041-7715-4B76-DA723BD9EA5D}"/>
+                <a16:creationId xmlns:a16="http://schemas.microsoft.com/office/drawing/2014/main" id="{6E4E5A30-A32D-790D-FBE6-EE17F3D00B2C}"/>
               </a:ext>
             </a:extLst>
           </p:cNvPr>
@@ -9270,7 +9263,7 @@
           <p:cNvPr id="20" name="テキスト ボックス 19">
             <a:extLst>
               <a:ext uri="{FF2B5EF4-FFF2-40B4-BE49-F238E27FC236}">
-                <a16:creationId xmlns:a16="http://schemas.microsoft.com/office/drawing/2014/main" id="{E35A5B51-73E5-7F30-F320-5598B7A4F366}"/>
+                <a16:creationId xmlns:a16="http://schemas.microsoft.com/office/drawing/2014/main" id="{FBBEFFB2-1EA1-53EE-1855-8545037E53B0}"/>
               </a:ext>
             </a:extLst>
           </p:cNvPr>
@@ -9429,7 +9422,7 @@
           <p:cNvPr id="21" name="四角形: 角を丸くする 20">
             <a:extLst>
               <a:ext uri="{FF2B5EF4-FFF2-40B4-BE49-F238E27FC236}">
-                <a16:creationId xmlns:a16="http://schemas.microsoft.com/office/drawing/2014/main" id="{8468CE74-F9F1-8CB5-6497-E37824B3B3E7}"/>
+                <a16:creationId xmlns:a16="http://schemas.microsoft.com/office/drawing/2014/main" id="{DCC4BE1A-7FC1-484E-379A-639CF15043C9}"/>
               </a:ext>
             </a:extLst>
           </p:cNvPr>
@@ -9499,7 +9492,7 @@
           <p:cNvPr id="22" name="正方形/長方形 21">
             <a:extLst>
               <a:ext uri="{FF2B5EF4-FFF2-40B4-BE49-F238E27FC236}">
-                <a16:creationId xmlns:a16="http://schemas.microsoft.com/office/drawing/2014/main" id="{470297C9-DB62-E6AF-9060-C2439DD24EF2}"/>
+                <a16:creationId xmlns:a16="http://schemas.microsoft.com/office/drawing/2014/main" id="{24171E68-CBAF-AA2B-EB92-C36BCECBF60E}"/>
               </a:ext>
             </a:extLst>
           </p:cNvPr>
@@ -9567,7 +9560,7 @@
           <p:cNvPr id="23" name="テキスト ボックス 22">
             <a:extLst>
               <a:ext uri="{FF2B5EF4-FFF2-40B4-BE49-F238E27FC236}">
-                <a16:creationId xmlns:a16="http://schemas.microsoft.com/office/drawing/2014/main" id="{BD5E880A-C69C-2661-DD16-DB4EA9DBC684}"/>
+                <a16:creationId xmlns:a16="http://schemas.microsoft.com/office/drawing/2014/main" id="{F767CF4B-B2AE-13BD-4EBA-0812FDABDB72}"/>
               </a:ext>
             </a:extLst>
           </p:cNvPr>
@@ -9613,7 +9606,7 @@
           <p:cNvPr id="24" name="テキスト ボックス 23">
             <a:extLst>
               <a:ext uri="{FF2B5EF4-FFF2-40B4-BE49-F238E27FC236}">
-                <a16:creationId xmlns:a16="http://schemas.microsoft.com/office/drawing/2014/main" id="{6D9D47EF-906C-5346-FE75-AEAB986CAB36}"/>
+                <a16:creationId xmlns:a16="http://schemas.microsoft.com/office/drawing/2014/main" id="{46E61BD2-AA7E-7BEE-2A16-9EED82CF5E2B}"/>
               </a:ext>
             </a:extLst>
           </p:cNvPr>
@@ -9677,7 +9670,7 @@
     </p:spTree>
     <p:extLst>
       <p:ext uri="{BB962C8B-B14F-4D97-AF65-F5344CB8AC3E}">
-        <p14:creationId xmlns:p14="http://schemas.microsoft.com/office/powerpoint/2010/main" val="104515879"/>
+        <p14:creationId xmlns:p14="http://schemas.microsoft.com/office/powerpoint/2010/main" val="681075539"/>
       </p:ext>
     </p:extLst>
   </p:cSld>
@@ -9709,7 +9702,7 @@
           <p:cNvPr id="2" name="正方形/長方形 1">
             <a:extLst>
               <a:ext uri="{FF2B5EF4-FFF2-40B4-BE49-F238E27FC236}">
-                <a16:creationId xmlns:a16="http://schemas.microsoft.com/office/drawing/2014/main" id="{68826942-8818-DA2E-E135-1401B5DF42D0}"/>
+                <a16:creationId xmlns:a16="http://schemas.microsoft.com/office/drawing/2014/main" id="{70FB0A07-45BD-F535-4C97-BE5F3C89E065}"/>
               </a:ext>
             </a:extLst>
           </p:cNvPr>
@@ -9777,7 +9770,7 @@
           <p:cNvPr id="3" name="正方形/長方形 2">
             <a:extLst>
               <a:ext uri="{FF2B5EF4-FFF2-40B4-BE49-F238E27FC236}">
-                <a16:creationId xmlns:a16="http://schemas.microsoft.com/office/drawing/2014/main" id="{884CFB2C-53AB-42C9-1A40-A6C1B58BDF73}"/>
+                <a16:creationId xmlns:a16="http://schemas.microsoft.com/office/drawing/2014/main" id="{63160AE0-D3D5-FFBD-05E3-70952149CDEF}"/>
               </a:ext>
             </a:extLst>
           </p:cNvPr>
@@ -9845,7 +9838,7 @@
           <p:cNvPr id="4" name="テキスト ボックス 3">
             <a:extLst>
               <a:ext uri="{FF2B5EF4-FFF2-40B4-BE49-F238E27FC236}">
-                <a16:creationId xmlns:a16="http://schemas.microsoft.com/office/drawing/2014/main" id="{FC49774B-29C1-E9D5-853E-CB1F314AF8C9}"/>
+                <a16:creationId xmlns:a16="http://schemas.microsoft.com/office/drawing/2014/main" id="{004E69F4-F09C-4EF1-0E59-B5866457C1BA}"/>
               </a:ext>
             </a:extLst>
           </p:cNvPr>
@@ -9898,7 +9891,7 @@
           <p:cNvPr id="5" name="テキスト ボックス 4">
             <a:extLst>
               <a:ext uri="{FF2B5EF4-FFF2-40B4-BE49-F238E27FC236}">
-                <a16:creationId xmlns:a16="http://schemas.microsoft.com/office/drawing/2014/main" id="{5AFAE383-4434-8697-BD3E-3585ECBE2AFA}"/>
+                <a16:creationId xmlns:a16="http://schemas.microsoft.com/office/drawing/2014/main" id="{B66F6B63-9510-756E-922A-CC6A0A9A680A}"/>
               </a:ext>
             </a:extLst>
           </p:cNvPr>
@@ -9944,7 +9937,7 @@
           <p:cNvPr id="6" name="正方形/長方形 5">
             <a:extLst>
               <a:ext uri="{FF2B5EF4-FFF2-40B4-BE49-F238E27FC236}">
-                <a16:creationId xmlns:a16="http://schemas.microsoft.com/office/drawing/2014/main" id="{239E1E1E-DF7A-756B-A1A0-8B99EB7777E7}"/>
+                <a16:creationId xmlns:a16="http://schemas.microsoft.com/office/drawing/2014/main" id="{07ED12BC-84EB-2F7E-1D9C-030A418F4387}"/>
               </a:ext>
             </a:extLst>
           </p:cNvPr>
@@ -10012,7 +10005,7 @@
           <p:cNvPr id="7" name="四角形: 角を丸くする 6">
             <a:extLst>
               <a:ext uri="{FF2B5EF4-FFF2-40B4-BE49-F238E27FC236}">
-                <a16:creationId xmlns:a16="http://schemas.microsoft.com/office/drawing/2014/main" id="{BF014161-3FDD-E8A2-43FF-DED3632DDF29}"/>
+                <a16:creationId xmlns:a16="http://schemas.microsoft.com/office/drawing/2014/main" id="{89B9C0FE-4B21-8AAE-3F84-5032AAE60721}"/>
               </a:ext>
             </a:extLst>
           </p:cNvPr>
@@ -10082,7 +10075,7 @@
           <p:cNvPr id="8" name="テキスト ボックス 7">
             <a:extLst>
               <a:ext uri="{FF2B5EF4-FFF2-40B4-BE49-F238E27FC236}">
-                <a16:creationId xmlns:a16="http://schemas.microsoft.com/office/drawing/2014/main" id="{E3E48177-CC1A-9392-DB98-7129F13E161A}"/>
+                <a16:creationId xmlns:a16="http://schemas.microsoft.com/office/drawing/2014/main" id="{79AC9A7B-5B21-D460-9971-AD519DCD9F5D}"/>
               </a:ext>
             </a:extLst>
           </p:cNvPr>
@@ -10128,7 +10121,7 @@
           <p:cNvPr id="9" name="テキスト ボックス 8">
             <a:extLst>
               <a:ext uri="{FF2B5EF4-FFF2-40B4-BE49-F238E27FC236}">
-                <a16:creationId xmlns:a16="http://schemas.microsoft.com/office/drawing/2014/main" id="{7F3C1BF7-6CAD-E4B3-A2E3-183E7754062F}"/>
+                <a16:creationId xmlns:a16="http://schemas.microsoft.com/office/drawing/2014/main" id="{33CA8B8F-0DEA-8DE9-3362-5D9622F8B601}"/>
               </a:ext>
             </a:extLst>
           </p:cNvPr>
@@ -10138,7 +10131,7 @@
         <p:spPr>
           <a:xfrm>
             <a:off x="812800" y="6375400"/>
-            <a:ext cx="5080000" cy="177800"/>
+            <a:ext cx="6604000" cy="177800"/>
           </a:xfrm>
           <a:prstGeom prst="rect">
             <a:avLst/>
@@ -10164,7 +10157,7 @@
                 <a:latin typeface="Yu Gothic UI" panose="020B0500000000000000" pitchFamily="50" charset="-128"/>
                 <a:ea typeface="Yu Gothic UI" panose="020B0500000000000000" pitchFamily="50" charset="-128"/>
               </a:rPr>
-              <a:t>簡易デジタルサイネージ ｜ 操作ガイド</a:t>
+              <a:t>簡単！シンプル！サイネージ ｜ 操作ガイド</a:t>
             </a:r>
           </a:p>
         </p:txBody>
@@ -10174,7 +10167,7 @@
           <p:cNvPr id="10" name="テキスト ボックス 9">
             <a:extLst>
               <a:ext uri="{FF2B5EF4-FFF2-40B4-BE49-F238E27FC236}">
-                <a16:creationId xmlns:a16="http://schemas.microsoft.com/office/drawing/2014/main" id="{5BD3D417-D36B-26C8-6D9A-ABFBA38DCE5A}"/>
+                <a16:creationId xmlns:a16="http://schemas.microsoft.com/office/drawing/2014/main" id="{45CB80F8-B4B4-E0D5-9F3E-E8CE79F94EAD}"/>
               </a:ext>
             </a:extLst>
           </p:cNvPr>
@@ -10227,7 +10220,7 @@
           <p:cNvPr id="11" name="テキスト ボックス 10">
             <a:extLst>
               <a:ext uri="{FF2B5EF4-FFF2-40B4-BE49-F238E27FC236}">
-                <a16:creationId xmlns:a16="http://schemas.microsoft.com/office/drawing/2014/main" id="{0D566E2F-7082-3FC9-AF0B-3D9876069645}"/>
+                <a16:creationId xmlns:a16="http://schemas.microsoft.com/office/drawing/2014/main" id="{954DA528-F834-C26F-6637-34A7BD53E089}"/>
               </a:ext>
             </a:extLst>
           </p:cNvPr>
@@ -10293,7 +10286,7 @@
           <p:cNvPr id="12" name="正方形/長方形 11">
             <a:extLst>
               <a:ext uri="{FF2B5EF4-FFF2-40B4-BE49-F238E27FC236}">
-                <a16:creationId xmlns:a16="http://schemas.microsoft.com/office/drawing/2014/main" id="{20ADF375-6843-A51D-6B3A-E589A8D715BE}"/>
+                <a16:creationId xmlns:a16="http://schemas.microsoft.com/office/drawing/2014/main" id="{96F3FDE5-E9A0-7A4A-892E-3EF6B08A2B8E}"/>
               </a:ext>
             </a:extLst>
           </p:cNvPr>
@@ -10361,7 +10354,7 @@
           <p:cNvPr id="13" name="テキスト ボックス 12">
             <a:extLst>
               <a:ext uri="{FF2B5EF4-FFF2-40B4-BE49-F238E27FC236}">
-                <a16:creationId xmlns:a16="http://schemas.microsoft.com/office/drawing/2014/main" id="{02957497-3396-BA9C-4170-3C7A58EDC54B}"/>
+                <a16:creationId xmlns:a16="http://schemas.microsoft.com/office/drawing/2014/main" id="{BAECC493-4377-AFED-313E-C1E2A20BD898}"/>
               </a:ext>
             </a:extLst>
           </p:cNvPr>
@@ -10414,7 +10407,7 @@
           <p:cNvPr id="14" name="楕円 13">
             <a:extLst>
               <a:ext uri="{FF2B5EF4-FFF2-40B4-BE49-F238E27FC236}">
-                <a16:creationId xmlns:a16="http://schemas.microsoft.com/office/drawing/2014/main" id="{857ABE6C-0959-149C-3955-91A749C085A6}"/>
+                <a16:creationId xmlns:a16="http://schemas.microsoft.com/office/drawing/2014/main" id="{D7CD1232-7CD8-448B-F5A0-5A140094AEE0}"/>
               </a:ext>
             </a:extLst>
           </p:cNvPr>
@@ -10468,7 +10461,7 @@
           <p:cNvPr id="15" name="四角形: 角を丸くする 14">
             <a:extLst>
               <a:ext uri="{FF2B5EF4-FFF2-40B4-BE49-F238E27FC236}">
-                <a16:creationId xmlns:a16="http://schemas.microsoft.com/office/drawing/2014/main" id="{81AC91A7-15FD-905C-C78D-3CC33F336E6D}"/>
+                <a16:creationId xmlns:a16="http://schemas.microsoft.com/office/drawing/2014/main" id="{0F7F6002-5674-542F-474E-EF73AE9403D5}"/>
               </a:ext>
             </a:extLst>
           </p:cNvPr>
@@ -10538,7 +10531,7 @@
           <p:cNvPr id="16" name="テキスト ボックス 15">
             <a:extLst>
               <a:ext uri="{FF2B5EF4-FFF2-40B4-BE49-F238E27FC236}">
-                <a16:creationId xmlns:a16="http://schemas.microsoft.com/office/drawing/2014/main" id="{0C114068-732B-63BC-AD3D-F145B12EAC07}"/>
+                <a16:creationId xmlns:a16="http://schemas.microsoft.com/office/drawing/2014/main" id="{EAFDC5A7-E8C9-0D84-1DAF-8108B3437908}"/>
               </a:ext>
             </a:extLst>
           </p:cNvPr>
@@ -10584,7 +10577,7 @@
           <p:cNvPr id="17" name="テキスト ボックス 16">
             <a:extLst>
               <a:ext uri="{FF2B5EF4-FFF2-40B4-BE49-F238E27FC236}">
-                <a16:creationId xmlns:a16="http://schemas.microsoft.com/office/drawing/2014/main" id="{FE195D56-3FAE-5F64-FBE6-E48F58772194}"/>
+                <a16:creationId xmlns:a16="http://schemas.microsoft.com/office/drawing/2014/main" id="{D1ECF7D4-18BC-A1CB-3291-82D1B42DECC3}"/>
               </a:ext>
             </a:extLst>
           </p:cNvPr>
@@ -10630,7 +10623,7 @@
           <p:cNvPr id="18" name="テキスト ボックス 17">
             <a:extLst>
               <a:ext uri="{FF2B5EF4-FFF2-40B4-BE49-F238E27FC236}">
-                <a16:creationId xmlns:a16="http://schemas.microsoft.com/office/drawing/2014/main" id="{7E1B1F42-0248-7E0D-FB14-2A5CBBA9BC5D}"/>
+                <a16:creationId xmlns:a16="http://schemas.microsoft.com/office/drawing/2014/main" id="{F947E347-DF35-40BC-1881-A2B82600FE6B}"/>
               </a:ext>
             </a:extLst>
           </p:cNvPr>
@@ -10683,7 +10676,7 @@
           <p:cNvPr id="19" name="楕円 18">
             <a:extLst>
               <a:ext uri="{FF2B5EF4-FFF2-40B4-BE49-F238E27FC236}">
-                <a16:creationId xmlns:a16="http://schemas.microsoft.com/office/drawing/2014/main" id="{850A5719-81A6-B95D-9D4A-D63699013D73}"/>
+                <a16:creationId xmlns:a16="http://schemas.microsoft.com/office/drawing/2014/main" id="{3A3AA7B3-F5DB-C7BF-1EB0-F1F27D9E65D8}"/>
               </a:ext>
             </a:extLst>
           </p:cNvPr>
@@ -10737,7 +10730,7 @@
           <p:cNvPr id="20" name="四角形: 角を丸くする 19">
             <a:extLst>
               <a:ext uri="{FF2B5EF4-FFF2-40B4-BE49-F238E27FC236}">
-                <a16:creationId xmlns:a16="http://schemas.microsoft.com/office/drawing/2014/main" id="{1D63765A-0FE7-976E-9E4D-43C4925A58E0}"/>
+                <a16:creationId xmlns:a16="http://schemas.microsoft.com/office/drawing/2014/main" id="{CFFDC965-C1B0-D868-4B18-1EA4C8EFDC20}"/>
               </a:ext>
             </a:extLst>
           </p:cNvPr>
@@ -10807,7 +10800,7 @@
           <p:cNvPr id="21" name="テキスト ボックス 20">
             <a:extLst>
               <a:ext uri="{FF2B5EF4-FFF2-40B4-BE49-F238E27FC236}">
-                <a16:creationId xmlns:a16="http://schemas.microsoft.com/office/drawing/2014/main" id="{AB77903F-3D53-93B4-AB13-A38C4FCE7CBF}"/>
+                <a16:creationId xmlns:a16="http://schemas.microsoft.com/office/drawing/2014/main" id="{87FC4F2F-056E-7D18-3E67-40BDC71A9C3B}"/>
               </a:ext>
             </a:extLst>
           </p:cNvPr>
@@ -10863,7 +10856,7 @@
           <p:cNvPr id="22" name="テキスト ボックス 21">
             <a:extLst>
               <a:ext uri="{FF2B5EF4-FFF2-40B4-BE49-F238E27FC236}">
-                <a16:creationId xmlns:a16="http://schemas.microsoft.com/office/drawing/2014/main" id="{596C807F-8A94-B28B-7917-884263BE5C1D}"/>
+                <a16:creationId xmlns:a16="http://schemas.microsoft.com/office/drawing/2014/main" id="{190B99FD-16D1-A3A2-5C5D-524463B2841A}"/>
               </a:ext>
             </a:extLst>
           </p:cNvPr>
@@ -10909,7 +10902,7 @@
           <p:cNvPr id="23" name="テキスト ボックス 22">
             <a:extLst>
               <a:ext uri="{FF2B5EF4-FFF2-40B4-BE49-F238E27FC236}">
-                <a16:creationId xmlns:a16="http://schemas.microsoft.com/office/drawing/2014/main" id="{A11B598E-493F-4076-F5C2-36ECA1B1A123}"/>
+                <a16:creationId xmlns:a16="http://schemas.microsoft.com/office/drawing/2014/main" id="{99A08EE0-3D24-F697-D869-AE9445667AD9}"/>
               </a:ext>
             </a:extLst>
           </p:cNvPr>
@@ -10955,7 +10948,7 @@
           <p:cNvPr id="24" name="楕円 23">
             <a:extLst>
               <a:ext uri="{FF2B5EF4-FFF2-40B4-BE49-F238E27FC236}">
-                <a16:creationId xmlns:a16="http://schemas.microsoft.com/office/drawing/2014/main" id="{41A9F633-F289-BB5A-AF9B-D565B8A12E2D}"/>
+                <a16:creationId xmlns:a16="http://schemas.microsoft.com/office/drawing/2014/main" id="{D52A29E4-4909-2605-3083-533181D603A3}"/>
               </a:ext>
             </a:extLst>
           </p:cNvPr>
@@ -11009,7 +11002,7 @@
           <p:cNvPr id="25" name="四角形: 角を丸くする 24">
             <a:extLst>
               <a:ext uri="{FF2B5EF4-FFF2-40B4-BE49-F238E27FC236}">
-                <a16:creationId xmlns:a16="http://schemas.microsoft.com/office/drawing/2014/main" id="{60744497-DCEA-C5DD-EEBE-DE1B107C638E}"/>
+                <a16:creationId xmlns:a16="http://schemas.microsoft.com/office/drawing/2014/main" id="{55B867C7-EBCE-0E6C-18E3-4827E805ABEA}"/>
               </a:ext>
             </a:extLst>
           </p:cNvPr>
@@ -11079,7 +11072,7 @@
           <p:cNvPr id="26" name="テキスト ボックス 25">
             <a:extLst>
               <a:ext uri="{FF2B5EF4-FFF2-40B4-BE49-F238E27FC236}">
-                <a16:creationId xmlns:a16="http://schemas.microsoft.com/office/drawing/2014/main" id="{FC9E7BC4-0363-FDC5-D8DB-EA75DDAABEBC}"/>
+                <a16:creationId xmlns:a16="http://schemas.microsoft.com/office/drawing/2014/main" id="{AB9D29CC-6189-F376-5796-8EB0EE8DF1FE}"/>
               </a:ext>
             </a:extLst>
           </p:cNvPr>
@@ -11135,7 +11128,7 @@
           <p:cNvPr id="27" name="テキスト ボックス 26">
             <a:extLst>
               <a:ext uri="{FF2B5EF4-FFF2-40B4-BE49-F238E27FC236}">
-                <a16:creationId xmlns:a16="http://schemas.microsoft.com/office/drawing/2014/main" id="{A3A56C19-ADB1-478E-6C49-3875FE1D83A3}"/>
+                <a16:creationId xmlns:a16="http://schemas.microsoft.com/office/drawing/2014/main" id="{99ACE78B-265A-1920-FAA7-A805A8848A1D}"/>
               </a:ext>
             </a:extLst>
           </p:cNvPr>
@@ -11181,7 +11174,7 @@
           <p:cNvPr id="28" name="テキスト ボックス 27">
             <a:extLst>
               <a:ext uri="{FF2B5EF4-FFF2-40B4-BE49-F238E27FC236}">
-                <a16:creationId xmlns:a16="http://schemas.microsoft.com/office/drawing/2014/main" id="{1013041F-912E-503D-142E-58DCC25F5FE1}"/>
+                <a16:creationId xmlns:a16="http://schemas.microsoft.com/office/drawing/2014/main" id="{7E6D0A1A-C26A-88A5-E027-08BD73FA86B0}"/>
               </a:ext>
             </a:extLst>
           </p:cNvPr>
@@ -11227,7 +11220,7 @@
           <p:cNvPr id="29" name="楕円 28">
             <a:extLst>
               <a:ext uri="{FF2B5EF4-FFF2-40B4-BE49-F238E27FC236}">
-                <a16:creationId xmlns:a16="http://schemas.microsoft.com/office/drawing/2014/main" id="{2928CF10-6C63-7028-FBA4-4D49A287458F}"/>
+                <a16:creationId xmlns:a16="http://schemas.microsoft.com/office/drawing/2014/main" id="{C732DDE5-D02A-B09F-9578-AB8E6D71FA57}"/>
               </a:ext>
             </a:extLst>
           </p:cNvPr>
@@ -11281,7 +11274,7 @@
           <p:cNvPr id="30" name="四角形: 角を丸くする 29">
             <a:extLst>
               <a:ext uri="{FF2B5EF4-FFF2-40B4-BE49-F238E27FC236}">
-                <a16:creationId xmlns:a16="http://schemas.microsoft.com/office/drawing/2014/main" id="{A6ABBFDD-06AC-5AEF-4046-670981036811}"/>
+                <a16:creationId xmlns:a16="http://schemas.microsoft.com/office/drawing/2014/main" id="{DF8B7C0A-3DE0-1E30-DC2F-13D5FD13395E}"/>
               </a:ext>
             </a:extLst>
           </p:cNvPr>
@@ -11351,7 +11344,7 @@
           <p:cNvPr id="31" name="テキスト ボックス 30">
             <a:extLst>
               <a:ext uri="{FF2B5EF4-FFF2-40B4-BE49-F238E27FC236}">
-                <a16:creationId xmlns:a16="http://schemas.microsoft.com/office/drawing/2014/main" id="{EB47A98F-7B82-4C5D-D7C0-DEAFE9D801F6}"/>
+                <a16:creationId xmlns:a16="http://schemas.microsoft.com/office/drawing/2014/main" id="{823B533C-256C-5225-B9A7-E9C1E6409262}"/>
               </a:ext>
             </a:extLst>
           </p:cNvPr>
@@ -11397,7 +11390,7 @@
           <p:cNvPr id="32" name="テキスト ボックス 31">
             <a:extLst>
               <a:ext uri="{FF2B5EF4-FFF2-40B4-BE49-F238E27FC236}">
-                <a16:creationId xmlns:a16="http://schemas.microsoft.com/office/drawing/2014/main" id="{6A9586AE-BAAD-D213-5319-35157CA1A4E7}"/>
+                <a16:creationId xmlns:a16="http://schemas.microsoft.com/office/drawing/2014/main" id="{A87C7A21-2034-8FF4-FABD-35894D56A617}"/>
               </a:ext>
             </a:extLst>
           </p:cNvPr>
@@ -11473,7 +11466,7 @@
           <p:cNvPr id="33" name="四角形: 角を丸くする 32">
             <a:extLst>
               <a:ext uri="{FF2B5EF4-FFF2-40B4-BE49-F238E27FC236}">
-                <a16:creationId xmlns:a16="http://schemas.microsoft.com/office/drawing/2014/main" id="{97960EF2-4A7F-2EE3-4030-5C9CCD8BDB60}"/>
+                <a16:creationId xmlns:a16="http://schemas.microsoft.com/office/drawing/2014/main" id="{98DC5847-C1F0-211F-94D4-58B9C8080FF7}"/>
               </a:ext>
             </a:extLst>
           </p:cNvPr>
@@ -11543,7 +11536,7 @@
           <p:cNvPr id="34" name="正方形/長方形 33">
             <a:extLst>
               <a:ext uri="{FF2B5EF4-FFF2-40B4-BE49-F238E27FC236}">
-                <a16:creationId xmlns:a16="http://schemas.microsoft.com/office/drawing/2014/main" id="{2F84F9BA-F65E-3118-1CB8-97E5F47C4061}"/>
+                <a16:creationId xmlns:a16="http://schemas.microsoft.com/office/drawing/2014/main" id="{72AC4C7E-4C0F-11C6-D805-6CEB70C4C248}"/>
               </a:ext>
             </a:extLst>
           </p:cNvPr>
@@ -11611,7 +11604,7 @@
           <p:cNvPr id="35" name="テキスト ボックス 34">
             <a:extLst>
               <a:ext uri="{FF2B5EF4-FFF2-40B4-BE49-F238E27FC236}">
-                <a16:creationId xmlns:a16="http://schemas.microsoft.com/office/drawing/2014/main" id="{B02074C5-71E4-06A0-64F6-101FA1092FC1}"/>
+                <a16:creationId xmlns:a16="http://schemas.microsoft.com/office/drawing/2014/main" id="{22968ED0-6537-6B67-58D4-F1EDE3F37C08}"/>
               </a:ext>
             </a:extLst>
           </p:cNvPr>
@@ -11657,7 +11650,7 @@
           <p:cNvPr id="36" name="テキスト ボックス 35">
             <a:extLst>
               <a:ext uri="{FF2B5EF4-FFF2-40B4-BE49-F238E27FC236}">
-                <a16:creationId xmlns:a16="http://schemas.microsoft.com/office/drawing/2014/main" id="{C91ABA4C-E398-4BF1-A688-EB79B921B7FD}"/>
+                <a16:creationId xmlns:a16="http://schemas.microsoft.com/office/drawing/2014/main" id="{08052EE5-FB35-1650-8813-5D578B691034}"/>
               </a:ext>
             </a:extLst>
           </p:cNvPr>
@@ -11761,7 +11754,7 @@
     </p:spTree>
     <p:extLst>
       <p:ext uri="{BB962C8B-B14F-4D97-AF65-F5344CB8AC3E}">
-        <p14:creationId xmlns:p14="http://schemas.microsoft.com/office/powerpoint/2010/main" val="358812588"/>
+        <p14:creationId xmlns:p14="http://schemas.microsoft.com/office/powerpoint/2010/main" val="2228413794"/>
       </p:ext>
     </p:extLst>
   </p:cSld>
@@ -11793,7 +11786,7 @@
           <p:cNvPr id="2" name="正方形/長方形 1">
             <a:extLst>
               <a:ext uri="{FF2B5EF4-FFF2-40B4-BE49-F238E27FC236}">
-                <a16:creationId xmlns:a16="http://schemas.microsoft.com/office/drawing/2014/main" id="{E135CBB9-6058-EBCA-2521-8CBFD55D9D65}"/>
+                <a16:creationId xmlns:a16="http://schemas.microsoft.com/office/drawing/2014/main" id="{0CD0CDBD-D631-107B-86A6-231E48ACE2FC}"/>
               </a:ext>
             </a:extLst>
           </p:cNvPr>
@@ -11861,7 +11854,7 @@
           <p:cNvPr id="3" name="正方形/長方形 2">
             <a:extLst>
               <a:ext uri="{FF2B5EF4-FFF2-40B4-BE49-F238E27FC236}">
-                <a16:creationId xmlns:a16="http://schemas.microsoft.com/office/drawing/2014/main" id="{A403A0FE-490E-1BC6-92CD-74804FFA94F0}"/>
+                <a16:creationId xmlns:a16="http://schemas.microsoft.com/office/drawing/2014/main" id="{BE8BCE28-BCC6-CE63-46F3-05F92BD0D202}"/>
               </a:ext>
             </a:extLst>
           </p:cNvPr>
@@ -11929,7 +11922,7 @@
           <p:cNvPr id="4" name="テキスト ボックス 3">
             <a:extLst>
               <a:ext uri="{FF2B5EF4-FFF2-40B4-BE49-F238E27FC236}">
-                <a16:creationId xmlns:a16="http://schemas.microsoft.com/office/drawing/2014/main" id="{0CF5E38A-3018-9B1D-BD62-FF0523270812}"/>
+                <a16:creationId xmlns:a16="http://schemas.microsoft.com/office/drawing/2014/main" id="{3C5F4BB3-24A9-7FB2-1ADD-41E3B41DE6C0}"/>
               </a:ext>
             </a:extLst>
           </p:cNvPr>
@@ -11982,7 +11975,7 @@
           <p:cNvPr id="5" name="テキスト ボックス 4">
             <a:extLst>
               <a:ext uri="{FF2B5EF4-FFF2-40B4-BE49-F238E27FC236}">
-                <a16:creationId xmlns:a16="http://schemas.microsoft.com/office/drawing/2014/main" id="{9BC9ADAF-14FE-FDEF-A5B9-C72ADDECCD4E}"/>
+                <a16:creationId xmlns:a16="http://schemas.microsoft.com/office/drawing/2014/main" id="{737148D3-6393-CC02-18D9-754955DF506C}"/>
               </a:ext>
             </a:extLst>
           </p:cNvPr>
@@ -12028,7 +12021,7 @@
           <p:cNvPr id="6" name="正方形/長方形 5">
             <a:extLst>
               <a:ext uri="{FF2B5EF4-FFF2-40B4-BE49-F238E27FC236}">
-                <a16:creationId xmlns:a16="http://schemas.microsoft.com/office/drawing/2014/main" id="{8FD3A0E4-1B85-2555-6F20-A2D99FE0187A}"/>
+                <a16:creationId xmlns:a16="http://schemas.microsoft.com/office/drawing/2014/main" id="{2C3A7AE3-ACD4-63FE-E132-3A997EF16273}"/>
               </a:ext>
             </a:extLst>
           </p:cNvPr>
@@ -12096,7 +12089,7 @@
           <p:cNvPr id="7" name="四角形: 角を丸くする 6">
             <a:extLst>
               <a:ext uri="{FF2B5EF4-FFF2-40B4-BE49-F238E27FC236}">
-                <a16:creationId xmlns:a16="http://schemas.microsoft.com/office/drawing/2014/main" id="{D884FA6D-62D0-02FF-C800-E6A213791F97}"/>
+                <a16:creationId xmlns:a16="http://schemas.microsoft.com/office/drawing/2014/main" id="{7C10AD60-EE45-22DE-5539-9C1232F93DA1}"/>
               </a:ext>
             </a:extLst>
           </p:cNvPr>
@@ -12166,7 +12159,7 @@
           <p:cNvPr id="8" name="テキスト ボックス 7">
             <a:extLst>
               <a:ext uri="{FF2B5EF4-FFF2-40B4-BE49-F238E27FC236}">
-                <a16:creationId xmlns:a16="http://schemas.microsoft.com/office/drawing/2014/main" id="{A78E72A5-11DC-218E-255F-6C90A39DA43E}"/>
+                <a16:creationId xmlns:a16="http://schemas.microsoft.com/office/drawing/2014/main" id="{6699026F-F474-775D-E70A-480FBB53A8BE}"/>
               </a:ext>
             </a:extLst>
           </p:cNvPr>
@@ -12212,7 +12205,7 @@
           <p:cNvPr id="9" name="テキスト ボックス 8">
             <a:extLst>
               <a:ext uri="{FF2B5EF4-FFF2-40B4-BE49-F238E27FC236}">
-                <a16:creationId xmlns:a16="http://schemas.microsoft.com/office/drawing/2014/main" id="{AC44050C-B815-F85D-8F68-0D48FB0A55BF}"/>
+                <a16:creationId xmlns:a16="http://schemas.microsoft.com/office/drawing/2014/main" id="{BB0781C8-018C-C838-F5E7-3558169EACA8}"/>
               </a:ext>
             </a:extLst>
           </p:cNvPr>
@@ -12222,7 +12215,7 @@
         <p:spPr>
           <a:xfrm>
             <a:off x="812800" y="6375400"/>
-            <a:ext cx="5080000" cy="177800"/>
+            <a:ext cx="6604000" cy="177800"/>
           </a:xfrm>
           <a:prstGeom prst="rect">
             <a:avLst/>
@@ -12248,7 +12241,7 @@
                 <a:latin typeface="Yu Gothic UI" panose="020B0500000000000000" pitchFamily="50" charset="-128"/>
                 <a:ea typeface="Yu Gothic UI" panose="020B0500000000000000" pitchFamily="50" charset="-128"/>
               </a:rPr>
-              <a:t>簡易デジタルサイネージ ｜ 操作ガイド</a:t>
+              <a:t>簡単！シンプル！サイネージ ｜ 操作ガイド</a:t>
             </a:r>
           </a:p>
         </p:txBody>
@@ -12258,7 +12251,7 @@
           <p:cNvPr id="10" name="テキスト ボックス 9">
             <a:extLst>
               <a:ext uri="{FF2B5EF4-FFF2-40B4-BE49-F238E27FC236}">
-                <a16:creationId xmlns:a16="http://schemas.microsoft.com/office/drawing/2014/main" id="{8AD264DC-729F-6452-CD0B-98D4820867F2}"/>
+                <a16:creationId xmlns:a16="http://schemas.microsoft.com/office/drawing/2014/main" id="{AC2446E6-3664-A2F2-4858-4920F617A592}"/>
               </a:ext>
             </a:extLst>
           </p:cNvPr>
@@ -12311,7 +12304,7 @@
           <p:cNvPr id="11" name="四角形: 角を丸くする 10">
             <a:extLst>
               <a:ext uri="{FF2B5EF4-FFF2-40B4-BE49-F238E27FC236}">
-                <a16:creationId xmlns:a16="http://schemas.microsoft.com/office/drawing/2014/main" id="{5389E4CA-6BE5-DF89-A912-42FF96899F35}"/>
+                <a16:creationId xmlns:a16="http://schemas.microsoft.com/office/drawing/2014/main" id="{E75F9E82-CAEB-FBF8-AC36-F490CB8548C6}"/>
               </a:ext>
             </a:extLst>
           </p:cNvPr>
@@ -12367,7 +12360,7 @@
           <p:cNvPr id="12" name="正方形/長方形 11">
             <a:extLst>
               <a:ext uri="{FF2B5EF4-FFF2-40B4-BE49-F238E27FC236}">
-                <a16:creationId xmlns:a16="http://schemas.microsoft.com/office/drawing/2014/main" id="{528460C3-8213-1884-8F97-2CF2520C2C08}"/>
+                <a16:creationId xmlns:a16="http://schemas.microsoft.com/office/drawing/2014/main" id="{AA8662B3-4B1B-F528-6D89-8A9E38AC6E46}"/>
               </a:ext>
             </a:extLst>
           </p:cNvPr>
@@ -12435,7 +12428,7 @@
           <p:cNvPr id="13" name="テキスト ボックス 12">
             <a:extLst>
               <a:ext uri="{FF2B5EF4-FFF2-40B4-BE49-F238E27FC236}">
-                <a16:creationId xmlns:a16="http://schemas.microsoft.com/office/drawing/2014/main" id="{E09E3422-295A-6059-A62D-EEAC65FAB8EE}"/>
+                <a16:creationId xmlns:a16="http://schemas.microsoft.com/office/drawing/2014/main" id="{2F891A6B-388C-D3FF-BBB4-1522B85B316C}"/>
               </a:ext>
             </a:extLst>
           </p:cNvPr>
@@ -12481,7 +12474,7 @@
           <p:cNvPr id="14" name="テキスト ボックス 13">
             <a:extLst>
               <a:ext uri="{FF2B5EF4-FFF2-40B4-BE49-F238E27FC236}">
-                <a16:creationId xmlns:a16="http://schemas.microsoft.com/office/drawing/2014/main" id="{DF223A33-B99A-C9C2-4C70-2E27BF4CDB99}"/>
+                <a16:creationId xmlns:a16="http://schemas.microsoft.com/office/drawing/2014/main" id="{AF716112-BF39-F8AE-8734-F0B617E1B818}"/>
               </a:ext>
             </a:extLst>
           </p:cNvPr>
@@ -12527,7 +12520,7 @@
           <p:cNvPr id="15" name="テキスト ボックス 14">
             <a:extLst>
               <a:ext uri="{FF2B5EF4-FFF2-40B4-BE49-F238E27FC236}">
-                <a16:creationId xmlns:a16="http://schemas.microsoft.com/office/drawing/2014/main" id="{629B6951-664C-0A12-E7B3-9AE517990740}"/>
+                <a16:creationId xmlns:a16="http://schemas.microsoft.com/office/drawing/2014/main" id="{D865DBA6-A39F-C87E-A912-9094D09DBE79}"/>
               </a:ext>
             </a:extLst>
           </p:cNvPr>
@@ -12623,7 +12616,7 @@
           <p:cNvPr id="16" name="テキスト ボックス 15">
             <a:extLst>
               <a:ext uri="{FF2B5EF4-FFF2-40B4-BE49-F238E27FC236}">
-                <a16:creationId xmlns:a16="http://schemas.microsoft.com/office/drawing/2014/main" id="{1372FEE6-79B9-F6EF-155C-A3C18B00D6A9}"/>
+                <a16:creationId xmlns:a16="http://schemas.microsoft.com/office/drawing/2014/main" id="{09A7C82A-8476-5F60-37AD-52C4507EC030}"/>
               </a:ext>
             </a:extLst>
           </p:cNvPr>
@@ -12669,7 +12662,7 @@
           <p:cNvPr id="17" name="テキスト ボックス 16">
             <a:extLst>
               <a:ext uri="{FF2B5EF4-FFF2-40B4-BE49-F238E27FC236}">
-                <a16:creationId xmlns:a16="http://schemas.microsoft.com/office/drawing/2014/main" id="{1E66CB91-7E41-EC79-8559-6B0675CDF637}"/>
+                <a16:creationId xmlns:a16="http://schemas.microsoft.com/office/drawing/2014/main" id="{B3EDB487-DA2E-F452-AF64-E8A61D000A65}"/>
               </a:ext>
             </a:extLst>
           </p:cNvPr>
@@ -12735,7 +12728,7 @@
           <p:cNvPr id="18" name="テキスト ボックス 17">
             <a:extLst>
               <a:ext uri="{FF2B5EF4-FFF2-40B4-BE49-F238E27FC236}">
-                <a16:creationId xmlns:a16="http://schemas.microsoft.com/office/drawing/2014/main" id="{658CD8E7-99E7-E773-711A-1B2F00EEF1D9}"/>
+                <a16:creationId xmlns:a16="http://schemas.microsoft.com/office/drawing/2014/main" id="{F0FADF39-36BF-B3AA-8ED1-B582FC67DE1A}"/>
               </a:ext>
             </a:extLst>
           </p:cNvPr>
@@ -12781,7 +12774,7 @@
           <p:cNvPr id="19" name="テキスト ボックス 18">
             <a:extLst>
               <a:ext uri="{FF2B5EF4-FFF2-40B4-BE49-F238E27FC236}">
-                <a16:creationId xmlns:a16="http://schemas.microsoft.com/office/drawing/2014/main" id="{71B7C435-3867-46B9-8B3F-464B69978FDF}"/>
+                <a16:creationId xmlns:a16="http://schemas.microsoft.com/office/drawing/2014/main" id="{A0CC6D2E-F140-ED4E-CDD3-CECD0E991BD2}"/>
               </a:ext>
             </a:extLst>
           </p:cNvPr>
@@ -12827,7 +12820,7 @@
           <p:cNvPr id="20" name="四角形: 角を丸くする 19">
             <a:extLst>
               <a:ext uri="{FF2B5EF4-FFF2-40B4-BE49-F238E27FC236}">
-                <a16:creationId xmlns:a16="http://schemas.microsoft.com/office/drawing/2014/main" id="{EBC49895-2812-CB4C-1737-3D977BDC1004}"/>
+                <a16:creationId xmlns:a16="http://schemas.microsoft.com/office/drawing/2014/main" id="{472B2E9C-106A-508A-EA72-2EF1EDF9131E}"/>
               </a:ext>
             </a:extLst>
           </p:cNvPr>
@@ -12883,7 +12876,7 @@
           <p:cNvPr id="21" name="正方形/長方形 20">
             <a:extLst>
               <a:ext uri="{FF2B5EF4-FFF2-40B4-BE49-F238E27FC236}">
-                <a16:creationId xmlns:a16="http://schemas.microsoft.com/office/drawing/2014/main" id="{8D51F2A8-31EC-5999-4D45-2FB708C7C3E1}"/>
+                <a16:creationId xmlns:a16="http://schemas.microsoft.com/office/drawing/2014/main" id="{C7DA7BA8-A382-5282-83A6-6B21F426A520}"/>
               </a:ext>
             </a:extLst>
           </p:cNvPr>
@@ -12951,7 +12944,7 @@
           <p:cNvPr id="22" name="テキスト ボックス 21">
             <a:extLst>
               <a:ext uri="{FF2B5EF4-FFF2-40B4-BE49-F238E27FC236}">
-                <a16:creationId xmlns:a16="http://schemas.microsoft.com/office/drawing/2014/main" id="{89D8BC1B-C88D-696B-0822-94A3F64EA1D1}"/>
+                <a16:creationId xmlns:a16="http://schemas.microsoft.com/office/drawing/2014/main" id="{7C509BCA-D8BF-D4AE-9CF2-F7651FE2FBF8}"/>
               </a:ext>
             </a:extLst>
           </p:cNvPr>
@@ -12997,7 +12990,7 @@
           <p:cNvPr id="23" name="テキスト ボックス 22">
             <a:extLst>
               <a:ext uri="{FF2B5EF4-FFF2-40B4-BE49-F238E27FC236}">
-                <a16:creationId xmlns:a16="http://schemas.microsoft.com/office/drawing/2014/main" id="{2F268ADF-3580-B279-A091-11185D1D6D53}"/>
+                <a16:creationId xmlns:a16="http://schemas.microsoft.com/office/drawing/2014/main" id="{F4DE8FDC-D67C-2FBD-343B-7568D428660B}"/>
               </a:ext>
             </a:extLst>
           </p:cNvPr>
@@ -13043,7 +13036,7 @@
           <p:cNvPr id="24" name="正方形/長方形 23">
             <a:extLst>
               <a:ext uri="{FF2B5EF4-FFF2-40B4-BE49-F238E27FC236}">
-                <a16:creationId xmlns:a16="http://schemas.microsoft.com/office/drawing/2014/main" id="{C511E36D-A092-005B-12D2-947D9EB9FCAF}"/>
+                <a16:creationId xmlns:a16="http://schemas.microsoft.com/office/drawing/2014/main" id="{DA009BE1-4C8A-D580-008E-59C0BA51C8F5}"/>
               </a:ext>
             </a:extLst>
           </p:cNvPr>
@@ -13111,7 +13104,7 @@
           <p:cNvPr id="25" name="テキスト ボックス 24">
             <a:extLst>
               <a:ext uri="{FF2B5EF4-FFF2-40B4-BE49-F238E27FC236}">
-                <a16:creationId xmlns:a16="http://schemas.microsoft.com/office/drawing/2014/main" id="{9E303ED4-3FC5-6926-72C1-28FBCE21B6DF}"/>
+                <a16:creationId xmlns:a16="http://schemas.microsoft.com/office/drawing/2014/main" id="{83F6A048-C968-F880-18A2-224098426985}"/>
               </a:ext>
             </a:extLst>
           </p:cNvPr>
@@ -13157,7 +13150,7 @@
           <p:cNvPr id="26" name="テキスト ボックス 25">
             <a:extLst>
               <a:ext uri="{FF2B5EF4-FFF2-40B4-BE49-F238E27FC236}">
-                <a16:creationId xmlns:a16="http://schemas.microsoft.com/office/drawing/2014/main" id="{89F7F235-AE19-A732-77D1-40F71D084DB1}"/>
+                <a16:creationId xmlns:a16="http://schemas.microsoft.com/office/drawing/2014/main" id="{AAB23264-20AF-41F4-7C4E-1C9CCDD9C97A}"/>
               </a:ext>
             </a:extLst>
           </p:cNvPr>
@@ -13240,7 +13233,7 @@
           <p:cNvPr id="27" name="正方形/長方形 26">
             <a:extLst>
               <a:ext uri="{FF2B5EF4-FFF2-40B4-BE49-F238E27FC236}">
-                <a16:creationId xmlns:a16="http://schemas.microsoft.com/office/drawing/2014/main" id="{0E88BE69-3DDA-D87B-D610-39014ED3C281}"/>
+                <a16:creationId xmlns:a16="http://schemas.microsoft.com/office/drawing/2014/main" id="{C17B472E-2E4B-F83A-EEBE-99E515DFA9AA}"/>
               </a:ext>
             </a:extLst>
           </p:cNvPr>
@@ -13308,7 +13301,7 @@
           <p:cNvPr id="28" name="テキスト ボックス 27">
             <a:extLst>
               <a:ext uri="{FF2B5EF4-FFF2-40B4-BE49-F238E27FC236}">
-                <a16:creationId xmlns:a16="http://schemas.microsoft.com/office/drawing/2014/main" id="{16D8649E-08B3-ECD5-5D4D-726C939BF58F}"/>
+                <a16:creationId xmlns:a16="http://schemas.microsoft.com/office/drawing/2014/main" id="{81C8AAB7-6C70-9F38-0E09-4F815EEAEC9C}"/>
               </a:ext>
             </a:extLst>
           </p:cNvPr>
@@ -13354,7 +13347,7 @@
           <p:cNvPr id="29" name="テキスト ボックス 28">
             <a:extLst>
               <a:ext uri="{FF2B5EF4-FFF2-40B4-BE49-F238E27FC236}">
-                <a16:creationId xmlns:a16="http://schemas.microsoft.com/office/drawing/2014/main" id="{FA6953D1-68A2-1599-2CF7-BC50F3327F7E}"/>
+                <a16:creationId xmlns:a16="http://schemas.microsoft.com/office/drawing/2014/main" id="{679DC9E2-BD43-DC55-6385-CCE21C5055F0}"/>
               </a:ext>
             </a:extLst>
           </p:cNvPr>
@@ -13400,7 +13393,7 @@
           <p:cNvPr id="30" name="正方形/長方形 29">
             <a:extLst>
               <a:ext uri="{FF2B5EF4-FFF2-40B4-BE49-F238E27FC236}">
-                <a16:creationId xmlns:a16="http://schemas.microsoft.com/office/drawing/2014/main" id="{299F3156-380B-EF83-34D2-D4DB27AA4EDF}"/>
+                <a16:creationId xmlns:a16="http://schemas.microsoft.com/office/drawing/2014/main" id="{96CF41E1-EDA9-034F-5280-A8E6E74F104A}"/>
               </a:ext>
             </a:extLst>
           </p:cNvPr>
@@ -13468,7 +13461,7 @@
           <p:cNvPr id="31" name="テキスト ボックス 30">
             <a:extLst>
               <a:ext uri="{FF2B5EF4-FFF2-40B4-BE49-F238E27FC236}">
-                <a16:creationId xmlns:a16="http://schemas.microsoft.com/office/drawing/2014/main" id="{8EF9516B-226D-CACC-411D-A75180E272AC}"/>
+                <a16:creationId xmlns:a16="http://schemas.microsoft.com/office/drawing/2014/main" id="{7CA893E5-93B0-03AD-F3ED-2CCA6ABE3090}"/>
               </a:ext>
             </a:extLst>
           </p:cNvPr>
@@ -13514,7 +13507,7 @@
           <p:cNvPr id="32" name="テキスト ボックス 31">
             <a:extLst>
               <a:ext uri="{FF2B5EF4-FFF2-40B4-BE49-F238E27FC236}">
-                <a16:creationId xmlns:a16="http://schemas.microsoft.com/office/drawing/2014/main" id="{B835DB39-FCE9-5B9E-871E-F0A95670769D}"/>
+                <a16:creationId xmlns:a16="http://schemas.microsoft.com/office/drawing/2014/main" id="{5DED035A-2C52-FFCD-CACC-B5070C13B583}"/>
               </a:ext>
             </a:extLst>
           </p:cNvPr>
@@ -13568,7 +13561,7 @@
     </p:spTree>
     <p:extLst>
       <p:ext uri="{BB962C8B-B14F-4D97-AF65-F5344CB8AC3E}">
-        <p14:creationId xmlns:p14="http://schemas.microsoft.com/office/powerpoint/2010/main" val="3586785598"/>
+        <p14:creationId xmlns:p14="http://schemas.microsoft.com/office/powerpoint/2010/main" val="1236090293"/>
       </p:ext>
     </p:extLst>
   </p:cSld>
@@ -13600,7 +13593,7 @@
           <p:cNvPr id="2" name="正方形/長方形 1">
             <a:extLst>
               <a:ext uri="{FF2B5EF4-FFF2-40B4-BE49-F238E27FC236}">
-                <a16:creationId xmlns:a16="http://schemas.microsoft.com/office/drawing/2014/main" id="{C1B70D17-1F05-7FCE-1002-8D4C4C7D8250}"/>
+                <a16:creationId xmlns:a16="http://schemas.microsoft.com/office/drawing/2014/main" id="{1A1805DA-716C-2D99-518F-46DA950D1A82}"/>
               </a:ext>
             </a:extLst>
           </p:cNvPr>
@@ -13668,7 +13661,7 @@
           <p:cNvPr id="3" name="正方形/長方形 2">
             <a:extLst>
               <a:ext uri="{FF2B5EF4-FFF2-40B4-BE49-F238E27FC236}">
-                <a16:creationId xmlns:a16="http://schemas.microsoft.com/office/drawing/2014/main" id="{5B8B0344-984B-BAF0-86C9-1023E4548189}"/>
+                <a16:creationId xmlns:a16="http://schemas.microsoft.com/office/drawing/2014/main" id="{1C39BF94-5D87-D49D-9355-CB5B8D71D08D}"/>
               </a:ext>
             </a:extLst>
           </p:cNvPr>
@@ -13736,7 +13729,7 @@
           <p:cNvPr id="4" name="テキスト ボックス 3">
             <a:extLst>
               <a:ext uri="{FF2B5EF4-FFF2-40B4-BE49-F238E27FC236}">
-                <a16:creationId xmlns:a16="http://schemas.microsoft.com/office/drawing/2014/main" id="{67F20258-E4A1-CD61-D5FD-1076590290CB}"/>
+                <a16:creationId xmlns:a16="http://schemas.microsoft.com/office/drawing/2014/main" id="{2CD2EEFB-562E-6E0B-464D-9F26773BF23B}"/>
               </a:ext>
             </a:extLst>
           </p:cNvPr>
@@ -13789,7 +13782,7 @@
           <p:cNvPr id="5" name="テキスト ボックス 4">
             <a:extLst>
               <a:ext uri="{FF2B5EF4-FFF2-40B4-BE49-F238E27FC236}">
-                <a16:creationId xmlns:a16="http://schemas.microsoft.com/office/drawing/2014/main" id="{3C34BB9D-9EC1-E3BA-65A4-35ADD0F8E2DA}"/>
+                <a16:creationId xmlns:a16="http://schemas.microsoft.com/office/drawing/2014/main" id="{509A0CB8-66F6-519C-1B98-C1AA72FF4B4E}"/>
               </a:ext>
             </a:extLst>
           </p:cNvPr>
@@ -13855,7 +13848,7 @@
           <p:cNvPr id="6" name="正方形/長方形 5">
             <a:extLst>
               <a:ext uri="{FF2B5EF4-FFF2-40B4-BE49-F238E27FC236}">
-                <a16:creationId xmlns:a16="http://schemas.microsoft.com/office/drawing/2014/main" id="{35306FEA-CA94-3F2D-4C04-8F693A335938}"/>
+                <a16:creationId xmlns:a16="http://schemas.microsoft.com/office/drawing/2014/main" id="{82A2E908-5ADF-526C-2F02-0073F5069F0E}"/>
               </a:ext>
             </a:extLst>
           </p:cNvPr>
@@ -13923,7 +13916,7 @@
           <p:cNvPr id="7" name="テキスト ボックス 6">
             <a:extLst>
               <a:ext uri="{FF2B5EF4-FFF2-40B4-BE49-F238E27FC236}">
-                <a16:creationId xmlns:a16="http://schemas.microsoft.com/office/drawing/2014/main" id="{DF34EC6D-54FE-3F24-99C6-99C03D06C635}"/>
+                <a16:creationId xmlns:a16="http://schemas.microsoft.com/office/drawing/2014/main" id="{FB351FB3-3B43-F019-38F1-83EC05F9CFFC}"/>
               </a:ext>
             </a:extLst>
           </p:cNvPr>
@@ -13933,7 +13926,7 @@
         <p:spPr>
           <a:xfrm>
             <a:off x="812800" y="6375400"/>
-            <a:ext cx="5080000" cy="177800"/>
+            <a:ext cx="6604000" cy="177800"/>
           </a:xfrm>
           <a:prstGeom prst="rect">
             <a:avLst/>
@@ -13959,7 +13952,7 @@
                 <a:latin typeface="Yu Gothic UI" panose="020B0500000000000000" pitchFamily="50" charset="-128"/>
                 <a:ea typeface="Yu Gothic UI" panose="020B0500000000000000" pitchFamily="50" charset="-128"/>
               </a:rPr>
-              <a:t>簡易デジタルサイネージ ｜ 操作ガイド</a:t>
+              <a:t>簡単！シンプル！サイネージ ｜ 操作ガイド</a:t>
             </a:r>
           </a:p>
         </p:txBody>
@@ -13969,7 +13962,7 @@
           <p:cNvPr id="8" name="テキスト ボックス 7">
             <a:extLst>
               <a:ext uri="{FF2B5EF4-FFF2-40B4-BE49-F238E27FC236}">
-                <a16:creationId xmlns:a16="http://schemas.microsoft.com/office/drawing/2014/main" id="{B9F00C5C-5CFE-9ED6-9D87-53D1E2EA80CF}"/>
+                <a16:creationId xmlns:a16="http://schemas.microsoft.com/office/drawing/2014/main" id="{1F8076D2-9095-CC59-0744-429DD40BA6FC}"/>
               </a:ext>
             </a:extLst>
           </p:cNvPr>
@@ -14022,7 +14015,7 @@
           <p:cNvPr id="9" name="四角形: 角を丸くする 8">
             <a:extLst>
               <a:ext uri="{FF2B5EF4-FFF2-40B4-BE49-F238E27FC236}">
-                <a16:creationId xmlns:a16="http://schemas.microsoft.com/office/drawing/2014/main" id="{454C38B8-86F6-8C98-2F7D-32D8A0D61AC7}"/>
+                <a16:creationId xmlns:a16="http://schemas.microsoft.com/office/drawing/2014/main" id="{FCF0925C-C8B5-BBDB-4F86-49AACC2C2302}"/>
               </a:ext>
             </a:extLst>
           </p:cNvPr>
@@ -14092,7 +14085,7 @@
           <p:cNvPr id="10" name="楕円 9">
             <a:extLst>
               <a:ext uri="{FF2B5EF4-FFF2-40B4-BE49-F238E27FC236}">
-                <a16:creationId xmlns:a16="http://schemas.microsoft.com/office/drawing/2014/main" id="{E2DF222E-1348-208F-227D-F8823FB74291}"/>
+                <a16:creationId xmlns:a16="http://schemas.microsoft.com/office/drawing/2014/main" id="{6823B9DC-9AB3-8068-6FB8-877CB785170D}"/>
               </a:ext>
             </a:extLst>
           </p:cNvPr>
@@ -14160,7 +14153,7 @@
           <p:cNvPr id="11" name="テキスト ボックス 10">
             <a:extLst>
               <a:ext uri="{FF2B5EF4-FFF2-40B4-BE49-F238E27FC236}">
-                <a16:creationId xmlns:a16="http://schemas.microsoft.com/office/drawing/2014/main" id="{3BBD20BC-DAEC-34E4-D05E-8C1BFE473128}"/>
+                <a16:creationId xmlns:a16="http://schemas.microsoft.com/office/drawing/2014/main" id="{9BF0E47C-3D97-98C3-155C-AC7842527D0C}"/>
               </a:ext>
             </a:extLst>
           </p:cNvPr>
@@ -14213,7 +14206,7 @@
           <p:cNvPr id="12" name="テキスト ボックス 11">
             <a:extLst>
               <a:ext uri="{FF2B5EF4-FFF2-40B4-BE49-F238E27FC236}">
-                <a16:creationId xmlns:a16="http://schemas.microsoft.com/office/drawing/2014/main" id="{9BCCE889-A1D6-7104-80BF-E7369C40BF35}"/>
+                <a16:creationId xmlns:a16="http://schemas.microsoft.com/office/drawing/2014/main" id="{3A1BED1B-FB84-8C72-35ED-E7724FA9BC66}"/>
               </a:ext>
             </a:extLst>
           </p:cNvPr>
@@ -14259,7 +14252,7 @@
           <p:cNvPr id="13" name="テキスト ボックス 12">
             <a:extLst>
               <a:ext uri="{FF2B5EF4-FFF2-40B4-BE49-F238E27FC236}">
-                <a16:creationId xmlns:a16="http://schemas.microsoft.com/office/drawing/2014/main" id="{C8D516E6-DCAF-9666-6107-9E7F7EBD6C7B}"/>
+                <a16:creationId xmlns:a16="http://schemas.microsoft.com/office/drawing/2014/main" id="{1D688BA6-250C-1296-DA95-F456B73F7482}"/>
               </a:ext>
             </a:extLst>
           </p:cNvPr>
@@ -14305,7 +14298,7 @@
           <p:cNvPr id="14" name="四角形: 角を丸くする 13">
             <a:extLst>
               <a:ext uri="{FF2B5EF4-FFF2-40B4-BE49-F238E27FC236}">
-                <a16:creationId xmlns:a16="http://schemas.microsoft.com/office/drawing/2014/main" id="{524CAD98-20E7-7F51-EB6E-5A64AD9A69C3}"/>
+                <a16:creationId xmlns:a16="http://schemas.microsoft.com/office/drawing/2014/main" id="{CE05D059-10D7-9181-226F-6CB8B7F37F92}"/>
               </a:ext>
             </a:extLst>
           </p:cNvPr>
@@ -14375,7 +14368,7 @@
           <p:cNvPr id="15" name="楕円 14">
             <a:extLst>
               <a:ext uri="{FF2B5EF4-FFF2-40B4-BE49-F238E27FC236}">
-                <a16:creationId xmlns:a16="http://schemas.microsoft.com/office/drawing/2014/main" id="{DFDCF01F-12DE-C50B-CD65-29326B8CE560}"/>
+                <a16:creationId xmlns:a16="http://schemas.microsoft.com/office/drawing/2014/main" id="{0F0E9C3F-CCD9-51E5-BFFB-AD75086AA57C}"/>
               </a:ext>
             </a:extLst>
           </p:cNvPr>
@@ -14443,7 +14436,7 @@
           <p:cNvPr id="16" name="テキスト ボックス 15">
             <a:extLst>
               <a:ext uri="{FF2B5EF4-FFF2-40B4-BE49-F238E27FC236}">
-                <a16:creationId xmlns:a16="http://schemas.microsoft.com/office/drawing/2014/main" id="{5F75B3BC-63DA-6869-7E7A-FDBA1B4F52B6}"/>
+                <a16:creationId xmlns:a16="http://schemas.microsoft.com/office/drawing/2014/main" id="{3037F71F-3A65-4576-1745-5E3F0CAB3D61}"/>
               </a:ext>
             </a:extLst>
           </p:cNvPr>
@@ -14496,7 +14489,7 @@
           <p:cNvPr id="17" name="テキスト ボックス 16">
             <a:extLst>
               <a:ext uri="{FF2B5EF4-FFF2-40B4-BE49-F238E27FC236}">
-                <a16:creationId xmlns:a16="http://schemas.microsoft.com/office/drawing/2014/main" id="{8A8A0C87-92D8-16FA-EC0C-DBD74F1D981B}"/>
+                <a16:creationId xmlns:a16="http://schemas.microsoft.com/office/drawing/2014/main" id="{D5B842CC-41FD-CD5F-969F-45361C725D2B}"/>
               </a:ext>
             </a:extLst>
           </p:cNvPr>
@@ -14542,7 +14535,7 @@
           <p:cNvPr id="18" name="テキスト ボックス 17">
             <a:extLst>
               <a:ext uri="{FF2B5EF4-FFF2-40B4-BE49-F238E27FC236}">
-                <a16:creationId xmlns:a16="http://schemas.microsoft.com/office/drawing/2014/main" id="{1FAB6939-0D4B-3223-CB0B-8EACE90EACE6}"/>
+                <a16:creationId xmlns:a16="http://schemas.microsoft.com/office/drawing/2014/main" id="{8A5E5359-3D90-6969-23D6-D68CFEDEAF1F}"/>
               </a:ext>
             </a:extLst>
           </p:cNvPr>
@@ -14588,7 +14581,7 @@
           <p:cNvPr id="19" name="四角形: 角を丸くする 18">
             <a:extLst>
               <a:ext uri="{FF2B5EF4-FFF2-40B4-BE49-F238E27FC236}">
-                <a16:creationId xmlns:a16="http://schemas.microsoft.com/office/drawing/2014/main" id="{26CA4C35-F2AF-9FB1-F319-89B68441091B}"/>
+                <a16:creationId xmlns:a16="http://schemas.microsoft.com/office/drawing/2014/main" id="{12AE1FFC-2B50-C8DE-7EE2-80D988759885}"/>
               </a:ext>
             </a:extLst>
           </p:cNvPr>
@@ -14658,7 +14651,7 @@
           <p:cNvPr id="20" name="楕円 19">
             <a:extLst>
               <a:ext uri="{FF2B5EF4-FFF2-40B4-BE49-F238E27FC236}">
-                <a16:creationId xmlns:a16="http://schemas.microsoft.com/office/drawing/2014/main" id="{402CAC67-4EF5-73EC-8FAE-32746804013E}"/>
+                <a16:creationId xmlns:a16="http://schemas.microsoft.com/office/drawing/2014/main" id="{D2CEE5A9-601D-7114-7154-36B580118737}"/>
               </a:ext>
             </a:extLst>
           </p:cNvPr>
@@ -14726,7 +14719,7 @@
           <p:cNvPr id="21" name="テキスト ボックス 20">
             <a:extLst>
               <a:ext uri="{FF2B5EF4-FFF2-40B4-BE49-F238E27FC236}">
-                <a16:creationId xmlns:a16="http://schemas.microsoft.com/office/drawing/2014/main" id="{E2F5C214-9EA1-EC77-24E5-5E2B3BC0207B}"/>
+                <a16:creationId xmlns:a16="http://schemas.microsoft.com/office/drawing/2014/main" id="{EFE48E74-C8A0-CED7-C720-87C3280ABFEA}"/>
               </a:ext>
             </a:extLst>
           </p:cNvPr>
@@ -14779,7 +14772,7 @@
           <p:cNvPr id="22" name="テキスト ボックス 21">
             <a:extLst>
               <a:ext uri="{FF2B5EF4-FFF2-40B4-BE49-F238E27FC236}">
-                <a16:creationId xmlns:a16="http://schemas.microsoft.com/office/drawing/2014/main" id="{B69B8C97-0462-83CF-74BF-7BF750F3C3B1}"/>
+                <a16:creationId xmlns:a16="http://schemas.microsoft.com/office/drawing/2014/main" id="{6CA8C61F-877B-9826-CABE-9B8E96FD4D50}"/>
               </a:ext>
             </a:extLst>
           </p:cNvPr>
@@ -14825,7 +14818,7 @@
           <p:cNvPr id="23" name="テキスト ボックス 22">
             <a:extLst>
               <a:ext uri="{FF2B5EF4-FFF2-40B4-BE49-F238E27FC236}">
-                <a16:creationId xmlns:a16="http://schemas.microsoft.com/office/drawing/2014/main" id="{A8C80828-0849-A8BA-2CB1-864BD54D231E}"/>
+                <a16:creationId xmlns:a16="http://schemas.microsoft.com/office/drawing/2014/main" id="{11377E4C-5B53-F91D-1E60-392F0146EEDD}"/>
               </a:ext>
             </a:extLst>
           </p:cNvPr>
@@ -14919,7 +14912,7 @@
     </p:spTree>
     <p:extLst>
       <p:ext uri="{BB962C8B-B14F-4D97-AF65-F5344CB8AC3E}">
-        <p14:creationId xmlns:p14="http://schemas.microsoft.com/office/powerpoint/2010/main" val="1073048249"/>
+        <p14:creationId xmlns:p14="http://schemas.microsoft.com/office/powerpoint/2010/main" val="258451369"/>
       </p:ext>
     </p:extLst>
   </p:cSld>
@@ -14951,7 +14944,7 @@
           <p:cNvPr id="2" name="正方形/長方形 1">
             <a:extLst>
               <a:ext uri="{FF2B5EF4-FFF2-40B4-BE49-F238E27FC236}">
-                <a16:creationId xmlns:a16="http://schemas.microsoft.com/office/drawing/2014/main" id="{09033F73-C1F0-65BA-229E-686C06D4743B}"/>
+                <a16:creationId xmlns:a16="http://schemas.microsoft.com/office/drawing/2014/main" id="{46E80978-4C8D-A91C-B6FA-3C98FE1C4586}"/>
               </a:ext>
             </a:extLst>
           </p:cNvPr>
@@ -15019,7 +15012,7 @@
           <p:cNvPr id="3" name="正方形/長方形 2">
             <a:extLst>
               <a:ext uri="{FF2B5EF4-FFF2-40B4-BE49-F238E27FC236}">
-                <a16:creationId xmlns:a16="http://schemas.microsoft.com/office/drawing/2014/main" id="{17F187AE-A8C0-5CB5-00B7-37BEE325AB83}"/>
+                <a16:creationId xmlns:a16="http://schemas.microsoft.com/office/drawing/2014/main" id="{223F85D4-4F01-25A3-E2A1-FFE99F054DDB}"/>
               </a:ext>
             </a:extLst>
           </p:cNvPr>
@@ -15087,7 +15080,7 @@
           <p:cNvPr id="4" name="テキスト ボックス 3">
             <a:extLst>
               <a:ext uri="{FF2B5EF4-FFF2-40B4-BE49-F238E27FC236}">
-                <a16:creationId xmlns:a16="http://schemas.microsoft.com/office/drawing/2014/main" id="{119601D4-9DCD-EF72-827E-1B9C61EB4964}"/>
+                <a16:creationId xmlns:a16="http://schemas.microsoft.com/office/drawing/2014/main" id="{24E541B1-6FC0-241B-2338-9F1398A2D962}"/>
               </a:ext>
             </a:extLst>
           </p:cNvPr>
@@ -15140,7 +15133,7 @@
           <p:cNvPr id="5" name="テキスト ボックス 4">
             <a:extLst>
               <a:ext uri="{FF2B5EF4-FFF2-40B4-BE49-F238E27FC236}">
-                <a16:creationId xmlns:a16="http://schemas.microsoft.com/office/drawing/2014/main" id="{EAAB0AD9-146E-00E2-76E6-07752CA093BB}"/>
+                <a16:creationId xmlns:a16="http://schemas.microsoft.com/office/drawing/2014/main" id="{DC6F961E-CE86-9B5E-12B0-E53ADFEE3DF8}"/>
               </a:ext>
             </a:extLst>
           </p:cNvPr>
@@ -15206,7 +15199,7 @@
           <p:cNvPr id="6" name="正方形/長方形 5">
             <a:extLst>
               <a:ext uri="{FF2B5EF4-FFF2-40B4-BE49-F238E27FC236}">
-                <a16:creationId xmlns:a16="http://schemas.microsoft.com/office/drawing/2014/main" id="{55EC1E80-BE6D-35DF-DCBF-2F717EB1E09C}"/>
+                <a16:creationId xmlns:a16="http://schemas.microsoft.com/office/drawing/2014/main" id="{9098A252-965B-0E12-34D7-D60430AD7FA4}"/>
               </a:ext>
             </a:extLst>
           </p:cNvPr>
@@ -15274,7 +15267,7 @@
           <p:cNvPr id="7" name="テキスト ボックス 6">
             <a:extLst>
               <a:ext uri="{FF2B5EF4-FFF2-40B4-BE49-F238E27FC236}">
-                <a16:creationId xmlns:a16="http://schemas.microsoft.com/office/drawing/2014/main" id="{96C80746-A88B-0EED-F084-E1800C1864BF}"/>
+                <a16:creationId xmlns:a16="http://schemas.microsoft.com/office/drawing/2014/main" id="{985B18FC-57C1-054F-9E73-0F4392F5E35D}"/>
               </a:ext>
             </a:extLst>
           </p:cNvPr>
@@ -15284,7 +15277,7 @@
         <p:spPr>
           <a:xfrm>
             <a:off x="812800" y="6375400"/>
-            <a:ext cx="5080000" cy="177800"/>
+            <a:ext cx="6604000" cy="177800"/>
           </a:xfrm>
           <a:prstGeom prst="rect">
             <a:avLst/>
@@ -15310,7 +15303,7 @@
                 <a:latin typeface="Yu Gothic UI" panose="020B0500000000000000" pitchFamily="50" charset="-128"/>
                 <a:ea typeface="Yu Gothic UI" panose="020B0500000000000000" pitchFamily="50" charset="-128"/>
               </a:rPr>
-              <a:t>簡易デジタルサイネージ ｜ 操作ガイド</a:t>
+              <a:t>簡単！シンプル！サイネージ ｜ 操作ガイド</a:t>
             </a:r>
           </a:p>
         </p:txBody>
@@ -15320,7 +15313,7 @@
           <p:cNvPr id="8" name="テキスト ボックス 7">
             <a:extLst>
               <a:ext uri="{FF2B5EF4-FFF2-40B4-BE49-F238E27FC236}">
-                <a16:creationId xmlns:a16="http://schemas.microsoft.com/office/drawing/2014/main" id="{22A63906-BBA4-CC6F-EC13-7215F29BA1AA}"/>
+                <a16:creationId xmlns:a16="http://schemas.microsoft.com/office/drawing/2014/main" id="{2D5B95AD-0E9B-7B17-72AB-F529F1F82023}"/>
               </a:ext>
             </a:extLst>
           </p:cNvPr>
@@ -15373,7 +15366,7 @@
           <p:cNvPr id="9" name="四角形: 角を丸くする 8">
             <a:extLst>
               <a:ext uri="{FF2B5EF4-FFF2-40B4-BE49-F238E27FC236}">
-                <a16:creationId xmlns:a16="http://schemas.microsoft.com/office/drawing/2014/main" id="{011E6EEA-2C7A-0323-D76D-ADE8613C2C35}"/>
+                <a16:creationId xmlns:a16="http://schemas.microsoft.com/office/drawing/2014/main" id="{17BFDF8E-0DAC-95DF-44AA-FFDB48DD8F00}"/>
               </a:ext>
             </a:extLst>
           </p:cNvPr>
@@ -15443,7 +15436,7 @@
           <p:cNvPr id="10" name="楕円 9">
             <a:extLst>
               <a:ext uri="{FF2B5EF4-FFF2-40B4-BE49-F238E27FC236}">
-                <a16:creationId xmlns:a16="http://schemas.microsoft.com/office/drawing/2014/main" id="{7D29F801-3A92-4B88-C30B-576ADDDF9A0C}"/>
+                <a16:creationId xmlns:a16="http://schemas.microsoft.com/office/drawing/2014/main" id="{0D1D4DE4-928D-4E90-0B92-C6BF98E67113}"/>
               </a:ext>
             </a:extLst>
           </p:cNvPr>
@@ -15511,7 +15504,7 @@
           <p:cNvPr id="11" name="テキスト ボックス 10">
             <a:extLst>
               <a:ext uri="{FF2B5EF4-FFF2-40B4-BE49-F238E27FC236}">
-                <a16:creationId xmlns:a16="http://schemas.microsoft.com/office/drawing/2014/main" id="{1AEBCEF8-8151-C70D-0FED-C6FCD2429DAC}"/>
+                <a16:creationId xmlns:a16="http://schemas.microsoft.com/office/drawing/2014/main" id="{CEEEBEC7-1FAE-3A59-D8CC-F245657A2F0A}"/>
               </a:ext>
             </a:extLst>
           </p:cNvPr>
@@ -15564,7 +15557,7 @@
           <p:cNvPr id="12" name="テキスト ボックス 11">
             <a:extLst>
               <a:ext uri="{FF2B5EF4-FFF2-40B4-BE49-F238E27FC236}">
-                <a16:creationId xmlns:a16="http://schemas.microsoft.com/office/drawing/2014/main" id="{DAEDE163-E0BD-9A21-A496-902BF221ADEF}"/>
+                <a16:creationId xmlns:a16="http://schemas.microsoft.com/office/drawing/2014/main" id="{083A6C9F-DA7C-9483-FCB3-D42FC04543D4}"/>
               </a:ext>
             </a:extLst>
           </p:cNvPr>
@@ -15610,7 +15603,7 @@
           <p:cNvPr id="13" name="テキスト ボックス 12">
             <a:extLst>
               <a:ext uri="{FF2B5EF4-FFF2-40B4-BE49-F238E27FC236}">
-                <a16:creationId xmlns:a16="http://schemas.microsoft.com/office/drawing/2014/main" id="{C1CB7DC1-D8D5-073C-63DB-4F403315D70E}"/>
+                <a16:creationId xmlns:a16="http://schemas.microsoft.com/office/drawing/2014/main" id="{4E488C4C-2C82-5B0C-5EA4-F2BB883CAD8E}"/>
               </a:ext>
             </a:extLst>
           </p:cNvPr>
@@ -15656,7 +15649,7 @@
           <p:cNvPr id="14" name="四角形: 角を丸くする 13">
             <a:extLst>
               <a:ext uri="{FF2B5EF4-FFF2-40B4-BE49-F238E27FC236}">
-                <a16:creationId xmlns:a16="http://schemas.microsoft.com/office/drawing/2014/main" id="{05F646E4-6400-3FA1-F4B1-A5C0EB7C9F09}"/>
+                <a16:creationId xmlns:a16="http://schemas.microsoft.com/office/drawing/2014/main" id="{6768BDCD-BFF5-5144-E6F0-7AA8482A59F3}"/>
               </a:ext>
             </a:extLst>
           </p:cNvPr>
@@ -15726,7 +15719,7 @@
           <p:cNvPr id="15" name="楕円 14">
             <a:extLst>
               <a:ext uri="{FF2B5EF4-FFF2-40B4-BE49-F238E27FC236}">
-                <a16:creationId xmlns:a16="http://schemas.microsoft.com/office/drawing/2014/main" id="{A9249339-B907-433A-0DF9-9CAA9BC8E77A}"/>
+                <a16:creationId xmlns:a16="http://schemas.microsoft.com/office/drawing/2014/main" id="{6B7B74B6-B93B-BF22-C483-15B9661D956E}"/>
               </a:ext>
             </a:extLst>
           </p:cNvPr>
@@ -15794,7 +15787,7 @@
           <p:cNvPr id="16" name="テキスト ボックス 15">
             <a:extLst>
               <a:ext uri="{FF2B5EF4-FFF2-40B4-BE49-F238E27FC236}">
-                <a16:creationId xmlns:a16="http://schemas.microsoft.com/office/drawing/2014/main" id="{329F091C-5305-BBC5-31DF-8DFCD0FCB7DB}"/>
+                <a16:creationId xmlns:a16="http://schemas.microsoft.com/office/drawing/2014/main" id="{5E4282BF-FBBB-D922-D3CE-C32E280D2EFB}"/>
               </a:ext>
             </a:extLst>
           </p:cNvPr>
@@ -15847,7 +15840,7 @@
           <p:cNvPr id="17" name="テキスト ボックス 16">
             <a:extLst>
               <a:ext uri="{FF2B5EF4-FFF2-40B4-BE49-F238E27FC236}">
-                <a16:creationId xmlns:a16="http://schemas.microsoft.com/office/drawing/2014/main" id="{E43EA77B-3870-74AB-EF4B-AE9CD1820327}"/>
+                <a16:creationId xmlns:a16="http://schemas.microsoft.com/office/drawing/2014/main" id="{F66152B7-F6D0-B273-1023-C7C938BAB8EE}"/>
               </a:ext>
             </a:extLst>
           </p:cNvPr>
@@ -15893,7 +15886,7 @@
           <p:cNvPr id="18" name="テキスト ボックス 17">
             <a:extLst>
               <a:ext uri="{FF2B5EF4-FFF2-40B4-BE49-F238E27FC236}">
-                <a16:creationId xmlns:a16="http://schemas.microsoft.com/office/drawing/2014/main" id="{7B25D6DC-A6D3-ED75-D73A-D7086BC6833E}"/>
+                <a16:creationId xmlns:a16="http://schemas.microsoft.com/office/drawing/2014/main" id="{CB0CF7CF-0B3C-B67F-7AA2-F538D3A9A5FA}"/>
               </a:ext>
             </a:extLst>
           </p:cNvPr>
@@ -15999,7 +15992,7 @@
           <p:cNvPr id="19" name="四角形: 角を丸くする 18">
             <a:extLst>
               <a:ext uri="{FF2B5EF4-FFF2-40B4-BE49-F238E27FC236}">
-                <a16:creationId xmlns:a16="http://schemas.microsoft.com/office/drawing/2014/main" id="{799A478D-D68B-5A3A-F898-C1AF0E58F796}"/>
+                <a16:creationId xmlns:a16="http://schemas.microsoft.com/office/drawing/2014/main" id="{6B990316-08F8-2010-802F-50C54C6720DD}"/>
               </a:ext>
             </a:extLst>
           </p:cNvPr>
@@ -16069,7 +16062,7 @@
           <p:cNvPr id="20" name="楕円 19">
             <a:extLst>
               <a:ext uri="{FF2B5EF4-FFF2-40B4-BE49-F238E27FC236}">
-                <a16:creationId xmlns:a16="http://schemas.microsoft.com/office/drawing/2014/main" id="{DA866A32-9DA2-EA6C-1C73-BC99A9328447}"/>
+                <a16:creationId xmlns:a16="http://schemas.microsoft.com/office/drawing/2014/main" id="{5CAA7422-4AC2-E4BE-7C75-40CCB3E8A1A3}"/>
               </a:ext>
             </a:extLst>
           </p:cNvPr>
@@ -16137,7 +16130,7 @@
           <p:cNvPr id="21" name="テキスト ボックス 20">
             <a:extLst>
               <a:ext uri="{FF2B5EF4-FFF2-40B4-BE49-F238E27FC236}">
-                <a16:creationId xmlns:a16="http://schemas.microsoft.com/office/drawing/2014/main" id="{F4553616-8560-10AF-5C06-BE189C100AA5}"/>
+                <a16:creationId xmlns:a16="http://schemas.microsoft.com/office/drawing/2014/main" id="{5B627BF7-CFBF-7508-0395-0F69622EB3C7}"/>
               </a:ext>
             </a:extLst>
           </p:cNvPr>
@@ -16190,7 +16183,7 @@
           <p:cNvPr id="22" name="テキスト ボックス 21">
             <a:extLst>
               <a:ext uri="{FF2B5EF4-FFF2-40B4-BE49-F238E27FC236}">
-                <a16:creationId xmlns:a16="http://schemas.microsoft.com/office/drawing/2014/main" id="{9F50CB97-EDFE-66B8-1BF5-D65DEF236EA4}"/>
+                <a16:creationId xmlns:a16="http://schemas.microsoft.com/office/drawing/2014/main" id="{C25BC35D-4E59-3F27-3432-A273E75FDBAD}"/>
               </a:ext>
             </a:extLst>
           </p:cNvPr>
@@ -16256,7 +16249,7 @@
           <p:cNvPr id="23" name="テキスト ボックス 22">
             <a:extLst>
               <a:ext uri="{FF2B5EF4-FFF2-40B4-BE49-F238E27FC236}">
-                <a16:creationId xmlns:a16="http://schemas.microsoft.com/office/drawing/2014/main" id="{181AFFCE-1B35-E742-FFAE-A5938FD76568}"/>
+                <a16:creationId xmlns:a16="http://schemas.microsoft.com/office/drawing/2014/main" id="{86C163FA-90B8-3AD6-1B29-A78F4EC148D2}"/>
               </a:ext>
             </a:extLst>
           </p:cNvPr>
@@ -16320,7 +16313,7 @@
     </p:spTree>
     <p:extLst>
       <p:ext uri="{BB962C8B-B14F-4D97-AF65-F5344CB8AC3E}">
-        <p14:creationId xmlns:p14="http://schemas.microsoft.com/office/powerpoint/2010/main" val="2657259350"/>
+        <p14:creationId xmlns:p14="http://schemas.microsoft.com/office/powerpoint/2010/main" val="273960391"/>
       </p:ext>
     </p:extLst>
   </p:cSld>
@@ -16352,7 +16345,7 @@
           <p:cNvPr id="2" name="正方形/長方形 1">
             <a:extLst>
               <a:ext uri="{FF2B5EF4-FFF2-40B4-BE49-F238E27FC236}">
-                <a16:creationId xmlns:a16="http://schemas.microsoft.com/office/drawing/2014/main" id="{0A2A5BDE-D5F3-9F46-1320-A23A1D1303FB}"/>
+                <a16:creationId xmlns:a16="http://schemas.microsoft.com/office/drawing/2014/main" id="{8BD42442-8F25-93C4-C446-B45EE4874DD3}"/>
               </a:ext>
             </a:extLst>
           </p:cNvPr>
@@ -16420,7 +16413,7 @@
           <p:cNvPr id="3" name="正方形/長方形 2">
             <a:extLst>
               <a:ext uri="{FF2B5EF4-FFF2-40B4-BE49-F238E27FC236}">
-                <a16:creationId xmlns:a16="http://schemas.microsoft.com/office/drawing/2014/main" id="{DA3ACA24-4A1D-2BDA-8CDE-FA3000F0810E}"/>
+                <a16:creationId xmlns:a16="http://schemas.microsoft.com/office/drawing/2014/main" id="{56FC5704-910E-3852-92CE-92D493F1CCD8}"/>
               </a:ext>
             </a:extLst>
           </p:cNvPr>
@@ -16488,7 +16481,7 @@
           <p:cNvPr id="4" name="テキスト ボックス 3">
             <a:extLst>
               <a:ext uri="{FF2B5EF4-FFF2-40B4-BE49-F238E27FC236}">
-                <a16:creationId xmlns:a16="http://schemas.microsoft.com/office/drawing/2014/main" id="{150839C0-0D8C-73CE-CDD5-EF67E2A14E85}"/>
+                <a16:creationId xmlns:a16="http://schemas.microsoft.com/office/drawing/2014/main" id="{8318A030-4230-A91A-C5A1-C39D5B7BD15E}"/>
               </a:ext>
             </a:extLst>
           </p:cNvPr>
@@ -16541,7 +16534,7 @@
           <p:cNvPr id="5" name="テキスト ボックス 4">
             <a:extLst>
               <a:ext uri="{FF2B5EF4-FFF2-40B4-BE49-F238E27FC236}">
-                <a16:creationId xmlns:a16="http://schemas.microsoft.com/office/drawing/2014/main" id="{177B2E6C-1B36-18D7-34A8-1FFF6B8AA2E5}"/>
+                <a16:creationId xmlns:a16="http://schemas.microsoft.com/office/drawing/2014/main" id="{172833A0-8CBD-1AAA-6181-B9028FE6B720}"/>
               </a:ext>
             </a:extLst>
           </p:cNvPr>
@@ -16607,7 +16600,7 @@
           <p:cNvPr id="6" name="正方形/長方形 5">
             <a:extLst>
               <a:ext uri="{FF2B5EF4-FFF2-40B4-BE49-F238E27FC236}">
-                <a16:creationId xmlns:a16="http://schemas.microsoft.com/office/drawing/2014/main" id="{97F54443-E8E5-7CFB-087E-282BD22F3F33}"/>
+                <a16:creationId xmlns:a16="http://schemas.microsoft.com/office/drawing/2014/main" id="{8D6B6BEE-12C5-D6B6-F90E-88C3AF7B36CA}"/>
               </a:ext>
             </a:extLst>
           </p:cNvPr>
@@ -16675,7 +16668,7 @@
           <p:cNvPr id="7" name="テキスト ボックス 6">
             <a:extLst>
               <a:ext uri="{FF2B5EF4-FFF2-40B4-BE49-F238E27FC236}">
-                <a16:creationId xmlns:a16="http://schemas.microsoft.com/office/drawing/2014/main" id="{2155F9B9-929B-A785-0010-470218EB4081}"/>
+                <a16:creationId xmlns:a16="http://schemas.microsoft.com/office/drawing/2014/main" id="{B86A0A23-B03C-2178-F377-D7BE98EE1276}"/>
               </a:ext>
             </a:extLst>
           </p:cNvPr>
@@ -16685,7 +16678,7 @@
         <p:spPr>
           <a:xfrm>
             <a:off x="812800" y="6375400"/>
-            <a:ext cx="5080000" cy="177800"/>
+            <a:ext cx="6604000" cy="177800"/>
           </a:xfrm>
           <a:prstGeom prst="rect">
             <a:avLst/>
@@ -16711,7 +16704,7 @@
                 <a:latin typeface="Yu Gothic UI" panose="020B0500000000000000" pitchFamily="50" charset="-128"/>
                 <a:ea typeface="Yu Gothic UI" panose="020B0500000000000000" pitchFamily="50" charset="-128"/>
               </a:rPr>
-              <a:t>簡易デジタルサイネージ ｜ 操作ガイド</a:t>
+              <a:t>簡単！シンプル！サイネージ ｜ 操作ガイド</a:t>
             </a:r>
           </a:p>
         </p:txBody>
@@ -16721,7 +16714,7 @@
           <p:cNvPr id="8" name="テキスト ボックス 7">
             <a:extLst>
               <a:ext uri="{FF2B5EF4-FFF2-40B4-BE49-F238E27FC236}">
-                <a16:creationId xmlns:a16="http://schemas.microsoft.com/office/drawing/2014/main" id="{1AB2A4BC-DD1A-1B5B-B4EB-DC57E3B7CC36}"/>
+                <a16:creationId xmlns:a16="http://schemas.microsoft.com/office/drawing/2014/main" id="{BD1C4708-485C-31F8-A790-B3CEABE7AED1}"/>
               </a:ext>
             </a:extLst>
           </p:cNvPr>
@@ -16774,7 +16767,7 @@
           <p:cNvPr id="9" name="四角形: 角を丸くする 8">
             <a:extLst>
               <a:ext uri="{FF2B5EF4-FFF2-40B4-BE49-F238E27FC236}">
-                <a16:creationId xmlns:a16="http://schemas.microsoft.com/office/drawing/2014/main" id="{17114E96-9257-C768-0758-C82453B2C061}"/>
+                <a16:creationId xmlns:a16="http://schemas.microsoft.com/office/drawing/2014/main" id="{39D0F87B-68A7-1291-F57B-B20167DD4F19}"/>
               </a:ext>
             </a:extLst>
           </p:cNvPr>
@@ -16844,7 +16837,7 @@
           <p:cNvPr id="10" name="楕円 9">
             <a:extLst>
               <a:ext uri="{FF2B5EF4-FFF2-40B4-BE49-F238E27FC236}">
-                <a16:creationId xmlns:a16="http://schemas.microsoft.com/office/drawing/2014/main" id="{BBEE65CC-C945-4874-FDD8-7E7A532BA00D}"/>
+                <a16:creationId xmlns:a16="http://schemas.microsoft.com/office/drawing/2014/main" id="{C3E83695-C8FC-0F03-2F37-467DDDCADC32}"/>
               </a:ext>
             </a:extLst>
           </p:cNvPr>
@@ -16912,7 +16905,7 @@
           <p:cNvPr id="11" name="テキスト ボックス 10">
             <a:extLst>
               <a:ext uri="{FF2B5EF4-FFF2-40B4-BE49-F238E27FC236}">
-                <a16:creationId xmlns:a16="http://schemas.microsoft.com/office/drawing/2014/main" id="{BF533B3A-C648-81C3-A9E0-918212EBEB82}"/>
+                <a16:creationId xmlns:a16="http://schemas.microsoft.com/office/drawing/2014/main" id="{E35B5F30-7AAE-2AEC-0000-7BE21CADFA2D}"/>
               </a:ext>
             </a:extLst>
           </p:cNvPr>
@@ -16965,7 +16958,7 @@
           <p:cNvPr id="12" name="テキスト ボックス 11">
             <a:extLst>
               <a:ext uri="{FF2B5EF4-FFF2-40B4-BE49-F238E27FC236}">
-                <a16:creationId xmlns:a16="http://schemas.microsoft.com/office/drawing/2014/main" id="{5F17C627-9B73-A78E-7D39-979CE61C9D0A}"/>
+                <a16:creationId xmlns:a16="http://schemas.microsoft.com/office/drawing/2014/main" id="{CDA48E56-CB19-76C7-9F4C-B0B30600361D}"/>
               </a:ext>
             </a:extLst>
           </p:cNvPr>
@@ -17011,7 +17004,7 @@
           <p:cNvPr id="13" name="テキスト ボックス 12">
             <a:extLst>
               <a:ext uri="{FF2B5EF4-FFF2-40B4-BE49-F238E27FC236}">
-                <a16:creationId xmlns:a16="http://schemas.microsoft.com/office/drawing/2014/main" id="{EBE8A366-AA47-5B5F-73E4-978EB524684B}"/>
+                <a16:creationId xmlns:a16="http://schemas.microsoft.com/office/drawing/2014/main" id="{7CAC797F-C747-0148-05A1-FF61097C5493}"/>
               </a:ext>
             </a:extLst>
           </p:cNvPr>
@@ -17115,7 +17108,7 @@
     </p:spTree>
     <p:extLst>
       <p:ext uri="{BB962C8B-B14F-4D97-AF65-F5344CB8AC3E}">
-        <p14:creationId xmlns:p14="http://schemas.microsoft.com/office/powerpoint/2010/main" val="3877405989"/>
+        <p14:creationId xmlns:p14="http://schemas.microsoft.com/office/powerpoint/2010/main" val="3690012680"/>
       </p:ext>
     </p:extLst>
   </p:cSld>
@@ -17147,7 +17140,7 @@
           <p:cNvPr id="2" name="正方形/長方形 1">
             <a:extLst>
               <a:ext uri="{FF2B5EF4-FFF2-40B4-BE49-F238E27FC236}">
-                <a16:creationId xmlns:a16="http://schemas.microsoft.com/office/drawing/2014/main" id="{9625DF34-59DC-9DAB-F02B-BA3C8E88DD3A}"/>
+                <a16:creationId xmlns:a16="http://schemas.microsoft.com/office/drawing/2014/main" id="{97FE98E4-5B56-7077-3A78-35CFD57B4F2B}"/>
               </a:ext>
             </a:extLst>
           </p:cNvPr>
@@ -17215,7 +17208,7 @@
           <p:cNvPr id="3" name="正方形/長方形 2">
             <a:extLst>
               <a:ext uri="{FF2B5EF4-FFF2-40B4-BE49-F238E27FC236}">
-                <a16:creationId xmlns:a16="http://schemas.microsoft.com/office/drawing/2014/main" id="{A005EED2-A6CF-BEEA-52D4-4C1F4DBE1B9C}"/>
+                <a16:creationId xmlns:a16="http://schemas.microsoft.com/office/drawing/2014/main" id="{129A47A6-E413-D27C-C759-FC8467EC7BE0}"/>
               </a:ext>
             </a:extLst>
           </p:cNvPr>
@@ -17283,7 +17276,7 @@
           <p:cNvPr id="4" name="テキスト ボックス 3">
             <a:extLst>
               <a:ext uri="{FF2B5EF4-FFF2-40B4-BE49-F238E27FC236}">
-                <a16:creationId xmlns:a16="http://schemas.microsoft.com/office/drawing/2014/main" id="{2FCC1559-7713-0717-7039-D2BC205FC8DE}"/>
+                <a16:creationId xmlns:a16="http://schemas.microsoft.com/office/drawing/2014/main" id="{D7331F67-7022-E07A-9F4E-71B61FA3C894}"/>
               </a:ext>
             </a:extLst>
           </p:cNvPr>
@@ -17336,7 +17329,7 @@
           <p:cNvPr id="5" name="テキスト ボックス 4">
             <a:extLst>
               <a:ext uri="{FF2B5EF4-FFF2-40B4-BE49-F238E27FC236}">
-                <a16:creationId xmlns:a16="http://schemas.microsoft.com/office/drawing/2014/main" id="{976523C5-C463-9D52-F6F0-5A02523F3FA2}"/>
+                <a16:creationId xmlns:a16="http://schemas.microsoft.com/office/drawing/2014/main" id="{9BDBE855-3DCA-FEDD-1342-6D50A0296854}"/>
               </a:ext>
             </a:extLst>
           </p:cNvPr>
@@ -17382,7 +17375,7 @@
           <p:cNvPr id="6" name="正方形/長方形 5">
             <a:extLst>
               <a:ext uri="{FF2B5EF4-FFF2-40B4-BE49-F238E27FC236}">
-                <a16:creationId xmlns:a16="http://schemas.microsoft.com/office/drawing/2014/main" id="{5EC17D29-B3D2-2A23-3B52-DE9EAC6D2BBC}"/>
+                <a16:creationId xmlns:a16="http://schemas.microsoft.com/office/drawing/2014/main" id="{8D9567B1-5597-8238-2858-A77F0255F742}"/>
               </a:ext>
             </a:extLst>
           </p:cNvPr>
@@ -17450,7 +17443,7 @@
           <p:cNvPr id="7" name="テキスト ボックス 6">
             <a:extLst>
               <a:ext uri="{FF2B5EF4-FFF2-40B4-BE49-F238E27FC236}">
-                <a16:creationId xmlns:a16="http://schemas.microsoft.com/office/drawing/2014/main" id="{7C3B99CD-F1BB-3BDA-DB7F-05D1B8ED522D}"/>
+                <a16:creationId xmlns:a16="http://schemas.microsoft.com/office/drawing/2014/main" id="{6C307F47-2A5B-8384-2496-05950539D731}"/>
               </a:ext>
             </a:extLst>
           </p:cNvPr>
@@ -17460,7 +17453,7 @@
         <p:spPr>
           <a:xfrm>
             <a:off x="812800" y="6375400"/>
-            <a:ext cx="5080000" cy="177800"/>
+            <a:ext cx="6604000" cy="177800"/>
           </a:xfrm>
           <a:prstGeom prst="rect">
             <a:avLst/>
@@ -17486,7 +17479,7 @@
                 <a:latin typeface="Yu Gothic UI" panose="020B0500000000000000" pitchFamily="50" charset="-128"/>
                 <a:ea typeface="Yu Gothic UI" panose="020B0500000000000000" pitchFamily="50" charset="-128"/>
               </a:rPr>
-              <a:t>簡易デジタルサイネージ ｜ 操作ガイド</a:t>
+              <a:t>簡単！シンプル！サイネージ ｜ 操作ガイド</a:t>
             </a:r>
           </a:p>
         </p:txBody>
@@ -17496,7 +17489,7 @@
           <p:cNvPr id="8" name="テキスト ボックス 7">
             <a:extLst>
               <a:ext uri="{FF2B5EF4-FFF2-40B4-BE49-F238E27FC236}">
-                <a16:creationId xmlns:a16="http://schemas.microsoft.com/office/drawing/2014/main" id="{37D2BB41-F5DD-2957-B0FC-C2C0277B19E7}"/>
+                <a16:creationId xmlns:a16="http://schemas.microsoft.com/office/drawing/2014/main" id="{D8BBB233-F95F-9B1D-5758-82DC92BDC172}"/>
               </a:ext>
             </a:extLst>
           </p:cNvPr>
@@ -17549,7 +17542,7 @@
           <p:cNvPr id="9" name="テキスト ボックス 8">
             <a:extLst>
               <a:ext uri="{FF2B5EF4-FFF2-40B4-BE49-F238E27FC236}">
-                <a16:creationId xmlns:a16="http://schemas.microsoft.com/office/drawing/2014/main" id="{4FCF592C-3D77-E1CC-47D7-0AB905B97077}"/>
+                <a16:creationId xmlns:a16="http://schemas.microsoft.com/office/drawing/2014/main" id="{275B079E-5BD8-2BCF-80B6-5E30BC6F8B83}"/>
               </a:ext>
             </a:extLst>
           </p:cNvPr>
@@ -17595,7 +17588,7 @@
           <p:cNvPr id="10" name="表 9">
             <a:extLst>
               <a:ext uri="{FF2B5EF4-FFF2-40B4-BE49-F238E27FC236}">
-                <a16:creationId xmlns:a16="http://schemas.microsoft.com/office/drawing/2014/main" id="{1657DDB5-356D-11FB-99DE-D858B6FB9CBD}"/>
+                <a16:creationId xmlns:a16="http://schemas.microsoft.com/office/drawing/2014/main" id="{8EF1F93A-A6A2-0DCE-1C41-F4F317E1EB88}"/>
               </a:ext>
             </a:extLst>
           </p:cNvPr>
@@ -17605,7 +17598,7 @@
           <p:nvPr>
             <p:extLst>
               <p:ext uri="{D42A27DB-BD31-4B8C-83A1-F6EECF244321}">
-                <p14:modId xmlns:p14="http://schemas.microsoft.com/office/powerpoint/2010/main" val="1984571974"/>
+                <p14:modId xmlns:p14="http://schemas.microsoft.com/office/powerpoint/2010/main" val="1972125221"/>
               </p:ext>
             </p:extLst>
           </p:nvPr>
@@ -17624,14 +17617,14 @@
                 <a:gridCol w="1905000">
                   <a:extLst>
                     <a:ext uri="{9D8B030D-6E8A-4147-A177-3AD203B41FA5}">
-                      <a16:colId xmlns:a16="http://schemas.microsoft.com/office/drawing/2014/main" val="2573741416"/>
+                      <a16:colId xmlns:a16="http://schemas.microsoft.com/office/drawing/2014/main" val="1276524973"/>
                     </a:ext>
                   </a:extLst>
                 </a:gridCol>
                 <a:gridCol w="3225800">
                   <a:extLst>
                     <a:ext uri="{9D8B030D-6E8A-4147-A177-3AD203B41FA5}">
-                      <a16:colId xmlns:a16="http://schemas.microsoft.com/office/drawing/2014/main" val="3916735040"/>
+                      <a16:colId xmlns:a16="http://schemas.microsoft.com/office/drawing/2014/main" val="2889801482"/>
                     </a:ext>
                   </a:extLst>
                 </a:gridCol>
@@ -17705,7 +17698,7 @@
                 </a:tc>
                 <a:extLst>
                   <a:ext uri="{0D108BD9-81ED-4DB2-BD59-A6C34878D82A}">
-                    <a16:rowId xmlns:a16="http://schemas.microsoft.com/office/drawing/2014/main" val="4250050605"/>
+                    <a16:rowId xmlns:a16="http://schemas.microsoft.com/office/drawing/2014/main" val="298932322"/>
                   </a:ext>
                 </a:extLst>
               </a:tr>
@@ -17788,7 +17781,7 @@
                 </a:tc>
                 <a:extLst>
                   <a:ext uri="{0D108BD9-81ED-4DB2-BD59-A6C34878D82A}">
-                    <a16:rowId xmlns:a16="http://schemas.microsoft.com/office/drawing/2014/main" val="1091914843"/>
+                    <a16:rowId xmlns:a16="http://schemas.microsoft.com/office/drawing/2014/main" val="3040950076"/>
                   </a:ext>
                 </a:extLst>
               </a:tr>
@@ -17871,7 +17864,7 @@
                 </a:tc>
                 <a:extLst>
                   <a:ext uri="{0D108BD9-81ED-4DB2-BD59-A6C34878D82A}">
-                    <a16:rowId xmlns:a16="http://schemas.microsoft.com/office/drawing/2014/main" val="1203589176"/>
+                    <a16:rowId xmlns:a16="http://schemas.microsoft.com/office/drawing/2014/main" val="2454621479"/>
                   </a:ext>
                 </a:extLst>
               </a:tr>
@@ -17974,7 +17967,7 @@
                 </a:tc>
                 <a:extLst>
                   <a:ext uri="{0D108BD9-81ED-4DB2-BD59-A6C34878D82A}">
-                    <a16:rowId xmlns:a16="http://schemas.microsoft.com/office/drawing/2014/main" val="23229540"/>
+                    <a16:rowId xmlns:a16="http://schemas.microsoft.com/office/drawing/2014/main" val="1322423619"/>
                   </a:ext>
                 </a:extLst>
               </a:tr>
@@ -18077,7 +18070,7 @@
                 </a:tc>
                 <a:extLst>
                   <a:ext uri="{0D108BD9-81ED-4DB2-BD59-A6C34878D82A}">
-                    <a16:rowId xmlns:a16="http://schemas.microsoft.com/office/drawing/2014/main" val="2267318792"/>
+                    <a16:rowId xmlns:a16="http://schemas.microsoft.com/office/drawing/2014/main" val="2449523256"/>
                   </a:ext>
                 </a:extLst>
               </a:tr>
@@ -18180,7 +18173,7 @@
                 </a:tc>
                 <a:extLst>
                   <a:ext uri="{0D108BD9-81ED-4DB2-BD59-A6C34878D82A}">
-                    <a16:rowId xmlns:a16="http://schemas.microsoft.com/office/drawing/2014/main" val="4286867235"/>
+                    <a16:rowId xmlns:a16="http://schemas.microsoft.com/office/drawing/2014/main" val="1947773127"/>
                   </a:ext>
                 </a:extLst>
               </a:tr>
@@ -18193,7 +18186,7 @@
           <p:cNvPr id="11" name="テキスト ボックス 10">
             <a:extLst>
               <a:ext uri="{FF2B5EF4-FFF2-40B4-BE49-F238E27FC236}">
-                <a16:creationId xmlns:a16="http://schemas.microsoft.com/office/drawing/2014/main" id="{433982E2-4DA6-1B31-3AA7-CB0224DA2DDF}"/>
+                <a16:creationId xmlns:a16="http://schemas.microsoft.com/office/drawing/2014/main" id="{0F67542C-980A-A227-5975-B54850B6B57E}"/>
               </a:ext>
             </a:extLst>
           </p:cNvPr>
@@ -18239,7 +18232,7 @@
           <p:cNvPr id="12" name="表 11">
             <a:extLst>
               <a:ext uri="{FF2B5EF4-FFF2-40B4-BE49-F238E27FC236}">
-                <a16:creationId xmlns:a16="http://schemas.microsoft.com/office/drawing/2014/main" id="{0C0B8DD7-6FC1-C4FE-185F-F77EDC9DFE38}"/>
+                <a16:creationId xmlns:a16="http://schemas.microsoft.com/office/drawing/2014/main" id="{67EDE27B-F935-0D93-2E1F-AA5D6BD708F8}"/>
               </a:ext>
             </a:extLst>
           </p:cNvPr>
@@ -18249,7 +18242,7 @@
           <p:nvPr>
             <p:extLst>
               <p:ext uri="{D42A27DB-BD31-4B8C-83A1-F6EECF244321}">
-                <p14:modId xmlns:p14="http://schemas.microsoft.com/office/powerpoint/2010/main" val="2030512195"/>
+                <p14:modId xmlns:p14="http://schemas.microsoft.com/office/powerpoint/2010/main" val="2897167431"/>
               </p:ext>
             </p:extLst>
           </p:nvPr>
@@ -18268,14 +18261,14 @@
                 <a:gridCol w="1905000">
                   <a:extLst>
                     <a:ext uri="{9D8B030D-6E8A-4147-A177-3AD203B41FA5}">
-                      <a16:colId xmlns:a16="http://schemas.microsoft.com/office/drawing/2014/main" val="1467100138"/>
+                      <a16:colId xmlns:a16="http://schemas.microsoft.com/office/drawing/2014/main" val="2774599461"/>
                     </a:ext>
                   </a:extLst>
                 </a:gridCol>
                 <a:gridCol w="3225800">
                   <a:extLst>
                     <a:ext uri="{9D8B030D-6E8A-4147-A177-3AD203B41FA5}">
-                      <a16:colId xmlns:a16="http://schemas.microsoft.com/office/drawing/2014/main" val="1649736606"/>
+                      <a16:colId xmlns:a16="http://schemas.microsoft.com/office/drawing/2014/main" val="4222058806"/>
                     </a:ext>
                   </a:extLst>
                 </a:gridCol>
@@ -18349,7 +18342,7 @@
                 </a:tc>
                 <a:extLst>
                   <a:ext uri="{0D108BD9-81ED-4DB2-BD59-A6C34878D82A}">
-                    <a16:rowId xmlns:a16="http://schemas.microsoft.com/office/drawing/2014/main" val="4283157529"/>
+                    <a16:rowId xmlns:a16="http://schemas.microsoft.com/office/drawing/2014/main" val="3646393109"/>
                   </a:ext>
                 </a:extLst>
               </a:tr>
@@ -18482,7 +18475,7 @@
                 </a:tc>
                 <a:extLst>
                   <a:ext uri="{0D108BD9-81ED-4DB2-BD59-A6C34878D82A}">
-                    <a16:rowId xmlns:a16="http://schemas.microsoft.com/office/drawing/2014/main" val="3950442791"/>
+                    <a16:rowId xmlns:a16="http://schemas.microsoft.com/office/drawing/2014/main" val="2339531173"/>
                   </a:ext>
                 </a:extLst>
               </a:tr>
@@ -18622,7 +18615,7 @@
                 </a:tc>
                 <a:extLst>
                   <a:ext uri="{0D108BD9-81ED-4DB2-BD59-A6C34878D82A}">
-                    <a16:rowId xmlns:a16="http://schemas.microsoft.com/office/drawing/2014/main" val="4117992481"/>
+                    <a16:rowId xmlns:a16="http://schemas.microsoft.com/office/drawing/2014/main" val="4055464951"/>
                   </a:ext>
                 </a:extLst>
               </a:tr>
@@ -18705,7 +18698,7 @@
                 </a:tc>
                 <a:extLst>
                   <a:ext uri="{0D108BD9-81ED-4DB2-BD59-A6C34878D82A}">
-                    <a16:rowId xmlns:a16="http://schemas.microsoft.com/office/drawing/2014/main" val="3939244914"/>
+                    <a16:rowId xmlns:a16="http://schemas.microsoft.com/office/drawing/2014/main" val="581849200"/>
                   </a:ext>
                 </a:extLst>
               </a:tr>
@@ -18825,7 +18818,7 @@
                 </a:tc>
                 <a:extLst>
                   <a:ext uri="{0D108BD9-81ED-4DB2-BD59-A6C34878D82A}">
-                    <a16:rowId xmlns:a16="http://schemas.microsoft.com/office/drawing/2014/main" val="2753683938"/>
+                    <a16:rowId xmlns:a16="http://schemas.microsoft.com/office/drawing/2014/main" val="3755304411"/>
                   </a:ext>
                 </a:extLst>
               </a:tr>
@@ -18908,7 +18901,7 @@
                 </a:tc>
                 <a:extLst>
                   <a:ext uri="{0D108BD9-81ED-4DB2-BD59-A6C34878D82A}">
-                    <a16:rowId xmlns:a16="http://schemas.microsoft.com/office/drawing/2014/main" val="3857687693"/>
+                    <a16:rowId xmlns:a16="http://schemas.microsoft.com/office/drawing/2014/main" val="2070272159"/>
                   </a:ext>
                 </a:extLst>
               </a:tr>
@@ -18991,7 +18984,7 @@
                 </a:tc>
                 <a:extLst>
                   <a:ext uri="{0D108BD9-81ED-4DB2-BD59-A6C34878D82A}">
-                    <a16:rowId xmlns:a16="http://schemas.microsoft.com/office/drawing/2014/main" val="1338326102"/>
+                    <a16:rowId xmlns:a16="http://schemas.microsoft.com/office/drawing/2014/main" val="3103140337"/>
                   </a:ext>
                 </a:extLst>
               </a:tr>
@@ -19002,7 +18995,7 @@
     </p:spTree>
     <p:extLst>
       <p:ext uri="{BB962C8B-B14F-4D97-AF65-F5344CB8AC3E}">
-        <p14:creationId xmlns:p14="http://schemas.microsoft.com/office/powerpoint/2010/main" val="2771662060"/>
+        <p14:creationId xmlns:p14="http://schemas.microsoft.com/office/powerpoint/2010/main" val="3095979334"/>
       </p:ext>
     </p:extLst>
   </p:cSld>
@@ -19034,7 +19027,7 @@
           <p:cNvPr id="2" name="正方形/長方形 1">
             <a:extLst>
               <a:ext uri="{FF2B5EF4-FFF2-40B4-BE49-F238E27FC236}">
-                <a16:creationId xmlns:a16="http://schemas.microsoft.com/office/drawing/2014/main" id="{2C8AC3AE-EA76-1434-1887-F2B57369BE1D}"/>
+                <a16:creationId xmlns:a16="http://schemas.microsoft.com/office/drawing/2014/main" id="{37EC668E-9514-A504-34A4-544D8133516B}"/>
               </a:ext>
             </a:extLst>
           </p:cNvPr>
@@ -19102,7 +19095,7 @@
           <p:cNvPr id="3" name="正方形/長方形 2">
             <a:extLst>
               <a:ext uri="{FF2B5EF4-FFF2-40B4-BE49-F238E27FC236}">
-                <a16:creationId xmlns:a16="http://schemas.microsoft.com/office/drawing/2014/main" id="{382E7BFE-BF37-C230-00F8-C31E999595DA}"/>
+                <a16:creationId xmlns:a16="http://schemas.microsoft.com/office/drawing/2014/main" id="{4443AA3C-1F31-8AB7-9023-A4053F5B681B}"/>
               </a:ext>
             </a:extLst>
           </p:cNvPr>
@@ -19170,7 +19163,7 @@
           <p:cNvPr id="4" name="楕円 3">
             <a:extLst>
               <a:ext uri="{FF2B5EF4-FFF2-40B4-BE49-F238E27FC236}">
-                <a16:creationId xmlns:a16="http://schemas.microsoft.com/office/drawing/2014/main" id="{928769F1-5BFC-CA81-70B7-A5B480D85020}"/>
+                <a16:creationId xmlns:a16="http://schemas.microsoft.com/office/drawing/2014/main" id="{8CF18A96-A0A9-C5D2-D2E6-F9DF76909A96}"/>
               </a:ext>
             </a:extLst>
           </p:cNvPr>
@@ -19240,7 +19233,7 @@
           <p:cNvPr id="5" name="正方形/長方形 4">
             <a:extLst>
               <a:ext uri="{FF2B5EF4-FFF2-40B4-BE49-F238E27FC236}">
-                <a16:creationId xmlns:a16="http://schemas.microsoft.com/office/drawing/2014/main" id="{72D59EE0-4E89-C0C9-835A-324CA353CE98}"/>
+                <a16:creationId xmlns:a16="http://schemas.microsoft.com/office/drawing/2014/main" id="{FD2267A8-0E53-A286-3633-9FBB23E197AF}"/>
               </a:ext>
             </a:extLst>
           </p:cNvPr>
@@ -19308,7 +19301,7 @@
           <p:cNvPr id="6" name="テキスト ボックス 5">
             <a:extLst>
               <a:ext uri="{FF2B5EF4-FFF2-40B4-BE49-F238E27FC236}">
-                <a16:creationId xmlns:a16="http://schemas.microsoft.com/office/drawing/2014/main" id="{8E29DC6C-8EDD-33F6-B299-BAC174E1FE6E}"/>
+                <a16:creationId xmlns:a16="http://schemas.microsoft.com/office/drawing/2014/main" id="{066F4381-E368-AAC5-5673-776F6D885E9E}"/>
               </a:ext>
             </a:extLst>
           </p:cNvPr>
@@ -19354,7 +19347,7 @@
           <p:cNvPr id="7" name="テキスト ボックス 6">
             <a:extLst>
               <a:ext uri="{FF2B5EF4-FFF2-40B4-BE49-F238E27FC236}">
-                <a16:creationId xmlns:a16="http://schemas.microsoft.com/office/drawing/2014/main" id="{76457AEA-2E17-2A16-AA9F-9F62A9347E83}"/>
+                <a16:creationId xmlns:a16="http://schemas.microsoft.com/office/drawing/2014/main" id="{F7A1B8A7-483B-BEC1-4FDA-04B77E7EB805}"/>
               </a:ext>
             </a:extLst>
           </p:cNvPr>
@@ -19480,7 +19473,7 @@
           <p:cNvPr id="8" name="四角形: 角を丸くする 7">
             <a:extLst>
               <a:ext uri="{FF2B5EF4-FFF2-40B4-BE49-F238E27FC236}">
-                <a16:creationId xmlns:a16="http://schemas.microsoft.com/office/drawing/2014/main" id="{330CFDDE-B1B3-BECE-6553-90B62E2FCA50}"/>
+                <a16:creationId xmlns:a16="http://schemas.microsoft.com/office/drawing/2014/main" id="{832335D1-D4DC-24DD-6554-CAACB78DB352}"/>
               </a:ext>
             </a:extLst>
           </p:cNvPr>
@@ -19550,7 +19543,7 @@
           <p:cNvPr id="9" name="正方形/長方形 8">
             <a:extLst>
               <a:ext uri="{FF2B5EF4-FFF2-40B4-BE49-F238E27FC236}">
-                <a16:creationId xmlns:a16="http://schemas.microsoft.com/office/drawing/2014/main" id="{A3F6CDFD-6FD9-F196-AD16-2AD359B66336}"/>
+                <a16:creationId xmlns:a16="http://schemas.microsoft.com/office/drawing/2014/main" id="{E556DFD6-9DE7-8091-4062-F026F2175943}"/>
               </a:ext>
             </a:extLst>
           </p:cNvPr>
@@ -19618,7 +19611,7 @@
           <p:cNvPr id="10" name="テキスト ボックス 9">
             <a:extLst>
               <a:ext uri="{FF2B5EF4-FFF2-40B4-BE49-F238E27FC236}">
-                <a16:creationId xmlns:a16="http://schemas.microsoft.com/office/drawing/2014/main" id="{5D33C0BD-546B-F7C4-83DE-91E95BCFA99F}"/>
+                <a16:creationId xmlns:a16="http://schemas.microsoft.com/office/drawing/2014/main" id="{2AE04E3C-CA4F-35FD-D2E2-8E0D4D843E5E}"/>
               </a:ext>
             </a:extLst>
           </p:cNvPr>
@@ -19664,7 +19657,7 @@
           <p:cNvPr id="11" name="テキスト ボックス 10">
             <a:extLst>
               <a:ext uri="{FF2B5EF4-FFF2-40B4-BE49-F238E27FC236}">
-                <a16:creationId xmlns:a16="http://schemas.microsoft.com/office/drawing/2014/main" id="{671FB82A-3A04-E7C5-1DB4-4DB8CBCA8B9A}"/>
+                <a16:creationId xmlns:a16="http://schemas.microsoft.com/office/drawing/2014/main" id="{D5111886-B349-9232-F4BC-C054365152D7}"/>
               </a:ext>
             </a:extLst>
           </p:cNvPr>
@@ -19710,7 +19703,7 @@
           <p:cNvPr id="12" name="四角形: 角を丸くする 11">
             <a:extLst>
               <a:ext uri="{FF2B5EF4-FFF2-40B4-BE49-F238E27FC236}">
-                <a16:creationId xmlns:a16="http://schemas.microsoft.com/office/drawing/2014/main" id="{87CECC17-B96D-0152-4824-880D6016B682}"/>
+                <a16:creationId xmlns:a16="http://schemas.microsoft.com/office/drawing/2014/main" id="{A177D0BC-343F-E6E5-CC5B-20A0F19B1DE2}"/>
               </a:ext>
             </a:extLst>
           </p:cNvPr>
@@ -19780,7 +19773,7 @@
           <p:cNvPr id="13" name="正方形/長方形 12">
             <a:extLst>
               <a:ext uri="{FF2B5EF4-FFF2-40B4-BE49-F238E27FC236}">
-                <a16:creationId xmlns:a16="http://schemas.microsoft.com/office/drawing/2014/main" id="{EDBB2F41-BDEE-5E4A-530D-DA60E242AF00}"/>
+                <a16:creationId xmlns:a16="http://schemas.microsoft.com/office/drawing/2014/main" id="{C27A8C82-D149-620C-06B2-884036081898}"/>
               </a:ext>
             </a:extLst>
           </p:cNvPr>
@@ -19848,7 +19841,7 @@
           <p:cNvPr id="14" name="テキスト ボックス 13">
             <a:extLst>
               <a:ext uri="{FF2B5EF4-FFF2-40B4-BE49-F238E27FC236}">
-                <a16:creationId xmlns:a16="http://schemas.microsoft.com/office/drawing/2014/main" id="{98B6FF66-426F-D865-65E4-87F768B74F15}"/>
+                <a16:creationId xmlns:a16="http://schemas.microsoft.com/office/drawing/2014/main" id="{E36075E8-597C-C67A-1112-DEC83A95D2B3}"/>
               </a:ext>
             </a:extLst>
           </p:cNvPr>
@@ -19894,7 +19887,7 @@
           <p:cNvPr id="15" name="テキスト ボックス 14">
             <a:extLst>
               <a:ext uri="{FF2B5EF4-FFF2-40B4-BE49-F238E27FC236}">
-                <a16:creationId xmlns:a16="http://schemas.microsoft.com/office/drawing/2014/main" id="{DD5819D5-014C-7044-76FE-AF8E47E2084C}"/>
+                <a16:creationId xmlns:a16="http://schemas.microsoft.com/office/drawing/2014/main" id="{5727C43A-CA6C-321F-57DB-187C8BB9CC7E}"/>
               </a:ext>
             </a:extLst>
           </p:cNvPr>
@@ -19940,7 +19933,7 @@
           <p:cNvPr id="16" name="四角形: 角を丸くする 15">
             <a:extLst>
               <a:ext uri="{FF2B5EF4-FFF2-40B4-BE49-F238E27FC236}">
-                <a16:creationId xmlns:a16="http://schemas.microsoft.com/office/drawing/2014/main" id="{264DD5FD-22C2-14B0-8832-BEFCB9A5D4EA}"/>
+                <a16:creationId xmlns:a16="http://schemas.microsoft.com/office/drawing/2014/main" id="{DDB24ECA-6C8D-7161-FB94-F312C8432C18}"/>
               </a:ext>
             </a:extLst>
           </p:cNvPr>
@@ -20010,7 +20003,7 @@
           <p:cNvPr id="17" name="正方形/長方形 16">
             <a:extLst>
               <a:ext uri="{FF2B5EF4-FFF2-40B4-BE49-F238E27FC236}">
-                <a16:creationId xmlns:a16="http://schemas.microsoft.com/office/drawing/2014/main" id="{9F1151E4-4CD3-8C8F-3078-878D679057A2}"/>
+                <a16:creationId xmlns:a16="http://schemas.microsoft.com/office/drawing/2014/main" id="{2A808348-61C4-FDA0-E097-00B3B1AE4879}"/>
               </a:ext>
             </a:extLst>
           </p:cNvPr>
@@ -20078,7 +20071,7 @@
           <p:cNvPr id="18" name="テキスト ボックス 17">
             <a:extLst>
               <a:ext uri="{FF2B5EF4-FFF2-40B4-BE49-F238E27FC236}">
-                <a16:creationId xmlns:a16="http://schemas.microsoft.com/office/drawing/2014/main" id="{1F56AB23-3E83-F630-C418-F5397BB43438}"/>
+                <a16:creationId xmlns:a16="http://schemas.microsoft.com/office/drawing/2014/main" id="{879DC607-B009-8784-1459-B3011749A439}"/>
               </a:ext>
             </a:extLst>
           </p:cNvPr>
@@ -20124,7 +20117,7 @@
           <p:cNvPr id="19" name="テキスト ボックス 18">
             <a:extLst>
               <a:ext uri="{FF2B5EF4-FFF2-40B4-BE49-F238E27FC236}">
-                <a16:creationId xmlns:a16="http://schemas.microsoft.com/office/drawing/2014/main" id="{C0A4FD70-047A-1F35-796D-769720C0371A}"/>
+                <a16:creationId xmlns:a16="http://schemas.microsoft.com/office/drawing/2014/main" id="{49934C4B-EB05-375F-67B1-44F348BCEBE0}"/>
               </a:ext>
             </a:extLst>
           </p:cNvPr>
@@ -20170,7 +20163,7 @@
           <p:cNvPr id="20" name="正方形/長方形 19">
             <a:extLst>
               <a:ext uri="{FF2B5EF4-FFF2-40B4-BE49-F238E27FC236}">
-                <a16:creationId xmlns:a16="http://schemas.microsoft.com/office/drawing/2014/main" id="{D10F00BE-C09C-DF77-9915-3EE81474D209}"/>
+                <a16:creationId xmlns:a16="http://schemas.microsoft.com/office/drawing/2014/main" id="{5A0C8F54-2324-4FDE-AAD1-5EE7D2F120D2}"/>
               </a:ext>
             </a:extLst>
           </p:cNvPr>
@@ -20238,7 +20231,7 @@
           <p:cNvPr id="21" name="テキスト ボックス 20">
             <a:extLst>
               <a:ext uri="{FF2B5EF4-FFF2-40B4-BE49-F238E27FC236}">
-                <a16:creationId xmlns:a16="http://schemas.microsoft.com/office/drawing/2014/main" id="{AF322060-6CF0-13CB-20E9-01D7801673A9}"/>
+                <a16:creationId xmlns:a16="http://schemas.microsoft.com/office/drawing/2014/main" id="{E9818CA0-DF51-3BEB-58E0-9EA1BC14DB8B}"/>
               </a:ext>
             </a:extLst>
           </p:cNvPr>
@@ -20248,7 +20241,7 @@
         <p:spPr>
           <a:xfrm>
             <a:off x="812800" y="5537200"/>
-            <a:ext cx="7620000" cy="254000"/>
+            <a:ext cx="8890000" cy="254000"/>
           </a:xfrm>
           <a:prstGeom prst="rect">
             <a:avLst/>
@@ -20274,7 +20267,7 @@
                 <a:latin typeface="Yu Gothic UI" panose="020B0500000000000000" pitchFamily="50" charset="-128"/>
                 <a:ea typeface="Yu Gothic UI" panose="020B0500000000000000" pitchFamily="50" charset="-128"/>
               </a:rPr>
-              <a:t>簡易デジタルサイネージ ｜ 操作ガイド　（出典：操作ガイド</a:t>
+              <a:t>簡単！シンプル！サイネージ ｜ 操作ガイド　（出典：操作ガイド</a:t>
             </a:r>
             <a:r>
               <a:rPr kumimoji="1" lang="en-US" altLang="ja-JP" sz="1150">
@@ -20302,7 +20295,7 @@
     </p:spTree>
     <p:extLst>
       <p:ext uri="{BB962C8B-B14F-4D97-AF65-F5344CB8AC3E}">
-        <p14:creationId xmlns:p14="http://schemas.microsoft.com/office/powerpoint/2010/main" val="3186298334"/>
+        <p14:creationId xmlns:p14="http://schemas.microsoft.com/office/powerpoint/2010/main" val="1584401479"/>
       </p:ext>
     </p:extLst>
   </p:cSld>
@@ -20334,7 +20327,7 @@
           <p:cNvPr id="2" name="正方形/長方形 1">
             <a:extLst>
               <a:ext uri="{FF2B5EF4-FFF2-40B4-BE49-F238E27FC236}">
-                <a16:creationId xmlns:a16="http://schemas.microsoft.com/office/drawing/2014/main" id="{004C321B-A898-CB0C-7F75-DC1677786CE5}"/>
+                <a16:creationId xmlns:a16="http://schemas.microsoft.com/office/drawing/2014/main" id="{CDBDAA78-708A-1912-E41E-0350728B5C49}"/>
               </a:ext>
             </a:extLst>
           </p:cNvPr>
@@ -20402,7 +20395,7 @@
           <p:cNvPr id="3" name="正方形/長方形 2">
             <a:extLst>
               <a:ext uri="{FF2B5EF4-FFF2-40B4-BE49-F238E27FC236}">
-                <a16:creationId xmlns:a16="http://schemas.microsoft.com/office/drawing/2014/main" id="{5007F7FD-1A93-8548-2C42-28C08A821A77}"/>
+                <a16:creationId xmlns:a16="http://schemas.microsoft.com/office/drawing/2014/main" id="{34F6D481-35B8-E7EA-9C12-44A8F66DAA67}"/>
               </a:ext>
             </a:extLst>
           </p:cNvPr>
@@ -20470,7 +20463,7 @@
           <p:cNvPr id="4" name="テキスト ボックス 3">
             <a:extLst>
               <a:ext uri="{FF2B5EF4-FFF2-40B4-BE49-F238E27FC236}">
-                <a16:creationId xmlns:a16="http://schemas.microsoft.com/office/drawing/2014/main" id="{468244CC-C83E-90C5-3A97-86874CD1CE5F}"/>
+                <a16:creationId xmlns:a16="http://schemas.microsoft.com/office/drawing/2014/main" id="{6DE753CF-EC6C-14C9-600C-95B99A7B7896}"/>
               </a:ext>
             </a:extLst>
           </p:cNvPr>
@@ -20523,7 +20516,7 @@
           <p:cNvPr id="5" name="テキスト ボックス 4">
             <a:extLst>
               <a:ext uri="{FF2B5EF4-FFF2-40B4-BE49-F238E27FC236}">
-                <a16:creationId xmlns:a16="http://schemas.microsoft.com/office/drawing/2014/main" id="{C6119AB7-2C84-087D-2718-ED762C8FC249}"/>
+                <a16:creationId xmlns:a16="http://schemas.microsoft.com/office/drawing/2014/main" id="{E43C51EE-3ACB-CDE1-6381-859046AEF32A}"/>
               </a:ext>
             </a:extLst>
           </p:cNvPr>
@@ -20569,7 +20562,7 @@
           <p:cNvPr id="6" name="正方形/長方形 5">
             <a:extLst>
               <a:ext uri="{FF2B5EF4-FFF2-40B4-BE49-F238E27FC236}">
-                <a16:creationId xmlns:a16="http://schemas.microsoft.com/office/drawing/2014/main" id="{7033DC43-A818-96AE-EFC1-FDA1ED5AEC10}"/>
+                <a16:creationId xmlns:a16="http://schemas.microsoft.com/office/drawing/2014/main" id="{57B9BEB1-FEDA-B37D-B2C3-DADA00F236A2}"/>
               </a:ext>
             </a:extLst>
           </p:cNvPr>
@@ -20637,7 +20630,7 @@
           <p:cNvPr id="7" name="テキスト ボックス 6">
             <a:extLst>
               <a:ext uri="{FF2B5EF4-FFF2-40B4-BE49-F238E27FC236}">
-                <a16:creationId xmlns:a16="http://schemas.microsoft.com/office/drawing/2014/main" id="{C34E8426-A313-D185-7209-C0EBF3238B62}"/>
+                <a16:creationId xmlns:a16="http://schemas.microsoft.com/office/drawing/2014/main" id="{EB459F8D-0F12-0492-AB0F-5417B2C36524}"/>
               </a:ext>
             </a:extLst>
           </p:cNvPr>
@@ -20647,7 +20640,7 @@
         <p:spPr>
           <a:xfrm>
             <a:off x="812800" y="6375400"/>
-            <a:ext cx="5080000" cy="177800"/>
+            <a:ext cx="6604000" cy="177800"/>
           </a:xfrm>
           <a:prstGeom prst="rect">
             <a:avLst/>
@@ -20673,7 +20666,7 @@
                 <a:latin typeface="Yu Gothic UI" panose="020B0500000000000000" pitchFamily="50" charset="-128"/>
                 <a:ea typeface="Yu Gothic UI" panose="020B0500000000000000" pitchFamily="50" charset="-128"/>
               </a:rPr>
-              <a:t>簡易デジタルサイネージ ｜ 操作ガイド</a:t>
+              <a:t>簡単！シンプル！サイネージ ｜ 操作ガイド</a:t>
             </a:r>
           </a:p>
         </p:txBody>
@@ -20683,7 +20676,7 @@
           <p:cNvPr id="8" name="テキスト ボックス 7">
             <a:extLst>
               <a:ext uri="{FF2B5EF4-FFF2-40B4-BE49-F238E27FC236}">
-                <a16:creationId xmlns:a16="http://schemas.microsoft.com/office/drawing/2014/main" id="{36E57FC4-BDDA-5513-6F3B-31FA3DDB0420}"/>
+                <a16:creationId xmlns:a16="http://schemas.microsoft.com/office/drawing/2014/main" id="{3A1D3F60-4419-C001-47AE-EAFA23E2D36A}"/>
               </a:ext>
             </a:extLst>
           </p:cNvPr>
@@ -20736,7 +20729,7 @@
           <p:cNvPr id="9" name="テキスト ボックス 8">
             <a:extLst>
               <a:ext uri="{FF2B5EF4-FFF2-40B4-BE49-F238E27FC236}">
-                <a16:creationId xmlns:a16="http://schemas.microsoft.com/office/drawing/2014/main" id="{F7526CBC-9DEE-8307-3417-C9B8432EC908}"/>
+                <a16:creationId xmlns:a16="http://schemas.microsoft.com/office/drawing/2014/main" id="{EDB89BFA-FC9C-CB47-459F-A5BD0B2527A1}"/>
               </a:ext>
             </a:extLst>
           </p:cNvPr>
@@ -20802,7 +20795,7 @@
           <p:cNvPr id="10" name="四角形: 角を丸くする 9">
             <a:extLst>
               <a:ext uri="{FF2B5EF4-FFF2-40B4-BE49-F238E27FC236}">
-                <a16:creationId xmlns:a16="http://schemas.microsoft.com/office/drawing/2014/main" id="{101070EE-1123-A8FB-12C5-9713EBBD3800}"/>
+                <a16:creationId xmlns:a16="http://schemas.microsoft.com/office/drawing/2014/main" id="{D33AD6EE-81B1-1C1F-E101-AE5D6C9A4828}"/>
               </a:ext>
             </a:extLst>
           </p:cNvPr>
@@ -20858,7 +20851,7 @@
           <p:cNvPr id="11" name="正方形/長方形 10">
             <a:extLst>
               <a:ext uri="{FF2B5EF4-FFF2-40B4-BE49-F238E27FC236}">
-                <a16:creationId xmlns:a16="http://schemas.microsoft.com/office/drawing/2014/main" id="{1847A91E-068C-A62D-3CF4-3B548FF7A321}"/>
+                <a16:creationId xmlns:a16="http://schemas.microsoft.com/office/drawing/2014/main" id="{C072524E-96B0-C01B-BF5A-05798174D1F6}"/>
               </a:ext>
             </a:extLst>
           </p:cNvPr>
@@ -20926,7 +20919,7 @@
           <p:cNvPr id="12" name="四角形: 角を丸くする 11">
             <a:extLst>
               <a:ext uri="{FF2B5EF4-FFF2-40B4-BE49-F238E27FC236}">
-                <a16:creationId xmlns:a16="http://schemas.microsoft.com/office/drawing/2014/main" id="{8D563891-B41F-B6B4-4616-0A86876A4F2B}"/>
+                <a16:creationId xmlns:a16="http://schemas.microsoft.com/office/drawing/2014/main" id="{0B43FB3C-6036-9BA0-3F14-F20296CDF127}"/>
               </a:ext>
             </a:extLst>
           </p:cNvPr>
@@ -20996,7 +20989,7 @@
           <p:cNvPr id="13" name="テキスト ボックス 12">
             <a:extLst>
               <a:ext uri="{FF2B5EF4-FFF2-40B4-BE49-F238E27FC236}">
-                <a16:creationId xmlns:a16="http://schemas.microsoft.com/office/drawing/2014/main" id="{4C61765A-6AF0-71A1-22C1-2CCC90503F86}"/>
+                <a16:creationId xmlns:a16="http://schemas.microsoft.com/office/drawing/2014/main" id="{94B121CB-CEBA-02B1-B954-0416DA9A9012}"/>
               </a:ext>
             </a:extLst>
           </p:cNvPr>
@@ -21049,7 +21042,7 @@
           <p:cNvPr id="14" name="テキスト ボックス 13">
             <a:extLst>
               <a:ext uri="{FF2B5EF4-FFF2-40B4-BE49-F238E27FC236}">
-                <a16:creationId xmlns:a16="http://schemas.microsoft.com/office/drawing/2014/main" id="{EE786151-5759-A95B-79B4-2E3DC9BB1A67}"/>
+                <a16:creationId xmlns:a16="http://schemas.microsoft.com/office/drawing/2014/main" id="{8806A450-DA58-B1F3-9AF9-DCFEE1C7EF9F}"/>
               </a:ext>
             </a:extLst>
           </p:cNvPr>
@@ -21095,7 +21088,7 @@
           <p:cNvPr id="15" name="テキスト ボックス 14">
             <a:extLst>
               <a:ext uri="{FF2B5EF4-FFF2-40B4-BE49-F238E27FC236}">
-                <a16:creationId xmlns:a16="http://schemas.microsoft.com/office/drawing/2014/main" id="{F3954442-AB27-FFB6-C8F0-5CD1C597053C}"/>
+                <a16:creationId xmlns:a16="http://schemas.microsoft.com/office/drawing/2014/main" id="{50EEF8FF-22F7-0598-F594-83CB537256B4}"/>
               </a:ext>
             </a:extLst>
           </p:cNvPr>
@@ -21141,7 +21134,7 @@
           <p:cNvPr id="16" name="テキスト ボックス 15">
             <a:extLst>
               <a:ext uri="{FF2B5EF4-FFF2-40B4-BE49-F238E27FC236}">
-                <a16:creationId xmlns:a16="http://schemas.microsoft.com/office/drawing/2014/main" id="{1474F5C1-CAE8-C5B9-E16C-8F26DFD2F790}"/>
+                <a16:creationId xmlns:a16="http://schemas.microsoft.com/office/drawing/2014/main" id="{8AC30D70-3B6A-4CA7-0BF6-9973E51801DB}"/>
               </a:ext>
             </a:extLst>
           </p:cNvPr>
@@ -21230,7 +21223,7 @@
           <p:cNvPr id="17" name="四角形: 角を丸くする 16">
             <a:extLst>
               <a:ext uri="{FF2B5EF4-FFF2-40B4-BE49-F238E27FC236}">
-                <a16:creationId xmlns:a16="http://schemas.microsoft.com/office/drawing/2014/main" id="{F46AE816-B995-9A8E-CC49-56C1AE8986AB}"/>
+                <a16:creationId xmlns:a16="http://schemas.microsoft.com/office/drawing/2014/main" id="{0851EAFA-E5B2-4891-202E-687B8611C5E8}"/>
               </a:ext>
             </a:extLst>
           </p:cNvPr>
@@ -21286,7 +21279,7 @@
           <p:cNvPr id="18" name="正方形/長方形 17">
             <a:extLst>
               <a:ext uri="{FF2B5EF4-FFF2-40B4-BE49-F238E27FC236}">
-                <a16:creationId xmlns:a16="http://schemas.microsoft.com/office/drawing/2014/main" id="{2FC0F4FD-BD35-6134-A8B8-D66B124778D3}"/>
+                <a16:creationId xmlns:a16="http://schemas.microsoft.com/office/drawing/2014/main" id="{FEC81BE7-C594-D51A-5FCA-9636E82952A0}"/>
               </a:ext>
             </a:extLst>
           </p:cNvPr>
@@ -21354,7 +21347,7 @@
           <p:cNvPr id="19" name="四角形: 角を丸くする 18">
             <a:extLst>
               <a:ext uri="{FF2B5EF4-FFF2-40B4-BE49-F238E27FC236}">
-                <a16:creationId xmlns:a16="http://schemas.microsoft.com/office/drawing/2014/main" id="{9806AD4C-6862-0E51-00CA-4F7E3F3D16BD}"/>
+                <a16:creationId xmlns:a16="http://schemas.microsoft.com/office/drawing/2014/main" id="{60D7678F-F363-E954-0944-811EC7A511A3}"/>
               </a:ext>
             </a:extLst>
           </p:cNvPr>
@@ -21424,7 +21417,7 @@
           <p:cNvPr id="20" name="テキスト ボックス 19">
             <a:extLst>
               <a:ext uri="{FF2B5EF4-FFF2-40B4-BE49-F238E27FC236}">
-                <a16:creationId xmlns:a16="http://schemas.microsoft.com/office/drawing/2014/main" id="{D91BE002-F70F-142B-8AC6-8717396E6DEA}"/>
+                <a16:creationId xmlns:a16="http://schemas.microsoft.com/office/drawing/2014/main" id="{59325944-0576-0A6F-5F22-A972D14038E4}"/>
               </a:ext>
             </a:extLst>
           </p:cNvPr>
@@ -21477,7 +21470,7 @@
           <p:cNvPr id="21" name="テキスト ボックス 20">
             <a:extLst>
               <a:ext uri="{FF2B5EF4-FFF2-40B4-BE49-F238E27FC236}">
-                <a16:creationId xmlns:a16="http://schemas.microsoft.com/office/drawing/2014/main" id="{B7BD4143-3D1B-E7B6-6173-1A4F61116593}"/>
+                <a16:creationId xmlns:a16="http://schemas.microsoft.com/office/drawing/2014/main" id="{D4629811-B55E-5D6A-3B4F-1E28357C9216}"/>
               </a:ext>
             </a:extLst>
           </p:cNvPr>
@@ -21523,7 +21516,7 @@
           <p:cNvPr id="22" name="テキスト ボックス 21">
             <a:extLst>
               <a:ext uri="{FF2B5EF4-FFF2-40B4-BE49-F238E27FC236}">
-                <a16:creationId xmlns:a16="http://schemas.microsoft.com/office/drawing/2014/main" id="{34DCE2D8-CB5C-B0B3-C14E-66DA658120B4}"/>
+                <a16:creationId xmlns:a16="http://schemas.microsoft.com/office/drawing/2014/main" id="{E747E609-0C4E-00E5-AAF2-184AC767F88E}"/>
               </a:ext>
             </a:extLst>
           </p:cNvPr>
@@ -21569,7 +21562,7 @@
           <p:cNvPr id="23" name="テキスト ボックス 22">
             <a:extLst>
               <a:ext uri="{FF2B5EF4-FFF2-40B4-BE49-F238E27FC236}">
-                <a16:creationId xmlns:a16="http://schemas.microsoft.com/office/drawing/2014/main" id="{0CE6C835-3F5F-B700-B983-6CAE7B99BE21}"/>
+                <a16:creationId xmlns:a16="http://schemas.microsoft.com/office/drawing/2014/main" id="{A538EA7C-DDBA-A3EA-27CF-0D836BB7E3E4}"/>
               </a:ext>
             </a:extLst>
           </p:cNvPr>
@@ -21658,7 +21651,7 @@
           <p:cNvPr id="24" name="四角形: 角を丸くする 23">
             <a:extLst>
               <a:ext uri="{FF2B5EF4-FFF2-40B4-BE49-F238E27FC236}">
-                <a16:creationId xmlns:a16="http://schemas.microsoft.com/office/drawing/2014/main" id="{9A949C9A-A88B-C50E-3D16-AE0226BA0C8B}"/>
+                <a16:creationId xmlns:a16="http://schemas.microsoft.com/office/drawing/2014/main" id="{2B145675-1AC3-56CA-EC5C-2EE0C5715735}"/>
               </a:ext>
             </a:extLst>
           </p:cNvPr>
@@ -21728,7 +21721,7 @@
           <p:cNvPr id="25" name="正方形/長方形 24">
             <a:extLst>
               <a:ext uri="{FF2B5EF4-FFF2-40B4-BE49-F238E27FC236}">
-                <a16:creationId xmlns:a16="http://schemas.microsoft.com/office/drawing/2014/main" id="{6404329A-595E-216A-4F3B-E980E8CA8135}"/>
+                <a16:creationId xmlns:a16="http://schemas.microsoft.com/office/drawing/2014/main" id="{5E81228F-4E1F-6AB0-A333-E899F399CCFC}"/>
               </a:ext>
             </a:extLst>
           </p:cNvPr>
@@ -21796,7 +21789,7 @@
           <p:cNvPr id="26" name="テキスト ボックス 25">
             <a:extLst>
               <a:ext uri="{FF2B5EF4-FFF2-40B4-BE49-F238E27FC236}">
-                <a16:creationId xmlns:a16="http://schemas.microsoft.com/office/drawing/2014/main" id="{FD4030C0-4791-84C4-950E-E0D7193B4CB8}"/>
+                <a16:creationId xmlns:a16="http://schemas.microsoft.com/office/drawing/2014/main" id="{603A8D11-3F70-D316-5E5E-8090CB95D67C}"/>
               </a:ext>
             </a:extLst>
           </p:cNvPr>
@@ -21849,7 +21842,7 @@
           <p:cNvPr id="27" name="テキスト ボックス 26">
             <a:extLst>
               <a:ext uri="{FF2B5EF4-FFF2-40B4-BE49-F238E27FC236}">
-                <a16:creationId xmlns:a16="http://schemas.microsoft.com/office/drawing/2014/main" id="{E5BEBFBD-E880-BBD2-3614-860D4BC4750D}"/>
+                <a16:creationId xmlns:a16="http://schemas.microsoft.com/office/drawing/2014/main" id="{0EFB01C2-E0C4-DF1B-94F4-0E8519ECCDB6}"/>
               </a:ext>
             </a:extLst>
           </p:cNvPr>
@@ -21893,7 +21886,7 @@
     </p:spTree>
     <p:extLst>
       <p:ext uri="{BB962C8B-B14F-4D97-AF65-F5344CB8AC3E}">
-        <p14:creationId xmlns:p14="http://schemas.microsoft.com/office/powerpoint/2010/main" val="3056490106"/>
+        <p14:creationId xmlns:p14="http://schemas.microsoft.com/office/powerpoint/2010/main" val="476457107"/>
       </p:ext>
     </p:extLst>
   </p:cSld>
@@ -21925,7 +21918,7 @@
           <p:cNvPr id="2" name="正方形/長方形 1">
             <a:extLst>
               <a:ext uri="{FF2B5EF4-FFF2-40B4-BE49-F238E27FC236}">
-                <a16:creationId xmlns:a16="http://schemas.microsoft.com/office/drawing/2014/main" id="{9939FD0B-A0C7-7FF6-7145-7A86C12129F5}"/>
+                <a16:creationId xmlns:a16="http://schemas.microsoft.com/office/drawing/2014/main" id="{BE804E5F-4DF7-81B2-7228-47D8634F60D4}"/>
               </a:ext>
             </a:extLst>
           </p:cNvPr>
@@ -21993,7 +21986,7 @@
           <p:cNvPr id="3" name="正方形/長方形 2">
             <a:extLst>
               <a:ext uri="{FF2B5EF4-FFF2-40B4-BE49-F238E27FC236}">
-                <a16:creationId xmlns:a16="http://schemas.microsoft.com/office/drawing/2014/main" id="{24ABF57B-BD40-0786-9ED3-F5CEBF73D8E3}"/>
+                <a16:creationId xmlns:a16="http://schemas.microsoft.com/office/drawing/2014/main" id="{08446E43-655D-8F75-BF1A-371098840AED}"/>
               </a:ext>
             </a:extLst>
           </p:cNvPr>
@@ -22061,7 +22054,7 @@
           <p:cNvPr id="4" name="テキスト ボックス 3">
             <a:extLst>
               <a:ext uri="{FF2B5EF4-FFF2-40B4-BE49-F238E27FC236}">
-                <a16:creationId xmlns:a16="http://schemas.microsoft.com/office/drawing/2014/main" id="{BB60FBBE-17E3-A9AC-4FDD-95440422C634}"/>
+                <a16:creationId xmlns:a16="http://schemas.microsoft.com/office/drawing/2014/main" id="{44323636-6252-6F98-0675-49CBAF4E8449}"/>
               </a:ext>
             </a:extLst>
           </p:cNvPr>
@@ -22114,7 +22107,7 @@
           <p:cNvPr id="5" name="テキスト ボックス 4">
             <a:extLst>
               <a:ext uri="{FF2B5EF4-FFF2-40B4-BE49-F238E27FC236}">
-                <a16:creationId xmlns:a16="http://schemas.microsoft.com/office/drawing/2014/main" id="{53AD53B9-4066-841D-601F-3F8A110DA3D8}"/>
+                <a16:creationId xmlns:a16="http://schemas.microsoft.com/office/drawing/2014/main" id="{5B4FC8E9-B470-44E6-F2DF-3F84A614F429}"/>
               </a:ext>
             </a:extLst>
           </p:cNvPr>
@@ -22160,7 +22153,7 @@
           <p:cNvPr id="6" name="正方形/長方形 5">
             <a:extLst>
               <a:ext uri="{FF2B5EF4-FFF2-40B4-BE49-F238E27FC236}">
-                <a16:creationId xmlns:a16="http://schemas.microsoft.com/office/drawing/2014/main" id="{B77505B1-2E76-9448-0F33-0B4A7D813E2B}"/>
+                <a16:creationId xmlns:a16="http://schemas.microsoft.com/office/drawing/2014/main" id="{36B80A47-0568-D49A-A961-7B819D58FEE8}"/>
               </a:ext>
             </a:extLst>
           </p:cNvPr>
@@ -22228,7 +22221,7 @@
           <p:cNvPr id="7" name="テキスト ボックス 6">
             <a:extLst>
               <a:ext uri="{FF2B5EF4-FFF2-40B4-BE49-F238E27FC236}">
-                <a16:creationId xmlns:a16="http://schemas.microsoft.com/office/drawing/2014/main" id="{8327F2D0-F58B-122D-7DC3-45D076690AD2}"/>
+                <a16:creationId xmlns:a16="http://schemas.microsoft.com/office/drawing/2014/main" id="{DA3B02D3-01E0-09D2-F5EE-F028D0B14487}"/>
               </a:ext>
             </a:extLst>
           </p:cNvPr>
@@ -22238,7 +22231,7 @@
         <p:spPr>
           <a:xfrm>
             <a:off x="812800" y="6375400"/>
-            <a:ext cx="5080000" cy="177800"/>
+            <a:ext cx="6604000" cy="177800"/>
           </a:xfrm>
           <a:prstGeom prst="rect">
             <a:avLst/>
@@ -22264,7 +22257,7 @@
                 <a:latin typeface="Yu Gothic UI" panose="020B0500000000000000" pitchFamily="50" charset="-128"/>
                 <a:ea typeface="Yu Gothic UI" panose="020B0500000000000000" pitchFamily="50" charset="-128"/>
               </a:rPr>
-              <a:t>簡易デジタルサイネージ ｜ 操作ガイド</a:t>
+              <a:t>簡単！シンプル！サイネージ ｜ 操作ガイド</a:t>
             </a:r>
           </a:p>
         </p:txBody>
@@ -22274,7 +22267,7 @@
           <p:cNvPr id="8" name="テキスト ボックス 7">
             <a:extLst>
               <a:ext uri="{FF2B5EF4-FFF2-40B4-BE49-F238E27FC236}">
-                <a16:creationId xmlns:a16="http://schemas.microsoft.com/office/drawing/2014/main" id="{06D93071-91BB-173A-BF32-1B5809C5AB81}"/>
+                <a16:creationId xmlns:a16="http://schemas.microsoft.com/office/drawing/2014/main" id="{95DCC7ED-30F8-0CD4-97A1-30201166273C}"/>
               </a:ext>
             </a:extLst>
           </p:cNvPr>
@@ -22327,7 +22320,7 @@
           <p:cNvPr id="9" name="テキスト ボックス 8">
             <a:extLst>
               <a:ext uri="{FF2B5EF4-FFF2-40B4-BE49-F238E27FC236}">
-                <a16:creationId xmlns:a16="http://schemas.microsoft.com/office/drawing/2014/main" id="{88E9D98B-6C0A-26AF-8F1B-ECEA14E3A1BB}"/>
+                <a16:creationId xmlns:a16="http://schemas.microsoft.com/office/drawing/2014/main" id="{31698BD8-BB0B-3A1B-9313-337BCD38E686}"/>
               </a:ext>
             </a:extLst>
           </p:cNvPr>
@@ -22373,7 +22366,7 @@
           <p:cNvPr id="10" name="四角形: 角を丸くする 9">
             <a:extLst>
               <a:ext uri="{FF2B5EF4-FFF2-40B4-BE49-F238E27FC236}">
-                <a16:creationId xmlns:a16="http://schemas.microsoft.com/office/drawing/2014/main" id="{814E086B-96C6-0F98-B6AF-0B96DD6B76A7}"/>
+                <a16:creationId xmlns:a16="http://schemas.microsoft.com/office/drawing/2014/main" id="{1645F31C-FB16-F79D-569C-D247D8C2E70D}"/>
               </a:ext>
             </a:extLst>
           </p:cNvPr>
@@ -22429,7 +22422,7 @@
           <p:cNvPr id="11" name="楕円 10">
             <a:extLst>
               <a:ext uri="{FF2B5EF4-FFF2-40B4-BE49-F238E27FC236}">
-                <a16:creationId xmlns:a16="http://schemas.microsoft.com/office/drawing/2014/main" id="{8709CD8C-1DA2-42C3-26C8-02AE030A2322}"/>
+                <a16:creationId xmlns:a16="http://schemas.microsoft.com/office/drawing/2014/main" id="{1011C4B2-6259-7038-49B7-B7B1751392D0}"/>
               </a:ext>
             </a:extLst>
           </p:cNvPr>
@@ -22497,7 +22490,7 @@
           <p:cNvPr id="12" name="テキスト ボックス 11">
             <a:extLst>
               <a:ext uri="{FF2B5EF4-FFF2-40B4-BE49-F238E27FC236}">
-                <a16:creationId xmlns:a16="http://schemas.microsoft.com/office/drawing/2014/main" id="{C97C160C-2C93-BCFD-D86C-62E1C6F7B9B0}"/>
+                <a16:creationId xmlns:a16="http://schemas.microsoft.com/office/drawing/2014/main" id="{38D13AD4-E6C8-A105-75D4-72B2A9D9AC2F}"/>
               </a:ext>
             </a:extLst>
           </p:cNvPr>
@@ -22550,7 +22543,7 @@
           <p:cNvPr id="13" name="テキスト ボックス 12">
             <a:extLst>
               <a:ext uri="{FF2B5EF4-FFF2-40B4-BE49-F238E27FC236}">
-                <a16:creationId xmlns:a16="http://schemas.microsoft.com/office/drawing/2014/main" id="{DF452A84-CAFF-69C6-69EC-3FA324A92219}"/>
+                <a16:creationId xmlns:a16="http://schemas.microsoft.com/office/drawing/2014/main" id="{BB955800-B0F2-62F9-2923-68AD89F36CAE}"/>
               </a:ext>
             </a:extLst>
           </p:cNvPr>
@@ -22596,7 +22589,7 @@
           <p:cNvPr id="14" name="テキスト ボックス 13">
             <a:extLst>
               <a:ext uri="{FF2B5EF4-FFF2-40B4-BE49-F238E27FC236}">
-                <a16:creationId xmlns:a16="http://schemas.microsoft.com/office/drawing/2014/main" id="{8F9F6EA8-7032-981B-E58E-E949D13BDC65}"/>
+                <a16:creationId xmlns:a16="http://schemas.microsoft.com/office/drawing/2014/main" id="{EC83C264-6F1C-00D7-4F97-2F84A9003B61}"/>
               </a:ext>
             </a:extLst>
           </p:cNvPr>
@@ -22669,7 +22662,7 @@
           <p:cNvPr id="15" name="四角形: 角を丸くする 14">
             <a:extLst>
               <a:ext uri="{FF2B5EF4-FFF2-40B4-BE49-F238E27FC236}">
-                <a16:creationId xmlns:a16="http://schemas.microsoft.com/office/drawing/2014/main" id="{2AD33207-838D-F366-8C72-9323B5F0AF24}"/>
+                <a16:creationId xmlns:a16="http://schemas.microsoft.com/office/drawing/2014/main" id="{22C16AF5-E255-2AC2-42A9-04107B760725}"/>
               </a:ext>
             </a:extLst>
           </p:cNvPr>
@@ -22725,7 +22718,7 @@
           <p:cNvPr id="16" name="楕円 15">
             <a:extLst>
               <a:ext uri="{FF2B5EF4-FFF2-40B4-BE49-F238E27FC236}">
-                <a16:creationId xmlns:a16="http://schemas.microsoft.com/office/drawing/2014/main" id="{8955D103-718D-4400-3DCD-8ECCD1BAD2AA}"/>
+                <a16:creationId xmlns:a16="http://schemas.microsoft.com/office/drawing/2014/main" id="{99CA1DD5-A33B-6029-5C41-1BD4D399A6BD}"/>
               </a:ext>
             </a:extLst>
           </p:cNvPr>
@@ -22793,7 +22786,7 @@
           <p:cNvPr id="17" name="テキスト ボックス 16">
             <a:extLst>
               <a:ext uri="{FF2B5EF4-FFF2-40B4-BE49-F238E27FC236}">
-                <a16:creationId xmlns:a16="http://schemas.microsoft.com/office/drawing/2014/main" id="{E3B304AB-0229-79EB-7779-0498D1B15BB5}"/>
+                <a16:creationId xmlns:a16="http://schemas.microsoft.com/office/drawing/2014/main" id="{5EA1AB23-4B62-9838-414B-34FB5128BCCC}"/>
               </a:ext>
             </a:extLst>
           </p:cNvPr>
@@ -22846,7 +22839,7 @@
           <p:cNvPr id="18" name="テキスト ボックス 17">
             <a:extLst>
               <a:ext uri="{FF2B5EF4-FFF2-40B4-BE49-F238E27FC236}">
-                <a16:creationId xmlns:a16="http://schemas.microsoft.com/office/drawing/2014/main" id="{A7435841-F029-726D-88B9-7FCF09BD8165}"/>
+                <a16:creationId xmlns:a16="http://schemas.microsoft.com/office/drawing/2014/main" id="{64375E7D-72AC-8A58-0D37-D0F2D28CF3FE}"/>
               </a:ext>
             </a:extLst>
           </p:cNvPr>
@@ -22892,7 +22885,7 @@
           <p:cNvPr id="19" name="テキスト ボックス 18">
             <a:extLst>
               <a:ext uri="{FF2B5EF4-FFF2-40B4-BE49-F238E27FC236}">
-                <a16:creationId xmlns:a16="http://schemas.microsoft.com/office/drawing/2014/main" id="{47AE88A6-2A18-CDD6-3812-44D9C734E38D}"/>
+                <a16:creationId xmlns:a16="http://schemas.microsoft.com/office/drawing/2014/main" id="{95D15A3E-15B3-BDC7-8FFB-3B7C8062368C}"/>
               </a:ext>
             </a:extLst>
           </p:cNvPr>
@@ -22955,7 +22948,7 @@
           <p:cNvPr id="20" name="四角形: 角を丸くする 19">
             <a:extLst>
               <a:ext uri="{FF2B5EF4-FFF2-40B4-BE49-F238E27FC236}">
-                <a16:creationId xmlns:a16="http://schemas.microsoft.com/office/drawing/2014/main" id="{7CF9E610-9605-958B-A1D6-97693DEBE379}"/>
+                <a16:creationId xmlns:a16="http://schemas.microsoft.com/office/drawing/2014/main" id="{1CDCFA44-4EE7-FED1-E0EE-8839104B0390}"/>
               </a:ext>
             </a:extLst>
           </p:cNvPr>
@@ -23011,7 +23004,7 @@
           <p:cNvPr id="21" name="楕円 20">
             <a:extLst>
               <a:ext uri="{FF2B5EF4-FFF2-40B4-BE49-F238E27FC236}">
-                <a16:creationId xmlns:a16="http://schemas.microsoft.com/office/drawing/2014/main" id="{E044BB59-3B89-2058-9A81-8724C930404D}"/>
+                <a16:creationId xmlns:a16="http://schemas.microsoft.com/office/drawing/2014/main" id="{F1C7C03E-5DBE-DE31-4368-8B5F5D2E510E}"/>
               </a:ext>
             </a:extLst>
           </p:cNvPr>
@@ -23079,7 +23072,7 @@
           <p:cNvPr id="22" name="テキスト ボックス 21">
             <a:extLst>
               <a:ext uri="{FF2B5EF4-FFF2-40B4-BE49-F238E27FC236}">
-                <a16:creationId xmlns:a16="http://schemas.microsoft.com/office/drawing/2014/main" id="{569890C6-A99C-D9AC-28BC-62E34220510F}"/>
+                <a16:creationId xmlns:a16="http://schemas.microsoft.com/office/drawing/2014/main" id="{1D5E75CD-E848-7AE9-4CCF-19136EDE2AB4}"/>
               </a:ext>
             </a:extLst>
           </p:cNvPr>
@@ -23132,7 +23125,7 @@
           <p:cNvPr id="23" name="テキスト ボックス 22">
             <a:extLst>
               <a:ext uri="{FF2B5EF4-FFF2-40B4-BE49-F238E27FC236}">
-                <a16:creationId xmlns:a16="http://schemas.microsoft.com/office/drawing/2014/main" id="{4D1ACAE9-F708-2D25-8C13-4308A83F2D6A}"/>
+                <a16:creationId xmlns:a16="http://schemas.microsoft.com/office/drawing/2014/main" id="{BFD6908B-D21B-904B-530D-EF413D7FEE03}"/>
               </a:ext>
             </a:extLst>
           </p:cNvPr>
@@ -23178,7 +23171,7 @@
           <p:cNvPr id="24" name="テキスト ボックス 23">
             <a:extLst>
               <a:ext uri="{FF2B5EF4-FFF2-40B4-BE49-F238E27FC236}">
-                <a16:creationId xmlns:a16="http://schemas.microsoft.com/office/drawing/2014/main" id="{B9CD6A8F-4846-03C2-519F-E5E447869966}"/>
+                <a16:creationId xmlns:a16="http://schemas.microsoft.com/office/drawing/2014/main" id="{A489E76F-C509-FEF2-BE75-10C60FA74C64}"/>
               </a:ext>
             </a:extLst>
           </p:cNvPr>
@@ -23241,7 +23234,7 @@
           <p:cNvPr id="25" name="矢印: 右 24">
             <a:extLst>
               <a:ext uri="{FF2B5EF4-FFF2-40B4-BE49-F238E27FC236}">
-                <a16:creationId xmlns:a16="http://schemas.microsoft.com/office/drawing/2014/main" id="{9773484F-734F-A88C-C132-417ED336FCDA}"/>
+                <a16:creationId xmlns:a16="http://schemas.microsoft.com/office/drawing/2014/main" id="{D28E3F2F-75E5-AAEB-6D6D-4DB4D764C14D}"/>
               </a:ext>
             </a:extLst>
           </p:cNvPr>
@@ -23309,7 +23302,7 @@
           <p:cNvPr id="26" name="矢印: 右 25">
             <a:extLst>
               <a:ext uri="{FF2B5EF4-FFF2-40B4-BE49-F238E27FC236}">
-                <a16:creationId xmlns:a16="http://schemas.microsoft.com/office/drawing/2014/main" id="{16169BD1-5F16-028B-3523-46B72BA21686}"/>
+                <a16:creationId xmlns:a16="http://schemas.microsoft.com/office/drawing/2014/main" id="{1CBAF386-D4DE-BF70-E5D9-412C14F581CD}"/>
               </a:ext>
             </a:extLst>
           </p:cNvPr>
@@ -23377,7 +23370,7 @@
           <p:cNvPr id="27" name="四角形: 角を丸くする 26">
             <a:extLst>
               <a:ext uri="{FF2B5EF4-FFF2-40B4-BE49-F238E27FC236}">
-                <a16:creationId xmlns:a16="http://schemas.microsoft.com/office/drawing/2014/main" id="{93E2844C-78F3-E49F-EC49-EC46DA1723F5}"/>
+                <a16:creationId xmlns:a16="http://schemas.microsoft.com/office/drawing/2014/main" id="{75905F58-4215-6A28-9B3A-B6E40B40AEC9}"/>
               </a:ext>
             </a:extLst>
           </p:cNvPr>
@@ -23447,7 +23440,7 @@
           <p:cNvPr id="28" name="正方形/長方形 27">
             <a:extLst>
               <a:ext uri="{FF2B5EF4-FFF2-40B4-BE49-F238E27FC236}">
-                <a16:creationId xmlns:a16="http://schemas.microsoft.com/office/drawing/2014/main" id="{2F2A8FB1-54B0-0BF1-0C23-C7E246EA337C}"/>
+                <a16:creationId xmlns:a16="http://schemas.microsoft.com/office/drawing/2014/main" id="{944C9D4B-B0CD-7AAC-8DD0-FB808B473198}"/>
               </a:ext>
             </a:extLst>
           </p:cNvPr>
@@ -23515,7 +23508,7 @@
           <p:cNvPr id="29" name="テキスト ボックス 28">
             <a:extLst>
               <a:ext uri="{FF2B5EF4-FFF2-40B4-BE49-F238E27FC236}">
-                <a16:creationId xmlns:a16="http://schemas.microsoft.com/office/drawing/2014/main" id="{22771532-B6F6-2BFE-A122-27E7FF5EA283}"/>
+                <a16:creationId xmlns:a16="http://schemas.microsoft.com/office/drawing/2014/main" id="{84C92B29-55EE-8774-E3B5-F8AB805BB5F7}"/>
               </a:ext>
             </a:extLst>
           </p:cNvPr>
@@ -23561,7 +23554,7 @@
           <p:cNvPr id="30" name="テキスト ボックス 29">
             <a:extLst>
               <a:ext uri="{FF2B5EF4-FFF2-40B4-BE49-F238E27FC236}">
-                <a16:creationId xmlns:a16="http://schemas.microsoft.com/office/drawing/2014/main" id="{F2A1F08D-795A-2E8A-E590-D308D8B36455}"/>
+                <a16:creationId xmlns:a16="http://schemas.microsoft.com/office/drawing/2014/main" id="{4E5177C3-5927-7613-EE30-978924413172}"/>
               </a:ext>
             </a:extLst>
           </p:cNvPr>
@@ -23605,7 +23598,7 @@
     </p:spTree>
     <p:extLst>
       <p:ext uri="{BB962C8B-B14F-4D97-AF65-F5344CB8AC3E}">
-        <p14:creationId xmlns:p14="http://schemas.microsoft.com/office/powerpoint/2010/main" val="3935046322"/>
+        <p14:creationId xmlns:p14="http://schemas.microsoft.com/office/powerpoint/2010/main" val="211992938"/>
       </p:ext>
     </p:extLst>
   </p:cSld>
@@ -23637,7 +23630,7 @@
           <p:cNvPr id="2" name="正方形/長方形 1">
             <a:extLst>
               <a:ext uri="{FF2B5EF4-FFF2-40B4-BE49-F238E27FC236}">
-                <a16:creationId xmlns:a16="http://schemas.microsoft.com/office/drawing/2014/main" id="{7A3FDE90-0919-ED97-0EA0-E185E598A4B3}"/>
+                <a16:creationId xmlns:a16="http://schemas.microsoft.com/office/drawing/2014/main" id="{FE15C977-F761-20CD-1C50-5679B25100B3}"/>
               </a:ext>
             </a:extLst>
           </p:cNvPr>
@@ -23705,7 +23698,7 @@
           <p:cNvPr id="3" name="正方形/長方形 2">
             <a:extLst>
               <a:ext uri="{FF2B5EF4-FFF2-40B4-BE49-F238E27FC236}">
-                <a16:creationId xmlns:a16="http://schemas.microsoft.com/office/drawing/2014/main" id="{469BDEC3-4853-A197-F828-608B5B32F2F7}"/>
+                <a16:creationId xmlns:a16="http://schemas.microsoft.com/office/drawing/2014/main" id="{FFC8E041-9B60-C187-4C67-DEC3CDB1EF43}"/>
               </a:ext>
             </a:extLst>
           </p:cNvPr>
@@ -23773,7 +23766,7 @@
           <p:cNvPr id="4" name="テキスト ボックス 3">
             <a:extLst>
               <a:ext uri="{FF2B5EF4-FFF2-40B4-BE49-F238E27FC236}">
-                <a16:creationId xmlns:a16="http://schemas.microsoft.com/office/drawing/2014/main" id="{A501E7DC-BFB7-243B-C58C-258397046434}"/>
+                <a16:creationId xmlns:a16="http://schemas.microsoft.com/office/drawing/2014/main" id="{45CAC1FE-8D30-5BC1-3E3D-0BD23A11FB03}"/>
               </a:ext>
             </a:extLst>
           </p:cNvPr>
@@ -23826,7 +23819,7 @@
           <p:cNvPr id="5" name="テキスト ボックス 4">
             <a:extLst>
               <a:ext uri="{FF2B5EF4-FFF2-40B4-BE49-F238E27FC236}">
-                <a16:creationId xmlns:a16="http://schemas.microsoft.com/office/drawing/2014/main" id="{9D3ACD44-3892-B5F1-E8E9-3FDC07A2D821}"/>
+                <a16:creationId xmlns:a16="http://schemas.microsoft.com/office/drawing/2014/main" id="{B5A3F726-D1EA-292D-B195-F72C1402CE01}"/>
               </a:ext>
             </a:extLst>
           </p:cNvPr>
@@ -23872,7 +23865,7 @@
           <p:cNvPr id="6" name="正方形/長方形 5">
             <a:extLst>
               <a:ext uri="{FF2B5EF4-FFF2-40B4-BE49-F238E27FC236}">
-                <a16:creationId xmlns:a16="http://schemas.microsoft.com/office/drawing/2014/main" id="{46BFE8B9-F749-B6F7-7BD1-B12AE4B9A8B9}"/>
+                <a16:creationId xmlns:a16="http://schemas.microsoft.com/office/drawing/2014/main" id="{99812EE9-AD69-72E7-6F43-EAE73665782A}"/>
               </a:ext>
             </a:extLst>
           </p:cNvPr>
@@ -23940,7 +23933,7 @@
           <p:cNvPr id="7" name="四角形: 角を丸くする 6">
             <a:extLst>
               <a:ext uri="{FF2B5EF4-FFF2-40B4-BE49-F238E27FC236}">
-                <a16:creationId xmlns:a16="http://schemas.microsoft.com/office/drawing/2014/main" id="{D83FBF1F-11BB-F1FF-2225-FB5A63D73A8D}"/>
+                <a16:creationId xmlns:a16="http://schemas.microsoft.com/office/drawing/2014/main" id="{31986121-972F-4901-CE47-DA9F30D7DDD2}"/>
               </a:ext>
             </a:extLst>
           </p:cNvPr>
@@ -24010,7 +24003,7 @@
           <p:cNvPr id="8" name="テキスト ボックス 7">
             <a:extLst>
               <a:ext uri="{FF2B5EF4-FFF2-40B4-BE49-F238E27FC236}">
-                <a16:creationId xmlns:a16="http://schemas.microsoft.com/office/drawing/2014/main" id="{E8E582CA-6327-7528-3FBB-C7C690BA103B}"/>
+                <a16:creationId xmlns:a16="http://schemas.microsoft.com/office/drawing/2014/main" id="{3A913C15-8C18-C824-BFA8-3DDE3B743778}"/>
               </a:ext>
             </a:extLst>
           </p:cNvPr>
@@ -24056,7 +24049,7 @@
           <p:cNvPr id="9" name="テキスト ボックス 8">
             <a:extLst>
               <a:ext uri="{FF2B5EF4-FFF2-40B4-BE49-F238E27FC236}">
-                <a16:creationId xmlns:a16="http://schemas.microsoft.com/office/drawing/2014/main" id="{BDDC7FD3-3EE7-05EF-0E36-ED94D05C8FA3}"/>
+                <a16:creationId xmlns:a16="http://schemas.microsoft.com/office/drawing/2014/main" id="{5A30FD06-160B-A6C6-0927-16CE6573C5B9}"/>
               </a:ext>
             </a:extLst>
           </p:cNvPr>
@@ -24066,7 +24059,7 @@
         <p:spPr>
           <a:xfrm>
             <a:off x="812800" y="6375400"/>
-            <a:ext cx="5080000" cy="177800"/>
+            <a:ext cx="6604000" cy="177800"/>
           </a:xfrm>
           <a:prstGeom prst="rect">
             <a:avLst/>
@@ -24092,7 +24085,7 @@
                 <a:latin typeface="Yu Gothic UI" panose="020B0500000000000000" pitchFamily="50" charset="-128"/>
                 <a:ea typeface="Yu Gothic UI" panose="020B0500000000000000" pitchFamily="50" charset="-128"/>
               </a:rPr>
-              <a:t>簡易デジタルサイネージ ｜ 操作ガイド</a:t>
+              <a:t>簡単！シンプル！サイネージ ｜ 操作ガイド</a:t>
             </a:r>
           </a:p>
         </p:txBody>
@@ -24102,7 +24095,7 @@
           <p:cNvPr id="10" name="テキスト ボックス 9">
             <a:extLst>
               <a:ext uri="{FF2B5EF4-FFF2-40B4-BE49-F238E27FC236}">
-                <a16:creationId xmlns:a16="http://schemas.microsoft.com/office/drawing/2014/main" id="{0275CE52-A9F5-641B-BA32-2F923902B972}"/>
+                <a16:creationId xmlns:a16="http://schemas.microsoft.com/office/drawing/2014/main" id="{44180D1A-690E-4777-20A1-84E2A588DF2F}"/>
               </a:ext>
             </a:extLst>
           </p:cNvPr>
@@ -24155,7 +24148,7 @@
           <p:cNvPr id="11" name="四角形: 角を丸くする 10">
             <a:extLst>
               <a:ext uri="{FF2B5EF4-FFF2-40B4-BE49-F238E27FC236}">
-                <a16:creationId xmlns:a16="http://schemas.microsoft.com/office/drawing/2014/main" id="{B98010B2-5EB5-AD24-CE92-E7821B7EA44B}"/>
+                <a16:creationId xmlns:a16="http://schemas.microsoft.com/office/drawing/2014/main" id="{2A829F24-045C-CB41-7619-487A1AB0D71B}"/>
               </a:ext>
             </a:extLst>
           </p:cNvPr>
@@ -24211,7 +24204,7 @@
           <p:cNvPr id="12" name="楕円 11">
             <a:extLst>
               <a:ext uri="{FF2B5EF4-FFF2-40B4-BE49-F238E27FC236}">
-                <a16:creationId xmlns:a16="http://schemas.microsoft.com/office/drawing/2014/main" id="{5597DBFE-9F1D-17D1-2735-8B2D4A7D8D3B}"/>
+                <a16:creationId xmlns:a16="http://schemas.microsoft.com/office/drawing/2014/main" id="{1776E471-E9D5-8CC9-437D-51EA5332B6A0}"/>
               </a:ext>
             </a:extLst>
           </p:cNvPr>
@@ -24279,7 +24272,7 @@
           <p:cNvPr id="13" name="テキスト ボックス 12">
             <a:extLst>
               <a:ext uri="{FF2B5EF4-FFF2-40B4-BE49-F238E27FC236}">
-                <a16:creationId xmlns:a16="http://schemas.microsoft.com/office/drawing/2014/main" id="{4E5533FC-860B-0DFA-3368-66161E893C63}"/>
+                <a16:creationId xmlns:a16="http://schemas.microsoft.com/office/drawing/2014/main" id="{0062D32D-633B-4A2F-CF52-4755001D19B7}"/>
               </a:ext>
             </a:extLst>
           </p:cNvPr>
@@ -24332,7 +24325,7 @@
           <p:cNvPr id="14" name="テキスト ボックス 13">
             <a:extLst>
               <a:ext uri="{FF2B5EF4-FFF2-40B4-BE49-F238E27FC236}">
-                <a16:creationId xmlns:a16="http://schemas.microsoft.com/office/drawing/2014/main" id="{E52E5264-AA9E-2108-05C8-11C9EBCE0478}"/>
+                <a16:creationId xmlns:a16="http://schemas.microsoft.com/office/drawing/2014/main" id="{84C29E51-3D54-A5BE-DFD8-9F718AA33860}"/>
               </a:ext>
             </a:extLst>
           </p:cNvPr>
@@ -24378,7 +24371,7 @@
           <p:cNvPr id="15" name="テキスト ボックス 14">
             <a:extLst>
               <a:ext uri="{FF2B5EF4-FFF2-40B4-BE49-F238E27FC236}">
-                <a16:creationId xmlns:a16="http://schemas.microsoft.com/office/drawing/2014/main" id="{207BE966-C253-F956-1793-AD895A159546}"/>
+                <a16:creationId xmlns:a16="http://schemas.microsoft.com/office/drawing/2014/main" id="{0B0E4883-5EE6-B1A0-3AF2-90E4097E8037}"/>
               </a:ext>
             </a:extLst>
           </p:cNvPr>
@@ -24444,7 +24437,7 @@
           <p:cNvPr id="16" name="四角形: 角を丸くする 15">
             <a:extLst>
               <a:ext uri="{FF2B5EF4-FFF2-40B4-BE49-F238E27FC236}">
-                <a16:creationId xmlns:a16="http://schemas.microsoft.com/office/drawing/2014/main" id="{0E7948A2-5D77-D5DF-0A29-8A638E40D877}"/>
+                <a16:creationId xmlns:a16="http://schemas.microsoft.com/office/drawing/2014/main" id="{4D978324-4B39-421A-CCE5-6A58B4018A6D}"/>
               </a:ext>
             </a:extLst>
           </p:cNvPr>
@@ -24500,7 +24493,7 @@
           <p:cNvPr id="17" name="楕円 16">
             <a:extLst>
               <a:ext uri="{FF2B5EF4-FFF2-40B4-BE49-F238E27FC236}">
-                <a16:creationId xmlns:a16="http://schemas.microsoft.com/office/drawing/2014/main" id="{CDBD6BE8-1EAB-495A-6990-4C9DE3701FCF}"/>
+                <a16:creationId xmlns:a16="http://schemas.microsoft.com/office/drawing/2014/main" id="{0B16B606-9CDC-6F9A-421C-EE9392410544}"/>
               </a:ext>
             </a:extLst>
           </p:cNvPr>
@@ -24568,7 +24561,7 @@
           <p:cNvPr id="18" name="テキスト ボックス 17">
             <a:extLst>
               <a:ext uri="{FF2B5EF4-FFF2-40B4-BE49-F238E27FC236}">
-                <a16:creationId xmlns:a16="http://schemas.microsoft.com/office/drawing/2014/main" id="{F7075823-1194-95DD-11D8-BC899988AB0D}"/>
+                <a16:creationId xmlns:a16="http://schemas.microsoft.com/office/drawing/2014/main" id="{44963660-5C00-907A-CAF9-0478D6064F47}"/>
               </a:ext>
             </a:extLst>
           </p:cNvPr>
@@ -24621,7 +24614,7 @@
           <p:cNvPr id="19" name="テキスト ボックス 18">
             <a:extLst>
               <a:ext uri="{FF2B5EF4-FFF2-40B4-BE49-F238E27FC236}">
-                <a16:creationId xmlns:a16="http://schemas.microsoft.com/office/drawing/2014/main" id="{1648B965-38F2-2791-3EEB-3B88994CAAFB}"/>
+                <a16:creationId xmlns:a16="http://schemas.microsoft.com/office/drawing/2014/main" id="{FE780C4C-9687-5C18-125C-A47A3BA890DE}"/>
               </a:ext>
             </a:extLst>
           </p:cNvPr>
@@ -24667,7 +24660,7 @@
           <p:cNvPr id="20" name="テキスト ボックス 19">
             <a:extLst>
               <a:ext uri="{FF2B5EF4-FFF2-40B4-BE49-F238E27FC236}">
-                <a16:creationId xmlns:a16="http://schemas.microsoft.com/office/drawing/2014/main" id="{8F329FCF-6413-5F7D-08F1-DE8F1FA0616D}"/>
+                <a16:creationId xmlns:a16="http://schemas.microsoft.com/office/drawing/2014/main" id="{6D661D51-14E3-0A1B-9039-BB3EC9269AFC}"/>
               </a:ext>
             </a:extLst>
           </p:cNvPr>
@@ -24770,7 +24763,7 @@
           <p:cNvPr id="21" name="四角形: 角を丸くする 20">
             <a:extLst>
               <a:ext uri="{FF2B5EF4-FFF2-40B4-BE49-F238E27FC236}">
-                <a16:creationId xmlns:a16="http://schemas.microsoft.com/office/drawing/2014/main" id="{598E28A7-867E-252E-47A1-3AAB5266FC69}"/>
+                <a16:creationId xmlns:a16="http://schemas.microsoft.com/office/drawing/2014/main" id="{23B02095-1B7C-2A30-BC7C-FBD783C76864}"/>
               </a:ext>
             </a:extLst>
           </p:cNvPr>
@@ -24826,7 +24819,7 @@
           <p:cNvPr id="22" name="楕円 21">
             <a:extLst>
               <a:ext uri="{FF2B5EF4-FFF2-40B4-BE49-F238E27FC236}">
-                <a16:creationId xmlns:a16="http://schemas.microsoft.com/office/drawing/2014/main" id="{6B8A78A4-87BF-116D-5877-C0CB14142C2B}"/>
+                <a16:creationId xmlns:a16="http://schemas.microsoft.com/office/drawing/2014/main" id="{89F41B4A-9565-9CEF-565A-C4C1D51FD3D5}"/>
               </a:ext>
             </a:extLst>
           </p:cNvPr>
@@ -24894,7 +24887,7 @@
           <p:cNvPr id="23" name="テキスト ボックス 22">
             <a:extLst>
               <a:ext uri="{FF2B5EF4-FFF2-40B4-BE49-F238E27FC236}">
-                <a16:creationId xmlns:a16="http://schemas.microsoft.com/office/drawing/2014/main" id="{28899BC5-47C6-A92A-FFF7-5386F7D75751}"/>
+                <a16:creationId xmlns:a16="http://schemas.microsoft.com/office/drawing/2014/main" id="{F12AAE91-6EE1-37F3-6D60-F8F4947FB001}"/>
               </a:ext>
             </a:extLst>
           </p:cNvPr>
@@ -24947,7 +24940,7 @@
           <p:cNvPr id="24" name="テキスト ボックス 23">
             <a:extLst>
               <a:ext uri="{FF2B5EF4-FFF2-40B4-BE49-F238E27FC236}">
-                <a16:creationId xmlns:a16="http://schemas.microsoft.com/office/drawing/2014/main" id="{1769E0A3-F7C9-2704-507E-7189A5237F1A}"/>
+                <a16:creationId xmlns:a16="http://schemas.microsoft.com/office/drawing/2014/main" id="{F9B6515D-D756-944C-35E8-6478F91727CE}"/>
               </a:ext>
             </a:extLst>
           </p:cNvPr>
@@ -24993,7 +24986,7 @@
           <p:cNvPr id="25" name="テキスト ボックス 24">
             <a:extLst>
               <a:ext uri="{FF2B5EF4-FFF2-40B4-BE49-F238E27FC236}">
-                <a16:creationId xmlns:a16="http://schemas.microsoft.com/office/drawing/2014/main" id="{8804E984-A4C4-6C07-BBF5-A2808C2F1BA5}"/>
+                <a16:creationId xmlns:a16="http://schemas.microsoft.com/office/drawing/2014/main" id="{1DA82EB1-BB04-2550-5992-32BED85C335C}"/>
               </a:ext>
             </a:extLst>
           </p:cNvPr>
@@ -25039,7 +25032,7 @@
           <p:cNvPr id="26" name="四角形: 角を丸くする 25">
             <a:extLst>
               <a:ext uri="{FF2B5EF4-FFF2-40B4-BE49-F238E27FC236}">
-                <a16:creationId xmlns:a16="http://schemas.microsoft.com/office/drawing/2014/main" id="{F2941431-4F62-7C0D-4760-3A4A4FCE0C32}"/>
+                <a16:creationId xmlns:a16="http://schemas.microsoft.com/office/drawing/2014/main" id="{1E4CDFA3-E888-6DC8-D710-EE6AD2E029F6}"/>
               </a:ext>
             </a:extLst>
           </p:cNvPr>
@@ -25109,7 +25102,7 @@
           <p:cNvPr id="27" name="正方形/長方形 26">
             <a:extLst>
               <a:ext uri="{FF2B5EF4-FFF2-40B4-BE49-F238E27FC236}">
-                <a16:creationId xmlns:a16="http://schemas.microsoft.com/office/drawing/2014/main" id="{AF558F2D-400F-416D-0A2F-06BEC5AFEF2E}"/>
+                <a16:creationId xmlns:a16="http://schemas.microsoft.com/office/drawing/2014/main" id="{F2887FDC-8DDE-0950-78E9-5E2DDF78BEAC}"/>
               </a:ext>
             </a:extLst>
           </p:cNvPr>
@@ -25177,7 +25170,7 @@
           <p:cNvPr id="28" name="テキスト ボックス 27">
             <a:extLst>
               <a:ext uri="{FF2B5EF4-FFF2-40B4-BE49-F238E27FC236}">
-                <a16:creationId xmlns:a16="http://schemas.microsoft.com/office/drawing/2014/main" id="{1EE2C398-9F7A-7255-DAA2-54AC75BBB9CE}"/>
+                <a16:creationId xmlns:a16="http://schemas.microsoft.com/office/drawing/2014/main" id="{430FE1A1-27C1-DFB8-C1BD-EABCA6709E0A}"/>
               </a:ext>
             </a:extLst>
           </p:cNvPr>
@@ -25223,7 +25216,7 @@
           <p:cNvPr id="29" name="テキスト ボックス 28">
             <a:extLst>
               <a:ext uri="{FF2B5EF4-FFF2-40B4-BE49-F238E27FC236}">
-                <a16:creationId xmlns:a16="http://schemas.microsoft.com/office/drawing/2014/main" id="{3853DA7C-C1A5-F617-D925-9A079E14255A}"/>
+                <a16:creationId xmlns:a16="http://schemas.microsoft.com/office/drawing/2014/main" id="{5B686924-9C36-8210-55D7-D62229FE2A44}"/>
               </a:ext>
             </a:extLst>
           </p:cNvPr>
@@ -25269,7 +25262,7 @@
           <p:cNvPr id="30" name="四角形: 角を丸くする 29">
             <a:extLst>
               <a:ext uri="{FF2B5EF4-FFF2-40B4-BE49-F238E27FC236}">
-                <a16:creationId xmlns:a16="http://schemas.microsoft.com/office/drawing/2014/main" id="{55F6A349-0DBB-5C40-9E47-A3216B86962C}"/>
+                <a16:creationId xmlns:a16="http://schemas.microsoft.com/office/drawing/2014/main" id="{A79C5BE6-31F7-2D34-C811-A3F5147752C4}"/>
               </a:ext>
             </a:extLst>
           </p:cNvPr>
@@ -25339,7 +25332,7 @@
           <p:cNvPr id="31" name="正方形/長方形 30">
             <a:extLst>
               <a:ext uri="{FF2B5EF4-FFF2-40B4-BE49-F238E27FC236}">
-                <a16:creationId xmlns:a16="http://schemas.microsoft.com/office/drawing/2014/main" id="{61CEA9A3-6817-62AE-2CB9-38C770459F56}"/>
+                <a16:creationId xmlns:a16="http://schemas.microsoft.com/office/drawing/2014/main" id="{5E0B78C6-AEA8-40EF-7263-E6C3CB57024F}"/>
               </a:ext>
             </a:extLst>
           </p:cNvPr>
@@ -25407,7 +25400,7 @@
           <p:cNvPr id="32" name="テキスト ボックス 31">
             <a:extLst>
               <a:ext uri="{FF2B5EF4-FFF2-40B4-BE49-F238E27FC236}">
-                <a16:creationId xmlns:a16="http://schemas.microsoft.com/office/drawing/2014/main" id="{0E40B98F-D7FE-5EF7-BF5D-CF1E8AD00932}"/>
+                <a16:creationId xmlns:a16="http://schemas.microsoft.com/office/drawing/2014/main" id="{76964375-B5E2-4937-7C18-C7E5C9899609}"/>
               </a:ext>
             </a:extLst>
           </p:cNvPr>
@@ -25453,7 +25446,7 @@
           <p:cNvPr id="33" name="テキスト ボックス 32">
             <a:extLst>
               <a:ext uri="{FF2B5EF4-FFF2-40B4-BE49-F238E27FC236}">
-                <a16:creationId xmlns:a16="http://schemas.microsoft.com/office/drawing/2014/main" id="{99BC628B-5E39-C1EC-0AFF-50F09D743736}"/>
+                <a16:creationId xmlns:a16="http://schemas.microsoft.com/office/drawing/2014/main" id="{6ECAFBB1-D567-E29E-DCE4-4543F18F0FAE}"/>
               </a:ext>
             </a:extLst>
           </p:cNvPr>
@@ -25497,7 +25490,7 @@
     </p:spTree>
     <p:extLst>
       <p:ext uri="{BB962C8B-B14F-4D97-AF65-F5344CB8AC3E}">
-        <p14:creationId xmlns:p14="http://schemas.microsoft.com/office/powerpoint/2010/main" val="2990889254"/>
+        <p14:creationId xmlns:p14="http://schemas.microsoft.com/office/powerpoint/2010/main" val="779923640"/>
       </p:ext>
     </p:extLst>
   </p:cSld>
@@ -25529,7 +25522,7 @@
           <p:cNvPr id="2" name="正方形/長方形 1">
             <a:extLst>
               <a:ext uri="{FF2B5EF4-FFF2-40B4-BE49-F238E27FC236}">
-                <a16:creationId xmlns:a16="http://schemas.microsoft.com/office/drawing/2014/main" id="{3370DEC1-92D2-C799-F86E-5F75D5A3F95D}"/>
+                <a16:creationId xmlns:a16="http://schemas.microsoft.com/office/drawing/2014/main" id="{65F8B646-2A54-0C1D-1842-467342B82375}"/>
               </a:ext>
             </a:extLst>
           </p:cNvPr>
@@ -25597,7 +25590,7 @@
           <p:cNvPr id="3" name="正方形/長方形 2">
             <a:extLst>
               <a:ext uri="{FF2B5EF4-FFF2-40B4-BE49-F238E27FC236}">
-                <a16:creationId xmlns:a16="http://schemas.microsoft.com/office/drawing/2014/main" id="{64CBDCE7-4CF7-A315-E9EB-B8D053C3F30D}"/>
+                <a16:creationId xmlns:a16="http://schemas.microsoft.com/office/drawing/2014/main" id="{3B7F9BD7-DE5E-783A-8E51-06C0D9797A5C}"/>
               </a:ext>
             </a:extLst>
           </p:cNvPr>
@@ -25665,7 +25658,7 @@
           <p:cNvPr id="4" name="テキスト ボックス 3">
             <a:extLst>
               <a:ext uri="{FF2B5EF4-FFF2-40B4-BE49-F238E27FC236}">
-                <a16:creationId xmlns:a16="http://schemas.microsoft.com/office/drawing/2014/main" id="{E699A3B6-81DF-0C9A-E620-06348FF76211}"/>
+                <a16:creationId xmlns:a16="http://schemas.microsoft.com/office/drawing/2014/main" id="{74848120-E998-DF5B-3A2D-481190AD5C93}"/>
               </a:ext>
             </a:extLst>
           </p:cNvPr>
@@ -25718,7 +25711,7 @@
           <p:cNvPr id="5" name="テキスト ボックス 4">
             <a:extLst>
               <a:ext uri="{FF2B5EF4-FFF2-40B4-BE49-F238E27FC236}">
-                <a16:creationId xmlns:a16="http://schemas.microsoft.com/office/drawing/2014/main" id="{34ACB8C5-266D-FAB7-88F6-99FF513376ED}"/>
+                <a16:creationId xmlns:a16="http://schemas.microsoft.com/office/drawing/2014/main" id="{930B5484-E49B-3AFE-0003-9789C537D499}"/>
               </a:ext>
             </a:extLst>
           </p:cNvPr>
@@ -25764,7 +25757,7 @@
           <p:cNvPr id="6" name="正方形/長方形 5">
             <a:extLst>
               <a:ext uri="{FF2B5EF4-FFF2-40B4-BE49-F238E27FC236}">
-                <a16:creationId xmlns:a16="http://schemas.microsoft.com/office/drawing/2014/main" id="{83B1A1D5-4EC6-81D5-D330-BFE2F96DC88E}"/>
+                <a16:creationId xmlns:a16="http://schemas.microsoft.com/office/drawing/2014/main" id="{2372A144-BF84-120B-5E01-68C0F9960F42}"/>
               </a:ext>
             </a:extLst>
           </p:cNvPr>
@@ -25832,7 +25825,7 @@
           <p:cNvPr id="7" name="四角形: 角を丸くする 6">
             <a:extLst>
               <a:ext uri="{FF2B5EF4-FFF2-40B4-BE49-F238E27FC236}">
-                <a16:creationId xmlns:a16="http://schemas.microsoft.com/office/drawing/2014/main" id="{70802874-9379-84A8-3CCD-C37687CE5EEF}"/>
+                <a16:creationId xmlns:a16="http://schemas.microsoft.com/office/drawing/2014/main" id="{0E05D1F2-BC6B-8120-292E-EC5AD6B2F494}"/>
               </a:ext>
             </a:extLst>
           </p:cNvPr>
@@ -25902,7 +25895,7 @@
           <p:cNvPr id="8" name="テキスト ボックス 7">
             <a:extLst>
               <a:ext uri="{FF2B5EF4-FFF2-40B4-BE49-F238E27FC236}">
-                <a16:creationId xmlns:a16="http://schemas.microsoft.com/office/drawing/2014/main" id="{1330E87E-2E52-8199-3CEA-F8F132726410}"/>
+                <a16:creationId xmlns:a16="http://schemas.microsoft.com/office/drawing/2014/main" id="{080C453D-80AF-0CEC-2843-8DBD7D765C88}"/>
               </a:ext>
             </a:extLst>
           </p:cNvPr>
@@ -25948,7 +25941,7 @@
           <p:cNvPr id="9" name="テキスト ボックス 8">
             <a:extLst>
               <a:ext uri="{FF2B5EF4-FFF2-40B4-BE49-F238E27FC236}">
-                <a16:creationId xmlns:a16="http://schemas.microsoft.com/office/drawing/2014/main" id="{04B6D004-17D6-285B-4286-E797518020D4}"/>
+                <a16:creationId xmlns:a16="http://schemas.microsoft.com/office/drawing/2014/main" id="{B935303D-8A83-3C7F-1E34-0C9E1C5B39E4}"/>
               </a:ext>
             </a:extLst>
           </p:cNvPr>
@@ -25958,7 +25951,7 @@
         <p:spPr>
           <a:xfrm>
             <a:off x="812800" y="6375400"/>
-            <a:ext cx="5080000" cy="177800"/>
+            <a:ext cx="6604000" cy="177800"/>
           </a:xfrm>
           <a:prstGeom prst="rect">
             <a:avLst/>
@@ -25984,7 +25977,7 @@
                 <a:latin typeface="Yu Gothic UI" panose="020B0500000000000000" pitchFamily="50" charset="-128"/>
                 <a:ea typeface="Yu Gothic UI" panose="020B0500000000000000" pitchFamily="50" charset="-128"/>
               </a:rPr>
-              <a:t>簡易デジタルサイネージ ｜ 操作ガイド</a:t>
+              <a:t>簡単！シンプル！サイネージ ｜ 操作ガイド</a:t>
             </a:r>
           </a:p>
         </p:txBody>
@@ -25994,7 +25987,7 @@
           <p:cNvPr id="10" name="テキスト ボックス 9">
             <a:extLst>
               <a:ext uri="{FF2B5EF4-FFF2-40B4-BE49-F238E27FC236}">
-                <a16:creationId xmlns:a16="http://schemas.microsoft.com/office/drawing/2014/main" id="{C63E746C-4FBF-6555-7CA7-21E3ED7D6183}"/>
+                <a16:creationId xmlns:a16="http://schemas.microsoft.com/office/drawing/2014/main" id="{1803513D-C209-D150-DEDA-21F7C46F232C}"/>
               </a:ext>
             </a:extLst>
           </p:cNvPr>
@@ -26047,7 +26040,7 @@
           <p:cNvPr id="11" name="テキスト ボックス 10">
             <a:extLst>
               <a:ext uri="{FF2B5EF4-FFF2-40B4-BE49-F238E27FC236}">
-                <a16:creationId xmlns:a16="http://schemas.microsoft.com/office/drawing/2014/main" id="{A65FF71A-03B8-FF31-194F-FA1B4758C7C3}"/>
+                <a16:creationId xmlns:a16="http://schemas.microsoft.com/office/drawing/2014/main" id="{C81E2DA4-D8AB-6311-B51F-EA8993D0FFDA}"/>
               </a:ext>
             </a:extLst>
           </p:cNvPr>
@@ -26113,7 +26106,7 @@
           <p:cNvPr id="12" name="表 11">
             <a:extLst>
               <a:ext uri="{FF2B5EF4-FFF2-40B4-BE49-F238E27FC236}">
-                <a16:creationId xmlns:a16="http://schemas.microsoft.com/office/drawing/2014/main" id="{2973EEE2-4CE5-12EB-5001-1771C03ACEC5}"/>
+                <a16:creationId xmlns:a16="http://schemas.microsoft.com/office/drawing/2014/main" id="{A0A0E598-EDA1-4DDA-3862-D30A1CDF1C12}"/>
               </a:ext>
             </a:extLst>
           </p:cNvPr>
@@ -26123,7 +26116,7 @@
           <p:nvPr>
             <p:extLst>
               <p:ext uri="{D42A27DB-BD31-4B8C-83A1-F6EECF244321}">
-                <p14:modId xmlns:p14="http://schemas.microsoft.com/office/powerpoint/2010/main" val="3344222704"/>
+                <p14:modId xmlns:p14="http://schemas.microsoft.com/office/powerpoint/2010/main" val="3479897068"/>
               </p:ext>
             </p:extLst>
           </p:nvPr>
@@ -26142,21 +26135,21 @@
                 <a:gridCol w="1905000">
                   <a:extLst>
                     <a:ext uri="{9D8B030D-6E8A-4147-A177-3AD203B41FA5}">
-                      <a16:colId xmlns:a16="http://schemas.microsoft.com/office/drawing/2014/main" val="716195101"/>
+                      <a16:colId xmlns:a16="http://schemas.microsoft.com/office/drawing/2014/main" val="238635501"/>
                     </a:ext>
                   </a:extLst>
                 </a:gridCol>
                 <a:gridCol w="2413000">
                   <a:extLst>
                     <a:ext uri="{9D8B030D-6E8A-4147-A177-3AD203B41FA5}">
-                      <a16:colId xmlns:a16="http://schemas.microsoft.com/office/drawing/2014/main" val="3084786699"/>
+                      <a16:colId xmlns:a16="http://schemas.microsoft.com/office/drawing/2014/main" val="3218961145"/>
                     </a:ext>
                   </a:extLst>
                 </a:gridCol>
                 <a:gridCol w="6248400">
                   <a:extLst>
                     <a:ext uri="{9D8B030D-6E8A-4147-A177-3AD203B41FA5}">
-                      <a16:colId xmlns:a16="http://schemas.microsoft.com/office/drawing/2014/main" val="4013546612"/>
+                      <a16:colId xmlns:a16="http://schemas.microsoft.com/office/drawing/2014/main" val="3003089725"/>
                     </a:ext>
                   </a:extLst>
                 </a:gridCol>
@@ -26263,7 +26256,7 @@
                 </a:tc>
                 <a:extLst>
                   <a:ext uri="{0D108BD9-81ED-4DB2-BD59-A6C34878D82A}">
-                    <a16:rowId xmlns:a16="http://schemas.microsoft.com/office/drawing/2014/main" val="197857850"/>
+                    <a16:rowId xmlns:a16="http://schemas.microsoft.com/office/drawing/2014/main" val="302807101"/>
                   </a:ext>
                 </a:extLst>
               </a:tr>
@@ -26421,7 +26414,7 @@
                 </a:tc>
                 <a:extLst>
                   <a:ext uri="{0D108BD9-81ED-4DB2-BD59-A6C34878D82A}">
-                    <a16:rowId xmlns:a16="http://schemas.microsoft.com/office/drawing/2014/main" val="3327741837"/>
+                    <a16:rowId xmlns:a16="http://schemas.microsoft.com/office/drawing/2014/main" val="2860804595"/>
                   </a:ext>
                 </a:extLst>
               </a:tr>
@@ -26586,7 +26579,7 @@
                 </a:tc>
                 <a:extLst>
                   <a:ext uri="{0D108BD9-81ED-4DB2-BD59-A6C34878D82A}">
-                    <a16:rowId xmlns:a16="http://schemas.microsoft.com/office/drawing/2014/main" val="788704831"/>
+                    <a16:rowId xmlns:a16="http://schemas.microsoft.com/office/drawing/2014/main" val="1568476846"/>
                   </a:ext>
                 </a:extLst>
               </a:tr>
@@ -26714,7 +26707,7 @@
                 </a:tc>
                 <a:extLst>
                   <a:ext uri="{0D108BD9-81ED-4DB2-BD59-A6C34878D82A}">
-                    <a16:rowId xmlns:a16="http://schemas.microsoft.com/office/drawing/2014/main" val="3816834211"/>
+                    <a16:rowId xmlns:a16="http://schemas.microsoft.com/office/drawing/2014/main" val="1473597405"/>
                   </a:ext>
                 </a:extLst>
               </a:tr>
@@ -26727,7 +26720,7 @@
           <p:cNvPr id="13" name="四角形: 角を丸くする 12">
             <a:extLst>
               <a:ext uri="{FF2B5EF4-FFF2-40B4-BE49-F238E27FC236}">
-                <a16:creationId xmlns:a16="http://schemas.microsoft.com/office/drawing/2014/main" id="{1C2A2AF3-92C1-A030-52C1-366D124BCA3E}"/>
+                <a16:creationId xmlns:a16="http://schemas.microsoft.com/office/drawing/2014/main" id="{2CE8AC82-DAC7-7413-D146-005F1EEA9FB0}"/>
               </a:ext>
             </a:extLst>
           </p:cNvPr>
@@ -26797,7 +26790,7 @@
           <p:cNvPr id="14" name="正方形/長方形 13">
             <a:extLst>
               <a:ext uri="{FF2B5EF4-FFF2-40B4-BE49-F238E27FC236}">
-                <a16:creationId xmlns:a16="http://schemas.microsoft.com/office/drawing/2014/main" id="{333989EE-D7BA-330D-1D7F-D87710E4E8AF}"/>
+                <a16:creationId xmlns:a16="http://schemas.microsoft.com/office/drawing/2014/main" id="{9ECD79CF-DD23-BC5B-C301-690E608CD17C}"/>
               </a:ext>
             </a:extLst>
           </p:cNvPr>
@@ -26865,7 +26858,7 @@
           <p:cNvPr id="15" name="テキスト ボックス 14">
             <a:extLst>
               <a:ext uri="{FF2B5EF4-FFF2-40B4-BE49-F238E27FC236}">
-                <a16:creationId xmlns:a16="http://schemas.microsoft.com/office/drawing/2014/main" id="{F327AA4D-AC5B-C54A-0B49-4B4B12910BB0}"/>
+                <a16:creationId xmlns:a16="http://schemas.microsoft.com/office/drawing/2014/main" id="{C02B7D6E-BEED-9119-4180-6FC54BD7DE78}"/>
               </a:ext>
             </a:extLst>
           </p:cNvPr>
@@ -26911,7 +26904,7 @@
           <p:cNvPr id="16" name="テキスト ボックス 15">
             <a:extLst>
               <a:ext uri="{FF2B5EF4-FFF2-40B4-BE49-F238E27FC236}">
-                <a16:creationId xmlns:a16="http://schemas.microsoft.com/office/drawing/2014/main" id="{7354FDCA-559C-7E8E-7D96-FF339E4D56E4}"/>
+                <a16:creationId xmlns:a16="http://schemas.microsoft.com/office/drawing/2014/main" id="{5F96C9DD-2D81-093C-244F-5769989BDD0D}"/>
               </a:ext>
             </a:extLst>
           </p:cNvPr>
@@ -27065,7 +27058,7 @@
     </p:spTree>
     <p:extLst>
       <p:ext uri="{BB962C8B-B14F-4D97-AF65-F5344CB8AC3E}">
-        <p14:creationId xmlns:p14="http://schemas.microsoft.com/office/powerpoint/2010/main" val="3755198244"/>
+        <p14:creationId xmlns:p14="http://schemas.microsoft.com/office/powerpoint/2010/main" val="1077211575"/>
       </p:ext>
     </p:extLst>
   </p:cSld>
@@ -27097,7 +27090,7 @@
           <p:cNvPr id="2" name="正方形/長方形 1">
             <a:extLst>
               <a:ext uri="{FF2B5EF4-FFF2-40B4-BE49-F238E27FC236}">
-                <a16:creationId xmlns:a16="http://schemas.microsoft.com/office/drawing/2014/main" id="{CB48C4FB-4352-6CC4-E74F-DA493610BEEB}"/>
+                <a16:creationId xmlns:a16="http://schemas.microsoft.com/office/drawing/2014/main" id="{EC8D3D7D-9B53-C35A-0899-7778F2B16F82}"/>
               </a:ext>
             </a:extLst>
           </p:cNvPr>
@@ -27165,7 +27158,7 @@
           <p:cNvPr id="3" name="正方形/長方形 2">
             <a:extLst>
               <a:ext uri="{FF2B5EF4-FFF2-40B4-BE49-F238E27FC236}">
-                <a16:creationId xmlns:a16="http://schemas.microsoft.com/office/drawing/2014/main" id="{10670D60-051C-2A45-88AD-AE0376DF1143}"/>
+                <a16:creationId xmlns:a16="http://schemas.microsoft.com/office/drawing/2014/main" id="{D3E152EF-F30B-DD85-154C-219A3C3F9023}"/>
               </a:ext>
             </a:extLst>
           </p:cNvPr>
@@ -27233,7 +27226,7 @@
           <p:cNvPr id="4" name="テキスト ボックス 3">
             <a:extLst>
               <a:ext uri="{FF2B5EF4-FFF2-40B4-BE49-F238E27FC236}">
-                <a16:creationId xmlns:a16="http://schemas.microsoft.com/office/drawing/2014/main" id="{D696D1F3-42AC-294B-2C0F-026F9FA9A1BD}"/>
+                <a16:creationId xmlns:a16="http://schemas.microsoft.com/office/drawing/2014/main" id="{E1E6FF06-F5A7-F962-4E69-8AB1E050DD41}"/>
               </a:ext>
             </a:extLst>
           </p:cNvPr>
@@ -27286,7 +27279,7 @@
           <p:cNvPr id="5" name="テキスト ボックス 4">
             <a:extLst>
               <a:ext uri="{FF2B5EF4-FFF2-40B4-BE49-F238E27FC236}">
-                <a16:creationId xmlns:a16="http://schemas.microsoft.com/office/drawing/2014/main" id="{64757857-FBB8-3496-E871-D15496EB05CA}"/>
+                <a16:creationId xmlns:a16="http://schemas.microsoft.com/office/drawing/2014/main" id="{C62DB0C7-F963-DF21-5B95-931CA466A94E}"/>
               </a:ext>
             </a:extLst>
           </p:cNvPr>
@@ -27332,7 +27325,7 @@
           <p:cNvPr id="6" name="正方形/長方形 5">
             <a:extLst>
               <a:ext uri="{FF2B5EF4-FFF2-40B4-BE49-F238E27FC236}">
-                <a16:creationId xmlns:a16="http://schemas.microsoft.com/office/drawing/2014/main" id="{8BB14545-B72D-E82E-079A-A2A9B5883DCF}"/>
+                <a16:creationId xmlns:a16="http://schemas.microsoft.com/office/drawing/2014/main" id="{2902ACB3-26D9-6AE1-25F5-D7DF31D0194D}"/>
               </a:ext>
             </a:extLst>
           </p:cNvPr>
@@ -27400,7 +27393,7 @@
           <p:cNvPr id="7" name="四角形: 角を丸くする 6">
             <a:extLst>
               <a:ext uri="{FF2B5EF4-FFF2-40B4-BE49-F238E27FC236}">
-                <a16:creationId xmlns:a16="http://schemas.microsoft.com/office/drawing/2014/main" id="{B887EAD3-45F7-4E8E-1D7D-DA11CCC0C082}"/>
+                <a16:creationId xmlns:a16="http://schemas.microsoft.com/office/drawing/2014/main" id="{8307E613-1D31-7B66-33B4-16DE594F7341}"/>
               </a:ext>
             </a:extLst>
           </p:cNvPr>
@@ -27470,7 +27463,7 @@
           <p:cNvPr id="8" name="テキスト ボックス 7">
             <a:extLst>
               <a:ext uri="{FF2B5EF4-FFF2-40B4-BE49-F238E27FC236}">
-                <a16:creationId xmlns:a16="http://schemas.microsoft.com/office/drawing/2014/main" id="{F9558230-EF3C-A114-6E14-9A734D82B563}"/>
+                <a16:creationId xmlns:a16="http://schemas.microsoft.com/office/drawing/2014/main" id="{D161DC4E-0110-BFD3-26C2-44782FF5E054}"/>
               </a:ext>
             </a:extLst>
           </p:cNvPr>
@@ -27516,7 +27509,7 @@
           <p:cNvPr id="9" name="テキスト ボックス 8">
             <a:extLst>
               <a:ext uri="{FF2B5EF4-FFF2-40B4-BE49-F238E27FC236}">
-                <a16:creationId xmlns:a16="http://schemas.microsoft.com/office/drawing/2014/main" id="{24325126-7872-D947-1C90-7807DA958897}"/>
+                <a16:creationId xmlns:a16="http://schemas.microsoft.com/office/drawing/2014/main" id="{F3996FB2-2F32-BB6E-2AFC-603A192016C9}"/>
               </a:ext>
             </a:extLst>
           </p:cNvPr>
@@ -27526,7 +27519,7 @@
         <p:spPr>
           <a:xfrm>
             <a:off x="812800" y="6375400"/>
-            <a:ext cx="5080000" cy="177800"/>
+            <a:ext cx="6604000" cy="177800"/>
           </a:xfrm>
           <a:prstGeom prst="rect">
             <a:avLst/>
@@ -27552,7 +27545,7 @@
                 <a:latin typeface="Yu Gothic UI" panose="020B0500000000000000" pitchFamily="50" charset="-128"/>
                 <a:ea typeface="Yu Gothic UI" panose="020B0500000000000000" pitchFamily="50" charset="-128"/>
               </a:rPr>
-              <a:t>簡易デジタルサイネージ ｜ 操作ガイド</a:t>
+              <a:t>簡単！シンプル！サイネージ ｜ 操作ガイド</a:t>
             </a:r>
           </a:p>
         </p:txBody>
@@ -27562,7 +27555,7 @@
           <p:cNvPr id="10" name="テキスト ボックス 9">
             <a:extLst>
               <a:ext uri="{FF2B5EF4-FFF2-40B4-BE49-F238E27FC236}">
-                <a16:creationId xmlns:a16="http://schemas.microsoft.com/office/drawing/2014/main" id="{AB521072-F196-DC33-F57A-36FA6D5E33F6}"/>
+                <a16:creationId xmlns:a16="http://schemas.microsoft.com/office/drawing/2014/main" id="{08832004-73D6-C730-D84F-67F0AA038999}"/>
               </a:ext>
             </a:extLst>
           </p:cNvPr>
@@ -27615,7 +27608,7 @@
           <p:cNvPr id="11" name="テキスト ボックス 10">
             <a:extLst>
               <a:ext uri="{FF2B5EF4-FFF2-40B4-BE49-F238E27FC236}">
-                <a16:creationId xmlns:a16="http://schemas.microsoft.com/office/drawing/2014/main" id="{1FFC6615-DC8F-1E27-EE8A-909AE29D47CB}"/>
+                <a16:creationId xmlns:a16="http://schemas.microsoft.com/office/drawing/2014/main" id="{9D647F75-F22B-A694-B4D6-E028BBE8EE01}"/>
               </a:ext>
             </a:extLst>
           </p:cNvPr>
@@ -27681,7 +27674,7 @@
           <p:cNvPr id="12" name="表 11">
             <a:extLst>
               <a:ext uri="{FF2B5EF4-FFF2-40B4-BE49-F238E27FC236}">
-                <a16:creationId xmlns:a16="http://schemas.microsoft.com/office/drawing/2014/main" id="{53514DC3-DDD6-D065-8149-43ECDB8C41A9}"/>
+                <a16:creationId xmlns:a16="http://schemas.microsoft.com/office/drawing/2014/main" id="{E5D3DAD2-84D2-A640-CED9-DD0A5B19732C}"/>
               </a:ext>
             </a:extLst>
           </p:cNvPr>
@@ -27691,7 +27684,7 @@
           <p:nvPr>
             <p:extLst>
               <p:ext uri="{D42A27DB-BD31-4B8C-83A1-F6EECF244321}">
-                <p14:modId xmlns:p14="http://schemas.microsoft.com/office/powerpoint/2010/main" val="3126074928"/>
+                <p14:modId xmlns:p14="http://schemas.microsoft.com/office/powerpoint/2010/main" val="3749901246"/>
               </p:ext>
             </p:extLst>
           </p:nvPr>
@@ -27710,14 +27703,14 @@
                 <a:gridCol w="5461000">
                   <a:extLst>
                     <a:ext uri="{9D8B030D-6E8A-4147-A177-3AD203B41FA5}">
-                      <a16:colId xmlns:a16="http://schemas.microsoft.com/office/drawing/2014/main" val="3426365607"/>
+                      <a16:colId xmlns:a16="http://schemas.microsoft.com/office/drawing/2014/main" val="420358276"/>
                     </a:ext>
                   </a:extLst>
                 </a:gridCol>
                 <a:gridCol w="5105400">
                   <a:extLst>
                     <a:ext uri="{9D8B030D-6E8A-4147-A177-3AD203B41FA5}">
-                      <a16:colId xmlns:a16="http://schemas.microsoft.com/office/drawing/2014/main" val="4176031421"/>
+                      <a16:colId xmlns:a16="http://schemas.microsoft.com/office/drawing/2014/main" val="1982287334"/>
                     </a:ext>
                   </a:extLst>
                 </a:gridCol>
@@ -27791,7 +27784,7 @@
                 </a:tc>
                 <a:extLst>
                   <a:ext uri="{0D108BD9-81ED-4DB2-BD59-A6C34878D82A}">
-                    <a16:rowId xmlns:a16="http://schemas.microsoft.com/office/drawing/2014/main" val="3462373519"/>
+                    <a16:rowId xmlns:a16="http://schemas.microsoft.com/office/drawing/2014/main" val="78911076"/>
                   </a:ext>
                 </a:extLst>
               </a:tr>
@@ -27891,7 +27884,7 @@
                 </a:tc>
                 <a:extLst>
                   <a:ext uri="{0D108BD9-81ED-4DB2-BD59-A6C34878D82A}">
-                    <a16:rowId xmlns:a16="http://schemas.microsoft.com/office/drawing/2014/main" val="3103435417"/>
+                    <a16:rowId xmlns:a16="http://schemas.microsoft.com/office/drawing/2014/main" val="1705328243"/>
                   </a:ext>
                 </a:extLst>
               </a:tr>
@@ -27991,7 +27984,7 @@
                 </a:tc>
                 <a:extLst>
                   <a:ext uri="{0D108BD9-81ED-4DB2-BD59-A6C34878D82A}">
-                    <a16:rowId xmlns:a16="http://schemas.microsoft.com/office/drawing/2014/main" val="2077634516"/>
+                    <a16:rowId xmlns:a16="http://schemas.microsoft.com/office/drawing/2014/main" val="1019057008"/>
                   </a:ext>
                 </a:extLst>
               </a:tr>
@@ -28004,7 +27997,7 @@
           <p:cNvPr id="13" name="四角形: 角を丸くする 12">
             <a:extLst>
               <a:ext uri="{FF2B5EF4-FFF2-40B4-BE49-F238E27FC236}">
-                <a16:creationId xmlns:a16="http://schemas.microsoft.com/office/drawing/2014/main" id="{5168D830-3D86-C59A-C1BA-AAE2B29D9274}"/>
+                <a16:creationId xmlns:a16="http://schemas.microsoft.com/office/drawing/2014/main" id="{104F5F07-ED6A-4CE4-30BE-196294E6FB1E}"/>
               </a:ext>
             </a:extLst>
           </p:cNvPr>
@@ -28074,7 +28067,7 @@
           <p:cNvPr id="14" name="正方形/長方形 13">
             <a:extLst>
               <a:ext uri="{FF2B5EF4-FFF2-40B4-BE49-F238E27FC236}">
-                <a16:creationId xmlns:a16="http://schemas.microsoft.com/office/drawing/2014/main" id="{A3BD8890-6945-2D83-E9D5-4F1E3FE2DDD2}"/>
+                <a16:creationId xmlns:a16="http://schemas.microsoft.com/office/drawing/2014/main" id="{5F9BC06F-B476-812C-F570-3C1FF871567D}"/>
               </a:ext>
             </a:extLst>
           </p:cNvPr>
@@ -28142,7 +28135,7 @@
           <p:cNvPr id="15" name="テキスト ボックス 14">
             <a:extLst>
               <a:ext uri="{FF2B5EF4-FFF2-40B4-BE49-F238E27FC236}">
-                <a16:creationId xmlns:a16="http://schemas.microsoft.com/office/drawing/2014/main" id="{4A254970-660B-20FE-D9DB-D3D2891E79BD}"/>
+                <a16:creationId xmlns:a16="http://schemas.microsoft.com/office/drawing/2014/main" id="{BFA95C29-DB93-B068-78FF-3CCA6A0CC9EE}"/>
               </a:ext>
             </a:extLst>
           </p:cNvPr>
@@ -28188,7 +28181,7 @@
           <p:cNvPr id="16" name="テキスト ボックス 15">
             <a:extLst>
               <a:ext uri="{FF2B5EF4-FFF2-40B4-BE49-F238E27FC236}">
-                <a16:creationId xmlns:a16="http://schemas.microsoft.com/office/drawing/2014/main" id="{9C58E6C8-2484-86CF-8798-F1BFCDCF6C3A}"/>
+                <a16:creationId xmlns:a16="http://schemas.microsoft.com/office/drawing/2014/main" id="{AD7AC075-8359-7E9F-F8B1-360FC7705EB5}"/>
               </a:ext>
             </a:extLst>
           </p:cNvPr>
@@ -28292,7 +28285,7 @@
     </p:spTree>
     <p:extLst>
       <p:ext uri="{BB962C8B-B14F-4D97-AF65-F5344CB8AC3E}">
-        <p14:creationId xmlns:p14="http://schemas.microsoft.com/office/powerpoint/2010/main" val="3520264819"/>
+        <p14:creationId xmlns:p14="http://schemas.microsoft.com/office/powerpoint/2010/main" val="3358205162"/>
       </p:ext>
     </p:extLst>
   </p:cSld>
@@ -28324,7 +28317,7 @@
           <p:cNvPr id="2" name="正方形/長方形 1">
             <a:extLst>
               <a:ext uri="{FF2B5EF4-FFF2-40B4-BE49-F238E27FC236}">
-                <a16:creationId xmlns:a16="http://schemas.microsoft.com/office/drawing/2014/main" id="{87008096-58C5-367A-2F47-EF5375D39BD0}"/>
+                <a16:creationId xmlns:a16="http://schemas.microsoft.com/office/drawing/2014/main" id="{0760C1C2-ADF2-1862-94DC-ABD48A18A005}"/>
               </a:ext>
             </a:extLst>
           </p:cNvPr>
@@ -28392,7 +28385,7 @@
           <p:cNvPr id="3" name="正方形/長方形 2">
             <a:extLst>
               <a:ext uri="{FF2B5EF4-FFF2-40B4-BE49-F238E27FC236}">
-                <a16:creationId xmlns:a16="http://schemas.microsoft.com/office/drawing/2014/main" id="{33E00B2D-9767-0385-FFEE-7A28A8B50435}"/>
+                <a16:creationId xmlns:a16="http://schemas.microsoft.com/office/drawing/2014/main" id="{3AF7DE89-B55B-E1CB-DB8C-A698AE8E3DAF}"/>
               </a:ext>
             </a:extLst>
           </p:cNvPr>
@@ -28460,7 +28453,7 @@
           <p:cNvPr id="4" name="テキスト ボックス 3">
             <a:extLst>
               <a:ext uri="{FF2B5EF4-FFF2-40B4-BE49-F238E27FC236}">
-                <a16:creationId xmlns:a16="http://schemas.microsoft.com/office/drawing/2014/main" id="{6A5F528D-644A-97EC-5C42-4248AA146FF3}"/>
+                <a16:creationId xmlns:a16="http://schemas.microsoft.com/office/drawing/2014/main" id="{005C3F22-4AC6-60AB-E33F-265D6A6E3A0A}"/>
               </a:ext>
             </a:extLst>
           </p:cNvPr>
@@ -28513,7 +28506,7 @@
           <p:cNvPr id="5" name="テキスト ボックス 4">
             <a:extLst>
               <a:ext uri="{FF2B5EF4-FFF2-40B4-BE49-F238E27FC236}">
-                <a16:creationId xmlns:a16="http://schemas.microsoft.com/office/drawing/2014/main" id="{5644A53D-5679-9712-B15B-02D653ABA119}"/>
+                <a16:creationId xmlns:a16="http://schemas.microsoft.com/office/drawing/2014/main" id="{BD307785-961D-A543-8F26-FA127F5E9F37}"/>
               </a:ext>
             </a:extLst>
           </p:cNvPr>
@@ -28559,7 +28552,7 @@
           <p:cNvPr id="6" name="正方形/長方形 5">
             <a:extLst>
               <a:ext uri="{FF2B5EF4-FFF2-40B4-BE49-F238E27FC236}">
-                <a16:creationId xmlns:a16="http://schemas.microsoft.com/office/drawing/2014/main" id="{7CE1AA38-6727-970C-078D-58BA75495F09}"/>
+                <a16:creationId xmlns:a16="http://schemas.microsoft.com/office/drawing/2014/main" id="{25564E70-4B72-C69C-6B2C-3409CEA3EB36}"/>
               </a:ext>
             </a:extLst>
           </p:cNvPr>
@@ -28627,7 +28620,7 @@
           <p:cNvPr id="7" name="四角形: 角を丸くする 6">
             <a:extLst>
               <a:ext uri="{FF2B5EF4-FFF2-40B4-BE49-F238E27FC236}">
-                <a16:creationId xmlns:a16="http://schemas.microsoft.com/office/drawing/2014/main" id="{2753497F-19BC-C4BD-4784-A3CD6BECAF57}"/>
+                <a16:creationId xmlns:a16="http://schemas.microsoft.com/office/drawing/2014/main" id="{CB340AD4-0CB5-A541-6D49-5F5DA9DBCC24}"/>
               </a:ext>
             </a:extLst>
           </p:cNvPr>
@@ -28697,7 +28690,7 @@
           <p:cNvPr id="8" name="テキスト ボックス 7">
             <a:extLst>
               <a:ext uri="{FF2B5EF4-FFF2-40B4-BE49-F238E27FC236}">
-                <a16:creationId xmlns:a16="http://schemas.microsoft.com/office/drawing/2014/main" id="{ED2F56F5-5FF6-AD98-F9DE-F9C88CA77D49}"/>
+                <a16:creationId xmlns:a16="http://schemas.microsoft.com/office/drawing/2014/main" id="{11E15287-99B8-AFE9-192C-BF1CE33BB743}"/>
               </a:ext>
             </a:extLst>
           </p:cNvPr>
@@ -28743,7 +28736,7 @@
           <p:cNvPr id="9" name="テキスト ボックス 8">
             <a:extLst>
               <a:ext uri="{FF2B5EF4-FFF2-40B4-BE49-F238E27FC236}">
-                <a16:creationId xmlns:a16="http://schemas.microsoft.com/office/drawing/2014/main" id="{5BA5B141-99F2-28A7-D5B3-18258ABB4EE1}"/>
+                <a16:creationId xmlns:a16="http://schemas.microsoft.com/office/drawing/2014/main" id="{C22C5805-5D33-2247-7532-6299B53EA118}"/>
               </a:ext>
             </a:extLst>
           </p:cNvPr>
@@ -28753,7 +28746,7 @@
         <p:spPr>
           <a:xfrm>
             <a:off x="812800" y="6375400"/>
-            <a:ext cx="5080000" cy="177800"/>
+            <a:ext cx="6604000" cy="177800"/>
           </a:xfrm>
           <a:prstGeom prst="rect">
             <a:avLst/>
@@ -28779,7 +28772,7 @@
                 <a:latin typeface="Yu Gothic UI" panose="020B0500000000000000" pitchFamily="50" charset="-128"/>
                 <a:ea typeface="Yu Gothic UI" panose="020B0500000000000000" pitchFamily="50" charset="-128"/>
               </a:rPr>
-              <a:t>簡易デジタルサイネージ ｜ 操作ガイド</a:t>
+              <a:t>簡単！シンプル！サイネージ ｜ 操作ガイド</a:t>
             </a:r>
           </a:p>
         </p:txBody>
@@ -28789,7 +28782,7 @@
           <p:cNvPr id="10" name="テキスト ボックス 9">
             <a:extLst>
               <a:ext uri="{FF2B5EF4-FFF2-40B4-BE49-F238E27FC236}">
-                <a16:creationId xmlns:a16="http://schemas.microsoft.com/office/drawing/2014/main" id="{5D15698B-670A-0429-53D9-8206EECEF95E}"/>
+                <a16:creationId xmlns:a16="http://schemas.microsoft.com/office/drawing/2014/main" id="{FAE97C25-B1D9-8E51-251F-C06BB53442CC}"/>
               </a:ext>
             </a:extLst>
           </p:cNvPr>
@@ -28842,7 +28835,7 @@
           <p:cNvPr id="11" name="テキスト ボックス 10">
             <a:extLst>
               <a:ext uri="{FF2B5EF4-FFF2-40B4-BE49-F238E27FC236}">
-                <a16:creationId xmlns:a16="http://schemas.microsoft.com/office/drawing/2014/main" id="{8D79B77A-3DE2-3820-5636-BD44444F6FEB}"/>
+                <a16:creationId xmlns:a16="http://schemas.microsoft.com/office/drawing/2014/main" id="{956CC68E-6DA9-29B7-7DCD-AB409048AB85}"/>
               </a:ext>
             </a:extLst>
           </p:cNvPr>
@@ -28948,7 +28941,7 @@
           <p:cNvPr id="12" name="四角形: 角を丸くする 11">
             <a:extLst>
               <a:ext uri="{FF2B5EF4-FFF2-40B4-BE49-F238E27FC236}">
-                <a16:creationId xmlns:a16="http://schemas.microsoft.com/office/drawing/2014/main" id="{594BC4D5-1C09-F40E-75A6-BE9C461BB349}"/>
+                <a16:creationId xmlns:a16="http://schemas.microsoft.com/office/drawing/2014/main" id="{B39061C0-7896-D733-07EF-8A045535D8D3}"/>
               </a:ext>
             </a:extLst>
           </p:cNvPr>
@@ -29018,7 +29011,7 @@
           <p:cNvPr id="13" name="テキスト ボックス 12">
             <a:extLst>
               <a:ext uri="{FF2B5EF4-FFF2-40B4-BE49-F238E27FC236}">
-                <a16:creationId xmlns:a16="http://schemas.microsoft.com/office/drawing/2014/main" id="{5091D533-766F-BCB5-83E8-6FA359C880A8}"/>
+                <a16:creationId xmlns:a16="http://schemas.microsoft.com/office/drawing/2014/main" id="{1F353CA3-5D2A-C6EA-8470-98CB532EC768}"/>
               </a:ext>
             </a:extLst>
           </p:cNvPr>
@@ -29078,7 +29071,7 @@
           <p:cNvPr id="14" name="テキスト ボックス 13">
             <a:extLst>
               <a:ext uri="{FF2B5EF4-FFF2-40B4-BE49-F238E27FC236}">
-                <a16:creationId xmlns:a16="http://schemas.microsoft.com/office/drawing/2014/main" id="{B3BD0194-519B-8EC0-3C8D-6A2B56EA1332}"/>
+                <a16:creationId xmlns:a16="http://schemas.microsoft.com/office/drawing/2014/main" id="{E5A398C0-D5F1-E4AA-6F9E-B7ECC177559C}"/>
               </a:ext>
             </a:extLst>
           </p:cNvPr>
@@ -29144,7 +29137,7 @@
           <p:cNvPr id="15" name="四角形: 角を丸くする 14">
             <a:extLst>
               <a:ext uri="{FF2B5EF4-FFF2-40B4-BE49-F238E27FC236}">
-                <a16:creationId xmlns:a16="http://schemas.microsoft.com/office/drawing/2014/main" id="{2F6C2E9A-EDFC-126A-C4EA-D88915DD5F55}"/>
+                <a16:creationId xmlns:a16="http://schemas.microsoft.com/office/drawing/2014/main" id="{EC5A29C1-99EC-0980-5643-FB889899CA6F}"/>
               </a:ext>
             </a:extLst>
           </p:cNvPr>
@@ -29200,7 +29193,7 @@
           <p:cNvPr id="16" name="テキスト ボックス 15">
             <a:extLst>
               <a:ext uri="{FF2B5EF4-FFF2-40B4-BE49-F238E27FC236}">
-                <a16:creationId xmlns:a16="http://schemas.microsoft.com/office/drawing/2014/main" id="{9A66CAA1-93FC-E26B-905E-4C7B2AD3A0E5}"/>
+                <a16:creationId xmlns:a16="http://schemas.microsoft.com/office/drawing/2014/main" id="{8FD83768-F71B-338E-CD64-4E6166E3EB65}"/>
               </a:ext>
             </a:extLst>
           </p:cNvPr>
@@ -29260,7 +29253,7 @@
           <p:cNvPr id="17" name="テキスト ボックス 16">
             <a:extLst>
               <a:ext uri="{FF2B5EF4-FFF2-40B4-BE49-F238E27FC236}">
-                <a16:creationId xmlns:a16="http://schemas.microsoft.com/office/drawing/2014/main" id="{7E295C72-0815-3DFC-3061-527B93619522}"/>
+                <a16:creationId xmlns:a16="http://schemas.microsoft.com/office/drawing/2014/main" id="{7020382B-B279-B1D2-C539-ECDA6DC13D02}"/>
               </a:ext>
             </a:extLst>
           </p:cNvPr>
@@ -29306,7 +29299,7 @@
           <p:cNvPr id="18" name="テキスト ボックス 17">
             <a:extLst>
               <a:ext uri="{FF2B5EF4-FFF2-40B4-BE49-F238E27FC236}">
-                <a16:creationId xmlns:a16="http://schemas.microsoft.com/office/drawing/2014/main" id="{071BFC90-06F6-DC67-9910-0DBD3047BA17}"/>
+                <a16:creationId xmlns:a16="http://schemas.microsoft.com/office/drawing/2014/main" id="{1D7A2E5E-60CC-F6BD-2DDA-554A706835DF}"/>
               </a:ext>
             </a:extLst>
           </p:cNvPr>
@@ -29372,7 +29365,7 @@
           <p:cNvPr id="19" name="四角形: 角を丸くする 18">
             <a:extLst>
               <a:ext uri="{FF2B5EF4-FFF2-40B4-BE49-F238E27FC236}">
-                <a16:creationId xmlns:a16="http://schemas.microsoft.com/office/drawing/2014/main" id="{695A694B-2D07-2678-AE09-0E2586FD5E59}"/>
+                <a16:creationId xmlns:a16="http://schemas.microsoft.com/office/drawing/2014/main" id="{B2406047-09E5-6D7B-A564-ECA248954808}"/>
               </a:ext>
             </a:extLst>
           </p:cNvPr>
@@ -29428,7 +29421,7 @@
           <p:cNvPr id="20" name="テキスト ボックス 19">
             <a:extLst>
               <a:ext uri="{FF2B5EF4-FFF2-40B4-BE49-F238E27FC236}">
-                <a16:creationId xmlns:a16="http://schemas.microsoft.com/office/drawing/2014/main" id="{090581CE-C256-53B9-CBB4-897F100B5117}"/>
+                <a16:creationId xmlns:a16="http://schemas.microsoft.com/office/drawing/2014/main" id="{5B6A32E0-C35A-3D41-CDA0-ECCA750860FA}"/>
               </a:ext>
             </a:extLst>
           </p:cNvPr>
@@ -29488,7 +29481,7 @@
           <p:cNvPr id="21" name="テキスト ボックス 20">
             <a:extLst>
               <a:ext uri="{FF2B5EF4-FFF2-40B4-BE49-F238E27FC236}">
-                <a16:creationId xmlns:a16="http://schemas.microsoft.com/office/drawing/2014/main" id="{5A5B9829-202A-9F0A-AF0E-EB1192DAF006}"/>
+                <a16:creationId xmlns:a16="http://schemas.microsoft.com/office/drawing/2014/main" id="{DBDED5F6-5D50-A0E2-29D5-153274EFBE9E}"/>
               </a:ext>
             </a:extLst>
           </p:cNvPr>
@@ -29544,7 +29537,7 @@
           <p:cNvPr id="22" name="テキスト ボックス 21">
             <a:extLst>
               <a:ext uri="{FF2B5EF4-FFF2-40B4-BE49-F238E27FC236}">
-                <a16:creationId xmlns:a16="http://schemas.microsoft.com/office/drawing/2014/main" id="{990BD991-2C3A-BA2D-50B4-1160B4E3D743}"/>
+                <a16:creationId xmlns:a16="http://schemas.microsoft.com/office/drawing/2014/main" id="{69ECD875-F989-95C0-986A-8ED5ECBCEB80}"/>
               </a:ext>
             </a:extLst>
           </p:cNvPr>
@@ -29600,7 +29593,7 @@
           <p:cNvPr id="23" name="四角形: 角を丸くする 22">
             <a:extLst>
               <a:ext uri="{FF2B5EF4-FFF2-40B4-BE49-F238E27FC236}">
-                <a16:creationId xmlns:a16="http://schemas.microsoft.com/office/drawing/2014/main" id="{9FE6ABD8-1746-38A4-3C1E-60F095150B1D}"/>
+                <a16:creationId xmlns:a16="http://schemas.microsoft.com/office/drawing/2014/main" id="{E78B2947-65E6-C303-236A-88E1BA192195}"/>
               </a:ext>
             </a:extLst>
           </p:cNvPr>
@@ -29656,7 +29649,7 @@
           <p:cNvPr id="24" name="テキスト ボックス 23">
             <a:extLst>
               <a:ext uri="{FF2B5EF4-FFF2-40B4-BE49-F238E27FC236}">
-                <a16:creationId xmlns:a16="http://schemas.microsoft.com/office/drawing/2014/main" id="{3A0A3E87-A24C-ACB1-11CF-6783A931FEB8}"/>
+                <a16:creationId xmlns:a16="http://schemas.microsoft.com/office/drawing/2014/main" id="{84A77B45-E188-894A-DC17-21B39435A729}"/>
               </a:ext>
             </a:extLst>
           </p:cNvPr>
@@ -29716,7 +29709,7 @@
           <p:cNvPr id="25" name="テキスト ボックス 24">
             <a:extLst>
               <a:ext uri="{FF2B5EF4-FFF2-40B4-BE49-F238E27FC236}">
-                <a16:creationId xmlns:a16="http://schemas.microsoft.com/office/drawing/2014/main" id="{D67144AA-526D-2F36-2CF4-65710D1F85B4}"/>
+                <a16:creationId xmlns:a16="http://schemas.microsoft.com/office/drawing/2014/main" id="{CE00A771-D3CD-A823-E372-A2363BE31774}"/>
               </a:ext>
             </a:extLst>
           </p:cNvPr>
@@ -29772,7 +29765,7 @@
           <p:cNvPr id="26" name="テキスト ボックス 25">
             <a:extLst>
               <a:ext uri="{FF2B5EF4-FFF2-40B4-BE49-F238E27FC236}">
-                <a16:creationId xmlns:a16="http://schemas.microsoft.com/office/drawing/2014/main" id="{69FF9C1D-08F6-BC8F-FC00-85E3AFFA697B}"/>
+                <a16:creationId xmlns:a16="http://schemas.microsoft.com/office/drawing/2014/main" id="{175132B7-1EFB-7896-489C-854A8674A12F}"/>
               </a:ext>
             </a:extLst>
           </p:cNvPr>
@@ -29818,7 +29811,7 @@
           <p:cNvPr id="27" name="四角形: 角を丸くする 26">
             <a:extLst>
               <a:ext uri="{FF2B5EF4-FFF2-40B4-BE49-F238E27FC236}">
-                <a16:creationId xmlns:a16="http://schemas.microsoft.com/office/drawing/2014/main" id="{BC5C625A-3561-1834-B3DE-FA3715C7641C}"/>
+                <a16:creationId xmlns:a16="http://schemas.microsoft.com/office/drawing/2014/main" id="{3482199D-D218-7BCE-D008-E306A9C1CF71}"/>
               </a:ext>
             </a:extLst>
           </p:cNvPr>
@@ -29888,7 +29881,7 @@
           <p:cNvPr id="28" name="正方形/長方形 27">
             <a:extLst>
               <a:ext uri="{FF2B5EF4-FFF2-40B4-BE49-F238E27FC236}">
-                <a16:creationId xmlns:a16="http://schemas.microsoft.com/office/drawing/2014/main" id="{100AB4DB-E2A9-44E1-109C-D9FAE0025F01}"/>
+                <a16:creationId xmlns:a16="http://schemas.microsoft.com/office/drawing/2014/main" id="{193B6889-FB7F-E06C-762A-5D064743129A}"/>
               </a:ext>
             </a:extLst>
           </p:cNvPr>
@@ -29956,7 +29949,7 @@
           <p:cNvPr id="29" name="テキスト ボックス 28">
             <a:extLst>
               <a:ext uri="{FF2B5EF4-FFF2-40B4-BE49-F238E27FC236}">
-                <a16:creationId xmlns:a16="http://schemas.microsoft.com/office/drawing/2014/main" id="{9199E8A0-8FA7-A104-F78F-0A4491F28F4A}"/>
+                <a16:creationId xmlns:a16="http://schemas.microsoft.com/office/drawing/2014/main" id="{1877E130-48DA-0FC9-A2EA-AB6A9C45AF5F}"/>
               </a:ext>
             </a:extLst>
           </p:cNvPr>
@@ -30002,7 +29995,7 @@
           <p:cNvPr id="30" name="テキスト ボックス 29">
             <a:extLst>
               <a:ext uri="{FF2B5EF4-FFF2-40B4-BE49-F238E27FC236}">
-                <a16:creationId xmlns:a16="http://schemas.microsoft.com/office/drawing/2014/main" id="{8788B682-C214-EA59-D919-E31C4A48AC4C}"/>
+                <a16:creationId xmlns:a16="http://schemas.microsoft.com/office/drawing/2014/main" id="{55C365D4-5CCF-2C92-73CC-E32EE54B62D1}"/>
               </a:ext>
             </a:extLst>
           </p:cNvPr>
@@ -30056,7 +30049,7 @@
     </p:spTree>
     <p:extLst>
       <p:ext uri="{BB962C8B-B14F-4D97-AF65-F5344CB8AC3E}">
-        <p14:creationId xmlns:p14="http://schemas.microsoft.com/office/powerpoint/2010/main" val="3599067500"/>
+        <p14:creationId xmlns:p14="http://schemas.microsoft.com/office/powerpoint/2010/main" val="1393034173"/>
       </p:ext>
     </p:extLst>
   </p:cSld>
@@ -30088,7 +30081,7 @@
           <p:cNvPr id="2" name="正方形/長方形 1">
             <a:extLst>
               <a:ext uri="{FF2B5EF4-FFF2-40B4-BE49-F238E27FC236}">
-                <a16:creationId xmlns:a16="http://schemas.microsoft.com/office/drawing/2014/main" id="{00A0247C-E754-2813-F184-62650BA21F10}"/>
+                <a16:creationId xmlns:a16="http://schemas.microsoft.com/office/drawing/2014/main" id="{E2A007BD-5BAD-64D1-B8CF-72376A19EA71}"/>
               </a:ext>
             </a:extLst>
           </p:cNvPr>
@@ -30156,7 +30149,7 @@
           <p:cNvPr id="3" name="正方形/長方形 2">
             <a:extLst>
               <a:ext uri="{FF2B5EF4-FFF2-40B4-BE49-F238E27FC236}">
-                <a16:creationId xmlns:a16="http://schemas.microsoft.com/office/drawing/2014/main" id="{50C09430-595C-752F-7727-937743B5D4F1}"/>
+                <a16:creationId xmlns:a16="http://schemas.microsoft.com/office/drawing/2014/main" id="{E663111E-ECEF-B620-E9F2-69EE85B7628A}"/>
               </a:ext>
             </a:extLst>
           </p:cNvPr>
@@ -30224,7 +30217,7 @@
           <p:cNvPr id="4" name="テキスト ボックス 3">
             <a:extLst>
               <a:ext uri="{FF2B5EF4-FFF2-40B4-BE49-F238E27FC236}">
-                <a16:creationId xmlns:a16="http://schemas.microsoft.com/office/drawing/2014/main" id="{22F58C18-F420-1B38-2C97-DD378DF24E7A}"/>
+                <a16:creationId xmlns:a16="http://schemas.microsoft.com/office/drawing/2014/main" id="{2B9655EB-2927-B7AE-B0EC-22016327A77A}"/>
               </a:ext>
             </a:extLst>
           </p:cNvPr>
@@ -30277,7 +30270,7 @@
           <p:cNvPr id="5" name="テキスト ボックス 4">
             <a:extLst>
               <a:ext uri="{FF2B5EF4-FFF2-40B4-BE49-F238E27FC236}">
-                <a16:creationId xmlns:a16="http://schemas.microsoft.com/office/drawing/2014/main" id="{3D7F2101-C4F4-840A-AC05-65B9498762E5}"/>
+                <a16:creationId xmlns:a16="http://schemas.microsoft.com/office/drawing/2014/main" id="{F9999FFD-E335-75DA-AC1A-35C09B4C5BAF}"/>
               </a:ext>
             </a:extLst>
           </p:cNvPr>
@@ -30323,7 +30316,7 @@
           <p:cNvPr id="6" name="正方形/長方形 5">
             <a:extLst>
               <a:ext uri="{FF2B5EF4-FFF2-40B4-BE49-F238E27FC236}">
-                <a16:creationId xmlns:a16="http://schemas.microsoft.com/office/drawing/2014/main" id="{47C69FBF-9960-E9D7-38B2-581CCDB7E419}"/>
+                <a16:creationId xmlns:a16="http://schemas.microsoft.com/office/drawing/2014/main" id="{D7371661-4948-C41F-8CCE-3B963CC794E7}"/>
               </a:ext>
             </a:extLst>
           </p:cNvPr>
@@ -30391,7 +30384,7 @@
           <p:cNvPr id="7" name="四角形: 角を丸くする 6">
             <a:extLst>
               <a:ext uri="{FF2B5EF4-FFF2-40B4-BE49-F238E27FC236}">
-                <a16:creationId xmlns:a16="http://schemas.microsoft.com/office/drawing/2014/main" id="{A8121352-BECF-E5F3-C7D9-907F20012191}"/>
+                <a16:creationId xmlns:a16="http://schemas.microsoft.com/office/drawing/2014/main" id="{D857328C-4F3E-F44C-CBAF-5FABF45E9D87}"/>
               </a:ext>
             </a:extLst>
           </p:cNvPr>
@@ -30461,7 +30454,7 @@
           <p:cNvPr id="8" name="テキスト ボックス 7">
             <a:extLst>
               <a:ext uri="{FF2B5EF4-FFF2-40B4-BE49-F238E27FC236}">
-                <a16:creationId xmlns:a16="http://schemas.microsoft.com/office/drawing/2014/main" id="{9B57DD35-F0E3-52EB-46BE-6D364E3188E4}"/>
+                <a16:creationId xmlns:a16="http://schemas.microsoft.com/office/drawing/2014/main" id="{9590838B-6EB2-41E6-A289-2F6735A75475}"/>
               </a:ext>
             </a:extLst>
           </p:cNvPr>
@@ -30507,7 +30500,7 @@
           <p:cNvPr id="9" name="テキスト ボックス 8">
             <a:extLst>
               <a:ext uri="{FF2B5EF4-FFF2-40B4-BE49-F238E27FC236}">
-                <a16:creationId xmlns:a16="http://schemas.microsoft.com/office/drawing/2014/main" id="{DF2A4921-CC4F-BECE-87DB-591E3CAECB3C}"/>
+                <a16:creationId xmlns:a16="http://schemas.microsoft.com/office/drawing/2014/main" id="{AF1BDD11-CF15-C5CE-170F-B1218EB32559}"/>
               </a:ext>
             </a:extLst>
           </p:cNvPr>
@@ -30517,7 +30510,7 @@
         <p:spPr>
           <a:xfrm>
             <a:off x="812800" y="6375400"/>
-            <a:ext cx="5080000" cy="177800"/>
+            <a:ext cx="6604000" cy="177800"/>
           </a:xfrm>
           <a:prstGeom prst="rect">
             <a:avLst/>
@@ -30543,7 +30536,7 @@
                 <a:latin typeface="Yu Gothic UI" panose="020B0500000000000000" pitchFamily="50" charset="-128"/>
                 <a:ea typeface="Yu Gothic UI" panose="020B0500000000000000" pitchFamily="50" charset="-128"/>
               </a:rPr>
-              <a:t>簡易デジタルサイネージ ｜ 操作ガイド</a:t>
+              <a:t>簡単！シンプル！サイネージ ｜ 操作ガイド</a:t>
             </a:r>
           </a:p>
         </p:txBody>
@@ -30553,7 +30546,7 @@
           <p:cNvPr id="10" name="テキスト ボックス 9">
             <a:extLst>
               <a:ext uri="{FF2B5EF4-FFF2-40B4-BE49-F238E27FC236}">
-                <a16:creationId xmlns:a16="http://schemas.microsoft.com/office/drawing/2014/main" id="{DAEAD3E4-B9FA-7E75-9283-6F38E5170CC9}"/>
+                <a16:creationId xmlns:a16="http://schemas.microsoft.com/office/drawing/2014/main" id="{AB48C498-3FAB-C015-F311-6AB5D8CE3105}"/>
               </a:ext>
             </a:extLst>
           </p:cNvPr>
@@ -30606,7 +30599,7 @@
           <p:cNvPr id="11" name="テキスト ボックス 10">
             <a:extLst>
               <a:ext uri="{FF2B5EF4-FFF2-40B4-BE49-F238E27FC236}">
-                <a16:creationId xmlns:a16="http://schemas.microsoft.com/office/drawing/2014/main" id="{0CBDA12F-EBB1-9FC7-D0D6-838A6F936B43}"/>
+                <a16:creationId xmlns:a16="http://schemas.microsoft.com/office/drawing/2014/main" id="{1904B027-7430-078B-1806-3599E156846F}"/>
               </a:ext>
             </a:extLst>
           </p:cNvPr>
@@ -30692,7 +30685,7 @@
           <p:cNvPr id="12" name="四角形: 角を丸くする 11">
             <a:extLst>
               <a:ext uri="{FF2B5EF4-FFF2-40B4-BE49-F238E27FC236}">
-                <a16:creationId xmlns:a16="http://schemas.microsoft.com/office/drawing/2014/main" id="{B8BB9123-49D4-C970-AD0B-1D73316431B8}"/>
+                <a16:creationId xmlns:a16="http://schemas.microsoft.com/office/drawing/2014/main" id="{83B71C2A-3CBA-6DCB-DB43-2FD1B9F86B66}"/>
               </a:ext>
             </a:extLst>
           </p:cNvPr>
@@ -30762,7 +30755,7 @@
           <p:cNvPr id="13" name="テキスト ボックス 12">
             <a:extLst>
               <a:ext uri="{FF2B5EF4-FFF2-40B4-BE49-F238E27FC236}">
-                <a16:creationId xmlns:a16="http://schemas.microsoft.com/office/drawing/2014/main" id="{B618F3DB-AFEB-8572-3F8F-8FF7F282F768}"/>
+                <a16:creationId xmlns:a16="http://schemas.microsoft.com/office/drawing/2014/main" id="{D6D7F236-0EE0-4BD6-C817-92DD370B75D5}"/>
               </a:ext>
             </a:extLst>
           </p:cNvPr>
@@ -30822,7 +30815,7 @@
           <p:cNvPr id="14" name="テキスト ボックス 13">
             <a:extLst>
               <a:ext uri="{FF2B5EF4-FFF2-40B4-BE49-F238E27FC236}">
-                <a16:creationId xmlns:a16="http://schemas.microsoft.com/office/drawing/2014/main" id="{4DE14EC2-B465-F100-3866-D936F1632C10}"/>
+                <a16:creationId xmlns:a16="http://schemas.microsoft.com/office/drawing/2014/main" id="{0F87FA6F-029B-32C3-2532-A0427AAD3F58}"/>
               </a:ext>
             </a:extLst>
           </p:cNvPr>
@@ -30928,7 +30921,7 @@
           <p:cNvPr id="15" name="四角形: 角を丸くする 14">
             <a:extLst>
               <a:ext uri="{FF2B5EF4-FFF2-40B4-BE49-F238E27FC236}">
-                <a16:creationId xmlns:a16="http://schemas.microsoft.com/office/drawing/2014/main" id="{6E991B12-2887-4879-2D5B-2C62BE9604C6}"/>
+                <a16:creationId xmlns:a16="http://schemas.microsoft.com/office/drawing/2014/main" id="{AC8606DB-A9AC-7B71-AFCD-ED18F6FF09AE}"/>
               </a:ext>
             </a:extLst>
           </p:cNvPr>
@@ -30984,7 +30977,7 @@
           <p:cNvPr id="16" name="テキスト ボックス 15">
             <a:extLst>
               <a:ext uri="{FF2B5EF4-FFF2-40B4-BE49-F238E27FC236}">
-                <a16:creationId xmlns:a16="http://schemas.microsoft.com/office/drawing/2014/main" id="{77251605-74D4-FDDF-BE36-5581BA8BD034}"/>
+                <a16:creationId xmlns:a16="http://schemas.microsoft.com/office/drawing/2014/main" id="{7C796921-ABB5-6D77-1D09-ECB781D049B2}"/>
               </a:ext>
             </a:extLst>
           </p:cNvPr>
@@ -31044,7 +31037,7 @@
           <p:cNvPr id="17" name="テキスト ボックス 16">
             <a:extLst>
               <a:ext uri="{FF2B5EF4-FFF2-40B4-BE49-F238E27FC236}">
-                <a16:creationId xmlns:a16="http://schemas.microsoft.com/office/drawing/2014/main" id="{339CBE54-247E-6643-34EF-290D4FF3321D}"/>
+                <a16:creationId xmlns:a16="http://schemas.microsoft.com/office/drawing/2014/main" id="{DF042DF9-D127-71CF-1034-C2308829E446}"/>
               </a:ext>
             </a:extLst>
           </p:cNvPr>
@@ -31090,7 +31083,7 @@
           <p:cNvPr id="18" name="テキスト ボックス 17">
             <a:extLst>
               <a:ext uri="{FF2B5EF4-FFF2-40B4-BE49-F238E27FC236}">
-                <a16:creationId xmlns:a16="http://schemas.microsoft.com/office/drawing/2014/main" id="{F820C34C-7D10-D07C-166D-526428EF3F17}"/>
+                <a16:creationId xmlns:a16="http://schemas.microsoft.com/office/drawing/2014/main" id="{B507DD56-7820-5692-DAEE-B6510B842E8D}"/>
               </a:ext>
             </a:extLst>
           </p:cNvPr>
@@ -31176,7 +31169,7 @@
           <p:cNvPr id="19" name="四角形: 角を丸くする 18">
             <a:extLst>
               <a:ext uri="{FF2B5EF4-FFF2-40B4-BE49-F238E27FC236}">
-                <a16:creationId xmlns:a16="http://schemas.microsoft.com/office/drawing/2014/main" id="{423298ED-87C0-8484-9C93-09C41E32307E}"/>
+                <a16:creationId xmlns:a16="http://schemas.microsoft.com/office/drawing/2014/main" id="{C739A71F-14E5-BC15-8C0C-88D5C637E50E}"/>
               </a:ext>
             </a:extLst>
           </p:cNvPr>
@@ -31232,7 +31225,7 @@
           <p:cNvPr id="20" name="テキスト ボックス 19">
             <a:extLst>
               <a:ext uri="{FF2B5EF4-FFF2-40B4-BE49-F238E27FC236}">
-                <a16:creationId xmlns:a16="http://schemas.microsoft.com/office/drawing/2014/main" id="{EA1DDB2C-BAC6-A4E7-7AAB-78DA53081C2A}"/>
+                <a16:creationId xmlns:a16="http://schemas.microsoft.com/office/drawing/2014/main" id="{3F9BC30E-2BFD-F62C-FAA5-E2D28AF00661}"/>
               </a:ext>
             </a:extLst>
           </p:cNvPr>
@@ -31292,7 +31285,7 @@
           <p:cNvPr id="21" name="テキスト ボックス 20">
             <a:extLst>
               <a:ext uri="{FF2B5EF4-FFF2-40B4-BE49-F238E27FC236}">
-                <a16:creationId xmlns:a16="http://schemas.microsoft.com/office/drawing/2014/main" id="{30A52EF7-D4F2-302D-0582-349633B3D24B}"/>
+                <a16:creationId xmlns:a16="http://schemas.microsoft.com/office/drawing/2014/main" id="{865759A8-254B-5917-24D1-F4930B4BF247}"/>
               </a:ext>
             </a:extLst>
           </p:cNvPr>
@@ -31338,7 +31331,7 @@
           <p:cNvPr id="22" name="テキスト ボックス 21">
             <a:extLst>
               <a:ext uri="{FF2B5EF4-FFF2-40B4-BE49-F238E27FC236}">
-                <a16:creationId xmlns:a16="http://schemas.microsoft.com/office/drawing/2014/main" id="{7411EE3C-0D97-181B-E1B6-E1AF63ABD0E9}"/>
+                <a16:creationId xmlns:a16="http://schemas.microsoft.com/office/drawing/2014/main" id="{6B835C49-1D04-993F-7802-6DB0B434D835}"/>
               </a:ext>
             </a:extLst>
           </p:cNvPr>
@@ -31434,7 +31427,7 @@
           <p:cNvPr id="23" name="四角形: 角を丸くする 22">
             <a:extLst>
               <a:ext uri="{FF2B5EF4-FFF2-40B4-BE49-F238E27FC236}">
-                <a16:creationId xmlns:a16="http://schemas.microsoft.com/office/drawing/2014/main" id="{FC77457A-A888-24C2-C763-4B0CA4CEC1B9}"/>
+                <a16:creationId xmlns:a16="http://schemas.microsoft.com/office/drawing/2014/main" id="{55774977-83AE-5798-2A64-96843BBC8EF4}"/>
               </a:ext>
             </a:extLst>
           </p:cNvPr>
@@ -31490,7 +31483,7 @@
           <p:cNvPr id="24" name="テキスト ボックス 23">
             <a:extLst>
               <a:ext uri="{FF2B5EF4-FFF2-40B4-BE49-F238E27FC236}">
-                <a16:creationId xmlns:a16="http://schemas.microsoft.com/office/drawing/2014/main" id="{B5F50FE0-3814-D519-62CE-5F0007402466}"/>
+                <a16:creationId xmlns:a16="http://schemas.microsoft.com/office/drawing/2014/main" id="{253F7E63-B203-B619-2AE5-0F0A9B4C3B19}"/>
               </a:ext>
             </a:extLst>
           </p:cNvPr>
@@ -31550,7 +31543,7 @@
           <p:cNvPr id="25" name="テキスト ボックス 24">
             <a:extLst>
               <a:ext uri="{FF2B5EF4-FFF2-40B4-BE49-F238E27FC236}">
-                <a16:creationId xmlns:a16="http://schemas.microsoft.com/office/drawing/2014/main" id="{8745084E-1157-E7D7-66C3-EDABA1B7DCA9}"/>
+                <a16:creationId xmlns:a16="http://schemas.microsoft.com/office/drawing/2014/main" id="{15AA5C43-09BA-7284-8D71-ACFA3BB8D17B}"/>
               </a:ext>
             </a:extLst>
           </p:cNvPr>
@@ -31596,7 +31589,7 @@
           <p:cNvPr id="26" name="テキスト ボックス 25">
             <a:extLst>
               <a:ext uri="{FF2B5EF4-FFF2-40B4-BE49-F238E27FC236}">
-                <a16:creationId xmlns:a16="http://schemas.microsoft.com/office/drawing/2014/main" id="{1C270FB9-71A2-2961-28BC-6071B7B8EFAA}"/>
+                <a16:creationId xmlns:a16="http://schemas.microsoft.com/office/drawing/2014/main" id="{ED63CEE3-C324-1A94-F8E8-C1EF5FF9B832}"/>
               </a:ext>
             </a:extLst>
           </p:cNvPr>
@@ -31692,7 +31685,7 @@
           <p:cNvPr id="27" name="四角形: 角を丸くする 26">
             <a:extLst>
               <a:ext uri="{FF2B5EF4-FFF2-40B4-BE49-F238E27FC236}">
-                <a16:creationId xmlns:a16="http://schemas.microsoft.com/office/drawing/2014/main" id="{B524BF47-593A-0269-EF91-61CB24380E49}"/>
+                <a16:creationId xmlns:a16="http://schemas.microsoft.com/office/drawing/2014/main" id="{5BBCEACC-F789-C1B6-9478-7EBEEAFDBE8B}"/>
               </a:ext>
             </a:extLst>
           </p:cNvPr>
@@ -31762,7 +31755,7 @@
           <p:cNvPr id="28" name="正方形/長方形 27">
             <a:extLst>
               <a:ext uri="{FF2B5EF4-FFF2-40B4-BE49-F238E27FC236}">
-                <a16:creationId xmlns:a16="http://schemas.microsoft.com/office/drawing/2014/main" id="{83111E45-09CD-FF77-FA37-E060F1E30059}"/>
+                <a16:creationId xmlns:a16="http://schemas.microsoft.com/office/drawing/2014/main" id="{59517A1F-72AD-3536-DB6B-46AD80F893D0}"/>
               </a:ext>
             </a:extLst>
           </p:cNvPr>
@@ -31830,7 +31823,7 @@
           <p:cNvPr id="29" name="テキスト ボックス 28">
             <a:extLst>
               <a:ext uri="{FF2B5EF4-FFF2-40B4-BE49-F238E27FC236}">
-                <a16:creationId xmlns:a16="http://schemas.microsoft.com/office/drawing/2014/main" id="{A843F456-C87C-CC38-012E-A76E1FD3EEBF}"/>
+                <a16:creationId xmlns:a16="http://schemas.microsoft.com/office/drawing/2014/main" id="{6A81BC3D-7C82-3777-F599-F2F3BAF741A3}"/>
               </a:ext>
             </a:extLst>
           </p:cNvPr>
@@ -31876,7 +31869,7 @@
           <p:cNvPr id="30" name="テキスト ボックス 29">
             <a:extLst>
               <a:ext uri="{FF2B5EF4-FFF2-40B4-BE49-F238E27FC236}">
-                <a16:creationId xmlns:a16="http://schemas.microsoft.com/office/drawing/2014/main" id="{67947F4D-DC62-FAB0-A123-C2E73EDD0257}"/>
+                <a16:creationId xmlns:a16="http://schemas.microsoft.com/office/drawing/2014/main" id="{9905D840-79EC-93AE-2578-5E0147A18EF2}"/>
               </a:ext>
             </a:extLst>
           </p:cNvPr>
@@ -31960,7 +31953,7 @@
     </p:spTree>
     <p:extLst>
       <p:ext uri="{BB962C8B-B14F-4D97-AF65-F5344CB8AC3E}">
-        <p14:creationId xmlns:p14="http://schemas.microsoft.com/office/powerpoint/2010/main" val="242704708"/>
+        <p14:creationId xmlns:p14="http://schemas.microsoft.com/office/powerpoint/2010/main" val="2857577404"/>
       </p:ext>
     </p:extLst>
   </p:cSld>
@@ -31992,7 +31985,7 @@
           <p:cNvPr id="2" name="正方形/長方形 1">
             <a:extLst>
               <a:ext uri="{FF2B5EF4-FFF2-40B4-BE49-F238E27FC236}">
-                <a16:creationId xmlns:a16="http://schemas.microsoft.com/office/drawing/2014/main" id="{14E19E36-D24F-1008-A803-B228F3332D6A}"/>
+                <a16:creationId xmlns:a16="http://schemas.microsoft.com/office/drawing/2014/main" id="{2C5F92B4-3C0A-3058-5EE2-CFFA4E29F7B0}"/>
               </a:ext>
             </a:extLst>
           </p:cNvPr>
@@ -32060,7 +32053,7 @@
           <p:cNvPr id="3" name="正方形/長方形 2">
             <a:extLst>
               <a:ext uri="{FF2B5EF4-FFF2-40B4-BE49-F238E27FC236}">
-                <a16:creationId xmlns:a16="http://schemas.microsoft.com/office/drawing/2014/main" id="{49E7652F-DE93-ED52-8890-C4AA5A662D05}"/>
+                <a16:creationId xmlns:a16="http://schemas.microsoft.com/office/drawing/2014/main" id="{0E4AC473-1F50-F26D-EC03-8B4355DF994B}"/>
               </a:ext>
             </a:extLst>
           </p:cNvPr>
@@ -32128,7 +32121,7 @@
           <p:cNvPr id="4" name="テキスト ボックス 3">
             <a:extLst>
               <a:ext uri="{FF2B5EF4-FFF2-40B4-BE49-F238E27FC236}">
-                <a16:creationId xmlns:a16="http://schemas.microsoft.com/office/drawing/2014/main" id="{46DE0445-2D47-0857-0201-27E39B83257B}"/>
+                <a16:creationId xmlns:a16="http://schemas.microsoft.com/office/drawing/2014/main" id="{55449374-E956-F37C-C65C-A06357D88592}"/>
               </a:ext>
             </a:extLst>
           </p:cNvPr>
@@ -32181,7 +32174,7 @@
           <p:cNvPr id="5" name="テキスト ボックス 4">
             <a:extLst>
               <a:ext uri="{FF2B5EF4-FFF2-40B4-BE49-F238E27FC236}">
-                <a16:creationId xmlns:a16="http://schemas.microsoft.com/office/drawing/2014/main" id="{7EFF1EE1-BBD9-267B-FF82-62F3BDDF11AB}"/>
+                <a16:creationId xmlns:a16="http://schemas.microsoft.com/office/drawing/2014/main" id="{25C99C6D-889E-A66D-8F19-56A1B8B8A0EE}"/>
               </a:ext>
             </a:extLst>
           </p:cNvPr>
@@ -32247,7 +32240,7 @@
           <p:cNvPr id="6" name="正方形/長方形 5">
             <a:extLst>
               <a:ext uri="{FF2B5EF4-FFF2-40B4-BE49-F238E27FC236}">
-                <a16:creationId xmlns:a16="http://schemas.microsoft.com/office/drawing/2014/main" id="{5765B8F5-09EF-3361-C8F6-70FA30420027}"/>
+                <a16:creationId xmlns:a16="http://schemas.microsoft.com/office/drawing/2014/main" id="{47847BF6-D6BD-2B65-0A85-DD6764FF9483}"/>
               </a:ext>
             </a:extLst>
           </p:cNvPr>
@@ -32315,7 +32308,7 @@
           <p:cNvPr id="7" name="四角形: 角を丸くする 6">
             <a:extLst>
               <a:ext uri="{FF2B5EF4-FFF2-40B4-BE49-F238E27FC236}">
-                <a16:creationId xmlns:a16="http://schemas.microsoft.com/office/drawing/2014/main" id="{59D46091-95FA-9E39-988A-D89F3C17FF44}"/>
+                <a16:creationId xmlns:a16="http://schemas.microsoft.com/office/drawing/2014/main" id="{2042C0D6-EEDD-CDB2-14B1-BE0A947DEC9C}"/>
               </a:ext>
             </a:extLst>
           </p:cNvPr>
@@ -32385,7 +32378,7 @@
           <p:cNvPr id="8" name="テキスト ボックス 7">
             <a:extLst>
               <a:ext uri="{FF2B5EF4-FFF2-40B4-BE49-F238E27FC236}">
-                <a16:creationId xmlns:a16="http://schemas.microsoft.com/office/drawing/2014/main" id="{E64DA8BE-8C55-5AD0-60CF-80B6DA9CB3CA}"/>
+                <a16:creationId xmlns:a16="http://schemas.microsoft.com/office/drawing/2014/main" id="{CD2DA386-9E3D-86E4-19F8-05357FA44076}"/>
               </a:ext>
             </a:extLst>
           </p:cNvPr>
@@ -32431,7 +32424,7 @@
           <p:cNvPr id="9" name="テキスト ボックス 8">
             <a:extLst>
               <a:ext uri="{FF2B5EF4-FFF2-40B4-BE49-F238E27FC236}">
-                <a16:creationId xmlns:a16="http://schemas.microsoft.com/office/drawing/2014/main" id="{2F0099D7-E4F6-7493-D852-D171D308CD16}"/>
+                <a16:creationId xmlns:a16="http://schemas.microsoft.com/office/drawing/2014/main" id="{CB0A9352-158B-EABB-1F0C-D468BE76A865}"/>
               </a:ext>
             </a:extLst>
           </p:cNvPr>
@@ -32441,7 +32434,7 @@
         <p:spPr>
           <a:xfrm>
             <a:off x="812800" y="6375400"/>
-            <a:ext cx="5080000" cy="177800"/>
+            <a:ext cx="6604000" cy="177800"/>
           </a:xfrm>
           <a:prstGeom prst="rect">
             <a:avLst/>
@@ -32467,7 +32460,7 @@
                 <a:latin typeface="Yu Gothic UI" panose="020B0500000000000000" pitchFamily="50" charset="-128"/>
                 <a:ea typeface="Yu Gothic UI" panose="020B0500000000000000" pitchFamily="50" charset="-128"/>
               </a:rPr>
-              <a:t>簡易デジタルサイネージ ｜ 操作ガイド</a:t>
+              <a:t>簡単！シンプル！サイネージ ｜ 操作ガイド</a:t>
             </a:r>
           </a:p>
         </p:txBody>
@@ -32477,7 +32470,7 @@
           <p:cNvPr id="10" name="テキスト ボックス 9">
             <a:extLst>
               <a:ext uri="{FF2B5EF4-FFF2-40B4-BE49-F238E27FC236}">
-                <a16:creationId xmlns:a16="http://schemas.microsoft.com/office/drawing/2014/main" id="{6367F442-E929-4B7F-9271-F60EA0015635}"/>
+                <a16:creationId xmlns:a16="http://schemas.microsoft.com/office/drawing/2014/main" id="{0592B403-4656-25A5-DABF-C9DFC6C9380B}"/>
               </a:ext>
             </a:extLst>
           </p:cNvPr>
@@ -32530,7 +32523,7 @@
           <p:cNvPr id="11" name="四角形: 角を丸くする 10">
             <a:extLst>
               <a:ext uri="{FF2B5EF4-FFF2-40B4-BE49-F238E27FC236}">
-                <a16:creationId xmlns:a16="http://schemas.microsoft.com/office/drawing/2014/main" id="{908FC0E1-5CDE-51DE-185B-544CC593D664}"/>
+                <a16:creationId xmlns:a16="http://schemas.microsoft.com/office/drawing/2014/main" id="{3F9F1579-75CF-29E0-5603-75D8E1C5A873}"/>
               </a:ext>
             </a:extLst>
           </p:cNvPr>
@@ -32586,7 +32579,7 @@
           <p:cNvPr id="12" name="正方形/長方形 11">
             <a:extLst>
               <a:ext uri="{FF2B5EF4-FFF2-40B4-BE49-F238E27FC236}">
-                <a16:creationId xmlns:a16="http://schemas.microsoft.com/office/drawing/2014/main" id="{99091D53-AB05-2E28-31EB-C5D516C5203D}"/>
+                <a16:creationId xmlns:a16="http://schemas.microsoft.com/office/drawing/2014/main" id="{F243FC59-6F58-21B0-306F-5178E9C0DD1B}"/>
               </a:ext>
             </a:extLst>
           </p:cNvPr>
@@ -32654,7 +32647,7 @@
           <p:cNvPr id="13" name="テキスト ボックス 12">
             <a:extLst>
               <a:ext uri="{FF2B5EF4-FFF2-40B4-BE49-F238E27FC236}">
-                <a16:creationId xmlns:a16="http://schemas.microsoft.com/office/drawing/2014/main" id="{C5FA7B1F-438B-62F8-5CB9-D375737CE715}"/>
+                <a16:creationId xmlns:a16="http://schemas.microsoft.com/office/drawing/2014/main" id="{ECAB7749-7DBD-E7FF-E303-22D158BECFE4}"/>
               </a:ext>
             </a:extLst>
           </p:cNvPr>
@@ -32700,7 +32693,7 @@
           <p:cNvPr id="14" name="テキスト ボックス 13">
             <a:extLst>
               <a:ext uri="{FF2B5EF4-FFF2-40B4-BE49-F238E27FC236}">
-                <a16:creationId xmlns:a16="http://schemas.microsoft.com/office/drawing/2014/main" id="{D4443691-07AE-FC2A-F6C7-85EE96E7F2E2}"/>
+                <a16:creationId xmlns:a16="http://schemas.microsoft.com/office/drawing/2014/main" id="{6D32E54D-E3A5-628D-AADD-42F389AB980B}"/>
               </a:ext>
             </a:extLst>
           </p:cNvPr>
@@ -32746,7 +32739,7 @@
           <p:cNvPr id="15" name="四角形: 角を丸くする 14">
             <a:extLst>
               <a:ext uri="{FF2B5EF4-FFF2-40B4-BE49-F238E27FC236}">
-                <a16:creationId xmlns:a16="http://schemas.microsoft.com/office/drawing/2014/main" id="{5832E115-78B1-3A11-3CDC-2B667387BB8B}"/>
+                <a16:creationId xmlns:a16="http://schemas.microsoft.com/office/drawing/2014/main" id="{82E40459-51FF-6B70-0A4F-C55849B79C8E}"/>
               </a:ext>
             </a:extLst>
           </p:cNvPr>
@@ -32802,7 +32795,7 @@
           <p:cNvPr id="16" name="正方形/長方形 15">
             <a:extLst>
               <a:ext uri="{FF2B5EF4-FFF2-40B4-BE49-F238E27FC236}">
-                <a16:creationId xmlns:a16="http://schemas.microsoft.com/office/drawing/2014/main" id="{495BCE23-A71E-C26E-999B-F265CF2A2B2D}"/>
+                <a16:creationId xmlns:a16="http://schemas.microsoft.com/office/drawing/2014/main" id="{B0DAC9A2-A0C7-A756-E41D-D62242AED3E6}"/>
               </a:ext>
             </a:extLst>
           </p:cNvPr>
@@ -32870,7 +32863,7 @@
           <p:cNvPr id="17" name="テキスト ボックス 16">
             <a:extLst>
               <a:ext uri="{FF2B5EF4-FFF2-40B4-BE49-F238E27FC236}">
-                <a16:creationId xmlns:a16="http://schemas.microsoft.com/office/drawing/2014/main" id="{0C76F437-3109-414F-E881-89823A554CA5}"/>
+                <a16:creationId xmlns:a16="http://schemas.microsoft.com/office/drawing/2014/main" id="{D8E8B22B-4A05-9711-E69B-07722E3CD561}"/>
               </a:ext>
             </a:extLst>
           </p:cNvPr>
@@ -32916,7 +32909,7 @@
           <p:cNvPr id="18" name="テキスト ボックス 17">
             <a:extLst>
               <a:ext uri="{FF2B5EF4-FFF2-40B4-BE49-F238E27FC236}">
-                <a16:creationId xmlns:a16="http://schemas.microsoft.com/office/drawing/2014/main" id="{120BF1BD-CC34-70F5-77F6-6876CB581ACB}"/>
+                <a16:creationId xmlns:a16="http://schemas.microsoft.com/office/drawing/2014/main" id="{12965AE8-8868-7AE1-5FCD-D1CC37116AD2}"/>
               </a:ext>
             </a:extLst>
           </p:cNvPr>
@@ -32962,7 +32955,7 @@
           <p:cNvPr id="19" name="四角形: 角を丸くする 18">
             <a:extLst>
               <a:ext uri="{FF2B5EF4-FFF2-40B4-BE49-F238E27FC236}">
-                <a16:creationId xmlns:a16="http://schemas.microsoft.com/office/drawing/2014/main" id="{0E5082C6-E5C9-58D1-7FC0-6214170F5AA9}"/>
+                <a16:creationId xmlns:a16="http://schemas.microsoft.com/office/drawing/2014/main" id="{CEF64AD1-A24F-5BE8-F0FA-CD7AA6057AFD}"/>
               </a:ext>
             </a:extLst>
           </p:cNvPr>
@@ -33018,7 +33011,7 @@
           <p:cNvPr id="20" name="正方形/長方形 19">
             <a:extLst>
               <a:ext uri="{FF2B5EF4-FFF2-40B4-BE49-F238E27FC236}">
-                <a16:creationId xmlns:a16="http://schemas.microsoft.com/office/drawing/2014/main" id="{E5E5548E-00A2-F90F-F01A-E4F586CCDD14}"/>
+                <a16:creationId xmlns:a16="http://schemas.microsoft.com/office/drawing/2014/main" id="{6F6C2CA0-9523-8FA9-B55D-4D958DA6CD6E}"/>
               </a:ext>
             </a:extLst>
           </p:cNvPr>
@@ -33086,7 +33079,7 @@
           <p:cNvPr id="21" name="テキスト ボックス 20">
             <a:extLst>
               <a:ext uri="{FF2B5EF4-FFF2-40B4-BE49-F238E27FC236}">
-                <a16:creationId xmlns:a16="http://schemas.microsoft.com/office/drawing/2014/main" id="{4207B250-DC8E-7111-3C91-2FCB142937BD}"/>
+                <a16:creationId xmlns:a16="http://schemas.microsoft.com/office/drawing/2014/main" id="{CCB0746C-53E7-696E-63A4-1DC14DF227E3}"/>
               </a:ext>
             </a:extLst>
           </p:cNvPr>
@@ -33132,7 +33125,7 @@
           <p:cNvPr id="22" name="テキスト ボックス 21">
             <a:extLst>
               <a:ext uri="{FF2B5EF4-FFF2-40B4-BE49-F238E27FC236}">
-                <a16:creationId xmlns:a16="http://schemas.microsoft.com/office/drawing/2014/main" id="{C5597070-E7EE-8C5D-86F1-9FD7FFDB099B}"/>
+                <a16:creationId xmlns:a16="http://schemas.microsoft.com/office/drawing/2014/main" id="{50B5B361-0165-F616-3133-6A76374402C6}"/>
               </a:ext>
             </a:extLst>
           </p:cNvPr>
@@ -33176,7 +33169,7 @@
     </p:spTree>
     <p:extLst>
       <p:ext uri="{BB962C8B-B14F-4D97-AF65-F5344CB8AC3E}">
-        <p14:creationId xmlns:p14="http://schemas.microsoft.com/office/powerpoint/2010/main" val="529864577"/>
+        <p14:creationId xmlns:p14="http://schemas.microsoft.com/office/powerpoint/2010/main" val="2676223448"/>
       </p:ext>
     </p:extLst>
   </p:cSld>

--- a/docs/操作ガイド.pptx
+++ b/docs/操作ガイド.pptx
@@ -147,7 +147,7 @@
           <p:cNvPr id="2" name="タイトル 1">
             <a:extLst>
               <a:ext uri="{FF2B5EF4-FFF2-40B4-BE49-F238E27FC236}">
-                <a16:creationId xmlns:a16="http://schemas.microsoft.com/office/drawing/2014/main" id="{75AF0150-2413-D298-5D51-C681E5E8F844}"/>
+                <a16:creationId xmlns:a16="http://schemas.microsoft.com/office/drawing/2014/main" id="{13C45616-4299-8458-BD83-E3CFD738D256}"/>
               </a:ext>
             </a:extLst>
           </p:cNvPr>
@@ -184,7 +184,7 @@
           <p:cNvPr id="3" name="字幕 2">
             <a:extLst>
               <a:ext uri="{FF2B5EF4-FFF2-40B4-BE49-F238E27FC236}">
-                <a16:creationId xmlns:a16="http://schemas.microsoft.com/office/drawing/2014/main" id="{A31895CC-E0E4-69B2-AA2B-350C8920A6AB}"/>
+                <a16:creationId xmlns:a16="http://schemas.microsoft.com/office/drawing/2014/main" id="{B6926922-F5BE-0C58-FB71-4EB8B77685B1}"/>
               </a:ext>
             </a:extLst>
           </p:cNvPr>
@@ -254,7 +254,7 @@
           <p:cNvPr id="4" name="日付プレースホルダー 3">
             <a:extLst>
               <a:ext uri="{FF2B5EF4-FFF2-40B4-BE49-F238E27FC236}">
-                <a16:creationId xmlns:a16="http://schemas.microsoft.com/office/drawing/2014/main" id="{83C3022B-58A2-6F29-F132-AE1435E10DE1}"/>
+                <a16:creationId xmlns:a16="http://schemas.microsoft.com/office/drawing/2014/main" id="{8F72A0BA-2081-DFDB-A438-C506B0F8DA65}"/>
               </a:ext>
             </a:extLst>
           </p:cNvPr>
@@ -270,9 +270,9 @@
           <a:bodyPr/>
           <a:lstStyle/>
           <a:p>
-            <a:fld id="{B7470CBC-C122-40DA-A9FA-F1018DF8E254}" type="datetimeFigureOut">
+            <a:fld id="{B455B53E-AC42-439D-977B-2AD63AFFDAE6}" type="datetimeFigureOut">
               <a:rPr kumimoji="1" lang="ja-JP" altLang="en-US" smtClean="0"/>
-              <a:t>2026/9/12</a:t>
+              <a:t>2026/9/18</a:t>
             </a:fld>
             <a:endParaRPr kumimoji="1" lang="ja-JP" altLang="en-US"/>
           </a:p>
@@ -283,7 +283,7 @@
           <p:cNvPr id="5" name="フッター プレースホルダー 4">
             <a:extLst>
               <a:ext uri="{FF2B5EF4-FFF2-40B4-BE49-F238E27FC236}">
-                <a16:creationId xmlns:a16="http://schemas.microsoft.com/office/drawing/2014/main" id="{2B23B85D-0F41-81FF-C2ED-EF76DEF961DD}"/>
+                <a16:creationId xmlns:a16="http://schemas.microsoft.com/office/drawing/2014/main" id="{6E5A91CB-FB2E-D8D0-A112-3B92DE75EE2A}"/>
               </a:ext>
             </a:extLst>
           </p:cNvPr>
@@ -308,7 +308,7 @@
           <p:cNvPr id="6" name="スライド番号プレースホルダー 5">
             <a:extLst>
               <a:ext uri="{FF2B5EF4-FFF2-40B4-BE49-F238E27FC236}">
-                <a16:creationId xmlns:a16="http://schemas.microsoft.com/office/drawing/2014/main" id="{4CDF1CCB-9D47-F3D7-65A6-5497E7218074}"/>
+                <a16:creationId xmlns:a16="http://schemas.microsoft.com/office/drawing/2014/main" id="{948DEF1C-F266-8117-F220-73E9E2883848}"/>
               </a:ext>
             </a:extLst>
           </p:cNvPr>
@@ -324,7 +324,7 @@
           <a:bodyPr/>
           <a:lstStyle/>
           <a:p>
-            <a:fld id="{7BB5449D-F0F2-430C-B147-4BDEDFCC4C12}" type="slidenum">
+            <a:fld id="{7F11CA10-2CD0-4706-9CBE-CE346C6CB78F}" type="slidenum">
               <a:rPr kumimoji="1" lang="ja-JP" altLang="en-US" smtClean="0"/>
               <a:t>‹#›</a:t>
             </a:fld>
@@ -335,7 +335,7 @@
     </p:spTree>
     <p:extLst>
       <p:ext uri="{BB962C8B-B14F-4D97-AF65-F5344CB8AC3E}">
-        <p14:creationId xmlns:p14="http://schemas.microsoft.com/office/powerpoint/2010/main" val="3376520197"/>
+        <p14:creationId xmlns:p14="http://schemas.microsoft.com/office/powerpoint/2010/main" val="4173597007"/>
       </p:ext>
     </p:extLst>
   </p:cSld>
@@ -367,7 +367,7 @@
           <p:cNvPr id="2" name="タイトル 1">
             <a:extLst>
               <a:ext uri="{FF2B5EF4-FFF2-40B4-BE49-F238E27FC236}">
-                <a16:creationId xmlns:a16="http://schemas.microsoft.com/office/drawing/2014/main" id="{DD0F61D3-B5E6-F4E1-6820-3BDF4AA36356}"/>
+                <a16:creationId xmlns:a16="http://schemas.microsoft.com/office/drawing/2014/main" id="{6E6F6CBB-398A-0BF7-6B95-A88CD71C0278}"/>
               </a:ext>
             </a:extLst>
           </p:cNvPr>
@@ -395,7 +395,7 @@
           <p:cNvPr id="3" name="縦書きテキスト プレースホルダー 2">
             <a:extLst>
               <a:ext uri="{FF2B5EF4-FFF2-40B4-BE49-F238E27FC236}">
-                <a16:creationId xmlns:a16="http://schemas.microsoft.com/office/drawing/2014/main" id="{7F548E7B-66A7-F9D0-C7E5-834D320172CF}"/>
+                <a16:creationId xmlns:a16="http://schemas.microsoft.com/office/drawing/2014/main" id="{FDEA43D1-C67F-EF73-E3DE-01364340D70F}"/>
               </a:ext>
             </a:extLst>
           </p:cNvPr>
@@ -484,7 +484,7 @@
           <p:cNvPr id="4" name="日付プレースホルダー 3">
             <a:extLst>
               <a:ext uri="{FF2B5EF4-FFF2-40B4-BE49-F238E27FC236}">
-                <a16:creationId xmlns:a16="http://schemas.microsoft.com/office/drawing/2014/main" id="{FEE76347-8895-6F0A-A94E-EFCA2EB50D08}"/>
+                <a16:creationId xmlns:a16="http://schemas.microsoft.com/office/drawing/2014/main" id="{B5FB9044-E746-EE04-6833-25C82CE917CE}"/>
               </a:ext>
             </a:extLst>
           </p:cNvPr>
@@ -500,9 +500,9 @@
           <a:bodyPr/>
           <a:lstStyle/>
           <a:p>
-            <a:fld id="{B7470CBC-C122-40DA-A9FA-F1018DF8E254}" type="datetimeFigureOut">
+            <a:fld id="{B455B53E-AC42-439D-977B-2AD63AFFDAE6}" type="datetimeFigureOut">
               <a:rPr kumimoji="1" lang="ja-JP" altLang="en-US" smtClean="0"/>
-              <a:t>2026/9/12</a:t>
+              <a:t>2026/9/18</a:t>
             </a:fld>
             <a:endParaRPr kumimoji="1" lang="ja-JP" altLang="en-US"/>
           </a:p>
@@ -513,7 +513,7 @@
           <p:cNvPr id="5" name="フッター プレースホルダー 4">
             <a:extLst>
               <a:ext uri="{FF2B5EF4-FFF2-40B4-BE49-F238E27FC236}">
-                <a16:creationId xmlns:a16="http://schemas.microsoft.com/office/drawing/2014/main" id="{49B3E53C-C974-7D56-4F47-E8D6CA4FE902}"/>
+                <a16:creationId xmlns:a16="http://schemas.microsoft.com/office/drawing/2014/main" id="{5E197697-39C6-2740-8422-05826D80DCA7}"/>
               </a:ext>
             </a:extLst>
           </p:cNvPr>
@@ -538,7 +538,7 @@
           <p:cNvPr id="6" name="スライド番号プレースホルダー 5">
             <a:extLst>
               <a:ext uri="{FF2B5EF4-FFF2-40B4-BE49-F238E27FC236}">
-                <a16:creationId xmlns:a16="http://schemas.microsoft.com/office/drawing/2014/main" id="{45D4E9C1-D02F-3DC0-31CD-ABFE7E714B77}"/>
+                <a16:creationId xmlns:a16="http://schemas.microsoft.com/office/drawing/2014/main" id="{71CB508C-87C6-8483-FB85-3C23B87D3C2B}"/>
               </a:ext>
             </a:extLst>
           </p:cNvPr>
@@ -554,7 +554,7 @@
           <a:bodyPr/>
           <a:lstStyle/>
           <a:p>
-            <a:fld id="{7BB5449D-F0F2-430C-B147-4BDEDFCC4C12}" type="slidenum">
+            <a:fld id="{7F11CA10-2CD0-4706-9CBE-CE346C6CB78F}" type="slidenum">
               <a:rPr kumimoji="1" lang="ja-JP" altLang="en-US" smtClean="0"/>
               <a:t>‹#›</a:t>
             </a:fld>
@@ -565,7 +565,7 @@
     </p:spTree>
     <p:extLst>
       <p:ext uri="{BB962C8B-B14F-4D97-AF65-F5344CB8AC3E}">
-        <p14:creationId xmlns:p14="http://schemas.microsoft.com/office/powerpoint/2010/main" val="2933614414"/>
+        <p14:creationId xmlns:p14="http://schemas.microsoft.com/office/powerpoint/2010/main" val="2407450643"/>
       </p:ext>
     </p:extLst>
   </p:cSld>
@@ -597,7 +597,7 @@
           <p:cNvPr id="2" name="縦書きタイトル 1">
             <a:extLst>
               <a:ext uri="{FF2B5EF4-FFF2-40B4-BE49-F238E27FC236}">
-                <a16:creationId xmlns:a16="http://schemas.microsoft.com/office/drawing/2014/main" id="{4F6A4473-5D75-DDB6-F067-F2AE6D80836B}"/>
+                <a16:creationId xmlns:a16="http://schemas.microsoft.com/office/drawing/2014/main" id="{E1C34702-E812-D16C-8E10-F9AA588FDBA3}"/>
               </a:ext>
             </a:extLst>
           </p:cNvPr>
@@ -630,7 +630,7 @@
           <p:cNvPr id="3" name="縦書きテキスト プレースホルダー 2">
             <a:extLst>
               <a:ext uri="{FF2B5EF4-FFF2-40B4-BE49-F238E27FC236}">
-                <a16:creationId xmlns:a16="http://schemas.microsoft.com/office/drawing/2014/main" id="{77150A49-063E-6B80-BF9E-02B5C2F090AC}"/>
+                <a16:creationId xmlns:a16="http://schemas.microsoft.com/office/drawing/2014/main" id="{3A23E878-C85F-B55E-AF1C-21B4D87FC309}"/>
               </a:ext>
             </a:extLst>
           </p:cNvPr>
@@ -724,7 +724,7 @@
           <p:cNvPr id="4" name="日付プレースホルダー 3">
             <a:extLst>
               <a:ext uri="{FF2B5EF4-FFF2-40B4-BE49-F238E27FC236}">
-                <a16:creationId xmlns:a16="http://schemas.microsoft.com/office/drawing/2014/main" id="{D5EB5078-4825-B325-E4AE-4D5203A39B17}"/>
+                <a16:creationId xmlns:a16="http://schemas.microsoft.com/office/drawing/2014/main" id="{A99A073E-A3C9-406E-33FD-14A9E8F9D4A7}"/>
               </a:ext>
             </a:extLst>
           </p:cNvPr>
@@ -740,9 +740,9 @@
           <a:bodyPr/>
           <a:lstStyle/>
           <a:p>
-            <a:fld id="{B7470CBC-C122-40DA-A9FA-F1018DF8E254}" type="datetimeFigureOut">
+            <a:fld id="{B455B53E-AC42-439D-977B-2AD63AFFDAE6}" type="datetimeFigureOut">
               <a:rPr kumimoji="1" lang="ja-JP" altLang="en-US" smtClean="0"/>
-              <a:t>2026/9/12</a:t>
+              <a:t>2026/9/18</a:t>
             </a:fld>
             <a:endParaRPr kumimoji="1" lang="ja-JP" altLang="en-US"/>
           </a:p>
@@ -753,7 +753,7 @@
           <p:cNvPr id="5" name="フッター プレースホルダー 4">
             <a:extLst>
               <a:ext uri="{FF2B5EF4-FFF2-40B4-BE49-F238E27FC236}">
-                <a16:creationId xmlns:a16="http://schemas.microsoft.com/office/drawing/2014/main" id="{217395BA-04DC-7645-9E5D-7EB1D244367B}"/>
+                <a16:creationId xmlns:a16="http://schemas.microsoft.com/office/drawing/2014/main" id="{6EE16EB9-1B31-31DE-6798-43E706EF3274}"/>
               </a:ext>
             </a:extLst>
           </p:cNvPr>
@@ -778,7 +778,7 @@
           <p:cNvPr id="6" name="スライド番号プレースホルダー 5">
             <a:extLst>
               <a:ext uri="{FF2B5EF4-FFF2-40B4-BE49-F238E27FC236}">
-                <a16:creationId xmlns:a16="http://schemas.microsoft.com/office/drawing/2014/main" id="{7A878635-658F-3161-8A07-69B6A586D00E}"/>
+                <a16:creationId xmlns:a16="http://schemas.microsoft.com/office/drawing/2014/main" id="{C9C29B20-375B-1CBF-2327-3C060EEE0E68}"/>
               </a:ext>
             </a:extLst>
           </p:cNvPr>
@@ -794,7 +794,7 @@
           <a:bodyPr/>
           <a:lstStyle/>
           <a:p>
-            <a:fld id="{7BB5449D-F0F2-430C-B147-4BDEDFCC4C12}" type="slidenum">
+            <a:fld id="{7F11CA10-2CD0-4706-9CBE-CE346C6CB78F}" type="slidenum">
               <a:rPr kumimoji="1" lang="ja-JP" altLang="en-US" smtClean="0"/>
               <a:t>‹#›</a:t>
             </a:fld>
@@ -805,7 +805,7 @@
     </p:spTree>
     <p:extLst>
       <p:ext uri="{BB962C8B-B14F-4D97-AF65-F5344CB8AC3E}">
-        <p14:creationId xmlns:p14="http://schemas.microsoft.com/office/powerpoint/2010/main" val="2251405351"/>
+        <p14:creationId xmlns:p14="http://schemas.microsoft.com/office/powerpoint/2010/main" val="2003653031"/>
       </p:ext>
     </p:extLst>
   </p:cSld>
@@ -837,7 +837,7 @@
           <p:cNvPr id="2" name="タイトル 1">
             <a:extLst>
               <a:ext uri="{FF2B5EF4-FFF2-40B4-BE49-F238E27FC236}">
-                <a16:creationId xmlns:a16="http://schemas.microsoft.com/office/drawing/2014/main" id="{BE19091F-0CF5-C1BE-A42D-FD4D78BBCF32}"/>
+                <a16:creationId xmlns:a16="http://schemas.microsoft.com/office/drawing/2014/main" id="{0D151D01-0539-062E-D07D-27070B301EE7}"/>
               </a:ext>
             </a:extLst>
           </p:cNvPr>
@@ -865,7 +865,7 @@
           <p:cNvPr id="3" name="コンテンツ プレースホルダー 2">
             <a:extLst>
               <a:ext uri="{FF2B5EF4-FFF2-40B4-BE49-F238E27FC236}">
-                <a16:creationId xmlns:a16="http://schemas.microsoft.com/office/drawing/2014/main" id="{CB6B7FDE-5C03-EB42-2E36-FE9563BA5E56}"/>
+                <a16:creationId xmlns:a16="http://schemas.microsoft.com/office/drawing/2014/main" id="{ED0F92E5-C00C-434E-9E66-E59E033783C9}"/>
               </a:ext>
             </a:extLst>
           </p:cNvPr>
@@ -954,7 +954,7 @@
           <p:cNvPr id="4" name="日付プレースホルダー 3">
             <a:extLst>
               <a:ext uri="{FF2B5EF4-FFF2-40B4-BE49-F238E27FC236}">
-                <a16:creationId xmlns:a16="http://schemas.microsoft.com/office/drawing/2014/main" id="{3C862C18-5167-58E5-3C12-76460C0EEEBC}"/>
+                <a16:creationId xmlns:a16="http://schemas.microsoft.com/office/drawing/2014/main" id="{FE3EA8AA-DC31-3B15-50D3-CAAE687976B1}"/>
               </a:ext>
             </a:extLst>
           </p:cNvPr>
@@ -970,9 +970,9 @@
           <a:bodyPr/>
           <a:lstStyle/>
           <a:p>
-            <a:fld id="{B7470CBC-C122-40DA-A9FA-F1018DF8E254}" type="datetimeFigureOut">
+            <a:fld id="{B455B53E-AC42-439D-977B-2AD63AFFDAE6}" type="datetimeFigureOut">
               <a:rPr kumimoji="1" lang="ja-JP" altLang="en-US" smtClean="0"/>
-              <a:t>2026/9/12</a:t>
+              <a:t>2026/9/18</a:t>
             </a:fld>
             <a:endParaRPr kumimoji="1" lang="ja-JP" altLang="en-US"/>
           </a:p>
@@ -983,7 +983,7 @@
           <p:cNvPr id="5" name="フッター プレースホルダー 4">
             <a:extLst>
               <a:ext uri="{FF2B5EF4-FFF2-40B4-BE49-F238E27FC236}">
-                <a16:creationId xmlns:a16="http://schemas.microsoft.com/office/drawing/2014/main" id="{60A7BB6A-D86E-694C-031B-3774BC220427}"/>
+                <a16:creationId xmlns:a16="http://schemas.microsoft.com/office/drawing/2014/main" id="{2FF2BD73-970A-40B2-A203-26A421B45BD1}"/>
               </a:ext>
             </a:extLst>
           </p:cNvPr>
@@ -1008,7 +1008,7 @@
           <p:cNvPr id="6" name="スライド番号プレースホルダー 5">
             <a:extLst>
               <a:ext uri="{FF2B5EF4-FFF2-40B4-BE49-F238E27FC236}">
-                <a16:creationId xmlns:a16="http://schemas.microsoft.com/office/drawing/2014/main" id="{9B78A9AC-49AB-6507-9BAF-20047402C7C3}"/>
+                <a16:creationId xmlns:a16="http://schemas.microsoft.com/office/drawing/2014/main" id="{BD29DDB2-B656-3BD1-8943-63FAC7320381}"/>
               </a:ext>
             </a:extLst>
           </p:cNvPr>
@@ -1024,7 +1024,7 @@
           <a:bodyPr/>
           <a:lstStyle/>
           <a:p>
-            <a:fld id="{7BB5449D-F0F2-430C-B147-4BDEDFCC4C12}" type="slidenum">
+            <a:fld id="{7F11CA10-2CD0-4706-9CBE-CE346C6CB78F}" type="slidenum">
               <a:rPr kumimoji="1" lang="ja-JP" altLang="en-US" smtClean="0"/>
               <a:t>‹#›</a:t>
             </a:fld>
@@ -1035,7 +1035,7 @@
     </p:spTree>
     <p:extLst>
       <p:ext uri="{BB962C8B-B14F-4D97-AF65-F5344CB8AC3E}">
-        <p14:creationId xmlns:p14="http://schemas.microsoft.com/office/powerpoint/2010/main" val="1285828611"/>
+        <p14:creationId xmlns:p14="http://schemas.microsoft.com/office/powerpoint/2010/main" val="1452001213"/>
       </p:ext>
     </p:extLst>
   </p:cSld>
@@ -1067,7 +1067,7 @@
           <p:cNvPr id="2" name="タイトル 1">
             <a:extLst>
               <a:ext uri="{FF2B5EF4-FFF2-40B4-BE49-F238E27FC236}">
-                <a16:creationId xmlns:a16="http://schemas.microsoft.com/office/drawing/2014/main" id="{9E189270-1775-0235-CCE5-22E0241BE50E}"/>
+                <a16:creationId xmlns:a16="http://schemas.microsoft.com/office/drawing/2014/main" id="{990CAE73-7C6C-A5E8-DE13-AF90F852D15D}"/>
               </a:ext>
             </a:extLst>
           </p:cNvPr>
@@ -1104,7 +1104,7 @@
           <p:cNvPr id="3" name="テキスト プレースホルダー 2">
             <a:extLst>
               <a:ext uri="{FF2B5EF4-FFF2-40B4-BE49-F238E27FC236}">
-                <a16:creationId xmlns:a16="http://schemas.microsoft.com/office/drawing/2014/main" id="{A85D0929-0FC3-B90C-A533-3535AB17C907}"/>
+                <a16:creationId xmlns:a16="http://schemas.microsoft.com/office/drawing/2014/main" id="{B2C1D663-9FF4-110D-12ED-49385B547958}"/>
               </a:ext>
             </a:extLst>
           </p:cNvPr>
@@ -1229,7 +1229,7 @@
           <p:cNvPr id="4" name="日付プレースホルダー 3">
             <a:extLst>
               <a:ext uri="{FF2B5EF4-FFF2-40B4-BE49-F238E27FC236}">
-                <a16:creationId xmlns:a16="http://schemas.microsoft.com/office/drawing/2014/main" id="{5AD9E4AC-46B9-D86B-2012-88E0ACC25A0F}"/>
+                <a16:creationId xmlns:a16="http://schemas.microsoft.com/office/drawing/2014/main" id="{9353CCE5-E0A0-D8A1-260E-7BEE422D8B6E}"/>
               </a:ext>
             </a:extLst>
           </p:cNvPr>
@@ -1245,9 +1245,9 @@
           <a:bodyPr/>
           <a:lstStyle/>
           <a:p>
-            <a:fld id="{B7470CBC-C122-40DA-A9FA-F1018DF8E254}" type="datetimeFigureOut">
+            <a:fld id="{B455B53E-AC42-439D-977B-2AD63AFFDAE6}" type="datetimeFigureOut">
               <a:rPr kumimoji="1" lang="ja-JP" altLang="en-US" smtClean="0"/>
-              <a:t>2026/9/12</a:t>
+              <a:t>2026/9/18</a:t>
             </a:fld>
             <a:endParaRPr kumimoji="1" lang="ja-JP" altLang="en-US"/>
           </a:p>
@@ -1258,7 +1258,7 @@
           <p:cNvPr id="5" name="フッター プレースホルダー 4">
             <a:extLst>
               <a:ext uri="{FF2B5EF4-FFF2-40B4-BE49-F238E27FC236}">
-                <a16:creationId xmlns:a16="http://schemas.microsoft.com/office/drawing/2014/main" id="{F00E9D1D-E08D-15AE-67D5-12BDC56DA703}"/>
+                <a16:creationId xmlns:a16="http://schemas.microsoft.com/office/drawing/2014/main" id="{B0B976E0-4244-A6CD-5CD8-E85AE57FD81C}"/>
               </a:ext>
             </a:extLst>
           </p:cNvPr>
@@ -1283,7 +1283,7 @@
           <p:cNvPr id="6" name="スライド番号プレースホルダー 5">
             <a:extLst>
               <a:ext uri="{FF2B5EF4-FFF2-40B4-BE49-F238E27FC236}">
-                <a16:creationId xmlns:a16="http://schemas.microsoft.com/office/drawing/2014/main" id="{7D518051-B686-08AB-E8C1-8F694D36F7B7}"/>
+                <a16:creationId xmlns:a16="http://schemas.microsoft.com/office/drawing/2014/main" id="{8053A26F-63F5-66C3-42D0-0F6DE2BEAC7B}"/>
               </a:ext>
             </a:extLst>
           </p:cNvPr>
@@ -1299,7 +1299,7 @@
           <a:bodyPr/>
           <a:lstStyle/>
           <a:p>
-            <a:fld id="{7BB5449D-F0F2-430C-B147-4BDEDFCC4C12}" type="slidenum">
+            <a:fld id="{7F11CA10-2CD0-4706-9CBE-CE346C6CB78F}" type="slidenum">
               <a:rPr kumimoji="1" lang="ja-JP" altLang="en-US" smtClean="0"/>
               <a:t>‹#›</a:t>
             </a:fld>
@@ -1310,7 +1310,7 @@
     </p:spTree>
     <p:extLst>
       <p:ext uri="{BB962C8B-B14F-4D97-AF65-F5344CB8AC3E}">
-        <p14:creationId xmlns:p14="http://schemas.microsoft.com/office/powerpoint/2010/main" val="2359969179"/>
+        <p14:creationId xmlns:p14="http://schemas.microsoft.com/office/powerpoint/2010/main" val="2194432360"/>
       </p:ext>
     </p:extLst>
   </p:cSld>
@@ -1342,7 +1342,7 @@
           <p:cNvPr id="2" name="タイトル 1">
             <a:extLst>
               <a:ext uri="{FF2B5EF4-FFF2-40B4-BE49-F238E27FC236}">
-                <a16:creationId xmlns:a16="http://schemas.microsoft.com/office/drawing/2014/main" id="{B53A31FF-7CED-FC8B-B6C6-6414A5780402}"/>
+                <a16:creationId xmlns:a16="http://schemas.microsoft.com/office/drawing/2014/main" id="{6BC3E3F5-A087-0ED3-B537-9C592A4E127E}"/>
               </a:ext>
             </a:extLst>
           </p:cNvPr>
@@ -1370,7 +1370,7 @@
           <p:cNvPr id="3" name="コンテンツ プレースホルダー 2">
             <a:extLst>
               <a:ext uri="{FF2B5EF4-FFF2-40B4-BE49-F238E27FC236}">
-                <a16:creationId xmlns:a16="http://schemas.microsoft.com/office/drawing/2014/main" id="{6C651EBA-498F-DC43-8F63-5BD7D8B2FBD1}"/>
+                <a16:creationId xmlns:a16="http://schemas.microsoft.com/office/drawing/2014/main" id="{D723427C-9773-BD9D-33B5-283A95438E04}"/>
               </a:ext>
             </a:extLst>
           </p:cNvPr>
@@ -1464,7 +1464,7 @@
           <p:cNvPr id="4" name="コンテンツ プレースホルダー 3">
             <a:extLst>
               <a:ext uri="{FF2B5EF4-FFF2-40B4-BE49-F238E27FC236}">
-                <a16:creationId xmlns:a16="http://schemas.microsoft.com/office/drawing/2014/main" id="{1BF8C819-5095-1057-F647-404AED00813E}"/>
+                <a16:creationId xmlns:a16="http://schemas.microsoft.com/office/drawing/2014/main" id="{A64E5565-3BFF-B118-3D36-1EC4CC7C9D64}"/>
               </a:ext>
             </a:extLst>
           </p:cNvPr>
@@ -1558,7 +1558,7 @@
           <p:cNvPr id="5" name="日付プレースホルダー 4">
             <a:extLst>
               <a:ext uri="{FF2B5EF4-FFF2-40B4-BE49-F238E27FC236}">
-                <a16:creationId xmlns:a16="http://schemas.microsoft.com/office/drawing/2014/main" id="{4A19544B-3D33-EA90-4A27-A985BA3C142D}"/>
+                <a16:creationId xmlns:a16="http://schemas.microsoft.com/office/drawing/2014/main" id="{B2F18428-0833-DA0C-B960-FDC66229201B}"/>
               </a:ext>
             </a:extLst>
           </p:cNvPr>
@@ -1574,9 +1574,9 @@
           <a:bodyPr/>
           <a:lstStyle/>
           <a:p>
-            <a:fld id="{B7470CBC-C122-40DA-A9FA-F1018DF8E254}" type="datetimeFigureOut">
+            <a:fld id="{B455B53E-AC42-439D-977B-2AD63AFFDAE6}" type="datetimeFigureOut">
               <a:rPr kumimoji="1" lang="ja-JP" altLang="en-US" smtClean="0"/>
-              <a:t>2026/9/12</a:t>
+              <a:t>2026/9/18</a:t>
             </a:fld>
             <a:endParaRPr kumimoji="1" lang="ja-JP" altLang="en-US"/>
           </a:p>
@@ -1587,7 +1587,7 @@
           <p:cNvPr id="6" name="フッター プレースホルダー 5">
             <a:extLst>
               <a:ext uri="{FF2B5EF4-FFF2-40B4-BE49-F238E27FC236}">
-                <a16:creationId xmlns:a16="http://schemas.microsoft.com/office/drawing/2014/main" id="{E95F0185-A3DA-C609-512B-75ED3EF84BBB}"/>
+                <a16:creationId xmlns:a16="http://schemas.microsoft.com/office/drawing/2014/main" id="{136DCC29-1B57-F2C4-C401-CEB178C53796}"/>
               </a:ext>
             </a:extLst>
           </p:cNvPr>
@@ -1612,7 +1612,7 @@
           <p:cNvPr id="7" name="スライド番号プレースホルダー 6">
             <a:extLst>
               <a:ext uri="{FF2B5EF4-FFF2-40B4-BE49-F238E27FC236}">
-                <a16:creationId xmlns:a16="http://schemas.microsoft.com/office/drawing/2014/main" id="{779F23F0-C5CA-6EBC-8630-96E135FADF5F}"/>
+                <a16:creationId xmlns:a16="http://schemas.microsoft.com/office/drawing/2014/main" id="{19F603CD-BACE-2FF0-87D3-54C374C8B64A}"/>
               </a:ext>
             </a:extLst>
           </p:cNvPr>
@@ -1628,7 +1628,7 @@
           <a:bodyPr/>
           <a:lstStyle/>
           <a:p>
-            <a:fld id="{7BB5449D-F0F2-430C-B147-4BDEDFCC4C12}" type="slidenum">
+            <a:fld id="{7F11CA10-2CD0-4706-9CBE-CE346C6CB78F}" type="slidenum">
               <a:rPr kumimoji="1" lang="ja-JP" altLang="en-US" smtClean="0"/>
               <a:t>‹#›</a:t>
             </a:fld>
@@ -1639,7 +1639,7 @@
     </p:spTree>
     <p:extLst>
       <p:ext uri="{BB962C8B-B14F-4D97-AF65-F5344CB8AC3E}">
-        <p14:creationId xmlns:p14="http://schemas.microsoft.com/office/powerpoint/2010/main" val="2292313477"/>
+        <p14:creationId xmlns:p14="http://schemas.microsoft.com/office/powerpoint/2010/main" val="2301304323"/>
       </p:ext>
     </p:extLst>
   </p:cSld>
@@ -1671,7 +1671,7 @@
           <p:cNvPr id="2" name="タイトル 1">
             <a:extLst>
               <a:ext uri="{FF2B5EF4-FFF2-40B4-BE49-F238E27FC236}">
-                <a16:creationId xmlns:a16="http://schemas.microsoft.com/office/drawing/2014/main" id="{29239426-9098-8D26-D882-6D83F15F0B3F}"/>
+                <a16:creationId xmlns:a16="http://schemas.microsoft.com/office/drawing/2014/main" id="{955D4779-D2F0-D7BD-BD7D-BBBE2B7DAF0C}"/>
               </a:ext>
             </a:extLst>
           </p:cNvPr>
@@ -1704,7 +1704,7 @@
           <p:cNvPr id="3" name="テキスト プレースホルダー 2">
             <a:extLst>
               <a:ext uri="{FF2B5EF4-FFF2-40B4-BE49-F238E27FC236}">
-                <a16:creationId xmlns:a16="http://schemas.microsoft.com/office/drawing/2014/main" id="{9713C8BE-5790-E58C-6BB7-B617908E19B3}"/>
+                <a16:creationId xmlns:a16="http://schemas.microsoft.com/office/drawing/2014/main" id="{57CB2B85-4ECB-688B-9634-4D3B00B612C2}"/>
               </a:ext>
             </a:extLst>
           </p:cNvPr>
@@ -1775,7 +1775,7 @@
           <p:cNvPr id="4" name="コンテンツ プレースホルダー 3">
             <a:extLst>
               <a:ext uri="{FF2B5EF4-FFF2-40B4-BE49-F238E27FC236}">
-                <a16:creationId xmlns:a16="http://schemas.microsoft.com/office/drawing/2014/main" id="{6A97F1A2-BB76-7437-436B-8400F5C11C04}"/>
+                <a16:creationId xmlns:a16="http://schemas.microsoft.com/office/drawing/2014/main" id="{E1C5585A-7E59-9230-A85C-842E11820DC1}"/>
               </a:ext>
             </a:extLst>
           </p:cNvPr>
@@ -1869,7 +1869,7 @@
           <p:cNvPr id="5" name="テキスト プレースホルダー 4">
             <a:extLst>
               <a:ext uri="{FF2B5EF4-FFF2-40B4-BE49-F238E27FC236}">
-                <a16:creationId xmlns:a16="http://schemas.microsoft.com/office/drawing/2014/main" id="{D3A7A8BD-CA95-582F-DC7B-D0BB2E2FA9B9}"/>
+                <a16:creationId xmlns:a16="http://schemas.microsoft.com/office/drawing/2014/main" id="{545C74C4-E5A8-5E91-6FF2-400D03A029EE}"/>
               </a:ext>
             </a:extLst>
           </p:cNvPr>
@@ -1940,7 +1940,7 @@
           <p:cNvPr id="6" name="コンテンツ プレースホルダー 5">
             <a:extLst>
               <a:ext uri="{FF2B5EF4-FFF2-40B4-BE49-F238E27FC236}">
-                <a16:creationId xmlns:a16="http://schemas.microsoft.com/office/drawing/2014/main" id="{ABDA309E-26CB-3903-3D67-446FA624C7AD}"/>
+                <a16:creationId xmlns:a16="http://schemas.microsoft.com/office/drawing/2014/main" id="{C3BC2BBC-C1FD-E605-0C3E-A4A0806E5257}"/>
               </a:ext>
             </a:extLst>
           </p:cNvPr>
@@ -2034,7 +2034,7 @@
           <p:cNvPr id="7" name="日付プレースホルダー 6">
             <a:extLst>
               <a:ext uri="{FF2B5EF4-FFF2-40B4-BE49-F238E27FC236}">
-                <a16:creationId xmlns:a16="http://schemas.microsoft.com/office/drawing/2014/main" id="{75E3F969-8BC7-3400-EFE4-DEAE491E1CAF}"/>
+                <a16:creationId xmlns:a16="http://schemas.microsoft.com/office/drawing/2014/main" id="{7BEBE341-31FB-3929-DE9F-C2A3ED3A7E11}"/>
               </a:ext>
             </a:extLst>
           </p:cNvPr>
@@ -2050,9 +2050,9 @@
           <a:bodyPr/>
           <a:lstStyle/>
           <a:p>
-            <a:fld id="{B7470CBC-C122-40DA-A9FA-F1018DF8E254}" type="datetimeFigureOut">
+            <a:fld id="{B455B53E-AC42-439D-977B-2AD63AFFDAE6}" type="datetimeFigureOut">
               <a:rPr kumimoji="1" lang="ja-JP" altLang="en-US" smtClean="0"/>
-              <a:t>2026/9/12</a:t>
+              <a:t>2026/9/18</a:t>
             </a:fld>
             <a:endParaRPr kumimoji="1" lang="ja-JP" altLang="en-US"/>
           </a:p>
@@ -2063,7 +2063,7 @@
           <p:cNvPr id="8" name="フッター プレースホルダー 7">
             <a:extLst>
               <a:ext uri="{FF2B5EF4-FFF2-40B4-BE49-F238E27FC236}">
-                <a16:creationId xmlns:a16="http://schemas.microsoft.com/office/drawing/2014/main" id="{72BFEDAF-FD30-E4CC-0414-D82F2C83464C}"/>
+                <a16:creationId xmlns:a16="http://schemas.microsoft.com/office/drawing/2014/main" id="{BA8BAAC2-C1D5-0D92-B2AB-29105FF2FED8}"/>
               </a:ext>
             </a:extLst>
           </p:cNvPr>
@@ -2088,7 +2088,7 @@
           <p:cNvPr id="9" name="スライド番号プレースホルダー 8">
             <a:extLst>
               <a:ext uri="{FF2B5EF4-FFF2-40B4-BE49-F238E27FC236}">
-                <a16:creationId xmlns:a16="http://schemas.microsoft.com/office/drawing/2014/main" id="{1FC5DDB6-6BA3-1E4F-C0AE-06EB32BB05FF}"/>
+                <a16:creationId xmlns:a16="http://schemas.microsoft.com/office/drawing/2014/main" id="{26F7ADD1-ABEB-AFB5-CD6D-920AAD150161}"/>
               </a:ext>
             </a:extLst>
           </p:cNvPr>
@@ -2104,7 +2104,7 @@
           <a:bodyPr/>
           <a:lstStyle/>
           <a:p>
-            <a:fld id="{7BB5449D-F0F2-430C-B147-4BDEDFCC4C12}" type="slidenum">
+            <a:fld id="{7F11CA10-2CD0-4706-9CBE-CE346C6CB78F}" type="slidenum">
               <a:rPr kumimoji="1" lang="ja-JP" altLang="en-US" smtClean="0"/>
               <a:t>‹#›</a:t>
             </a:fld>
@@ -2115,7 +2115,7 @@
     </p:spTree>
     <p:extLst>
       <p:ext uri="{BB962C8B-B14F-4D97-AF65-F5344CB8AC3E}">
-        <p14:creationId xmlns:p14="http://schemas.microsoft.com/office/powerpoint/2010/main" val="1242974593"/>
+        <p14:creationId xmlns:p14="http://schemas.microsoft.com/office/powerpoint/2010/main" val="660864899"/>
       </p:ext>
     </p:extLst>
   </p:cSld>
@@ -2147,7 +2147,7 @@
           <p:cNvPr id="2" name="タイトル 1">
             <a:extLst>
               <a:ext uri="{FF2B5EF4-FFF2-40B4-BE49-F238E27FC236}">
-                <a16:creationId xmlns:a16="http://schemas.microsoft.com/office/drawing/2014/main" id="{09C1E59F-725C-880F-96D4-64DC68BBBE78}"/>
+                <a16:creationId xmlns:a16="http://schemas.microsoft.com/office/drawing/2014/main" id="{2C51E595-6E19-1277-286D-430ABBA77C74}"/>
               </a:ext>
             </a:extLst>
           </p:cNvPr>
@@ -2175,7 +2175,7 @@
           <p:cNvPr id="3" name="日付プレースホルダー 2">
             <a:extLst>
               <a:ext uri="{FF2B5EF4-FFF2-40B4-BE49-F238E27FC236}">
-                <a16:creationId xmlns:a16="http://schemas.microsoft.com/office/drawing/2014/main" id="{07E0FBCB-4ABC-1085-1893-3B333090609A}"/>
+                <a16:creationId xmlns:a16="http://schemas.microsoft.com/office/drawing/2014/main" id="{A0E14909-B420-72F9-8E83-6EC7E9304F80}"/>
               </a:ext>
             </a:extLst>
           </p:cNvPr>
@@ -2191,9 +2191,9 @@
           <a:bodyPr/>
           <a:lstStyle/>
           <a:p>
-            <a:fld id="{B7470CBC-C122-40DA-A9FA-F1018DF8E254}" type="datetimeFigureOut">
+            <a:fld id="{B455B53E-AC42-439D-977B-2AD63AFFDAE6}" type="datetimeFigureOut">
               <a:rPr kumimoji="1" lang="ja-JP" altLang="en-US" smtClean="0"/>
-              <a:t>2026/9/12</a:t>
+              <a:t>2026/9/18</a:t>
             </a:fld>
             <a:endParaRPr kumimoji="1" lang="ja-JP" altLang="en-US"/>
           </a:p>
@@ -2204,7 +2204,7 @@
           <p:cNvPr id="4" name="フッター プレースホルダー 3">
             <a:extLst>
               <a:ext uri="{FF2B5EF4-FFF2-40B4-BE49-F238E27FC236}">
-                <a16:creationId xmlns:a16="http://schemas.microsoft.com/office/drawing/2014/main" id="{F87CF1C5-0332-904B-2A3B-A6415FEF4A3E}"/>
+                <a16:creationId xmlns:a16="http://schemas.microsoft.com/office/drawing/2014/main" id="{1ECE39CA-1463-BB15-F78E-10B6479F2F55}"/>
               </a:ext>
             </a:extLst>
           </p:cNvPr>
@@ -2229,7 +2229,7 @@
           <p:cNvPr id="5" name="スライド番号プレースホルダー 4">
             <a:extLst>
               <a:ext uri="{FF2B5EF4-FFF2-40B4-BE49-F238E27FC236}">
-                <a16:creationId xmlns:a16="http://schemas.microsoft.com/office/drawing/2014/main" id="{960CE497-74BB-EEA5-1821-DEA3E5E3DE59}"/>
+                <a16:creationId xmlns:a16="http://schemas.microsoft.com/office/drawing/2014/main" id="{5D4FFA05-3DA8-681A-9C76-5EF3297C38B2}"/>
               </a:ext>
             </a:extLst>
           </p:cNvPr>
@@ -2245,7 +2245,7 @@
           <a:bodyPr/>
           <a:lstStyle/>
           <a:p>
-            <a:fld id="{7BB5449D-F0F2-430C-B147-4BDEDFCC4C12}" type="slidenum">
+            <a:fld id="{7F11CA10-2CD0-4706-9CBE-CE346C6CB78F}" type="slidenum">
               <a:rPr kumimoji="1" lang="ja-JP" altLang="en-US" smtClean="0"/>
               <a:t>‹#›</a:t>
             </a:fld>
@@ -2256,7 +2256,7 @@
     </p:spTree>
     <p:extLst>
       <p:ext uri="{BB962C8B-B14F-4D97-AF65-F5344CB8AC3E}">
-        <p14:creationId xmlns:p14="http://schemas.microsoft.com/office/powerpoint/2010/main" val="2667080644"/>
+        <p14:creationId xmlns:p14="http://schemas.microsoft.com/office/powerpoint/2010/main" val="3420772402"/>
       </p:ext>
     </p:extLst>
   </p:cSld>
@@ -2288,7 +2288,7 @@
           <p:cNvPr id="2" name="日付プレースホルダー 1">
             <a:extLst>
               <a:ext uri="{FF2B5EF4-FFF2-40B4-BE49-F238E27FC236}">
-                <a16:creationId xmlns:a16="http://schemas.microsoft.com/office/drawing/2014/main" id="{5916B67C-275F-088B-12E9-9043B8B4803E}"/>
+                <a16:creationId xmlns:a16="http://schemas.microsoft.com/office/drawing/2014/main" id="{4255B037-7B9D-577E-0143-D220750FCA70}"/>
               </a:ext>
             </a:extLst>
           </p:cNvPr>
@@ -2304,9 +2304,9 @@
           <a:bodyPr/>
           <a:lstStyle/>
           <a:p>
-            <a:fld id="{B7470CBC-C122-40DA-A9FA-F1018DF8E254}" type="datetimeFigureOut">
+            <a:fld id="{B455B53E-AC42-439D-977B-2AD63AFFDAE6}" type="datetimeFigureOut">
               <a:rPr kumimoji="1" lang="ja-JP" altLang="en-US" smtClean="0"/>
-              <a:t>2026/9/12</a:t>
+              <a:t>2026/9/18</a:t>
             </a:fld>
             <a:endParaRPr kumimoji="1" lang="ja-JP" altLang="en-US"/>
           </a:p>
@@ -2317,7 +2317,7 @@
           <p:cNvPr id="3" name="フッター プレースホルダー 2">
             <a:extLst>
               <a:ext uri="{FF2B5EF4-FFF2-40B4-BE49-F238E27FC236}">
-                <a16:creationId xmlns:a16="http://schemas.microsoft.com/office/drawing/2014/main" id="{8A446846-816A-B410-C8FA-09721071D896}"/>
+                <a16:creationId xmlns:a16="http://schemas.microsoft.com/office/drawing/2014/main" id="{9DC3F02E-2A88-2FAA-A339-0C0F64E66341}"/>
               </a:ext>
             </a:extLst>
           </p:cNvPr>
@@ -2342,7 +2342,7 @@
           <p:cNvPr id="4" name="スライド番号プレースホルダー 3">
             <a:extLst>
               <a:ext uri="{FF2B5EF4-FFF2-40B4-BE49-F238E27FC236}">
-                <a16:creationId xmlns:a16="http://schemas.microsoft.com/office/drawing/2014/main" id="{935A48CB-1329-DDA4-43AA-A82D9C5AB326}"/>
+                <a16:creationId xmlns:a16="http://schemas.microsoft.com/office/drawing/2014/main" id="{394EF887-BF30-B131-0839-FF6F872F1DC1}"/>
               </a:ext>
             </a:extLst>
           </p:cNvPr>
@@ -2358,7 +2358,7 @@
           <a:bodyPr/>
           <a:lstStyle/>
           <a:p>
-            <a:fld id="{7BB5449D-F0F2-430C-B147-4BDEDFCC4C12}" type="slidenum">
+            <a:fld id="{7F11CA10-2CD0-4706-9CBE-CE346C6CB78F}" type="slidenum">
               <a:rPr kumimoji="1" lang="ja-JP" altLang="en-US" smtClean="0"/>
               <a:t>‹#›</a:t>
             </a:fld>
@@ -2369,7 +2369,7 @@
     </p:spTree>
     <p:extLst>
       <p:ext uri="{BB962C8B-B14F-4D97-AF65-F5344CB8AC3E}">
-        <p14:creationId xmlns:p14="http://schemas.microsoft.com/office/powerpoint/2010/main" val="3923084353"/>
+        <p14:creationId xmlns:p14="http://schemas.microsoft.com/office/powerpoint/2010/main" val="4287591180"/>
       </p:ext>
     </p:extLst>
   </p:cSld>
@@ -2401,7 +2401,7 @@
           <p:cNvPr id="2" name="タイトル 1">
             <a:extLst>
               <a:ext uri="{FF2B5EF4-FFF2-40B4-BE49-F238E27FC236}">
-                <a16:creationId xmlns:a16="http://schemas.microsoft.com/office/drawing/2014/main" id="{D27FF213-AD10-CA9B-3099-4FAA01986DE0}"/>
+                <a16:creationId xmlns:a16="http://schemas.microsoft.com/office/drawing/2014/main" id="{52257CEE-B7E6-125F-4B69-7F0E266B00A3}"/>
               </a:ext>
             </a:extLst>
           </p:cNvPr>
@@ -2438,7 +2438,7 @@
           <p:cNvPr id="3" name="コンテンツ プレースホルダー 2">
             <a:extLst>
               <a:ext uri="{FF2B5EF4-FFF2-40B4-BE49-F238E27FC236}">
-                <a16:creationId xmlns:a16="http://schemas.microsoft.com/office/drawing/2014/main" id="{96AE3D60-8396-00B9-264B-738745CAD53F}"/>
+                <a16:creationId xmlns:a16="http://schemas.microsoft.com/office/drawing/2014/main" id="{4AEDC7EA-64BE-7C7B-8BC4-A33D2F3C7301}"/>
               </a:ext>
             </a:extLst>
           </p:cNvPr>
@@ -2560,7 +2560,7 @@
           <p:cNvPr id="4" name="テキスト プレースホルダー 3">
             <a:extLst>
               <a:ext uri="{FF2B5EF4-FFF2-40B4-BE49-F238E27FC236}">
-                <a16:creationId xmlns:a16="http://schemas.microsoft.com/office/drawing/2014/main" id="{FAFE53B8-2841-AC40-8C0D-F55D719B1A3A}"/>
+                <a16:creationId xmlns:a16="http://schemas.microsoft.com/office/drawing/2014/main" id="{3D0DCD59-A6F6-4AB7-3CB8-14BCC81305FD}"/>
               </a:ext>
             </a:extLst>
           </p:cNvPr>
@@ -2631,7 +2631,7 @@
           <p:cNvPr id="5" name="日付プレースホルダー 4">
             <a:extLst>
               <a:ext uri="{FF2B5EF4-FFF2-40B4-BE49-F238E27FC236}">
-                <a16:creationId xmlns:a16="http://schemas.microsoft.com/office/drawing/2014/main" id="{E2CDD44F-C239-015B-8895-BC37FBF878C2}"/>
+                <a16:creationId xmlns:a16="http://schemas.microsoft.com/office/drawing/2014/main" id="{23FDB06E-79E0-295D-2DBF-60CEAA41D788}"/>
               </a:ext>
             </a:extLst>
           </p:cNvPr>
@@ -2647,9 +2647,9 @@
           <a:bodyPr/>
           <a:lstStyle/>
           <a:p>
-            <a:fld id="{B7470CBC-C122-40DA-A9FA-F1018DF8E254}" type="datetimeFigureOut">
+            <a:fld id="{B455B53E-AC42-439D-977B-2AD63AFFDAE6}" type="datetimeFigureOut">
               <a:rPr kumimoji="1" lang="ja-JP" altLang="en-US" smtClean="0"/>
-              <a:t>2026/9/12</a:t>
+              <a:t>2026/9/18</a:t>
             </a:fld>
             <a:endParaRPr kumimoji="1" lang="ja-JP" altLang="en-US"/>
           </a:p>
@@ -2660,7 +2660,7 @@
           <p:cNvPr id="6" name="フッター プレースホルダー 5">
             <a:extLst>
               <a:ext uri="{FF2B5EF4-FFF2-40B4-BE49-F238E27FC236}">
-                <a16:creationId xmlns:a16="http://schemas.microsoft.com/office/drawing/2014/main" id="{F8F8ECDB-31FA-2265-62D4-B9BFD95182DB}"/>
+                <a16:creationId xmlns:a16="http://schemas.microsoft.com/office/drawing/2014/main" id="{3DA0E360-972A-80F4-CB78-CF04648529F4}"/>
               </a:ext>
             </a:extLst>
           </p:cNvPr>
@@ -2685,7 +2685,7 @@
           <p:cNvPr id="7" name="スライド番号プレースホルダー 6">
             <a:extLst>
               <a:ext uri="{FF2B5EF4-FFF2-40B4-BE49-F238E27FC236}">
-                <a16:creationId xmlns:a16="http://schemas.microsoft.com/office/drawing/2014/main" id="{753C2C36-B01A-0AA2-40A9-3994C00E1D40}"/>
+                <a16:creationId xmlns:a16="http://schemas.microsoft.com/office/drawing/2014/main" id="{E29252B3-5662-E0EF-800A-EDB14115B110}"/>
               </a:ext>
             </a:extLst>
           </p:cNvPr>
@@ -2701,7 +2701,7 @@
           <a:bodyPr/>
           <a:lstStyle/>
           <a:p>
-            <a:fld id="{7BB5449D-F0F2-430C-B147-4BDEDFCC4C12}" type="slidenum">
+            <a:fld id="{7F11CA10-2CD0-4706-9CBE-CE346C6CB78F}" type="slidenum">
               <a:rPr kumimoji="1" lang="ja-JP" altLang="en-US" smtClean="0"/>
               <a:t>‹#›</a:t>
             </a:fld>
@@ -2712,7 +2712,7 @@
     </p:spTree>
     <p:extLst>
       <p:ext uri="{BB962C8B-B14F-4D97-AF65-F5344CB8AC3E}">
-        <p14:creationId xmlns:p14="http://schemas.microsoft.com/office/powerpoint/2010/main" val="3152174734"/>
+        <p14:creationId xmlns:p14="http://schemas.microsoft.com/office/powerpoint/2010/main" val="2655496818"/>
       </p:ext>
     </p:extLst>
   </p:cSld>
@@ -2744,7 +2744,7 @@
           <p:cNvPr id="2" name="タイトル 1">
             <a:extLst>
               <a:ext uri="{FF2B5EF4-FFF2-40B4-BE49-F238E27FC236}">
-                <a16:creationId xmlns:a16="http://schemas.microsoft.com/office/drawing/2014/main" id="{6E70B038-5DE7-BCCB-1A79-F51A9F40C1BA}"/>
+                <a16:creationId xmlns:a16="http://schemas.microsoft.com/office/drawing/2014/main" id="{0857271E-1A9D-7A76-A8C5-4A425DD9FC2B}"/>
               </a:ext>
             </a:extLst>
           </p:cNvPr>
@@ -2781,12 +2781,12 @@
           <p:cNvPr id="3" name="図プレースホルダー 2">
             <a:extLst>
               <a:ext uri="{FF2B5EF4-FFF2-40B4-BE49-F238E27FC236}">
-                <a16:creationId xmlns:a16="http://schemas.microsoft.com/office/drawing/2014/main" id="{BA2E99F2-6488-8034-C10A-2F4C4F41B3D8}"/>
+                <a16:creationId xmlns:a16="http://schemas.microsoft.com/office/drawing/2014/main" id="{7CBFEA82-9DCF-CF63-2C16-014E5FF8898D}"/>
               </a:ext>
             </a:extLst>
           </p:cNvPr>
           <p:cNvSpPr>
-            <a:spLocks noGrp="1" noChangeAspect="1"/>
+            <a:spLocks noGrp="1"/>
           </p:cNvSpPr>
           <p:nvPr>
             <p:ph type="pic" idx="1"/>
@@ -2848,7 +2848,7 @@
           <p:cNvPr id="4" name="テキスト プレースホルダー 3">
             <a:extLst>
               <a:ext uri="{FF2B5EF4-FFF2-40B4-BE49-F238E27FC236}">
-                <a16:creationId xmlns:a16="http://schemas.microsoft.com/office/drawing/2014/main" id="{C13B35C2-16DA-9E88-E24B-FA7AC440851C}"/>
+                <a16:creationId xmlns:a16="http://schemas.microsoft.com/office/drawing/2014/main" id="{B5E41EBC-7D29-3A0B-048E-843EA73FA985}"/>
               </a:ext>
             </a:extLst>
           </p:cNvPr>
@@ -2919,7 +2919,7 @@
           <p:cNvPr id="5" name="日付プレースホルダー 4">
             <a:extLst>
               <a:ext uri="{FF2B5EF4-FFF2-40B4-BE49-F238E27FC236}">
-                <a16:creationId xmlns:a16="http://schemas.microsoft.com/office/drawing/2014/main" id="{510A8104-DD95-B166-1388-4EB72D9DAB98}"/>
+                <a16:creationId xmlns:a16="http://schemas.microsoft.com/office/drawing/2014/main" id="{88A6FF06-1542-39E8-A58A-C75AC2AE3181}"/>
               </a:ext>
             </a:extLst>
           </p:cNvPr>
@@ -2935,9 +2935,9 @@
           <a:bodyPr/>
           <a:lstStyle/>
           <a:p>
-            <a:fld id="{B7470CBC-C122-40DA-A9FA-F1018DF8E254}" type="datetimeFigureOut">
+            <a:fld id="{B455B53E-AC42-439D-977B-2AD63AFFDAE6}" type="datetimeFigureOut">
               <a:rPr kumimoji="1" lang="ja-JP" altLang="en-US" smtClean="0"/>
-              <a:t>2026/9/12</a:t>
+              <a:t>2026/9/18</a:t>
             </a:fld>
             <a:endParaRPr kumimoji="1" lang="ja-JP" altLang="en-US"/>
           </a:p>
@@ -2948,7 +2948,7 @@
           <p:cNvPr id="6" name="フッター プレースホルダー 5">
             <a:extLst>
               <a:ext uri="{FF2B5EF4-FFF2-40B4-BE49-F238E27FC236}">
-                <a16:creationId xmlns:a16="http://schemas.microsoft.com/office/drawing/2014/main" id="{19784C0D-A463-98EA-7A80-CDE4E9F2E17C}"/>
+                <a16:creationId xmlns:a16="http://schemas.microsoft.com/office/drawing/2014/main" id="{556DD562-123A-6AF3-4B6A-AA9F5B2796B6}"/>
               </a:ext>
             </a:extLst>
           </p:cNvPr>
@@ -2973,7 +2973,7 @@
           <p:cNvPr id="7" name="スライド番号プレースホルダー 6">
             <a:extLst>
               <a:ext uri="{FF2B5EF4-FFF2-40B4-BE49-F238E27FC236}">
-                <a16:creationId xmlns:a16="http://schemas.microsoft.com/office/drawing/2014/main" id="{712A90E6-5BD6-9715-798B-776986EE7585}"/>
+                <a16:creationId xmlns:a16="http://schemas.microsoft.com/office/drawing/2014/main" id="{9C1EDE4F-FCEA-8655-A39A-A8E143028919}"/>
               </a:ext>
             </a:extLst>
           </p:cNvPr>
@@ -2989,7 +2989,7 @@
           <a:bodyPr/>
           <a:lstStyle/>
           <a:p>
-            <a:fld id="{7BB5449D-F0F2-430C-B147-4BDEDFCC4C12}" type="slidenum">
+            <a:fld id="{7F11CA10-2CD0-4706-9CBE-CE346C6CB78F}" type="slidenum">
               <a:rPr kumimoji="1" lang="ja-JP" altLang="en-US" smtClean="0"/>
               <a:t>‹#›</a:t>
             </a:fld>
@@ -3000,7 +3000,7 @@
     </p:spTree>
     <p:extLst>
       <p:ext uri="{BB962C8B-B14F-4D97-AF65-F5344CB8AC3E}">
-        <p14:creationId xmlns:p14="http://schemas.microsoft.com/office/powerpoint/2010/main" val="2416466412"/>
+        <p14:creationId xmlns:p14="http://schemas.microsoft.com/office/powerpoint/2010/main" val="2292946563"/>
       </p:ext>
     </p:extLst>
   </p:cSld>
@@ -3037,7 +3037,7 @@
           <p:cNvPr id="2" name="タイトル プレースホルダー 1">
             <a:extLst>
               <a:ext uri="{FF2B5EF4-FFF2-40B4-BE49-F238E27FC236}">
-                <a16:creationId xmlns:a16="http://schemas.microsoft.com/office/drawing/2014/main" id="{5F4D1E27-DC61-CBD4-E5A7-3F06FAF60B04}"/>
+                <a16:creationId xmlns:a16="http://schemas.microsoft.com/office/drawing/2014/main" id="{96A3694C-3F9C-EA60-3064-32E6F919DE2A}"/>
               </a:ext>
             </a:extLst>
           </p:cNvPr>
@@ -3075,7 +3075,7 @@
           <p:cNvPr id="3" name="テキスト プレースホルダー 2">
             <a:extLst>
               <a:ext uri="{FF2B5EF4-FFF2-40B4-BE49-F238E27FC236}">
-                <a16:creationId xmlns:a16="http://schemas.microsoft.com/office/drawing/2014/main" id="{9A36C452-6400-CD29-068F-C2DE420CA7AE}"/>
+                <a16:creationId xmlns:a16="http://schemas.microsoft.com/office/drawing/2014/main" id="{D7502805-180A-FF01-718B-96544CB3955B}"/>
               </a:ext>
             </a:extLst>
           </p:cNvPr>
@@ -3174,7 +3174,7 @@
           <p:cNvPr id="4" name="日付プレースホルダー 3">
             <a:extLst>
               <a:ext uri="{FF2B5EF4-FFF2-40B4-BE49-F238E27FC236}">
-                <a16:creationId xmlns:a16="http://schemas.microsoft.com/office/drawing/2014/main" id="{46F4B673-2D91-0439-B529-CD89A57EFEF0}"/>
+                <a16:creationId xmlns:a16="http://schemas.microsoft.com/office/drawing/2014/main" id="{1A3ABDD8-71AE-D17F-C063-2D5E26075FB1}"/>
               </a:ext>
             </a:extLst>
           </p:cNvPr>
@@ -3208,9 +3208,9 @@
             </a:lvl1pPr>
           </a:lstStyle>
           <a:p>
-            <a:fld id="{B7470CBC-C122-40DA-A9FA-F1018DF8E254}" type="datetimeFigureOut">
+            <a:fld id="{B455B53E-AC42-439D-977B-2AD63AFFDAE6}" type="datetimeFigureOut">
               <a:rPr kumimoji="1" lang="ja-JP" altLang="en-US" smtClean="0"/>
-              <a:t>2026/9/12</a:t>
+              <a:t>2026/9/18</a:t>
             </a:fld>
             <a:endParaRPr kumimoji="1" lang="ja-JP" altLang="en-US"/>
           </a:p>
@@ -3221,7 +3221,7 @@
           <p:cNvPr id="5" name="フッター プレースホルダー 4">
             <a:extLst>
               <a:ext uri="{FF2B5EF4-FFF2-40B4-BE49-F238E27FC236}">
-                <a16:creationId xmlns:a16="http://schemas.microsoft.com/office/drawing/2014/main" id="{2335C4B9-482E-302E-766F-5F6DFCF61714}"/>
+                <a16:creationId xmlns:a16="http://schemas.microsoft.com/office/drawing/2014/main" id="{BDC5CB5A-A2D5-C8FB-871F-78A99EE0F926}"/>
               </a:ext>
             </a:extLst>
           </p:cNvPr>
@@ -3264,7 +3264,7 @@
           <p:cNvPr id="6" name="スライド番号プレースホルダー 5">
             <a:extLst>
               <a:ext uri="{FF2B5EF4-FFF2-40B4-BE49-F238E27FC236}">
-                <a16:creationId xmlns:a16="http://schemas.microsoft.com/office/drawing/2014/main" id="{DC2C47B6-B28B-BD6A-839E-CD3A5F177315}"/>
+                <a16:creationId xmlns:a16="http://schemas.microsoft.com/office/drawing/2014/main" id="{64BD8CDF-553F-314D-0C18-F3AD7D058680}"/>
               </a:ext>
             </a:extLst>
           </p:cNvPr>
@@ -3298,7 +3298,7 @@
             </a:lvl1pPr>
           </a:lstStyle>
           <a:p>
-            <a:fld id="{7BB5449D-F0F2-430C-B147-4BDEDFCC4C12}" type="slidenum">
+            <a:fld id="{7F11CA10-2CD0-4706-9CBE-CE346C6CB78F}" type="slidenum">
               <a:rPr kumimoji="1" lang="ja-JP" altLang="en-US" smtClean="0"/>
               <a:t>‹#›</a:t>
             </a:fld>
@@ -3309,7 +3309,7 @@
     </p:spTree>
     <p:extLst>
       <p:ext uri="{BB962C8B-B14F-4D97-AF65-F5344CB8AC3E}">
-        <p14:creationId xmlns:p14="http://schemas.microsoft.com/office/powerpoint/2010/main" val="815162345"/>
+        <p14:creationId xmlns:p14="http://schemas.microsoft.com/office/powerpoint/2010/main" val="291874559"/>
       </p:ext>
     </p:extLst>
   </p:cSld>
@@ -3632,7 +3632,7 @@
           <p:cNvPr id="2" name="正方形/長方形 1">
             <a:extLst>
               <a:ext uri="{FF2B5EF4-FFF2-40B4-BE49-F238E27FC236}">
-                <a16:creationId xmlns:a16="http://schemas.microsoft.com/office/drawing/2014/main" id="{E1319458-D2CC-23F7-896F-E134E43FFA40}"/>
+                <a16:creationId xmlns:a16="http://schemas.microsoft.com/office/drawing/2014/main" id="{09D15F38-F763-6C67-28F2-8C7E0FD15ECB}"/>
               </a:ext>
             </a:extLst>
           </p:cNvPr>
@@ -3700,7 +3700,7 @@
           <p:cNvPr id="3" name="正方形/長方形 2">
             <a:extLst>
               <a:ext uri="{FF2B5EF4-FFF2-40B4-BE49-F238E27FC236}">
-                <a16:creationId xmlns:a16="http://schemas.microsoft.com/office/drawing/2014/main" id="{5BCD83C6-F28F-58E9-DA8F-DB5820995BA8}"/>
+                <a16:creationId xmlns:a16="http://schemas.microsoft.com/office/drawing/2014/main" id="{9447747D-3953-7FEA-E283-60AADB93DC83}"/>
               </a:ext>
             </a:extLst>
           </p:cNvPr>
@@ -3768,7 +3768,7 @@
           <p:cNvPr id="4" name="楕円 3">
             <a:extLst>
               <a:ext uri="{FF2B5EF4-FFF2-40B4-BE49-F238E27FC236}">
-                <a16:creationId xmlns:a16="http://schemas.microsoft.com/office/drawing/2014/main" id="{E534DD3B-B65E-B5D4-3322-9284336BB9B8}"/>
+                <a16:creationId xmlns:a16="http://schemas.microsoft.com/office/drawing/2014/main" id="{C6AAADD6-0191-D821-21A2-AB25B558A038}"/>
               </a:ext>
             </a:extLst>
           </p:cNvPr>
@@ -3838,7 +3838,7 @@
           <p:cNvPr id="5" name="楕円 4">
             <a:extLst>
               <a:ext uri="{FF2B5EF4-FFF2-40B4-BE49-F238E27FC236}">
-                <a16:creationId xmlns:a16="http://schemas.microsoft.com/office/drawing/2014/main" id="{98D5919F-73E6-BAAE-EE9D-8C12D34DF820}"/>
+                <a16:creationId xmlns:a16="http://schemas.microsoft.com/office/drawing/2014/main" id="{3FBCC167-330E-CB4E-8A41-399E8FC8B1E0}"/>
               </a:ext>
             </a:extLst>
           </p:cNvPr>
@@ -3908,7 +3908,7 @@
           <p:cNvPr id="6" name="正方形/長方形 5">
             <a:extLst>
               <a:ext uri="{FF2B5EF4-FFF2-40B4-BE49-F238E27FC236}">
-                <a16:creationId xmlns:a16="http://schemas.microsoft.com/office/drawing/2014/main" id="{BC98CC52-339B-1380-5E5D-527F902D5E47}"/>
+                <a16:creationId xmlns:a16="http://schemas.microsoft.com/office/drawing/2014/main" id="{AFA88D5B-F319-F178-945F-457E01402FC1}"/>
               </a:ext>
             </a:extLst>
           </p:cNvPr>
@@ -3976,7 +3976,7 @@
           <p:cNvPr id="7" name="テキスト ボックス 6">
             <a:extLst>
               <a:ext uri="{FF2B5EF4-FFF2-40B4-BE49-F238E27FC236}">
-                <a16:creationId xmlns:a16="http://schemas.microsoft.com/office/drawing/2014/main" id="{42BA8F67-044F-2114-1E32-1A3DE465328D}"/>
+                <a16:creationId xmlns:a16="http://schemas.microsoft.com/office/drawing/2014/main" id="{C23F340B-8F45-8B34-F3C0-9BAEB44A2B1C}"/>
               </a:ext>
             </a:extLst>
           </p:cNvPr>
@@ -4022,7 +4022,7 @@
           <p:cNvPr id="8" name="テキスト ボックス 7">
             <a:extLst>
               <a:ext uri="{FF2B5EF4-FFF2-40B4-BE49-F238E27FC236}">
-                <a16:creationId xmlns:a16="http://schemas.microsoft.com/office/drawing/2014/main" id="{4B16C32E-886E-72CE-140E-53AEFD23FA63}"/>
+                <a16:creationId xmlns:a16="http://schemas.microsoft.com/office/drawing/2014/main" id="{8D13C269-8F41-AA3C-F198-02CA404C7CAC}"/>
               </a:ext>
             </a:extLst>
           </p:cNvPr>
@@ -4068,7 +4068,7 @@
           <p:cNvPr id="9" name="テキスト ボックス 8">
             <a:extLst>
               <a:ext uri="{FF2B5EF4-FFF2-40B4-BE49-F238E27FC236}">
-                <a16:creationId xmlns:a16="http://schemas.microsoft.com/office/drawing/2014/main" id="{C78168F8-DC1C-0EE6-7535-352CF081507E}"/>
+                <a16:creationId xmlns:a16="http://schemas.microsoft.com/office/drawing/2014/main" id="{B3310460-EA6E-2CBD-F97F-BDE1CDF83894}"/>
               </a:ext>
             </a:extLst>
           </p:cNvPr>
@@ -4141,7 +4141,7 @@
           <p:cNvPr id="10" name="四角形: 角を丸くする 9">
             <a:extLst>
               <a:ext uri="{FF2B5EF4-FFF2-40B4-BE49-F238E27FC236}">
-                <a16:creationId xmlns:a16="http://schemas.microsoft.com/office/drawing/2014/main" id="{ACA2A34B-1097-78BB-082F-4FF5A783B013}"/>
+                <a16:creationId xmlns:a16="http://schemas.microsoft.com/office/drawing/2014/main" id="{1370B62C-F656-7188-8D05-BFEF1DF60D4D}"/>
               </a:ext>
             </a:extLst>
           </p:cNvPr>
@@ -4211,7 +4211,7 @@
           <p:cNvPr id="11" name="テキスト ボックス 10">
             <a:extLst>
               <a:ext uri="{FF2B5EF4-FFF2-40B4-BE49-F238E27FC236}">
-                <a16:creationId xmlns:a16="http://schemas.microsoft.com/office/drawing/2014/main" id="{F5109DDB-E309-3A78-D5A9-21071ECA9F52}"/>
+                <a16:creationId xmlns:a16="http://schemas.microsoft.com/office/drawing/2014/main" id="{D150A2E6-86AC-5F42-A9BF-A83A8AC9A6B2}"/>
               </a:ext>
             </a:extLst>
           </p:cNvPr>
@@ -4257,7 +4257,7 @@
           <p:cNvPr id="12" name="四角形: 角を丸くする 11">
             <a:extLst>
               <a:ext uri="{FF2B5EF4-FFF2-40B4-BE49-F238E27FC236}">
-                <a16:creationId xmlns:a16="http://schemas.microsoft.com/office/drawing/2014/main" id="{48FEF812-4BDA-0A77-1FCA-051ABAC240B3}"/>
+                <a16:creationId xmlns:a16="http://schemas.microsoft.com/office/drawing/2014/main" id="{39DA5023-069E-4F32-3225-9344C9B39098}"/>
               </a:ext>
             </a:extLst>
           </p:cNvPr>
@@ -4327,7 +4327,7 @@
           <p:cNvPr id="13" name="テキスト ボックス 12">
             <a:extLst>
               <a:ext uri="{FF2B5EF4-FFF2-40B4-BE49-F238E27FC236}">
-                <a16:creationId xmlns:a16="http://schemas.microsoft.com/office/drawing/2014/main" id="{E7C5B9C1-F702-A73C-2509-680AFD2B25F6}"/>
+                <a16:creationId xmlns:a16="http://schemas.microsoft.com/office/drawing/2014/main" id="{61CD235B-492D-2DED-4DAC-B9ABD0D65DE6}"/>
               </a:ext>
             </a:extLst>
           </p:cNvPr>
@@ -4373,7 +4373,7 @@
           <p:cNvPr id="14" name="正方形/長方形 13">
             <a:extLst>
               <a:ext uri="{FF2B5EF4-FFF2-40B4-BE49-F238E27FC236}">
-                <a16:creationId xmlns:a16="http://schemas.microsoft.com/office/drawing/2014/main" id="{171B0C6F-7949-6335-4EE4-1E7F8B56EE9F}"/>
+                <a16:creationId xmlns:a16="http://schemas.microsoft.com/office/drawing/2014/main" id="{75963434-1547-8B29-A87D-CC03FE8087C6}"/>
               </a:ext>
             </a:extLst>
           </p:cNvPr>
@@ -4441,7 +4441,7 @@
           <p:cNvPr id="15" name="テキスト ボックス 14">
             <a:extLst>
               <a:ext uri="{FF2B5EF4-FFF2-40B4-BE49-F238E27FC236}">
-                <a16:creationId xmlns:a16="http://schemas.microsoft.com/office/drawing/2014/main" id="{FC7FA2D6-AD65-48BB-550E-93DE9CE870A7}"/>
+                <a16:creationId xmlns:a16="http://schemas.microsoft.com/office/drawing/2014/main" id="{94A89A83-96A6-AE59-DB76-DAC5DDAB1061}"/>
               </a:ext>
             </a:extLst>
           </p:cNvPr>
@@ -4535,7 +4535,7 @@
     </p:spTree>
     <p:extLst>
       <p:ext uri="{BB962C8B-B14F-4D97-AF65-F5344CB8AC3E}">
-        <p14:creationId xmlns:p14="http://schemas.microsoft.com/office/powerpoint/2010/main" val="3075298560"/>
+        <p14:creationId xmlns:p14="http://schemas.microsoft.com/office/powerpoint/2010/main" val="2703975554"/>
       </p:ext>
     </p:extLst>
   </p:cSld>
@@ -4567,7 +4567,7 @@
           <p:cNvPr id="2" name="正方形/長方形 1">
             <a:extLst>
               <a:ext uri="{FF2B5EF4-FFF2-40B4-BE49-F238E27FC236}">
-                <a16:creationId xmlns:a16="http://schemas.microsoft.com/office/drawing/2014/main" id="{8E7620F1-2CE5-0494-BE03-B13DFDA9E81F}"/>
+                <a16:creationId xmlns:a16="http://schemas.microsoft.com/office/drawing/2014/main" id="{E3404D8C-0C04-C54C-0E58-FFE400523F4E}"/>
               </a:ext>
             </a:extLst>
           </p:cNvPr>
@@ -4635,7 +4635,7 @@
           <p:cNvPr id="3" name="正方形/長方形 2">
             <a:extLst>
               <a:ext uri="{FF2B5EF4-FFF2-40B4-BE49-F238E27FC236}">
-                <a16:creationId xmlns:a16="http://schemas.microsoft.com/office/drawing/2014/main" id="{709F84FF-982F-7035-DEE9-A60698C99C1A}"/>
+                <a16:creationId xmlns:a16="http://schemas.microsoft.com/office/drawing/2014/main" id="{AE4A53AE-BE7C-C4CB-1DB1-33B90C36C449}"/>
               </a:ext>
             </a:extLst>
           </p:cNvPr>
@@ -4703,7 +4703,7 @@
           <p:cNvPr id="4" name="テキスト ボックス 3">
             <a:extLst>
               <a:ext uri="{FF2B5EF4-FFF2-40B4-BE49-F238E27FC236}">
-                <a16:creationId xmlns:a16="http://schemas.microsoft.com/office/drawing/2014/main" id="{2B23600B-85D5-0DD1-BCD8-4C384B2175E0}"/>
+                <a16:creationId xmlns:a16="http://schemas.microsoft.com/office/drawing/2014/main" id="{544FE2B7-0615-987F-CC61-6CFED9760D51}"/>
               </a:ext>
             </a:extLst>
           </p:cNvPr>
@@ -4756,7 +4756,7 @@
           <p:cNvPr id="5" name="テキスト ボックス 4">
             <a:extLst>
               <a:ext uri="{FF2B5EF4-FFF2-40B4-BE49-F238E27FC236}">
-                <a16:creationId xmlns:a16="http://schemas.microsoft.com/office/drawing/2014/main" id="{7BB9A831-44BD-725D-C8D5-619DD1BA3CF9}"/>
+                <a16:creationId xmlns:a16="http://schemas.microsoft.com/office/drawing/2014/main" id="{3F788A5F-48DF-E509-A0AD-736C85D77898}"/>
               </a:ext>
             </a:extLst>
           </p:cNvPr>
@@ -4802,7 +4802,7 @@
           <p:cNvPr id="6" name="正方形/長方形 5">
             <a:extLst>
               <a:ext uri="{FF2B5EF4-FFF2-40B4-BE49-F238E27FC236}">
-                <a16:creationId xmlns:a16="http://schemas.microsoft.com/office/drawing/2014/main" id="{6F8A0461-AD31-4F39-B8DD-669C8011E862}"/>
+                <a16:creationId xmlns:a16="http://schemas.microsoft.com/office/drawing/2014/main" id="{75B45A0C-45F4-CCDE-ED94-C2E4CF0B4AC0}"/>
               </a:ext>
             </a:extLst>
           </p:cNvPr>
@@ -4870,7 +4870,7 @@
           <p:cNvPr id="7" name="四角形: 角を丸くする 6">
             <a:extLst>
               <a:ext uri="{FF2B5EF4-FFF2-40B4-BE49-F238E27FC236}">
-                <a16:creationId xmlns:a16="http://schemas.microsoft.com/office/drawing/2014/main" id="{E217BDFF-39E0-758E-2D9D-573766A79606}"/>
+                <a16:creationId xmlns:a16="http://schemas.microsoft.com/office/drawing/2014/main" id="{3B09D394-6F9F-9B70-5FB2-B571241B77BB}"/>
               </a:ext>
             </a:extLst>
           </p:cNvPr>
@@ -4940,7 +4940,7 @@
           <p:cNvPr id="8" name="テキスト ボックス 7">
             <a:extLst>
               <a:ext uri="{FF2B5EF4-FFF2-40B4-BE49-F238E27FC236}">
-                <a16:creationId xmlns:a16="http://schemas.microsoft.com/office/drawing/2014/main" id="{1127899A-E82B-CB8B-03AF-EE085073D4DC}"/>
+                <a16:creationId xmlns:a16="http://schemas.microsoft.com/office/drawing/2014/main" id="{07C88865-9ACD-C779-D260-EA09B9D8D426}"/>
               </a:ext>
             </a:extLst>
           </p:cNvPr>
@@ -4986,7 +4986,7 @@
           <p:cNvPr id="9" name="テキスト ボックス 8">
             <a:extLst>
               <a:ext uri="{FF2B5EF4-FFF2-40B4-BE49-F238E27FC236}">
-                <a16:creationId xmlns:a16="http://schemas.microsoft.com/office/drawing/2014/main" id="{CB33C608-A0FA-7609-7A18-27002FE3E8BD}"/>
+                <a16:creationId xmlns:a16="http://schemas.microsoft.com/office/drawing/2014/main" id="{F59A06F1-258A-3DE3-CAB4-DD0D3067A454}"/>
               </a:ext>
             </a:extLst>
           </p:cNvPr>
@@ -5032,7 +5032,7 @@
           <p:cNvPr id="10" name="テキスト ボックス 9">
             <a:extLst>
               <a:ext uri="{FF2B5EF4-FFF2-40B4-BE49-F238E27FC236}">
-                <a16:creationId xmlns:a16="http://schemas.microsoft.com/office/drawing/2014/main" id="{E2510F3C-85D1-1648-BE46-BBD19948BD20}"/>
+                <a16:creationId xmlns:a16="http://schemas.microsoft.com/office/drawing/2014/main" id="{B8B3A109-79AE-297C-6090-294980397882}"/>
               </a:ext>
             </a:extLst>
           </p:cNvPr>
@@ -5085,7 +5085,7 @@
           <p:cNvPr id="11" name="四角形: 角を丸くする 10">
             <a:extLst>
               <a:ext uri="{FF2B5EF4-FFF2-40B4-BE49-F238E27FC236}">
-                <a16:creationId xmlns:a16="http://schemas.microsoft.com/office/drawing/2014/main" id="{B2522DA9-E28F-7071-13A0-768F63350B6F}"/>
+                <a16:creationId xmlns:a16="http://schemas.microsoft.com/office/drawing/2014/main" id="{5BBEA350-ED82-EF54-2B56-262C8533A862}"/>
               </a:ext>
             </a:extLst>
           </p:cNvPr>
@@ -5141,7 +5141,7 @@
           <p:cNvPr id="12" name="四角形: 角を丸くする 11">
             <a:extLst>
               <a:ext uri="{FF2B5EF4-FFF2-40B4-BE49-F238E27FC236}">
-                <a16:creationId xmlns:a16="http://schemas.microsoft.com/office/drawing/2014/main" id="{C83D157C-E171-AC54-3238-F8E2A0C056CB}"/>
+                <a16:creationId xmlns:a16="http://schemas.microsoft.com/office/drawing/2014/main" id="{03886D4E-38E0-4029-7D1D-B01343C83171}"/>
               </a:ext>
             </a:extLst>
           </p:cNvPr>
@@ -5211,7 +5211,7 @@
           <p:cNvPr id="13" name="テキスト ボックス 12">
             <a:extLst>
               <a:ext uri="{FF2B5EF4-FFF2-40B4-BE49-F238E27FC236}">
-                <a16:creationId xmlns:a16="http://schemas.microsoft.com/office/drawing/2014/main" id="{1D83C025-4590-458B-FC71-21E1D2723994}"/>
+                <a16:creationId xmlns:a16="http://schemas.microsoft.com/office/drawing/2014/main" id="{043F1CBC-37B8-8563-0BEB-A59DDF38016B}"/>
               </a:ext>
             </a:extLst>
           </p:cNvPr>
@@ -5264,7 +5264,7 @@
           <p:cNvPr id="14" name="テキスト ボックス 13">
             <a:extLst>
               <a:ext uri="{FF2B5EF4-FFF2-40B4-BE49-F238E27FC236}">
-                <a16:creationId xmlns:a16="http://schemas.microsoft.com/office/drawing/2014/main" id="{AFA74CF5-F649-BB17-4ED0-6CFE66A97792}"/>
+                <a16:creationId xmlns:a16="http://schemas.microsoft.com/office/drawing/2014/main" id="{50CE0525-7B9B-A7C9-D068-33288648BB14}"/>
               </a:ext>
             </a:extLst>
           </p:cNvPr>
@@ -5310,7 +5310,7 @@
           <p:cNvPr id="15" name="テキスト ボックス 14">
             <a:extLst>
               <a:ext uri="{FF2B5EF4-FFF2-40B4-BE49-F238E27FC236}">
-                <a16:creationId xmlns:a16="http://schemas.microsoft.com/office/drawing/2014/main" id="{512C539A-F0BF-6D90-FCDD-76B680B5BEBC}"/>
+                <a16:creationId xmlns:a16="http://schemas.microsoft.com/office/drawing/2014/main" id="{C5E24FC6-9A91-FBCE-C080-BE502EA3F02A}"/>
               </a:ext>
             </a:extLst>
           </p:cNvPr>
@@ -5369,7 +5369,7 @@
                 <a:latin typeface="Yu Gothic UI" panose="020B0500000000000000" pitchFamily="50" charset="-128"/>
                 <a:ea typeface="Yu Gothic UI" panose="020B0500000000000000" pitchFamily="50" charset="-128"/>
               </a:rPr>
-              <a:t>PdfSignage.exe </a:t>
+              <a:t>KS_Signage.exe </a:t>
             </a:r>
             <a:r>
               <a:rPr kumimoji="1" lang="ja-JP" altLang="en-US" sz="1300">
@@ -5449,7 +5449,7 @@
           <p:cNvPr id="16" name="四角形: 角を丸くする 15">
             <a:extLst>
               <a:ext uri="{FF2B5EF4-FFF2-40B4-BE49-F238E27FC236}">
-                <a16:creationId xmlns:a16="http://schemas.microsoft.com/office/drawing/2014/main" id="{17A03EF0-4B38-D330-80EE-DB4EC9655435}"/>
+                <a16:creationId xmlns:a16="http://schemas.microsoft.com/office/drawing/2014/main" id="{10F85813-AAE2-A221-2014-B274D2119EF7}"/>
               </a:ext>
             </a:extLst>
           </p:cNvPr>
@@ -5519,7 +5519,7 @@
           <p:cNvPr id="17" name="四角形: 角を丸くする 16">
             <a:extLst>
               <a:ext uri="{FF2B5EF4-FFF2-40B4-BE49-F238E27FC236}">
-                <a16:creationId xmlns:a16="http://schemas.microsoft.com/office/drawing/2014/main" id="{D644B964-F2CF-980D-0F7D-EF3AF22ADE30}"/>
+                <a16:creationId xmlns:a16="http://schemas.microsoft.com/office/drawing/2014/main" id="{F9A54BDD-CBD6-37E0-7099-4F66AA4B03C3}"/>
               </a:ext>
             </a:extLst>
           </p:cNvPr>
@@ -5589,7 +5589,7 @@
           <p:cNvPr id="18" name="テキスト ボックス 17">
             <a:extLst>
               <a:ext uri="{FF2B5EF4-FFF2-40B4-BE49-F238E27FC236}">
-                <a16:creationId xmlns:a16="http://schemas.microsoft.com/office/drawing/2014/main" id="{1060FF68-9F95-7F5B-058E-03A88D7FE212}"/>
+                <a16:creationId xmlns:a16="http://schemas.microsoft.com/office/drawing/2014/main" id="{F36F2ECA-C9E1-7CBE-9366-28AD65A5A14F}"/>
               </a:ext>
             </a:extLst>
           </p:cNvPr>
@@ -5642,7 +5642,7 @@
           <p:cNvPr id="19" name="テキスト ボックス 18">
             <a:extLst>
               <a:ext uri="{FF2B5EF4-FFF2-40B4-BE49-F238E27FC236}">
-                <a16:creationId xmlns:a16="http://schemas.microsoft.com/office/drawing/2014/main" id="{590641E7-6807-A949-337D-F3A1F3148EE7}"/>
+                <a16:creationId xmlns:a16="http://schemas.microsoft.com/office/drawing/2014/main" id="{9E650377-42DB-9A23-D097-9B208D5FBC9F}"/>
               </a:ext>
             </a:extLst>
           </p:cNvPr>
@@ -5708,7 +5708,7 @@
           <p:cNvPr id="20" name="四角形: 角を丸くする 19">
             <a:extLst>
               <a:ext uri="{FF2B5EF4-FFF2-40B4-BE49-F238E27FC236}">
-                <a16:creationId xmlns:a16="http://schemas.microsoft.com/office/drawing/2014/main" id="{FFD8516E-39E5-5490-ECEF-CAC29EC04EA0}"/>
+                <a16:creationId xmlns:a16="http://schemas.microsoft.com/office/drawing/2014/main" id="{A0E5B4B9-8698-1052-7E16-A8E7AFB828B7}"/>
               </a:ext>
             </a:extLst>
           </p:cNvPr>
@@ -5764,7 +5764,7 @@
           <p:cNvPr id="21" name="テキスト ボックス 20">
             <a:extLst>
               <a:ext uri="{FF2B5EF4-FFF2-40B4-BE49-F238E27FC236}">
-                <a16:creationId xmlns:a16="http://schemas.microsoft.com/office/drawing/2014/main" id="{52B8DB8D-3683-C571-88DD-A97EB6C3552B}"/>
+                <a16:creationId xmlns:a16="http://schemas.microsoft.com/office/drawing/2014/main" id="{09A40345-1993-CD87-89B2-2BB9D2760F7F}"/>
               </a:ext>
             </a:extLst>
           </p:cNvPr>
@@ -5817,7 +5817,7 @@
           <p:cNvPr id="22" name="テキスト ボックス 21">
             <a:extLst>
               <a:ext uri="{FF2B5EF4-FFF2-40B4-BE49-F238E27FC236}">
-                <a16:creationId xmlns:a16="http://schemas.microsoft.com/office/drawing/2014/main" id="{DF217115-B7AB-89A5-495C-A5C1D88B343F}"/>
+                <a16:creationId xmlns:a16="http://schemas.microsoft.com/office/drawing/2014/main" id="{1A4BCA83-6BB6-C56E-0306-1AF1563619D2}"/>
               </a:ext>
             </a:extLst>
           </p:cNvPr>
@@ -5870,7 +5870,7 @@
           <p:cNvPr id="23" name="四角形: 角を丸くする 22">
             <a:extLst>
               <a:ext uri="{FF2B5EF4-FFF2-40B4-BE49-F238E27FC236}">
-                <a16:creationId xmlns:a16="http://schemas.microsoft.com/office/drawing/2014/main" id="{E4B44391-82D7-CCE6-B62E-265AA30E3B67}"/>
+                <a16:creationId xmlns:a16="http://schemas.microsoft.com/office/drawing/2014/main" id="{29F1C3A5-22E4-EDE9-106C-8E6C30D3F758}"/>
               </a:ext>
             </a:extLst>
           </p:cNvPr>
@@ -5926,7 +5926,7 @@
           <p:cNvPr id="24" name="テキスト ボックス 23">
             <a:extLst>
               <a:ext uri="{FF2B5EF4-FFF2-40B4-BE49-F238E27FC236}">
-                <a16:creationId xmlns:a16="http://schemas.microsoft.com/office/drawing/2014/main" id="{3CEEDB12-B733-ED2B-1E5D-726A404FD3EC}"/>
+                <a16:creationId xmlns:a16="http://schemas.microsoft.com/office/drawing/2014/main" id="{04E602A2-279B-919C-575C-754DA6DCEFFF}"/>
               </a:ext>
             </a:extLst>
           </p:cNvPr>
@@ -5979,7 +5979,7 @@
           <p:cNvPr id="25" name="テキスト ボックス 24">
             <a:extLst>
               <a:ext uri="{FF2B5EF4-FFF2-40B4-BE49-F238E27FC236}">
-                <a16:creationId xmlns:a16="http://schemas.microsoft.com/office/drawing/2014/main" id="{D1FCA945-34A0-EFB6-7621-14FA625CC111}"/>
+                <a16:creationId xmlns:a16="http://schemas.microsoft.com/office/drawing/2014/main" id="{FD8B5BA5-E73E-DAAB-047F-66E59ED14763}"/>
               </a:ext>
             </a:extLst>
           </p:cNvPr>
@@ -6032,7 +6032,7 @@
           <p:cNvPr id="26" name="四角形: 角を丸くする 25">
             <a:extLst>
               <a:ext uri="{FF2B5EF4-FFF2-40B4-BE49-F238E27FC236}">
-                <a16:creationId xmlns:a16="http://schemas.microsoft.com/office/drawing/2014/main" id="{188E2CBB-1A5D-C82F-72FD-1FCB1B5833FC}"/>
+                <a16:creationId xmlns:a16="http://schemas.microsoft.com/office/drawing/2014/main" id="{58668291-8651-2AE9-F920-F6C532297C31}"/>
               </a:ext>
             </a:extLst>
           </p:cNvPr>
@@ -6088,7 +6088,7 @@
           <p:cNvPr id="27" name="テキスト ボックス 26">
             <a:extLst>
               <a:ext uri="{FF2B5EF4-FFF2-40B4-BE49-F238E27FC236}">
-                <a16:creationId xmlns:a16="http://schemas.microsoft.com/office/drawing/2014/main" id="{688A4E00-6C45-1490-983F-B32122F0855D}"/>
+                <a16:creationId xmlns:a16="http://schemas.microsoft.com/office/drawing/2014/main" id="{5FC141B7-9AEB-9CA9-5437-A794C0BED744}"/>
               </a:ext>
             </a:extLst>
           </p:cNvPr>
@@ -6141,7 +6141,7 @@
           <p:cNvPr id="28" name="テキスト ボックス 27">
             <a:extLst>
               <a:ext uri="{FF2B5EF4-FFF2-40B4-BE49-F238E27FC236}">
-                <a16:creationId xmlns:a16="http://schemas.microsoft.com/office/drawing/2014/main" id="{5AD2ADC1-F356-9F35-97EA-018C8DAEE497}"/>
+                <a16:creationId xmlns:a16="http://schemas.microsoft.com/office/drawing/2014/main" id="{2F4E1B40-0707-7A7A-6725-7CD1B9613C3D}"/>
               </a:ext>
             </a:extLst>
           </p:cNvPr>
@@ -6187,7 +6187,7 @@
           <p:cNvPr id="29" name="四角形: 角を丸くする 28">
             <a:extLst>
               <a:ext uri="{FF2B5EF4-FFF2-40B4-BE49-F238E27FC236}">
-                <a16:creationId xmlns:a16="http://schemas.microsoft.com/office/drawing/2014/main" id="{A3CA5651-02E7-FD8C-9F14-C2B536268DB0}"/>
+                <a16:creationId xmlns:a16="http://schemas.microsoft.com/office/drawing/2014/main" id="{A4FEE881-AA74-69E3-7E47-954A2AAC9B7E}"/>
               </a:ext>
             </a:extLst>
           </p:cNvPr>
@@ -6257,7 +6257,7 @@
           <p:cNvPr id="30" name="正方形/長方形 29">
             <a:extLst>
               <a:ext uri="{FF2B5EF4-FFF2-40B4-BE49-F238E27FC236}">
-                <a16:creationId xmlns:a16="http://schemas.microsoft.com/office/drawing/2014/main" id="{9D7D8DD6-8E25-CBC7-F657-A1FB35AE7354}"/>
+                <a16:creationId xmlns:a16="http://schemas.microsoft.com/office/drawing/2014/main" id="{64D08EC4-4BDF-E248-7036-88639D90CE39}"/>
               </a:ext>
             </a:extLst>
           </p:cNvPr>
@@ -6325,7 +6325,7 @@
           <p:cNvPr id="31" name="テキスト ボックス 30">
             <a:extLst>
               <a:ext uri="{FF2B5EF4-FFF2-40B4-BE49-F238E27FC236}">
-                <a16:creationId xmlns:a16="http://schemas.microsoft.com/office/drawing/2014/main" id="{B1D5ACAD-DD19-4AED-05D9-F34903892D44}"/>
+                <a16:creationId xmlns:a16="http://schemas.microsoft.com/office/drawing/2014/main" id="{6E857914-5BA3-05C6-8BF2-03843A3B8CB9}"/>
               </a:ext>
             </a:extLst>
           </p:cNvPr>
@@ -6371,7 +6371,7 @@
           <p:cNvPr id="32" name="テキスト ボックス 31">
             <a:extLst>
               <a:ext uri="{FF2B5EF4-FFF2-40B4-BE49-F238E27FC236}">
-                <a16:creationId xmlns:a16="http://schemas.microsoft.com/office/drawing/2014/main" id="{BD5AC2D0-2B71-CBD5-1A7A-F35D7A875AFB}"/>
+                <a16:creationId xmlns:a16="http://schemas.microsoft.com/office/drawing/2014/main" id="{1382278E-BD17-DCC2-DA89-540D2F9E1D30}"/>
               </a:ext>
             </a:extLst>
           </p:cNvPr>
@@ -6415,7 +6415,7 @@
     </p:spTree>
     <p:extLst>
       <p:ext uri="{BB962C8B-B14F-4D97-AF65-F5344CB8AC3E}">
-        <p14:creationId xmlns:p14="http://schemas.microsoft.com/office/powerpoint/2010/main" val="3311658748"/>
+        <p14:creationId xmlns:p14="http://schemas.microsoft.com/office/powerpoint/2010/main" val="3980290580"/>
       </p:ext>
     </p:extLst>
   </p:cSld>
@@ -6447,7 +6447,7 @@
           <p:cNvPr id="2" name="正方形/長方形 1">
             <a:extLst>
               <a:ext uri="{FF2B5EF4-FFF2-40B4-BE49-F238E27FC236}">
-                <a16:creationId xmlns:a16="http://schemas.microsoft.com/office/drawing/2014/main" id="{E8B9AADA-4127-ED32-1334-5FF71C5B640C}"/>
+                <a16:creationId xmlns:a16="http://schemas.microsoft.com/office/drawing/2014/main" id="{2D5AEBA2-CE06-E3BF-026C-137ADB39FBFB}"/>
               </a:ext>
             </a:extLst>
           </p:cNvPr>
@@ -6515,7 +6515,7 @@
           <p:cNvPr id="3" name="正方形/長方形 2">
             <a:extLst>
               <a:ext uri="{FF2B5EF4-FFF2-40B4-BE49-F238E27FC236}">
-                <a16:creationId xmlns:a16="http://schemas.microsoft.com/office/drawing/2014/main" id="{E5D71524-A930-BA62-9AC6-5C88AE990DFB}"/>
+                <a16:creationId xmlns:a16="http://schemas.microsoft.com/office/drawing/2014/main" id="{7F6A4E8A-C242-A886-DFE5-FA747891AC30}"/>
               </a:ext>
             </a:extLst>
           </p:cNvPr>
@@ -6583,7 +6583,7 @@
           <p:cNvPr id="4" name="テキスト ボックス 3">
             <a:extLst>
               <a:ext uri="{FF2B5EF4-FFF2-40B4-BE49-F238E27FC236}">
-                <a16:creationId xmlns:a16="http://schemas.microsoft.com/office/drawing/2014/main" id="{DDD127D6-02EA-3625-8C87-06F1221BBAE4}"/>
+                <a16:creationId xmlns:a16="http://schemas.microsoft.com/office/drawing/2014/main" id="{9BD8534B-63D1-267E-90DD-629DEA2E7712}"/>
               </a:ext>
             </a:extLst>
           </p:cNvPr>
@@ -6636,7 +6636,7 @@
           <p:cNvPr id="5" name="テキスト ボックス 4">
             <a:extLst>
               <a:ext uri="{FF2B5EF4-FFF2-40B4-BE49-F238E27FC236}">
-                <a16:creationId xmlns:a16="http://schemas.microsoft.com/office/drawing/2014/main" id="{B37FC5C4-EC2F-FED9-3779-CB411D832813}"/>
+                <a16:creationId xmlns:a16="http://schemas.microsoft.com/office/drawing/2014/main" id="{C6E0E463-99F2-A7EE-9B47-737D83CA1B9C}"/>
               </a:ext>
             </a:extLst>
           </p:cNvPr>
@@ -6682,7 +6682,7 @@
           <p:cNvPr id="6" name="正方形/長方形 5">
             <a:extLst>
               <a:ext uri="{FF2B5EF4-FFF2-40B4-BE49-F238E27FC236}">
-                <a16:creationId xmlns:a16="http://schemas.microsoft.com/office/drawing/2014/main" id="{B7A248F8-69AD-FB64-845E-9156B5FE0C8B}"/>
+                <a16:creationId xmlns:a16="http://schemas.microsoft.com/office/drawing/2014/main" id="{8CFA7A05-EAA2-790A-DFF4-0997D38226C4}"/>
               </a:ext>
             </a:extLst>
           </p:cNvPr>
@@ -6750,7 +6750,7 @@
           <p:cNvPr id="7" name="四角形: 角を丸くする 6">
             <a:extLst>
               <a:ext uri="{FF2B5EF4-FFF2-40B4-BE49-F238E27FC236}">
-                <a16:creationId xmlns:a16="http://schemas.microsoft.com/office/drawing/2014/main" id="{DC3F6F99-E553-1C20-2AB6-8ABF50AFABB1}"/>
+                <a16:creationId xmlns:a16="http://schemas.microsoft.com/office/drawing/2014/main" id="{C81A10A3-37C2-B3E2-605A-FC5CBF740540}"/>
               </a:ext>
             </a:extLst>
           </p:cNvPr>
@@ -6820,7 +6820,7 @@
           <p:cNvPr id="8" name="テキスト ボックス 7">
             <a:extLst>
               <a:ext uri="{FF2B5EF4-FFF2-40B4-BE49-F238E27FC236}">
-                <a16:creationId xmlns:a16="http://schemas.microsoft.com/office/drawing/2014/main" id="{5F41B5E7-D6C4-E950-116A-4622076328C2}"/>
+                <a16:creationId xmlns:a16="http://schemas.microsoft.com/office/drawing/2014/main" id="{29CB984E-C618-E8E2-BB19-E44E75E620B1}"/>
               </a:ext>
             </a:extLst>
           </p:cNvPr>
@@ -6866,7 +6866,7 @@
           <p:cNvPr id="9" name="テキスト ボックス 8">
             <a:extLst>
               <a:ext uri="{FF2B5EF4-FFF2-40B4-BE49-F238E27FC236}">
-                <a16:creationId xmlns:a16="http://schemas.microsoft.com/office/drawing/2014/main" id="{44EAD007-5050-1F6C-A81B-BFE96FE12520}"/>
+                <a16:creationId xmlns:a16="http://schemas.microsoft.com/office/drawing/2014/main" id="{82A67982-D9F3-7FAA-AE81-5EA038F81B7F}"/>
               </a:ext>
             </a:extLst>
           </p:cNvPr>
@@ -6912,7 +6912,7 @@
           <p:cNvPr id="10" name="テキスト ボックス 9">
             <a:extLst>
               <a:ext uri="{FF2B5EF4-FFF2-40B4-BE49-F238E27FC236}">
-                <a16:creationId xmlns:a16="http://schemas.microsoft.com/office/drawing/2014/main" id="{2789E732-9C41-5D26-0E52-F12009460ECC}"/>
+                <a16:creationId xmlns:a16="http://schemas.microsoft.com/office/drawing/2014/main" id="{C8F7EA94-CEBD-170F-BB11-7457AFA2B54C}"/>
               </a:ext>
             </a:extLst>
           </p:cNvPr>
@@ -6965,7 +6965,7 @@
           <p:cNvPr id="11" name="表 10">
             <a:extLst>
               <a:ext uri="{FF2B5EF4-FFF2-40B4-BE49-F238E27FC236}">
-                <a16:creationId xmlns:a16="http://schemas.microsoft.com/office/drawing/2014/main" id="{5FF6AAAE-1A9C-D815-1FE4-F718165C85DB}"/>
+                <a16:creationId xmlns:a16="http://schemas.microsoft.com/office/drawing/2014/main" id="{8270FB71-2592-F0B0-891E-510EEA7F12F6}"/>
               </a:ext>
             </a:extLst>
           </p:cNvPr>
@@ -6975,7 +6975,7 @@
           <p:nvPr>
             <p:extLst>
               <p:ext uri="{D42A27DB-BD31-4B8C-83A1-F6EECF244321}">
-                <p14:modId xmlns:p14="http://schemas.microsoft.com/office/powerpoint/2010/main" val="21131506"/>
+                <p14:modId xmlns:p14="http://schemas.microsoft.com/office/powerpoint/2010/main" val="2625578554"/>
               </p:ext>
             </p:extLst>
           </p:nvPr>
@@ -6994,14 +6994,14 @@
                 <a:gridCol w="3200400">
                   <a:extLst>
                     <a:ext uri="{9D8B030D-6E8A-4147-A177-3AD203B41FA5}">
-                      <a16:colId xmlns:a16="http://schemas.microsoft.com/office/drawing/2014/main" val="10331178"/>
+                      <a16:colId xmlns:a16="http://schemas.microsoft.com/office/drawing/2014/main" val="1190917604"/>
                     </a:ext>
                   </a:extLst>
                 </a:gridCol>
                 <a:gridCol w="7366000">
                   <a:extLst>
                     <a:ext uri="{9D8B030D-6E8A-4147-A177-3AD203B41FA5}">
-                      <a16:colId xmlns:a16="http://schemas.microsoft.com/office/drawing/2014/main" val="3233115489"/>
+                      <a16:colId xmlns:a16="http://schemas.microsoft.com/office/drawing/2014/main" val="3271697714"/>
                     </a:ext>
                   </a:extLst>
                 </a:gridCol>
@@ -7075,7 +7075,7 @@
                 </a:tc>
                 <a:extLst>
                   <a:ext uri="{0D108BD9-81ED-4DB2-BD59-A6C34878D82A}">
-                    <a16:rowId xmlns:a16="http://schemas.microsoft.com/office/drawing/2014/main" val="2241886"/>
+                    <a16:rowId xmlns:a16="http://schemas.microsoft.com/office/drawing/2014/main" val="3096954661"/>
                   </a:ext>
                 </a:extLst>
               </a:tr>
@@ -7178,7 +7178,7 @@
                 </a:tc>
                 <a:extLst>
                   <a:ext uri="{0D108BD9-81ED-4DB2-BD59-A6C34878D82A}">
-                    <a16:rowId xmlns:a16="http://schemas.microsoft.com/office/drawing/2014/main" val="2674719565"/>
+                    <a16:rowId xmlns:a16="http://schemas.microsoft.com/office/drawing/2014/main" val="1556795112"/>
                   </a:ext>
                 </a:extLst>
               </a:tr>
@@ -7301,7 +7301,7 @@
                 </a:tc>
                 <a:extLst>
                   <a:ext uri="{0D108BD9-81ED-4DB2-BD59-A6C34878D82A}">
-                    <a16:rowId xmlns:a16="http://schemas.microsoft.com/office/drawing/2014/main" val="74110732"/>
+                    <a16:rowId xmlns:a16="http://schemas.microsoft.com/office/drawing/2014/main" val="147243656"/>
                   </a:ext>
                 </a:extLst>
               </a:tr>
@@ -7424,7 +7424,7 @@
                 </a:tc>
                 <a:extLst>
                   <a:ext uri="{0D108BD9-81ED-4DB2-BD59-A6C34878D82A}">
-                    <a16:rowId xmlns:a16="http://schemas.microsoft.com/office/drawing/2014/main" val="2028857006"/>
+                    <a16:rowId xmlns:a16="http://schemas.microsoft.com/office/drawing/2014/main" val="2417607253"/>
                   </a:ext>
                 </a:extLst>
               </a:tr>
@@ -7527,7 +7527,7 @@
                 </a:tc>
                 <a:extLst>
                   <a:ext uri="{0D108BD9-81ED-4DB2-BD59-A6C34878D82A}">
-                    <a16:rowId xmlns:a16="http://schemas.microsoft.com/office/drawing/2014/main" val="1244969782"/>
+                    <a16:rowId xmlns:a16="http://schemas.microsoft.com/office/drawing/2014/main" val="655727468"/>
                   </a:ext>
                 </a:extLst>
               </a:tr>
@@ -7660,7 +7660,7 @@
                 </a:tc>
                 <a:extLst>
                   <a:ext uri="{0D108BD9-81ED-4DB2-BD59-A6C34878D82A}">
-                    <a16:rowId xmlns:a16="http://schemas.microsoft.com/office/drawing/2014/main" val="1495916914"/>
+                    <a16:rowId xmlns:a16="http://schemas.microsoft.com/office/drawing/2014/main" val="3728223941"/>
                   </a:ext>
                 </a:extLst>
               </a:tr>
@@ -7743,7 +7743,7 @@
                 </a:tc>
                 <a:extLst>
                   <a:ext uri="{0D108BD9-81ED-4DB2-BD59-A6C34878D82A}">
-                    <a16:rowId xmlns:a16="http://schemas.microsoft.com/office/drawing/2014/main" val="1417007481"/>
+                    <a16:rowId xmlns:a16="http://schemas.microsoft.com/office/drawing/2014/main" val="718957163"/>
                   </a:ext>
                 </a:extLst>
               </a:tr>
@@ -7756,7 +7756,7 @@
           <p:cNvPr id="12" name="四角形: 角を丸くする 11">
             <a:extLst>
               <a:ext uri="{FF2B5EF4-FFF2-40B4-BE49-F238E27FC236}">
-                <a16:creationId xmlns:a16="http://schemas.microsoft.com/office/drawing/2014/main" id="{461588BC-9C6E-A356-B18D-78748604006F}"/>
+                <a16:creationId xmlns:a16="http://schemas.microsoft.com/office/drawing/2014/main" id="{D50A3C02-2CFE-9D40-54BC-7D331CD86A0F}"/>
               </a:ext>
             </a:extLst>
           </p:cNvPr>
@@ -7826,7 +7826,7 @@
           <p:cNvPr id="13" name="正方形/長方形 12">
             <a:extLst>
               <a:ext uri="{FF2B5EF4-FFF2-40B4-BE49-F238E27FC236}">
-                <a16:creationId xmlns:a16="http://schemas.microsoft.com/office/drawing/2014/main" id="{685718C8-86A2-0273-8237-6C80331EB79F}"/>
+                <a16:creationId xmlns:a16="http://schemas.microsoft.com/office/drawing/2014/main" id="{BB19AC0D-9937-36B9-089A-F249AC8B8725}"/>
               </a:ext>
             </a:extLst>
           </p:cNvPr>
@@ -7894,7 +7894,7 @@
           <p:cNvPr id="14" name="テキスト ボックス 13">
             <a:extLst>
               <a:ext uri="{FF2B5EF4-FFF2-40B4-BE49-F238E27FC236}">
-                <a16:creationId xmlns:a16="http://schemas.microsoft.com/office/drawing/2014/main" id="{5EE7EF98-0D84-4281-D386-12E5641CCD87}"/>
+                <a16:creationId xmlns:a16="http://schemas.microsoft.com/office/drawing/2014/main" id="{13DFD16C-C7F4-AEB9-EB5D-07D162180A9A}"/>
               </a:ext>
             </a:extLst>
           </p:cNvPr>
@@ -7940,7 +7940,7 @@
           <p:cNvPr id="15" name="テキスト ボックス 14">
             <a:extLst>
               <a:ext uri="{FF2B5EF4-FFF2-40B4-BE49-F238E27FC236}">
-                <a16:creationId xmlns:a16="http://schemas.microsoft.com/office/drawing/2014/main" id="{E67BE109-7E91-D491-7513-5C02641CD033}"/>
+                <a16:creationId xmlns:a16="http://schemas.microsoft.com/office/drawing/2014/main" id="{85CCC340-AF87-D6F8-0B80-29EC825AC622}"/>
               </a:ext>
             </a:extLst>
           </p:cNvPr>
@@ -8106,7 +8106,7 @@
                 <a:latin typeface="Yu Gothic UI" panose="020B0500000000000000" pitchFamily="50" charset="-128"/>
                 <a:ea typeface="Yu Gothic UI" panose="020B0500000000000000" pitchFamily="50" charset="-128"/>
               </a:rPr>
-              <a:t>。ライセンス・アクセスキー・ログフォルダは次のスライド。</a:t>
+              <a:t>。時刻と自動起動は再生設定タブ。ライセンス・アクセスキー・ログフォルダはライセンス等タブ。</a:t>
             </a:r>
           </a:p>
         </p:txBody>
@@ -8114,7 +8114,7 @@
     </p:spTree>
     <p:extLst>
       <p:ext uri="{BB962C8B-B14F-4D97-AF65-F5344CB8AC3E}">
-        <p14:creationId xmlns:p14="http://schemas.microsoft.com/office/powerpoint/2010/main" val="3572840603"/>
+        <p14:creationId xmlns:p14="http://schemas.microsoft.com/office/powerpoint/2010/main" val="3913820642"/>
       </p:ext>
     </p:extLst>
   </p:cSld>
@@ -8146,7 +8146,7 @@
           <p:cNvPr id="2" name="正方形/長方形 1">
             <a:extLst>
               <a:ext uri="{FF2B5EF4-FFF2-40B4-BE49-F238E27FC236}">
-                <a16:creationId xmlns:a16="http://schemas.microsoft.com/office/drawing/2014/main" id="{C38E9EC4-CCB5-CFD2-73EE-46B23804B65F}"/>
+                <a16:creationId xmlns:a16="http://schemas.microsoft.com/office/drawing/2014/main" id="{8FB9C15C-77B9-1230-3BDB-9B66ACB8E14A}"/>
               </a:ext>
             </a:extLst>
           </p:cNvPr>
@@ -8214,7 +8214,7 @@
           <p:cNvPr id="3" name="正方形/長方形 2">
             <a:extLst>
               <a:ext uri="{FF2B5EF4-FFF2-40B4-BE49-F238E27FC236}">
-                <a16:creationId xmlns:a16="http://schemas.microsoft.com/office/drawing/2014/main" id="{9235619E-7B07-0C1A-0EE0-102A458BB849}"/>
+                <a16:creationId xmlns:a16="http://schemas.microsoft.com/office/drawing/2014/main" id="{50350FFA-3538-3DA3-5D1E-39C5D7C87D76}"/>
               </a:ext>
             </a:extLst>
           </p:cNvPr>
@@ -8282,7 +8282,7 @@
           <p:cNvPr id="4" name="テキスト ボックス 3">
             <a:extLst>
               <a:ext uri="{FF2B5EF4-FFF2-40B4-BE49-F238E27FC236}">
-                <a16:creationId xmlns:a16="http://schemas.microsoft.com/office/drawing/2014/main" id="{0CF6FBFD-445E-EC24-B112-1F21D965A34C}"/>
+                <a16:creationId xmlns:a16="http://schemas.microsoft.com/office/drawing/2014/main" id="{7D03C134-F7F1-B547-714D-8596C314FF74}"/>
               </a:ext>
             </a:extLst>
           </p:cNvPr>
@@ -8335,7 +8335,7 @@
           <p:cNvPr id="5" name="テキスト ボックス 4">
             <a:extLst>
               <a:ext uri="{FF2B5EF4-FFF2-40B4-BE49-F238E27FC236}">
-                <a16:creationId xmlns:a16="http://schemas.microsoft.com/office/drawing/2014/main" id="{8DDCA058-FE3F-91E7-0530-16FB6D95FF17}"/>
+                <a16:creationId xmlns:a16="http://schemas.microsoft.com/office/drawing/2014/main" id="{9741B712-0E18-C6CB-AF9B-FD022011271A}"/>
               </a:ext>
             </a:extLst>
           </p:cNvPr>
@@ -8381,7 +8381,7 @@
           <p:cNvPr id="6" name="正方形/長方形 5">
             <a:extLst>
               <a:ext uri="{FF2B5EF4-FFF2-40B4-BE49-F238E27FC236}">
-                <a16:creationId xmlns:a16="http://schemas.microsoft.com/office/drawing/2014/main" id="{D8158C21-7971-535D-7548-46ECF8DB70A4}"/>
+                <a16:creationId xmlns:a16="http://schemas.microsoft.com/office/drawing/2014/main" id="{51ACC156-DC41-F23E-EEF8-239CEB520779}"/>
               </a:ext>
             </a:extLst>
           </p:cNvPr>
@@ -8449,7 +8449,7 @@
           <p:cNvPr id="7" name="四角形: 角を丸くする 6">
             <a:extLst>
               <a:ext uri="{FF2B5EF4-FFF2-40B4-BE49-F238E27FC236}">
-                <a16:creationId xmlns:a16="http://schemas.microsoft.com/office/drawing/2014/main" id="{CFAE173B-B6B3-1B6E-1443-58B2E213AE7A}"/>
+                <a16:creationId xmlns:a16="http://schemas.microsoft.com/office/drawing/2014/main" id="{D9A9B4E0-E4FA-7684-4D07-98AB6027433A}"/>
               </a:ext>
             </a:extLst>
           </p:cNvPr>
@@ -8519,7 +8519,7 @@
           <p:cNvPr id="8" name="テキスト ボックス 7">
             <a:extLst>
               <a:ext uri="{FF2B5EF4-FFF2-40B4-BE49-F238E27FC236}">
-                <a16:creationId xmlns:a16="http://schemas.microsoft.com/office/drawing/2014/main" id="{7009F29A-02F6-BFA1-F727-E59B3E82FA6A}"/>
+                <a16:creationId xmlns:a16="http://schemas.microsoft.com/office/drawing/2014/main" id="{1D822E62-7E2A-97AD-0A45-44F3D8D91A3E}"/>
               </a:ext>
             </a:extLst>
           </p:cNvPr>
@@ -8565,7 +8565,7 @@
           <p:cNvPr id="9" name="テキスト ボックス 8">
             <a:extLst>
               <a:ext uri="{FF2B5EF4-FFF2-40B4-BE49-F238E27FC236}">
-                <a16:creationId xmlns:a16="http://schemas.microsoft.com/office/drawing/2014/main" id="{31197238-D6C7-05C7-7DB0-BE0D11C34905}"/>
+                <a16:creationId xmlns:a16="http://schemas.microsoft.com/office/drawing/2014/main" id="{93AEC836-0023-112E-82AE-6E9F18A5AD0B}"/>
               </a:ext>
             </a:extLst>
           </p:cNvPr>
@@ -8611,7 +8611,7 @@
           <p:cNvPr id="10" name="テキスト ボックス 9">
             <a:extLst>
               <a:ext uri="{FF2B5EF4-FFF2-40B4-BE49-F238E27FC236}">
-                <a16:creationId xmlns:a16="http://schemas.microsoft.com/office/drawing/2014/main" id="{7E10C6C4-CEFD-4C51-B02C-F3FF060141B2}"/>
+                <a16:creationId xmlns:a16="http://schemas.microsoft.com/office/drawing/2014/main" id="{6267A6E1-F0EF-E7A6-9480-7C2DCAC46215}"/>
               </a:ext>
             </a:extLst>
           </p:cNvPr>
@@ -8664,7 +8664,7 @@
           <p:cNvPr id="11" name="四角形: 角を丸くする 10">
             <a:extLst>
               <a:ext uri="{FF2B5EF4-FFF2-40B4-BE49-F238E27FC236}">
-                <a16:creationId xmlns:a16="http://schemas.microsoft.com/office/drawing/2014/main" id="{95470336-88F8-33C5-DC8D-24943B9D3866}"/>
+                <a16:creationId xmlns:a16="http://schemas.microsoft.com/office/drawing/2014/main" id="{C62C4E70-D572-4259-3BBE-7E1D0EAA67C5}"/>
               </a:ext>
             </a:extLst>
           </p:cNvPr>
@@ -8720,7 +8720,7 @@
           <p:cNvPr id="12" name="四角形: 角を丸くする 11">
             <a:extLst>
               <a:ext uri="{FF2B5EF4-FFF2-40B4-BE49-F238E27FC236}">
-                <a16:creationId xmlns:a16="http://schemas.microsoft.com/office/drawing/2014/main" id="{6B0EABE7-4498-2EFE-FB65-BB5DA7EB99A4}"/>
+                <a16:creationId xmlns:a16="http://schemas.microsoft.com/office/drawing/2014/main" id="{EF747012-386A-EF74-2075-A9048955424A}"/>
               </a:ext>
             </a:extLst>
           </p:cNvPr>
@@ -8790,7 +8790,7 @@
           <p:cNvPr id="13" name="テキスト ボックス 12">
             <a:extLst>
               <a:ext uri="{FF2B5EF4-FFF2-40B4-BE49-F238E27FC236}">
-                <a16:creationId xmlns:a16="http://schemas.microsoft.com/office/drawing/2014/main" id="{2670BCA8-A3BE-109B-6440-05E5AFE09FD6}"/>
+                <a16:creationId xmlns:a16="http://schemas.microsoft.com/office/drawing/2014/main" id="{5FD56B6C-1CA3-6153-4A88-0C5B097D7930}"/>
               </a:ext>
             </a:extLst>
           </p:cNvPr>
@@ -8843,7 +8843,7 @@
           <p:cNvPr id="14" name="テキスト ボックス 13">
             <a:extLst>
               <a:ext uri="{FF2B5EF4-FFF2-40B4-BE49-F238E27FC236}">
-                <a16:creationId xmlns:a16="http://schemas.microsoft.com/office/drawing/2014/main" id="{FF2D62EB-ECEE-873B-3E3A-FF498A035E69}"/>
+                <a16:creationId xmlns:a16="http://schemas.microsoft.com/office/drawing/2014/main" id="{CEBBE874-C297-5097-A971-DB73C7D6C794}"/>
               </a:ext>
             </a:extLst>
           </p:cNvPr>
@@ -8909,7 +8909,7 @@
           <p:cNvPr id="15" name="テキスト ボックス 14">
             <a:extLst>
               <a:ext uri="{FF2B5EF4-FFF2-40B4-BE49-F238E27FC236}">
-                <a16:creationId xmlns:a16="http://schemas.microsoft.com/office/drawing/2014/main" id="{076433CE-A049-E6CE-4DD4-EAF2BB47D6FC}"/>
+                <a16:creationId xmlns:a16="http://schemas.microsoft.com/office/drawing/2014/main" id="{B8322DAE-35EE-E112-96C8-E2DD955EAE20}"/>
               </a:ext>
             </a:extLst>
           </p:cNvPr>
@@ -8958,7 +8958,7 @@
                 <a:latin typeface="Yu Gothic UI" panose="020B0500000000000000" pitchFamily="50" charset="-128"/>
                 <a:ea typeface="Yu Gothic UI" panose="020B0500000000000000" pitchFamily="50" charset="-128"/>
               </a:rPr>
-              <a:t>Windows </a:t>
+              <a:t>PC </a:t>
             </a:r>
             <a:r>
               <a:rPr kumimoji="1" lang="ja-JP" altLang="en-US" sz="1300">
@@ -8968,7 +8968,7 @@
                 <a:latin typeface="Yu Gothic UI" panose="020B0500000000000000" pitchFamily="50" charset="-128"/>
                 <a:ea typeface="Yu Gothic UI" panose="020B0500000000000000" pitchFamily="50" charset="-128"/>
               </a:rPr>
-              <a:t>ユーザーで初めて起動した日から、暦日 </a:t>
+              <a:t>で初めて起動した日から、暦日 </a:t>
             </a:r>
             <a:r>
               <a:rPr kumimoji="1" lang="en-US" altLang="ja-JP" sz="1300">
@@ -9028,7 +9028,27 @@
                 <a:latin typeface="Yu Gothic UI" panose="020B0500000000000000" pitchFamily="50" charset="-128"/>
                 <a:ea typeface="Yu Gothic UI" panose="020B0500000000000000" pitchFamily="50" charset="-128"/>
               </a:rPr>
-              <a:t>を消しても、同じユーザーでは試用は延びません。</a:t>
+              <a:t>を消しても、同じ </a:t>
+            </a:r>
+            <a:r>
+              <a:rPr kumimoji="1" lang="en-US" altLang="ja-JP" sz="1300">
+                <a:solidFill>
+                  <a:srgbClr val="465263"/>
+                </a:solidFill>
+                <a:latin typeface="Yu Gothic UI" panose="020B0500000000000000" pitchFamily="50" charset="-128"/>
+                <a:ea typeface="Yu Gothic UI" panose="020B0500000000000000" pitchFamily="50" charset="-128"/>
+              </a:rPr>
+              <a:t>PC </a:t>
+            </a:r>
+            <a:r>
+              <a:rPr kumimoji="1" lang="ja-JP" altLang="en-US" sz="1300">
+                <a:solidFill>
+                  <a:srgbClr val="465263"/>
+                </a:solidFill>
+                <a:latin typeface="Yu Gothic UI" panose="020B0500000000000000" pitchFamily="50" charset="-128"/>
+                <a:ea typeface="Yu Gothic UI" panose="020B0500000000000000" pitchFamily="50" charset="-128"/>
+              </a:rPr>
+              <a:t>では試用は延びません。</a:t>
             </a:r>
           </a:p>
         </p:txBody>
@@ -9038,7 +9058,7 @@
           <p:cNvPr id="16" name="四角形: 角を丸くする 15">
             <a:extLst>
               <a:ext uri="{FF2B5EF4-FFF2-40B4-BE49-F238E27FC236}">
-                <a16:creationId xmlns:a16="http://schemas.microsoft.com/office/drawing/2014/main" id="{5148FC3F-71E8-FC96-709D-9E34F928005B}"/>
+                <a16:creationId xmlns:a16="http://schemas.microsoft.com/office/drawing/2014/main" id="{8D57353F-92A7-E4EB-6F9A-5543697BDD5D}"/>
               </a:ext>
             </a:extLst>
           </p:cNvPr>
@@ -9094,7 +9114,7 @@
           <p:cNvPr id="17" name="四角形: 角を丸くする 16">
             <a:extLst>
               <a:ext uri="{FF2B5EF4-FFF2-40B4-BE49-F238E27FC236}">
-                <a16:creationId xmlns:a16="http://schemas.microsoft.com/office/drawing/2014/main" id="{EE23865F-5884-0022-0DAE-D9BB04FA1556}"/>
+                <a16:creationId xmlns:a16="http://schemas.microsoft.com/office/drawing/2014/main" id="{5ED4E47E-0384-634D-852E-BE9DDDAEC311}"/>
               </a:ext>
             </a:extLst>
           </p:cNvPr>
@@ -9164,7 +9184,7 @@
           <p:cNvPr id="18" name="テキスト ボックス 17">
             <a:extLst>
               <a:ext uri="{FF2B5EF4-FFF2-40B4-BE49-F238E27FC236}">
-                <a16:creationId xmlns:a16="http://schemas.microsoft.com/office/drawing/2014/main" id="{C738EF80-9E1B-DFC6-FAE9-380E4B51F829}"/>
+                <a16:creationId xmlns:a16="http://schemas.microsoft.com/office/drawing/2014/main" id="{5D2A8B6F-46A3-1F75-53C8-B60D5900DDB6}"/>
               </a:ext>
             </a:extLst>
           </p:cNvPr>
@@ -9217,7 +9237,7 @@
           <p:cNvPr id="19" name="テキスト ボックス 18">
             <a:extLst>
               <a:ext uri="{FF2B5EF4-FFF2-40B4-BE49-F238E27FC236}">
-                <a16:creationId xmlns:a16="http://schemas.microsoft.com/office/drawing/2014/main" id="{6E4E5A30-A32D-790D-FBE6-EE17F3D00B2C}"/>
+                <a16:creationId xmlns:a16="http://schemas.microsoft.com/office/drawing/2014/main" id="{898409C8-70C2-E12C-D890-436724D939D9}"/>
               </a:ext>
             </a:extLst>
           </p:cNvPr>
@@ -9263,7 +9283,7 @@
           <p:cNvPr id="20" name="テキスト ボックス 19">
             <a:extLst>
               <a:ext uri="{FF2B5EF4-FFF2-40B4-BE49-F238E27FC236}">
-                <a16:creationId xmlns:a16="http://schemas.microsoft.com/office/drawing/2014/main" id="{FBBEFFB2-1EA1-53EE-1855-8545037E53B0}"/>
+                <a16:creationId xmlns:a16="http://schemas.microsoft.com/office/drawing/2014/main" id="{B1B6D7C7-783D-809D-6C81-86AFDE98068B}"/>
               </a:ext>
             </a:extLst>
           </p:cNvPr>
@@ -9382,7 +9402,7 @@
                 <a:latin typeface="Yu Gothic UI" panose="020B0500000000000000" pitchFamily="50" charset="-128"/>
                 <a:ea typeface="Yu Gothic UI" panose="020B0500000000000000" pitchFamily="50" charset="-128"/>
               </a:rPr>
-              <a:t>メールのアクセスキーをそのまま貼る</a:t>
+              <a:t>ライセンス等タブにメールのアクセスキーをそのまま貼る</a:t>
             </a:r>
           </a:p>
           <a:p>
@@ -9415,6 +9435,36 @@
               <a:t>「アクセスキーを適用」を押す</a:t>
             </a:r>
           </a:p>
+          <a:p>
+            <a:pPr>
+              <a:lnSpc>
+                <a:spcPct val="135000"/>
+              </a:lnSpc>
+              <a:spcAft>
+                <a:spcPts val="800"/>
+              </a:spcAft>
+            </a:pPr>
+            <a:r>
+              <a:rPr kumimoji="1" lang="en-US" altLang="ja-JP" sz="1300">
+                <a:solidFill>
+                  <a:srgbClr val="465263"/>
+                </a:solidFill>
+                <a:latin typeface="Yu Gothic UI" panose="020B0500000000000000" pitchFamily="50" charset="-128"/>
+                <a:ea typeface="Yu Gothic UI" panose="020B0500000000000000" pitchFamily="50" charset="-128"/>
+              </a:rPr>
+              <a:t>settings.json </a:t>
+            </a:r>
+            <a:r>
+              <a:rPr kumimoji="1" lang="ja-JP" altLang="en-US" sz="1300">
+                <a:solidFill>
+                  <a:srgbClr val="465263"/>
+                </a:solidFill>
+                <a:latin typeface="Yu Gothic UI" panose="020B0500000000000000" pitchFamily="50" charset="-128"/>
+                <a:ea typeface="Yu Gothic UI" panose="020B0500000000000000" pitchFamily="50" charset="-128"/>
+              </a:rPr>
+              <a:t>を残せば、差し替え後も再入力は不要です。</a:t>
+            </a:r>
+          </a:p>
         </p:txBody>
       </p:sp>
       <p:sp>
@@ -9422,7 +9472,7 @@
           <p:cNvPr id="21" name="四角形: 角を丸くする 20">
             <a:extLst>
               <a:ext uri="{FF2B5EF4-FFF2-40B4-BE49-F238E27FC236}">
-                <a16:creationId xmlns:a16="http://schemas.microsoft.com/office/drawing/2014/main" id="{DCC4BE1A-7FC1-484E-379A-639CF15043C9}"/>
+                <a16:creationId xmlns:a16="http://schemas.microsoft.com/office/drawing/2014/main" id="{95854C85-C4FD-1E1E-915D-84C2706C9053}"/>
               </a:ext>
             </a:extLst>
           </p:cNvPr>
@@ -9492,7 +9542,7 @@
           <p:cNvPr id="22" name="正方形/長方形 21">
             <a:extLst>
               <a:ext uri="{FF2B5EF4-FFF2-40B4-BE49-F238E27FC236}">
-                <a16:creationId xmlns:a16="http://schemas.microsoft.com/office/drawing/2014/main" id="{24171E68-CBAF-AA2B-EB92-C36BCECBF60E}"/>
+                <a16:creationId xmlns:a16="http://schemas.microsoft.com/office/drawing/2014/main" id="{CA0BD9AB-6A99-3B4A-437F-49146039CFDB}"/>
               </a:ext>
             </a:extLst>
           </p:cNvPr>
@@ -9560,7 +9610,7 @@
           <p:cNvPr id="23" name="テキスト ボックス 22">
             <a:extLst>
               <a:ext uri="{FF2B5EF4-FFF2-40B4-BE49-F238E27FC236}">
-                <a16:creationId xmlns:a16="http://schemas.microsoft.com/office/drawing/2014/main" id="{F767CF4B-B2AE-13BD-4EBA-0812FDABDB72}"/>
+                <a16:creationId xmlns:a16="http://schemas.microsoft.com/office/drawing/2014/main" id="{2DEDFD05-BD95-CC99-2C61-02434B6B71F7}"/>
               </a:ext>
             </a:extLst>
           </p:cNvPr>
@@ -9606,7 +9656,7 @@
           <p:cNvPr id="24" name="テキスト ボックス 23">
             <a:extLst>
               <a:ext uri="{FF2B5EF4-FFF2-40B4-BE49-F238E27FC236}">
-                <a16:creationId xmlns:a16="http://schemas.microsoft.com/office/drawing/2014/main" id="{46E61BD2-AA7E-7BEE-2A16-9EED82CF5E2B}"/>
+                <a16:creationId xmlns:a16="http://schemas.microsoft.com/office/drawing/2014/main" id="{F6FC32AB-22AF-CBF7-945A-712701942AC7}"/>
               </a:ext>
             </a:extLst>
           </p:cNvPr>
@@ -9670,7 +9720,7 @@
     </p:spTree>
     <p:extLst>
       <p:ext uri="{BB962C8B-B14F-4D97-AF65-F5344CB8AC3E}">
-        <p14:creationId xmlns:p14="http://schemas.microsoft.com/office/powerpoint/2010/main" val="681075539"/>
+        <p14:creationId xmlns:p14="http://schemas.microsoft.com/office/powerpoint/2010/main" val="2010133115"/>
       </p:ext>
     </p:extLst>
   </p:cSld>
@@ -9702,7 +9752,7 @@
           <p:cNvPr id="2" name="正方形/長方形 1">
             <a:extLst>
               <a:ext uri="{FF2B5EF4-FFF2-40B4-BE49-F238E27FC236}">
-                <a16:creationId xmlns:a16="http://schemas.microsoft.com/office/drawing/2014/main" id="{70FB0A07-45BD-F535-4C97-BE5F3C89E065}"/>
+                <a16:creationId xmlns:a16="http://schemas.microsoft.com/office/drawing/2014/main" id="{5AC51FEB-EF35-E5AA-4917-677309E2A44F}"/>
               </a:ext>
             </a:extLst>
           </p:cNvPr>
@@ -9770,7 +9820,7 @@
           <p:cNvPr id="3" name="正方形/長方形 2">
             <a:extLst>
               <a:ext uri="{FF2B5EF4-FFF2-40B4-BE49-F238E27FC236}">
-                <a16:creationId xmlns:a16="http://schemas.microsoft.com/office/drawing/2014/main" id="{63160AE0-D3D5-FFBD-05E3-70952149CDEF}"/>
+                <a16:creationId xmlns:a16="http://schemas.microsoft.com/office/drawing/2014/main" id="{5B7A502C-3330-A95B-84B8-45130F269EBF}"/>
               </a:ext>
             </a:extLst>
           </p:cNvPr>
@@ -9838,7 +9888,7 @@
           <p:cNvPr id="4" name="テキスト ボックス 3">
             <a:extLst>
               <a:ext uri="{FF2B5EF4-FFF2-40B4-BE49-F238E27FC236}">
-                <a16:creationId xmlns:a16="http://schemas.microsoft.com/office/drawing/2014/main" id="{004E69F4-F09C-4EF1-0E59-B5866457C1BA}"/>
+                <a16:creationId xmlns:a16="http://schemas.microsoft.com/office/drawing/2014/main" id="{FA87FE3D-64D1-ACDB-BE64-455FC7227D8F}"/>
               </a:ext>
             </a:extLst>
           </p:cNvPr>
@@ -9891,7 +9941,7 @@
           <p:cNvPr id="5" name="テキスト ボックス 4">
             <a:extLst>
               <a:ext uri="{FF2B5EF4-FFF2-40B4-BE49-F238E27FC236}">
-                <a16:creationId xmlns:a16="http://schemas.microsoft.com/office/drawing/2014/main" id="{B66F6B63-9510-756E-922A-CC6A0A9A680A}"/>
+                <a16:creationId xmlns:a16="http://schemas.microsoft.com/office/drawing/2014/main" id="{C2AB32B0-7AB6-3CB7-1F49-CB45E8899997}"/>
               </a:ext>
             </a:extLst>
           </p:cNvPr>
@@ -9937,7 +9987,7 @@
           <p:cNvPr id="6" name="正方形/長方形 5">
             <a:extLst>
               <a:ext uri="{FF2B5EF4-FFF2-40B4-BE49-F238E27FC236}">
-                <a16:creationId xmlns:a16="http://schemas.microsoft.com/office/drawing/2014/main" id="{07ED12BC-84EB-2F7E-1D9C-030A418F4387}"/>
+                <a16:creationId xmlns:a16="http://schemas.microsoft.com/office/drawing/2014/main" id="{80729579-F8CE-218B-D860-E0FAD7040AA9}"/>
               </a:ext>
             </a:extLst>
           </p:cNvPr>
@@ -10005,7 +10055,7 @@
           <p:cNvPr id="7" name="四角形: 角を丸くする 6">
             <a:extLst>
               <a:ext uri="{FF2B5EF4-FFF2-40B4-BE49-F238E27FC236}">
-                <a16:creationId xmlns:a16="http://schemas.microsoft.com/office/drawing/2014/main" id="{89B9C0FE-4B21-8AAE-3F84-5032AAE60721}"/>
+                <a16:creationId xmlns:a16="http://schemas.microsoft.com/office/drawing/2014/main" id="{CE2F95BA-2EAF-DB61-35FF-61DBDC6A9E14}"/>
               </a:ext>
             </a:extLst>
           </p:cNvPr>
@@ -10075,7 +10125,7 @@
           <p:cNvPr id="8" name="テキスト ボックス 7">
             <a:extLst>
               <a:ext uri="{FF2B5EF4-FFF2-40B4-BE49-F238E27FC236}">
-                <a16:creationId xmlns:a16="http://schemas.microsoft.com/office/drawing/2014/main" id="{79AC9A7B-5B21-D460-9971-AD519DCD9F5D}"/>
+                <a16:creationId xmlns:a16="http://schemas.microsoft.com/office/drawing/2014/main" id="{3E6FC94A-55EA-E013-B20D-7551BD09AEC8}"/>
               </a:ext>
             </a:extLst>
           </p:cNvPr>
@@ -10121,7 +10171,7 @@
           <p:cNvPr id="9" name="テキスト ボックス 8">
             <a:extLst>
               <a:ext uri="{FF2B5EF4-FFF2-40B4-BE49-F238E27FC236}">
-                <a16:creationId xmlns:a16="http://schemas.microsoft.com/office/drawing/2014/main" id="{33CA8B8F-0DEA-8DE9-3362-5D9622F8B601}"/>
+                <a16:creationId xmlns:a16="http://schemas.microsoft.com/office/drawing/2014/main" id="{CAC7829D-D0C0-234A-A774-85F84D7D1FB9}"/>
               </a:ext>
             </a:extLst>
           </p:cNvPr>
@@ -10167,7 +10217,7 @@
           <p:cNvPr id="10" name="テキスト ボックス 9">
             <a:extLst>
               <a:ext uri="{FF2B5EF4-FFF2-40B4-BE49-F238E27FC236}">
-                <a16:creationId xmlns:a16="http://schemas.microsoft.com/office/drawing/2014/main" id="{45CB80F8-B4B4-E0D5-9F3E-E8CE79F94EAD}"/>
+                <a16:creationId xmlns:a16="http://schemas.microsoft.com/office/drawing/2014/main" id="{3CD32F28-9B31-4EBD-2169-F3554AE30A10}"/>
               </a:ext>
             </a:extLst>
           </p:cNvPr>
@@ -10220,7 +10270,7 @@
           <p:cNvPr id="11" name="テキスト ボックス 10">
             <a:extLst>
               <a:ext uri="{FF2B5EF4-FFF2-40B4-BE49-F238E27FC236}">
-                <a16:creationId xmlns:a16="http://schemas.microsoft.com/office/drawing/2014/main" id="{954DA528-F834-C26F-6637-34A7BD53E089}"/>
+                <a16:creationId xmlns:a16="http://schemas.microsoft.com/office/drawing/2014/main" id="{E54CC3F6-A819-7396-53C7-1376D2BBEF58}"/>
               </a:ext>
             </a:extLst>
           </p:cNvPr>
@@ -10286,7 +10336,7 @@
           <p:cNvPr id="12" name="正方形/長方形 11">
             <a:extLst>
               <a:ext uri="{FF2B5EF4-FFF2-40B4-BE49-F238E27FC236}">
-                <a16:creationId xmlns:a16="http://schemas.microsoft.com/office/drawing/2014/main" id="{96F3FDE5-E9A0-7A4A-892E-3EF6B08A2B8E}"/>
+                <a16:creationId xmlns:a16="http://schemas.microsoft.com/office/drawing/2014/main" id="{6F0C2E32-9AE9-F1C9-00A2-9614161648AA}"/>
               </a:ext>
             </a:extLst>
           </p:cNvPr>
@@ -10354,7 +10404,7 @@
           <p:cNvPr id="13" name="テキスト ボックス 12">
             <a:extLst>
               <a:ext uri="{FF2B5EF4-FFF2-40B4-BE49-F238E27FC236}">
-                <a16:creationId xmlns:a16="http://schemas.microsoft.com/office/drawing/2014/main" id="{BAECC493-4377-AFED-313E-C1E2A20BD898}"/>
+                <a16:creationId xmlns:a16="http://schemas.microsoft.com/office/drawing/2014/main" id="{839CA1D0-91EC-B5C3-B8AB-54CF087B13A5}"/>
               </a:ext>
             </a:extLst>
           </p:cNvPr>
@@ -10407,7 +10457,7 @@
           <p:cNvPr id="14" name="楕円 13">
             <a:extLst>
               <a:ext uri="{FF2B5EF4-FFF2-40B4-BE49-F238E27FC236}">
-                <a16:creationId xmlns:a16="http://schemas.microsoft.com/office/drawing/2014/main" id="{D7CD1232-7CD8-448B-F5A0-5A140094AEE0}"/>
+                <a16:creationId xmlns:a16="http://schemas.microsoft.com/office/drawing/2014/main" id="{FE9795F3-2BCE-EB32-D444-82A9C2949093}"/>
               </a:ext>
             </a:extLst>
           </p:cNvPr>
@@ -10461,7 +10511,7 @@
           <p:cNvPr id="15" name="四角形: 角を丸くする 14">
             <a:extLst>
               <a:ext uri="{FF2B5EF4-FFF2-40B4-BE49-F238E27FC236}">
-                <a16:creationId xmlns:a16="http://schemas.microsoft.com/office/drawing/2014/main" id="{0F7F6002-5674-542F-474E-EF73AE9403D5}"/>
+                <a16:creationId xmlns:a16="http://schemas.microsoft.com/office/drawing/2014/main" id="{2DE2E3D9-5C65-80B0-F4FC-B92092888D32}"/>
               </a:ext>
             </a:extLst>
           </p:cNvPr>
@@ -10531,7 +10581,7 @@
           <p:cNvPr id="16" name="テキスト ボックス 15">
             <a:extLst>
               <a:ext uri="{FF2B5EF4-FFF2-40B4-BE49-F238E27FC236}">
-                <a16:creationId xmlns:a16="http://schemas.microsoft.com/office/drawing/2014/main" id="{EAFDC5A7-E8C9-0D84-1DAF-8108B3437908}"/>
+                <a16:creationId xmlns:a16="http://schemas.microsoft.com/office/drawing/2014/main" id="{4A3D5AD5-A54F-1B04-40A8-61A40A424F1C}"/>
               </a:ext>
             </a:extLst>
           </p:cNvPr>
@@ -10577,7 +10627,7 @@
           <p:cNvPr id="17" name="テキスト ボックス 16">
             <a:extLst>
               <a:ext uri="{FF2B5EF4-FFF2-40B4-BE49-F238E27FC236}">
-                <a16:creationId xmlns:a16="http://schemas.microsoft.com/office/drawing/2014/main" id="{D1ECF7D4-18BC-A1CB-3291-82D1B42DECC3}"/>
+                <a16:creationId xmlns:a16="http://schemas.microsoft.com/office/drawing/2014/main" id="{D1CB5084-0731-0215-2123-862FF9EB67C0}"/>
               </a:ext>
             </a:extLst>
           </p:cNvPr>
@@ -10623,7 +10673,7 @@
           <p:cNvPr id="18" name="テキスト ボックス 17">
             <a:extLst>
               <a:ext uri="{FF2B5EF4-FFF2-40B4-BE49-F238E27FC236}">
-                <a16:creationId xmlns:a16="http://schemas.microsoft.com/office/drawing/2014/main" id="{F947E347-DF35-40BC-1881-A2B82600FE6B}"/>
+                <a16:creationId xmlns:a16="http://schemas.microsoft.com/office/drawing/2014/main" id="{966CDCED-B954-D568-8B14-0F745979356E}"/>
               </a:ext>
             </a:extLst>
           </p:cNvPr>
@@ -10676,7 +10726,7 @@
           <p:cNvPr id="19" name="楕円 18">
             <a:extLst>
               <a:ext uri="{FF2B5EF4-FFF2-40B4-BE49-F238E27FC236}">
-                <a16:creationId xmlns:a16="http://schemas.microsoft.com/office/drawing/2014/main" id="{3A3AA7B3-F5DB-C7BF-1EB0-F1F27D9E65D8}"/>
+                <a16:creationId xmlns:a16="http://schemas.microsoft.com/office/drawing/2014/main" id="{5B3BC0DE-42A5-0C84-134B-BDC6E7F64E6E}"/>
               </a:ext>
             </a:extLst>
           </p:cNvPr>
@@ -10730,7 +10780,7 @@
           <p:cNvPr id="20" name="四角形: 角を丸くする 19">
             <a:extLst>
               <a:ext uri="{FF2B5EF4-FFF2-40B4-BE49-F238E27FC236}">
-                <a16:creationId xmlns:a16="http://schemas.microsoft.com/office/drawing/2014/main" id="{CFFDC965-C1B0-D868-4B18-1EA4C8EFDC20}"/>
+                <a16:creationId xmlns:a16="http://schemas.microsoft.com/office/drawing/2014/main" id="{7F84646D-3504-E6C6-856B-24DA3B911425}"/>
               </a:ext>
             </a:extLst>
           </p:cNvPr>
@@ -10800,7 +10850,7 @@
           <p:cNvPr id="21" name="テキスト ボックス 20">
             <a:extLst>
               <a:ext uri="{FF2B5EF4-FFF2-40B4-BE49-F238E27FC236}">
-                <a16:creationId xmlns:a16="http://schemas.microsoft.com/office/drawing/2014/main" id="{87FC4F2F-056E-7D18-3E67-40BDC71A9C3B}"/>
+                <a16:creationId xmlns:a16="http://schemas.microsoft.com/office/drawing/2014/main" id="{EE81B987-7DE3-093D-8394-C905823439B3}"/>
               </a:ext>
             </a:extLst>
           </p:cNvPr>
@@ -10856,7 +10906,7 @@
           <p:cNvPr id="22" name="テキスト ボックス 21">
             <a:extLst>
               <a:ext uri="{FF2B5EF4-FFF2-40B4-BE49-F238E27FC236}">
-                <a16:creationId xmlns:a16="http://schemas.microsoft.com/office/drawing/2014/main" id="{190B99FD-16D1-A3A2-5C5D-524463B2841A}"/>
+                <a16:creationId xmlns:a16="http://schemas.microsoft.com/office/drawing/2014/main" id="{70AA3704-ABDE-93ED-55CC-49BB3C2DE0B1}"/>
               </a:ext>
             </a:extLst>
           </p:cNvPr>
@@ -10902,7 +10952,7 @@
           <p:cNvPr id="23" name="テキスト ボックス 22">
             <a:extLst>
               <a:ext uri="{FF2B5EF4-FFF2-40B4-BE49-F238E27FC236}">
-                <a16:creationId xmlns:a16="http://schemas.microsoft.com/office/drawing/2014/main" id="{99A08EE0-3D24-F697-D869-AE9445667AD9}"/>
+                <a16:creationId xmlns:a16="http://schemas.microsoft.com/office/drawing/2014/main" id="{007F32C3-3329-4C78-176A-58E771A65878}"/>
               </a:ext>
             </a:extLst>
           </p:cNvPr>
@@ -10948,7 +10998,7 @@
           <p:cNvPr id="24" name="楕円 23">
             <a:extLst>
               <a:ext uri="{FF2B5EF4-FFF2-40B4-BE49-F238E27FC236}">
-                <a16:creationId xmlns:a16="http://schemas.microsoft.com/office/drawing/2014/main" id="{D52A29E4-4909-2605-3083-533181D603A3}"/>
+                <a16:creationId xmlns:a16="http://schemas.microsoft.com/office/drawing/2014/main" id="{8B1B9AFB-B1E7-1112-CB29-FD10976E0CA3}"/>
               </a:ext>
             </a:extLst>
           </p:cNvPr>
@@ -11002,7 +11052,7 @@
           <p:cNvPr id="25" name="四角形: 角を丸くする 24">
             <a:extLst>
               <a:ext uri="{FF2B5EF4-FFF2-40B4-BE49-F238E27FC236}">
-                <a16:creationId xmlns:a16="http://schemas.microsoft.com/office/drawing/2014/main" id="{55B867C7-EBCE-0E6C-18E3-4827E805ABEA}"/>
+                <a16:creationId xmlns:a16="http://schemas.microsoft.com/office/drawing/2014/main" id="{70B05923-AC20-F95B-D6E7-7AA8B9293E1E}"/>
               </a:ext>
             </a:extLst>
           </p:cNvPr>
@@ -11072,7 +11122,7 @@
           <p:cNvPr id="26" name="テキスト ボックス 25">
             <a:extLst>
               <a:ext uri="{FF2B5EF4-FFF2-40B4-BE49-F238E27FC236}">
-                <a16:creationId xmlns:a16="http://schemas.microsoft.com/office/drawing/2014/main" id="{AB9D29CC-6189-F376-5796-8EB0EE8DF1FE}"/>
+                <a16:creationId xmlns:a16="http://schemas.microsoft.com/office/drawing/2014/main" id="{07A69B01-A832-881E-EA8B-D77E66B00B07}"/>
               </a:ext>
             </a:extLst>
           </p:cNvPr>
@@ -11128,7 +11178,7 @@
           <p:cNvPr id="27" name="テキスト ボックス 26">
             <a:extLst>
               <a:ext uri="{FF2B5EF4-FFF2-40B4-BE49-F238E27FC236}">
-                <a16:creationId xmlns:a16="http://schemas.microsoft.com/office/drawing/2014/main" id="{99ACE78B-265A-1920-FAA7-A805A8848A1D}"/>
+                <a16:creationId xmlns:a16="http://schemas.microsoft.com/office/drawing/2014/main" id="{2CCA4CD5-A0EB-1DF1-1CDC-0B3D0B643451}"/>
               </a:ext>
             </a:extLst>
           </p:cNvPr>
@@ -11174,7 +11224,7 @@
           <p:cNvPr id="28" name="テキスト ボックス 27">
             <a:extLst>
               <a:ext uri="{FF2B5EF4-FFF2-40B4-BE49-F238E27FC236}">
-                <a16:creationId xmlns:a16="http://schemas.microsoft.com/office/drawing/2014/main" id="{7E6D0A1A-C26A-88A5-E027-08BD73FA86B0}"/>
+                <a16:creationId xmlns:a16="http://schemas.microsoft.com/office/drawing/2014/main" id="{406CBA1E-F762-9BDC-13E6-CDA257E33A11}"/>
               </a:ext>
             </a:extLst>
           </p:cNvPr>
@@ -11220,7 +11270,7 @@
           <p:cNvPr id="29" name="楕円 28">
             <a:extLst>
               <a:ext uri="{FF2B5EF4-FFF2-40B4-BE49-F238E27FC236}">
-                <a16:creationId xmlns:a16="http://schemas.microsoft.com/office/drawing/2014/main" id="{C732DDE5-D02A-B09F-9578-AB8E6D71FA57}"/>
+                <a16:creationId xmlns:a16="http://schemas.microsoft.com/office/drawing/2014/main" id="{C0D7348C-084C-F409-3B9C-FA49F7AA52A2}"/>
               </a:ext>
             </a:extLst>
           </p:cNvPr>
@@ -11274,7 +11324,7 @@
           <p:cNvPr id="30" name="四角形: 角を丸くする 29">
             <a:extLst>
               <a:ext uri="{FF2B5EF4-FFF2-40B4-BE49-F238E27FC236}">
-                <a16:creationId xmlns:a16="http://schemas.microsoft.com/office/drawing/2014/main" id="{DF8B7C0A-3DE0-1E30-DC2F-13D5FD13395E}"/>
+                <a16:creationId xmlns:a16="http://schemas.microsoft.com/office/drawing/2014/main" id="{A8F7395C-62BF-D85A-E88C-94D48CB43B89}"/>
               </a:ext>
             </a:extLst>
           </p:cNvPr>
@@ -11344,7 +11394,7 @@
           <p:cNvPr id="31" name="テキスト ボックス 30">
             <a:extLst>
               <a:ext uri="{FF2B5EF4-FFF2-40B4-BE49-F238E27FC236}">
-                <a16:creationId xmlns:a16="http://schemas.microsoft.com/office/drawing/2014/main" id="{823B533C-256C-5225-B9A7-E9C1E6409262}"/>
+                <a16:creationId xmlns:a16="http://schemas.microsoft.com/office/drawing/2014/main" id="{BA18D116-D81B-063B-D37B-95B7DC96068B}"/>
               </a:ext>
             </a:extLst>
           </p:cNvPr>
@@ -11390,7 +11440,7 @@
           <p:cNvPr id="32" name="テキスト ボックス 31">
             <a:extLst>
               <a:ext uri="{FF2B5EF4-FFF2-40B4-BE49-F238E27FC236}">
-                <a16:creationId xmlns:a16="http://schemas.microsoft.com/office/drawing/2014/main" id="{A87C7A21-2034-8FF4-FABD-35894D56A617}"/>
+                <a16:creationId xmlns:a16="http://schemas.microsoft.com/office/drawing/2014/main" id="{1CEBA7F4-6FAD-DF07-8FDA-96DB8721A6ED}"/>
               </a:ext>
             </a:extLst>
           </p:cNvPr>
@@ -11466,7 +11516,7 @@
           <p:cNvPr id="33" name="四角形: 角を丸くする 32">
             <a:extLst>
               <a:ext uri="{FF2B5EF4-FFF2-40B4-BE49-F238E27FC236}">
-                <a16:creationId xmlns:a16="http://schemas.microsoft.com/office/drawing/2014/main" id="{98DC5847-C1F0-211F-94D4-58B9C8080FF7}"/>
+                <a16:creationId xmlns:a16="http://schemas.microsoft.com/office/drawing/2014/main" id="{0CA8BB53-4701-FEBB-BC7E-4081EEE3D2BD}"/>
               </a:ext>
             </a:extLst>
           </p:cNvPr>
@@ -11536,7 +11586,7 @@
           <p:cNvPr id="34" name="正方形/長方形 33">
             <a:extLst>
               <a:ext uri="{FF2B5EF4-FFF2-40B4-BE49-F238E27FC236}">
-                <a16:creationId xmlns:a16="http://schemas.microsoft.com/office/drawing/2014/main" id="{72AC4C7E-4C0F-11C6-D805-6CEB70C4C248}"/>
+                <a16:creationId xmlns:a16="http://schemas.microsoft.com/office/drawing/2014/main" id="{2B23287B-78D4-98A1-849A-116CF8F17E02}"/>
               </a:ext>
             </a:extLst>
           </p:cNvPr>
@@ -11604,7 +11654,7 @@
           <p:cNvPr id="35" name="テキスト ボックス 34">
             <a:extLst>
               <a:ext uri="{FF2B5EF4-FFF2-40B4-BE49-F238E27FC236}">
-                <a16:creationId xmlns:a16="http://schemas.microsoft.com/office/drawing/2014/main" id="{22968ED0-6537-6B67-58D4-F1EDE3F37C08}"/>
+                <a16:creationId xmlns:a16="http://schemas.microsoft.com/office/drawing/2014/main" id="{043755B2-A7D3-7B51-EAA7-84B268CD4E96}"/>
               </a:ext>
             </a:extLst>
           </p:cNvPr>
@@ -11650,7 +11700,7 @@
           <p:cNvPr id="36" name="テキスト ボックス 35">
             <a:extLst>
               <a:ext uri="{FF2B5EF4-FFF2-40B4-BE49-F238E27FC236}">
-                <a16:creationId xmlns:a16="http://schemas.microsoft.com/office/drawing/2014/main" id="{08052EE5-FB35-1650-8813-5D578B691034}"/>
+                <a16:creationId xmlns:a16="http://schemas.microsoft.com/office/drawing/2014/main" id="{EDC1C3E6-E4F5-3E43-5EB2-466D252C020D}"/>
               </a:ext>
             </a:extLst>
           </p:cNvPr>
@@ -11754,7 +11804,7 @@
     </p:spTree>
     <p:extLst>
       <p:ext uri="{BB962C8B-B14F-4D97-AF65-F5344CB8AC3E}">
-        <p14:creationId xmlns:p14="http://schemas.microsoft.com/office/powerpoint/2010/main" val="2228413794"/>
+        <p14:creationId xmlns:p14="http://schemas.microsoft.com/office/powerpoint/2010/main" val="801458801"/>
       </p:ext>
     </p:extLst>
   </p:cSld>
@@ -11786,7 +11836,7 @@
           <p:cNvPr id="2" name="正方形/長方形 1">
             <a:extLst>
               <a:ext uri="{FF2B5EF4-FFF2-40B4-BE49-F238E27FC236}">
-                <a16:creationId xmlns:a16="http://schemas.microsoft.com/office/drawing/2014/main" id="{0CD0CDBD-D631-107B-86A6-231E48ACE2FC}"/>
+                <a16:creationId xmlns:a16="http://schemas.microsoft.com/office/drawing/2014/main" id="{DE19C01E-9ACB-BC59-A380-542D356E2C6B}"/>
               </a:ext>
             </a:extLst>
           </p:cNvPr>
@@ -11854,7 +11904,7 @@
           <p:cNvPr id="3" name="正方形/長方形 2">
             <a:extLst>
               <a:ext uri="{FF2B5EF4-FFF2-40B4-BE49-F238E27FC236}">
-                <a16:creationId xmlns:a16="http://schemas.microsoft.com/office/drawing/2014/main" id="{BE8BCE28-BCC6-CE63-46F3-05F92BD0D202}"/>
+                <a16:creationId xmlns:a16="http://schemas.microsoft.com/office/drawing/2014/main" id="{AC1AAFF9-4005-4194-A51A-3B0F189163BF}"/>
               </a:ext>
             </a:extLst>
           </p:cNvPr>
@@ -11922,7 +11972,7 @@
           <p:cNvPr id="4" name="テキスト ボックス 3">
             <a:extLst>
               <a:ext uri="{FF2B5EF4-FFF2-40B4-BE49-F238E27FC236}">
-                <a16:creationId xmlns:a16="http://schemas.microsoft.com/office/drawing/2014/main" id="{3C5F4BB3-24A9-7FB2-1ADD-41E3B41DE6C0}"/>
+                <a16:creationId xmlns:a16="http://schemas.microsoft.com/office/drawing/2014/main" id="{348C9596-308A-E5C3-1D28-C55614488446}"/>
               </a:ext>
             </a:extLst>
           </p:cNvPr>
@@ -11975,7 +12025,7 @@
           <p:cNvPr id="5" name="テキスト ボックス 4">
             <a:extLst>
               <a:ext uri="{FF2B5EF4-FFF2-40B4-BE49-F238E27FC236}">
-                <a16:creationId xmlns:a16="http://schemas.microsoft.com/office/drawing/2014/main" id="{737148D3-6393-CC02-18D9-754955DF506C}"/>
+                <a16:creationId xmlns:a16="http://schemas.microsoft.com/office/drawing/2014/main" id="{4D3C2061-04AB-8DF3-F244-62840D22D609}"/>
               </a:ext>
             </a:extLst>
           </p:cNvPr>
@@ -12021,7 +12071,7 @@
           <p:cNvPr id="6" name="正方形/長方形 5">
             <a:extLst>
               <a:ext uri="{FF2B5EF4-FFF2-40B4-BE49-F238E27FC236}">
-                <a16:creationId xmlns:a16="http://schemas.microsoft.com/office/drawing/2014/main" id="{2C3A7AE3-ACD4-63FE-E132-3A997EF16273}"/>
+                <a16:creationId xmlns:a16="http://schemas.microsoft.com/office/drawing/2014/main" id="{69FCF91F-7A6D-399A-C00B-E4EDE3D86105}"/>
               </a:ext>
             </a:extLst>
           </p:cNvPr>
@@ -12089,7 +12139,7 @@
           <p:cNvPr id="7" name="四角形: 角を丸くする 6">
             <a:extLst>
               <a:ext uri="{FF2B5EF4-FFF2-40B4-BE49-F238E27FC236}">
-                <a16:creationId xmlns:a16="http://schemas.microsoft.com/office/drawing/2014/main" id="{7C10AD60-EE45-22DE-5539-9C1232F93DA1}"/>
+                <a16:creationId xmlns:a16="http://schemas.microsoft.com/office/drawing/2014/main" id="{1E79E569-BE2D-48CF-F0B6-60938CF3ACD2}"/>
               </a:ext>
             </a:extLst>
           </p:cNvPr>
@@ -12159,7 +12209,7 @@
           <p:cNvPr id="8" name="テキスト ボックス 7">
             <a:extLst>
               <a:ext uri="{FF2B5EF4-FFF2-40B4-BE49-F238E27FC236}">
-                <a16:creationId xmlns:a16="http://schemas.microsoft.com/office/drawing/2014/main" id="{6699026F-F474-775D-E70A-480FBB53A8BE}"/>
+                <a16:creationId xmlns:a16="http://schemas.microsoft.com/office/drawing/2014/main" id="{CD7210EF-B664-13BC-A2F1-7972EF75391E}"/>
               </a:ext>
             </a:extLst>
           </p:cNvPr>
@@ -12205,7 +12255,7 @@
           <p:cNvPr id="9" name="テキスト ボックス 8">
             <a:extLst>
               <a:ext uri="{FF2B5EF4-FFF2-40B4-BE49-F238E27FC236}">
-                <a16:creationId xmlns:a16="http://schemas.microsoft.com/office/drawing/2014/main" id="{BB0781C8-018C-C838-F5E7-3558169EACA8}"/>
+                <a16:creationId xmlns:a16="http://schemas.microsoft.com/office/drawing/2014/main" id="{359D3462-C5DA-3303-62A1-120B854D08EA}"/>
               </a:ext>
             </a:extLst>
           </p:cNvPr>
@@ -12251,7 +12301,7 @@
           <p:cNvPr id="10" name="テキスト ボックス 9">
             <a:extLst>
               <a:ext uri="{FF2B5EF4-FFF2-40B4-BE49-F238E27FC236}">
-                <a16:creationId xmlns:a16="http://schemas.microsoft.com/office/drawing/2014/main" id="{AC2446E6-3664-A2F2-4858-4920F617A592}"/>
+                <a16:creationId xmlns:a16="http://schemas.microsoft.com/office/drawing/2014/main" id="{CDE35F9A-3F47-5703-8C51-899A08E6171F}"/>
               </a:ext>
             </a:extLst>
           </p:cNvPr>
@@ -12304,7 +12354,7 @@
           <p:cNvPr id="11" name="四角形: 角を丸くする 10">
             <a:extLst>
               <a:ext uri="{FF2B5EF4-FFF2-40B4-BE49-F238E27FC236}">
-                <a16:creationId xmlns:a16="http://schemas.microsoft.com/office/drawing/2014/main" id="{E75F9E82-CAEB-FBF8-AC36-F490CB8548C6}"/>
+                <a16:creationId xmlns:a16="http://schemas.microsoft.com/office/drawing/2014/main" id="{AE315556-B999-80D6-4DD8-0231D54D3639}"/>
               </a:ext>
             </a:extLst>
           </p:cNvPr>
@@ -12360,7 +12410,7 @@
           <p:cNvPr id="12" name="正方形/長方形 11">
             <a:extLst>
               <a:ext uri="{FF2B5EF4-FFF2-40B4-BE49-F238E27FC236}">
-                <a16:creationId xmlns:a16="http://schemas.microsoft.com/office/drawing/2014/main" id="{AA8662B3-4B1B-F528-6D89-8A9E38AC6E46}"/>
+                <a16:creationId xmlns:a16="http://schemas.microsoft.com/office/drawing/2014/main" id="{0648B8DE-3B0F-12B7-66EB-9BC0C3DA2555}"/>
               </a:ext>
             </a:extLst>
           </p:cNvPr>
@@ -12428,7 +12478,7 @@
           <p:cNvPr id="13" name="テキスト ボックス 12">
             <a:extLst>
               <a:ext uri="{FF2B5EF4-FFF2-40B4-BE49-F238E27FC236}">
-                <a16:creationId xmlns:a16="http://schemas.microsoft.com/office/drawing/2014/main" id="{2F891A6B-388C-D3FF-BBB4-1522B85B316C}"/>
+                <a16:creationId xmlns:a16="http://schemas.microsoft.com/office/drawing/2014/main" id="{FBC25336-D338-921F-A111-99C92E1AB909}"/>
               </a:ext>
             </a:extLst>
           </p:cNvPr>
@@ -12474,7 +12524,7 @@
           <p:cNvPr id="14" name="テキスト ボックス 13">
             <a:extLst>
               <a:ext uri="{FF2B5EF4-FFF2-40B4-BE49-F238E27FC236}">
-                <a16:creationId xmlns:a16="http://schemas.microsoft.com/office/drawing/2014/main" id="{AF716112-BF39-F8AE-8734-F0B617E1B818}"/>
+                <a16:creationId xmlns:a16="http://schemas.microsoft.com/office/drawing/2014/main" id="{F9B69324-9D34-056F-DA45-E361A25A75C0}"/>
               </a:ext>
             </a:extLst>
           </p:cNvPr>
@@ -12520,7 +12570,7 @@
           <p:cNvPr id="15" name="テキスト ボックス 14">
             <a:extLst>
               <a:ext uri="{FF2B5EF4-FFF2-40B4-BE49-F238E27FC236}">
-                <a16:creationId xmlns:a16="http://schemas.microsoft.com/office/drawing/2014/main" id="{D865DBA6-A39F-C87E-A912-9094D09DBE79}"/>
+                <a16:creationId xmlns:a16="http://schemas.microsoft.com/office/drawing/2014/main" id="{D46C0769-B8DD-8467-6EA4-F88680A4C75A}"/>
               </a:ext>
             </a:extLst>
           </p:cNvPr>
@@ -12616,7 +12666,7 @@
           <p:cNvPr id="16" name="テキスト ボックス 15">
             <a:extLst>
               <a:ext uri="{FF2B5EF4-FFF2-40B4-BE49-F238E27FC236}">
-                <a16:creationId xmlns:a16="http://schemas.microsoft.com/office/drawing/2014/main" id="{09A7C82A-8476-5F60-37AD-52C4507EC030}"/>
+                <a16:creationId xmlns:a16="http://schemas.microsoft.com/office/drawing/2014/main" id="{C9901B4F-8505-0C36-7BF5-B74CECBB1CF7}"/>
               </a:ext>
             </a:extLst>
           </p:cNvPr>
@@ -12662,7 +12712,7 @@
           <p:cNvPr id="17" name="テキスト ボックス 16">
             <a:extLst>
               <a:ext uri="{FF2B5EF4-FFF2-40B4-BE49-F238E27FC236}">
-                <a16:creationId xmlns:a16="http://schemas.microsoft.com/office/drawing/2014/main" id="{B3EDB487-DA2E-F452-AF64-E8A61D000A65}"/>
+                <a16:creationId xmlns:a16="http://schemas.microsoft.com/office/drawing/2014/main" id="{28D30A8C-5E6F-5E6B-C6D8-E2063CF650F8}"/>
               </a:ext>
             </a:extLst>
           </p:cNvPr>
@@ -12728,7 +12778,7 @@
           <p:cNvPr id="18" name="テキスト ボックス 17">
             <a:extLst>
               <a:ext uri="{FF2B5EF4-FFF2-40B4-BE49-F238E27FC236}">
-                <a16:creationId xmlns:a16="http://schemas.microsoft.com/office/drawing/2014/main" id="{F0FADF39-36BF-B3AA-8ED1-B582FC67DE1A}"/>
+                <a16:creationId xmlns:a16="http://schemas.microsoft.com/office/drawing/2014/main" id="{04EF846D-0211-C2B1-4953-F0618A02652D}"/>
               </a:ext>
             </a:extLst>
           </p:cNvPr>
@@ -12774,7 +12824,7 @@
           <p:cNvPr id="19" name="テキスト ボックス 18">
             <a:extLst>
               <a:ext uri="{FF2B5EF4-FFF2-40B4-BE49-F238E27FC236}">
-                <a16:creationId xmlns:a16="http://schemas.microsoft.com/office/drawing/2014/main" id="{A0CC6D2E-F140-ED4E-CDD3-CECD0E991BD2}"/>
+                <a16:creationId xmlns:a16="http://schemas.microsoft.com/office/drawing/2014/main" id="{E970D858-3BAA-4AD7-D653-282777A7A6C0}"/>
               </a:ext>
             </a:extLst>
           </p:cNvPr>
@@ -12820,7 +12870,7 @@
           <p:cNvPr id="20" name="四角形: 角を丸くする 19">
             <a:extLst>
               <a:ext uri="{FF2B5EF4-FFF2-40B4-BE49-F238E27FC236}">
-                <a16:creationId xmlns:a16="http://schemas.microsoft.com/office/drawing/2014/main" id="{472B2E9C-106A-508A-EA72-2EF1EDF9131E}"/>
+                <a16:creationId xmlns:a16="http://schemas.microsoft.com/office/drawing/2014/main" id="{C5CABBB2-1D05-95D3-E766-7C353A165C3D}"/>
               </a:ext>
             </a:extLst>
           </p:cNvPr>
@@ -12876,7 +12926,7 @@
           <p:cNvPr id="21" name="正方形/長方形 20">
             <a:extLst>
               <a:ext uri="{FF2B5EF4-FFF2-40B4-BE49-F238E27FC236}">
-                <a16:creationId xmlns:a16="http://schemas.microsoft.com/office/drawing/2014/main" id="{C7DA7BA8-A382-5282-83A6-6B21F426A520}"/>
+                <a16:creationId xmlns:a16="http://schemas.microsoft.com/office/drawing/2014/main" id="{3937173B-E9D3-D8FB-5376-54374285E80A}"/>
               </a:ext>
             </a:extLst>
           </p:cNvPr>
@@ -12944,7 +12994,7 @@
           <p:cNvPr id="22" name="テキスト ボックス 21">
             <a:extLst>
               <a:ext uri="{FF2B5EF4-FFF2-40B4-BE49-F238E27FC236}">
-                <a16:creationId xmlns:a16="http://schemas.microsoft.com/office/drawing/2014/main" id="{7C509BCA-D8BF-D4AE-9CF2-F7651FE2FBF8}"/>
+                <a16:creationId xmlns:a16="http://schemas.microsoft.com/office/drawing/2014/main" id="{B2529C1F-A938-4C10-3813-7AC1D0661192}"/>
               </a:ext>
             </a:extLst>
           </p:cNvPr>
@@ -12990,7 +13040,7 @@
           <p:cNvPr id="23" name="テキスト ボックス 22">
             <a:extLst>
               <a:ext uri="{FF2B5EF4-FFF2-40B4-BE49-F238E27FC236}">
-                <a16:creationId xmlns:a16="http://schemas.microsoft.com/office/drawing/2014/main" id="{F4DE8FDC-D67C-2FBD-343B-7568D428660B}"/>
+                <a16:creationId xmlns:a16="http://schemas.microsoft.com/office/drawing/2014/main" id="{5C805CCB-834C-71C2-2524-953C720E6BD8}"/>
               </a:ext>
             </a:extLst>
           </p:cNvPr>
@@ -13036,7 +13086,7 @@
           <p:cNvPr id="24" name="正方形/長方形 23">
             <a:extLst>
               <a:ext uri="{FF2B5EF4-FFF2-40B4-BE49-F238E27FC236}">
-                <a16:creationId xmlns:a16="http://schemas.microsoft.com/office/drawing/2014/main" id="{DA009BE1-4C8A-D580-008E-59C0BA51C8F5}"/>
+                <a16:creationId xmlns:a16="http://schemas.microsoft.com/office/drawing/2014/main" id="{8FA9FBFC-3F9F-200C-0BC0-74DF4924AB67}"/>
               </a:ext>
             </a:extLst>
           </p:cNvPr>
@@ -13104,7 +13154,7 @@
           <p:cNvPr id="25" name="テキスト ボックス 24">
             <a:extLst>
               <a:ext uri="{FF2B5EF4-FFF2-40B4-BE49-F238E27FC236}">
-                <a16:creationId xmlns:a16="http://schemas.microsoft.com/office/drawing/2014/main" id="{83F6A048-C968-F880-18A2-224098426985}"/>
+                <a16:creationId xmlns:a16="http://schemas.microsoft.com/office/drawing/2014/main" id="{39559E6A-06A4-C11F-030E-3C1600F75A34}"/>
               </a:ext>
             </a:extLst>
           </p:cNvPr>
@@ -13150,7 +13200,7 @@
           <p:cNvPr id="26" name="テキスト ボックス 25">
             <a:extLst>
               <a:ext uri="{FF2B5EF4-FFF2-40B4-BE49-F238E27FC236}">
-                <a16:creationId xmlns:a16="http://schemas.microsoft.com/office/drawing/2014/main" id="{AAB23264-20AF-41F4-7C4E-1C9CCDD9C97A}"/>
+                <a16:creationId xmlns:a16="http://schemas.microsoft.com/office/drawing/2014/main" id="{B8176770-C8F1-A5EA-5718-EBE576ED7269}"/>
               </a:ext>
             </a:extLst>
           </p:cNvPr>
@@ -13216,7 +13266,7 @@
                 <a:latin typeface="Yu Gothic UI" panose="020B0500000000000000" pitchFamily="50" charset="-128"/>
                 <a:ea typeface="Yu Gothic UI" panose="020B0500000000000000" pitchFamily="50" charset="-128"/>
               </a:rPr>
-              <a:t>LocalAppData\PdfSignage\logs</a:t>
+              <a:t>LocalAppData\KS_Signage\logs</a:t>
             </a:r>
             <a:endParaRPr kumimoji="1" lang="ja-JP" altLang="en-US" sz="1250">
               <a:solidFill>
@@ -13233,7 +13283,7 @@
           <p:cNvPr id="27" name="正方形/長方形 26">
             <a:extLst>
               <a:ext uri="{FF2B5EF4-FFF2-40B4-BE49-F238E27FC236}">
-                <a16:creationId xmlns:a16="http://schemas.microsoft.com/office/drawing/2014/main" id="{C17B472E-2E4B-F83A-EEBE-99E515DFA9AA}"/>
+                <a16:creationId xmlns:a16="http://schemas.microsoft.com/office/drawing/2014/main" id="{78E06281-C7FD-BC66-CC28-BB2D05569A63}"/>
               </a:ext>
             </a:extLst>
           </p:cNvPr>
@@ -13301,7 +13351,7 @@
           <p:cNvPr id="28" name="テキスト ボックス 27">
             <a:extLst>
               <a:ext uri="{FF2B5EF4-FFF2-40B4-BE49-F238E27FC236}">
-                <a16:creationId xmlns:a16="http://schemas.microsoft.com/office/drawing/2014/main" id="{81C8AAB7-6C70-9F38-0E09-4F815EEAEC9C}"/>
+                <a16:creationId xmlns:a16="http://schemas.microsoft.com/office/drawing/2014/main" id="{73AFCDEC-7B1B-9966-896A-45CA6805D2A2}"/>
               </a:ext>
             </a:extLst>
           </p:cNvPr>
@@ -13347,7 +13397,7 @@
           <p:cNvPr id="29" name="テキスト ボックス 28">
             <a:extLst>
               <a:ext uri="{FF2B5EF4-FFF2-40B4-BE49-F238E27FC236}">
-                <a16:creationId xmlns:a16="http://schemas.microsoft.com/office/drawing/2014/main" id="{679DC9E2-BD43-DC55-6385-CCE21C5055F0}"/>
+                <a16:creationId xmlns:a16="http://schemas.microsoft.com/office/drawing/2014/main" id="{7500ED3B-BEAA-97FC-0400-314A04B21C1B}"/>
               </a:ext>
             </a:extLst>
           </p:cNvPr>
@@ -13393,7 +13443,7 @@
           <p:cNvPr id="30" name="正方形/長方形 29">
             <a:extLst>
               <a:ext uri="{FF2B5EF4-FFF2-40B4-BE49-F238E27FC236}">
-                <a16:creationId xmlns:a16="http://schemas.microsoft.com/office/drawing/2014/main" id="{96CF41E1-EDA9-034F-5280-A8E6E74F104A}"/>
+                <a16:creationId xmlns:a16="http://schemas.microsoft.com/office/drawing/2014/main" id="{91BF15EA-7056-5CEA-FEDE-A15F22B6072F}"/>
               </a:ext>
             </a:extLst>
           </p:cNvPr>
@@ -13461,7 +13511,7 @@
           <p:cNvPr id="31" name="テキスト ボックス 30">
             <a:extLst>
               <a:ext uri="{FF2B5EF4-FFF2-40B4-BE49-F238E27FC236}">
-                <a16:creationId xmlns:a16="http://schemas.microsoft.com/office/drawing/2014/main" id="{7CA893E5-93B0-03AD-F3ED-2CCA6ABE3090}"/>
+                <a16:creationId xmlns:a16="http://schemas.microsoft.com/office/drawing/2014/main" id="{7DB7F62C-E881-15C5-4F03-17171E9C3E1D}"/>
               </a:ext>
             </a:extLst>
           </p:cNvPr>
@@ -13507,7 +13557,7 @@
           <p:cNvPr id="32" name="テキスト ボックス 31">
             <a:extLst>
               <a:ext uri="{FF2B5EF4-FFF2-40B4-BE49-F238E27FC236}">
-                <a16:creationId xmlns:a16="http://schemas.microsoft.com/office/drawing/2014/main" id="{5DED035A-2C52-FFCD-CACC-B5070C13B583}"/>
+                <a16:creationId xmlns:a16="http://schemas.microsoft.com/office/drawing/2014/main" id="{5A5B2291-AFD2-DD2B-7B0B-C55DA380F061}"/>
               </a:ext>
             </a:extLst>
           </p:cNvPr>
@@ -13561,7 +13611,7 @@
     </p:spTree>
     <p:extLst>
       <p:ext uri="{BB962C8B-B14F-4D97-AF65-F5344CB8AC3E}">
-        <p14:creationId xmlns:p14="http://schemas.microsoft.com/office/powerpoint/2010/main" val="1236090293"/>
+        <p14:creationId xmlns:p14="http://schemas.microsoft.com/office/powerpoint/2010/main" val="622243868"/>
       </p:ext>
     </p:extLst>
   </p:cSld>
@@ -13593,7 +13643,7 @@
           <p:cNvPr id="2" name="正方形/長方形 1">
             <a:extLst>
               <a:ext uri="{FF2B5EF4-FFF2-40B4-BE49-F238E27FC236}">
-                <a16:creationId xmlns:a16="http://schemas.microsoft.com/office/drawing/2014/main" id="{1A1805DA-716C-2D99-518F-46DA950D1A82}"/>
+                <a16:creationId xmlns:a16="http://schemas.microsoft.com/office/drawing/2014/main" id="{00C21C6B-8DB9-C695-3217-4AA86F74B892}"/>
               </a:ext>
             </a:extLst>
           </p:cNvPr>
@@ -13661,7 +13711,7 @@
           <p:cNvPr id="3" name="正方形/長方形 2">
             <a:extLst>
               <a:ext uri="{FF2B5EF4-FFF2-40B4-BE49-F238E27FC236}">
-                <a16:creationId xmlns:a16="http://schemas.microsoft.com/office/drawing/2014/main" id="{1C39BF94-5D87-D49D-9355-CB5B8D71D08D}"/>
+                <a16:creationId xmlns:a16="http://schemas.microsoft.com/office/drawing/2014/main" id="{DCD1C0CA-BDA3-430D-8987-6EE0770FC8DE}"/>
               </a:ext>
             </a:extLst>
           </p:cNvPr>
@@ -13729,7 +13779,7 @@
           <p:cNvPr id="4" name="テキスト ボックス 3">
             <a:extLst>
               <a:ext uri="{FF2B5EF4-FFF2-40B4-BE49-F238E27FC236}">
-                <a16:creationId xmlns:a16="http://schemas.microsoft.com/office/drawing/2014/main" id="{2CD2EEFB-562E-6E0B-464D-9F26773BF23B}"/>
+                <a16:creationId xmlns:a16="http://schemas.microsoft.com/office/drawing/2014/main" id="{861074AD-B08E-2C09-7E4D-774D0A9DE4BC}"/>
               </a:ext>
             </a:extLst>
           </p:cNvPr>
@@ -13782,7 +13832,7 @@
           <p:cNvPr id="5" name="テキスト ボックス 4">
             <a:extLst>
               <a:ext uri="{FF2B5EF4-FFF2-40B4-BE49-F238E27FC236}">
-                <a16:creationId xmlns:a16="http://schemas.microsoft.com/office/drawing/2014/main" id="{509A0CB8-66F6-519C-1B98-C1AA72FF4B4E}"/>
+                <a16:creationId xmlns:a16="http://schemas.microsoft.com/office/drawing/2014/main" id="{4619F191-2E8F-5BD3-55EE-BB4D475371E5}"/>
               </a:ext>
             </a:extLst>
           </p:cNvPr>
@@ -13848,7 +13898,7 @@
           <p:cNvPr id="6" name="正方形/長方形 5">
             <a:extLst>
               <a:ext uri="{FF2B5EF4-FFF2-40B4-BE49-F238E27FC236}">
-                <a16:creationId xmlns:a16="http://schemas.microsoft.com/office/drawing/2014/main" id="{82A2E908-5ADF-526C-2F02-0073F5069F0E}"/>
+                <a16:creationId xmlns:a16="http://schemas.microsoft.com/office/drawing/2014/main" id="{CDA7D9AB-A4F1-156A-B86B-FBCC710E3374}"/>
               </a:ext>
             </a:extLst>
           </p:cNvPr>
@@ -13916,7 +13966,7 @@
           <p:cNvPr id="7" name="テキスト ボックス 6">
             <a:extLst>
               <a:ext uri="{FF2B5EF4-FFF2-40B4-BE49-F238E27FC236}">
-                <a16:creationId xmlns:a16="http://schemas.microsoft.com/office/drawing/2014/main" id="{FB351FB3-3B43-F019-38F1-83EC05F9CFFC}"/>
+                <a16:creationId xmlns:a16="http://schemas.microsoft.com/office/drawing/2014/main" id="{8C8D2EDE-82B8-1388-7702-5B8AFB7B0AF2}"/>
               </a:ext>
             </a:extLst>
           </p:cNvPr>
@@ -13962,7 +14012,7 @@
           <p:cNvPr id="8" name="テキスト ボックス 7">
             <a:extLst>
               <a:ext uri="{FF2B5EF4-FFF2-40B4-BE49-F238E27FC236}">
-                <a16:creationId xmlns:a16="http://schemas.microsoft.com/office/drawing/2014/main" id="{1F8076D2-9095-CC59-0744-429DD40BA6FC}"/>
+                <a16:creationId xmlns:a16="http://schemas.microsoft.com/office/drawing/2014/main" id="{7643B726-8CB6-AE2B-8C94-7D3A1C2CCF71}"/>
               </a:ext>
             </a:extLst>
           </p:cNvPr>
@@ -14015,7 +14065,7 @@
           <p:cNvPr id="9" name="四角形: 角を丸くする 8">
             <a:extLst>
               <a:ext uri="{FF2B5EF4-FFF2-40B4-BE49-F238E27FC236}">
-                <a16:creationId xmlns:a16="http://schemas.microsoft.com/office/drawing/2014/main" id="{FCF0925C-C8B5-BBDB-4F86-49AACC2C2302}"/>
+                <a16:creationId xmlns:a16="http://schemas.microsoft.com/office/drawing/2014/main" id="{D3F236F3-886A-727A-0674-65B29684991C}"/>
               </a:ext>
             </a:extLst>
           </p:cNvPr>
@@ -14085,7 +14135,7 @@
           <p:cNvPr id="10" name="楕円 9">
             <a:extLst>
               <a:ext uri="{FF2B5EF4-FFF2-40B4-BE49-F238E27FC236}">
-                <a16:creationId xmlns:a16="http://schemas.microsoft.com/office/drawing/2014/main" id="{6823B9DC-9AB3-8068-6FB8-877CB785170D}"/>
+                <a16:creationId xmlns:a16="http://schemas.microsoft.com/office/drawing/2014/main" id="{BAF74322-259F-046F-FEFC-1BA6F7F117FE}"/>
               </a:ext>
             </a:extLst>
           </p:cNvPr>
@@ -14153,7 +14203,7 @@
           <p:cNvPr id="11" name="テキスト ボックス 10">
             <a:extLst>
               <a:ext uri="{FF2B5EF4-FFF2-40B4-BE49-F238E27FC236}">
-                <a16:creationId xmlns:a16="http://schemas.microsoft.com/office/drawing/2014/main" id="{9BF0E47C-3D97-98C3-155C-AC7842527D0C}"/>
+                <a16:creationId xmlns:a16="http://schemas.microsoft.com/office/drawing/2014/main" id="{7457F472-F0EC-E9DF-A72F-4E97396E2B4A}"/>
               </a:ext>
             </a:extLst>
           </p:cNvPr>
@@ -14206,7 +14256,7 @@
           <p:cNvPr id="12" name="テキスト ボックス 11">
             <a:extLst>
               <a:ext uri="{FF2B5EF4-FFF2-40B4-BE49-F238E27FC236}">
-                <a16:creationId xmlns:a16="http://schemas.microsoft.com/office/drawing/2014/main" id="{3A1BED1B-FB84-8C72-35ED-E7724FA9BC66}"/>
+                <a16:creationId xmlns:a16="http://schemas.microsoft.com/office/drawing/2014/main" id="{C1C93CC0-17DF-B09B-1A2B-B9EDE271E545}"/>
               </a:ext>
             </a:extLst>
           </p:cNvPr>
@@ -14252,7 +14302,7 @@
           <p:cNvPr id="13" name="テキスト ボックス 12">
             <a:extLst>
               <a:ext uri="{FF2B5EF4-FFF2-40B4-BE49-F238E27FC236}">
-                <a16:creationId xmlns:a16="http://schemas.microsoft.com/office/drawing/2014/main" id="{1D688BA6-250C-1296-DA95-F456B73F7482}"/>
+                <a16:creationId xmlns:a16="http://schemas.microsoft.com/office/drawing/2014/main" id="{47EC126D-0549-9FD7-749A-0EEEDA286DBB}"/>
               </a:ext>
             </a:extLst>
           </p:cNvPr>
@@ -14298,7 +14348,7 @@
           <p:cNvPr id="14" name="四角形: 角を丸くする 13">
             <a:extLst>
               <a:ext uri="{FF2B5EF4-FFF2-40B4-BE49-F238E27FC236}">
-                <a16:creationId xmlns:a16="http://schemas.microsoft.com/office/drawing/2014/main" id="{CE05D059-10D7-9181-226F-6CB8B7F37F92}"/>
+                <a16:creationId xmlns:a16="http://schemas.microsoft.com/office/drawing/2014/main" id="{5064E370-30E3-BC52-7F29-1881A67A72CA}"/>
               </a:ext>
             </a:extLst>
           </p:cNvPr>
@@ -14368,7 +14418,7 @@
           <p:cNvPr id="15" name="楕円 14">
             <a:extLst>
               <a:ext uri="{FF2B5EF4-FFF2-40B4-BE49-F238E27FC236}">
-                <a16:creationId xmlns:a16="http://schemas.microsoft.com/office/drawing/2014/main" id="{0F0E9C3F-CCD9-51E5-BFFB-AD75086AA57C}"/>
+                <a16:creationId xmlns:a16="http://schemas.microsoft.com/office/drawing/2014/main" id="{180F6E2F-6E5D-C12C-27FD-94F02A9CB48D}"/>
               </a:ext>
             </a:extLst>
           </p:cNvPr>
@@ -14436,7 +14486,7 @@
           <p:cNvPr id="16" name="テキスト ボックス 15">
             <a:extLst>
               <a:ext uri="{FF2B5EF4-FFF2-40B4-BE49-F238E27FC236}">
-                <a16:creationId xmlns:a16="http://schemas.microsoft.com/office/drawing/2014/main" id="{3037F71F-3A65-4576-1745-5E3F0CAB3D61}"/>
+                <a16:creationId xmlns:a16="http://schemas.microsoft.com/office/drawing/2014/main" id="{D7657FDF-49F0-4CD1-C0FC-5D01B4D5AF46}"/>
               </a:ext>
             </a:extLst>
           </p:cNvPr>
@@ -14489,7 +14539,7 @@
           <p:cNvPr id="17" name="テキスト ボックス 16">
             <a:extLst>
               <a:ext uri="{FF2B5EF4-FFF2-40B4-BE49-F238E27FC236}">
-                <a16:creationId xmlns:a16="http://schemas.microsoft.com/office/drawing/2014/main" id="{D5B842CC-41FD-CD5F-969F-45361C725D2B}"/>
+                <a16:creationId xmlns:a16="http://schemas.microsoft.com/office/drawing/2014/main" id="{24C94A25-F331-2062-68A1-C5EC4F51908C}"/>
               </a:ext>
             </a:extLst>
           </p:cNvPr>
@@ -14535,7 +14585,7 @@
           <p:cNvPr id="18" name="テキスト ボックス 17">
             <a:extLst>
               <a:ext uri="{FF2B5EF4-FFF2-40B4-BE49-F238E27FC236}">
-                <a16:creationId xmlns:a16="http://schemas.microsoft.com/office/drawing/2014/main" id="{8A5E5359-3D90-6969-23D6-D68CFEDEAF1F}"/>
+                <a16:creationId xmlns:a16="http://schemas.microsoft.com/office/drawing/2014/main" id="{39BAE735-0942-DB14-2C7B-696207EBD6D3}"/>
               </a:ext>
             </a:extLst>
           </p:cNvPr>
@@ -14581,7 +14631,7 @@
           <p:cNvPr id="19" name="四角形: 角を丸くする 18">
             <a:extLst>
               <a:ext uri="{FF2B5EF4-FFF2-40B4-BE49-F238E27FC236}">
-                <a16:creationId xmlns:a16="http://schemas.microsoft.com/office/drawing/2014/main" id="{12AE1FFC-2B50-C8DE-7EE2-80D988759885}"/>
+                <a16:creationId xmlns:a16="http://schemas.microsoft.com/office/drawing/2014/main" id="{B75647EB-29D1-0857-76D5-5D58791A8B8A}"/>
               </a:ext>
             </a:extLst>
           </p:cNvPr>
@@ -14651,7 +14701,7 @@
           <p:cNvPr id="20" name="楕円 19">
             <a:extLst>
               <a:ext uri="{FF2B5EF4-FFF2-40B4-BE49-F238E27FC236}">
-                <a16:creationId xmlns:a16="http://schemas.microsoft.com/office/drawing/2014/main" id="{D2CEE5A9-601D-7114-7154-36B580118737}"/>
+                <a16:creationId xmlns:a16="http://schemas.microsoft.com/office/drawing/2014/main" id="{8B7D0F25-A539-545F-9C99-1808F076154C}"/>
               </a:ext>
             </a:extLst>
           </p:cNvPr>
@@ -14719,7 +14769,7 @@
           <p:cNvPr id="21" name="テキスト ボックス 20">
             <a:extLst>
               <a:ext uri="{FF2B5EF4-FFF2-40B4-BE49-F238E27FC236}">
-                <a16:creationId xmlns:a16="http://schemas.microsoft.com/office/drawing/2014/main" id="{EFE48E74-C8A0-CED7-C720-87C3280ABFEA}"/>
+                <a16:creationId xmlns:a16="http://schemas.microsoft.com/office/drawing/2014/main" id="{71CBCFDF-7276-5F53-FF96-00E7E646EE98}"/>
               </a:ext>
             </a:extLst>
           </p:cNvPr>
@@ -14772,7 +14822,7 @@
           <p:cNvPr id="22" name="テキスト ボックス 21">
             <a:extLst>
               <a:ext uri="{FF2B5EF4-FFF2-40B4-BE49-F238E27FC236}">
-                <a16:creationId xmlns:a16="http://schemas.microsoft.com/office/drawing/2014/main" id="{6CA8C61F-877B-9826-CABE-9B8E96FD4D50}"/>
+                <a16:creationId xmlns:a16="http://schemas.microsoft.com/office/drawing/2014/main" id="{F03DF718-488C-D574-015B-6579D145D18E}"/>
               </a:ext>
             </a:extLst>
           </p:cNvPr>
@@ -14818,7 +14868,7 @@
           <p:cNvPr id="23" name="テキスト ボックス 22">
             <a:extLst>
               <a:ext uri="{FF2B5EF4-FFF2-40B4-BE49-F238E27FC236}">
-                <a16:creationId xmlns:a16="http://schemas.microsoft.com/office/drawing/2014/main" id="{11377E4C-5B53-F91D-1E60-392F0146EEDD}"/>
+                <a16:creationId xmlns:a16="http://schemas.microsoft.com/office/drawing/2014/main" id="{52182C76-0FB6-A49C-DB03-DA35C3B14273}"/>
               </a:ext>
             </a:extLst>
           </p:cNvPr>
@@ -14904,7 +14954,7 @@
                 <a:latin typeface="Yu Gothic UI" panose="020B0500000000000000" pitchFamily="50" charset="-128"/>
                 <a:ea typeface="Yu Gothic UI" panose="020B0500000000000000" pitchFamily="50" charset="-128"/>
               </a:rPr>
-              <a:t>を同時に押してください。キオスク表示の画面がアクティブな状態で試すのがポイントです。</a:t>
+              <a:t>を同時に押してください。コンテンツ表示モードの画面がアクティブな状態で試すのがポイントです。</a:t>
             </a:r>
           </a:p>
         </p:txBody>
@@ -14912,7 +14962,7 @@
     </p:spTree>
     <p:extLst>
       <p:ext uri="{BB962C8B-B14F-4D97-AF65-F5344CB8AC3E}">
-        <p14:creationId xmlns:p14="http://schemas.microsoft.com/office/powerpoint/2010/main" val="258451369"/>
+        <p14:creationId xmlns:p14="http://schemas.microsoft.com/office/powerpoint/2010/main" val="3166670533"/>
       </p:ext>
     </p:extLst>
   </p:cSld>
@@ -14944,7 +14994,7 @@
           <p:cNvPr id="2" name="正方形/長方形 1">
             <a:extLst>
               <a:ext uri="{FF2B5EF4-FFF2-40B4-BE49-F238E27FC236}">
-                <a16:creationId xmlns:a16="http://schemas.microsoft.com/office/drawing/2014/main" id="{46E80978-4C8D-A91C-B6FA-3C98FE1C4586}"/>
+                <a16:creationId xmlns:a16="http://schemas.microsoft.com/office/drawing/2014/main" id="{F0F07B85-BFE3-394A-ECD6-74E6EC9C28DD}"/>
               </a:ext>
             </a:extLst>
           </p:cNvPr>
@@ -15012,7 +15062,7 @@
           <p:cNvPr id="3" name="正方形/長方形 2">
             <a:extLst>
               <a:ext uri="{FF2B5EF4-FFF2-40B4-BE49-F238E27FC236}">
-                <a16:creationId xmlns:a16="http://schemas.microsoft.com/office/drawing/2014/main" id="{223F85D4-4F01-25A3-E2A1-FFE99F054DDB}"/>
+                <a16:creationId xmlns:a16="http://schemas.microsoft.com/office/drawing/2014/main" id="{B51EAE1C-A484-0619-21A8-3941649AE652}"/>
               </a:ext>
             </a:extLst>
           </p:cNvPr>
@@ -15080,7 +15130,7 @@
           <p:cNvPr id="4" name="テキスト ボックス 3">
             <a:extLst>
               <a:ext uri="{FF2B5EF4-FFF2-40B4-BE49-F238E27FC236}">
-                <a16:creationId xmlns:a16="http://schemas.microsoft.com/office/drawing/2014/main" id="{24E541B1-6FC0-241B-2338-9F1398A2D962}"/>
+                <a16:creationId xmlns:a16="http://schemas.microsoft.com/office/drawing/2014/main" id="{5E6E3D2A-6976-9D99-01B5-CB7E3701889D}"/>
               </a:ext>
             </a:extLst>
           </p:cNvPr>
@@ -15133,7 +15183,7 @@
           <p:cNvPr id="5" name="テキスト ボックス 4">
             <a:extLst>
               <a:ext uri="{FF2B5EF4-FFF2-40B4-BE49-F238E27FC236}">
-                <a16:creationId xmlns:a16="http://schemas.microsoft.com/office/drawing/2014/main" id="{DC6F961E-CE86-9B5E-12B0-E53ADFEE3DF8}"/>
+                <a16:creationId xmlns:a16="http://schemas.microsoft.com/office/drawing/2014/main" id="{18AB55AE-4CE6-C317-196E-CE723108B39D}"/>
               </a:ext>
             </a:extLst>
           </p:cNvPr>
@@ -15199,7 +15249,7 @@
           <p:cNvPr id="6" name="正方形/長方形 5">
             <a:extLst>
               <a:ext uri="{FF2B5EF4-FFF2-40B4-BE49-F238E27FC236}">
-                <a16:creationId xmlns:a16="http://schemas.microsoft.com/office/drawing/2014/main" id="{9098A252-965B-0E12-34D7-D60430AD7FA4}"/>
+                <a16:creationId xmlns:a16="http://schemas.microsoft.com/office/drawing/2014/main" id="{ACFF9272-CFA5-326C-815B-679A075C217E}"/>
               </a:ext>
             </a:extLst>
           </p:cNvPr>
@@ -15267,7 +15317,7 @@
           <p:cNvPr id="7" name="テキスト ボックス 6">
             <a:extLst>
               <a:ext uri="{FF2B5EF4-FFF2-40B4-BE49-F238E27FC236}">
-                <a16:creationId xmlns:a16="http://schemas.microsoft.com/office/drawing/2014/main" id="{985B18FC-57C1-054F-9E73-0F4392F5E35D}"/>
+                <a16:creationId xmlns:a16="http://schemas.microsoft.com/office/drawing/2014/main" id="{3CE164E6-0375-1EAC-52E0-48EE5436026B}"/>
               </a:ext>
             </a:extLst>
           </p:cNvPr>
@@ -15313,7 +15363,7 @@
           <p:cNvPr id="8" name="テキスト ボックス 7">
             <a:extLst>
               <a:ext uri="{FF2B5EF4-FFF2-40B4-BE49-F238E27FC236}">
-                <a16:creationId xmlns:a16="http://schemas.microsoft.com/office/drawing/2014/main" id="{2D5B95AD-0E9B-7B17-72AB-F529F1F82023}"/>
+                <a16:creationId xmlns:a16="http://schemas.microsoft.com/office/drawing/2014/main" id="{9859D0C7-DC39-D7E4-D327-068C3CCF5EDB}"/>
               </a:ext>
             </a:extLst>
           </p:cNvPr>
@@ -15366,7 +15416,7 @@
           <p:cNvPr id="9" name="四角形: 角を丸くする 8">
             <a:extLst>
               <a:ext uri="{FF2B5EF4-FFF2-40B4-BE49-F238E27FC236}">
-                <a16:creationId xmlns:a16="http://schemas.microsoft.com/office/drawing/2014/main" id="{17BFDF8E-0DAC-95DF-44AA-FFDB48DD8F00}"/>
+                <a16:creationId xmlns:a16="http://schemas.microsoft.com/office/drawing/2014/main" id="{7C7F4CB7-8A90-13BE-F025-AFAA0F424BD0}"/>
               </a:ext>
             </a:extLst>
           </p:cNvPr>
@@ -15436,7 +15486,7 @@
           <p:cNvPr id="10" name="楕円 9">
             <a:extLst>
               <a:ext uri="{FF2B5EF4-FFF2-40B4-BE49-F238E27FC236}">
-                <a16:creationId xmlns:a16="http://schemas.microsoft.com/office/drawing/2014/main" id="{0D1D4DE4-928D-4E90-0B92-C6BF98E67113}"/>
+                <a16:creationId xmlns:a16="http://schemas.microsoft.com/office/drawing/2014/main" id="{A8F679F2-9C32-EFCA-2205-49AA9407898E}"/>
               </a:ext>
             </a:extLst>
           </p:cNvPr>
@@ -15504,7 +15554,7 @@
           <p:cNvPr id="11" name="テキスト ボックス 10">
             <a:extLst>
               <a:ext uri="{FF2B5EF4-FFF2-40B4-BE49-F238E27FC236}">
-                <a16:creationId xmlns:a16="http://schemas.microsoft.com/office/drawing/2014/main" id="{CEEEBEC7-1FAE-3A59-D8CC-F245657A2F0A}"/>
+                <a16:creationId xmlns:a16="http://schemas.microsoft.com/office/drawing/2014/main" id="{8242165C-4AD0-5162-D30D-FAA0D538A0B4}"/>
               </a:ext>
             </a:extLst>
           </p:cNvPr>
@@ -15557,7 +15607,7 @@
           <p:cNvPr id="12" name="テキスト ボックス 11">
             <a:extLst>
               <a:ext uri="{FF2B5EF4-FFF2-40B4-BE49-F238E27FC236}">
-                <a16:creationId xmlns:a16="http://schemas.microsoft.com/office/drawing/2014/main" id="{083A6C9F-DA7C-9483-FCB3-D42FC04543D4}"/>
+                <a16:creationId xmlns:a16="http://schemas.microsoft.com/office/drawing/2014/main" id="{3B6B49F6-1CB2-9925-D22F-012253CB3418}"/>
               </a:ext>
             </a:extLst>
           </p:cNvPr>
@@ -15603,7 +15653,7 @@
           <p:cNvPr id="13" name="テキスト ボックス 12">
             <a:extLst>
               <a:ext uri="{FF2B5EF4-FFF2-40B4-BE49-F238E27FC236}">
-                <a16:creationId xmlns:a16="http://schemas.microsoft.com/office/drawing/2014/main" id="{4E488C4C-2C82-5B0C-5EA4-F2BB883CAD8E}"/>
+                <a16:creationId xmlns:a16="http://schemas.microsoft.com/office/drawing/2014/main" id="{CAC70077-7E49-73FD-F4EA-04CA08E4B810}"/>
               </a:ext>
             </a:extLst>
           </p:cNvPr>
@@ -15649,7 +15699,7 @@
           <p:cNvPr id="14" name="四角形: 角を丸くする 13">
             <a:extLst>
               <a:ext uri="{FF2B5EF4-FFF2-40B4-BE49-F238E27FC236}">
-                <a16:creationId xmlns:a16="http://schemas.microsoft.com/office/drawing/2014/main" id="{6768BDCD-BFF5-5144-E6F0-7AA8482A59F3}"/>
+                <a16:creationId xmlns:a16="http://schemas.microsoft.com/office/drawing/2014/main" id="{3850245D-EC53-2211-A0BF-DC56EF5CD590}"/>
               </a:ext>
             </a:extLst>
           </p:cNvPr>
@@ -15719,7 +15769,7 @@
           <p:cNvPr id="15" name="楕円 14">
             <a:extLst>
               <a:ext uri="{FF2B5EF4-FFF2-40B4-BE49-F238E27FC236}">
-                <a16:creationId xmlns:a16="http://schemas.microsoft.com/office/drawing/2014/main" id="{6B7B74B6-B93B-BF22-C483-15B9661D956E}"/>
+                <a16:creationId xmlns:a16="http://schemas.microsoft.com/office/drawing/2014/main" id="{8127120D-20DB-6842-FF5C-EE6E998F767E}"/>
               </a:ext>
             </a:extLst>
           </p:cNvPr>
@@ -15787,7 +15837,7 @@
           <p:cNvPr id="16" name="テキスト ボックス 15">
             <a:extLst>
               <a:ext uri="{FF2B5EF4-FFF2-40B4-BE49-F238E27FC236}">
-                <a16:creationId xmlns:a16="http://schemas.microsoft.com/office/drawing/2014/main" id="{5E4282BF-FBBB-D922-D3CE-C32E280D2EFB}"/>
+                <a16:creationId xmlns:a16="http://schemas.microsoft.com/office/drawing/2014/main" id="{E17540E3-4FDC-B7E5-49AB-37F279953C7A}"/>
               </a:ext>
             </a:extLst>
           </p:cNvPr>
@@ -15840,7 +15890,7 @@
           <p:cNvPr id="17" name="テキスト ボックス 16">
             <a:extLst>
               <a:ext uri="{FF2B5EF4-FFF2-40B4-BE49-F238E27FC236}">
-                <a16:creationId xmlns:a16="http://schemas.microsoft.com/office/drawing/2014/main" id="{F66152B7-F6D0-B273-1023-C7C938BAB8EE}"/>
+                <a16:creationId xmlns:a16="http://schemas.microsoft.com/office/drawing/2014/main" id="{2FCE566D-F2F1-52A7-4E1C-5759E45D87A2}"/>
               </a:ext>
             </a:extLst>
           </p:cNvPr>
@@ -15886,7 +15936,7 @@
           <p:cNvPr id="18" name="テキスト ボックス 17">
             <a:extLst>
               <a:ext uri="{FF2B5EF4-FFF2-40B4-BE49-F238E27FC236}">
-                <a16:creationId xmlns:a16="http://schemas.microsoft.com/office/drawing/2014/main" id="{CB0CF7CF-0B3C-B67F-7AA2-F538D3A9A5FA}"/>
+                <a16:creationId xmlns:a16="http://schemas.microsoft.com/office/drawing/2014/main" id="{3C5A7791-70A2-24BD-F223-0F2E6BA22513}"/>
               </a:ext>
             </a:extLst>
           </p:cNvPr>
@@ -15992,7 +16042,7 @@
           <p:cNvPr id="19" name="四角形: 角を丸くする 18">
             <a:extLst>
               <a:ext uri="{FF2B5EF4-FFF2-40B4-BE49-F238E27FC236}">
-                <a16:creationId xmlns:a16="http://schemas.microsoft.com/office/drawing/2014/main" id="{6B990316-08F8-2010-802F-50C54C6720DD}"/>
+                <a16:creationId xmlns:a16="http://schemas.microsoft.com/office/drawing/2014/main" id="{0F272100-52AD-2EA4-8D41-9253C0B4DA05}"/>
               </a:ext>
             </a:extLst>
           </p:cNvPr>
@@ -16062,7 +16112,7 @@
           <p:cNvPr id="20" name="楕円 19">
             <a:extLst>
               <a:ext uri="{FF2B5EF4-FFF2-40B4-BE49-F238E27FC236}">
-                <a16:creationId xmlns:a16="http://schemas.microsoft.com/office/drawing/2014/main" id="{5CAA7422-4AC2-E4BE-7C75-40CCB3E8A1A3}"/>
+                <a16:creationId xmlns:a16="http://schemas.microsoft.com/office/drawing/2014/main" id="{2E59682D-0C33-50B8-ADD2-BD7E9D294152}"/>
               </a:ext>
             </a:extLst>
           </p:cNvPr>
@@ -16130,7 +16180,7 @@
           <p:cNvPr id="21" name="テキスト ボックス 20">
             <a:extLst>
               <a:ext uri="{FF2B5EF4-FFF2-40B4-BE49-F238E27FC236}">
-                <a16:creationId xmlns:a16="http://schemas.microsoft.com/office/drawing/2014/main" id="{5B627BF7-CFBF-7508-0395-0F69622EB3C7}"/>
+                <a16:creationId xmlns:a16="http://schemas.microsoft.com/office/drawing/2014/main" id="{91D961FB-7B5A-E146-CD7C-D3902156FD42}"/>
               </a:ext>
             </a:extLst>
           </p:cNvPr>
@@ -16183,7 +16233,7 @@
           <p:cNvPr id="22" name="テキスト ボックス 21">
             <a:extLst>
               <a:ext uri="{FF2B5EF4-FFF2-40B4-BE49-F238E27FC236}">
-                <a16:creationId xmlns:a16="http://schemas.microsoft.com/office/drawing/2014/main" id="{C25BC35D-4E59-3F27-3432-A273E75FDBAD}"/>
+                <a16:creationId xmlns:a16="http://schemas.microsoft.com/office/drawing/2014/main" id="{70425869-FB4B-CACD-D7CB-652D4EE96DEC}"/>
               </a:ext>
             </a:extLst>
           </p:cNvPr>
@@ -16249,7 +16299,7 @@
           <p:cNvPr id="23" name="テキスト ボックス 22">
             <a:extLst>
               <a:ext uri="{FF2B5EF4-FFF2-40B4-BE49-F238E27FC236}">
-                <a16:creationId xmlns:a16="http://schemas.microsoft.com/office/drawing/2014/main" id="{86C163FA-90B8-3AD6-1B29-A78F4EC148D2}"/>
+                <a16:creationId xmlns:a16="http://schemas.microsoft.com/office/drawing/2014/main" id="{73CB4720-05FC-F556-4C0B-E5C732B69ABC}"/>
               </a:ext>
             </a:extLst>
           </p:cNvPr>
@@ -16313,7 +16363,7 @@
     </p:spTree>
     <p:extLst>
       <p:ext uri="{BB962C8B-B14F-4D97-AF65-F5344CB8AC3E}">
-        <p14:creationId xmlns:p14="http://schemas.microsoft.com/office/powerpoint/2010/main" val="273960391"/>
+        <p14:creationId xmlns:p14="http://schemas.microsoft.com/office/powerpoint/2010/main" val="374690776"/>
       </p:ext>
     </p:extLst>
   </p:cSld>
@@ -16345,7 +16395,7 @@
           <p:cNvPr id="2" name="正方形/長方形 1">
             <a:extLst>
               <a:ext uri="{FF2B5EF4-FFF2-40B4-BE49-F238E27FC236}">
-                <a16:creationId xmlns:a16="http://schemas.microsoft.com/office/drawing/2014/main" id="{8BD42442-8F25-93C4-C446-B45EE4874DD3}"/>
+                <a16:creationId xmlns:a16="http://schemas.microsoft.com/office/drawing/2014/main" id="{4E4F2D30-2B1D-C969-F2C8-B7FFAD39BFEC}"/>
               </a:ext>
             </a:extLst>
           </p:cNvPr>
@@ -16413,7 +16463,7 @@
           <p:cNvPr id="3" name="正方形/長方形 2">
             <a:extLst>
               <a:ext uri="{FF2B5EF4-FFF2-40B4-BE49-F238E27FC236}">
-                <a16:creationId xmlns:a16="http://schemas.microsoft.com/office/drawing/2014/main" id="{56FC5704-910E-3852-92CE-92D493F1CCD8}"/>
+                <a16:creationId xmlns:a16="http://schemas.microsoft.com/office/drawing/2014/main" id="{AC9CD162-19BA-4A00-525E-3A9958B28DE2}"/>
               </a:ext>
             </a:extLst>
           </p:cNvPr>
@@ -16481,7 +16531,7 @@
           <p:cNvPr id="4" name="テキスト ボックス 3">
             <a:extLst>
               <a:ext uri="{FF2B5EF4-FFF2-40B4-BE49-F238E27FC236}">
-                <a16:creationId xmlns:a16="http://schemas.microsoft.com/office/drawing/2014/main" id="{8318A030-4230-A91A-C5A1-C39D5B7BD15E}"/>
+                <a16:creationId xmlns:a16="http://schemas.microsoft.com/office/drawing/2014/main" id="{341AF2EE-0E8B-DD52-D7E7-E38E3FFC3065}"/>
               </a:ext>
             </a:extLst>
           </p:cNvPr>
@@ -16534,7 +16584,7 @@
           <p:cNvPr id="5" name="テキスト ボックス 4">
             <a:extLst>
               <a:ext uri="{FF2B5EF4-FFF2-40B4-BE49-F238E27FC236}">
-                <a16:creationId xmlns:a16="http://schemas.microsoft.com/office/drawing/2014/main" id="{172833A0-8CBD-1AAA-6181-B9028FE6B720}"/>
+                <a16:creationId xmlns:a16="http://schemas.microsoft.com/office/drawing/2014/main" id="{D3FEC893-A970-2FCC-204C-71A6C379866B}"/>
               </a:ext>
             </a:extLst>
           </p:cNvPr>
@@ -16600,7 +16650,7 @@
           <p:cNvPr id="6" name="正方形/長方形 5">
             <a:extLst>
               <a:ext uri="{FF2B5EF4-FFF2-40B4-BE49-F238E27FC236}">
-                <a16:creationId xmlns:a16="http://schemas.microsoft.com/office/drawing/2014/main" id="{8D6B6BEE-12C5-D6B6-F90E-88C3AF7B36CA}"/>
+                <a16:creationId xmlns:a16="http://schemas.microsoft.com/office/drawing/2014/main" id="{24C62784-4389-381A-2776-C07F242D33F2}"/>
               </a:ext>
             </a:extLst>
           </p:cNvPr>
@@ -16668,7 +16718,7 @@
           <p:cNvPr id="7" name="テキスト ボックス 6">
             <a:extLst>
               <a:ext uri="{FF2B5EF4-FFF2-40B4-BE49-F238E27FC236}">
-                <a16:creationId xmlns:a16="http://schemas.microsoft.com/office/drawing/2014/main" id="{B86A0A23-B03C-2178-F377-D7BE98EE1276}"/>
+                <a16:creationId xmlns:a16="http://schemas.microsoft.com/office/drawing/2014/main" id="{31745DEE-595F-3358-1A9F-CDABF2A8D33D}"/>
               </a:ext>
             </a:extLst>
           </p:cNvPr>
@@ -16714,7 +16764,7 @@
           <p:cNvPr id="8" name="テキスト ボックス 7">
             <a:extLst>
               <a:ext uri="{FF2B5EF4-FFF2-40B4-BE49-F238E27FC236}">
-                <a16:creationId xmlns:a16="http://schemas.microsoft.com/office/drawing/2014/main" id="{BD1C4708-485C-31F8-A790-B3CEABE7AED1}"/>
+                <a16:creationId xmlns:a16="http://schemas.microsoft.com/office/drawing/2014/main" id="{538BF65B-A738-D39C-C376-6A3B4F6CD452}"/>
               </a:ext>
             </a:extLst>
           </p:cNvPr>
@@ -16767,7 +16817,7 @@
           <p:cNvPr id="9" name="四角形: 角を丸くする 8">
             <a:extLst>
               <a:ext uri="{FF2B5EF4-FFF2-40B4-BE49-F238E27FC236}">
-                <a16:creationId xmlns:a16="http://schemas.microsoft.com/office/drawing/2014/main" id="{39D0F87B-68A7-1291-F57B-B20167DD4F19}"/>
+                <a16:creationId xmlns:a16="http://schemas.microsoft.com/office/drawing/2014/main" id="{E64D599F-9886-7CDF-3B4A-536CD2F952AF}"/>
               </a:ext>
             </a:extLst>
           </p:cNvPr>
@@ -16837,7 +16887,7 @@
           <p:cNvPr id="10" name="楕円 9">
             <a:extLst>
               <a:ext uri="{FF2B5EF4-FFF2-40B4-BE49-F238E27FC236}">
-                <a16:creationId xmlns:a16="http://schemas.microsoft.com/office/drawing/2014/main" id="{C3E83695-C8FC-0F03-2F37-467DDDCADC32}"/>
+                <a16:creationId xmlns:a16="http://schemas.microsoft.com/office/drawing/2014/main" id="{5B8EE4C8-499A-9FBF-9D47-50185F193611}"/>
               </a:ext>
             </a:extLst>
           </p:cNvPr>
@@ -16905,7 +16955,7 @@
           <p:cNvPr id="11" name="テキスト ボックス 10">
             <a:extLst>
               <a:ext uri="{FF2B5EF4-FFF2-40B4-BE49-F238E27FC236}">
-                <a16:creationId xmlns:a16="http://schemas.microsoft.com/office/drawing/2014/main" id="{E35B5F30-7AAE-2AEC-0000-7BE21CADFA2D}"/>
+                <a16:creationId xmlns:a16="http://schemas.microsoft.com/office/drawing/2014/main" id="{8D5DD75A-113A-A335-3CE8-E6BF448E7398}"/>
               </a:ext>
             </a:extLst>
           </p:cNvPr>
@@ -16958,7 +17008,7 @@
           <p:cNvPr id="12" name="テキスト ボックス 11">
             <a:extLst>
               <a:ext uri="{FF2B5EF4-FFF2-40B4-BE49-F238E27FC236}">
-                <a16:creationId xmlns:a16="http://schemas.microsoft.com/office/drawing/2014/main" id="{CDA48E56-CB19-76C7-9F4C-B0B30600361D}"/>
+                <a16:creationId xmlns:a16="http://schemas.microsoft.com/office/drawing/2014/main" id="{AFD034F3-DF0A-C67B-0E91-7BA460033061}"/>
               </a:ext>
             </a:extLst>
           </p:cNvPr>
@@ -17004,7 +17054,7 @@
           <p:cNvPr id="13" name="テキスト ボックス 12">
             <a:extLst>
               <a:ext uri="{FF2B5EF4-FFF2-40B4-BE49-F238E27FC236}">
-                <a16:creationId xmlns:a16="http://schemas.microsoft.com/office/drawing/2014/main" id="{7CAC797F-C747-0148-05A1-FF61097C5493}"/>
+                <a16:creationId xmlns:a16="http://schemas.microsoft.com/office/drawing/2014/main" id="{75B2035A-6D53-40A4-FD8F-71C6364980C5}"/>
               </a:ext>
             </a:extLst>
           </p:cNvPr>
@@ -17105,10 +17155,323 @@
           </a:p>
         </p:txBody>
       </p:sp>
+      <p:sp>
+        <p:nvSpPr>
+          <p:cNvPr id="14" name="四角形: 角を丸くする 13">
+            <a:extLst>
+              <a:ext uri="{FF2B5EF4-FFF2-40B4-BE49-F238E27FC236}">
+                <a16:creationId xmlns:a16="http://schemas.microsoft.com/office/drawing/2014/main" id="{1EAEAA5C-E761-F51E-D98A-4A949D737BCE}"/>
+              </a:ext>
+            </a:extLst>
+          </p:cNvPr>
+          <p:cNvSpPr/>
+          <p:nvPr/>
+        </p:nvSpPr>
+        <p:spPr>
+          <a:xfrm>
+            <a:off x="812800" y="3251200"/>
+            <a:ext cx="10566400" cy="1168400"/>
+          </a:xfrm>
+          <a:prstGeom prst="roundRect">
+            <a:avLst>
+              <a:gd name="adj" fmla="val 16000"/>
+            </a:avLst>
+          </a:prstGeom>
+          <a:solidFill>
+            <a:srgbClr val="F5F7FA"/>
+          </a:solidFill>
+          <a:ln w="19050" cap="flat" cmpd="sng" algn="ctr">
+            <a:noFill/>
+            <a:prstDash val="solid"/>
+            <a:miter lim="800000"/>
+          </a:ln>
+          <a:effectLst/>
+          <a:extLst>
+            <a:ext uri="{91240B29-F687-4F45-9708-019B960494DF}">
+              <a14:hiddenLine xmlns:a14="http://schemas.microsoft.com/office/drawing/2010/main" w="19050" cap="flat" cmpd="sng" algn="ctr">
+                <a:solidFill>
+                  <a:schemeClr val="accent1">
+                    <a:shade val="15000"/>
+                  </a:schemeClr>
+                </a:solidFill>
+                <a:prstDash val="solid"/>
+                <a:miter lim="800000"/>
+              </a14:hiddenLine>
+            </a:ext>
+          </a:extLst>
+        </p:spPr>
+        <p:style>
+          <a:lnRef idx="2">
+            <a:schemeClr val="accent1">
+              <a:shade val="15000"/>
+            </a:schemeClr>
+          </a:lnRef>
+          <a:fillRef idx="1">
+            <a:schemeClr val="accent1"/>
+          </a:fillRef>
+          <a:effectRef idx="0">
+            <a:schemeClr val="accent1"/>
+          </a:effectRef>
+          <a:fontRef idx="minor">
+            <a:schemeClr val="lt1"/>
+          </a:fontRef>
+        </p:style>
+        <p:txBody>
+          <a:bodyPr rtlCol="0" anchor="ctr"/>
+          <a:lstStyle/>
+          <a:p>
+            <a:pPr algn="ctr"/>
+            <a:endParaRPr kumimoji="1" lang="ja-JP" altLang="en-US"/>
+          </a:p>
+        </p:txBody>
+      </p:sp>
+      <p:sp>
+        <p:nvSpPr>
+          <p:cNvPr id="15" name="楕円 14">
+            <a:extLst>
+              <a:ext uri="{FF2B5EF4-FFF2-40B4-BE49-F238E27FC236}">
+                <a16:creationId xmlns:a16="http://schemas.microsoft.com/office/drawing/2014/main" id="{FDA731BE-DDA8-81B9-C3C9-4E002044BA82}"/>
+              </a:ext>
+            </a:extLst>
+          </p:cNvPr>
+          <p:cNvSpPr/>
+          <p:nvPr/>
+        </p:nvSpPr>
+        <p:spPr>
+          <a:xfrm>
+            <a:off x="1092200" y="3505200"/>
+            <a:ext cx="381000" cy="381000"/>
+          </a:xfrm>
+          <a:prstGeom prst="ellipse">
+            <a:avLst/>
+          </a:prstGeom>
+          <a:solidFill>
+            <a:srgbClr val="2563EB"/>
+          </a:solidFill>
+          <a:ln w="19050" cap="flat" cmpd="sng" algn="ctr">
+            <a:noFill/>
+            <a:prstDash val="solid"/>
+            <a:miter lim="800000"/>
+          </a:ln>
+          <a:effectLst/>
+          <a:extLst>
+            <a:ext uri="{91240B29-F687-4F45-9708-019B960494DF}">
+              <a14:hiddenLine xmlns:a14="http://schemas.microsoft.com/office/drawing/2010/main" w="19050" cap="flat" cmpd="sng" algn="ctr">
+                <a:solidFill>
+                  <a:schemeClr val="accent1">
+                    <a:shade val="15000"/>
+                  </a:schemeClr>
+                </a:solidFill>
+                <a:prstDash val="solid"/>
+                <a:miter lim="800000"/>
+              </a14:hiddenLine>
+            </a:ext>
+          </a:extLst>
+        </p:spPr>
+        <p:style>
+          <a:lnRef idx="2">
+            <a:schemeClr val="accent1">
+              <a:shade val="15000"/>
+            </a:schemeClr>
+          </a:lnRef>
+          <a:fillRef idx="1">
+            <a:schemeClr val="accent1"/>
+          </a:fillRef>
+          <a:effectRef idx="0">
+            <a:schemeClr val="accent1"/>
+          </a:effectRef>
+          <a:fontRef idx="minor">
+            <a:schemeClr val="lt1"/>
+          </a:fontRef>
+        </p:style>
+        <p:txBody>
+          <a:bodyPr rtlCol="0" anchor="ctr"/>
+          <a:lstStyle/>
+          <a:p>
+            <a:pPr algn="ctr"/>
+            <a:endParaRPr kumimoji="1" lang="ja-JP" altLang="en-US"/>
+          </a:p>
+        </p:txBody>
+      </p:sp>
+      <p:sp>
+        <p:nvSpPr>
+          <p:cNvPr id="16" name="テキスト ボックス 15">
+            <a:extLst>
+              <a:ext uri="{FF2B5EF4-FFF2-40B4-BE49-F238E27FC236}">
+                <a16:creationId xmlns:a16="http://schemas.microsoft.com/office/drawing/2014/main" id="{CF4A1EDC-B348-941A-E510-63CECBCE5987}"/>
+              </a:ext>
+            </a:extLst>
+          </p:cNvPr>
+          <p:cNvSpPr txBox="1"/>
+          <p:nvPr/>
+        </p:nvSpPr>
+        <p:spPr>
+          <a:xfrm>
+            <a:off x="1092200" y="3505200"/>
+            <a:ext cx="381000" cy="381000"/>
+          </a:xfrm>
+          <a:prstGeom prst="rect">
+            <a:avLst/>
+          </a:prstGeom>
+          <a:noFill/>
+        </p:spPr>
+        <p:txBody>
+          <a:bodyPr vert="horz" wrap="square" lIns="0" tIns="0" rIns="0" bIns="0" rtlCol="0" anchor="ctr">
+            <a:noAutofit/>
+          </a:bodyPr>
+          <a:lstStyle/>
+          <a:p>
+            <a:pPr algn="ctr">
+              <a:lnSpc>
+                <a:spcPct val="130000"/>
+              </a:lnSpc>
+            </a:pPr>
+            <a:r>
+              <a:rPr kumimoji="1" lang="en-US" altLang="ja-JP" sz="1400" b="1">
+                <a:solidFill>
+                  <a:srgbClr val="FFFFFF"/>
+                </a:solidFill>
+                <a:latin typeface="Yu Gothic UI" panose="020B0500000000000000" pitchFamily="50" charset="-128"/>
+                <a:ea typeface="Yu Gothic UI" panose="020B0500000000000000" pitchFamily="50" charset="-128"/>
+              </a:rPr>
+              <a:t>Q</a:t>
+            </a:r>
+            <a:endParaRPr kumimoji="1" lang="ja-JP" altLang="en-US" sz="1400" b="1">
+              <a:solidFill>
+                <a:srgbClr val="FFFFFF"/>
+              </a:solidFill>
+              <a:latin typeface="Yu Gothic UI" panose="020B0500000000000000" pitchFamily="50" charset="-128"/>
+              <a:ea typeface="Yu Gothic UI" panose="020B0500000000000000" pitchFamily="50" charset="-128"/>
+            </a:endParaRPr>
+          </a:p>
+        </p:txBody>
+      </p:sp>
+      <p:sp>
+        <p:nvSpPr>
+          <p:cNvPr id="17" name="テキスト ボックス 16">
+            <a:extLst>
+              <a:ext uri="{FF2B5EF4-FFF2-40B4-BE49-F238E27FC236}">
+                <a16:creationId xmlns:a16="http://schemas.microsoft.com/office/drawing/2014/main" id="{AC6187E9-62F3-C9B4-90F6-99F55055D64F}"/>
+              </a:ext>
+            </a:extLst>
+          </p:cNvPr>
+          <p:cNvSpPr txBox="1"/>
+          <p:nvPr/>
+        </p:nvSpPr>
+        <p:spPr>
+          <a:xfrm>
+            <a:off x="1651000" y="3479800"/>
+            <a:ext cx="9347200" cy="304800"/>
+          </a:xfrm>
+          <a:prstGeom prst="rect">
+            <a:avLst/>
+          </a:prstGeom>
+          <a:noFill/>
+        </p:spPr>
+        <p:txBody>
+          <a:bodyPr vert="horz" wrap="square" lIns="0" tIns="0" rIns="0" bIns="0" rtlCol="0" anchor="t">
+            <a:noAutofit/>
+          </a:bodyPr>
+          <a:lstStyle/>
+          <a:p>
+            <a:pPr>
+              <a:lnSpc>
+                <a:spcPct val="130000"/>
+              </a:lnSpc>
+            </a:pPr>
+            <a:r>
+              <a:rPr kumimoji="1" lang="ja-JP" altLang="en-US" sz="1450" b="1">
+                <a:solidFill>
+                  <a:srgbClr val="1B2430"/>
+                </a:solidFill>
+                <a:latin typeface="Yu Gothic UI" panose="020B0500000000000000" pitchFamily="50" charset="-128"/>
+                <a:ea typeface="Yu Gothic UI" panose="020B0500000000000000" pitchFamily="50" charset="-128"/>
+              </a:rPr>
+              <a:t>アプリを差し替えたらアクセスキーを入れ直す必要がありますか</a:t>
+            </a:r>
+          </a:p>
+        </p:txBody>
+      </p:sp>
+      <p:sp>
+        <p:nvSpPr>
+          <p:cNvPr id="18" name="テキスト ボックス 17">
+            <a:extLst>
+              <a:ext uri="{FF2B5EF4-FFF2-40B4-BE49-F238E27FC236}">
+                <a16:creationId xmlns:a16="http://schemas.microsoft.com/office/drawing/2014/main" id="{F47CAB94-A16C-6388-51B2-DFD4C089A1C4}"/>
+              </a:ext>
+            </a:extLst>
+          </p:cNvPr>
+          <p:cNvSpPr txBox="1"/>
+          <p:nvPr/>
+        </p:nvSpPr>
+        <p:spPr>
+          <a:xfrm>
+            <a:off x="1651000" y="3822700"/>
+            <a:ext cx="9347200" cy="431800"/>
+          </a:xfrm>
+          <a:prstGeom prst="rect">
+            <a:avLst/>
+          </a:prstGeom>
+          <a:noFill/>
+        </p:spPr>
+        <p:txBody>
+          <a:bodyPr vert="horz" wrap="square" lIns="0" tIns="0" rIns="0" bIns="0" rtlCol="0" anchor="t">
+            <a:noAutofit/>
+          </a:bodyPr>
+          <a:lstStyle/>
+          <a:p>
+            <a:pPr>
+              <a:lnSpc>
+                <a:spcPct val="135000"/>
+              </a:lnSpc>
+            </a:pPr>
+            <a:r>
+              <a:rPr kumimoji="1" lang="en-US" altLang="ja-JP" sz="1250">
+                <a:solidFill>
+                  <a:srgbClr val="465263"/>
+                </a:solidFill>
+                <a:latin typeface="Yu Gothic UI" panose="020B0500000000000000" pitchFamily="50" charset="-128"/>
+                <a:ea typeface="Yu Gothic UI" panose="020B0500000000000000" pitchFamily="50" charset="-128"/>
+              </a:rPr>
+              <a:t>settings.json </a:t>
+            </a:r>
+            <a:r>
+              <a:rPr kumimoji="1" lang="ja-JP" altLang="en-US" sz="1250">
+                <a:solidFill>
+                  <a:srgbClr val="465263"/>
+                </a:solidFill>
+                <a:latin typeface="Yu Gothic UI" panose="020B0500000000000000" pitchFamily="50" charset="-128"/>
+                <a:ea typeface="Yu Gothic UI" panose="020B0500000000000000" pitchFamily="50" charset="-128"/>
+              </a:rPr>
+              <a:t>を残して上書きすれば不要です。フォルダごと消すと再入力が必要です。試用開始日は </a:t>
+            </a:r>
+            <a:r>
+              <a:rPr kumimoji="1" lang="en-US" altLang="ja-JP" sz="1250">
+                <a:solidFill>
+                  <a:srgbClr val="465263"/>
+                </a:solidFill>
+                <a:latin typeface="Yu Gothic UI" panose="020B0500000000000000" pitchFamily="50" charset="-128"/>
+                <a:ea typeface="Yu Gothic UI" panose="020B0500000000000000" pitchFamily="50" charset="-128"/>
+              </a:rPr>
+              <a:t>settings.json </a:t>
+            </a:r>
+            <a:r>
+              <a:rPr kumimoji="1" lang="ja-JP" altLang="en-US" sz="1250">
+                <a:solidFill>
+                  <a:srgbClr val="465263"/>
+                </a:solidFill>
+                <a:latin typeface="Yu Gothic UI" panose="020B0500000000000000" pitchFamily="50" charset="-128"/>
+                <a:ea typeface="Yu Gothic UI" panose="020B0500000000000000" pitchFamily="50" charset="-128"/>
+              </a:rPr>
+              <a:t>には無いので、消しても試用期間は延びません。</a:t>
+            </a:r>
+          </a:p>
+        </p:txBody>
+      </p:sp>
     </p:spTree>
     <p:extLst>
       <p:ext uri="{BB962C8B-B14F-4D97-AF65-F5344CB8AC3E}">
-        <p14:creationId xmlns:p14="http://schemas.microsoft.com/office/powerpoint/2010/main" val="3690012680"/>
+        <p14:creationId xmlns:p14="http://schemas.microsoft.com/office/powerpoint/2010/main" val="1305983184"/>
       </p:ext>
     </p:extLst>
   </p:cSld>
@@ -17140,7 +17503,7 @@
           <p:cNvPr id="2" name="正方形/長方形 1">
             <a:extLst>
               <a:ext uri="{FF2B5EF4-FFF2-40B4-BE49-F238E27FC236}">
-                <a16:creationId xmlns:a16="http://schemas.microsoft.com/office/drawing/2014/main" id="{97FE98E4-5B56-7077-3A78-35CFD57B4F2B}"/>
+                <a16:creationId xmlns:a16="http://schemas.microsoft.com/office/drawing/2014/main" id="{558546F7-1325-C42D-11E7-AB5A874C82FC}"/>
               </a:ext>
             </a:extLst>
           </p:cNvPr>
@@ -17208,7 +17571,7 @@
           <p:cNvPr id="3" name="正方形/長方形 2">
             <a:extLst>
               <a:ext uri="{FF2B5EF4-FFF2-40B4-BE49-F238E27FC236}">
-                <a16:creationId xmlns:a16="http://schemas.microsoft.com/office/drawing/2014/main" id="{129A47A6-E413-D27C-C759-FC8467EC7BE0}"/>
+                <a16:creationId xmlns:a16="http://schemas.microsoft.com/office/drawing/2014/main" id="{7BA27CD7-9EDF-D3C4-65A6-10FB503F422B}"/>
               </a:ext>
             </a:extLst>
           </p:cNvPr>
@@ -17276,7 +17639,7 @@
           <p:cNvPr id="4" name="テキスト ボックス 3">
             <a:extLst>
               <a:ext uri="{FF2B5EF4-FFF2-40B4-BE49-F238E27FC236}">
-                <a16:creationId xmlns:a16="http://schemas.microsoft.com/office/drawing/2014/main" id="{D7331F67-7022-E07A-9F4E-71B61FA3C894}"/>
+                <a16:creationId xmlns:a16="http://schemas.microsoft.com/office/drawing/2014/main" id="{3BD9B98A-7B33-F217-60C9-C22BD41985CF}"/>
               </a:ext>
             </a:extLst>
           </p:cNvPr>
@@ -17329,7 +17692,7 @@
           <p:cNvPr id="5" name="テキスト ボックス 4">
             <a:extLst>
               <a:ext uri="{FF2B5EF4-FFF2-40B4-BE49-F238E27FC236}">
-                <a16:creationId xmlns:a16="http://schemas.microsoft.com/office/drawing/2014/main" id="{9BDBE855-3DCA-FEDD-1342-6D50A0296854}"/>
+                <a16:creationId xmlns:a16="http://schemas.microsoft.com/office/drawing/2014/main" id="{D0CB099E-1A89-C12F-60A1-781ED77753D8}"/>
               </a:ext>
             </a:extLst>
           </p:cNvPr>
@@ -17375,7 +17738,7 @@
           <p:cNvPr id="6" name="正方形/長方形 5">
             <a:extLst>
               <a:ext uri="{FF2B5EF4-FFF2-40B4-BE49-F238E27FC236}">
-                <a16:creationId xmlns:a16="http://schemas.microsoft.com/office/drawing/2014/main" id="{8D9567B1-5597-8238-2858-A77F0255F742}"/>
+                <a16:creationId xmlns:a16="http://schemas.microsoft.com/office/drawing/2014/main" id="{0C9BB3FC-6497-02D9-B988-5A27D5FA409F}"/>
               </a:ext>
             </a:extLst>
           </p:cNvPr>
@@ -17443,7 +17806,7 @@
           <p:cNvPr id="7" name="テキスト ボックス 6">
             <a:extLst>
               <a:ext uri="{FF2B5EF4-FFF2-40B4-BE49-F238E27FC236}">
-                <a16:creationId xmlns:a16="http://schemas.microsoft.com/office/drawing/2014/main" id="{6C307F47-2A5B-8384-2496-05950539D731}"/>
+                <a16:creationId xmlns:a16="http://schemas.microsoft.com/office/drawing/2014/main" id="{2529A04A-AB2F-C4A9-3DD7-22791908FEBD}"/>
               </a:ext>
             </a:extLst>
           </p:cNvPr>
@@ -17489,7 +17852,7 @@
           <p:cNvPr id="8" name="テキスト ボックス 7">
             <a:extLst>
               <a:ext uri="{FF2B5EF4-FFF2-40B4-BE49-F238E27FC236}">
-                <a16:creationId xmlns:a16="http://schemas.microsoft.com/office/drawing/2014/main" id="{D8BBB233-F95F-9B1D-5758-82DC92BDC172}"/>
+                <a16:creationId xmlns:a16="http://schemas.microsoft.com/office/drawing/2014/main" id="{6F14F4C6-B080-15D2-8FE9-5CC007AD3287}"/>
               </a:ext>
             </a:extLst>
           </p:cNvPr>
@@ -17542,7 +17905,7 @@
           <p:cNvPr id="9" name="テキスト ボックス 8">
             <a:extLst>
               <a:ext uri="{FF2B5EF4-FFF2-40B4-BE49-F238E27FC236}">
-                <a16:creationId xmlns:a16="http://schemas.microsoft.com/office/drawing/2014/main" id="{275B079E-5BD8-2BCF-80B6-5E30BC6F8B83}"/>
+                <a16:creationId xmlns:a16="http://schemas.microsoft.com/office/drawing/2014/main" id="{C7871D40-2590-5727-0989-9F10CE3CC3B1}"/>
               </a:ext>
             </a:extLst>
           </p:cNvPr>
@@ -17588,7 +17951,7 @@
           <p:cNvPr id="10" name="表 9">
             <a:extLst>
               <a:ext uri="{FF2B5EF4-FFF2-40B4-BE49-F238E27FC236}">
-                <a16:creationId xmlns:a16="http://schemas.microsoft.com/office/drawing/2014/main" id="{8EF1F93A-A6A2-0DCE-1C41-F4F317E1EB88}"/>
+                <a16:creationId xmlns:a16="http://schemas.microsoft.com/office/drawing/2014/main" id="{608476C6-3313-52CA-4D29-295259D79787}"/>
               </a:ext>
             </a:extLst>
           </p:cNvPr>
@@ -17598,7 +17961,7 @@
           <p:nvPr>
             <p:extLst>
               <p:ext uri="{D42A27DB-BD31-4B8C-83A1-F6EECF244321}">
-                <p14:modId xmlns:p14="http://schemas.microsoft.com/office/powerpoint/2010/main" val="1972125221"/>
+                <p14:modId xmlns:p14="http://schemas.microsoft.com/office/powerpoint/2010/main" val="752740235"/>
               </p:ext>
             </p:extLst>
           </p:nvPr>
@@ -17617,14 +17980,14 @@
                 <a:gridCol w="1905000">
                   <a:extLst>
                     <a:ext uri="{9D8B030D-6E8A-4147-A177-3AD203B41FA5}">
-                      <a16:colId xmlns:a16="http://schemas.microsoft.com/office/drawing/2014/main" val="1276524973"/>
+                      <a16:colId xmlns:a16="http://schemas.microsoft.com/office/drawing/2014/main" val="2759091833"/>
                     </a:ext>
                   </a:extLst>
                 </a:gridCol>
                 <a:gridCol w="3225800">
                   <a:extLst>
                     <a:ext uri="{9D8B030D-6E8A-4147-A177-3AD203B41FA5}">
-                      <a16:colId xmlns:a16="http://schemas.microsoft.com/office/drawing/2014/main" val="2889801482"/>
+                      <a16:colId xmlns:a16="http://schemas.microsoft.com/office/drawing/2014/main" val="3014221688"/>
                     </a:ext>
                   </a:extLst>
                 </a:gridCol>
@@ -17698,7 +18061,7 @@
                 </a:tc>
                 <a:extLst>
                   <a:ext uri="{0D108BD9-81ED-4DB2-BD59-A6C34878D82A}">
-                    <a16:rowId xmlns:a16="http://schemas.microsoft.com/office/drawing/2014/main" val="298932322"/>
+                    <a16:rowId xmlns:a16="http://schemas.microsoft.com/office/drawing/2014/main" val="3743433766"/>
                   </a:ext>
                 </a:extLst>
               </a:tr>
@@ -17781,7 +18144,7 @@
                 </a:tc>
                 <a:extLst>
                   <a:ext uri="{0D108BD9-81ED-4DB2-BD59-A6C34878D82A}">
-                    <a16:rowId xmlns:a16="http://schemas.microsoft.com/office/drawing/2014/main" val="3040950076"/>
+                    <a16:rowId xmlns:a16="http://schemas.microsoft.com/office/drawing/2014/main" val="2490488296"/>
                   </a:ext>
                 </a:extLst>
               </a:tr>
@@ -17864,7 +18227,7 @@
                 </a:tc>
                 <a:extLst>
                   <a:ext uri="{0D108BD9-81ED-4DB2-BD59-A6C34878D82A}">
-                    <a16:rowId xmlns:a16="http://schemas.microsoft.com/office/drawing/2014/main" val="2454621479"/>
+                    <a16:rowId xmlns:a16="http://schemas.microsoft.com/office/drawing/2014/main" val="2277551318"/>
                   </a:ext>
                 </a:extLst>
               </a:tr>
@@ -17967,7 +18330,7 @@
                 </a:tc>
                 <a:extLst>
                   <a:ext uri="{0D108BD9-81ED-4DB2-BD59-A6C34878D82A}">
-                    <a16:rowId xmlns:a16="http://schemas.microsoft.com/office/drawing/2014/main" val="1322423619"/>
+                    <a16:rowId xmlns:a16="http://schemas.microsoft.com/office/drawing/2014/main" val="644908984"/>
                   </a:ext>
                 </a:extLst>
               </a:tr>
@@ -18070,7 +18433,7 @@
                 </a:tc>
                 <a:extLst>
                   <a:ext uri="{0D108BD9-81ED-4DB2-BD59-A6C34878D82A}">
-                    <a16:rowId xmlns:a16="http://schemas.microsoft.com/office/drawing/2014/main" val="2449523256"/>
+                    <a16:rowId xmlns:a16="http://schemas.microsoft.com/office/drawing/2014/main" val="3329844460"/>
                   </a:ext>
                 </a:extLst>
               </a:tr>
@@ -18173,7 +18536,7 @@
                 </a:tc>
                 <a:extLst>
                   <a:ext uri="{0D108BD9-81ED-4DB2-BD59-A6C34878D82A}">
-                    <a16:rowId xmlns:a16="http://schemas.microsoft.com/office/drawing/2014/main" val="1947773127"/>
+                    <a16:rowId xmlns:a16="http://schemas.microsoft.com/office/drawing/2014/main" val="2040153406"/>
                   </a:ext>
                 </a:extLst>
               </a:tr>
@@ -18186,7 +18549,7 @@
           <p:cNvPr id="11" name="テキスト ボックス 10">
             <a:extLst>
               <a:ext uri="{FF2B5EF4-FFF2-40B4-BE49-F238E27FC236}">
-                <a16:creationId xmlns:a16="http://schemas.microsoft.com/office/drawing/2014/main" id="{0F67542C-980A-A227-5975-B54850B6B57E}"/>
+                <a16:creationId xmlns:a16="http://schemas.microsoft.com/office/drawing/2014/main" id="{11821BD5-88B5-5DAF-7D38-8D482F8835ED}"/>
               </a:ext>
             </a:extLst>
           </p:cNvPr>
@@ -18232,7 +18595,7 @@
           <p:cNvPr id="12" name="表 11">
             <a:extLst>
               <a:ext uri="{FF2B5EF4-FFF2-40B4-BE49-F238E27FC236}">
-                <a16:creationId xmlns:a16="http://schemas.microsoft.com/office/drawing/2014/main" id="{67EDE27B-F935-0D93-2E1F-AA5D6BD708F8}"/>
+                <a16:creationId xmlns:a16="http://schemas.microsoft.com/office/drawing/2014/main" id="{8E0C813D-91FF-2D5E-F592-903758090205}"/>
               </a:ext>
             </a:extLst>
           </p:cNvPr>
@@ -18242,14 +18605,14 @@
           <p:nvPr>
             <p:extLst>
               <p:ext uri="{D42A27DB-BD31-4B8C-83A1-F6EECF244321}">
-                <p14:modId xmlns:p14="http://schemas.microsoft.com/office/powerpoint/2010/main" val="2897167431"/>
+                <p14:modId xmlns:p14="http://schemas.microsoft.com/office/powerpoint/2010/main" val="629666605"/>
               </p:ext>
             </p:extLst>
           </p:nvPr>
         </p:nvGraphicFramePr>
         <p:xfrm>
           <a:off x="6248400" y="2336800"/>
-          <a:ext cx="5130800" cy="3149600"/>
+          <a:ext cx="5130800" cy="3251200"/>
         </p:xfrm>
         <a:graphic>
           <a:graphicData uri="http://schemas.openxmlformats.org/drawingml/2006/table">
@@ -18261,14 +18624,14 @@
                 <a:gridCol w="1905000">
                   <a:extLst>
                     <a:ext uri="{9D8B030D-6E8A-4147-A177-3AD203B41FA5}">
-                      <a16:colId xmlns:a16="http://schemas.microsoft.com/office/drawing/2014/main" val="2774599461"/>
+                      <a16:colId xmlns:a16="http://schemas.microsoft.com/office/drawing/2014/main" val="1761055951"/>
                     </a:ext>
                   </a:extLst>
                 </a:gridCol>
                 <a:gridCol w="3225800">
                   <a:extLst>
                     <a:ext uri="{9D8B030D-6E8A-4147-A177-3AD203B41FA5}">
-                      <a16:colId xmlns:a16="http://schemas.microsoft.com/office/drawing/2014/main" val="4222058806"/>
+                      <a16:colId xmlns:a16="http://schemas.microsoft.com/office/drawing/2014/main" val="829128897"/>
                     </a:ext>
                   </a:extLst>
                 </a:gridCol>
@@ -18342,11 +18705,11 @@
                 </a:tc>
                 <a:extLst>
                   <a:ext uri="{0D108BD9-81ED-4DB2-BD59-A6C34878D82A}">
-                    <a16:rowId xmlns:a16="http://schemas.microsoft.com/office/drawing/2014/main" val="3646393109"/>
+                    <a16:rowId xmlns:a16="http://schemas.microsoft.com/office/drawing/2014/main" val="748143142"/>
                   </a:ext>
                 </a:extLst>
               </a:tr>
-              <a:tr h="457200">
+              <a:tr h="406400">
                 <a:tc>
                   <a:txBody>
                     <a:bodyPr/>
@@ -18475,11 +18838,11 @@
                 </a:tc>
                 <a:extLst>
                   <a:ext uri="{0D108BD9-81ED-4DB2-BD59-A6C34878D82A}">
-                    <a16:rowId xmlns:a16="http://schemas.microsoft.com/office/drawing/2014/main" val="2339531173"/>
+                    <a16:rowId xmlns:a16="http://schemas.microsoft.com/office/drawing/2014/main" val="1055731261"/>
                   </a:ext>
                 </a:extLst>
               </a:tr>
-              <a:tr h="457200">
+              <a:tr h="406400">
                 <a:tc>
                   <a:txBody>
                     <a:bodyPr/>
@@ -18498,7 +18861,7 @@
                           <a:latin typeface="Yu Gothic UI" panose="020B0500000000000000" pitchFamily="50" charset="-128"/>
                           <a:ea typeface="Yu Gothic UI" panose="020B0500000000000000" pitchFamily="50" charset="-128"/>
                         </a:rPr>
-                        <a:t>キオスクに戻る</a:t>
+                        <a:t>コンテンツ表示モードに戻る</a:t>
                       </a:r>
                     </a:p>
                   </a:txBody>
@@ -18536,7 +18899,7 @@
                           <a:latin typeface="Yu Gothic UI" panose="020B0500000000000000" pitchFamily="50" charset="-128"/>
                           <a:ea typeface="Yu Gothic UI" panose="020B0500000000000000" pitchFamily="50" charset="-128"/>
                         </a:rPr>
-                        <a:t>「通常モード（キオスク）に戻る」または </a:t>
+                        <a:t>「コンテンツ表示モードに戻る」または </a:t>
                       </a:r>
                       <a:r>
                         <a:rPr kumimoji="1" lang="en-US" altLang="ja-JP" sz="1100" b="0">
@@ -18615,11 +18978,11 @@
                 </a:tc>
                 <a:extLst>
                   <a:ext uri="{0D108BD9-81ED-4DB2-BD59-A6C34878D82A}">
-                    <a16:rowId xmlns:a16="http://schemas.microsoft.com/office/drawing/2014/main" val="4055464951"/>
+                    <a16:rowId xmlns:a16="http://schemas.microsoft.com/office/drawing/2014/main" val="4292066194"/>
                   </a:ext>
                 </a:extLst>
               </a:tr>
-              <a:tr h="457200">
+              <a:tr h="406400">
                 <a:tc>
                   <a:txBody>
                     <a:bodyPr/>
@@ -18698,11 +19061,11 @@
                 </a:tc>
                 <a:extLst>
                   <a:ext uri="{0D108BD9-81ED-4DB2-BD59-A6C34878D82A}">
-                    <a16:rowId xmlns:a16="http://schemas.microsoft.com/office/drawing/2014/main" val="581849200"/>
+                    <a16:rowId xmlns:a16="http://schemas.microsoft.com/office/drawing/2014/main" val="1374937519"/>
                   </a:ext>
                 </a:extLst>
               </a:tr>
-              <a:tr h="457200">
+              <a:tr h="406400">
                 <a:tc>
                   <a:txBody>
                     <a:bodyPr/>
@@ -18818,11 +19181,11 @@
                 </a:tc>
                 <a:extLst>
                   <a:ext uri="{0D108BD9-81ED-4DB2-BD59-A6C34878D82A}">
-                    <a16:rowId xmlns:a16="http://schemas.microsoft.com/office/drawing/2014/main" val="3755304411"/>
+                    <a16:rowId xmlns:a16="http://schemas.microsoft.com/office/drawing/2014/main" val="2243909463"/>
                   </a:ext>
                 </a:extLst>
               </a:tr>
-              <a:tr h="457200">
+              <a:tr h="406400">
                 <a:tc>
                   <a:txBody>
                     <a:bodyPr/>
@@ -18901,11 +19264,104 @@
                 </a:tc>
                 <a:extLst>
                   <a:ext uri="{0D108BD9-81ED-4DB2-BD59-A6C34878D82A}">
-                    <a16:rowId xmlns:a16="http://schemas.microsoft.com/office/drawing/2014/main" val="2070272159"/>
+                    <a16:rowId xmlns:a16="http://schemas.microsoft.com/office/drawing/2014/main" val="3161179870"/>
                   </a:ext>
                 </a:extLst>
               </a:tr>
-              <a:tr h="457200">
+              <a:tr h="406400">
+                <a:tc>
+                  <a:txBody>
+                    <a:bodyPr/>
+                    <a:lstStyle/>
+                    <a:p>
+                      <a:pPr algn="l">
+                        <a:lnSpc>
+                          <a:spcPct val="115000"/>
+                        </a:lnSpc>
+                      </a:pPr>
+                      <a:r>
+                        <a:rPr kumimoji="1" lang="ja-JP" altLang="en-US" sz="1100" b="1">
+                          <a:solidFill>
+                            <a:srgbClr val="1B2430"/>
+                          </a:solidFill>
+                          <a:latin typeface="Yu Gothic UI" panose="020B0500000000000000" pitchFamily="50" charset="-128"/>
+                          <a:ea typeface="Yu Gothic UI" panose="020B0500000000000000" pitchFamily="50" charset="-128"/>
+                        </a:rPr>
+                        <a:t>アプリを新しい版にする</a:t>
+                      </a:r>
+                    </a:p>
+                  </a:txBody>
+                  <a:tcPr marL="152400" marR="152400" marT="63500" marB="63500" anchor="ctr">
+                    <a:lnT w="9525">
+                      <a:solidFill>
+                        <a:srgbClr val="DEE5EF"/>
+                      </a:solidFill>
+                    </a:lnT>
+                    <a:lnB w="9525">
+                      <a:solidFill>
+                        <a:srgbClr val="DEE5EF"/>
+                      </a:solidFill>
+                    </a:lnB>
+                    <a:solidFill>
+                      <a:srgbClr val="F5F7FA"/>
+                    </a:solidFill>
+                  </a:tcPr>
+                </a:tc>
+                <a:tc>
+                  <a:txBody>
+                    <a:bodyPr/>
+                    <a:lstStyle/>
+                    <a:p>
+                      <a:pPr algn="l">
+                        <a:lnSpc>
+                          <a:spcPct val="115000"/>
+                        </a:lnSpc>
+                      </a:pPr>
+                      <a:r>
+                        <a:rPr kumimoji="1" lang="en-US" altLang="ja-JP" sz="1100" b="0">
+                          <a:solidFill>
+                            <a:srgbClr val="465263"/>
+                          </a:solidFill>
+                          <a:latin typeface="Yu Gothic UI" panose="020B0500000000000000" pitchFamily="50" charset="-128"/>
+                          <a:ea typeface="Yu Gothic UI" panose="020B0500000000000000" pitchFamily="50" charset="-128"/>
+                        </a:rPr>
+                        <a:t>settings.json </a:t>
+                      </a:r>
+                      <a:r>
+                        <a:rPr kumimoji="1" lang="ja-JP" altLang="en-US" sz="1100" b="0">
+                          <a:solidFill>
+                            <a:srgbClr val="465263"/>
+                          </a:solidFill>
+                          <a:latin typeface="Yu Gothic UI" panose="020B0500000000000000" pitchFamily="50" charset="-128"/>
+                          <a:ea typeface="Yu Gothic UI" panose="020B0500000000000000" pitchFamily="50" charset="-128"/>
+                        </a:rPr>
+                        <a:t>を残して配布フォルダを上書き</a:t>
+                      </a:r>
+                    </a:p>
+                  </a:txBody>
+                  <a:tcPr marL="152400" marR="152400" marT="63500" marB="63500" anchor="ctr">
+                    <a:lnT w="9525">
+                      <a:solidFill>
+                        <a:srgbClr val="DEE5EF"/>
+                      </a:solidFill>
+                    </a:lnT>
+                    <a:lnB w="9525">
+                      <a:solidFill>
+                        <a:srgbClr val="DEE5EF"/>
+                      </a:solidFill>
+                    </a:lnB>
+                    <a:solidFill>
+                      <a:srgbClr val="F5F7FA"/>
+                    </a:solidFill>
+                  </a:tcPr>
+                </a:tc>
+                <a:extLst>
+                  <a:ext uri="{0D108BD9-81ED-4DB2-BD59-A6C34878D82A}">
+                    <a16:rowId xmlns:a16="http://schemas.microsoft.com/office/drawing/2014/main" val="4240139443"/>
+                  </a:ext>
+                </a:extLst>
+              </a:tr>
+              <a:tr h="406400">
                 <a:tc>
                   <a:txBody>
                     <a:bodyPr/>
@@ -18940,7 +19396,7 @@
                       </a:solidFill>
                     </a:lnB>
                     <a:solidFill>
-                      <a:srgbClr val="F5F7FA"/>
+                      <a:srgbClr val="FFFFFF"/>
                     </a:solidFill>
                   </a:tcPr>
                 </a:tc>
@@ -18978,13 +19434,13 @@
                       </a:solidFill>
                     </a:lnB>
                     <a:solidFill>
-                      <a:srgbClr val="F5F7FA"/>
+                      <a:srgbClr val="FFFFFF"/>
                     </a:solidFill>
                   </a:tcPr>
                 </a:tc>
                 <a:extLst>
                   <a:ext uri="{0D108BD9-81ED-4DB2-BD59-A6C34878D82A}">
-                    <a16:rowId xmlns:a16="http://schemas.microsoft.com/office/drawing/2014/main" val="3103140337"/>
+                    <a16:rowId xmlns:a16="http://schemas.microsoft.com/office/drawing/2014/main" val="3361632090"/>
                   </a:ext>
                 </a:extLst>
               </a:tr>
@@ -18995,7 +19451,7 @@
     </p:spTree>
     <p:extLst>
       <p:ext uri="{BB962C8B-B14F-4D97-AF65-F5344CB8AC3E}">
-        <p14:creationId xmlns:p14="http://schemas.microsoft.com/office/powerpoint/2010/main" val="3095979334"/>
+        <p14:creationId xmlns:p14="http://schemas.microsoft.com/office/powerpoint/2010/main" val="2893165807"/>
       </p:ext>
     </p:extLst>
   </p:cSld>
@@ -19027,7 +19483,7 @@
           <p:cNvPr id="2" name="正方形/長方形 1">
             <a:extLst>
               <a:ext uri="{FF2B5EF4-FFF2-40B4-BE49-F238E27FC236}">
-                <a16:creationId xmlns:a16="http://schemas.microsoft.com/office/drawing/2014/main" id="{37EC668E-9514-A504-34A4-544D8133516B}"/>
+                <a16:creationId xmlns:a16="http://schemas.microsoft.com/office/drawing/2014/main" id="{B2C4F263-EBAF-7FFA-0631-C4F24057AA9A}"/>
               </a:ext>
             </a:extLst>
           </p:cNvPr>
@@ -19095,7 +19551,7 @@
           <p:cNvPr id="3" name="正方形/長方形 2">
             <a:extLst>
               <a:ext uri="{FF2B5EF4-FFF2-40B4-BE49-F238E27FC236}">
-                <a16:creationId xmlns:a16="http://schemas.microsoft.com/office/drawing/2014/main" id="{4443AA3C-1F31-8AB7-9023-A4053F5B681B}"/>
+                <a16:creationId xmlns:a16="http://schemas.microsoft.com/office/drawing/2014/main" id="{68F1B29D-9B6F-CBF2-C6C7-0B58BF3FCCAD}"/>
               </a:ext>
             </a:extLst>
           </p:cNvPr>
@@ -19163,7 +19619,7 @@
           <p:cNvPr id="4" name="楕円 3">
             <a:extLst>
               <a:ext uri="{FF2B5EF4-FFF2-40B4-BE49-F238E27FC236}">
-                <a16:creationId xmlns:a16="http://schemas.microsoft.com/office/drawing/2014/main" id="{8CF18A96-A0A9-C5D2-D2E6-F9DF76909A96}"/>
+                <a16:creationId xmlns:a16="http://schemas.microsoft.com/office/drawing/2014/main" id="{87191542-12AF-C88E-7979-976E27D12A34}"/>
               </a:ext>
             </a:extLst>
           </p:cNvPr>
@@ -19233,7 +19689,7 @@
           <p:cNvPr id="5" name="正方形/長方形 4">
             <a:extLst>
               <a:ext uri="{FF2B5EF4-FFF2-40B4-BE49-F238E27FC236}">
-                <a16:creationId xmlns:a16="http://schemas.microsoft.com/office/drawing/2014/main" id="{FD2267A8-0E53-A286-3633-9FBB23E197AF}"/>
+                <a16:creationId xmlns:a16="http://schemas.microsoft.com/office/drawing/2014/main" id="{118A92DD-DBD0-1B10-9FE3-B23F297374C4}"/>
               </a:ext>
             </a:extLst>
           </p:cNvPr>
@@ -19301,7 +19757,7 @@
           <p:cNvPr id="6" name="テキスト ボックス 5">
             <a:extLst>
               <a:ext uri="{FF2B5EF4-FFF2-40B4-BE49-F238E27FC236}">
-                <a16:creationId xmlns:a16="http://schemas.microsoft.com/office/drawing/2014/main" id="{066F4381-E368-AAC5-5673-776F6D885E9E}"/>
+                <a16:creationId xmlns:a16="http://schemas.microsoft.com/office/drawing/2014/main" id="{EBC180BE-0EC0-45A4-251C-93864D5228C5}"/>
               </a:ext>
             </a:extLst>
           </p:cNvPr>
@@ -19347,7 +19803,7 @@
           <p:cNvPr id="7" name="テキスト ボックス 6">
             <a:extLst>
               <a:ext uri="{FF2B5EF4-FFF2-40B4-BE49-F238E27FC236}">
-                <a16:creationId xmlns:a16="http://schemas.microsoft.com/office/drawing/2014/main" id="{F7A1B8A7-483B-BEC1-4FDA-04B77E7EB805}"/>
+                <a16:creationId xmlns:a16="http://schemas.microsoft.com/office/drawing/2014/main" id="{8CA88400-3794-F417-0CC0-3C846D4255D6}"/>
               </a:ext>
             </a:extLst>
           </p:cNvPr>
@@ -19473,7 +19929,7 @@
           <p:cNvPr id="8" name="四角形: 角を丸くする 7">
             <a:extLst>
               <a:ext uri="{FF2B5EF4-FFF2-40B4-BE49-F238E27FC236}">
-                <a16:creationId xmlns:a16="http://schemas.microsoft.com/office/drawing/2014/main" id="{832335D1-D4DC-24DD-6554-CAACB78DB352}"/>
+                <a16:creationId xmlns:a16="http://schemas.microsoft.com/office/drawing/2014/main" id="{5338D53A-8540-0E92-6D6A-2A5534A3F85D}"/>
               </a:ext>
             </a:extLst>
           </p:cNvPr>
@@ -19543,7 +19999,7 @@
           <p:cNvPr id="9" name="正方形/長方形 8">
             <a:extLst>
               <a:ext uri="{FF2B5EF4-FFF2-40B4-BE49-F238E27FC236}">
-                <a16:creationId xmlns:a16="http://schemas.microsoft.com/office/drawing/2014/main" id="{E556DFD6-9DE7-8091-4062-F026F2175943}"/>
+                <a16:creationId xmlns:a16="http://schemas.microsoft.com/office/drawing/2014/main" id="{E132483F-BD5E-BC98-0E62-CB6CDF493707}"/>
               </a:ext>
             </a:extLst>
           </p:cNvPr>
@@ -19611,7 +20067,7 @@
           <p:cNvPr id="10" name="テキスト ボックス 9">
             <a:extLst>
               <a:ext uri="{FF2B5EF4-FFF2-40B4-BE49-F238E27FC236}">
-                <a16:creationId xmlns:a16="http://schemas.microsoft.com/office/drawing/2014/main" id="{2AE04E3C-CA4F-35FD-D2E2-8E0D4D843E5E}"/>
+                <a16:creationId xmlns:a16="http://schemas.microsoft.com/office/drawing/2014/main" id="{3DE9A28B-E727-AAE1-6E88-121C3DA19665}"/>
               </a:ext>
             </a:extLst>
           </p:cNvPr>
@@ -19657,7 +20113,7 @@
           <p:cNvPr id="11" name="テキスト ボックス 10">
             <a:extLst>
               <a:ext uri="{FF2B5EF4-FFF2-40B4-BE49-F238E27FC236}">
-                <a16:creationId xmlns:a16="http://schemas.microsoft.com/office/drawing/2014/main" id="{D5111886-B349-9232-F4BC-C054365152D7}"/>
+                <a16:creationId xmlns:a16="http://schemas.microsoft.com/office/drawing/2014/main" id="{5A36AE0B-F2E3-8F8B-95AB-2A9ACA2A4525}"/>
               </a:ext>
             </a:extLst>
           </p:cNvPr>
@@ -19703,7 +20159,7 @@
           <p:cNvPr id="12" name="四角形: 角を丸くする 11">
             <a:extLst>
               <a:ext uri="{FF2B5EF4-FFF2-40B4-BE49-F238E27FC236}">
-                <a16:creationId xmlns:a16="http://schemas.microsoft.com/office/drawing/2014/main" id="{A177D0BC-343F-E6E5-CC5B-20A0F19B1DE2}"/>
+                <a16:creationId xmlns:a16="http://schemas.microsoft.com/office/drawing/2014/main" id="{81E8508F-9C75-86FA-86B1-553A795345E2}"/>
               </a:ext>
             </a:extLst>
           </p:cNvPr>
@@ -19773,7 +20229,7 @@
           <p:cNvPr id="13" name="正方形/長方形 12">
             <a:extLst>
               <a:ext uri="{FF2B5EF4-FFF2-40B4-BE49-F238E27FC236}">
-                <a16:creationId xmlns:a16="http://schemas.microsoft.com/office/drawing/2014/main" id="{C27A8C82-D149-620C-06B2-884036081898}"/>
+                <a16:creationId xmlns:a16="http://schemas.microsoft.com/office/drawing/2014/main" id="{0928476D-AD72-759D-5301-FEFB1544750F}"/>
               </a:ext>
             </a:extLst>
           </p:cNvPr>
@@ -19841,7 +20297,7 @@
           <p:cNvPr id="14" name="テキスト ボックス 13">
             <a:extLst>
               <a:ext uri="{FF2B5EF4-FFF2-40B4-BE49-F238E27FC236}">
-                <a16:creationId xmlns:a16="http://schemas.microsoft.com/office/drawing/2014/main" id="{E36075E8-597C-C67A-1112-DEC83A95D2B3}"/>
+                <a16:creationId xmlns:a16="http://schemas.microsoft.com/office/drawing/2014/main" id="{B21AACEA-A44E-BB9C-62B7-E74743AF85EA}"/>
               </a:ext>
             </a:extLst>
           </p:cNvPr>
@@ -19887,7 +20343,7 @@
           <p:cNvPr id="15" name="テキスト ボックス 14">
             <a:extLst>
               <a:ext uri="{FF2B5EF4-FFF2-40B4-BE49-F238E27FC236}">
-                <a16:creationId xmlns:a16="http://schemas.microsoft.com/office/drawing/2014/main" id="{5727C43A-CA6C-321F-57DB-187C8BB9CC7E}"/>
+                <a16:creationId xmlns:a16="http://schemas.microsoft.com/office/drawing/2014/main" id="{A35FCAF3-7D84-41BD-A5BE-B79C855F4815}"/>
               </a:ext>
             </a:extLst>
           </p:cNvPr>
@@ -19933,7 +20389,7 @@
           <p:cNvPr id="16" name="四角形: 角を丸くする 15">
             <a:extLst>
               <a:ext uri="{FF2B5EF4-FFF2-40B4-BE49-F238E27FC236}">
-                <a16:creationId xmlns:a16="http://schemas.microsoft.com/office/drawing/2014/main" id="{DDB24ECA-6C8D-7161-FB94-F312C8432C18}"/>
+                <a16:creationId xmlns:a16="http://schemas.microsoft.com/office/drawing/2014/main" id="{77196D04-83D0-A43E-9588-4900667F0E26}"/>
               </a:ext>
             </a:extLst>
           </p:cNvPr>
@@ -20003,7 +20459,7 @@
           <p:cNvPr id="17" name="正方形/長方形 16">
             <a:extLst>
               <a:ext uri="{FF2B5EF4-FFF2-40B4-BE49-F238E27FC236}">
-                <a16:creationId xmlns:a16="http://schemas.microsoft.com/office/drawing/2014/main" id="{2A808348-61C4-FDA0-E097-00B3B1AE4879}"/>
+                <a16:creationId xmlns:a16="http://schemas.microsoft.com/office/drawing/2014/main" id="{4C2E5252-6BAE-1932-9414-46A1CBEFADFF}"/>
               </a:ext>
             </a:extLst>
           </p:cNvPr>
@@ -20071,7 +20527,7 @@
           <p:cNvPr id="18" name="テキスト ボックス 17">
             <a:extLst>
               <a:ext uri="{FF2B5EF4-FFF2-40B4-BE49-F238E27FC236}">
-                <a16:creationId xmlns:a16="http://schemas.microsoft.com/office/drawing/2014/main" id="{879DC607-B009-8784-1459-B3011749A439}"/>
+                <a16:creationId xmlns:a16="http://schemas.microsoft.com/office/drawing/2014/main" id="{36D568A7-67C1-4AC0-064B-FF53F23087A1}"/>
               </a:ext>
             </a:extLst>
           </p:cNvPr>
@@ -20117,7 +20573,7 @@
           <p:cNvPr id="19" name="テキスト ボックス 18">
             <a:extLst>
               <a:ext uri="{FF2B5EF4-FFF2-40B4-BE49-F238E27FC236}">
-                <a16:creationId xmlns:a16="http://schemas.microsoft.com/office/drawing/2014/main" id="{49934C4B-EB05-375F-67B1-44F348BCEBE0}"/>
+                <a16:creationId xmlns:a16="http://schemas.microsoft.com/office/drawing/2014/main" id="{4AA67CF1-4085-BF27-D60B-951357E7AA9A}"/>
               </a:ext>
             </a:extLst>
           </p:cNvPr>
@@ -20163,7 +20619,7 @@
           <p:cNvPr id="20" name="正方形/長方形 19">
             <a:extLst>
               <a:ext uri="{FF2B5EF4-FFF2-40B4-BE49-F238E27FC236}">
-                <a16:creationId xmlns:a16="http://schemas.microsoft.com/office/drawing/2014/main" id="{5A0C8F54-2324-4FDE-AAD1-5EE7D2F120D2}"/>
+                <a16:creationId xmlns:a16="http://schemas.microsoft.com/office/drawing/2014/main" id="{AA7AD7DC-92F2-80BF-F9B2-1103A7B2EE64}"/>
               </a:ext>
             </a:extLst>
           </p:cNvPr>
@@ -20231,7 +20687,7 @@
           <p:cNvPr id="21" name="テキスト ボックス 20">
             <a:extLst>
               <a:ext uri="{FF2B5EF4-FFF2-40B4-BE49-F238E27FC236}">
-                <a16:creationId xmlns:a16="http://schemas.microsoft.com/office/drawing/2014/main" id="{E9818CA0-DF51-3BEB-58E0-9EA1BC14DB8B}"/>
+                <a16:creationId xmlns:a16="http://schemas.microsoft.com/office/drawing/2014/main" id="{1C0AC97D-C281-8734-EFB8-F41DB36F5315}"/>
               </a:ext>
             </a:extLst>
           </p:cNvPr>
@@ -20295,7 +20751,7 @@
     </p:spTree>
     <p:extLst>
       <p:ext uri="{BB962C8B-B14F-4D97-AF65-F5344CB8AC3E}">
-        <p14:creationId xmlns:p14="http://schemas.microsoft.com/office/powerpoint/2010/main" val="1584401479"/>
+        <p14:creationId xmlns:p14="http://schemas.microsoft.com/office/powerpoint/2010/main" val="2357725275"/>
       </p:ext>
     </p:extLst>
   </p:cSld>
@@ -20327,7 +20783,7 @@
           <p:cNvPr id="2" name="正方形/長方形 1">
             <a:extLst>
               <a:ext uri="{FF2B5EF4-FFF2-40B4-BE49-F238E27FC236}">
-                <a16:creationId xmlns:a16="http://schemas.microsoft.com/office/drawing/2014/main" id="{CDBDAA78-708A-1912-E41E-0350728B5C49}"/>
+                <a16:creationId xmlns:a16="http://schemas.microsoft.com/office/drawing/2014/main" id="{ABA70788-F2A9-7CB6-35DC-24DDEB290F83}"/>
               </a:ext>
             </a:extLst>
           </p:cNvPr>
@@ -20395,7 +20851,7 @@
           <p:cNvPr id="3" name="正方形/長方形 2">
             <a:extLst>
               <a:ext uri="{FF2B5EF4-FFF2-40B4-BE49-F238E27FC236}">
-                <a16:creationId xmlns:a16="http://schemas.microsoft.com/office/drawing/2014/main" id="{34F6D481-35B8-E7EA-9C12-44A8F66DAA67}"/>
+                <a16:creationId xmlns:a16="http://schemas.microsoft.com/office/drawing/2014/main" id="{527C2AC7-9558-E3D1-D10D-B15172BE8D0F}"/>
               </a:ext>
             </a:extLst>
           </p:cNvPr>
@@ -20463,7 +20919,7 @@
           <p:cNvPr id="4" name="テキスト ボックス 3">
             <a:extLst>
               <a:ext uri="{FF2B5EF4-FFF2-40B4-BE49-F238E27FC236}">
-                <a16:creationId xmlns:a16="http://schemas.microsoft.com/office/drawing/2014/main" id="{6DE753CF-EC6C-14C9-600C-95B99A7B7896}"/>
+                <a16:creationId xmlns:a16="http://schemas.microsoft.com/office/drawing/2014/main" id="{B542A55E-F0CF-2DE0-195F-8A267E0B88C1}"/>
               </a:ext>
             </a:extLst>
           </p:cNvPr>
@@ -20516,7 +20972,7 @@
           <p:cNvPr id="5" name="テキスト ボックス 4">
             <a:extLst>
               <a:ext uri="{FF2B5EF4-FFF2-40B4-BE49-F238E27FC236}">
-                <a16:creationId xmlns:a16="http://schemas.microsoft.com/office/drawing/2014/main" id="{E43C51EE-3ACB-CDE1-6381-859046AEF32A}"/>
+                <a16:creationId xmlns:a16="http://schemas.microsoft.com/office/drawing/2014/main" id="{1D023AF3-166F-20D1-0515-0AFD2D42140D}"/>
               </a:ext>
             </a:extLst>
           </p:cNvPr>
@@ -20562,7 +21018,7 @@
           <p:cNvPr id="6" name="正方形/長方形 5">
             <a:extLst>
               <a:ext uri="{FF2B5EF4-FFF2-40B4-BE49-F238E27FC236}">
-                <a16:creationId xmlns:a16="http://schemas.microsoft.com/office/drawing/2014/main" id="{57B9BEB1-FEDA-B37D-B2C3-DADA00F236A2}"/>
+                <a16:creationId xmlns:a16="http://schemas.microsoft.com/office/drawing/2014/main" id="{F793BDF5-3444-BA33-1C3F-A5D3CE5DD3A8}"/>
               </a:ext>
             </a:extLst>
           </p:cNvPr>
@@ -20630,7 +21086,7 @@
           <p:cNvPr id="7" name="テキスト ボックス 6">
             <a:extLst>
               <a:ext uri="{FF2B5EF4-FFF2-40B4-BE49-F238E27FC236}">
-                <a16:creationId xmlns:a16="http://schemas.microsoft.com/office/drawing/2014/main" id="{EB459F8D-0F12-0492-AB0F-5417B2C36524}"/>
+                <a16:creationId xmlns:a16="http://schemas.microsoft.com/office/drawing/2014/main" id="{9C09EDC0-2AFA-840E-1B10-5DA28325F35F}"/>
               </a:ext>
             </a:extLst>
           </p:cNvPr>
@@ -20676,7 +21132,7 @@
           <p:cNvPr id="8" name="テキスト ボックス 7">
             <a:extLst>
               <a:ext uri="{FF2B5EF4-FFF2-40B4-BE49-F238E27FC236}">
-                <a16:creationId xmlns:a16="http://schemas.microsoft.com/office/drawing/2014/main" id="{3A1D3F60-4419-C001-47AE-EAFA23E2D36A}"/>
+                <a16:creationId xmlns:a16="http://schemas.microsoft.com/office/drawing/2014/main" id="{45CEA15C-37A2-A984-C747-4ADB975EA425}"/>
               </a:ext>
             </a:extLst>
           </p:cNvPr>
@@ -20729,7 +21185,7 @@
           <p:cNvPr id="9" name="テキスト ボックス 8">
             <a:extLst>
               <a:ext uri="{FF2B5EF4-FFF2-40B4-BE49-F238E27FC236}">
-                <a16:creationId xmlns:a16="http://schemas.microsoft.com/office/drawing/2014/main" id="{EDB89BFA-FC9C-CB47-459F-A5BD0B2527A1}"/>
+                <a16:creationId xmlns:a16="http://schemas.microsoft.com/office/drawing/2014/main" id="{AF07E13B-196D-5DBD-DE9C-74B402F3A204}"/>
               </a:ext>
             </a:extLst>
           </p:cNvPr>
@@ -20795,7 +21251,7 @@
           <p:cNvPr id="10" name="四角形: 角を丸くする 9">
             <a:extLst>
               <a:ext uri="{FF2B5EF4-FFF2-40B4-BE49-F238E27FC236}">
-                <a16:creationId xmlns:a16="http://schemas.microsoft.com/office/drawing/2014/main" id="{D33AD6EE-81B1-1C1F-E101-AE5D6C9A4828}"/>
+                <a16:creationId xmlns:a16="http://schemas.microsoft.com/office/drawing/2014/main" id="{EDD8FFDC-3EEE-4E3B-A23F-10D00C271187}"/>
               </a:ext>
             </a:extLst>
           </p:cNvPr>
@@ -20851,7 +21307,7 @@
           <p:cNvPr id="11" name="正方形/長方形 10">
             <a:extLst>
               <a:ext uri="{FF2B5EF4-FFF2-40B4-BE49-F238E27FC236}">
-                <a16:creationId xmlns:a16="http://schemas.microsoft.com/office/drawing/2014/main" id="{C072524E-96B0-C01B-BF5A-05798174D1F6}"/>
+                <a16:creationId xmlns:a16="http://schemas.microsoft.com/office/drawing/2014/main" id="{23354D1C-7AAF-23E5-7169-DD46E21FA321}"/>
               </a:ext>
             </a:extLst>
           </p:cNvPr>
@@ -20919,7 +21375,7 @@
           <p:cNvPr id="12" name="四角形: 角を丸くする 11">
             <a:extLst>
               <a:ext uri="{FF2B5EF4-FFF2-40B4-BE49-F238E27FC236}">
-                <a16:creationId xmlns:a16="http://schemas.microsoft.com/office/drawing/2014/main" id="{0B43FB3C-6036-9BA0-3F14-F20296CDF127}"/>
+                <a16:creationId xmlns:a16="http://schemas.microsoft.com/office/drawing/2014/main" id="{4DF52876-1FC9-639A-1013-8AAA2016C1CB}"/>
               </a:ext>
             </a:extLst>
           </p:cNvPr>
@@ -20989,7 +21445,7 @@
           <p:cNvPr id="13" name="テキスト ボックス 12">
             <a:extLst>
               <a:ext uri="{FF2B5EF4-FFF2-40B4-BE49-F238E27FC236}">
-                <a16:creationId xmlns:a16="http://schemas.microsoft.com/office/drawing/2014/main" id="{94B121CB-CEBA-02B1-B954-0416DA9A9012}"/>
+                <a16:creationId xmlns:a16="http://schemas.microsoft.com/office/drawing/2014/main" id="{BFAC65DB-8487-59C3-EB57-CF59AB21E17E}"/>
               </a:ext>
             </a:extLst>
           </p:cNvPr>
@@ -21042,7 +21498,7 @@
           <p:cNvPr id="14" name="テキスト ボックス 13">
             <a:extLst>
               <a:ext uri="{FF2B5EF4-FFF2-40B4-BE49-F238E27FC236}">
-                <a16:creationId xmlns:a16="http://schemas.microsoft.com/office/drawing/2014/main" id="{8806A450-DA58-B1F3-9AF9-DCFEE1C7EF9F}"/>
+                <a16:creationId xmlns:a16="http://schemas.microsoft.com/office/drawing/2014/main" id="{826813A4-D488-4EE7-9671-DC0725A91D40}"/>
               </a:ext>
             </a:extLst>
           </p:cNvPr>
@@ -21088,7 +21544,7 @@
           <p:cNvPr id="15" name="テキスト ボックス 14">
             <a:extLst>
               <a:ext uri="{FF2B5EF4-FFF2-40B4-BE49-F238E27FC236}">
-                <a16:creationId xmlns:a16="http://schemas.microsoft.com/office/drawing/2014/main" id="{50EEF8FF-22F7-0598-F594-83CB537256B4}"/>
+                <a16:creationId xmlns:a16="http://schemas.microsoft.com/office/drawing/2014/main" id="{FC4EC2D7-13C6-8525-E628-5E9F1113D806}"/>
               </a:ext>
             </a:extLst>
           </p:cNvPr>
@@ -21134,7 +21590,7 @@
           <p:cNvPr id="16" name="テキスト ボックス 15">
             <a:extLst>
               <a:ext uri="{FF2B5EF4-FFF2-40B4-BE49-F238E27FC236}">
-                <a16:creationId xmlns:a16="http://schemas.microsoft.com/office/drawing/2014/main" id="{8AC30D70-3B6A-4CA7-0BF6-9973E51801DB}"/>
+                <a16:creationId xmlns:a16="http://schemas.microsoft.com/office/drawing/2014/main" id="{E31B5EF5-A2C1-CAE4-3B60-19409F851448}"/>
               </a:ext>
             </a:extLst>
           </p:cNvPr>
@@ -21223,7 +21679,7 @@
           <p:cNvPr id="17" name="四角形: 角を丸くする 16">
             <a:extLst>
               <a:ext uri="{FF2B5EF4-FFF2-40B4-BE49-F238E27FC236}">
-                <a16:creationId xmlns:a16="http://schemas.microsoft.com/office/drawing/2014/main" id="{0851EAFA-E5B2-4891-202E-687B8611C5E8}"/>
+                <a16:creationId xmlns:a16="http://schemas.microsoft.com/office/drawing/2014/main" id="{5C53DC94-6955-A774-C45F-DA344DA48E29}"/>
               </a:ext>
             </a:extLst>
           </p:cNvPr>
@@ -21279,7 +21735,7 @@
           <p:cNvPr id="18" name="正方形/長方形 17">
             <a:extLst>
               <a:ext uri="{FF2B5EF4-FFF2-40B4-BE49-F238E27FC236}">
-                <a16:creationId xmlns:a16="http://schemas.microsoft.com/office/drawing/2014/main" id="{FEC81BE7-C594-D51A-5FCA-9636E82952A0}"/>
+                <a16:creationId xmlns:a16="http://schemas.microsoft.com/office/drawing/2014/main" id="{9E7E1FB9-74C9-75BA-E3A5-B5B7FC348D53}"/>
               </a:ext>
             </a:extLst>
           </p:cNvPr>
@@ -21347,7 +21803,7 @@
           <p:cNvPr id="19" name="四角形: 角を丸くする 18">
             <a:extLst>
               <a:ext uri="{FF2B5EF4-FFF2-40B4-BE49-F238E27FC236}">
-                <a16:creationId xmlns:a16="http://schemas.microsoft.com/office/drawing/2014/main" id="{60D7678F-F363-E954-0944-811EC7A511A3}"/>
+                <a16:creationId xmlns:a16="http://schemas.microsoft.com/office/drawing/2014/main" id="{6E0AEDC7-1D1A-8A48-7785-458AEDA52A75}"/>
               </a:ext>
             </a:extLst>
           </p:cNvPr>
@@ -21417,7 +21873,7 @@
           <p:cNvPr id="20" name="テキスト ボックス 19">
             <a:extLst>
               <a:ext uri="{FF2B5EF4-FFF2-40B4-BE49-F238E27FC236}">
-                <a16:creationId xmlns:a16="http://schemas.microsoft.com/office/drawing/2014/main" id="{59325944-0576-0A6F-5F22-A972D14038E4}"/>
+                <a16:creationId xmlns:a16="http://schemas.microsoft.com/office/drawing/2014/main" id="{9B58BA21-8A73-B147-93AA-0D5E31315EE4}"/>
               </a:ext>
             </a:extLst>
           </p:cNvPr>
@@ -21470,7 +21926,7 @@
           <p:cNvPr id="21" name="テキスト ボックス 20">
             <a:extLst>
               <a:ext uri="{FF2B5EF4-FFF2-40B4-BE49-F238E27FC236}">
-                <a16:creationId xmlns:a16="http://schemas.microsoft.com/office/drawing/2014/main" id="{D4629811-B55E-5D6A-3B4F-1E28357C9216}"/>
+                <a16:creationId xmlns:a16="http://schemas.microsoft.com/office/drawing/2014/main" id="{CEB2E754-5EC8-6FA3-2F35-070BE25E5FC0}"/>
               </a:ext>
             </a:extLst>
           </p:cNvPr>
@@ -21516,7 +21972,7 @@
           <p:cNvPr id="22" name="テキスト ボックス 21">
             <a:extLst>
               <a:ext uri="{FF2B5EF4-FFF2-40B4-BE49-F238E27FC236}">
-                <a16:creationId xmlns:a16="http://schemas.microsoft.com/office/drawing/2014/main" id="{E747E609-0C4E-00E5-AAF2-184AC767F88E}"/>
+                <a16:creationId xmlns:a16="http://schemas.microsoft.com/office/drawing/2014/main" id="{A7CC7411-9E4A-7150-D06F-E76A65FD12CB}"/>
               </a:ext>
             </a:extLst>
           </p:cNvPr>
@@ -21562,7 +22018,7 @@
           <p:cNvPr id="23" name="テキスト ボックス 22">
             <a:extLst>
               <a:ext uri="{FF2B5EF4-FFF2-40B4-BE49-F238E27FC236}">
-                <a16:creationId xmlns:a16="http://schemas.microsoft.com/office/drawing/2014/main" id="{A538EA7C-DDBA-A3EA-27CF-0D836BB7E3E4}"/>
+                <a16:creationId xmlns:a16="http://schemas.microsoft.com/office/drawing/2014/main" id="{9D812D31-47D0-64B7-9E8A-2E8570F11E33}"/>
               </a:ext>
             </a:extLst>
           </p:cNvPr>
@@ -21651,7 +22107,7 @@
           <p:cNvPr id="24" name="四角形: 角を丸くする 23">
             <a:extLst>
               <a:ext uri="{FF2B5EF4-FFF2-40B4-BE49-F238E27FC236}">
-                <a16:creationId xmlns:a16="http://schemas.microsoft.com/office/drawing/2014/main" id="{2B145675-1AC3-56CA-EC5C-2EE0C5715735}"/>
+                <a16:creationId xmlns:a16="http://schemas.microsoft.com/office/drawing/2014/main" id="{DC1E00F0-92D9-02FC-43C9-309BBF0C765F}"/>
               </a:ext>
             </a:extLst>
           </p:cNvPr>
@@ -21721,7 +22177,7 @@
           <p:cNvPr id="25" name="正方形/長方形 24">
             <a:extLst>
               <a:ext uri="{FF2B5EF4-FFF2-40B4-BE49-F238E27FC236}">
-                <a16:creationId xmlns:a16="http://schemas.microsoft.com/office/drawing/2014/main" id="{5E81228F-4E1F-6AB0-A333-E899F399CCFC}"/>
+                <a16:creationId xmlns:a16="http://schemas.microsoft.com/office/drawing/2014/main" id="{C74902F9-9A31-7206-2F38-620E33A7E628}"/>
               </a:ext>
             </a:extLst>
           </p:cNvPr>
@@ -21789,7 +22245,7 @@
           <p:cNvPr id="26" name="テキスト ボックス 25">
             <a:extLst>
               <a:ext uri="{FF2B5EF4-FFF2-40B4-BE49-F238E27FC236}">
-                <a16:creationId xmlns:a16="http://schemas.microsoft.com/office/drawing/2014/main" id="{603A8D11-3F70-D316-5E5E-8090CB95D67C}"/>
+                <a16:creationId xmlns:a16="http://schemas.microsoft.com/office/drawing/2014/main" id="{7123207B-132C-29AF-D1F3-2F1D843C40B2}"/>
               </a:ext>
             </a:extLst>
           </p:cNvPr>
@@ -21842,7 +22298,7 @@
           <p:cNvPr id="27" name="テキスト ボックス 26">
             <a:extLst>
               <a:ext uri="{FF2B5EF4-FFF2-40B4-BE49-F238E27FC236}">
-                <a16:creationId xmlns:a16="http://schemas.microsoft.com/office/drawing/2014/main" id="{0EFB01C2-E0C4-DF1B-94F4-0E8519ECCDB6}"/>
+                <a16:creationId xmlns:a16="http://schemas.microsoft.com/office/drawing/2014/main" id="{9310D19E-EA0B-AC35-9973-2A1E0BBA546F}"/>
               </a:ext>
             </a:extLst>
           </p:cNvPr>
@@ -21886,7 +22342,7 @@
     </p:spTree>
     <p:extLst>
       <p:ext uri="{BB962C8B-B14F-4D97-AF65-F5344CB8AC3E}">
-        <p14:creationId xmlns:p14="http://schemas.microsoft.com/office/powerpoint/2010/main" val="476457107"/>
+        <p14:creationId xmlns:p14="http://schemas.microsoft.com/office/powerpoint/2010/main" val="649339427"/>
       </p:ext>
     </p:extLst>
   </p:cSld>
@@ -21918,7 +22374,7 @@
           <p:cNvPr id="2" name="正方形/長方形 1">
             <a:extLst>
               <a:ext uri="{FF2B5EF4-FFF2-40B4-BE49-F238E27FC236}">
-                <a16:creationId xmlns:a16="http://schemas.microsoft.com/office/drawing/2014/main" id="{BE804E5F-4DF7-81B2-7228-47D8634F60D4}"/>
+                <a16:creationId xmlns:a16="http://schemas.microsoft.com/office/drawing/2014/main" id="{FF052011-E3EA-2030-2489-5D69CFC9EEA5}"/>
               </a:ext>
             </a:extLst>
           </p:cNvPr>
@@ -21986,7 +22442,7 @@
           <p:cNvPr id="3" name="正方形/長方形 2">
             <a:extLst>
               <a:ext uri="{FF2B5EF4-FFF2-40B4-BE49-F238E27FC236}">
-                <a16:creationId xmlns:a16="http://schemas.microsoft.com/office/drawing/2014/main" id="{08446E43-655D-8F75-BF1A-371098840AED}"/>
+                <a16:creationId xmlns:a16="http://schemas.microsoft.com/office/drawing/2014/main" id="{FB1173C7-3BAC-0603-131E-114846E71664}"/>
               </a:ext>
             </a:extLst>
           </p:cNvPr>
@@ -22054,7 +22510,7 @@
           <p:cNvPr id="4" name="テキスト ボックス 3">
             <a:extLst>
               <a:ext uri="{FF2B5EF4-FFF2-40B4-BE49-F238E27FC236}">
-                <a16:creationId xmlns:a16="http://schemas.microsoft.com/office/drawing/2014/main" id="{44323636-6252-6F98-0675-49CBAF4E8449}"/>
+                <a16:creationId xmlns:a16="http://schemas.microsoft.com/office/drawing/2014/main" id="{BD61862D-B18D-70FD-FCC2-C8EDD6126DC2}"/>
               </a:ext>
             </a:extLst>
           </p:cNvPr>
@@ -22107,7 +22563,7 @@
           <p:cNvPr id="5" name="テキスト ボックス 4">
             <a:extLst>
               <a:ext uri="{FF2B5EF4-FFF2-40B4-BE49-F238E27FC236}">
-                <a16:creationId xmlns:a16="http://schemas.microsoft.com/office/drawing/2014/main" id="{5B4FC8E9-B470-44E6-F2DF-3F84A614F429}"/>
+                <a16:creationId xmlns:a16="http://schemas.microsoft.com/office/drawing/2014/main" id="{3AA8B7F7-776F-45CA-E784-7AEC5EDB309A}"/>
               </a:ext>
             </a:extLst>
           </p:cNvPr>
@@ -22153,7 +22609,7 @@
           <p:cNvPr id="6" name="正方形/長方形 5">
             <a:extLst>
               <a:ext uri="{FF2B5EF4-FFF2-40B4-BE49-F238E27FC236}">
-                <a16:creationId xmlns:a16="http://schemas.microsoft.com/office/drawing/2014/main" id="{36B80A47-0568-D49A-A961-7B819D58FEE8}"/>
+                <a16:creationId xmlns:a16="http://schemas.microsoft.com/office/drawing/2014/main" id="{963B35ED-17E3-2D1B-306B-42EB550B1E0B}"/>
               </a:ext>
             </a:extLst>
           </p:cNvPr>
@@ -22221,7 +22677,7 @@
           <p:cNvPr id="7" name="テキスト ボックス 6">
             <a:extLst>
               <a:ext uri="{FF2B5EF4-FFF2-40B4-BE49-F238E27FC236}">
-                <a16:creationId xmlns:a16="http://schemas.microsoft.com/office/drawing/2014/main" id="{DA3B02D3-01E0-09D2-F5EE-F028D0B14487}"/>
+                <a16:creationId xmlns:a16="http://schemas.microsoft.com/office/drawing/2014/main" id="{5010B09C-C31F-1EBB-254E-52800411D95D}"/>
               </a:ext>
             </a:extLst>
           </p:cNvPr>
@@ -22267,7 +22723,7 @@
           <p:cNvPr id="8" name="テキスト ボックス 7">
             <a:extLst>
               <a:ext uri="{FF2B5EF4-FFF2-40B4-BE49-F238E27FC236}">
-                <a16:creationId xmlns:a16="http://schemas.microsoft.com/office/drawing/2014/main" id="{95DCC7ED-30F8-0CD4-97A1-30201166273C}"/>
+                <a16:creationId xmlns:a16="http://schemas.microsoft.com/office/drawing/2014/main" id="{180CA2BB-0E74-5201-199D-38E92B5F0B1A}"/>
               </a:ext>
             </a:extLst>
           </p:cNvPr>
@@ -22320,7 +22776,7 @@
           <p:cNvPr id="9" name="テキスト ボックス 8">
             <a:extLst>
               <a:ext uri="{FF2B5EF4-FFF2-40B4-BE49-F238E27FC236}">
-                <a16:creationId xmlns:a16="http://schemas.microsoft.com/office/drawing/2014/main" id="{31698BD8-BB0B-3A1B-9313-337BCD38E686}"/>
+                <a16:creationId xmlns:a16="http://schemas.microsoft.com/office/drawing/2014/main" id="{552F1547-B9B9-872B-DBED-F2A33B3E01BE}"/>
               </a:ext>
             </a:extLst>
           </p:cNvPr>
@@ -22366,7 +22822,7 @@
           <p:cNvPr id="10" name="四角形: 角を丸くする 9">
             <a:extLst>
               <a:ext uri="{FF2B5EF4-FFF2-40B4-BE49-F238E27FC236}">
-                <a16:creationId xmlns:a16="http://schemas.microsoft.com/office/drawing/2014/main" id="{1645F31C-FB16-F79D-569C-D247D8C2E70D}"/>
+                <a16:creationId xmlns:a16="http://schemas.microsoft.com/office/drawing/2014/main" id="{37810EB4-5FA1-678D-B602-473D3992B3A9}"/>
               </a:ext>
             </a:extLst>
           </p:cNvPr>
@@ -22422,7 +22878,7 @@
           <p:cNvPr id="11" name="楕円 10">
             <a:extLst>
               <a:ext uri="{FF2B5EF4-FFF2-40B4-BE49-F238E27FC236}">
-                <a16:creationId xmlns:a16="http://schemas.microsoft.com/office/drawing/2014/main" id="{1011C4B2-6259-7038-49B7-B7B1751392D0}"/>
+                <a16:creationId xmlns:a16="http://schemas.microsoft.com/office/drawing/2014/main" id="{A90DC343-320B-F1C9-C25F-A1D934945263}"/>
               </a:ext>
             </a:extLst>
           </p:cNvPr>
@@ -22490,7 +22946,7 @@
           <p:cNvPr id="12" name="テキスト ボックス 11">
             <a:extLst>
               <a:ext uri="{FF2B5EF4-FFF2-40B4-BE49-F238E27FC236}">
-                <a16:creationId xmlns:a16="http://schemas.microsoft.com/office/drawing/2014/main" id="{38D13AD4-E6C8-A105-75D4-72B2A9D9AC2F}"/>
+                <a16:creationId xmlns:a16="http://schemas.microsoft.com/office/drawing/2014/main" id="{4A98D2E8-88E7-68B3-EA1D-75FA2BF8C457}"/>
               </a:ext>
             </a:extLst>
           </p:cNvPr>
@@ -22543,7 +22999,7 @@
           <p:cNvPr id="13" name="テキスト ボックス 12">
             <a:extLst>
               <a:ext uri="{FF2B5EF4-FFF2-40B4-BE49-F238E27FC236}">
-                <a16:creationId xmlns:a16="http://schemas.microsoft.com/office/drawing/2014/main" id="{BB955800-B0F2-62F9-2923-68AD89F36CAE}"/>
+                <a16:creationId xmlns:a16="http://schemas.microsoft.com/office/drawing/2014/main" id="{B501BB00-CB8A-1C5D-0B86-78F70E6F4933}"/>
               </a:ext>
             </a:extLst>
           </p:cNvPr>
@@ -22589,7 +23045,7 @@
           <p:cNvPr id="14" name="テキスト ボックス 13">
             <a:extLst>
               <a:ext uri="{FF2B5EF4-FFF2-40B4-BE49-F238E27FC236}">
-                <a16:creationId xmlns:a16="http://schemas.microsoft.com/office/drawing/2014/main" id="{EC83C264-6F1C-00D7-4F97-2F84A9003B61}"/>
+                <a16:creationId xmlns:a16="http://schemas.microsoft.com/office/drawing/2014/main" id="{2DB2D827-90CF-B565-4701-450231CF3FBB}"/>
               </a:ext>
             </a:extLst>
           </p:cNvPr>
@@ -22662,7 +23118,7 @@
           <p:cNvPr id="15" name="四角形: 角を丸くする 14">
             <a:extLst>
               <a:ext uri="{FF2B5EF4-FFF2-40B4-BE49-F238E27FC236}">
-                <a16:creationId xmlns:a16="http://schemas.microsoft.com/office/drawing/2014/main" id="{22C16AF5-E255-2AC2-42A9-04107B760725}"/>
+                <a16:creationId xmlns:a16="http://schemas.microsoft.com/office/drawing/2014/main" id="{96A76DDD-5FE2-7B6D-CA39-45CB361F6758}"/>
               </a:ext>
             </a:extLst>
           </p:cNvPr>
@@ -22718,7 +23174,7 @@
           <p:cNvPr id="16" name="楕円 15">
             <a:extLst>
               <a:ext uri="{FF2B5EF4-FFF2-40B4-BE49-F238E27FC236}">
-                <a16:creationId xmlns:a16="http://schemas.microsoft.com/office/drawing/2014/main" id="{99CA1DD5-A33B-6029-5C41-1BD4D399A6BD}"/>
+                <a16:creationId xmlns:a16="http://schemas.microsoft.com/office/drawing/2014/main" id="{727B7CBB-482E-244A-6937-108BB434959E}"/>
               </a:ext>
             </a:extLst>
           </p:cNvPr>
@@ -22786,7 +23242,7 @@
           <p:cNvPr id="17" name="テキスト ボックス 16">
             <a:extLst>
               <a:ext uri="{FF2B5EF4-FFF2-40B4-BE49-F238E27FC236}">
-                <a16:creationId xmlns:a16="http://schemas.microsoft.com/office/drawing/2014/main" id="{5EA1AB23-4B62-9838-414B-34FB5128BCCC}"/>
+                <a16:creationId xmlns:a16="http://schemas.microsoft.com/office/drawing/2014/main" id="{8FF817C9-D12C-C03B-6810-B1E8C80FFAED}"/>
               </a:ext>
             </a:extLst>
           </p:cNvPr>
@@ -22839,7 +23295,7 @@
           <p:cNvPr id="18" name="テキスト ボックス 17">
             <a:extLst>
               <a:ext uri="{FF2B5EF4-FFF2-40B4-BE49-F238E27FC236}">
-                <a16:creationId xmlns:a16="http://schemas.microsoft.com/office/drawing/2014/main" id="{64375E7D-72AC-8A58-0D37-D0F2D28CF3FE}"/>
+                <a16:creationId xmlns:a16="http://schemas.microsoft.com/office/drawing/2014/main" id="{8C80DD89-941B-A0B3-0842-EE5B6FE1CD65}"/>
               </a:ext>
             </a:extLst>
           </p:cNvPr>
@@ -22885,7 +23341,7 @@
           <p:cNvPr id="19" name="テキスト ボックス 18">
             <a:extLst>
               <a:ext uri="{FF2B5EF4-FFF2-40B4-BE49-F238E27FC236}">
-                <a16:creationId xmlns:a16="http://schemas.microsoft.com/office/drawing/2014/main" id="{95D15A3E-15B3-BDC7-8FFB-3B7C8062368C}"/>
+                <a16:creationId xmlns:a16="http://schemas.microsoft.com/office/drawing/2014/main" id="{58CD5AB2-3E53-ACE8-8E36-C30E2748B080}"/>
               </a:ext>
             </a:extLst>
           </p:cNvPr>
@@ -22948,7 +23404,7 @@
           <p:cNvPr id="20" name="四角形: 角を丸くする 19">
             <a:extLst>
               <a:ext uri="{FF2B5EF4-FFF2-40B4-BE49-F238E27FC236}">
-                <a16:creationId xmlns:a16="http://schemas.microsoft.com/office/drawing/2014/main" id="{1CDCFA44-4EE7-FED1-E0EE-8839104B0390}"/>
+                <a16:creationId xmlns:a16="http://schemas.microsoft.com/office/drawing/2014/main" id="{F661F25E-A756-2495-B09E-79E1268A589F}"/>
               </a:ext>
             </a:extLst>
           </p:cNvPr>
@@ -23004,7 +23460,7 @@
           <p:cNvPr id="21" name="楕円 20">
             <a:extLst>
               <a:ext uri="{FF2B5EF4-FFF2-40B4-BE49-F238E27FC236}">
-                <a16:creationId xmlns:a16="http://schemas.microsoft.com/office/drawing/2014/main" id="{F1C7C03E-5DBE-DE31-4368-8B5F5D2E510E}"/>
+                <a16:creationId xmlns:a16="http://schemas.microsoft.com/office/drawing/2014/main" id="{C8D24318-B934-1B1A-E3A2-37FDF532857E}"/>
               </a:ext>
             </a:extLst>
           </p:cNvPr>
@@ -23072,7 +23528,7 @@
           <p:cNvPr id="22" name="テキスト ボックス 21">
             <a:extLst>
               <a:ext uri="{FF2B5EF4-FFF2-40B4-BE49-F238E27FC236}">
-                <a16:creationId xmlns:a16="http://schemas.microsoft.com/office/drawing/2014/main" id="{1D5E75CD-E848-7AE9-4CCF-19136EDE2AB4}"/>
+                <a16:creationId xmlns:a16="http://schemas.microsoft.com/office/drawing/2014/main" id="{8215B3EF-0A51-60D1-E945-CF786146A9C8}"/>
               </a:ext>
             </a:extLst>
           </p:cNvPr>
@@ -23125,7 +23581,7 @@
           <p:cNvPr id="23" name="テキスト ボックス 22">
             <a:extLst>
               <a:ext uri="{FF2B5EF4-FFF2-40B4-BE49-F238E27FC236}">
-                <a16:creationId xmlns:a16="http://schemas.microsoft.com/office/drawing/2014/main" id="{BFD6908B-D21B-904B-530D-EF413D7FEE03}"/>
+                <a16:creationId xmlns:a16="http://schemas.microsoft.com/office/drawing/2014/main" id="{CC4C16CB-127B-A0D8-ECEB-3FD12F176ACE}"/>
               </a:ext>
             </a:extLst>
           </p:cNvPr>
@@ -23171,7 +23627,7 @@
           <p:cNvPr id="24" name="テキスト ボックス 23">
             <a:extLst>
               <a:ext uri="{FF2B5EF4-FFF2-40B4-BE49-F238E27FC236}">
-                <a16:creationId xmlns:a16="http://schemas.microsoft.com/office/drawing/2014/main" id="{A489E76F-C509-FEF2-BE75-10C60FA74C64}"/>
+                <a16:creationId xmlns:a16="http://schemas.microsoft.com/office/drawing/2014/main" id="{EC1845AF-D69C-FFCC-D9D8-CC8FF3DF1BC9}"/>
               </a:ext>
             </a:extLst>
           </p:cNvPr>
@@ -23234,7 +23690,7 @@
           <p:cNvPr id="25" name="矢印: 右 24">
             <a:extLst>
               <a:ext uri="{FF2B5EF4-FFF2-40B4-BE49-F238E27FC236}">
-                <a16:creationId xmlns:a16="http://schemas.microsoft.com/office/drawing/2014/main" id="{D28E3F2F-75E5-AAEB-6D6D-4DB4D764C14D}"/>
+                <a16:creationId xmlns:a16="http://schemas.microsoft.com/office/drawing/2014/main" id="{A2363E13-C9A1-C5A6-FFB3-2995F3D03317}"/>
               </a:ext>
             </a:extLst>
           </p:cNvPr>
@@ -23302,7 +23758,7 @@
           <p:cNvPr id="26" name="矢印: 右 25">
             <a:extLst>
               <a:ext uri="{FF2B5EF4-FFF2-40B4-BE49-F238E27FC236}">
-                <a16:creationId xmlns:a16="http://schemas.microsoft.com/office/drawing/2014/main" id="{1CBAF386-D4DE-BF70-E5D9-412C14F581CD}"/>
+                <a16:creationId xmlns:a16="http://schemas.microsoft.com/office/drawing/2014/main" id="{84F89EF7-F981-26FA-BD0D-149FF0407576}"/>
               </a:ext>
             </a:extLst>
           </p:cNvPr>
@@ -23370,7 +23826,7 @@
           <p:cNvPr id="27" name="四角形: 角を丸くする 26">
             <a:extLst>
               <a:ext uri="{FF2B5EF4-FFF2-40B4-BE49-F238E27FC236}">
-                <a16:creationId xmlns:a16="http://schemas.microsoft.com/office/drawing/2014/main" id="{75905F58-4215-6A28-9B3A-B6E40B40AEC9}"/>
+                <a16:creationId xmlns:a16="http://schemas.microsoft.com/office/drawing/2014/main" id="{6C5C441A-578D-B934-DCD1-571336433410}"/>
               </a:ext>
             </a:extLst>
           </p:cNvPr>
@@ -23440,7 +23896,7 @@
           <p:cNvPr id="28" name="正方形/長方形 27">
             <a:extLst>
               <a:ext uri="{FF2B5EF4-FFF2-40B4-BE49-F238E27FC236}">
-                <a16:creationId xmlns:a16="http://schemas.microsoft.com/office/drawing/2014/main" id="{944C9D4B-B0CD-7AAC-8DD0-FB808B473198}"/>
+                <a16:creationId xmlns:a16="http://schemas.microsoft.com/office/drawing/2014/main" id="{88572D41-2E36-9A5A-9F67-1F50F0F07512}"/>
               </a:ext>
             </a:extLst>
           </p:cNvPr>
@@ -23508,7 +23964,7 @@
           <p:cNvPr id="29" name="テキスト ボックス 28">
             <a:extLst>
               <a:ext uri="{FF2B5EF4-FFF2-40B4-BE49-F238E27FC236}">
-                <a16:creationId xmlns:a16="http://schemas.microsoft.com/office/drawing/2014/main" id="{84C92B29-55EE-8774-E3B5-F8AB805BB5F7}"/>
+                <a16:creationId xmlns:a16="http://schemas.microsoft.com/office/drawing/2014/main" id="{89401CAD-FC56-84E0-6178-129989359C28}"/>
               </a:ext>
             </a:extLst>
           </p:cNvPr>
@@ -23554,7 +24010,7 @@
           <p:cNvPr id="30" name="テキスト ボックス 29">
             <a:extLst>
               <a:ext uri="{FF2B5EF4-FFF2-40B4-BE49-F238E27FC236}">
-                <a16:creationId xmlns:a16="http://schemas.microsoft.com/office/drawing/2014/main" id="{4E5177C3-5927-7613-EE30-978924413172}"/>
+                <a16:creationId xmlns:a16="http://schemas.microsoft.com/office/drawing/2014/main" id="{460E59F5-2431-B45F-073A-8B396F9CD4CA}"/>
               </a:ext>
             </a:extLst>
           </p:cNvPr>
@@ -23590,7 +24046,7 @@
                 <a:latin typeface="Yu Gothic UI" panose="020B0500000000000000" pitchFamily="50" charset="-128"/>
                 <a:ea typeface="Yu Gothic UI" panose="020B0500000000000000" pitchFamily="50" charset="-128"/>
               </a:rPr>
-              <a:t>ファイルを追加・削除しても、いま表示しているスライドが終わったあとに切り替わります。普段は全画面（キオスクモード）のまま運用します。</a:t>
+              <a:t>ファイルを追加・削除しても、いま表示しているスライドが終わったあとに切り替わります。普段は全画面（コンテンツ表示モード）のまま運用します。</a:t>
             </a:r>
           </a:p>
         </p:txBody>
@@ -23598,7 +24054,7 @@
     </p:spTree>
     <p:extLst>
       <p:ext uri="{BB962C8B-B14F-4D97-AF65-F5344CB8AC3E}">
-        <p14:creationId xmlns:p14="http://schemas.microsoft.com/office/powerpoint/2010/main" val="211992938"/>
+        <p14:creationId xmlns:p14="http://schemas.microsoft.com/office/powerpoint/2010/main" val="2081831264"/>
       </p:ext>
     </p:extLst>
   </p:cSld>
@@ -23630,7 +24086,7 @@
           <p:cNvPr id="2" name="正方形/長方形 1">
             <a:extLst>
               <a:ext uri="{FF2B5EF4-FFF2-40B4-BE49-F238E27FC236}">
-                <a16:creationId xmlns:a16="http://schemas.microsoft.com/office/drawing/2014/main" id="{FE15C977-F761-20CD-1C50-5679B25100B3}"/>
+                <a16:creationId xmlns:a16="http://schemas.microsoft.com/office/drawing/2014/main" id="{3F969230-7334-A755-E1D9-5C539A6232BC}"/>
               </a:ext>
             </a:extLst>
           </p:cNvPr>
@@ -23698,7 +24154,7 @@
           <p:cNvPr id="3" name="正方形/長方形 2">
             <a:extLst>
               <a:ext uri="{FF2B5EF4-FFF2-40B4-BE49-F238E27FC236}">
-                <a16:creationId xmlns:a16="http://schemas.microsoft.com/office/drawing/2014/main" id="{FFC8E041-9B60-C187-4C67-DEC3CDB1EF43}"/>
+                <a16:creationId xmlns:a16="http://schemas.microsoft.com/office/drawing/2014/main" id="{25297AFE-6E68-941C-C78E-5DB9DAA67809}"/>
               </a:ext>
             </a:extLst>
           </p:cNvPr>
@@ -23766,7 +24222,7 @@
           <p:cNvPr id="4" name="テキスト ボックス 3">
             <a:extLst>
               <a:ext uri="{FF2B5EF4-FFF2-40B4-BE49-F238E27FC236}">
-                <a16:creationId xmlns:a16="http://schemas.microsoft.com/office/drawing/2014/main" id="{45CAC1FE-8D30-5BC1-3E3D-0BD23A11FB03}"/>
+                <a16:creationId xmlns:a16="http://schemas.microsoft.com/office/drawing/2014/main" id="{8603FD17-5DB5-0524-7282-E670E62FF839}"/>
               </a:ext>
             </a:extLst>
           </p:cNvPr>
@@ -23819,7 +24275,7 @@
           <p:cNvPr id="5" name="テキスト ボックス 4">
             <a:extLst>
               <a:ext uri="{FF2B5EF4-FFF2-40B4-BE49-F238E27FC236}">
-                <a16:creationId xmlns:a16="http://schemas.microsoft.com/office/drawing/2014/main" id="{B5A3F726-D1EA-292D-B195-F72C1402CE01}"/>
+                <a16:creationId xmlns:a16="http://schemas.microsoft.com/office/drawing/2014/main" id="{8D504B98-8600-26EE-4DB7-DA6804F0A850}"/>
               </a:ext>
             </a:extLst>
           </p:cNvPr>
@@ -23865,7 +24321,7 @@
           <p:cNvPr id="6" name="正方形/長方形 5">
             <a:extLst>
               <a:ext uri="{FF2B5EF4-FFF2-40B4-BE49-F238E27FC236}">
-                <a16:creationId xmlns:a16="http://schemas.microsoft.com/office/drawing/2014/main" id="{99812EE9-AD69-72E7-6F43-EAE73665782A}"/>
+                <a16:creationId xmlns:a16="http://schemas.microsoft.com/office/drawing/2014/main" id="{9F3F9600-09D9-8A40-3803-562A7D1AFE27}"/>
               </a:ext>
             </a:extLst>
           </p:cNvPr>
@@ -23933,7 +24389,7 @@
           <p:cNvPr id="7" name="四角形: 角を丸くする 6">
             <a:extLst>
               <a:ext uri="{FF2B5EF4-FFF2-40B4-BE49-F238E27FC236}">
-                <a16:creationId xmlns:a16="http://schemas.microsoft.com/office/drawing/2014/main" id="{31986121-972F-4901-CE47-DA9F30D7DDD2}"/>
+                <a16:creationId xmlns:a16="http://schemas.microsoft.com/office/drawing/2014/main" id="{714A26A3-0FE8-4C10-193E-1E3B12B4FE1B}"/>
               </a:ext>
             </a:extLst>
           </p:cNvPr>
@@ -24003,7 +24459,7 @@
           <p:cNvPr id="8" name="テキスト ボックス 7">
             <a:extLst>
               <a:ext uri="{FF2B5EF4-FFF2-40B4-BE49-F238E27FC236}">
-                <a16:creationId xmlns:a16="http://schemas.microsoft.com/office/drawing/2014/main" id="{3A913C15-8C18-C824-BFA8-3DDE3B743778}"/>
+                <a16:creationId xmlns:a16="http://schemas.microsoft.com/office/drawing/2014/main" id="{1A41C1B5-0168-63E2-462B-B7E26426304C}"/>
               </a:ext>
             </a:extLst>
           </p:cNvPr>
@@ -24049,7 +24505,7 @@
           <p:cNvPr id="9" name="テキスト ボックス 8">
             <a:extLst>
               <a:ext uri="{FF2B5EF4-FFF2-40B4-BE49-F238E27FC236}">
-                <a16:creationId xmlns:a16="http://schemas.microsoft.com/office/drawing/2014/main" id="{5A30FD06-160B-A6C6-0927-16CE6573C5B9}"/>
+                <a16:creationId xmlns:a16="http://schemas.microsoft.com/office/drawing/2014/main" id="{8038057C-0C6D-07FB-80DB-D0076026CFF3}"/>
               </a:ext>
             </a:extLst>
           </p:cNvPr>
@@ -24095,7 +24551,7 @@
           <p:cNvPr id="10" name="テキスト ボックス 9">
             <a:extLst>
               <a:ext uri="{FF2B5EF4-FFF2-40B4-BE49-F238E27FC236}">
-                <a16:creationId xmlns:a16="http://schemas.microsoft.com/office/drawing/2014/main" id="{44180D1A-690E-4777-20A1-84E2A588DF2F}"/>
+                <a16:creationId xmlns:a16="http://schemas.microsoft.com/office/drawing/2014/main" id="{B5EE31BE-43E3-72B2-F328-732C7A1C9CDF}"/>
               </a:ext>
             </a:extLst>
           </p:cNvPr>
@@ -24148,7 +24604,7 @@
           <p:cNvPr id="11" name="四角形: 角を丸くする 10">
             <a:extLst>
               <a:ext uri="{FF2B5EF4-FFF2-40B4-BE49-F238E27FC236}">
-                <a16:creationId xmlns:a16="http://schemas.microsoft.com/office/drawing/2014/main" id="{2A829F24-045C-CB41-7619-487A1AB0D71B}"/>
+                <a16:creationId xmlns:a16="http://schemas.microsoft.com/office/drawing/2014/main" id="{AA6967EC-E391-C374-09DA-47907B6AC64D}"/>
               </a:ext>
             </a:extLst>
           </p:cNvPr>
@@ -24204,7 +24660,7 @@
           <p:cNvPr id="12" name="楕円 11">
             <a:extLst>
               <a:ext uri="{FF2B5EF4-FFF2-40B4-BE49-F238E27FC236}">
-                <a16:creationId xmlns:a16="http://schemas.microsoft.com/office/drawing/2014/main" id="{1776E471-E9D5-8CC9-437D-51EA5332B6A0}"/>
+                <a16:creationId xmlns:a16="http://schemas.microsoft.com/office/drawing/2014/main" id="{A98DF53A-14D3-7C43-D694-078855C848E4}"/>
               </a:ext>
             </a:extLst>
           </p:cNvPr>
@@ -24272,7 +24728,7 @@
           <p:cNvPr id="13" name="テキスト ボックス 12">
             <a:extLst>
               <a:ext uri="{FF2B5EF4-FFF2-40B4-BE49-F238E27FC236}">
-                <a16:creationId xmlns:a16="http://schemas.microsoft.com/office/drawing/2014/main" id="{0062D32D-633B-4A2F-CF52-4755001D19B7}"/>
+                <a16:creationId xmlns:a16="http://schemas.microsoft.com/office/drawing/2014/main" id="{776E6DE8-E8C2-4DEE-705F-16B9FB1DD30E}"/>
               </a:ext>
             </a:extLst>
           </p:cNvPr>
@@ -24325,7 +24781,7 @@
           <p:cNvPr id="14" name="テキスト ボックス 13">
             <a:extLst>
               <a:ext uri="{FF2B5EF4-FFF2-40B4-BE49-F238E27FC236}">
-                <a16:creationId xmlns:a16="http://schemas.microsoft.com/office/drawing/2014/main" id="{84C29E51-3D54-A5BE-DFD8-9F718AA33860}"/>
+                <a16:creationId xmlns:a16="http://schemas.microsoft.com/office/drawing/2014/main" id="{CECFC501-5EF4-62C3-32F8-AA0C21EF1B19}"/>
               </a:ext>
             </a:extLst>
           </p:cNvPr>
@@ -24371,7 +24827,7 @@
           <p:cNvPr id="15" name="テキスト ボックス 14">
             <a:extLst>
               <a:ext uri="{FF2B5EF4-FFF2-40B4-BE49-F238E27FC236}">
-                <a16:creationId xmlns:a16="http://schemas.microsoft.com/office/drawing/2014/main" id="{0B0E4883-5EE6-B1A0-3AF2-90E4097E8037}"/>
+                <a16:creationId xmlns:a16="http://schemas.microsoft.com/office/drawing/2014/main" id="{BEB84603-94B9-FE0F-386E-F57ABD9B48E1}"/>
               </a:ext>
             </a:extLst>
           </p:cNvPr>
@@ -24437,7 +24893,7 @@
           <p:cNvPr id="16" name="四角形: 角を丸くする 15">
             <a:extLst>
               <a:ext uri="{FF2B5EF4-FFF2-40B4-BE49-F238E27FC236}">
-                <a16:creationId xmlns:a16="http://schemas.microsoft.com/office/drawing/2014/main" id="{4D978324-4B39-421A-CCE5-6A58B4018A6D}"/>
+                <a16:creationId xmlns:a16="http://schemas.microsoft.com/office/drawing/2014/main" id="{17C4F482-B05A-9B0C-24CB-C7BCD1A0E02B}"/>
               </a:ext>
             </a:extLst>
           </p:cNvPr>
@@ -24493,7 +24949,7 @@
           <p:cNvPr id="17" name="楕円 16">
             <a:extLst>
               <a:ext uri="{FF2B5EF4-FFF2-40B4-BE49-F238E27FC236}">
-                <a16:creationId xmlns:a16="http://schemas.microsoft.com/office/drawing/2014/main" id="{0B16B606-9CDC-6F9A-421C-EE9392410544}"/>
+                <a16:creationId xmlns:a16="http://schemas.microsoft.com/office/drawing/2014/main" id="{F5168BD1-49D7-EB02-5AE1-8A7BFA975A5E}"/>
               </a:ext>
             </a:extLst>
           </p:cNvPr>
@@ -24561,7 +25017,7 @@
           <p:cNvPr id="18" name="テキスト ボックス 17">
             <a:extLst>
               <a:ext uri="{FF2B5EF4-FFF2-40B4-BE49-F238E27FC236}">
-                <a16:creationId xmlns:a16="http://schemas.microsoft.com/office/drawing/2014/main" id="{44963660-5C00-907A-CAF9-0478D6064F47}"/>
+                <a16:creationId xmlns:a16="http://schemas.microsoft.com/office/drawing/2014/main" id="{DF94C07E-E926-5038-B011-DDAA1717B9E0}"/>
               </a:ext>
             </a:extLst>
           </p:cNvPr>
@@ -24614,7 +25070,7 @@
           <p:cNvPr id="19" name="テキスト ボックス 18">
             <a:extLst>
               <a:ext uri="{FF2B5EF4-FFF2-40B4-BE49-F238E27FC236}">
-                <a16:creationId xmlns:a16="http://schemas.microsoft.com/office/drawing/2014/main" id="{FE780C4C-9687-5C18-125C-A47A3BA890DE}"/>
+                <a16:creationId xmlns:a16="http://schemas.microsoft.com/office/drawing/2014/main" id="{D4DE2408-D474-B88E-5665-5E7CB32A86F5}"/>
               </a:ext>
             </a:extLst>
           </p:cNvPr>
@@ -24660,7 +25116,7 @@
           <p:cNvPr id="20" name="テキスト ボックス 19">
             <a:extLst>
               <a:ext uri="{FF2B5EF4-FFF2-40B4-BE49-F238E27FC236}">
-                <a16:creationId xmlns:a16="http://schemas.microsoft.com/office/drawing/2014/main" id="{6D661D51-14E3-0A1B-9039-BB3EC9269AFC}"/>
+                <a16:creationId xmlns:a16="http://schemas.microsoft.com/office/drawing/2014/main" id="{5F42431E-8944-303A-29E6-73AEB91966F4}"/>
               </a:ext>
             </a:extLst>
           </p:cNvPr>
@@ -24763,7 +25219,7 @@
           <p:cNvPr id="21" name="四角形: 角を丸くする 20">
             <a:extLst>
               <a:ext uri="{FF2B5EF4-FFF2-40B4-BE49-F238E27FC236}">
-                <a16:creationId xmlns:a16="http://schemas.microsoft.com/office/drawing/2014/main" id="{23B02095-1B7C-2A30-BC7C-FBD783C76864}"/>
+                <a16:creationId xmlns:a16="http://schemas.microsoft.com/office/drawing/2014/main" id="{81B931A5-8E31-3EC6-5469-32D949AF37F6}"/>
               </a:ext>
             </a:extLst>
           </p:cNvPr>
@@ -24819,7 +25275,7 @@
           <p:cNvPr id="22" name="楕円 21">
             <a:extLst>
               <a:ext uri="{FF2B5EF4-FFF2-40B4-BE49-F238E27FC236}">
-                <a16:creationId xmlns:a16="http://schemas.microsoft.com/office/drawing/2014/main" id="{89F41B4A-9565-9CEF-565A-C4C1D51FD3D5}"/>
+                <a16:creationId xmlns:a16="http://schemas.microsoft.com/office/drawing/2014/main" id="{7F26C1FC-B37B-92B4-4CEC-B12B064FC25A}"/>
               </a:ext>
             </a:extLst>
           </p:cNvPr>
@@ -24887,7 +25343,7 @@
           <p:cNvPr id="23" name="テキスト ボックス 22">
             <a:extLst>
               <a:ext uri="{FF2B5EF4-FFF2-40B4-BE49-F238E27FC236}">
-                <a16:creationId xmlns:a16="http://schemas.microsoft.com/office/drawing/2014/main" id="{F12AAE91-6EE1-37F3-6D60-F8F4947FB001}"/>
+                <a16:creationId xmlns:a16="http://schemas.microsoft.com/office/drawing/2014/main" id="{365D954E-D91D-EDA4-939E-7E30B511F39F}"/>
               </a:ext>
             </a:extLst>
           </p:cNvPr>
@@ -24940,7 +25396,7 @@
           <p:cNvPr id="24" name="テキスト ボックス 23">
             <a:extLst>
               <a:ext uri="{FF2B5EF4-FFF2-40B4-BE49-F238E27FC236}">
-                <a16:creationId xmlns:a16="http://schemas.microsoft.com/office/drawing/2014/main" id="{F9B6515D-D756-944C-35E8-6478F91727CE}"/>
+                <a16:creationId xmlns:a16="http://schemas.microsoft.com/office/drawing/2014/main" id="{6212368E-A8D1-8BD9-5480-FE678E45A9E4}"/>
               </a:ext>
             </a:extLst>
           </p:cNvPr>
@@ -24986,7 +25442,7 @@
           <p:cNvPr id="25" name="テキスト ボックス 24">
             <a:extLst>
               <a:ext uri="{FF2B5EF4-FFF2-40B4-BE49-F238E27FC236}">
-                <a16:creationId xmlns:a16="http://schemas.microsoft.com/office/drawing/2014/main" id="{1DA82EB1-BB04-2550-5992-32BED85C335C}"/>
+                <a16:creationId xmlns:a16="http://schemas.microsoft.com/office/drawing/2014/main" id="{03DDEEBF-1111-EAB1-95EE-54780B353E17}"/>
               </a:ext>
             </a:extLst>
           </p:cNvPr>
@@ -25032,7 +25488,7 @@
           <p:cNvPr id="26" name="四角形: 角を丸くする 25">
             <a:extLst>
               <a:ext uri="{FF2B5EF4-FFF2-40B4-BE49-F238E27FC236}">
-                <a16:creationId xmlns:a16="http://schemas.microsoft.com/office/drawing/2014/main" id="{1E4CDFA3-E888-6DC8-D710-EE6AD2E029F6}"/>
+                <a16:creationId xmlns:a16="http://schemas.microsoft.com/office/drawing/2014/main" id="{63E04CE3-772B-BDB0-5CF4-D0FDCF1E0DE5}"/>
               </a:ext>
             </a:extLst>
           </p:cNvPr>
@@ -25102,7 +25558,7 @@
           <p:cNvPr id="27" name="正方形/長方形 26">
             <a:extLst>
               <a:ext uri="{FF2B5EF4-FFF2-40B4-BE49-F238E27FC236}">
-                <a16:creationId xmlns:a16="http://schemas.microsoft.com/office/drawing/2014/main" id="{F2887FDC-8DDE-0950-78E9-5E2DDF78BEAC}"/>
+                <a16:creationId xmlns:a16="http://schemas.microsoft.com/office/drawing/2014/main" id="{3A8657AB-DE30-6B3A-FF72-15DA717FE43A}"/>
               </a:ext>
             </a:extLst>
           </p:cNvPr>
@@ -25170,7 +25626,7 @@
           <p:cNvPr id="28" name="テキスト ボックス 27">
             <a:extLst>
               <a:ext uri="{FF2B5EF4-FFF2-40B4-BE49-F238E27FC236}">
-                <a16:creationId xmlns:a16="http://schemas.microsoft.com/office/drawing/2014/main" id="{430FE1A1-27C1-DFB8-C1BD-EABCA6709E0A}"/>
+                <a16:creationId xmlns:a16="http://schemas.microsoft.com/office/drawing/2014/main" id="{8BC524CC-210A-AB4D-7051-A93F2CAA7726}"/>
               </a:ext>
             </a:extLst>
           </p:cNvPr>
@@ -25216,7 +25672,7 @@
           <p:cNvPr id="29" name="テキスト ボックス 28">
             <a:extLst>
               <a:ext uri="{FF2B5EF4-FFF2-40B4-BE49-F238E27FC236}">
-                <a16:creationId xmlns:a16="http://schemas.microsoft.com/office/drawing/2014/main" id="{5B686924-9C36-8210-55D7-D62229FE2A44}"/>
+                <a16:creationId xmlns:a16="http://schemas.microsoft.com/office/drawing/2014/main" id="{8B351DDA-1A41-FABD-AA0C-36733BC65AF1}"/>
               </a:ext>
             </a:extLst>
           </p:cNvPr>
@@ -25262,7 +25718,7 @@
           <p:cNvPr id="30" name="四角形: 角を丸くする 29">
             <a:extLst>
               <a:ext uri="{FF2B5EF4-FFF2-40B4-BE49-F238E27FC236}">
-                <a16:creationId xmlns:a16="http://schemas.microsoft.com/office/drawing/2014/main" id="{A79C5BE6-31F7-2D34-C811-A3F5147752C4}"/>
+                <a16:creationId xmlns:a16="http://schemas.microsoft.com/office/drawing/2014/main" id="{2E4309A3-9B07-5197-C4FC-02C1266C39D4}"/>
               </a:ext>
             </a:extLst>
           </p:cNvPr>
@@ -25332,7 +25788,7 @@
           <p:cNvPr id="31" name="正方形/長方形 30">
             <a:extLst>
               <a:ext uri="{FF2B5EF4-FFF2-40B4-BE49-F238E27FC236}">
-                <a16:creationId xmlns:a16="http://schemas.microsoft.com/office/drawing/2014/main" id="{5E0B78C6-AEA8-40EF-7263-E6C3CB57024F}"/>
+                <a16:creationId xmlns:a16="http://schemas.microsoft.com/office/drawing/2014/main" id="{7787E5C0-502B-F3D7-A11A-EE485796FF6D}"/>
               </a:ext>
             </a:extLst>
           </p:cNvPr>
@@ -25400,7 +25856,7 @@
           <p:cNvPr id="32" name="テキスト ボックス 31">
             <a:extLst>
               <a:ext uri="{FF2B5EF4-FFF2-40B4-BE49-F238E27FC236}">
-                <a16:creationId xmlns:a16="http://schemas.microsoft.com/office/drawing/2014/main" id="{76964375-B5E2-4937-7C18-C7E5C9899609}"/>
+                <a16:creationId xmlns:a16="http://schemas.microsoft.com/office/drawing/2014/main" id="{21720872-6D57-F03D-C85F-9DAE31B70E22}"/>
               </a:ext>
             </a:extLst>
           </p:cNvPr>
@@ -25446,7 +25902,7 @@
           <p:cNvPr id="33" name="テキスト ボックス 32">
             <a:extLst>
               <a:ext uri="{FF2B5EF4-FFF2-40B4-BE49-F238E27FC236}">
-                <a16:creationId xmlns:a16="http://schemas.microsoft.com/office/drawing/2014/main" id="{6ECAFBB1-D567-E29E-DCE4-4543F18F0FAE}"/>
+                <a16:creationId xmlns:a16="http://schemas.microsoft.com/office/drawing/2014/main" id="{8290E46D-AFE6-9636-8D6D-950714AAE894}"/>
               </a:ext>
             </a:extLst>
           </p:cNvPr>
@@ -25490,7 +25946,7 @@
     </p:spTree>
     <p:extLst>
       <p:ext uri="{BB962C8B-B14F-4D97-AF65-F5344CB8AC3E}">
-        <p14:creationId xmlns:p14="http://schemas.microsoft.com/office/powerpoint/2010/main" val="779923640"/>
+        <p14:creationId xmlns:p14="http://schemas.microsoft.com/office/powerpoint/2010/main" val="557009844"/>
       </p:ext>
     </p:extLst>
   </p:cSld>
@@ -25522,7 +25978,7 @@
           <p:cNvPr id="2" name="正方形/長方形 1">
             <a:extLst>
               <a:ext uri="{FF2B5EF4-FFF2-40B4-BE49-F238E27FC236}">
-                <a16:creationId xmlns:a16="http://schemas.microsoft.com/office/drawing/2014/main" id="{65F8B646-2A54-0C1D-1842-467342B82375}"/>
+                <a16:creationId xmlns:a16="http://schemas.microsoft.com/office/drawing/2014/main" id="{89193587-01F7-ABE0-A40D-D471CF78F7F9}"/>
               </a:ext>
             </a:extLst>
           </p:cNvPr>
@@ -25590,7 +26046,7 @@
           <p:cNvPr id="3" name="正方形/長方形 2">
             <a:extLst>
               <a:ext uri="{FF2B5EF4-FFF2-40B4-BE49-F238E27FC236}">
-                <a16:creationId xmlns:a16="http://schemas.microsoft.com/office/drawing/2014/main" id="{3B7F9BD7-DE5E-783A-8E51-06C0D9797A5C}"/>
+                <a16:creationId xmlns:a16="http://schemas.microsoft.com/office/drawing/2014/main" id="{56B6C15C-DDAC-FAD8-1D05-DCE363910703}"/>
               </a:ext>
             </a:extLst>
           </p:cNvPr>
@@ -25658,7 +26114,7 @@
           <p:cNvPr id="4" name="テキスト ボックス 3">
             <a:extLst>
               <a:ext uri="{FF2B5EF4-FFF2-40B4-BE49-F238E27FC236}">
-                <a16:creationId xmlns:a16="http://schemas.microsoft.com/office/drawing/2014/main" id="{74848120-E998-DF5B-3A2D-481190AD5C93}"/>
+                <a16:creationId xmlns:a16="http://schemas.microsoft.com/office/drawing/2014/main" id="{866B6CD5-745E-47F5-6AEE-D31C266EDE4E}"/>
               </a:ext>
             </a:extLst>
           </p:cNvPr>
@@ -25711,7 +26167,7 @@
           <p:cNvPr id="5" name="テキスト ボックス 4">
             <a:extLst>
               <a:ext uri="{FF2B5EF4-FFF2-40B4-BE49-F238E27FC236}">
-                <a16:creationId xmlns:a16="http://schemas.microsoft.com/office/drawing/2014/main" id="{930B5484-E49B-3AFE-0003-9789C537D499}"/>
+                <a16:creationId xmlns:a16="http://schemas.microsoft.com/office/drawing/2014/main" id="{457CAAAE-A75B-587C-318A-62631303CB13}"/>
               </a:ext>
             </a:extLst>
           </p:cNvPr>
@@ -25757,7 +26213,7 @@
           <p:cNvPr id="6" name="正方形/長方形 5">
             <a:extLst>
               <a:ext uri="{FF2B5EF4-FFF2-40B4-BE49-F238E27FC236}">
-                <a16:creationId xmlns:a16="http://schemas.microsoft.com/office/drawing/2014/main" id="{2372A144-BF84-120B-5E01-68C0F9960F42}"/>
+                <a16:creationId xmlns:a16="http://schemas.microsoft.com/office/drawing/2014/main" id="{5E7FA1AC-D0EB-5B4A-5254-62ACE02182D7}"/>
               </a:ext>
             </a:extLst>
           </p:cNvPr>
@@ -25825,7 +26281,7 @@
           <p:cNvPr id="7" name="四角形: 角を丸くする 6">
             <a:extLst>
               <a:ext uri="{FF2B5EF4-FFF2-40B4-BE49-F238E27FC236}">
-                <a16:creationId xmlns:a16="http://schemas.microsoft.com/office/drawing/2014/main" id="{0E05D1F2-BC6B-8120-292E-EC5AD6B2F494}"/>
+                <a16:creationId xmlns:a16="http://schemas.microsoft.com/office/drawing/2014/main" id="{C61148C6-7D42-D50A-C800-A2624D146963}"/>
               </a:ext>
             </a:extLst>
           </p:cNvPr>
@@ -25895,7 +26351,7 @@
           <p:cNvPr id="8" name="テキスト ボックス 7">
             <a:extLst>
               <a:ext uri="{FF2B5EF4-FFF2-40B4-BE49-F238E27FC236}">
-                <a16:creationId xmlns:a16="http://schemas.microsoft.com/office/drawing/2014/main" id="{080C453D-80AF-0CEC-2843-8DBD7D765C88}"/>
+                <a16:creationId xmlns:a16="http://schemas.microsoft.com/office/drawing/2014/main" id="{4B49BE83-7391-E6CE-372F-777E6B0A3F8A}"/>
               </a:ext>
             </a:extLst>
           </p:cNvPr>
@@ -25941,7 +26397,7 @@
           <p:cNvPr id="9" name="テキスト ボックス 8">
             <a:extLst>
               <a:ext uri="{FF2B5EF4-FFF2-40B4-BE49-F238E27FC236}">
-                <a16:creationId xmlns:a16="http://schemas.microsoft.com/office/drawing/2014/main" id="{B935303D-8A83-3C7F-1E34-0C9E1C5B39E4}"/>
+                <a16:creationId xmlns:a16="http://schemas.microsoft.com/office/drawing/2014/main" id="{7F084EA2-BB2C-4D9E-55DF-3512C1844095}"/>
               </a:ext>
             </a:extLst>
           </p:cNvPr>
@@ -25987,7 +26443,7 @@
           <p:cNvPr id="10" name="テキスト ボックス 9">
             <a:extLst>
               <a:ext uri="{FF2B5EF4-FFF2-40B4-BE49-F238E27FC236}">
-                <a16:creationId xmlns:a16="http://schemas.microsoft.com/office/drawing/2014/main" id="{1803513D-C209-D150-DEDA-21F7C46F232C}"/>
+                <a16:creationId xmlns:a16="http://schemas.microsoft.com/office/drawing/2014/main" id="{EC6A84B0-5A1F-E892-8E37-74A2130984D1}"/>
               </a:ext>
             </a:extLst>
           </p:cNvPr>
@@ -26040,7 +26496,7 @@
           <p:cNvPr id="11" name="テキスト ボックス 10">
             <a:extLst>
               <a:ext uri="{FF2B5EF4-FFF2-40B4-BE49-F238E27FC236}">
-                <a16:creationId xmlns:a16="http://schemas.microsoft.com/office/drawing/2014/main" id="{C81E2DA4-D8AB-6311-B51F-EA8993D0FFDA}"/>
+                <a16:creationId xmlns:a16="http://schemas.microsoft.com/office/drawing/2014/main" id="{82E46CF4-8B08-ED2A-B120-6C318DC8F5C4}"/>
               </a:ext>
             </a:extLst>
           </p:cNvPr>
@@ -26106,7 +26562,7 @@
           <p:cNvPr id="12" name="表 11">
             <a:extLst>
               <a:ext uri="{FF2B5EF4-FFF2-40B4-BE49-F238E27FC236}">
-                <a16:creationId xmlns:a16="http://schemas.microsoft.com/office/drawing/2014/main" id="{A0A0E598-EDA1-4DDA-3862-D30A1CDF1C12}"/>
+                <a16:creationId xmlns:a16="http://schemas.microsoft.com/office/drawing/2014/main" id="{B6280D5F-6A5A-001D-0CB1-5C64D38CA831}"/>
               </a:ext>
             </a:extLst>
           </p:cNvPr>
@@ -26116,7 +26572,7 @@
           <p:nvPr>
             <p:extLst>
               <p:ext uri="{D42A27DB-BD31-4B8C-83A1-F6EECF244321}">
-                <p14:modId xmlns:p14="http://schemas.microsoft.com/office/powerpoint/2010/main" val="3479897068"/>
+                <p14:modId xmlns:p14="http://schemas.microsoft.com/office/powerpoint/2010/main" val="1212822508"/>
               </p:ext>
             </p:extLst>
           </p:nvPr>
@@ -26135,21 +26591,21 @@
                 <a:gridCol w="1905000">
                   <a:extLst>
                     <a:ext uri="{9D8B030D-6E8A-4147-A177-3AD203B41FA5}">
-                      <a16:colId xmlns:a16="http://schemas.microsoft.com/office/drawing/2014/main" val="238635501"/>
+                      <a16:colId xmlns:a16="http://schemas.microsoft.com/office/drawing/2014/main" val="2876454966"/>
                     </a:ext>
                   </a:extLst>
                 </a:gridCol>
                 <a:gridCol w="2413000">
                   <a:extLst>
                     <a:ext uri="{9D8B030D-6E8A-4147-A177-3AD203B41FA5}">
-                      <a16:colId xmlns:a16="http://schemas.microsoft.com/office/drawing/2014/main" val="3218961145"/>
+                      <a16:colId xmlns:a16="http://schemas.microsoft.com/office/drawing/2014/main" val="1718163159"/>
                     </a:ext>
                   </a:extLst>
                 </a:gridCol>
                 <a:gridCol w="6248400">
                   <a:extLst>
                     <a:ext uri="{9D8B030D-6E8A-4147-A177-3AD203B41FA5}">
-                      <a16:colId xmlns:a16="http://schemas.microsoft.com/office/drawing/2014/main" val="3003089725"/>
+                      <a16:colId xmlns:a16="http://schemas.microsoft.com/office/drawing/2014/main" val="4090253774"/>
                     </a:ext>
                   </a:extLst>
                 </a:gridCol>
@@ -26256,7 +26712,7 @@
                 </a:tc>
                 <a:extLst>
                   <a:ext uri="{0D108BD9-81ED-4DB2-BD59-A6C34878D82A}">
-                    <a16:rowId xmlns:a16="http://schemas.microsoft.com/office/drawing/2014/main" val="302807101"/>
+                    <a16:rowId xmlns:a16="http://schemas.microsoft.com/office/drawing/2014/main" val="1165796277"/>
                   </a:ext>
                 </a:extLst>
               </a:tr>
@@ -26414,7 +26870,7 @@
                 </a:tc>
                 <a:extLst>
                   <a:ext uri="{0D108BD9-81ED-4DB2-BD59-A6C34878D82A}">
-                    <a16:rowId xmlns:a16="http://schemas.microsoft.com/office/drawing/2014/main" val="2860804595"/>
+                    <a16:rowId xmlns:a16="http://schemas.microsoft.com/office/drawing/2014/main" val="443959942"/>
                   </a:ext>
                 </a:extLst>
               </a:tr>
@@ -26579,7 +27035,7 @@
                 </a:tc>
                 <a:extLst>
                   <a:ext uri="{0D108BD9-81ED-4DB2-BD59-A6C34878D82A}">
-                    <a16:rowId xmlns:a16="http://schemas.microsoft.com/office/drawing/2014/main" val="1568476846"/>
+                    <a16:rowId xmlns:a16="http://schemas.microsoft.com/office/drawing/2014/main" val="4286474824"/>
                   </a:ext>
                 </a:extLst>
               </a:tr>
@@ -26707,7 +27163,7 @@
                 </a:tc>
                 <a:extLst>
                   <a:ext uri="{0D108BD9-81ED-4DB2-BD59-A6C34878D82A}">
-                    <a16:rowId xmlns:a16="http://schemas.microsoft.com/office/drawing/2014/main" val="1473597405"/>
+                    <a16:rowId xmlns:a16="http://schemas.microsoft.com/office/drawing/2014/main" val="2272835636"/>
                   </a:ext>
                 </a:extLst>
               </a:tr>
@@ -26720,7 +27176,7 @@
           <p:cNvPr id="13" name="四角形: 角を丸くする 12">
             <a:extLst>
               <a:ext uri="{FF2B5EF4-FFF2-40B4-BE49-F238E27FC236}">
-                <a16:creationId xmlns:a16="http://schemas.microsoft.com/office/drawing/2014/main" id="{2CE8AC82-DAC7-7413-D146-005F1EEA9FB0}"/>
+                <a16:creationId xmlns:a16="http://schemas.microsoft.com/office/drawing/2014/main" id="{CAEBDA07-F5FE-4856-CF81-41523F1441A4}"/>
               </a:ext>
             </a:extLst>
           </p:cNvPr>
@@ -26790,7 +27246,7 @@
           <p:cNvPr id="14" name="正方形/長方形 13">
             <a:extLst>
               <a:ext uri="{FF2B5EF4-FFF2-40B4-BE49-F238E27FC236}">
-                <a16:creationId xmlns:a16="http://schemas.microsoft.com/office/drawing/2014/main" id="{9ECD79CF-DD23-BC5B-C301-690E608CD17C}"/>
+                <a16:creationId xmlns:a16="http://schemas.microsoft.com/office/drawing/2014/main" id="{893EEA5F-724B-DDB5-9FF3-8BFB1FB67439}"/>
               </a:ext>
             </a:extLst>
           </p:cNvPr>
@@ -26858,7 +27314,7 @@
           <p:cNvPr id="15" name="テキスト ボックス 14">
             <a:extLst>
               <a:ext uri="{FF2B5EF4-FFF2-40B4-BE49-F238E27FC236}">
-                <a16:creationId xmlns:a16="http://schemas.microsoft.com/office/drawing/2014/main" id="{C02B7D6E-BEED-9119-4180-6FC54BD7DE78}"/>
+                <a16:creationId xmlns:a16="http://schemas.microsoft.com/office/drawing/2014/main" id="{70AB0862-029A-E21E-86B8-BE917865824D}"/>
               </a:ext>
             </a:extLst>
           </p:cNvPr>
@@ -26904,7 +27360,7 @@
           <p:cNvPr id="16" name="テキスト ボックス 15">
             <a:extLst>
               <a:ext uri="{FF2B5EF4-FFF2-40B4-BE49-F238E27FC236}">
-                <a16:creationId xmlns:a16="http://schemas.microsoft.com/office/drawing/2014/main" id="{5F96C9DD-2D81-093C-244F-5769989BDD0D}"/>
+                <a16:creationId xmlns:a16="http://schemas.microsoft.com/office/drawing/2014/main" id="{C96B7755-2668-F9DE-991C-DAA2270ACE2C}"/>
               </a:ext>
             </a:extLst>
           </p:cNvPr>
@@ -27058,7 +27514,7 @@
     </p:spTree>
     <p:extLst>
       <p:ext uri="{BB962C8B-B14F-4D97-AF65-F5344CB8AC3E}">
-        <p14:creationId xmlns:p14="http://schemas.microsoft.com/office/powerpoint/2010/main" val="1077211575"/>
+        <p14:creationId xmlns:p14="http://schemas.microsoft.com/office/powerpoint/2010/main" val="3289040581"/>
       </p:ext>
     </p:extLst>
   </p:cSld>
@@ -27090,7 +27546,7 @@
           <p:cNvPr id="2" name="正方形/長方形 1">
             <a:extLst>
               <a:ext uri="{FF2B5EF4-FFF2-40B4-BE49-F238E27FC236}">
-                <a16:creationId xmlns:a16="http://schemas.microsoft.com/office/drawing/2014/main" id="{EC8D3D7D-9B53-C35A-0899-7778F2B16F82}"/>
+                <a16:creationId xmlns:a16="http://schemas.microsoft.com/office/drawing/2014/main" id="{C4FB7A57-BEA6-BA64-E143-7900AA34E57F}"/>
               </a:ext>
             </a:extLst>
           </p:cNvPr>
@@ -27158,7 +27614,7 @@
           <p:cNvPr id="3" name="正方形/長方形 2">
             <a:extLst>
               <a:ext uri="{FF2B5EF4-FFF2-40B4-BE49-F238E27FC236}">
-                <a16:creationId xmlns:a16="http://schemas.microsoft.com/office/drawing/2014/main" id="{D3E152EF-F30B-DD85-154C-219A3C3F9023}"/>
+                <a16:creationId xmlns:a16="http://schemas.microsoft.com/office/drawing/2014/main" id="{1792CE38-8290-4600-BF95-4287DE8E28DA}"/>
               </a:ext>
             </a:extLst>
           </p:cNvPr>
@@ -27226,7 +27682,7 @@
           <p:cNvPr id="4" name="テキスト ボックス 3">
             <a:extLst>
               <a:ext uri="{FF2B5EF4-FFF2-40B4-BE49-F238E27FC236}">
-                <a16:creationId xmlns:a16="http://schemas.microsoft.com/office/drawing/2014/main" id="{E1E6FF06-F5A7-F962-4E69-8AB1E050DD41}"/>
+                <a16:creationId xmlns:a16="http://schemas.microsoft.com/office/drawing/2014/main" id="{283F506C-457E-9BC3-DD68-FA9A91A9E1FC}"/>
               </a:ext>
             </a:extLst>
           </p:cNvPr>
@@ -27279,7 +27735,7 @@
           <p:cNvPr id="5" name="テキスト ボックス 4">
             <a:extLst>
               <a:ext uri="{FF2B5EF4-FFF2-40B4-BE49-F238E27FC236}">
-                <a16:creationId xmlns:a16="http://schemas.microsoft.com/office/drawing/2014/main" id="{C62DB0C7-F963-DF21-5B95-931CA466A94E}"/>
+                <a16:creationId xmlns:a16="http://schemas.microsoft.com/office/drawing/2014/main" id="{08565C67-23A2-F6C4-7EA0-FB41CAA2586A}"/>
               </a:ext>
             </a:extLst>
           </p:cNvPr>
@@ -27325,7 +27781,7 @@
           <p:cNvPr id="6" name="正方形/長方形 5">
             <a:extLst>
               <a:ext uri="{FF2B5EF4-FFF2-40B4-BE49-F238E27FC236}">
-                <a16:creationId xmlns:a16="http://schemas.microsoft.com/office/drawing/2014/main" id="{2902ACB3-26D9-6AE1-25F5-D7DF31D0194D}"/>
+                <a16:creationId xmlns:a16="http://schemas.microsoft.com/office/drawing/2014/main" id="{54F7A8A8-7559-9577-852C-5F7A4A44D36F}"/>
               </a:ext>
             </a:extLst>
           </p:cNvPr>
@@ -27393,7 +27849,7 @@
           <p:cNvPr id="7" name="四角形: 角を丸くする 6">
             <a:extLst>
               <a:ext uri="{FF2B5EF4-FFF2-40B4-BE49-F238E27FC236}">
-                <a16:creationId xmlns:a16="http://schemas.microsoft.com/office/drawing/2014/main" id="{8307E613-1D31-7B66-33B4-16DE594F7341}"/>
+                <a16:creationId xmlns:a16="http://schemas.microsoft.com/office/drawing/2014/main" id="{5EDF57A8-F3F8-06C0-1EE6-8E3966875AD9}"/>
               </a:ext>
             </a:extLst>
           </p:cNvPr>
@@ -27463,7 +27919,7 @@
           <p:cNvPr id="8" name="テキスト ボックス 7">
             <a:extLst>
               <a:ext uri="{FF2B5EF4-FFF2-40B4-BE49-F238E27FC236}">
-                <a16:creationId xmlns:a16="http://schemas.microsoft.com/office/drawing/2014/main" id="{D161DC4E-0110-BFD3-26C2-44782FF5E054}"/>
+                <a16:creationId xmlns:a16="http://schemas.microsoft.com/office/drawing/2014/main" id="{9A4DC16E-4D74-B3F4-07AB-0032E0156210}"/>
               </a:ext>
             </a:extLst>
           </p:cNvPr>
@@ -27509,7 +27965,7 @@
           <p:cNvPr id="9" name="テキスト ボックス 8">
             <a:extLst>
               <a:ext uri="{FF2B5EF4-FFF2-40B4-BE49-F238E27FC236}">
-                <a16:creationId xmlns:a16="http://schemas.microsoft.com/office/drawing/2014/main" id="{F3996FB2-2F32-BB6E-2AFC-603A192016C9}"/>
+                <a16:creationId xmlns:a16="http://schemas.microsoft.com/office/drawing/2014/main" id="{D214B342-633A-7C90-5D58-07E86C111F48}"/>
               </a:ext>
             </a:extLst>
           </p:cNvPr>
@@ -27555,7 +28011,7 @@
           <p:cNvPr id="10" name="テキスト ボックス 9">
             <a:extLst>
               <a:ext uri="{FF2B5EF4-FFF2-40B4-BE49-F238E27FC236}">
-                <a16:creationId xmlns:a16="http://schemas.microsoft.com/office/drawing/2014/main" id="{08832004-73D6-C730-D84F-67F0AA038999}"/>
+                <a16:creationId xmlns:a16="http://schemas.microsoft.com/office/drawing/2014/main" id="{28E096D8-42BE-0470-BF49-9930135515BA}"/>
               </a:ext>
             </a:extLst>
           </p:cNvPr>
@@ -27608,7 +28064,7 @@
           <p:cNvPr id="11" name="テキスト ボックス 10">
             <a:extLst>
               <a:ext uri="{FF2B5EF4-FFF2-40B4-BE49-F238E27FC236}">
-                <a16:creationId xmlns:a16="http://schemas.microsoft.com/office/drawing/2014/main" id="{9D647F75-F22B-A694-B4D6-E028BBE8EE01}"/>
+                <a16:creationId xmlns:a16="http://schemas.microsoft.com/office/drawing/2014/main" id="{398A2CA5-29A9-F225-08BF-32483DB33D60}"/>
               </a:ext>
             </a:extLst>
           </p:cNvPr>
@@ -27674,7 +28130,7 @@
           <p:cNvPr id="12" name="表 11">
             <a:extLst>
               <a:ext uri="{FF2B5EF4-FFF2-40B4-BE49-F238E27FC236}">
-                <a16:creationId xmlns:a16="http://schemas.microsoft.com/office/drawing/2014/main" id="{E5D3DAD2-84D2-A640-CED9-DD0A5B19732C}"/>
+                <a16:creationId xmlns:a16="http://schemas.microsoft.com/office/drawing/2014/main" id="{35C5749C-B2A4-8290-96C8-E04220B01C35}"/>
               </a:ext>
             </a:extLst>
           </p:cNvPr>
@@ -27684,7 +28140,7 @@
           <p:nvPr>
             <p:extLst>
               <p:ext uri="{D42A27DB-BD31-4B8C-83A1-F6EECF244321}">
-                <p14:modId xmlns:p14="http://schemas.microsoft.com/office/powerpoint/2010/main" val="3749901246"/>
+                <p14:modId xmlns:p14="http://schemas.microsoft.com/office/powerpoint/2010/main" val="3188155181"/>
               </p:ext>
             </p:extLst>
           </p:nvPr>
@@ -27703,14 +28159,14 @@
                 <a:gridCol w="5461000">
                   <a:extLst>
                     <a:ext uri="{9D8B030D-6E8A-4147-A177-3AD203B41FA5}">
-                      <a16:colId xmlns:a16="http://schemas.microsoft.com/office/drawing/2014/main" val="420358276"/>
+                      <a16:colId xmlns:a16="http://schemas.microsoft.com/office/drawing/2014/main" val="2339578349"/>
                     </a:ext>
                   </a:extLst>
                 </a:gridCol>
                 <a:gridCol w="5105400">
                   <a:extLst>
                     <a:ext uri="{9D8B030D-6E8A-4147-A177-3AD203B41FA5}">
-                      <a16:colId xmlns:a16="http://schemas.microsoft.com/office/drawing/2014/main" val="1982287334"/>
+                      <a16:colId xmlns:a16="http://schemas.microsoft.com/office/drawing/2014/main" val="4265149376"/>
                     </a:ext>
                   </a:extLst>
                 </a:gridCol>
@@ -27784,7 +28240,7 @@
                 </a:tc>
                 <a:extLst>
                   <a:ext uri="{0D108BD9-81ED-4DB2-BD59-A6C34878D82A}">
-                    <a16:rowId xmlns:a16="http://schemas.microsoft.com/office/drawing/2014/main" val="78911076"/>
+                    <a16:rowId xmlns:a16="http://schemas.microsoft.com/office/drawing/2014/main" val="1563884819"/>
                   </a:ext>
                 </a:extLst>
               </a:tr>
@@ -27884,7 +28340,7 @@
                 </a:tc>
                 <a:extLst>
                   <a:ext uri="{0D108BD9-81ED-4DB2-BD59-A6C34878D82A}">
-                    <a16:rowId xmlns:a16="http://schemas.microsoft.com/office/drawing/2014/main" val="1705328243"/>
+                    <a16:rowId xmlns:a16="http://schemas.microsoft.com/office/drawing/2014/main" val="2793910957"/>
                   </a:ext>
                 </a:extLst>
               </a:tr>
@@ -27984,7 +28440,7 @@
                 </a:tc>
                 <a:extLst>
                   <a:ext uri="{0D108BD9-81ED-4DB2-BD59-A6C34878D82A}">
-                    <a16:rowId xmlns:a16="http://schemas.microsoft.com/office/drawing/2014/main" val="1019057008"/>
+                    <a16:rowId xmlns:a16="http://schemas.microsoft.com/office/drawing/2014/main" val="40553536"/>
                   </a:ext>
                 </a:extLst>
               </a:tr>
@@ -27997,7 +28453,7 @@
           <p:cNvPr id="13" name="四角形: 角を丸くする 12">
             <a:extLst>
               <a:ext uri="{FF2B5EF4-FFF2-40B4-BE49-F238E27FC236}">
-                <a16:creationId xmlns:a16="http://schemas.microsoft.com/office/drawing/2014/main" id="{104F5F07-ED6A-4CE4-30BE-196294E6FB1E}"/>
+                <a16:creationId xmlns:a16="http://schemas.microsoft.com/office/drawing/2014/main" id="{874234C9-9FBE-5524-4299-BFFFED32A533}"/>
               </a:ext>
             </a:extLst>
           </p:cNvPr>
@@ -28067,7 +28523,7 @@
           <p:cNvPr id="14" name="正方形/長方形 13">
             <a:extLst>
               <a:ext uri="{FF2B5EF4-FFF2-40B4-BE49-F238E27FC236}">
-                <a16:creationId xmlns:a16="http://schemas.microsoft.com/office/drawing/2014/main" id="{5F9BC06F-B476-812C-F570-3C1FF871567D}"/>
+                <a16:creationId xmlns:a16="http://schemas.microsoft.com/office/drawing/2014/main" id="{C89174A3-524C-41F5-51E7-02E5B446B340}"/>
               </a:ext>
             </a:extLst>
           </p:cNvPr>
@@ -28135,7 +28591,7 @@
           <p:cNvPr id="15" name="テキスト ボックス 14">
             <a:extLst>
               <a:ext uri="{FF2B5EF4-FFF2-40B4-BE49-F238E27FC236}">
-                <a16:creationId xmlns:a16="http://schemas.microsoft.com/office/drawing/2014/main" id="{BFA95C29-DB93-B068-78FF-3CCA6A0CC9EE}"/>
+                <a16:creationId xmlns:a16="http://schemas.microsoft.com/office/drawing/2014/main" id="{014DE8D2-8BAA-BB9B-43B6-FA66A9C84DDE}"/>
               </a:ext>
             </a:extLst>
           </p:cNvPr>
@@ -28181,7 +28637,7 @@
           <p:cNvPr id="16" name="テキスト ボックス 15">
             <a:extLst>
               <a:ext uri="{FF2B5EF4-FFF2-40B4-BE49-F238E27FC236}">
-                <a16:creationId xmlns:a16="http://schemas.microsoft.com/office/drawing/2014/main" id="{AD7AC075-8359-7E9F-F8B1-360FC7705EB5}"/>
+                <a16:creationId xmlns:a16="http://schemas.microsoft.com/office/drawing/2014/main" id="{CD3AD9FC-CBC2-F54F-117F-1419B29D5ED5}"/>
               </a:ext>
             </a:extLst>
           </p:cNvPr>
@@ -28285,7 +28741,7 @@
     </p:spTree>
     <p:extLst>
       <p:ext uri="{BB962C8B-B14F-4D97-AF65-F5344CB8AC3E}">
-        <p14:creationId xmlns:p14="http://schemas.microsoft.com/office/powerpoint/2010/main" val="3358205162"/>
+        <p14:creationId xmlns:p14="http://schemas.microsoft.com/office/powerpoint/2010/main" val="67068887"/>
       </p:ext>
     </p:extLst>
   </p:cSld>
@@ -28317,7 +28773,7 @@
           <p:cNvPr id="2" name="正方形/長方形 1">
             <a:extLst>
               <a:ext uri="{FF2B5EF4-FFF2-40B4-BE49-F238E27FC236}">
-                <a16:creationId xmlns:a16="http://schemas.microsoft.com/office/drawing/2014/main" id="{0760C1C2-ADF2-1862-94DC-ABD48A18A005}"/>
+                <a16:creationId xmlns:a16="http://schemas.microsoft.com/office/drawing/2014/main" id="{4B1B4C13-3CCA-13B2-8424-544C3758CDF6}"/>
               </a:ext>
             </a:extLst>
           </p:cNvPr>
@@ -28385,7 +28841,7 @@
           <p:cNvPr id="3" name="正方形/長方形 2">
             <a:extLst>
               <a:ext uri="{FF2B5EF4-FFF2-40B4-BE49-F238E27FC236}">
-                <a16:creationId xmlns:a16="http://schemas.microsoft.com/office/drawing/2014/main" id="{3AF7DE89-B55B-E1CB-DB8C-A698AE8E3DAF}"/>
+                <a16:creationId xmlns:a16="http://schemas.microsoft.com/office/drawing/2014/main" id="{722929C5-7785-68B1-68F8-BB4A87DE9540}"/>
               </a:ext>
             </a:extLst>
           </p:cNvPr>
@@ -28453,7 +28909,7 @@
           <p:cNvPr id="4" name="テキスト ボックス 3">
             <a:extLst>
               <a:ext uri="{FF2B5EF4-FFF2-40B4-BE49-F238E27FC236}">
-                <a16:creationId xmlns:a16="http://schemas.microsoft.com/office/drawing/2014/main" id="{005C3F22-4AC6-60AB-E33F-265D6A6E3A0A}"/>
+                <a16:creationId xmlns:a16="http://schemas.microsoft.com/office/drawing/2014/main" id="{6F010FCC-A41E-BD45-7F01-B596E9327B02}"/>
               </a:ext>
             </a:extLst>
           </p:cNvPr>
@@ -28506,7 +28962,7 @@
           <p:cNvPr id="5" name="テキスト ボックス 4">
             <a:extLst>
               <a:ext uri="{FF2B5EF4-FFF2-40B4-BE49-F238E27FC236}">
-                <a16:creationId xmlns:a16="http://schemas.microsoft.com/office/drawing/2014/main" id="{BD307785-961D-A543-8F26-FA127F5E9F37}"/>
+                <a16:creationId xmlns:a16="http://schemas.microsoft.com/office/drawing/2014/main" id="{B1393EE7-6131-A0D1-E9F3-253D46EFAA39}"/>
               </a:ext>
             </a:extLst>
           </p:cNvPr>
@@ -28552,7 +29008,7 @@
           <p:cNvPr id="6" name="正方形/長方形 5">
             <a:extLst>
               <a:ext uri="{FF2B5EF4-FFF2-40B4-BE49-F238E27FC236}">
-                <a16:creationId xmlns:a16="http://schemas.microsoft.com/office/drawing/2014/main" id="{25564E70-4B72-C69C-6B2C-3409CEA3EB36}"/>
+                <a16:creationId xmlns:a16="http://schemas.microsoft.com/office/drawing/2014/main" id="{32F4086F-A64B-ECE3-0C65-C99711EC0B0E}"/>
               </a:ext>
             </a:extLst>
           </p:cNvPr>
@@ -28620,7 +29076,7 @@
           <p:cNvPr id="7" name="四角形: 角を丸くする 6">
             <a:extLst>
               <a:ext uri="{FF2B5EF4-FFF2-40B4-BE49-F238E27FC236}">
-                <a16:creationId xmlns:a16="http://schemas.microsoft.com/office/drawing/2014/main" id="{CB340AD4-0CB5-A541-6D49-5F5DA9DBCC24}"/>
+                <a16:creationId xmlns:a16="http://schemas.microsoft.com/office/drawing/2014/main" id="{9809CF36-2E99-6526-2E20-1CD4DF289B2C}"/>
               </a:ext>
             </a:extLst>
           </p:cNvPr>
@@ -28690,7 +29146,7 @@
           <p:cNvPr id="8" name="テキスト ボックス 7">
             <a:extLst>
               <a:ext uri="{FF2B5EF4-FFF2-40B4-BE49-F238E27FC236}">
-                <a16:creationId xmlns:a16="http://schemas.microsoft.com/office/drawing/2014/main" id="{11E15287-99B8-AFE9-192C-BF1CE33BB743}"/>
+                <a16:creationId xmlns:a16="http://schemas.microsoft.com/office/drawing/2014/main" id="{4ADEC526-5378-C21D-2BD7-1A9F6D86475D}"/>
               </a:ext>
             </a:extLst>
           </p:cNvPr>
@@ -28736,7 +29192,7 @@
           <p:cNvPr id="9" name="テキスト ボックス 8">
             <a:extLst>
               <a:ext uri="{FF2B5EF4-FFF2-40B4-BE49-F238E27FC236}">
-                <a16:creationId xmlns:a16="http://schemas.microsoft.com/office/drawing/2014/main" id="{C22C5805-5D33-2247-7532-6299B53EA118}"/>
+                <a16:creationId xmlns:a16="http://schemas.microsoft.com/office/drawing/2014/main" id="{F17C3425-3141-B0D6-B18B-524F80EBEE86}"/>
               </a:ext>
             </a:extLst>
           </p:cNvPr>
@@ -28782,7 +29238,7 @@
           <p:cNvPr id="10" name="テキスト ボックス 9">
             <a:extLst>
               <a:ext uri="{FF2B5EF4-FFF2-40B4-BE49-F238E27FC236}">
-                <a16:creationId xmlns:a16="http://schemas.microsoft.com/office/drawing/2014/main" id="{FAE97C25-B1D9-8E51-251F-C06BB53442CC}"/>
+                <a16:creationId xmlns:a16="http://schemas.microsoft.com/office/drawing/2014/main" id="{9C197864-F709-AE75-F8FC-63A39DE0B6DF}"/>
               </a:ext>
             </a:extLst>
           </p:cNvPr>
@@ -28835,7 +29291,7 @@
           <p:cNvPr id="11" name="テキスト ボックス 10">
             <a:extLst>
               <a:ext uri="{FF2B5EF4-FFF2-40B4-BE49-F238E27FC236}">
-                <a16:creationId xmlns:a16="http://schemas.microsoft.com/office/drawing/2014/main" id="{956CC68E-6DA9-29B7-7DCD-AB409048AB85}"/>
+                <a16:creationId xmlns:a16="http://schemas.microsoft.com/office/drawing/2014/main" id="{3B2A2C11-14A3-85DF-7CB8-EA02455A7227}"/>
               </a:ext>
             </a:extLst>
           </p:cNvPr>
@@ -28941,7 +29397,7 @@
           <p:cNvPr id="12" name="四角形: 角を丸くする 11">
             <a:extLst>
               <a:ext uri="{FF2B5EF4-FFF2-40B4-BE49-F238E27FC236}">
-                <a16:creationId xmlns:a16="http://schemas.microsoft.com/office/drawing/2014/main" id="{B39061C0-7896-D733-07EF-8A045535D8D3}"/>
+                <a16:creationId xmlns:a16="http://schemas.microsoft.com/office/drawing/2014/main" id="{DC421326-1010-3077-79A9-1F86917278E1}"/>
               </a:ext>
             </a:extLst>
           </p:cNvPr>
@@ -29011,7 +29467,7 @@
           <p:cNvPr id="13" name="テキスト ボックス 12">
             <a:extLst>
               <a:ext uri="{FF2B5EF4-FFF2-40B4-BE49-F238E27FC236}">
-                <a16:creationId xmlns:a16="http://schemas.microsoft.com/office/drawing/2014/main" id="{1F353CA3-5D2A-C6EA-8470-98CB532EC768}"/>
+                <a16:creationId xmlns:a16="http://schemas.microsoft.com/office/drawing/2014/main" id="{6D37CC02-9880-961A-F177-390140E4A44D}"/>
               </a:ext>
             </a:extLst>
           </p:cNvPr>
@@ -29071,7 +29527,7 @@
           <p:cNvPr id="14" name="テキスト ボックス 13">
             <a:extLst>
               <a:ext uri="{FF2B5EF4-FFF2-40B4-BE49-F238E27FC236}">
-                <a16:creationId xmlns:a16="http://schemas.microsoft.com/office/drawing/2014/main" id="{E5A398C0-D5F1-E4AA-6F9E-B7ECC177559C}"/>
+                <a16:creationId xmlns:a16="http://schemas.microsoft.com/office/drawing/2014/main" id="{D223A093-C2EA-1102-BF9D-265727D1E686}"/>
               </a:ext>
             </a:extLst>
           </p:cNvPr>
@@ -29137,7 +29593,7 @@
           <p:cNvPr id="15" name="四角形: 角を丸くする 14">
             <a:extLst>
               <a:ext uri="{FF2B5EF4-FFF2-40B4-BE49-F238E27FC236}">
-                <a16:creationId xmlns:a16="http://schemas.microsoft.com/office/drawing/2014/main" id="{EC5A29C1-99EC-0980-5643-FB889899CA6F}"/>
+                <a16:creationId xmlns:a16="http://schemas.microsoft.com/office/drawing/2014/main" id="{55623882-FD8B-B60C-5BCD-3479A4FBD2D8}"/>
               </a:ext>
             </a:extLst>
           </p:cNvPr>
@@ -29193,7 +29649,7 @@
           <p:cNvPr id="16" name="テキスト ボックス 15">
             <a:extLst>
               <a:ext uri="{FF2B5EF4-FFF2-40B4-BE49-F238E27FC236}">
-                <a16:creationId xmlns:a16="http://schemas.microsoft.com/office/drawing/2014/main" id="{8FD83768-F71B-338E-CD64-4E6166E3EB65}"/>
+                <a16:creationId xmlns:a16="http://schemas.microsoft.com/office/drawing/2014/main" id="{922D6C82-783E-5CEE-AB19-257A14BB3009}"/>
               </a:ext>
             </a:extLst>
           </p:cNvPr>
@@ -29253,7 +29709,7 @@
           <p:cNvPr id="17" name="テキスト ボックス 16">
             <a:extLst>
               <a:ext uri="{FF2B5EF4-FFF2-40B4-BE49-F238E27FC236}">
-                <a16:creationId xmlns:a16="http://schemas.microsoft.com/office/drawing/2014/main" id="{7020382B-B279-B1D2-C539-ECDA6DC13D02}"/>
+                <a16:creationId xmlns:a16="http://schemas.microsoft.com/office/drawing/2014/main" id="{46E47900-8D8E-14AC-3475-76E1174F89EF}"/>
               </a:ext>
             </a:extLst>
           </p:cNvPr>
@@ -29299,7 +29755,7 @@
           <p:cNvPr id="18" name="テキスト ボックス 17">
             <a:extLst>
               <a:ext uri="{FF2B5EF4-FFF2-40B4-BE49-F238E27FC236}">
-                <a16:creationId xmlns:a16="http://schemas.microsoft.com/office/drawing/2014/main" id="{1D7A2E5E-60CC-F6BD-2DDA-554A706835DF}"/>
+                <a16:creationId xmlns:a16="http://schemas.microsoft.com/office/drawing/2014/main" id="{066A0346-77A4-2143-2CA4-2B2A615952D7}"/>
               </a:ext>
             </a:extLst>
           </p:cNvPr>
@@ -29365,7 +29821,7 @@
           <p:cNvPr id="19" name="四角形: 角を丸くする 18">
             <a:extLst>
               <a:ext uri="{FF2B5EF4-FFF2-40B4-BE49-F238E27FC236}">
-                <a16:creationId xmlns:a16="http://schemas.microsoft.com/office/drawing/2014/main" id="{B2406047-09E5-6D7B-A564-ECA248954808}"/>
+                <a16:creationId xmlns:a16="http://schemas.microsoft.com/office/drawing/2014/main" id="{FC4238B2-3767-F91A-2980-615A8E1A2F84}"/>
               </a:ext>
             </a:extLst>
           </p:cNvPr>
@@ -29421,7 +29877,7 @@
           <p:cNvPr id="20" name="テキスト ボックス 19">
             <a:extLst>
               <a:ext uri="{FF2B5EF4-FFF2-40B4-BE49-F238E27FC236}">
-                <a16:creationId xmlns:a16="http://schemas.microsoft.com/office/drawing/2014/main" id="{5B6A32E0-C35A-3D41-CDA0-ECCA750860FA}"/>
+                <a16:creationId xmlns:a16="http://schemas.microsoft.com/office/drawing/2014/main" id="{A6469CB3-330A-566B-97B7-62E531619069}"/>
               </a:ext>
             </a:extLst>
           </p:cNvPr>
@@ -29481,7 +29937,7 @@
           <p:cNvPr id="21" name="テキスト ボックス 20">
             <a:extLst>
               <a:ext uri="{FF2B5EF4-FFF2-40B4-BE49-F238E27FC236}">
-                <a16:creationId xmlns:a16="http://schemas.microsoft.com/office/drawing/2014/main" id="{DBDED5F6-5D50-A0E2-29D5-153274EFBE9E}"/>
+                <a16:creationId xmlns:a16="http://schemas.microsoft.com/office/drawing/2014/main" id="{93E019AF-4408-FD1D-B71F-F1DAD5CCA5E5}"/>
               </a:ext>
             </a:extLst>
           </p:cNvPr>
@@ -29537,7 +29993,7 @@
           <p:cNvPr id="22" name="テキスト ボックス 21">
             <a:extLst>
               <a:ext uri="{FF2B5EF4-FFF2-40B4-BE49-F238E27FC236}">
-                <a16:creationId xmlns:a16="http://schemas.microsoft.com/office/drawing/2014/main" id="{69ECD875-F989-95C0-986A-8ED5ECBCEB80}"/>
+                <a16:creationId xmlns:a16="http://schemas.microsoft.com/office/drawing/2014/main" id="{E8C569A2-71E4-ED32-D7E6-EF6C109B5903}"/>
               </a:ext>
             </a:extLst>
           </p:cNvPr>
@@ -29593,7 +30049,7 @@
           <p:cNvPr id="23" name="四角形: 角を丸くする 22">
             <a:extLst>
               <a:ext uri="{FF2B5EF4-FFF2-40B4-BE49-F238E27FC236}">
-                <a16:creationId xmlns:a16="http://schemas.microsoft.com/office/drawing/2014/main" id="{E78B2947-65E6-C303-236A-88E1BA192195}"/>
+                <a16:creationId xmlns:a16="http://schemas.microsoft.com/office/drawing/2014/main" id="{A4F49205-ABE1-AD2F-1950-62E42BADCEA6}"/>
               </a:ext>
             </a:extLst>
           </p:cNvPr>
@@ -29649,7 +30105,7 @@
           <p:cNvPr id="24" name="テキスト ボックス 23">
             <a:extLst>
               <a:ext uri="{FF2B5EF4-FFF2-40B4-BE49-F238E27FC236}">
-                <a16:creationId xmlns:a16="http://schemas.microsoft.com/office/drawing/2014/main" id="{84A77B45-E188-894A-DC17-21B39435A729}"/>
+                <a16:creationId xmlns:a16="http://schemas.microsoft.com/office/drawing/2014/main" id="{1BAA2983-90B5-F49B-72E8-FF74883410DA}"/>
               </a:ext>
             </a:extLst>
           </p:cNvPr>
@@ -29709,7 +30165,7 @@
           <p:cNvPr id="25" name="テキスト ボックス 24">
             <a:extLst>
               <a:ext uri="{FF2B5EF4-FFF2-40B4-BE49-F238E27FC236}">
-                <a16:creationId xmlns:a16="http://schemas.microsoft.com/office/drawing/2014/main" id="{CE00A771-D3CD-A823-E372-A2363BE31774}"/>
+                <a16:creationId xmlns:a16="http://schemas.microsoft.com/office/drawing/2014/main" id="{935FC57C-6ED1-56A8-22D9-89CE7ACD6E77}"/>
               </a:ext>
             </a:extLst>
           </p:cNvPr>
@@ -29765,7 +30221,7 @@
           <p:cNvPr id="26" name="テキスト ボックス 25">
             <a:extLst>
               <a:ext uri="{FF2B5EF4-FFF2-40B4-BE49-F238E27FC236}">
-                <a16:creationId xmlns:a16="http://schemas.microsoft.com/office/drawing/2014/main" id="{175132B7-1EFB-7896-489C-854A8674A12F}"/>
+                <a16:creationId xmlns:a16="http://schemas.microsoft.com/office/drawing/2014/main" id="{B0E0B1A6-2F44-B735-CCEC-C8672ABCDC20}"/>
               </a:ext>
             </a:extLst>
           </p:cNvPr>
@@ -29811,7 +30267,7 @@
           <p:cNvPr id="27" name="四角形: 角を丸くする 26">
             <a:extLst>
               <a:ext uri="{FF2B5EF4-FFF2-40B4-BE49-F238E27FC236}">
-                <a16:creationId xmlns:a16="http://schemas.microsoft.com/office/drawing/2014/main" id="{3482199D-D218-7BCE-D008-E306A9C1CF71}"/>
+                <a16:creationId xmlns:a16="http://schemas.microsoft.com/office/drawing/2014/main" id="{BA4CD4EF-037D-AFDA-1488-F30AD90AB0CF}"/>
               </a:ext>
             </a:extLst>
           </p:cNvPr>
@@ -29881,7 +30337,7 @@
           <p:cNvPr id="28" name="正方形/長方形 27">
             <a:extLst>
               <a:ext uri="{FF2B5EF4-FFF2-40B4-BE49-F238E27FC236}">
-                <a16:creationId xmlns:a16="http://schemas.microsoft.com/office/drawing/2014/main" id="{193B6889-FB7F-E06C-762A-5D064743129A}"/>
+                <a16:creationId xmlns:a16="http://schemas.microsoft.com/office/drawing/2014/main" id="{7585D496-515F-08E2-40AD-C489860FD8A4}"/>
               </a:ext>
             </a:extLst>
           </p:cNvPr>
@@ -29949,7 +30405,7 @@
           <p:cNvPr id="29" name="テキスト ボックス 28">
             <a:extLst>
               <a:ext uri="{FF2B5EF4-FFF2-40B4-BE49-F238E27FC236}">
-                <a16:creationId xmlns:a16="http://schemas.microsoft.com/office/drawing/2014/main" id="{1877E130-48DA-0FC9-A2EA-AB6A9C45AF5F}"/>
+                <a16:creationId xmlns:a16="http://schemas.microsoft.com/office/drawing/2014/main" id="{E9C9612B-50B9-68D6-E9DD-CFCEB3178FD7}"/>
               </a:ext>
             </a:extLst>
           </p:cNvPr>
@@ -29995,7 +30451,7 @@
           <p:cNvPr id="30" name="テキスト ボックス 29">
             <a:extLst>
               <a:ext uri="{FF2B5EF4-FFF2-40B4-BE49-F238E27FC236}">
-                <a16:creationId xmlns:a16="http://schemas.microsoft.com/office/drawing/2014/main" id="{55C365D4-5CCF-2C92-73CC-E32EE54B62D1}"/>
+                <a16:creationId xmlns:a16="http://schemas.microsoft.com/office/drawing/2014/main" id="{A8FE16B8-6AB4-0077-2A61-03A8B24167B4}"/>
               </a:ext>
             </a:extLst>
           </p:cNvPr>
@@ -30049,7 +30505,7 @@
     </p:spTree>
     <p:extLst>
       <p:ext uri="{BB962C8B-B14F-4D97-AF65-F5344CB8AC3E}">
-        <p14:creationId xmlns:p14="http://schemas.microsoft.com/office/powerpoint/2010/main" val="1393034173"/>
+        <p14:creationId xmlns:p14="http://schemas.microsoft.com/office/powerpoint/2010/main" val="1084177815"/>
       </p:ext>
     </p:extLst>
   </p:cSld>
@@ -30081,7 +30537,7 @@
           <p:cNvPr id="2" name="正方形/長方形 1">
             <a:extLst>
               <a:ext uri="{FF2B5EF4-FFF2-40B4-BE49-F238E27FC236}">
-                <a16:creationId xmlns:a16="http://schemas.microsoft.com/office/drawing/2014/main" id="{E2A007BD-5BAD-64D1-B8CF-72376A19EA71}"/>
+                <a16:creationId xmlns:a16="http://schemas.microsoft.com/office/drawing/2014/main" id="{BC0FA075-6E4A-4D7C-67A4-EF0EA3DBCA7A}"/>
               </a:ext>
             </a:extLst>
           </p:cNvPr>
@@ -30149,7 +30605,7 @@
           <p:cNvPr id="3" name="正方形/長方形 2">
             <a:extLst>
               <a:ext uri="{FF2B5EF4-FFF2-40B4-BE49-F238E27FC236}">
-                <a16:creationId xmlns:a16="http://schemas.microsoft.com/office/drawing/2014/main" id="{E663111E-ECEF-B620-E9F2-69EE85B7628A}"/>
+                <a16:creationId xmlns:a16="http://schemas.microsoft.com/office/drawing/2014/main" id="{468FE358-E248-57C9-5FB2-F5294852BF50}"/>
               </a:ext>
             </a:extLst>
           </p:cNvPr>
@@ -30217,7 +30673,7 @@
           <p:cNvPr id="4" name="テキスト ボックス 3">
             <a:extLst>
               <a:ext uri="{FF2B5EF4-FFF2-40B4-BE49-F238E27FC236}">
-                <a16:creationId xmlns:a16="http://schemas.microsoft.com/office/drawing/2014/main" id="{2B9655EB-2927-B7AE-B0EC-22016327A77A}"/>
+                <a16:creationId xmlns:a16="http://schemas.microsoft.com/office/drawing/2014/main" id="{2C7F9BB4-2725-225B-EA52-F9A5E2F1A7D5}"/>
               </a:ext>
             </a:extLst>
           </p:cNvPr>
@@ -30270,7 +30726,7 @@
           <p:cNvPr id="5" name="テキスト ボックス 4">
             <a:extLst>
               <a:ext uri="{FF2B5EF4-FFF2-40B4-BE49-F238E27FC236}">
-                <a16:creationId xmlns:a16="http://schemas.microsoft.com/office/drawing/2014/main" id="{F9999FFD-E335-75DA-AC1A-35C09B4C5BAF}"/>
+                <a16:creationId xmlns:a16="http://schemas.microsoft.com/office/drawing/2014/main" id="{7596FB55-78E9-558B-391E-EE18310FFDF0}"/>
               </a:ext>
             </a:extLst>
           </p:cNvPr>
@@ -30316,7 +30772,7 @@
           <p:cNvPr id="6" name="正方形/長方形 5">
             <a:extLst>
               <a:ext uri="{FF2B5EF4-FFF2-40B4-BE49-F238E27FC236}">
-                <a16:creationId xmlns:a16="http://schemas.microsoft.com/office/drawing/2014/main" id="{D7371661-4948-C41F-8CCE-3B963CC794E7}"/>
+                <a16:creationId xmlns:a16="http://schemas.microsoft.com/office/drawing/2014/main" id="{35F110C1-CBC0-3676-B5AC-EA4B94476F4D}"/>
               </a:ext>
             </a:extLst>
           </p:cNvPr>
@@ -30384,7 +30840,7 @@
           <p:cNvPr id="7" name="四角形: 角を丸くする 6">
             <a:extLst>
               <a:ext uri="{FF2B5EF4-FFF2-40B4-BE49-F238E27FC236}">
-                <a16:creationId xmlns:a16="http://schemas.microsoft.com/office/drawing/2014/main" id="{D857328C-4F3E-F44C-CBAF-5FABF45E9D87}"/>
+                <a16:creationId xmlns:a16="http://schemas.microsoft.com/office/drawing/2014/main" id="{97C7499B-76F4-B81F-32BA-437EBE707648}"/>
               </a:ext>
             </a:extLst>
           </p:cNvPr>
@@ -30454,7 +30910,7 @@
           <p:cNvPr id="8" name="テキスト ボックス 7">
             <a:extLst>
               <a:ext uri="{FF2B5EF4-FFF2-40B4-BE49-F238E27FC236}">
-                <a16:creationId xmlns:a16="http://schemas.microsoft.com/office/drawing/2014/main" id="{9590838B-6EB2-41E6-A289-2F6735A75475}"/>
+                <a16:creationId xmlns:a16="http://schemas.microsoft.com/office/drawing/2014/main" id="{BD72AABB-9FA5-9070-8FC0-339F57F6B05D}"/>
               </a:ext>
             </a:extLst>
           </p:cNvPr>
@@ -30500,7 +30956,7 @@
           <p:cNvPr id="9" name="テキスト ボックス 8">
             <a:extLst>
               <a:ext uri="{FF2B5EF4-FFF2-40B4-BE49-F238E27FC236}">
-                <a16:creationId xmlns:a16="http://schemas.microsoft.com/office/drawing/2014/main" id="{AF1BDD11-CF15-C5CE-170F-B1218EB32559}"/>
+                <a16:creationId xmlns:a16="http://schemas.microsoft.com/office/drawing/2014/main" id="{6B286220-6D35-213D-4502-0B50293A91CB}"/>
               </a:ext>
             </a:extLst>
           </p:cNvPr>
@@ -30546,7 +31002,7 @@
           <p:cNvPr id="10" name="テキスト ボックス 9">
             <a:extLst>
               <a:ext uri="{FF2B5EF4-FFF2-40B4-BE49-F238E27FC236}">
-                <a16:creationId xmlns:a16="http://schemas.microsoft.com/office/drawing/2014/main" id="{AB48C498-3FAB-C015-F311-6AB5D8CE3105}"/>
+                <a16:creationId xmlns:a16="http://schemas.microsoft.com/office/drawing/2014/main" id="{BA9848E9-EC7D-B840-0DC0-B7385B16240B}"/>
               </a:ext>
             </a:extLst>
           </p:cNvPr>
@@ -30599,7 +31055,7 @@
           <p:cNvPr id="11" name="テキスト ボックス 10">
             <a:extLst>
               <a:ext uri="{FF2B5EF4-FFF2-40B4-BE49-F238E27FC236}">
-                <a16:creationId xmlns:a16="http://schemas.microsoft.com/office/drawing/2014/main" id="{1904B027-7430-078B-1806-3599E156846F}"/>
+                <a16:creationId xmlns:a16="http://schemas.microsoft.com/office/drawing/2014/main" id="{ADB956F3-222E-10DF-70DB-772B74922469}"/>
               </a:ext>
             </a:extLst>
           </p:cNvPr>
@@ -30685,7 +31141,7 @@
           <p:cNvPr id="12" name="四角形: 角を丸くする 11">
             <a:extLst>
               <a:ext uri="{FF2B5EF4-FFF2-40B4-BE49-F238E27FC236}">
-                <a16:creationId xmlns:a16="http://schemas.microsoft.com/office/drawing/2014/main" id="{83B71C2A-3CBA-6DCB-DB43-2FD1B9F86B66}"/>
+                <a16:creationId xmlns:a16="http://schemas.microsoft.com/office/drawing/2014/main" id="{44000C7F-C584-78B6-BC17-906FF70D493F}"/>
               </a:ext>
             </a:extLst>
           </p:cNvPr>
@@ -30755,7 +31211,7 @@
           <p:cNvPr id="13" name="テキスト ボックス 12">
             <a:extLst>
               <a:ext uri="{FF2B5EF4-FFF2-40B4-BE49-F238E27FC236}">
-                <a16:creationId xmlns:a16="http://schemas.microsoft.com/office/drawing/2014/main" id="{D6D7F236-0EE0-4BD6-C817-92DD370B75D5}"/>
+                <a16:creationId xmlns:a16="http://schemas.microsoft.com/office/drawing/2014/main" id="{20BA185E-8846-A310-CC08-8D83459E3001}"/>
               </a:ext>
             </a:extLst>
           </p:cNvPr>
@@ -30815,7 +31271,7 @@
           <p:cNvPr id="14" name="テキスト ボックス 13">
             <a:extLst>
               <a:ext uri="{FF2B5EF4-FFF2-40B4-BE49-F238E27FC236}">
-                <a16:creationId xmlns:a16="http://schemas.microsoft.com/office/drawing/2014/main" id="{0F87FA6F-029B-32C3-2532-A0427AAD3F58}"/>
+                <a16:creationId xmlns:a16="http://schemas.microsoft.com/office/drawing/2014/main" id="{071D9C39-0213-37CA-6BCC-144FF600626D}"/>
               </a:ext>
             </a:extLst>
           </p:cNvPr>
@@ -30921,7 +31377,7 @@
           <p:cNvPr id="15" name="四角形: 角を丸くする 14">
             <a:extLst>
               <a:ext uri="{FF2B5EF4-FFF2-40B4-BE49-F238E27FC236}">
-                <a16:creationId xmlns:a16="http://schemas.microsoft.com/office/drawing/2014/main" id="{AC8606DB-A9AC-7B71-AFCD-ED18F6FF09AE}"/>
+                <a16:creationId xmlns:a16="http://schemas.microsoft.com/office/drawing/2014/main" id="{D9DA932A-954B-ADE4-35BF-499213418926}"/>
               </a:ext>
             </a:extLst>
           </p:cNvPr>
@@ -30977,7 +31433,7 @@
           <p:cNvPr id="16" name="テキスト ボックス 15">
             <a:extLst>
               <a:ext uri="{FF2B5EF4-FFF2-40B4-BE49-F238E27FC236}">
-                <a16:creationId xmlns:a16="http://schemas.microsoft.com/office/drawing/2014/main" id="{7C796921-ABB5-6D77-1D09-ECB781D049B2}"/>
+                <a16:creationId xmlns:a16="http://schemas.microsoft.com/office/drawing/2014/main" id="{CB35A855-DB4E-A78D-9A22-10B4E79F42DB}"/>
               </a:ext>
             </a:extLst>
           </p:cNvPr>
@@ -31037,7 +31493,7 @@
           <p:cNvPr id="17" name="テキスト ボックス 16">
             <a:extLst>
               <a:ext uri="{FF2B5EF4-FFF2-40B4-BE49-F238E27FC236}">
-                <a16:creationId xmlns:a16="http://schemas.microsoft.com/office/drawing/2014/main" id="{DF042DF9-D127-71CF-1034-C2308829E446}"/>
+                <a16:creationId xmlns:a16="http://schemas.microsoft.com/office/drawing/2014/main" id="{785387B6-577C-F020-319C-A81FA1CD7A88}"/>
               </a:ext>
             </a:extLst>
           </p:cNvPr>
@@ -31083,7 +31539,7 @@
           <p:cNvPr id="18" name="テキスト ボックス 17">
             <a:extLst>
               <a:ext uri="{FF2B5EF4-FFF2-40B4-BE49-F238E27FC236}">
-                <a16:creationId xmlns:a16="http://schemas.microsoft.com/office/drawing/2014/main" id="{B507DD56-7820-5692-DAEE-B6510B842E8D}"/>
+                <a16:creationId xmlns:a16="http://schemas.microsoft.com/office/drawing/2014/main" id="{D47F9D27-CA53-9379-5F74-AA9A7F32B3C0}"/>
               </a:ext>
             </a:extLst>
           </p:cNvPr>
@@ -31169,7 +31625,7 @@
           <p:cNvPr id="19" name="四角形: 角を丸くする 18">
             <a:extLst>
               <a:ext uri="{FF2B5EF4-FFF2-40B4-BE49-F238E27FC236}">
-                <a16:creationId xmlns:a16="http://schemas.microsoft.com/office/drawing/2014/main" id="{C739A71F-14E5-BC15-8C0C-88D5C637E50E}"/>
+                <a16:creationId xmlns:a16="http://schemas.microsoft.com/office/drawing/2014/main" id="{404CE544-A025-A9F2-B527-8B535EE221C0}"/>
               </a:ext>
             </a:extLst>
           </p:cNvPr>
@@ -31225,7 +31681,7 @@
           <p:cNvPr id="20" name="テキスト ボックス 19">
             <a:extLst>
               <a:ext uri="{FF2B5EF4-FFF2-40B4-BE49-F238E27FC236}">
-                <a16:creationId xmlns:a16="http://schemas.microsoft.com/office/drawing/2014/main" id="{3F9BC30E-2BFD-F62C-FAA5-E2D28AF00661}"/>
+                <a16:creationId xmlns:a16="http://schemas.microsoft.com/office/drawing/2014/main" id="{D1076B3A-81E7-70FC-EE4C-23DCC5216943}"/>
               </a:ext>
             </a:extLst>
           </p:cNvPr>
@@ -31285,7 +31741,7 @@
           <p:cNvPr id="21" name="テキスト ボックス 20">
             <a:extLst>
               <a:ext uri="{FF2B5EF4-FFF2-40B4-BE49-F238E27FC236}">
-                <a16:creationId xmlns:a16="http://schemas.microsoft.com/office/drawing/2014/main" id="{865759A8-254B-5917-24D1-F4930B4BF247}"/>
+                <a16:creationId xmlns:a16="http://schemas.microsoft.com/office/drawing/2014/main" id="{10F89A51-C7C8-2705-C93A-84E938D8AD23}"/>
               </a:ext>
             </a:extLst>
           </p:cNvPr>
@@ -31331,7 +31787,7 @@
           <p:cNvPr id="22" name="テキスト ボックス 21">
             <a:extLst>
               <a:ext uri="{FF2B5EF4-FFF2-40B4-BE49-F238E27FC236}">
-                <a16:creationId xmlns:a16="http://schemas.microsoft.com/office/drawing/2014/main" id="{6B835C49-1D04-993F-7802-6DB0B434D835}"/>
+                <a16:creationId xmlns:a16="http://schemas.microsoft.com/office/drawing/2014/main" id="{7B49D601-9481-1721-A713-7BF477515ADB}"/>
               </a:ext>
             </a:extLst>
           </p:cNvPr>
@@ -31427,7 +31883,7 @@
           <p:cNvPr id="23" name="四角形: 角を丸くする 22">
             <a:extLst>
               <a:ext uri="{FF2B5EF4-FFF2-40B4-BE49-F238E27FC236}">
-                <a16:creationId xmlns:a16="http://schemas.microsoft.com/office/drawing/2014/main" id="{55774977-83AE-5798-2A64-96843BBC8EF4}"/>
+                <a16:creationId xmlns:a16="http://schemas.microsoft.com/office/drawing/2014/main" id="{30532CA0-BB07-FF7B-5DB8-47F3AE3DED6C}"/>
               </a:ext>
             </a:extLst>
           </p:cNvPr>
@@ -31483,7 +31939,7 @@
           <p:cNvPr id="24" name="テキスト ボックス 23">
             <a:extLst>
               <a:ext uri="{FF2B5EF4-FFF2-40B4-BE49-F238E27FC236}">
-                <a16:creationId xmlns:a16="http://schemas.microsoft.com/office/drawing/2014/main" id="{253F7E63-B203-B619-2AE5-0F0A9B4C3B19}"/>
+                <a16:creationId xmlns:a16="http://schemas.microsoft.com/office/drawing/2014/main" id="{AF7AFD78-47AF-3309-B85E-EE4AC8DF1192}"/>
               </a:ext>
             </a:extLst>
           </p:cNvPr>
@@ -31543,7 +31999,7 @@
           <p:cNvPr id="25" name="テキスト ボックス 24">
             <a:extLst>
               <a:ext uri="{FF2B5EF4-FFF2-40B4-BE49-F238E27FC236}">
-                <a16:creationId xmlns:a16="http://schemas.microsoft.com/office/drawing/2014/main" id="{15AA5C43-09BA-7284-8D71-ACFA3BB8D17B}"/>
+                <a16:creationId xmlns:a16="http://schemas.microsoft.com/office/drawing/2014/main" id="{C31F160E-6554-4912-8EB8-1F131CCFF73F}"/>
               </a:ext>
             </a:extLst>
           </p:cNvPr>
@@ -31589,7 +32045,7 @@
           <p:cNvPr id="26" name="テキスト ボックス 25">
             <a:extLst>
               <a:ext uri="{FF2B5EF4-FFF2-40B4-BE49-F238E27FC236}">
-                <a16:creationId xmlns:a16="http://schemas.microsoft.com/office/drawing/2014/main" id="{ED63CEE3-C324-1A94-F8E8-C1EF5FF9B832}"/>
+                <a16:creationId xmlns:a16="http://schemas.microsoft.com/office/drawing/2014/main" id="{EC5F7B41-7074-0DA9-7B9B-CDF0888F2992}"/>
               </a:ext>
             </a:extLst>
           </p:cNvPr>
@@ -31685,7 +32141,7 @@
           <p:cNvPr id="27" name="四角形: 角を丸くする 26">
             <a:extLst>
               <a:ext uri="{FF2B5EF4-FFF2-40B4-BE49-F238E27FC236}">
-                <a16:creationId xmlns:a16="http://schemas.microsoft.com/office/drawing/2014/main" id="{5BBCEACC-F789-C1B6-9478-7EBEEAFDBE8B}"/>
+                <a16:creationId xmlns:a16="http://schemas.microsoft.com/office/drawing/2014/main" id="{3CF7EC00-DD09-478E-7E5C-8A72317ABF3D}"/>
               </a:ext>
             </a:extLst>
           </p:cNvPr>
@@ -31755,7 +32211,7 @@
           <p:cNvPr id="28" name="正方形/長方形 27">
             <a:extLst>
               <a:ext uri="{FF2B5EF4-FFF2-40B4-BE49-F238E27FC236}">
-                <a16:creationId xmlns:a16="http://schemas.microsoft.com/office/drawing/2014/main" id="{59517A1F-72AD-3536-DB6B-46AD80F893D0}"/>
+                <a16:creationId xmlns:a16="http://schemas.microsoft.com/office/drawing/2014/main" id="{4D4710E5-80F6-078F-2043-A5C4C0C61D67}"/>
               </a:ext>
             </a:extLst>
           </p:cNvPr>
@@ -31823,7 +32279,7 @@
           <p:cNvPr id="29" name="テキスト ボックス 28">
             <a:extLst>
               <a:ext uri="{FF2B5EF4-FFF2-40B4-BE49-F238E27FC236}">
-                <a16:creationId xmlns:a16="http://schemas.microsoft.com/office/drawing/2014/main" id="{6A81BC3D-7C82-3777-F599-F2F3BAF741A3}"/>
+                <a16:creationId xmlns:a16="http://schemas.microsoft.com/office/drawing/2014/main" id="{F06FAA83-088D-5ACB-00E7-BD44EA5790E8}"/>
               </a:ext>
             </a:extLst>
           </p:cNvPr>
@@ -31869,7 +32325,7 @@
           <p:cNvPr id="30" name="テキスト ボックス 29">
             <a:extLst>
               <a:ext uri="{FF2B5EF4-FFF2-40B4-BE49-F238E27FC236}">
-                <a16:creationId xmlns:a16="http://schemas.microsoft.com/office/drawing/2014/main" id="{9905D840-79EC-93AE-2578-5E0147A18EF2}"/>
+                <a16:creationId xmlns:a16="http://schemas.microsoft.com/office/drawing/2014/main" id="{BED90B5C-39E3-8AF8-5ABC-A9190DD501E6}"/>
               </a:ext>
             </a:extLst>
           </p:cNvPr>
@@ -31953,7 +32409,7 @@
     </p:spTree>
     <p:extLst>
       <p:ext uri="{BB962C8B-B14F-4D97-AF65-F5344CB8AC3E}">
-        <p14:creationId xmlns:p14="http://schemas.microsoft.com/office/powerpoint/2010/main" val="2857577404"/>
+        <p14:creationId xmlns:p14="http://schemas.microsoft.com/office/powerpoint/2010/main" val="62160007"/>
       </p:ext>
     </p:extLst>
   </p:cSld>
@@ -31985,7 +32441,7 @@
           <p:cNvPr id="2" name="正方形/長方形 1">
             <a:extLst>
               <a:ext uri="{FF2B5EF4-FFF2-40B4-BE49-F238E27FC236}">
-                <a16:creationId xmlns:a16="http://schemas.microsoft.com/office/drawing/2014/main" id="{2C5F92B4-3C0A-3058-5EE2-CFFA4E29F7B0}"/>
+                <a16:creationId xmlns:a16="http://schemas.microsoft.com/office/drawing/2014/main" id="{578415A1-5F33-D6FF-028D-CD7979A70DDA}"/>
               </a:ext>
             </a:extLst>
           </p:cNvPr>
@@ -32053,7 +32509,7 @@
           <p:cNvPr id="3" name="正方形/長方形 2">
             <a:extLst>
               <a:ext uri="{FF2B5EF4-FFF2-40B4-BE49-F238E27FC236}">
-                <a16:creationId xmlns:a16="http://schemas.microsoft.com/office/drawing/2014/main" id="{0E4AC473-1F50-F26D-EC03-8B4355DF994B}"/>
+                <a16:creationId xmlns:a16="http://schemas.microsoft.com/office/drawing/2014/main" id="{9EF511A6-6730-ABD2-27D3-A6337E2B042D}"/>
               </a:ext>
             </a:extLst>
           </p:cNvPr>
@@ -32121,7 +32577,7 @@
           <p:cNvPr id="4" name="テキスト ボックス 3">
             <a:extLst>
               <a:ext uri="{FF2B5EF4-FFF2-40B4-BE49-F238E27FC236}">
-                <a16:creationId xmlns:a16="http://schemas.microsoft.com/office/drawing/2014/main" id="{55449374-E956-F37C-C65C-A06357D88592}"/>
+                <a16:creationId xmlns:a16="http://schemas.microsoft.com/office/drawing/2014/main" id="{64185AF6-03E6-C046-5225-6AEE936E9D2B}"/>
               </a:ext>
             </a:extLst>
           </p:cNvPr>
@@ -32174,7 +32630,7 @@
           <p:cNvPr id="5" name="テキスト ボックス 4">
             <a:extLst>
               <a:ext uri="{FF2B5EF4-FFF2-40B4-BE49-F238E27FC236}">
-                <a16:creationId xmlns:a16="http://schemas.microsoft.com/office/drawing/2014/main" id="{25C99C6D-889E-A66D-8F19-56A1B8B8A0EE}"/>
+                <a16:creationId xmlns:a16="http://schemas.microsoft.com/office/drawing/2014/main" id="{D4AAB496-0073-F8E5-CA73-6B98851F7443}"/>
               </a:ext>
             </a:extLst>
           </p:cNvPr>
@@ -32240,7 +32696,7 @@
           <p:cNvPr id="6" name="正方形/長方形 5">
             <a:extLst>
               <a:ext uri="{FF2B5EF4-FFF2-40B4-BE49-F238E27FC236}">
-                <a16:creationId xmlns:a16="http://schemas.microsoft.com/office/drawing/2014/main" id="{47847BF6-D6BD-2B65-0A85-DD6764FF9483}"/>
+                <a16:creationId xmlns:a16="http://schemas.microsoft.com/office/drawing/2014/main" id="{96AF8545-4025-5C98-F880-21499F2CD684}"/>
               </a:ext>
             </a:extLst>
           </p:cNvPr>
@@ -32308,7 +32764,7 @@
           <p:cNvPr id="7" name="四角形: 角を丸くする 6">
             <a:extLst>
               <a:ext uri="{FF2B5EF4-FFF2-40B4-BE49-F238E27FC236}">
-                <a16:creationId xmlns:a16="http://schemas.microsoft.com/office/drawing/2014/main" id="{2042C0D6-EEDD-CDB2-14B1-BE0A947DEC9C}"/>
+                <a16:creationId xmlns:a16="http://schemas.microsoft.com/office/drawing/2014/main" id="{F8F10CCB-E2D4-6B84-71AD-6C657465C47D}"/>
               </a:ext>
             </a:extLst>
           </p:cNvPr>
@@ -32378,7 +32834,7 @@
           <p:cNvPr id="8" name="テキスト ボックス 7">
             <a:extLst>
               <a:ext uri="{FF2B5EF4-FFF2-40B4-BE49-F238E27FC236}">
-                <a16:creationId xmlns:a16="http://schemas.microsoft.com/office/drawing/2014/main" id="{CD2DA386-9E3D-86E4-19F8-05357FA44076}"/>
+                <a16:creationId xmlns:a16="http://schemas.microsoft.com/office/drawing/2014/main" id="{42154160-379A-22A0-905D-6A341FB820CF}"/>
               </a:ext>
             </a:extLst>
           </p:cNvPr>
@@ -32424,7 +32880,7 @@
           <p:cNvPr id="9" name="テキスト ボックス 8">
             <a:extLst>
               <a:ext uri="{FF2B5EF4-FFF2-40B4-BE49-F238E27FC236}">
-                <a16:creationId xmlns:a16="http://schemas.microsoft.com/office/drawing/2014/main" id="{CB0A9352-158B-EABB-1F0C-D468BE76A865}"/>
+                <a16:creationId xmlns:a16="http://schemas.microsoft.com/office/drawing/2014/main" id="{632D1B22-9C89-AD51-FAE3-75D71CDDD8B7}"/>
               </a:ext>
             </a:extLst>
           </p:cNvPr>
@@ -32470,7 +32926,7 @@
           <p:cNvPr id="10" name="テキスト ボックス 9">
             <a:extLst>
               <a:ext uri="{FF2B5EF4-FFF2-40B4-BE49-F238E27FC236}">
-                <a16:creationId xmlns:a16="http://schemas.microsoft.com/office/drawing/2014/main" id="{0592B403-4656-25A5-DABF-C9DFC6C9380B}"/>
+                <a16:creationId xmlns:a16="http://schemas.microsoft.com/office/drawing/2014/main" id="{B491E559-4643-BDDF-7FDD-028023254E9B}"/>
               </a:ext>
             </a:extLst>
           </p:cNvPr>
@@ -32523,7 +32979,7 @@
           <p:cNvPr id="11" name="四角形: 角を丸くする 10">
             <a:extLst>
               <a:ext uri="{FF2B5EF4-FFF2-40B4-BE49-F238E27FC236}">
-                <a16:creationId xmlns:a16="http://schemas.microsoft.com/office/drawing/2014/main" id="{3F9F1579-75CF-29E0-5603-75D8E1C5A873}"/>
+                <a16:creationId xmlns:a16="http://schemas.microsoft.com/office/drawing/2014/main" id="{848CBE09-3C03-C979-12F2-389C61DE89DB}"/>
               </a:ext>
             </a:extLst>
           </p:cNvPr>
@@ -32579,7 +33035,7 @@
           <p:cNvPr id="12" name="正方形/長方形 11">
             <a:extLst>
               <a:ext uri="{FF2B5EF4-FFF2-40B4-BE49-F238E27FC236}">
-                <a16:creationId xmlns:a16="http://schemas.microsoft.com/office/drawing/2014/main" id="{F243FC59-6F58-21B0-306F-5178E9C0DD1B}"/>
+                <a16:creationId xmlns:a16="http://schemas.microsoft.com/office/drawing/2014/main" id="{318072C3-FF00-3CC5-D34F-625DFB47B304}"/>
               </a:ext>
             </a:extLst>
           </p:cNvPr>
@@ -32647,7 +33103,7 @@
           <p:cNvPr id="13" name="テキスト ボックス 12">
             <a:extLst>
               <a:ext uri="{FF2B5EF4-FFF2-40B4-BE49-F238E27FC236}">
-                <a16:creationId xmlns:a16="http://schemas.microsoft.com/office/drawing/2014/main" id="{ECAB7749-7DBD-E7FF-E303-22D158BECFE4}"/>
+                <a16:creationId xmlns:a16="http://schemas.microsoft.com/office/drawing/2014/main" id="{F3F885CF-69DB-4D4F-87E8-FFA947604296}"/>
               </a:ext>
             </a:extLst>
           </p:cNvPr>
@@ -32693,7 +33149,7 @@
           <p:cNvPr id="14" name="テキスト ボックス 13">
             <a:extLst>
               <a:ext uri="{FF2B5EF4-FFF2-40B4-BE49-F238E27FC236}">
-                <a16:creationId xmlns:a16="http://schemas.microsoft.com/office/drawing/2014/main" id="{6D32E54D-E3A5-628D-AADD-42F389AB980B}"/>
+                <a16:creationId xmlns:a16="http://schemas.microsoft.com/office/drawing/2014/main" id="{475B166A-9BEF-FA33-3F1D-5FDC1F0772D2}"/>
               </a:ext>
             </a:extLst>
           </p:cNvPr>
@@ -32739,7 +33195,7 @@
           <p:cNvPr id="15" name="四角形: 角を丸くする 14">
             <a:extLst>
               <a:ext uri="{FF2B5EF4-FFF2-40B4-BE49-F238E27FC236}">
-                <a16:creationId xmlns:a16="http://schemas.microsoft.com/office/drawing/2014/main" id="{82E40459-51FF-6B70-0A4F-C55849B79C8E}"/>
+                <a16:creationId xmlns:a16="http://schemas.microsoft.com/office/drawing/2014/main" id="{D6638519-FB77-F80C-2F62-294228799157}"/>
               </a:ext>
             </a:extLst>
           </p:cNvPr>
@@ -32795,7 +33251,7 @@
           <p:cNvPr id="16" name="正方形/長方形 15">
             <a:extLst>
               <a:ext uri="{FF2B5EF4-FFF2-40B4-BE49-F238E27FC236}">
-                <a16:creationId xmlns:a16="http://schemas.microsoft.com/office/drawing/2014/main" id="{B0DAC9A2-A0C7-A756-E41D-D62242AED3E6}"/>
+                <a16:creationId xmlns:a16="http://schemas.microsoft.com/office/drawing/2014/main" id="{D8AC92BD-1E99-3E91-8B57-659BA259CC7C}"/>
               </a:ext>
             </a:extLst>
           </p:cNvPr>
@@ -32863,7 +33319,7 @@
           <p:cNvPr id="17" name="テキスト ボックス 16">
             <a:extLst>
               <a:ext uri="{FF2B5EF4-FFF2-40B4-BE49-F238E27FC236}">
-                <a16:creationId xmlns:a16="http://schemas.microsoft.com/office/drawing/2014/main" id="{D8E8B22B-4A05-9711-E69B-07722E3CD561}"/>
+                <a16:creationId xmlns:a16="http://schemas.microsoft.com/office/drawing/2014/main" id="{D19DCDEF-9152-B941-BE9B-5FEB3F2FF3A9}"/>
               </a:ext>
             </a:extLst>
           </p:cNvPr>
@@ -32909,7 +33365,7 @@
           <p:cNvPr id="18" name="テキスト ボックス 17">
             <a:extLst>
               <a:ext uri="{FF2B5EF4-FFF2-40B4-BE49-F238E27FC236}">
-                <a16:creationId xmlns:a16="http://schemas.microsoft.com/office/drawing/2014/main" id="{12965AE8-8868-7AE1-5FCD-D1CC37116AD2}"/>
+                <a16:creationId xmlns:a16="http://schemas.microsoft.com/office/drawing/2014/main" id="{2892F50E-2C35-16DA-DBD3-4287A3595507}"/>
               </a:ext>
             </a:extLst>
           </p:cNvPr>
@@ -32955,7 +33411,7 @@
           <p:cNvPr id="19" name="四角形: 角を丸くする 18">
             <a:extLst>
               <a:ext uri="{FF2B5EF4-FFF2-40B4-BE49-F238E27FC236}">
-                <a16:creationId xmlns:a16="http://schemas.microsoft.com/office/drawing/2014/main" id="{CEF64AD1-A24F-5BE8-F0FA-CD7AA6057AFD}"/>
+                <a16:creationId xmlns:a16="http://schemas.microsoft.com/office/drawing/2014/main" id="{8ABD15E1-AB5B-3916-B95C-F0F13F9AF981}"/>
               </a:ext>
             </a:extLst>
           </p:cNvPr>
@@ -33011,7 +33467,7 @@
           <p:cNvPr id="20" name="正方形/長方形 19">
             <a:extLst>
               <a:ext uri="{FF2B5EF4-FFF2-40B4-BE49-F238E27FC236}">
-                <a16:creationId xmlns:a16="http://schemas.microsoft.com/office/drawing/2014/main" id="{6F6C2CA0-9523-8FA9-B55D-4D958DA6CD6E}"/>
+                <a16:creationId xmlns:a16="http://schemas.microsoft.com/office/drawing/2014/main" id="{2BE5294C-1EE4-EFA9-D427-1FBFAB695250}"/>
               </a:ext>
             </a:extLst>
           </p:cNvPr>
@@ -33079,7 +33535,7 @@
           <p:cNvPr id="21" name="テキスト ボックス 20">
             <a:extLst>
               <a:ext uri="{FF2B5EF4-FFF2-40B4-BE49-F238E27FC236}">
-                <a16:creationId xmlns:a16="http://schemas.microsoft.com/office/drawing/2014/main" id="{CCB0746C-53E7-696E-63A4-1DC14DF227E3}"/>
+                <a16:creationId xmlns:a16="http://schemas.microsoft.com/office/drawing/2014/main" id="{37CFE45D-A597-E95D-4763-D228DEEB74E0}"/>
               </a:ext>
             </a:extLst>
           </p:cNvPr>
@@ -33125,7 +33581,7 @@
           <p:cNvPr id="22" name="テキスト ボックス 21">
             <a:extLst>
               <a:ext uri="{FF2B5EF4-FFF2-40B4-BE49-F238E27FC236}">
-                <a16:creationId xmlns:a16="http://schemas.microsoft.com/office/drawing/2014/main" id="{50B5B361-0165-F616-3133-6A76374402C6}"/>
+                <a16:creationId xmlns:a16="http://schemas.microsoft.com/office/drawing/2014/main" id="{9BD14848-B51E-A932-E7D7-1E2BA2CAFFBF}"/>
               </a:ext>
             </a:extLst>
           </p:cNvPr>
@@ -33169,7 +33625,7 @@
     </p:spTree>
     <p:extLst>
       <p:ext uri="{BB962C8B-B14F-4D97-AF65-F5344CB8AC3E}">
-        <p14:creationId xmlns:p14="http://schemas.microsoft.com/office/powerpoint/2010/main" val="2676223448"/>
+        <p14:creationId xmlns:p14="http://schemas.microsoft.com/office/powerpoint/2010/main" val="198105085"/>
       </p:ext>
     </p:extLst>
   </p:cSld>
